--- a/paper/slides/compiling-recurrent-agent-workflows-into-guarded-programs-detailed.pptx
+++ b/paper/slides/compiling-recurrent-agent-workflows-into-guarded-programs-detailed.pptx
@@ -2,34 +2,34 @@
 <file path=ppt/presentation.xml><?xml version="1.0" encoding="utf-8"?>
 <p:presentation xmlns:p="http://schemas.openxmlformats.org/presentationml/2006/main">
   <p:sldMasterIdLst>
-    <p:sldMasterId xmlns:r="http://schemas.openxmlformats.org/officeDocument/2006/relationships" id="2147483648" r:id="R4d54938c56c1459f"/>
+    <p:sldMasterId xmlns:r="http://schemas.openxmlformats.org/officeDocument/2006/relationships" id="2147483648" r:id="Ra9bb0e45c929450e"/>
   </p:sldMasterIdLst>
   <p:notesMasterIdLst>
-    <p:notesMasterId xmlns:r="http://schemas.openxmlformats.org/officeDocument/2006/relationships" r:id="Rd1b1ba0ed3664dcf"/>
+    <p:notesMasterId xmlns:r="http://schemas.openxmlformats.org/officeDocument/2006/relationships" r:id="Rca1a7b9222444fff"/>
   </p:notesMasterIdLst>
   <p:sldIdLst>
-    <p:sldId xmlns:r="http://schemas.openxmlformats.org/officeDocument/2006/relationships" id="256" r:id="Ra8075f56125e4c50"/>
-    <p:sldId xmlns:r="http://schemas.openxmlformats.org/officeDocument/2006/relationships" id="257" r:id="Ra3cc7db8dc2c4345"/>
-    <p:sldId xmlns:r="http://schemas.openxmlformats.org/officeDocument/2006/relationships" id="258" r:id="R24bcf55c67484055"/>
-    <p:sldId xmlns:r="http://schemas.openxmlformats.org/officeDocument/2006/relationships" id="259" r:id="Rcde26e5d0f334ded"/>
-    <p:sldId xmlns:r="http://schemas.openxmlformats.org/officeDocument/2006/relationships" id="260" r:id="R5ebed289247a4f9e"/>
-    <p:sldId xmlns:r="http://schemas.openxmlformats.org/officeDocument/2006/relationships" id="261" r:id="R779d44e2f06a4e0c"/>
-    <p:sldId xmlns:r="http://schemas.openxmlformats.org/officeDocument/2006/relationships" id="262" r:id="Ra6e58c26d82d42e5"/>
-    <p:sldId xmlns:r="http://schemas.openxmlformats.org/officeDocument/2006/relationships" id="263" r:id="R849e1870b40b4df1"/>
-    <p:sldId xmlns:r="http://schemas.openxmlformats.org/officeDocument/2006/relationships" id="264" r:id="R9eaae41acc684bf1"/>
-    <p:sldId xmlns:r="http://schemas.openxmlformats.org/officeDocument/2006/relationships" id="265" r:id="R4e9a00344afa4523"/>
-    <p:sldId xmlns:r="http://schemas.openxmlformats.org/officeDocument/2006/relationships" id="266" r:id="Ra2ae5e7bb8624656"/>
-    <p:sldId xmlns:r="http://schemas.openxmlformats.org/officeDocument/2006/relationships" id="267" r:id="Rf8ef055cc7b34e10"/>
-    <p:sldId xmlns:r="http://schemas.openxmlformats.org/officeDocument/2006/relationships" id="268" r:id="R953652ed69c345b0"/>
-    <p:sldId xmlns:r="http://schemas.openxmlformats.org/officeDocument/2006/relationships" id="269" r:id="R066e56a96d044836"/>
-    <p:sldId xmlns:r="http://schemas.openxmlformats.org/officeDocument/2006/relationships" id="270" r:id="R6f2f1fcad0da4cd1"/>
-    <p:sldId xmlns:r="http://schemas.openxmlformats.org/officeDocument/2006/relationships" id="271" r:id="R4d42602ddf874cd8"/>
-    <p:sldId xmlns:r="http://schemas.openxmlformats.org/officeDocument/2006/relationships" id="272" r:id="Rd18f029871f04eab"/>
-    <p:sldId xmlns:r="http://schemas.openxmlformats.org/officeDocument/2006/relationships" id="273" r:id="R5514ffbc36c740d3"/>
-    <p:sldId xmlns:r="http://schemas.openxmlformats.org/officeDocument/2006/relationships" id="274" r:id="R1e15875a64f84d00"/>
-    <p:sldId xmlns:r="http://schemas.openxmlformats.org/officeDocument/2006/relationships" id="275" r:id="Rb2ad3f82a6c44335"/>
-    <p:sldId xmlns:r="http://schemas.openxmlformats.org/officeDocument/2006/relationships" id="276" r:id="Rbeb39582c7fa4bae"/>
-    <p:sldId xmlns:r="http://schemas.openxmlformats.org/officeDocument/2006/relationships" id="277" r:id="Raaab8223c23747c0"/>
+    <p:sldId xmlns:r="http://schemas.openxmlformats.org/officeDocument/2006/relationships" id="256" r:id="Rcb51420c19624b63"/>
+    <p:sldId xmlns:r="http://schemas.openxmlformats.org/officeDocument/2006/relationships" id="257" r:id="R4802bf8ff5994c35"/>
+    <p:sldId xmlns:r="http://schemas.openxmlformats.org/officeDocument/2006/relationships" id="258" r:id="R8cb28e5efc3d4d99"/>
+    <p:sldId xmlns:r="http://schemas.openxmlformats.org/officeDocument/2006/relationships" id="259" r:id="R765fec7264884c7a"/>
+    <p:sldId xmlns:r="http://schemas.openxmlformats.org/officeDocument/2006/relationships" id="260" r:id="R4a769563cde34f1b"/>
+    <p:sldId xmlns:r="http://schemas.openxmlformats.org/officeDocument/2006/relationships" id="261" r:id="R4017ceee328a4087"/>
+    <p:sldId xmlns:r="http://schemas.openxmlformats.org/officeDocument/2006/relationships" id="262" r:id="R97cf76d9a9a146a0"/>
+    <p:sldId xmlns:r="http://schemas.openxmlformats.org/officeDocument/2006/relationships" id="263" r:id="R089ce10aeb514008"/>
+    <p:sldId xmlns:r="http://schemas.openxmlformats.org/officeDocument/2006/relationships" id="264" r:id="Rb7aa03ada7554b59"/>
+    <p:sldId xmlns:r="http://schemas.openxmlformats.org/officeDocument/2006/relationships" id="265" r:id="Re0139a272f294468"/>
+    <p:sldId xmlns:r="http://schemas.openxmlformats.org/officeDocument/2006/relationships" id="266" r:id="R19c3e053d3ff4d71"/>
+    <p:sldId xmlns:r="http://schemas.openxmlformats.org/officeDocument/2006/relationships" id="267" r:id="R638f4652f4b441f2"/>
+    <p:sldId xmlns:r="http://schemas.openxmlformats.org/officeDocument/2006/relationships" id="268" r:id="R56284e1bb8d2451f"/>
+    <p:sldId xmlns:r="http://schemas.openxmlformats.org/officeDocument/2006/relationships" id="269" r:id="Rc7fd36e12b954ef5"/>
+    <p:sldId xmlns:r="http://schemas.openxmlformats.org/officeDocument/2006/relationships" id="270" r:id="R61d5ecff382e4281"/>
+    <p:sldId xmlns:r="http://schemas.openxmlformats.org/officeDocument/2006/relationships" id="271" r:id="R6801cf0657e3470d"/>
+    <p:sldId xmlns:r="http://schemas.openxmlformats.org/officeDocument/2006/relationships" id="272" r:id="R83eea0d5099e4ea3"/>
+    <p:sldId xmlns:r="http://schemas.openxmlformats.org/officeDocument/2006/relationships" id="273" r:id="Rf9f74f562a714c86"/>
+    <p:sldId xmlns:r="http://schemas.openxmlformats.org/officeDocument/2006/relationships" id="274" r:id="R35549c2f6ce94626"/>
+    <p:sldId xmlns:r="http://schemas.openxmlformats.org/officeDocument/2006/relationships" id="275" r:id="R5e08d3d3a6c34576"/>
+    <p:sldId xmlns:r="http://schemas.openxmlformats.org/officeDocument/2006/relationships" id="276" r:id="R20e7f49dd7044cd9"/>
+    <p:sldId xmlns:r="http://schemas.openxmlformats.org/officeDocument/2006/relationships" id="277" r:id="R585f0d2f8d3a4933"/>
   </p:sldIdLst>
   <p:sldSz cx="12192000" cy="6858000"/>
   <p:notesSz cx="6858000" cy="9144000"/>
@@ -2001,7 +2001,7 @@
   </p:cSld>
   <p:clrMap bg1="lt1" tx1="dk1" bg2="lt2" tx2="dk2" accent1="accent1" accent2="accent2" accent3="accent3" accent4="accent4" accent5="accent5" accent6="accent6" hlink="hlink" folHlink="folHlink"/>
   <p:sldLayoutIdLst>
-    <p:sldLayoutId xmlns:r="http://schemas.openxmlformats.org/officeDocument/2006/relationships" id="2147483649" r:id="Rd722325d7cf64591"/>
+    <p:sldLayoutId xmlns:r="http://schemas.openxmlformats.org/officeDocument/2006/relationships" id="2147483649" r:id="R42d7494af79544c4"/>
   </p:sldLayoutIdLst>
   <p:txStyles>
     <p:titleStyle>
@@ -3434,7 +3434,7 @@
           <p:cNvPr id="2" name="Shape 0">
             <a:extLst xmlns:a="http://schemas.openxmlformats.org/drawingml/2006/main">
               <a:ext uri="{FF2B5EF4-FFF2-40B4-BE49-F238E27FC236}">
-                <a16:creationId xmlns:a16="http://schemas.microsoft.com/office/drawing/2014/main" id="{D61F51B4-D095-4C69-8F36-3748018B997E}"/>
+                <a16:creationId xmlns:a16="http://schemas.microsoft.com/office/drawing/2014/main" id="{37A96FFC-7730-483E-960D-0A9C62195BE9}"/>
               </a:ext>
             </a:extLst>
           </p:cNvPr>
@@ -3474,7 +3474,7 @@
           <p:cNvPr id="3" name="Shape 1">
             <a:extLst xmlns:a="http://schemas.openxmlformats.org/drawingml/2006/main">
               <a:ext uri="{FF2B5EF4-FFF2-40B4-BE49-F238E27FC236}">
-                <a16:creationId xmlns:a16="http://schemas.microsoft.com/office/drawing/2014/main" id="{BAAB226B-BD0B-4577-B0D1-DA6270C7958B}"/>
+                <a16:creationId xmlns:a16="http://schemas.microsoft.com/office/drawing/2014/main" id="{E651BB87-0533-481B-B52D-CA8003BA0C39}"/>
               </a:ext>
             </a:extLst>
           </p:cNvPr>
@@ -3514,7 +3514,7 @@
           <p:cNvPr id="4" name="Shape 2">
             <a:extLst xmlns:a="http://schemas.openxmlformats.org/drawingml/2006/main">
               <a:ext uri="{FF2B5EF4-FFF2-40B4-BE49-F238E27FC236}">
-                <a16:creationId xmlns:a16="http://schemas.microsoft.com/office/drawing/2014/main" id="{6E1D850B-C7F1-40AB-88C8-719E258C0B1D}"/>
+                <a16:creationId xmlns:a16="http://schemas.microsoft.com/office/drawing/2014/main" id="{A03FB4E2-E6E3-46DF-A8C2-DF5F6C8A34DB}"/>
               </a:ext>
             </a:extLst>
           </p:cNvPr>
@@ -3554,7 +3554,7 @@
           <p:cNvPr id="5" name="Text 3">
             <a:extLst xmlns:a="http://schemas.openxmlformats.org/drawingml/2006/main">
               <a:ext uri="{FF2B5EF4-FFF2-40B4-BE49-F238E27FC236}">
-                <a16:creationId xmlns:a16="http://schemas.microsoft.com/office/drawing/2014/main" id="{57D06B23-2FB0-44DA-B867-50D356754394}"/>
+                <a16:creationId xmlns:a16="http://schemas.microsoft.com/office/drawing/2014/main" id="{06E99279-C5ED-4AC5-B9AB-523DED183FA6}"/>
               </a:ext>
             </a:extLst>
           </p:cNvPr>
@@ -3599,7 +3599,7 @@
           <p:cNvPr id="6" name="Text 4">
             <a:extLst xmlns:a="http://schemas.openxmlformats.org/drawingml/2006/main">
               <a:ext uri="{FF2B5EF4-FFF2-40B4-BE49-F238E27FC236}">
-                <a16:creationId xmlns:a16="http://schemas.microsoft.com/office/drawing/2014/main" id="{5F6A5AA7-77FF-4601-89D8-D37F5D471A6C}"/>
+                <a16:creationId xmlns:a16="http://schemas.microsoft.com/office/drawing/2014/main" id="{07575474-6E93-410B-85B8-5DA4D5EAC580}"/>
               </a:ext>
             </a:extLst>
           </p:cNvPr>
@@ -3647,7 +3647,7 @@
           <p:cNvPr id="7" name="Text 5">
             <a:extLst xmlns:a="http://schemas.openxmlformats.org/drawingml/2006/main">
               <a:ext uri="{FF2B5EF4-FFF2-40B4-BE49-F238E27FC236}">
-                <a16:creationId xmlns:a16="http://schemas.microsoft.com/office/drawing/2014/main" id="{B0321330-7E06-4AD7-87C8-7ED9B9084749}"/>
+                <a16:creationId xmlns:a16="http://schemas.microsoft.com/office/drawing/2014/main" id="{895456CF-CE09-4ECA-BFB8-9062BC9240CF}"/>
               </a:ext>
             </a:extLst>
           </p:cNvPr>
@@ -3706,7 +3706,7 @@
           <p:cNvPr id="8" name="Text 6">
             <a:extLst xmlns:a="http://schemas.openxmlformats.org/drawingml/2006/main">
               <a:ext uri="{FF2B5EF4-FFF2-40B4-BE49-F238E27FC236}">
-                <a16:creationId xmlns:a16="http://schemas.microsoft.com/office/drawing/2014/main" id="{25A009CE-16D9-4EDD-8E4C-951D18957AD3}"/>
+                <a16:creationId xmlns:a16="http://schemas.microsoft.com/office/drawing/2014/main" id="{87B51B92-B919-4E3E-BFB8-8C4D201BF9B2}"/>
               </a:ext>
             </a:extLst>
           </p:cNvPr>
@@ -3751,7 +3751,7 @@
           <p:cNvPr id="9" name="Text 7">
             <a:extLst xmlns:a="http://schemas.openxmlformats.org/drawingml/2006/main">
               <a:ext uri="{FF2B5EF4-FFF2-40B4-BE49-F238E27FC236}">
-                <a16:creationId xmlns:a16="http://schemas.microsoft.com/office/drawing/2014/main" id="{3086E477-44D5-4C15-9308-B6CBB1B1B57E}"/>
+                <a16:creationId xmlns:a16="http://schemas.microsoft.com/office/drawing/2014/main" id="{8241FEF5-7C85-48F1-8A21-370F76B428E3}"/>
               </a:ext>
             </a:extLst>
           </p:cNvPr>
@@ -3799,7 +3799,7 @@
           <p:cNvPr id="10" name="Text 8">
             <a:extLst xmlns:a="http://schemas.openxmlformats.org/drawingml/2006/main">
               <a:ext uri="{FF2B5EF4-FFF2-40B4-BE49-F238E27FC236}">
-                <a16:creationId xmlns:a16="http://schemas.microsoft.com/office/drawing/2014/main" id="{E4A916D7-57FA-4290-9891-13877C24AF45}"/>
+                <a16:creationId xmlns:a16="http://schemas.microsoft.com/office/drawing/2014/main" id="{53705B2A-9A5A-422C-8725-85402ECF31C6}"/>
               </a:ext>
             </a:extLst>
           </p:cNvPr>
@@ -3834,7 +3834,7 @@
                 <a:ea typeface="Cambria"/>
                 <a:cs typeface="Cambria"/>
               </a:rPr>
-              <a:t>5</a:t>
+              <a:t>6</a:t>
             </a:r>
           </a:p>
         </p:txBody>
@@ -3844,7 +3844,7 @@
           <p:cNvPr id="11" name="Text 9">
             <a:extLst xmlns:a="http://schemas.openxmlformats.org/drawingml/2006/main">
               <a:ext uri="{FF2B5EF4-FFF2-40B4-BE49-F238E27FC236}">
-                <a16:creationId xmlns:a16="http://schemas.microsoft.com/office/drawing/2014/main" id="{B2D3148D-E97D-462C-A163-3E90D368EFB6}"/>
+                <a16:creationId xmlns:a16="http://schemas.microsoft.com/office/drawing/2014/main" id="{6A895860-41AD-4031-B75C-A3F4BA74A281}"/>
               </a:ext>
             </a:extLst>
           </p:cNvPr>
@@ -3892,7 +3892,7 @@
           <p:cNvPr id="12" name="Text 10">
             <a:extLst xmlns:a="http://schemas.openxmlformats.org/drawingml/2006/main">
               <a:ext uri="{FF2B5EF4-FFF2-40B4-BE49-F238E27FC236}">
-                <a16:creationId xmlns:a16="http://schemas.microsoft.com/office/drawing/2014/main" id="{5F7724F2-BDDA-4CDE-80AD-D36C8ECA5150}"/>
+                <a16:creationId xmlns:a16="http://schemas.microsoft.com/office/drawing/2014/main" id="{31461C7D-BB0E-4A4E-8A81-F041A4761670}"/>
               </a:ext>
             </a:extLst>
           </p:cNvPr>
@@ -3937,7 +3937,7 @@
           <p:cNvPr id="13" name="Text 11">
             <a:extLst xmlns:a="http://schemas.openxmlformats.org/drawingml/2006/main">
               <a:ext uri="{FF2B5EF4-FFF2-40B4-BE49-F238E27FC236}">
-                <a16:creationId xmlns:a16="http://schemas.microsoft.com/office/drawing/2014/main" id="{57E88CD6-2A04-43C5-BAD1-E94416D7F578}"/>
+                <a16:creationId xmlns:a16="http://schemas.microsoft.com/office/drawing/2014/main" id="{FCF44484-5502-4BDC-B583-017A466D5159}"/>
               </a:ext>
             </a:extLst>
           </p:cNvPr>
@@ -3985,7 +3985,7 @@
           <p:cNvPr id="14" name="Text 12">
             <a:extLst xmlns:a="http://schemas.openxmlformats.org/drawingml/2006/main">
               <a:ext uri="{FF2B5EF4-FFF2-40B4-BE49-F238E27FC236}">
-                <a16:creationId xmlns:a16="http://schemas.microsoft.com/office/drawing/2014/main" id="{AF264D3D-B656-4927-9AD3-1830D37272BF}"/>
+                <a16:creationId xmlns:a16="http://schemas.microsoft.com/office/drawing/2014/main" id="{74DF5D54-7FB6-4CBC-BC68-D26EC7A82DFF}"/>
               </a:ext>
             </a:extLst>
           </p:cNvPr>
@@ -4028,7 +4028,7 @@
     </p:spTree>
     <p:extLst>
       <p:ext uri="{BB962C8B-B14F-4D97-AF65-F5344CB8AC3E}">
-        <p14:creationId xmlns:p14="http://schemas.microsoft.com/office/powerpoint/2010/main" val="92577798"/>
+        <p14:creationId xmlns:p14="http://schemas.microsoft.com/office/powerpoint/2010/main" val="826237523"/>
       </p:ext>
     </p:extLst>
   </p:cSld>
@@ -4059,7 +4059,7 @@
           <p:cNvPr id="2" name="Text 0">
             <a:extLst xmlns:a="http://schemas.openxmlformats.org/drawingml/2006/main">
               <a:ext uri="{FF2B5EF4-FFF2-40B4-BE49-F238E27FC236}">
-                <a16:creationId xmlns:a16="http://schemas.microsoft.com/office/drawing/2014/main" id="{049661B0-CE61-45B7-9E25-42CF6789ADAD}"/>
+                <a16:creationId xmlns:a16="http://schemas.microsoft.com/office/drawing/2014/main" id="{695154A0-7A2E-4C48-B5B7-42C0A1DEC56B}"/>
               </a:ext>
             </a:extLst>
           </p:cNvPr>
@@ -4104,7 +4104,7 @@
           <p:cNvPr id="3" name="Text 1">
             <a:extLst xmlns:a="http://schemas.openxmlformats.org/drawingml/2006/main">
               <a:ext uri="{FF2B5EF4-FFF2-40B4-BE49-F238E27FC236}">
-                <a16:creationId xmlns:a16="http://schemas.microsoft.com/office/drawing/2014/main" id="{858F0C2C-6ED7-4965-A025-EAE7DDF0FF66}"/>
+                <a16:creationId xmlns:a16="http://schemas.microsoft.com/office/drawing/2014/main" id="{A884D440-7D3D-4842-89B4-71516EE7F38B}"/>
               </a:ext>
             </a:extLst>
           </p:cNvPr>
@@ -4149,7 +4149,7 @@
           <p:cNvPr id="4" name="Text 2">
             <a:extLst xmlns:a="http://schemas.openxmlformats.org/drawingml/2006/main">
               <a:ext uri="{FF2B5EF4-FFF2-40B4-BE49-F238E27FC236}">
-                <a16:creationId xmlns:a16="http://schemas.microsoft.com/office/drawing/2014/main" id="{3F524438-BB9C-4B5A-A2B9-69EAC9119E7B}"/>
+                <a16:creationId xmlns:a16="http://schemas.microsoft.com/office/drawing/2014/main" id="{D4DF5CB8-80A7-4F8E-8237-F44421BB2A08}"/>
               </a:ext>
             </a:extLst>
           </p:cNvPr>
@@ -4194,7 +4194,7 @@
           <p:cNvPr id="5" name="Text 3">
             <a:extLst xmlns:a="http://schemas.openxmlformats.org/drawingml/2006/main">
               <a:ext uri="{FF2B5EF4-FFF2-40B4-BE49-F238E27FC236}">
-                <a16:creationId xmlns:a16="http://schemas.microsoft.com/office/drawing/2014/main" id="{2EF20036-DD00-49F5-BE4C-E80AB3A61423}"/>
+                <a16:creationId xmlns:a16="http://schemas.microsoft.com/office/drawing/2014/main" id="{C6F6BDB3-EE94-4AA6-BC44-B234E4991FC7}"/>
               </a:ext>
             </a:extLst>
           </p:cNvPr>
@@ -4239,7 +4239,7 @@
           <p:cNvPr id="6" name="Text 4">
             <a:extLst xmlns:a="http://schemas.openxmlformats.org/drawingml/2006/main">
               <a:ext uri="{FF2B5EF4-FFF2-40B4-BE49-F238E27FC236}">
-                <a16:creationId xmlns:a16="http://schemas.microsoft.com/office/drawing/2014/main" id="{628BD7BB-70F6-49C8-A05B-163C46FD7D0E}"/>
+                <a16:creationId xmlns:a16="http://schemas.microsoft.com/office/drawing/2014/main" id="{B1860300-071F-448A-8294-D447F2B67BD4}"/>
               </a:ext>
             </a:extLst>
           </p:cNvPr>
@@ -4284,7 +4284,7 @@
           <p:cNvPr id="7" name="Shape 5">
             <a:extLst xmlns:a="http://schemas.openxmlformats.org/drawingml/2006/main">
               <a:ext uri="{FF2B5EF4-FFF2-40B4-BE49-F238E27FC236}">
-                <a16:creationId xmlns:a16="http://schemas.microsoft.com/office/drawing/2014/main" id="{E4B709A5-763D-4EE0-903C-6395CF429107}"/>
+                <a16:creationId xmlns:a16="http://schemas.microsoft.com/office/drawing/2014/main" id="{165FFEAE-A928-4336-A4CD-33170034C641}"/>
               </a:ext>
             </a:extLst>
           </p:cNvPr>
@@ -4331,7 +4331,7 @@
           <p:cNvPr id="8" name="Text 6">
             <a:extLst xmlns:a="http://schemas.openxmlformats.org/drawingml/2006/main">
               <a:ext uri="{FF2B5EF4-FFF2-40B4-BE49-F238E27FC236}">
-                <a16:creationId xmlns:a16="http://schemas.microsoft.com/office/drawing/2014/main" id="{FB090658-3E71-45D0-AE87-4A68A07B2C6B}"/>
+                <a16:creationId xmlns:a16="http://schemas.microsoft.com/office/drawing/2014/main" id="{F3C3DE8C-892A-417E-AA5E-FC58FF107C5E}"/>
               </a:ext>
             </a:extLst>
           </p:cNvPr>
@@ -4376,7 +4376,7 @@
           <p:cNvPr id="9" name="Text 7">
             <a:extLst xmlns:a="http://schemas.openxmlformats.org/drawingml/2006/main">
               <a:ext uri="{FF2B5EF4-FFF2-40B4-BE49-F238E27FC236}">
-                <a16:creationId xmlns:a16="http://schemas.microsoft.com/office/drawing/2014/main" id="{5DA233CD-88C9-4AA4-A099-713234B3844B}"/>
+                <a16:creationId xmlns:a16="http://schemas.microsoft.com/office/drawing/2014/main" id="{7DB07FEA-8C90-413B-B7A0-4CEE0C26F9C2}"/>
               </a:ext>
             </a:extLst>
           </p:cNvPr>
@@ -4424,7 +4424,7 @@
           <p:cNvPr id="10" name="Shape 8">
             <a:extLst xmlns:a="http://schemas.openxmlformats.org/drawingml/2006/main">
               <a:ext uri="{FF2B5EF4-FFF2-40B4-BE49-F238E27FC236}">
-                <a16:creationId xmlns:a16="http://schemas.microsoft.com/office/drawing/2014/main" id="{B0E972D7-B98A-4B7F-A3CB-BA3C6E48A632}"/>
+                <a16:creationId xmlns:a16="http://schemas.microsoft.com/office/drawing/2014/main" id="{4E478AB6-204C-4F82-952A-3EF402D9C4B2}"/>
               </a:ext>
             </a:extLst>
           </p:cNvPr>
@@ -4471,7 +4471,7 @@
           <p:cNvPr id="11" name="Text 9">
             <a:extLst xmlns:a="http://schemas.openxmlformats.org/drawingml/2006/main">
               <a:ext uri="{FF2B5EF4-FFF2-40B4-BE49-F238E27FC236}">
-                <a16:creationId xmlns:a16="http://schemas.microsoft.com/office/drawing/2014/main" id="{8E42EA21-4C28-49CF-AF7B-53FDE7911472}"/>
+                <a16:creationId xmlns:a16="http://schemas.microsoft.com/office/drawing/2014/main" id="{F8CD8D52-C985-4239-A0C4-526E5513CB9F}"/>
               </a:ext>
             </a:extLst>
           </p:cNvPr>
@@ -4516,7 +4516,7 @@
           <p:cNvPr id="12" name="Text 10">
             <a:extLst xmlns:a="http://schemas.openxmlformats.org/drawingml/2006/main">
               <a:ext uri="{FF2B5EF4-FFF2-40B4-BE49-F238E27FC236}">
-                <a16:creationId xmlns:a16="http://schemas.microsoft.com/office/drawing/2014/main" id="{425D9ED0-7559-4A51-9B58-420ABFB9FE65}"/>
+                <a16:creationId xmlns:a16="http://schemas.microsoft.com/office/drawing/2014/main" id="{FF469944-39D0-4EF5-9C82-4065700975F1}"/>
               </a:ext>
             </a:extLst>
           </p:cNvPr>
@@ -4564,7 +4564,7 @@
           <p:cNvPr id="13" name="Shape 11">
             <a:extLst xmlns:a="http://schemas.openxmlformats.org/drawingml/2006/main">
               <a:ext uri="{FF2B5EF4-FFF2-40B4-BE49-F238E27FC236}">
-                <a16:creationId xmlns:a16="http://schemas.microsoft.com/office/drawing/2014/main" id="{A8A146D2-341B-4E4B-BDA6-2647286F2BA5}"/>
+                <a16:creationId xmlns:a16="http://schemas.microsoft.com/office/drawing/2014/main" id="{E155AF5F-ABDB-4ACE-B6E0-D3C6F7B3ACA9}"/>
               </a:ext>
             </a:extLst>
           </p:cNvPr>
@@ -4611,7 +4611,7 @@
           <p:cNvPr id="14" name="Text 12">
             <a:extLst xmlns:a="http://schemas.openxmlformats.org/drawingml/2006/main">
               <a:ext uri="{FF2B5EF4-FFF2-40B4-BE49-F238E27FC236}">
-                <a16:creationId xmlns:a16="http://schemas.microsoft.com/office/drawing/2014/main" id="{5F625A22-52E1-4B9C-A289-903526EE9071}"/>
+                <a16:creationId xmlns:a16="http://schemas.microsoft.com/office/drawing/2014/main" id="{C61DED31-F69E-480B-825F-945445E13C87}"/>
               </a:ext>
             </a:extLst>
           </p:cNvPr>
@@ -4656,7 +4656,7 @@
           <p:cNvPr id="15" name="Text 13">
             <a:extLst xmlns:a="http://schemas.openxmlformats.org/drawingml/2006/main">
               <a:ext uri="{FF2B5EF4-FFF2-40B4-BE49-F238E27FC236}">
-                <a16:creationId xmlns:a16="http://schemas.microsoft.com/office/drawing/2014/main" id="{2C3BBD8A-4053-4B76-83B4-BEFC403ED863}"/>
+                <a16:creationId xmlns:a16="http://schemas.microsoft.com/office/drawing/2014/main" id="{6B020A3B-26E6-44FF-A0AB-44ADA566285B}"/>
               </a:ext>
             </a:extLst>
           </p:cNvPr>
@@ -4704,7 +4704,7 @@
           <p:cNvPr id="16" name="Shape 14">
             <a:extLst xmlns:a="http://schemas.openxmlformats.org/drawingml/2006/main">
               <a:ext uri="{FF2B5EF4-FFF2-40B4-BE49-F238E27FC236}">
-                <a16:creationId xmlns:a16="http://schemas.microsoft.com/office/drawing/2014/main" id="{F308FB9F-53E3-4746-B1F4-72463ED9FC78}"/>
+                <a16:creationId xmlns:a16="http://schemas.microsoft.com/office/drawing/2014/main" id="{059DB350-E2A6-4C12-B188-ED2264B2C079}"/>
               </a:ext>
             </a:extLst>
           </p:cNvPr>
@@ -4751,7 +4751,7 @@
           <p:cNvPr id="17" name="Text 15">
             <a:extLst xmlns:a="http://schemas.openxmlformats.org/drawingml/2006/main">
               <a:ext uri="{FF2B5EF4-FFF2-40B4-BE49-F238E27FC236}">
-                <a16:creationId xmlns:a16="http://schemas.microsoft.com/office/drawing/2014/main" id="{3D55F5C7-9A45-43DA-88AF-C3BDD1FC01BA}"/>
+                <a16:creationId xmlns:a16="http://schemas.microsoft.com/office/drawing/2014/main" id="{D4A7119D-46B2-41AF-961C-1EE5E2C8D56A}"/>
               </a:ext>
             </a:extLst>
           </p:cNvPr>
@@ -4796,7 +4796,7 @@
           <p:cNvPr id="18" name="Text 16">
             <a:extLst xmlns:a="http://schemas.openxmlformats.org/drawingml/2006/main">
               <a:ext uri="{FF2B5EF4-FFF2-40B4-BE49-F238E27FC236}">
-                <a16:creationId xmlns:a16="http://schemas.microsoft.com/office/drawing/2014/main" id="{93906ABE-B956-418E-B627-785986A86B25}"/>
+                <a16:creationId xmlns:a16="http://schemas.microsoft.com/office/drawing/2014/main" id="{56B34193-8B97-476C-BA80-6EB9D0A682F2}"/>
               </a:ext>
             </a:extLst>
           </p:cNvPr>
@@ -4844,7 +4844,7 @@
           <p:cNvPr id="19" name="Shape 17">
             <a:extLst xmlns:a="http://schemas.openxmlformats.org/drawingml/2006/main">
               <a:ext uri="{FF2B5EF4-FFF2-40B4-BE49-F238E27FC236}">
-                <a16:creationId xmlns:a16="http://schemas.microsoft.com/office/drawing/2014/main" id="{9ED9D82D-EF79-4806-B2BF-B9AE7BFE3EE2}"/>
+                <a16:creationId xmlns:a16="http://schemas.microsoft.com/office/drawing/2014/main" id="{46F572A4-6B01-4216-B5C2-F5E8F4D2E0EC}"/>
               </a:ext>
             </a:extLst>
           </p:cNvPr>
@@ -4891,7 +4891,7 @@
           <p:cNvPr id="20" name="Text 18">
             <a:extLst xmlns:a="http://schemas.openxmlformats.org/drawingml/2006/main">
               <a:ext uri="{FF2B5EF4-FFF2-40B4-BE49-F238E27FC236}">
-                <a16:creationId xmlns:a16="http://schemas.microsoft.com/office/drawing/2014/main" id="{0B723998-CDBF-4A19-9871-D6DF3295AD7D}"/>
+                <a16:creationId xmlns:a16="http://schemas.microsoft.com/office/drawing/2014/main" id="{8CF29D09-FA54-4AAF-9046-0A45FF6F6434}"/>
               </a:ext>
             </a:extLst>
           </p:cNvPr>
@@ -4936,7 +4936,7 @@
           <p:cNvPr id="21" name="Text 19">
             <a:extLst xmlns:a="http://schemas.openxmlformats.org/drawingml/2006/main">
               <a:ext uri="{FF2B5EF4-FFF2-40B4-BE49-F238E27FC236}">
-                <a16:creationId xmlns:a16="http://schemas.microsoft.com/office/drawing/2014/main" id="{29B02128-77D1-465C-A1E8-16B6C2E1F1D4}"/>
+                <a16:creationId xmlns:a16="http://schemas.microsoft.com/office/drawing/2014/main" id="{73B2D974-2F0A-4360-A9FD-8631B4222A16}"/>
               </a:ext>
             </a:extLst>
           </p:cNvPr>
@@ -4984,7 +4984,7 @@
           <p:cNvPr id="22" name="Shape 20">
             <a:extLst xmlns:a="http://schemas.openxmlformats.org/drawingml/2006/main">
               <a:ext uri="{FF2B5EF4-FFF2-40B4-BE49-F238E27FC236}">
-                <a16:creationId xmlns:a16="http://schemas.microsoft.com/office/drawing/2014/main" id="{B168FC15-B5F2-4E41-B7F0-B47828256C6B}"/>
+                <a16:creationId xmlns:a16="http://schemas.microsoft.com/office/drawing/2014/main" id="{5F1EE475-2879-4447-AC90-FD681A08FA8D}"/>
               </a:ext>
             </a:extLst>
           </p:cNvPr>
@@ -5031,7 +5031,7 @@
           <p:cNvPr id="23" name="Text 21">
             <a:extLst xmlns:a="http://schemas.openxmlformats.org/drawingml/2006/main">
               <a:ext uri="{FF2B5EF4-FFF2-40B4-BE49-F238E27FC236}">
-                <a16:creationId xmlns:a16="http://schemas.microsoft.com/office/drawing/2014/main" id="{859B5BD0-6729-455B-8EBC-32D56FEF6E20}"/>
+                <a16:creationId xmlns:a16="http://schemas.microsoft.com/office/drawing/2014/main" id="{EA8FCE2F-9907-4B87-AF10-881BBE1B751A}"/>
               </a:ext>
             </a:extLst>
           </p:cNvPr>
@@ -5076,7 +5076,7 @@
           <p:cNvPr id="24" name="Text 22">
             <a:extLst xmlns:a="http://schemas.openxmlformats.org/drawingml/2006/main">
               <a:ext uri="{FF2B5EF4-FFF2-40B4-BE49-F238E27FC236}">
-                <a16:creationId xmlns:a16="http://schemas.microsoft.com/office/drawing/2014/main" id="{8C4CA187-2B7D-47BD-9AD0-1052888957C9}"/>
+                <a16:creationId xmlns:a16="http://schemas.microsoft.com/office/drawing/2014/main" id="{1FD7C09C-9FE0-4410-BF1C-2F197EF18AB2}"/>
               </a:ext>
             </a:extLst>
           </p:cNvPr>
@@ -5124,7 +5124,7 @@
           <p:cNvPr id="25" name="Text 23">
             <a:extLst xmlns:a="http://schemas.openxmlformats.org/drawingml/2006/main">
               <a:ext uri="{FF2B5EF4-FFF2-40B4-BE49-F238E27FC236}">
-                <a16:creationId xmlns:a16="http://schemas.microsoft.com/office/drawing/2014/main" id="{1F2709FB-3195-4C21-A8D1-3EA602498EBB}"/>
+                <a16:creationId xmlns:a16="http://schemas.microsoft.com/office/drawing/2014/main" id="{2677C9EE-E375-46B6-92E4-C3E2B870F52D}"/>
               </a:ext>
             </a:extLst>
           </p:cNvPr>
@@ -5169,7 +5169,7 @@
           <p:cNvPr id="26" name="Shape 24">
             <a:extLst xmlns:a="http://schemas.openxmlformats.org/drawingml/2006/main">
               <a:ext uri="{FF2B5EF4-FFF2-40B4-BE49-F238E27FC236}">
-                <a16:creationId xmlns:a16="http://schemas.microsoft.com/office/drawing/2014/main" id="{AEB1BAEE-19F7-414F-9C1E-A80B5D30F3EA}"/>
+                <a16:creationId xmlns:a16="http://schemas.microsoft.com/office/drawing/2014/main" id="{14BA02FF-DCB8-4065-A1C9-3408343F8552}"/>
               </a:ext>
             </a:extLst>
           </p:cNvPr>
@@ -5209,7 +5209,7 @@
           <p:cNvPr id="27" name="Text 25">
             <a:extLst xmlns:a="http://schemas.openxmlformats.org/drawingml/2006/main">
               <a:ext uri="{FF2B5EF4-FFF2-40B4-BE49-F238E27FC236}">
-                <a16:creationId xmlns:a16="http://schemas.microsoft.com/office/drawing/2014/main" id="{4706E754-51EC-47EA-8794-1F3EA0A2B830}"/>
+                <a16:creationId xmlns:a16="http://schemas.microsoft.com/office/drawing/2014/main" id="{5E44BABE-2004-4619-979F-1F96D118CAC3}"/>
               </a:ext>
             </a:extLst>
           </p:cNvPr>
@@ -5254,7 +5254,7 @@
           <p:cNvPr id="28" name="Shape 26">
             <a:extLst xmlns:a="http://schemas.openxmlformats.org/drawingml/2006/main">
               <a:ext uri="{FF2B5EF4-FFF2-40B4-BE49-F238E27FC236}">
-                <a16:creationId xmlns:a16="http://schemas.microsoft.com/office/drawing/2014/main" id="{713628F2-C492-48A5-ACA5-48EF1329F841}"/>
+                <a16:creationId xmlns:a16="http://schemas.microsoft.com/office/drawing/2014/main" id="{1D6CCAC4-7AD9-4030-8EA2-51460DEF087F}"/>
               </a:ext>
             </a:extLst>
           </p:cNvPr>
@@ -5294,7 +5294,7 @@
           <p:cNvPr id="29" name="Text 27">
             <a:extLst xmlns:a="http://schemas.openxmlformats.org/drawingml/2006/main">
               <a:ext uri="{FF2B5EF4-FFF2-40B4-BE49-F238E27FC236}">
-                <a16:creationId xmlns:a16="http://schemas.microsoft.com/office/drawing/2014/main" id="{010867FE-57FA-4375-8423-6F65CB25EDAF}"/>
+                <a16:creationId xmlns:a16="http://schemas.microsoft.com/office/drawing/2014/main" id="{D3F4B760-DBEE-4413-A1CB-7BDDCDE350E1}"/>
               </a:ext>
             </a:extLst>
           </p:cNvPr>
@@ -5339,7 +5339,7 @@
           <p:cNvPr id="30" name="Shape 28">
             <a:extLst xmlns:a="http://schemas.openxmlformats.org/drawingml/2006/main">
               <a:ext uri="{FF2B5EF4-FFF2-40B4-BE49-F238E27FC236}">
-                <a16:creationId xmlns:a16="http://schemas.microsoft.com/office/drawing/2014/main" id="{6C0A7DFD-1A1E-4C3A-953A-B1E33AA157DD}"/>
+                <a16:creationId xmlns:a16="http://schemas.microsoft.com/office/drawing/2014/main" id="{80B0DF48-178E-4164-9733-8614CC58E0C9}"/>
               </a:ext>
             </a:extLst>
           </p:cNvPr>
@@ -5379,7 +5379,7 @@
           <p:cNvPr id="31" name="Text 29">
             <a:extLst xmlns:a="http://schemas.openxmlformats.org/drawingml/2006/main">
               <a:ext uri="{FF2B5EF4-FFF2-40B4-BE49-F238E27FC236}">
-                <a16:creationId xmlns:a16="http://schemas.microsoft.com/office/drawing/2014/main" id="{19C4473E-EBC1-4E96-91FD-E9407199F6A1}"/>
+                <a16:creationId xmlns:a16="http://schemas.microsoft.com/office/drawing/2014/main" id="{D1BCD344-C369-4858-AA95-51E61EDFD167}"/>
               </a:ext>
             </a:extLst>
           </p:cNvPr>
@@ -5424,7 +5424,7 @@
           <p:cNvPr id="32" name="Shape 30">
             <a:extLst xmlns:a="http://schemas.openxmlformats.org/drawingml/2006/main">
               <a:ext uri="{FF2B5EF4-FFF2-40B4-BE49-F238E27FC236}">
-                <a16:creationId xmlns:a16="http://schemas.microsoft.com/office/drawing/2014/main" id="{77276FA9-7E80-493E-8305-B58B30E93E3F}"/>
+                <a16:creationId xmlns:a16="http://schemas.microsoft.com/office/drawing/2014/main" id="{73A5F320-CF5E-46B4-9D2F-9932BDCE255A}"/>
               </a:ext>
             </a:extLst>
           </p:cNvPr>
@@ -5464,7 +5464,7 @@
           <p:cNvPr id="33" name="Text 31">
             <a:extLst xmlns:a="http://schemas.openxmlformats.org/drawingml/2006/main">
               <a:ext uri="{FF2B5EF4-FFF2-40B4-BE49-F238E27FC236}">
-                <a16:creationId xmlns:a16="http://schemas.microsoft.com/office/drawing/2014/main" id="{F4963C3C-8505-4E2F-AE41-8719FC73584B}"/>
+                <a16:creationId xmlns:a16="http://schemas.microsoft.com/office/drawing/2014/main" id="{6E7D2AD8-5EBC-43C1-A6AC-789416729493}"/>
               </a:ext>
             </a:extLst>
           </p:cNvPr>
@@ -5509,7 +5509,7 @@
           <p:cNvPr id="34" name="Shape 32">
             <a:extLst xmlns:a="http://schemas.openxmlformats.org/drawingml/2006/main">
               <a:ext uri="{FF2B5EF4-FFF2-40B4-BE49-F238E27FC236}">
-                <a16:creationId xmlns:a16="http://schemas.microsoft.com/office/drawing/2014/main" id="{2AE70FCF-2D02-4321-99EB-6471D30EB820}"/>
+                <a16:creationId xmlns:a16="http://schemas.microsoft.com/office/drawing/2014/main" id="{021B38DE-7BB0-412B-BC7E-9F5335E1CD51}"/>
               </a:ext>
             </a:extLst>
           </p:cNvPr>
@@ -5549,7 +5549,7 @@
           <p:cNvPr id="35" name="Text 33">
             <a:extLst xmlns:a="http://schemas.openxmlformats.org/drawingml/2006/main">
               <a:ext uri="{FF2B5EF4-FFF2-40B4-BE49-F238E27FC236}">
-                <a16:creationId xmlns:a16="http://schemas.microsoft.com/office/drawing/2014/main" id="{A9531DAF-0EE9-44D4-B9B4-C5D52D1AC008}"/>
+                <a16:creationId xmlns:a16="http://schemas.microsoft.com/office/drawing/2014/main" id="{C3B1AB5B-AE85-4935-9373-2DA94671948B}"/>
               </a:ext>
             </a:extLst>
           </p:cNvPr>
@@ -5594,7 +5594,7 @@
           <p:cNvPr id="36" name="Shape 34">
             <a:extLst xmlns:a="http://schemas.openxmlformats.org/drawingml/2006/main">
               <a:ext uri="{FF2B5EF4-FFF2-40B4-BE49-F238E27FC236}">
-                <a16:creationId xmlns:a16="http://schemas.microsoft.com/office/drawing/2014/main" id="{4141EBE4-D02C-48F5-ABAF-410D8B09E5C4}"/>
+                <a16:creationId xmlns:a16="http://schemas.microsoft.com/office/drawing/2014/main" id="{B9DD7917-8E64-4C60-9DC7-2CC68F0F6E0B}"/>
               </a:ext>
             </a:extLst>
           </p:cNvPr>
@@ -5634,7 +5634,7 @@
           <p:cNvPr id="37" name="Text 35">
             <a:extLst xmlns:a="http://schemas.openxmlformats.org/drawingml/2006/main">
               <a:ext uri="{FF2B5EF4-FFF2-40B4-BE49-F238E27FC236}">
-                <a16:creationId xmlns:a16="http://schemas.microsoft.com/office/drawing/2014/main" id="{8D276765-BBB3-43EB-8442-5CC11841E511}"/>
+                <a16:creationId xmlns:a16="http://schemas.microsoft.com/office/drawing/2014/main" id="{665151D5-C0CC-40EB-B7CA-5FCDAB300008}"/>
               </a:ext>
             </a:extLst>
           </p:cNvPr>
@@ -5679,7 +5679,7 @@
           <p:cNvPr id="38" name="Shape 36">
             <a:extLst xmlns:a="http://schemas.openxmlformats.org/drawingml/2006/main">
               <a:ext uri="{FF2B5EF4-FFF2-40B4-BE49-F238E27FC236}">
-                <a16:creationId xmlns:a16="http://schemas.microsoft.com/office/drawing/2014/main" id="{90DF0C52-3703-4B40-AD95-356E484B53E7}"/>
+                <a16:creationId xmlns:a16="http://schemas.microsoft.com/office/drawing/2014/main" id="{1830CF1F-0B0F-430D-B080-34221F936CC6}"/>
               </a:ext>
             </a:extLst>
           </p:cNvPr>
@@ -5726,7 +5726,7 @@
           <p:cNvPr id="39" name="Text 37">
             <a:extLst xmlns:a="http://schemas.openxmlformats.org/drawingml/2006/main">
               <a:ext uri="{FF2B5EF4-FFF2-40B4-BE49-F238E27FC236}">
-                <a16:creationId xmlns:a16="http://schemas.microsoft.com/office/drawing/2014/main" id="{46CBF3C6-9AB2-4ECB-BA6E-8160B9917F04}"/>
+                <a16:creationId xmlns:a16="http://schemas.microsoft.com/office/drawing/2014/main" id="{C6D6FF7E-3137-4606-AA29-26301ED068AE}"/>
               </a:ext>
             </a:extLst>
           </p:cNvPr>
@@ -5771,7 +5771,7 @@
           <p:cNvPr id="40" name="Text 38">
             <a:extLst xmlns:a="http://schemas.openxmlformats.org/drawingml/2006/main">
               <a:ext uri="{FF2B5EF4-FFF2-40B4-BE49-F238E27FC236}">
-                <a16:creationId xmlns:a16="http://schemas.microsoft.com/office/drawing/2014/main" id="{B76F8E3E-0710-4BCD-A8E8-186921F97308}"/>
+                <a16:creationId xmlns:a16="http://schemas.microsoft.com/office/drawing/2014/main" id="{C11B04BD-4487-440C-BA6C-231A95DE8CB3}"/>
               </a:ext>
             </a:extLst>
           </p:cNvPr>
@@ -5816,7 +5816,7 @@
           <p:cNvPr id="41" name="Text 39">
             <a:extLst xmlns:a="http://schemas.openxmlformats.org/drawingml/2006/main">
               <a:ext uri="{FF2B5EF4-FFF2-40B4-BE49-F238E27FC236}">
-                <a16:creationId xmlns:a16="http://schemas.microsoft.com/office/drawing/2014/main" id="{BC80364D-6FB5-4CED-8938-57B689ECE036}"/>
+                <a16:creationId xmlns:a16="http://schemas.microsoft.com/office/drawing/2014/main" id="{89043934-1418-4143-98A1-3E9F5B7CDCF1}"/>
               </a:ext>
             </a:extLst>
           </p:cNvPr>
@@ -5864,7 +5864,7 @@
           <p:cNvPr id="42" name="Shape 40">
             <a:extLst xmlns:a="http://schemas.openxmlformats.org/drawingml/2006/main">
               <a:ext uri="{FF2B5EF4-FFF2-40B4-BE49-F238E27FC236}">
-                <a16:creationId xmlns:a16="http://schemas.microsoft.com/office/drawing/2014/main" id="{15498B2B-F394-4341-BAFF-F1E6B3D9FC4C}"/>
+                <a16:creationId xmlns:a16="http://schemas.microsoft.com/office/drawing/2014/main" id="{8CE5FBE7-51A7-4F05-A3AD-D2ED3EC66441}"/>
               </a:ext>
             </a:extLst>
           </p:cNvPr>
@@ -5911,7 +5911,7 @@
           <p:cNvPr id="43" name="Text 41">
             <a:extLst xmlns:a="http://schemas.openxmlformats.org/drawingml/2006/main">
               <a:ext uri="{FF2B5EF4-FFF2-40B4-BE49-F238E27FC236}">
-                <a16:creationId xmlns:a16="http://schemas.microsoft.com/office/drawing/2014/main" id="{E84D0347-8812-4434-8E6C-67D2E349B06C}"/>
+                <a16:creationId xmlns:a16="http://schemas.microsoft.com/office/drawing/2014/main" id="{D1E8289A-219F-437F-BCAC-5F8A1C8B005B}"/>
               </a:ext>
             </a:extLst>
           </p:cNvPr>
@@ -5956,7 +5956,7 @@
           <p:cNvPr id="44" name="Text 42">
             <a:extLst xmlns:a="http://schemas.openxmlformats.org/drawingml/2006/main">
               <a:ext uri="{FF2B5EF4-FFF2-40B4-BE49-F238E27FC236}">
-                <a16:creationId xmlns:a16="http://schemas.microsoft.com/office/drawing/2014/main" id="{C7324708-67DD-4E26-9678-A99C31232BBE}"/>
+                <a16:creationId xmlns:a16="http://schemas.microsoft.com/office/drawing/2014/main" id="{7E926325-2318-4683-96CA-5D17E4196F1B}"/>
               </a:ext>
             </a:extLst>
           </p:cNvPr>
@@ -6001,7 +6001,7 @@
           <p:cNvPr id="45" name="Text 43">
             <a:extLst xmlns:a="http://schemas.openxmlformats.org/drawingml/2006/main">
               <a:ext uri="{FF2B5EF4-FFF2-40B4-BE49-F238E27FC236}">
-                <a16:creationId xmlns:a16="http://schemas.microsoft.com/office/drawing/2014/main" id="{772057D8-25EE-4D98-B604-E490C6D09195}"/>
+                <a16:creationId xmlns:a16="http://schemas.microsoft.com/office/drawing/2014/main" id="{77101151-772C-47C6-8516-8F1AD7DA8415}"/>
               </a:ext>
             </a:extLst>
           </p:cNvPr>
@@ -6049,7 +6049,7 @@
           <p:cNvPr id="46" name="Shape 44">
             <a:extLst xmlns:a="http://schemas.openxmlformats.org/drawingml/2006/main">
               <a:ext uri="{FF2B5EF4-FFF2-40B4-BE49-F238E27FC236}">
-                <a16:creationId xmlns:a16="http://schemas.microsoft.com/office/drawing/2014/main" id="{31F1CFD4-C227-4857-A861-F48E4554A893}"/>
+                <a16:creationId xmlns:a16="http://schemas.microsoft.com/office/drawing/2014/main" id="{2A6AF778-F476-4AB0-A6A2-0A2ADE6342AA}"/>
               </a:ext>
             </a:extLst>
           </p:cNvPr>
@@ -6096,7 +6096,7 @@
           <p:cNvPr id="47" name="Text 45">
             <a:extLst xmlns:a="http://schemas.openxmlformats.org/drawingml/2006/main">
               <a:ext uri="{FF2B5EF4-FFF2-40B4-BE49-F238E27FC236}">
-                <a16:creationId xmlns:a16="http://schemas.microsoft.com/office/drawing/2014/main" id="{5A33B91F-D998-49CB-965D-34F34201669C}"/>
+                <a16:creationId xmlns:a16="http://schemas.microsoft.com/office/drawing/2014/main" id="{BFA7A353-52A6-4FB1-8423-50FC37390BA8}"/>
               </a:ext>
             </a:extLst>
           </p:cNvPr>
@@ -6141,7 +6141,7 @@
           <p:cNvPr id="48" name="Text 46">
             <a:extLst xmlns:a="http://schemas.openxmlformats.org/drawingml/2006/main">
               <a:ext uri="{FF2B5EF4-FFF2-40B4-BE49-F238E27FC236}">
-                <a16:creationId xmlns:a16="http://schemas.microsoft.com/office/drawing/2014/main" id="{7DF77F55-275F-4AB7-A846-1EF4B1275820}"/>
+                <a16:creationId xmlns:a16="http://schemas.microsoft.com/office/drawing/2014/main" id="{EB867EFB-80FC-4FEB-989E-0297D83B80A1}"/>
               </a:ext>
             </a:extLst>
           </p:cNvPr>
@@ -6186,7 +6186,7 @@
           <p:cNvPr id="49" name="Text 47">
             <a:extLst xmlns:a="http://schemas.openxmlformats.org/drawingml/2006/main">
               <a:ext uri="{FF2B5EF4-FFF2-40B4-BE49-F238E27FC236}">
-                <a16:creationId xmlns:a16="http://schemas.microsoft.com/office/drawing/2014/main" id="{F9BE1739-2F6A-41B3-8393-D5B9FD6EBE25}"/>
+                <a16:creationId xmlns:a16="http://schemas.microsoft.com/office/drawing/2014/main" id="{C0418E18-5428-495D-930F-F0020AFFF8F4}"/>
               </a:ext>
             </a:extLst>
           </p:cNvPr>
@@ -6234,7 +6234,7 @@
           <p:cNvPr id="50" name="Shape 48">
             <a:extLst xmlns:a="http://schemas.openxmlformats.org/drawingml/2006/main">
               <a:ext uri="{FF2B5EF4-FFF2-40B4-BE49-F238E27FC236}">
-                <a16:creationId xmlns:a16="http://schemas.microsoft.com/office/drawing/2014/main" id="{244AE9A6-042E-4DD8-9A93-73BECC022C6A}"/>
+                <a16:creationId xmlns:a16="http://schemas.microsoft.com/office/drawing/2014/main" id="{AD4B63A6-B54F-415B-B641-26726747C886}"/>
               </a:ext>
             </a:extLst>
           </p:cNvPr>
@@ -6281,7 +6281,7 @@
           <p:cNvPr id="51" name="Text 49">
             <a:extLst xmlns:a="http://schemas.openxmlformats.org/drawingml/2006/main">
               <a:ext uri="{FF2B5EF4-FFF2-40B4-BE49-F238E27FC236}">
-                <a16:creationId xmlns:a16="http://schemas.microsoft.com/office/drawing/2014/main" id="{D4BCB11A-CDD6-4C0D-9B24-B85814E8F7DD}"/>
+                <a16:creationId xmlns:a16="http://schemas.microsoft.com/office/drawing/2014/main" id="{7E217B75-ED0D-4251-86BC-066545FFAB32}"/>
               </a:ext>
             </a:extLst>
           </p:cNvPr>
@@ -6327,7 +6327,7 @@
     </p:spTree>
     <p:extLst>
       <p:ext uri="{BB962C8B-B14F-4D97-AF65-F5344CB8AC3E}">
-        <p14:creationId xmlns:p14="http://schemas.microsoft.com/office/powerpoint/2010/main" val="473978919"/>
+        <p14:creationId xmlns:p14="http://schemas.microsoft.com/office/powerpoint/2010/main" val="1503855350"/>
       </p:ext>
     </p:extLst>
   </p:cSld>
@@ -6358,7 +6358,7 @@
           <p:cNvPr id="2" name="Text 0">
             <a:extLst xmlns:a="http://schemas.openxmlformats.org/drawingml/2006/main">
               <a:ext uri="{FF2B5EF4-FFF2-40B4-BE49-F238E27FC236}">
-                <a16:creationId xmlns:a16="http://schemas.microsoft.com/office/drawing/2014/main" id="{BD7D8803-0E5C-4AA4-A3F2-16E599EE1BD6}"/>
+                <a16:creationId xmlns:a16="http://schemas.microsoft.com/office/drawing/2014/main" id="{58C2989F-0367-40B6-A387-470E86189B24}"/>
               </a:ext>
             </a:extLst>
           </p:cNvPr>
@@ -6403,7 +6403,7 @@
           <p:cNvPr id="3" name="Text 1">
             <a:extLst xmlns:a="http://schemas.openxmlformats.org/drawingml/2006/main">
               <a:ext uri="{FF2B5EF4-FFF2-40B4-BE49-F238E27FC236}">
-                <a16:creationId xmlns:a16="http://schemas.microsoft.com/office/drawing/2014/main" id="{871BF5A0-8C9E-4275-ACF7-8EB01A3C90B0}"/>
+                <a16:creationId xmlns:a16="http://schemas.microsoft.com/office/drawing/2014/main" id="{6B08C146-17D5-4486-9C2A-AFF70B75F53C}"/>
               </a:ext>
             </a:extLst>
           </p:cNvPr>
@@ -6448,7 +6448,7 @@
           <p:cNvPr id="4" name="Text 2">
             <a:extLst xmlns:a="http://schemas.openxmlformats.org/drawingml/2006/main">
               <a:ext uri="{FF2B5EF4-FFF2-40B4-BE49-F238E27FC236}">
-                <a16:creationId xmlns:a16="http://schemas.microsoft.com/office/drawing/2014/main" id="{C76B35DE-2C79-4950-97EE-E05396EF815C}"/>
+                <a16:creationId xmlns:a16="http://schemas.microsoft.com/office/drawing/2014/main" id="{63E388AB-8EF5-4C91-BEDB-89200923F998}"/>
               </a:ext>
             </a:extLst>
           </p:cNvPr>
@@ -6493,7 +6493,7 @@
           <p:cNvPr id="5" name="Text 3">
             <a:extLst xmlns:a="http://schemas.openxmlformats.org/drawingml/2006/main">
               <a:ext uri="{FF2B5EF4-FFF2-40B4-BE49-F238E27FC236}">
-                <a16:creationId xmlns:a16="http://schemas.microsoft.com/office/drawing/2014/main" id="{2D474A0F-7C6B-47E3-B27D-07F95C1DCF7F}"/>
+                <a16:creationId xmlns:a16="http://schemas.microsoft.com/office/drawing/2014/main" id="{D344389C-D5D0-4C4D-BE8A-E1834B69F93F}"/>
               </a:ext>
             </a:extLst>
           </p:cNvPr>
@@ -6538,7 +6538,7 @@
           <p:cNvPr id="6" name="Text 4">
             <a:extLst xmlns:a="http://schemas.openxmlformats.org/drawingml/2006/main">
               <a:ext uri="{FF2B5EF4-FFF2-40B4-BE49-F238E27FC236}">
-                <a16:creationId xmlns:a16="http://schemas.microsoft.com/office/drawing/2014/main" id="{750E5446-E590-41AD-8E42-7A2A67BB65B7}"/>
+                <a16:creationId xmlns:a16="http://schemas.microsoft.com/office/drawing/2014/main" id="{BA6F0963-146E-45E9-B4E0-EE93DB5C23B9}"/>
               </a:ext>
             </a:extLst>
           </p:cNvPr>
@@ -6633,7 +6633,7 @@
           <p:cNvPr id="7" name="Shape 5">
             <a:extLst xmlns:a="http://schemas.openxmlformats.org/drawingml/2006/main">
               <a:ext uri="{FF2B5EF4-FFF2-40B4-BE49-F238E27FC236}">
-                <a16:creationId xmlns:a16="http://schemas.microsoft.com/office/drawing/2014/main" id="{65C89C70-6CF8-494C-A7FF-228AD3D046E9}"/>
+                <a16:creationId xmlns:a16="http://schemas.microsoft.com/office/drawing/2014/main" id="{204EB5AF-A139-4E33-B41B-4299ECE5140B}"/>
               </a:ext>
             </a:extLst>
           </p:cNvPr>
@@ -6680,7 +6680,7 @@
           <p:cNvPr id="8" name="Text 6">
             <a:extLst xmlns:a="http://schemas.openxmlformats.org/drawingml/2006/main">
               <a:ext uri="{FF2B5EF4-FFF2-40B4-BE49-F238E27FC236}">
-                <a16:creationId xmlns:a16="http://schemas.microsoft.com/office/drawing/2014/main" id="{EAEA1759-44ED-4CEB-A4B2-74B7FCAB3704}"/>
+                <a16:creationId xmlns:a16="http://schemas.microsoft.com/office/drawing/2014/main" id="{A0E37723-5DB6-48E3-B623-429821FCAA7E}"/>
               </a:ext>
             </a:extLst>
           </p:cNvPr>
@@ -6725,7 +6725,7 @@
           <p:cNvPr id="9" name="Text 7">
             <a:extLst xmlns:a="http://schemas.openxmlformats.org/drawingml/2006/main">
               <a:ext uri="{FF2B5EF4-FFF2-40B4-BE49-F238E27FC236}">
-                <a16:creationId xmlns:a16="http://schemas.microsoft.com/office/drawing/2014/main" id="{C055873B-C334-42ED-B1B8-F338AEB2ECE5}"/>
+                <a16:creationId xmlns:a16="http://schemas.microsoft.com/office/drawing/2014/main" id="{130971DE-1A40-4D85-B5CA-4B1D0C857B14}"/>
               </a:ext>
             </a:extLst>
           </p:cNvPr>
@@ -6773,7 +6773,7 @@
           <p:cNvPr id="10" name="Shape 8">
             <a:extLst xmlns:a="http://schemas.openxmlformats.org/drawingml/2006/main">
               <a:ext uri="{FF2B5EF4-FFF2-40B4-BE49-F238E27FC236}">
-                <a16:creationId xmlns:a16="http://schemas.microsoft.com/office/drawing/2014/main" id="{64DD237D-3F1B-44AB-93DC-AD9DA1ACAB52}"/>
+                <a16:creationId xmlns:a16="http://schemas.microsoft.com/office/drawing/2014/main" id="{ADCBCA6A-30E1-416C-A02C-F08231594034}"/>
               </a:ext>
             </a:extLst>
           </p:cNvPr>
@@ -6820,7 +6820,7 @@
           <p:cNvPr id="11" name="Text 9">
             <a:extLst xmlns:a="http://schemas.openxmlformats.org/drawingml/2006/main">
               <a:ext uri="{FF2B5EF4-FFF2-40B4-BE49-F238E27FC236}">
-                <a16:creationId xmlns:a16="http://schemas.microsoft.com/office/drawing/2014/main" id="{07508A58-1D3A-4839-B4B8-78D2BAD5A646}"/>
+                <a16:creationId xmlns:a16="http://schemas.microsoft.com/office/drawing/2014/main" id="{134AC8F5-7476-4E20-876B-8E7D8E933901}"/>
               </a:ext>
             </a:extLst>
           </p:cNvPr>
@@ -6865,7 +6865,7 @@
           <p:cNvPr id="12" name="Text 10">
             <a:extLst xmlns:a="http://schemas.openxmlformats.org/drawingml/2006/main">
               <a:ext uri="{FF2B5EF4-FFF2-40B4-BE49-F238E27FC236}">
-                <a16:creationId xmlns:a16="http://schemas.microsoft.com/office/drawing/2014/main" id="{7B759EC5-3A3D-466B-AAE3-0CB31AED46EB}"/>
+                <a16:creationId xmlns:a16="http://schemas.microsoft.com/office/drawing/2014/main" id="{13061E30-4731-4E84-9DD2-FCC2328E649A}"/>
               </a:ext>
             </a:extLst>
           </p:cNvPr>
@@ -6910,7 +6910,7 @@
           <p:cNvPr id="13" name="Text 11">
             <a:extLst xmlns:a="http://schemas.openxmlformats.org/drawingml/2006/main">
               <a:ext uri="{FF2B5EF4-FFF2-40B4-BE49-F238E27FC236}">
-                <a16:creationId xmlns:a16="http://schemas.microsoft.com/office/drawing/2014/main" id="{AE0EB1C8-71F2-4A26-9CFB-AD011CE21C71}"/>
+                <a16:creationId xmlns:a16="http://schemas.microsoft.com/office/drawing/2014/main" id="{FFA8D67C-C8CA-4215-B0FA-2FFD02BE9849}"/>
               </a:ext>
             </a:extLst>
           </p:cNvPr>
@@ -6955,7 +6955,7 @@
           <p:cNvPr id="14" name="Text 12">
             <a:extLst xmlns:a="http://schemas.openxmlformats.org/drawingml/2006/main">
               <a:ext uri="{FF2B5EF4-FFF2-40B4-BE49-F238E27FC236}">
-                <a16:creationId xmlns:a16="http://schemas.microsoft.com/office/drawing/2014/main" id="{946D1B34-B469-45F9-9214-0C3352EA6534}"/>
+                <a16:creationId xmlns:a16="http://schemas.microsoft.com/office/drawing/2014/main" id="{BE372989-5D6D-4A63-8067-9FEE1D57A6B8}"/>
               </a:ext>
             </a:extLst>
           </p:cNvPr>
@@ -7000,7 +7000,7 @@
           <p:cNvPr id="15" name="Text 13">
             <a:extLst xmlns:a="http://schemas.openxmlformats.org/drawingml/2006/main">
               <a:ext uri="{FF2B5EF4-FFF2-40B4-BE49-F238E27FC236}">
-                <a16:creationId xmlns:a16="http://schemas.microsoft.com/office/drawing/2014/main" id="{CCC96CF4-039D-4451-9D33-8929052066B9}"/>
+                <a16:creationId xmlns:a16="http://schemas.microsoft.com/office/drawing/2014/main" id="{8427FAFA-F685-4F98-846B-18EB57810162}"/>
               </a:ext>
             </a:extLst>
           </p:cNvPr>
@@ -7045,7 +7045,7 @@
           <p:cNvPr id="16" name="Text 14">
             <a:extLst xmlns:a="http://schemas.openxmlformats.org/drawingml/2006/main">
               <a:ext uri="{FF2B5EF4-FFF2-40B4-BE49-F238E27FC236}">
-                <a16:creationId xmlns:a16="http://schemas.microsoft.com/office/drawing/2014/main" id="{461077D5-0308-4015-BA67-DE5C7AC718C0}"/>
+                <a16:creationId xmlns:a16="http://schemas.microsoft.com/office/drawing/2014/main" id="{074799EA-D684-4417-AB8D-E2D6593A6A6F}"/>
               </a:ext>
             </a:extLst>
           </p:cNvPr>
@@ -7090,7 +7090,7 @@
           <p:cNvPr id="17" name="Text 15">
             <a:extLst xmlns:a="http://schemas.openxmlformats.org/drawingml/2006/main">
               <a:ext uri="{FF2B5EF4-FFF2-40B4-BE49-F238E27FC236}">
-                <a16:creationId xmlns:a16="http://schemas.microsoft.com/office/drawing/2014/main" id="{4A7240D3-3B7C-4230-AAA6-C366D5327DAA}"/>
+                <a16:creationId xmlns:a16="http://schemas.microsoft.com/office/drawing/2014/main" id="{9B5C792E-263B-49EB-BBA0-93F2FBF0EC9B}"/>
               </a:ext>
             </a:extLst>
           </p:cNvPr>
@@ -7135,7 +7135,7 @@
           <p:cNvPr id="18" name="Shape 16">
             <a:extLst xmlns:a="http://schemas.openxmlformats.org/drawingml/2006/main">
               <a:ext uri="{FF2B5EF4-FFF2-40B4-BE49-F238E27FC236}">
-                <a16:creationId xmlns:a16="http://schemas.microsoft.com/office/drawing/2014/main" id="{D1272C73-F7B4-4527-B93C-08FB54CE8A28}"/>
+                <a16:creationId xmlns:a16="http://schemas.microsoft.com/office/drawing/2014/main" id="{FB2E53A4-CC47-41CF-9C58-78B4AF0C11C9}"/>
               </a:ext>
             </a:extLst>
           </p:cNvPr>
@@ -7171,7 +7171,7 @@
           <p:cNvPr id="19" name="Text 17">
             <a:extLst xmlns:a="http://schemas.openxmlformats.org/drawingml/2006/main">
               <a:ext uri="{FF2B5EF4-FFF2-40B4-BE49-F238E27FC236}">
-                <a16:creationId xmlns:a16="http://schemas.microsoft.com/office/drawing/2014/main" id="{87B60C6E-A039-4745-9A4A-38D727BC886D}"/>
+                <a16:creationId xmlns:a16="http://schemas.microsoft.com/office/drawing/2014/main" id="{B5139943-41CC-4D54-99B1-A820C4B7FAB8}"/>
               </a:ext>
             </a:extLst>
           </p:cNvPr>
@@ -7216,7 +7216,7 @@
           <p:cNvPr id="20" name="Text 18">
             <a:extLst xmlns:a="http://schemas.openxmlformats.org/drawingml/2006/main">
               <a:ext uri="{FF2B5EF4-FFF2-40B4-BE49-F238E27FC236}">
-                <a16:creationId xmlns:a16="http://schemas.microsoft.com/office/drawing/2014/main" id="{A2D898AC-4A4D-422A-8079-550430C3B30F}"/>
+                <a16:creationId xmlns:a16="http://schemas.microsoft.com/office/drawing/2014/main" id="{09495AA1-669C-4265-A849-DF93EA484DE5}"/>
               </a:ext>
             </a:extLst>
           </p:cNvPr>
@@ -7264,7 +7264,7 @@
           <p:cNvPr id="21" name="Text 19">
             <a:extLst xmlns:a="http://schemas.openxmlformats.org/drawingml/2006/main">
               <a:ext uri="{FF2B5EF4-FFF2-40B4-BE49-F238E27FC236}">
-                <a16:creationId xmlns:a16="http://schemas.microsoft.com/office/drawing/2014/main" id="{CBD254C8-1F47-43AF-8990-B56F72B44277}"/>
+                <a16:creationId xmlns:a16="http://schemas.microsoft.com/office/drawing/2014/main" id="{025CFEAE-FF93-44F1-A072-54158A3FAED3}"/>
               </a:ext>
             </a:extLst>
           </p:cNvPr>
@@ -7312,7 +7312,7 @@
           <p:cNvPr id="22" name="Shape 20">
             <a:extLst xmlns:a="http://schemas.openxmlformats.org/drawingml/2006/main">
               <a:ext uri="{FF2B5EF4-FFF2-40B4-BE49-F238E27FC236}">
-                <a16:creationId xmlns:a16="http://schemas.microsoft.com/office/drawing/2014/main" id="{510D53D7-6561-4FEE-B4FC-38775C9D3EC9}"/>
+                <a16:creationId xmlns:a16="http://schemas.microsoft.com/office/drawing/2014/main" id="{0EBE0894-4935-41B6-BF7C-FF8893304669}"/>
               </a:ext>
             </a:extLst>
           </p:cNvPr>
@@ -7359,7 +7359,7 @@
           <p:cNvPr id="23" name="Text 21">
             <a:extLst xmlns:a="http://schemas.openxmlformats.org/drawingml/2006/main">
               <a:ext uri="{FF2B5EF4-FFF2-40B4-BE49-F238E27FC236}">
-                <a16:creationId xmlns:a16="http://schemas.microsoft.com/office/drawing/2014/main" id="{6E7D7C06-43F3-4C1B-9618-920565E54FE0}"/>
+                <a16:creationId xmlns:a16="http://schemas.microsoft.com/office/drawing/2014/main" id="{F29E17E1-2A2C-418D-9091-51DAA4DF28AE}"/>
               </a:ext>
             </a:extLst>
           </p:cNvPr>
@@ -7416,7 +7416,7 @@
     </p:spTree>
     <p:extLst>
       <p:ext uri="{BB962C8B-B14F-4D97-AF65-F5344CB8AC3E}">
-        <p14:creationId xmlns:p14="http://schemas.microsoft.com/office/powerpoint/2010/main" val="1118016183"/>
+        <p14:creationId xmlns:p14="http://schemas.microsoft.com/office/powerpoint/2010/main" val="2139223044"/>
       </p:ext>
     </p:extLst>
   </p:cSld>
@@ -7447,7 +7447,7 @@
           <p:cNvPr id="2" name="Text 0">
             <a:extLst xmlns:a="http://schemas.openxmlformats.org/drawingml/2006/main">
               <a:ext uri="{FF2B5EF4-FFF2-40B4-BE49-F238E27FC236}">
-                <a16:creationId xmlns:a16="http://schemas.microsoft.com/office/drawing/2014/main" id="{5E86C07A-591F-49BB-9175-DD64C7B7BCAB}"/>
+                <a16:creationId xmlns:a16="http://schemas.microsoft.com/office/drawing/2014/main" id="{7FD3A136-37C6-4D0B-B96E-FC2B6EA23677}"/>
               </a:ext>
             </a:extLst>
           </p:cNvPr>
@@ -7492,7 +7492,7 @@
           <p:cNvPr id="3" name="Text 1">
             <a:extLst xmlns:a="http://schemas.openxmlformats.org/drawingml/2006/main">
               <a:ext uri="{FF2B5EF4-FFF2-40B4-BE49-F238E27FC236}">
-                <a16:creationId xmlns:a16="http://schemas.microsoft.com/office/drawing/2014/main" id="{A733B092-B919-4AF5-91EB-2BE374378B3F}"/>
+                <a16:creationId xmlns:a16="http://schemas.microsoft.com/office/drawing/2014/main" id="{347C24DF-E361-436C-828D-722EF0B58E69}"/>
               </a:ext>
             </a:extLst>
           </p:cNvPr>
@@ -7537,7 +7537,7 @@
           <p:cNvPr id="4" name="Text 2">
             <a:extLst xmlns:a="http://schemas.openxmlformats.org/drawingml/2006/main">
               <a:ext uri="{FF2B5EF4-FFF2-40B4-BE49-F238E27FC236}">
-                <a16:creationId xmlns:a16="http://schemas.microsoft.com/office/drawing/2014/main" id="{98AB1D36-11AB-4CF1-9926-C9F6488AD2C0}"/>
+                <a16:creationId xmlns:a16="http://schemas.microsoft.com/office/drawing/2014/main" id="{DA21B3FE-AF78-43D1-A587-933686A42937}"/>
               </a:ext>
             </a:extLst>
           </p:cNvPr>
@@ -7582,7 +7582,7 @@
           <p:cNvPr id="5" name="Text 3">
             <a:extLst xmlns:a="http://schemas.openxmlformats.org/drawingml/2006/main">
               <a:ext uri="{FF2B5EF4-FFF2-40B4-BE49-F238E27FC236}">
-                <a16:creationId xmlns:a16="http://schemas.microsoft.com/office/drawing/2014/main" id="{BB33693F-040B-443A-979D-CE4BF17743DD}"/>
+                <a16:creationId xmlns:a16="http://schemas.microsoft.com/office/drawing/2014/main" id="{9E4830D7-A5F3-4A99-9EC8-72830E43411F}"/>
               </a:ext>
             </a:extLst>
           </p:cNvPr>
@@ -7627,7 +7627,7 @@
           <p:cNvPr id="6" name="Text 4">
             <a:extLst xmlns:a="http://schemas.openxmlformats.org/drawingml/2006/main">
               <a:ext uri="{FF2B5EF4-FFF2-40B4-BE49-F238E27FC236}">
-                <a16:creationId xmlns:a16="http://schemas.microsoft.com/office/drawing/2014/main" id="{CAB0D89D-DE54-463F-B4F2-31BD50BC9E8D}"/>
+                <a16:creationId xmlns:a16="http://schemas.microsoft.com/office/drawing/2014/main" id="{D91ECC18-3B26-4589-A451-F9614A44877B}"/>
               </a:ext>
             </a:extLst>
           </p:cNvPr>
@@ -7675,7 +7675,7 @@
           <p:cNvPr id="7" name="Shape 5">
             <a:extLst xmlns:a="http://schemas.openxmlformats.org/drawingml/2006/main">
               <a:ext uri="{FF2B5EF4-FFF2-40B4-BE49-F238E27FC236}">
-                <a16:creationId xmlns:a16="http://schemas.microsoft.com/office/drawing/2014/main" id="{BF62A44D-867B-471E-95B3-D68FDCBE3D60}"/>
+                <a16:creationId xmlns:a16="http://schemas.microsoft.com/office/drawing/2014/main" id="{AC42226C-D6C6-4621-9FD3-51AA3947BB64}"/>
               </a:ext>
             </a:extLst>
           </p:cNvPr>
@@ -7722,7 +7722,7 @@
           <p:cNvPr id="8" name="Text 6">
             <a:extLst xmlns:a="http://schemas.openxmlformats.org/drawingml/2006/main">
               <a:ext uri="{FF2B5EF4-FFF2-40B4-BE49-F238E27FC236}">
-                <a16:creationId xmlns:a16="http://schemas.microsoft.com/office/drawing/2014/main" id="{6987F948-CCAD-4E61-925C-0E9EBB201D95}"/>
+                <a16:creationId xmlns:a16="http://schemas.microsoft.com/office/drawing/2014/main" id="{319F0E69-7253-4E78-A564-A0112DF6BAAB}"/>
               </a:ext>
             </a:extLst>
           </p:cNvPr>
@@ -7767,7 +7767,7 @@
           <p:cNvPr id="9" name="Text 7">
             <a:extLst xmlns:a="http://schemas.openxmlformats.org/drawingml/2006/main">
               <a:ext uri="{FF2B5EF4-FFF2-40B4-BE49-F238E27FC236}">
-                <a16:creationId xmlns:a16="http://schemas.microsoft.com/office/drawing/2014/main" id="{68FF03E1-0A28-4AD9-870B-33ADD2B4C505}"/>
+                <a16:creationId xmlns:a16="http://schemas.microsoft.com/office/drawing/2014/main" id="{49ED2B1D-583F-4B15-83AF-AD31D6C3BA0D}"/>
               </a:ext>
             </a:extLst>
           </p:cNvPr>
@@ -7815,7 +7815,7 @@
           <p:cNvPr id="10" name="Shape 8">
             <a:extLst xmlns:a="http://schemas.openxmlformats.org/drawingml/2006/main">
               <a:ext uri="{FF2B5EF4-FFF2-40B4-BE49-F238E27FC236}">
-                <a16:creationId xmlns:a16="http://schemas.microsoft.com/office/drawing/2014/main" id="{9FC73853-ACA0-4DE8-B4C3-FC07572C407A}"/>
+                <a16:creationId xmlns:a16="http://schemas.microsoft.com/office/drawing/2014/main" id="{4C848101-54DE-4444-8DBB-E7787E1D0B59}"/>
               </a:ext>
             </a:extLst>
           </p:cNvPr>
@@ -7862,7 +7862,7 @@
           <p:cNvPr id="11" name="Text 9">
             <a:extLst xmlns:a="http://schemas.openxmlformats.org/drawingml/2006/main">
               <a:ext uri="{FF2B5EF4-FFF2-40B4-BE49-F238E27FC236}">
-                <a16:creationId xmlns:a16="http://schemas.microsoft.com/office/drawing/2014/main" id="{556C5960-894E-460A-83E7-A866C5CF8F46}"/>
+                <a16:creationId xmlns:a16="http://schemas.microsoft.com/office/drawing/2014/main" id="{07555C50-A38C-49D2-BC7B-4292377B214A}"/>
               </a:ext>
             </a:extLst>
           </p:cNvPr>
@@ -7910,7 +7910,7 @@
           <p:cNvPr id="12" name="Shape 10">
             <a:extLst xmlns:a="http://schemas.openxmlformats.org/drawingml/2006/main">
               <a:ext uri="{FF2B5EF4-FFF2-40B4-BE49-F238E27FC236}">
-                <a16:creationId xmlns:a16="http://schemas.microsoft.com/office/drawing/2014/main" id="{5919E2FA-6F65-4E57-86D9-A4E174944757}"/>
+                <a16:creationId xmlns:a16="http://schemas.microsoft.com/office/drawing/2014/main" id="{31B33430-16F1-42B9-878C-C39779516EEB}"/>
               </a:ext>
             </a:extLst>
           </p:cNvPr>
@@ -7957,7 +7957,7 @@
           <p:cNvPr id="13" name="Text 11">
             <a:extLst xmlns:a="http://schemas.openxmlformats.org/drawingml/2006/main">
               <a:ext uri="{FF2B5EF4-FFF2-40B4-BE49-F238E27FC236}">
-                <a16:creationId xmlns:a16="http://schemas.microsoft.com/office/drawing/2014/main" id="{766ACDA5-ED38-4AD3-88D1-02C95394B716}"/>
+                <a16:creationId xmlns:a16="http://schemas.microsoft.com/office/drawing/2014/main" id="{24541D53-35A0-44F5-A634-778D2F5CE6CB}"/>
               </a:ext>
             </a:extLst>
           </p:cNvPr>
@@ -8002,7 +8002,7 @@
           <p:cNvPr id="14" name="Text 12">
             <a:extLst xmlns:a="http://schemas.openxmlformats.org/drawingml/2006/main">
               <a:ext uri="{FF2B5EF4-FFF2-40B4-BE49-F238E27FC236}">
-                <a16:creationId xmlns:a16="http://schemas.microsoft.com/office/drawing/2014/main" id="{0F321875-59B8-4FD0-A1CF-F3DB7BD76E92}"/>
+                <a16:creationId xmlns:a16="http://schemas.microsoft.com/office/drawing/2014/main" id="{73BEB7BF-799A-4D6F-BA60-B9FF9EF7CA51}"/>
               </a:ext>
             </a:extLst>
           </p:cNvPr>
@@ -8047,7 +8047,7 @@
           <p:cNvPr id="15" name="Text 13">
             <a:extLst xmlns:a="http://schemas.openxmlformats.org/drawingml/2006/main">
               <a:ext uri="{FF2B5EF4-FFF2-40B4-BE49-F238E27FC236}">
-                <a16:creationId xmlns:a16="http://schemas.microsoft.com/office/drawing/2014/main" id="{86D83CF8-D836-4B03-9F3E-FB021E8816E0}"/>
+                <a16:creationId xmlns:a16="http://schemas.microsoft.com/office/drawing/2014/main" id="{548D0821-9277-46B9-9FDD-A0DDBE7DAB66}"/>
               </a:ext>
             </a:extLst>
           </p:cNvPr>
@@ -8092,7 +8092,7 @@
           <p:cNvPr id="16" name="Text 14">
             <a:extLst xmlns:a="http://schemas.openxmlformats.org/drawingml/2006/main">
               <a:ext uri="{FF2B5EF4-FFF2-40B4-BE49-F238E27FC236}">
-                <a16:creationId xmlns:a16="http://schemas.microsoft.com/office/drawing/2014/main" id="{5FCBCC7D-8FB6-4664-B089-6C4BF43669A2}"/>
+                <a16:creationId xmlns:a16="http://schemas.microsoft.com/office/drawing/2014/main" id="{FBC07452-4C02-40B6-9598-6B896AD1BA40}"/>
               </a:ext>
             </a:extLst>
           </p:cNvPr>
@@ -8137,7 +8137,7 @@
           <p:cNvPr id="17" name="Text 15">
             <a:extLst xmlns:a="http://schemas.openxmlformats.org/drawingml/2006/main">
               <a:ext uri="{FF2B5EF4-FFF2-40B4-BE49-F238E27FC236}">
-                <a16:creationId xmlns:a16="http://schemas.microsoft.com/office/drawing/2014/main" id="{C6DE87CA-02AA-4251-BA2F-F5319D34C0EA}"/>
+                <a16:creationId xmlns:a16="http://schemas.microsoft.com/office/drawing/2014/main" id="{54ACDBB8-14ED-44F3-96AA-16891453F41B}"/>
               </a:ext>
             </a:extLst>
           </p:cNvPr>
@@ -8182,7 +8182,7 @@
           <p:cNvPr id="18" name="Text 16">
             <a:extLst xmlns:a="http://schemas.openxmlformats.org/drawingml/2006/main">
               <a:ext uri="{FF2B5EF4-FFF2-40B4-BE49-F238E27FC236}">
-                <a16:creationId xmlns:a16="http://schemas.microsoft.com/office/drawing/2014/main" id="{17071821-A321-4D3D-8190-D76076BAA12A}"/>
+                <a16:creationId xmlns:a16="http://schemas.microsoft.com/office/drawing/2014/main" id="{08ABB1A2-CA93-4529-B127-A4EA83215BFD}"/>
               </a:ext>
             </a:extLst>
           </p:cNvPr>
@@ -8227,7 +8227,7 @@
           <p:cNvPr id="19" name="Text 17">
             <a:extLst xmlns:a="http://schemas.openxmlformats.org/drawingml/2006/main">
               <a:ext uri="{FF2B5EF4-FFF2-40B4-BE49-F238E27FC236}">
-                <a16:creationId xmlns:a16="http://schemas.microsoft.com/office/drawing/2014/main" id="{E4D2923F-8807-4A01-8FCA-B59502314FC0}"/>
+                <a16:creationId xmlns:a16="http://schemas.microsoft.com/office/drawing/2014/main" id="{CB0E327F-C906-4623-87BB-7B2091EC4E11}"/>
               </a:ext>
             </a:extLst>
           </p:cNvPr>
@@ -8272,7 +8272,7 @@
           <p:cNvPr id="20" name="Shape 18">
             <a:extLst xmlns:a="http://schemas.openxmlformats.org/drawingml/2006/main">
               <a:ext uri="{FF2B5EF4-FFF2-40B4-BE49-F238E27FC236}">
-                <a16:creationId xmlns:a16="http://schemas.microsoft.com/office/drawing/2014/main" id="{42E04EC7-1CEE-4402-AB1A-E3413098AD46}"/>
+                <a16:creationId xmlns:a16="http://schemas.microsoft.com/office/drawing/2014/main" id="{A05C4D5E-D152-45F9-8517-4F638A81277B}"/>
               </a:ext>
             </a:extLst>
           </p:cNvPr>
@@ -8308,7 +8308,7 @@
           <p:cNvPr id="21" name="Text 19">
             <a:extLst xmlns:a="http://schemas.openxmlformats.org/drawingml/2006/main">
               <a:ext uri="{FF2B5EF4-FFF2-40B4-BE49-F238E27FC236}">
-                <a16:creationId xmlns:a16="http://schemas.microsoft.com/office/drawing/2014/main" id="{CC8C1DBB-C8B5-4749-A7DE-3BA2B310A8DB}"/>
+                <a16:creationId xmlns:a16="http://schemas.microsoft.com/office/drawing/2014/main" id="{0F1A2747-2A6D-4083-BCD0-4BF679494EB2}"/>
               </a:ext>
             </a:extLst>
           </p:cNvPr>
@@ -8353,7 +8353,7 @@
           <p:cNvPr id="22" name="Text 20">
             <a:extLst xmlns:a="http://schemas.openxmlformats.org/drawingml/2006/main">
               <a:ext uri="{FF2B5EF4-FFF2-40B4-BE49-F238E27FC236}">
-                <a16:creationId xmlns:a16="http://schemas.microsoft.com/office/drawing/2014/main" id="{685817D0-7222-4F63-898F-1D27A49208A6}"/>
+                <a16:creationId xmlns:a16="http://schemas.microsoft.com/office/drawing/2014/main" id="{89C520FA-9C70-4C23-85E5-61E8F00BD46E}"/>
               </a:ext>
             </a:extLst>
           </p:cNvPr>
@@ -8398,7 +8398,7 @@
           <p:cNvPr id="23" name="Text 21">
             <a:extLst xmlns:a="http://schemas.openxmlformats.org/drawingml/2006/main">
               <a:ext uri="{FF2B5EF4-FFF2-40B4-BE49-F238E27FC236}">
-                <a16:creationId xmlns:a16="http://schemas.microsoft.com/office/drawing/2014/main" id="{8470BE62-3847-46DD-B0FF-3E074E97D0C7}"/>
+                <a16:creationId xmlns:a16="http://schemas.microsoft.com/office/drawing/2014/main" id="{9D017E4B-2BE7-471D-99EA-FBD1EBF21AAA}"/>
               </a:ext>
             </a:extLst>
           </p:cNvPr>
@@ -8443,7 +8443,7 @@
           <p:cNvPr id="24" name="Text 22">
             <a:extLst xmlns:a="http://schemas.openxmlformats.org/drawingml/2006/main">
               <a:ext uri="{FF2B5EF4-FFF2-40B4-BE49-F238E27FC236}">
-                <a16:creationId xmlns:a16="http://schemas.microsoft.com/office/drawing/2014/main" id="{82FC4435-A1CE-4234-B1FB-8D24D4C41ECA}"/>
+                <a16:creationId xmlns:a16="http://schemas.microsoft.com/office/drawing/2014/main" id="{3ED6D576-A358-4736-B8A6-88A71441A62D}"/>
               </a:ext>
             </a:extLst>
           </p:cNvPr>
@@ -8488,7 +8488,7 @@
           <p:cNvPr id="25" name="Text 23">
             <a:extLst xmlns:a="http://schemas.openxmlformats.org/drawingml/2006/main">
               <a:ext uri="{FF2B5EF4-FFF2-40B4-BE49-F238E27FC236}">
-                <a16:creationId xmlns:a16="http://schemas.microsoft.com/office/drawing/2014/main" id="{66BBD99E-6633-484F-B3A3-BA32DC787BA8}"/>
+                <a16:creationId xmlns:a16="http://schemas.microsoft.com/office/drawing/2014/main" id="{5BE8131E-C8A8-4BA2-9AD2-B9DA839F35B2}"/>
               </a:ext>
             </a:extLst>
           </p:cNvPr>
@@ -8534,7 +8534,7 @@
     </p:spTree>
     <p:extLst>
       <p:ext uri="{BB962C8B-B14F-4D97-AF65-F5344CB8AC3E}">
-        <p14:creationId xmlns:p14="http://schemas.microsoft.com/office/powerpoint/2010/main" val="16663228"/>
+        <p14:creationId xmlns:p14="http://schemas.microsoft.com/office/powerpoint/2010/main" val="1973674406"/>
       </p:ext>
     </p:extLst>
   </p:cSld>
@@ -8565,7 +8565,7 @@
           <p:cNvPr id="2" name="Text 0">
             <a:extLst xmlns:a="http://schemas.openxmlformats.org/drawingml/2006/main">
               <a:ext uri="{FF2B5EF4-FFF2-40B4-BE49-F238E27FC236}">
-                <a16:creationId xmlns:a16="http://schemas.microsoft.com/office/drawing/2014/main" id="{0CAEA51C-DC04-4D9D-87F6-0E59747CAFC7}"/>
+                <a16:creationId xmlns:a16="http://schemas.microsoft.com/office/drawing/2014/main" id="{B68A87A8-73CD-4DB1-B128-05B3A5B1043B}"/>
               </a:ext>
             </a:extLst>
           </p:cNvPr>
@@ -8610,7 +8610,7 @@
           <p:cNvPr id="3" name="Text 1">
             <a:extLst xmlns:a="http://schemas.openxmlformats.org/drawingml/2006/main">
               <a:ext uri="{FF2B5EF4-FFF2-40B4-BE49-F238E27FC236}">
-                <a16:creationId xmlns:a16="http://schemas.microsoft.com/office/drawing/2014/main" id="{26AA6934-D180-4E1A-8BCB-95FF0466F7F2}"/>
+                <a16:creationId xmlns:a16="http://schemas.microsoft.com/office/drawing/2014/main" id="{67CB4726-F16B-439F-A3C3-50C3416EE6B4}"/>
               </a:ext>
             </a:extLst>
           </p:cNvPr>
@@ -8655,7 +8655,7 @@
           <p:cNvPr id="4" name="Text 2">
             <a:extLst xmlns:a="http://schemas.openxmlformats.org/drawingml/2006/main">
               <a:ext uri="{FF2B5EF4-FFF2-40B4-BE49-F238E27FC236}">
-                <a16:creationId xmlns:a16="http://schemas.microsoft.com/office/drawing/2014/main" id="{BC4BF76D-A0E1-4A18-9A2A-0AC6728EF621}"/>
+                <a16:creationId xmlns:a16="http://schemas.microsoft.com/office/drawing/2014/main" id="{9FD93E52-E6EE-45B1-B5F6-68C5C17598AE}"/>
               </a:ext>
             </a:extLst>
           </p:cNvPr>
@@ -8700,7 +8700,7 @@
           <p:cNvPr id="5" name="Text 3">
             <a:extLst xmlns:a="http://schemas.openxmlformats.org/drawingml/2006/main">
               <a:ext uri="{FF2B5EF4-FFF2-40B4-BE49-F238E27FC236}">
-                <a16:creationId xmlns:a16="http://schemas.microsoft.com/office/drawing/2014/main" id="{1F58B325-E994-490C-BA2B-8F93BA541CAF}"/>
+                <a16:creationId xmlns:a16="http://schemas.microsoft.com/office/drawing/2014/main" id="{921953CD-C08D-4B13-B365-B9B2F9FF2587}"/>
               </a:ext>
             </a:extLst>
           </p:cNvPr>
@@ -8745,7 +8745,7 @@
           <p:cNvPr id="6" name="Shape 4">
             <a:extLst xmlns:a="http://schemas.openxmlformats.org/drawingml/2006/main">
               <a:ext uri="{FF2B5EF4-FFF2-40B4-BE49-F238E27FC236}">
-                <a16:creationId xmlns:a16="http://schemas.microsoft.com/office/drawing/2014/main" id="{50E463DE-BDA0-465C-87E8-8E0C5CFB33FF}"/>
+                <a16:creationId xmlns:a16="http://schemas.microsoft.com/office/drawing/2014/main" id="{FA6AFE33-7AF8-4C65-A306-1FA0B702537A}"/>
               </a:ext>
             </a:extLst>
           </p:cNvPr>
@@ -8792,7 +8792,7 @@
           <p:cNvPr id="7" name="Shape 5">
             <a:extLst xmlns:a="http://schemas.openxmlformats.org/drawingml/2006/main">
               <a:ext uri="{FF2B5EF4-FFF2-40B4-BE49-F238E27FC236}">
-                <a16:creationId xmlns:a16="http://schemas.microsoft.com/office/drawing/2014/main" id="{A1254E37-5F86-4DF0-B085-25E369769789}"/>
+                <a16:creationId xmlns:a16="http://schemas.microsoft.com/office/drawing/2014/main" id="{F32309CC-07A6-4179-BA0D-AB45E62F6012}"/>
               </a:ext>
             </a:extLst>
           </p:cNvPr>
@@ -8830,7 +8830,7 @@
           <p:cNvPr id="8" name="Text 6">
             <a:extLst xmlns:a="http://schemas.openxmlformats.org/drawingml/2006/main">
               <a:ext uri="{FF2B5EF4-FFF2-40B4-BE49-F238E27FC236}">
-                <a16:creationId xmlns:a16="http://schemas.microsoft.com/office/drawing/2014/main" id="{A540120B-0A62-42BC-A19A-7C6EA2B8D30A}"/>
+                <a16:creationId xmlns:a16="http://schemas.microsoft.com/office/drawing/2014/main" id="{A1019680-0823-4BB6-8C12-1C0531BD91D1}"/>
               </a:ext>
             </a:extLst>
           </p:cNvPr>
@@ -8875,7 +8875,7 @@
           <p:cNvPr id="9" name="Text 7">
             <a:extLst xmlns:a="http://schemas.openxmlformats.org/drawingml/2006/main">
               <a:ext uri="{FF2B5EF4-FFF2-40B4-BE49-F238E27FC236}">
-                <a16:creationId xmlns:a16="http://schemas.microsoft.com/office/drawing/2014/main" id="{8645A66B-D013-499C-AB17-B2C67B0E3706}"/>
+                <a16:creationId xmlns:a16="http://schemas.microsoft.com/office/drawing/2014/main" id="{E1C27821-E2B9-464D-94D3-8193CF7E8257}"/>
               </a:ext>
             </a:extLst>
           </p:cNvPr>
@@ -8923,7 +8923,7 @@
           <p:cNvPr id="10" name="Text 8">
             <a:extLst xmlns:a="http://schemas.openxmlformats.org/drawingml/2006/main">
               <a:ext uri="{FF2B5EF4-FFF2-40B4-BE49-F238E27FC236}">
-                <a16:creationId xmlns:a16="http://schemas.microsoft.com/office/drawing/2014/main" id="{649AAE12-7C74-49E2-87A6-5CBB9B95B8C3}"/>
+                <a16:creationId xmlns:a16="http://schemas.microsoft.com/office/drawing/2014/main" id="{431D122C-D208-4429-897B-24B2822119B9}"/>
               </a:ext>
             </a:extLst>
           </p:cNvPr>
@@ -8971,7 +8971,7 @@
           <p:cNvPr id="11" name="Text 9">
             <a:extLst xmlns:a="http://schemas.openxmlformats.org/drawingml/2006/main">
               <a:ext uri="{FF2B5EF4-FFF2-40B4-BE49-F238E27FC236}">
-                <a16:creationId xmlns:a16="http://schemas.microsoft.com/office/drawing/2014/main" id="{ADBF844C-35DF-4EA2-A038-10EC9CB81C1E}"/>
+                <a16:creationId xmlns:a16="http://schemas.microsoft.com/office/drawing/2014/main" id="{8094BBE7-74C3-4909-9574-4DA87944179A}"/>
               </a:ext>
             </a:extLst>
           </p:cNvPr>
@@ -9066,7 +9066,7 @@
           <p:cNvPr id="12" name="Shape 10">
             <a:extLst xmlns:a="http://schemas.openxmlformats.org/drawingml/2006/main">
               <a:ext uri="{FF2B5EF4-FFF2-40B4-BE49-F238E27FC236}">
-                <a16:creationId xmlns:a16="http://schemas.microsoft.com/office/drawing/2014/main" id="{A6751F93-AD5C-4F41-A6AC-E0F03CE7D5D8}"/>
+                <a16:creationId xmlns:a16="http://schemas.microsoft.com/office/drawing/2014/main" id="{737D77F6-6AEF-49BF-89A9-C9FF69033D47}"/>
               </a:ext>
             </a:extLst>
           </p:cNvPr>
@@ -9113,7 +9113,7 @@
           <p:cNvPr id="13" name="Shape 11">
             <a:extLst xmlns:a="http://schemas.openxmlformats.org/drawingml/2006/main">
               <a:ext uri="{FF2B5EF4-FFF2-40B4-BE49-F238E27FC236}">
-                <a16:creationId xmlns:a16="http://schemas.microsoft.com/office/drawing/2014/main" id="{8B2633D1-EA65-4854-9655-E368A426EAC0}"/>
+                <a16:creationId xmlns:a16="http://schemas.microsoft.com/office/drawing/2014/main" id="{05A73E56-4C75-4C70-8B63-70947C48797E}"/>
               </a:ext>
             </a:extLst>
           </p:cNvPr>
@@ -9151,7 +9151,7 @@
           <p:cNvPr id="14" name="Text 12">
             <a:extLst xmlns:a="http://schemas.openxmlformats.org/drawingml/2006/main">
               <a:ext uri="{FF2B5EF4-FFF2-40B4-BE49-F238E27FC236}">
-                <a16:creationId xmlns:a16="http://schemas.microsoft.com/office/drawing/2014/main" id="{A250AEB4-F0FE-411D-99AD-719B0CAED966}"/>
+                <a16:creationId xmlns:a16="http://schemas.microsoft.com/office/drawing/2014/main" id="{EBB23B12-BCA4-424C-8FE1-2D1805280180}"/>
               </a:ext>
             </a:extLst>
           </p:cNvPr>
@@ -9196,7 +9196,7 @@
           <p:cNvPr id="15" name="Text 13">
             <a:extLst xmlns:a="http://schemas.openxmlformats.org/drawingml/2006/main">
               <a:ext uri="{FF2B5EF4-FFF2-40B4-BE49-F238E27FC236}">
-                <a16:creationId xmlns:a16="http://schemas.microsoft.com/office/drawing/2014/main" id="{01D15DEE-FE06-4E49-9EA1-C2EED0797F70}"/>
+                <a16:creationId xmlns:a16="http://schemas.microsoft.com/office/drawing/2014/main" id="{99FA3365-8491-4F41-A0F2-4FA29A7D125D}"/>
               </a:ext>
             </a:extLst>
           </p:cNvPr>
@@ -9244,7 +9244,7 @@
           <p:cNvPr id="16" name="Text 14">
             <a:extLst xmlns:a="http://schemas.openxmlformats.org/drawingml/2006/main">
               <a:ext uri="{FF2B5EF4-FFF2-40B4-BE49-F238E27FC236}">
-                <a16:creationId xmlns:a16="http://schemas.microsoft.com/office/drawing/2014/main" id="{95B6FCBB-D89B-45EE-B331-68BAA9E00872}"/>
+                <a16:creationId xmlns:a16="http://schemas.microsoft.com/office/drawing/2014/main" id="{D230E613-FDC2-4E66-9E7B-4D5C95EF39CF}"/>
               </a:ext>
             </a:extLst>
           </p:cNvPr>
@@ -9282,7 +9282,7 @@
                 <a:ea typeface="Calibri"/>
                 <a:cs typeface="Calibri"/>
               </a:rPr>
-              <a:t>Five GitHub protocols on a pinned snapshot, including the fresh GCS/macro comparison</a:t>
+              <a:t>Six GitHub protocols on a pinned snapshot, including fair manual placement and bounded GEPA</a:t>
             </a:r>
           </a:p>
         </p:txBody>
@@ -9292,7 +9292,7 @@
           <p:cNvPr id="17" name="Text 15">
             <a:extLst xmlns:a="http://schemas.openxmlformats.org/drawingml/2006/main">
               <a:ext uri="{FF2B5EF4-FFF2-40B4-BE49-F238E27FC236}">
-                <a16:creationId xmlns:a16="http://schemas.microsoft.com/office/drawing/2014/main" id="{B1893B32-4AF1-4C9A-8ED6-E114045C9DC3}"/>
+                <a16:creationId xmlns:a16="http://schemas.microsoft.com/office/drawing/2014/main" id="{1B948390-B14D-4647-BA84-7CF4BFE05E20}"/>
               </a:ext>
             </a:extLst>
           </p:cNvPr>
@@ -9387,7 +9387,7 @@
           <p:cNvPr id="18" name="Shape 16">
             <a:extLst xmlns:a="http://schemas.openxmlformats.org/drawingml/2006/main">
               <a:ext uri="{FF2B5EF4-FFF2-40B4-BE49-F238E27FC236}">
-                <a16:creationId xmlns:a16="http://schemas.microsoft.com/office/drawing/2014/main" id="{7E4C0351-1C37-43C1-A5C7-83600C29AEF4}"/>
+                <a16:creationId xmlns:a16="http://schemas.microsoft.com/office/drawing/2014/main" id="{8788B302-7A5D-4704-819B-E5A242049B0E}"/>
               </a:ext>
             </a:extLst>
           </p:cNvPr>
@@ -9434,7 +9434,7 @@
           <p:cNvPr id="19" name="Shape 17">
             <a:extLst xmlns:a="http://schemas.openxmlformats.org/drawingml/2006/main">
               <a:ext uri="{FF2B5EF4-FFF2-40B4-BE49-F238E27FC236}">
-                <a16:creationId xmlns:a16="http://schemas.microsoft.com/office/drawing/2014/main" id="{40B81364-EBAC-4569-86DC-D63941C6EAF2}"/>
+                <a16:creationId xmlns:a16="http://schemas.microsoft.com/office/drawing/2014/main" id="{22055DDA-DCE2-4BE6-9B77-5E5D173C9292}"/>
               </a:ext>
             </a:extLst>
           </p:cNvPr>
@@ -9472,7 +9472,7 @@
           <p:cNvPr id="20" name="Text 18">
             <a:extLst xmlns:a="http://schemas.openxmlformats.org/drawingml/2006/main">
               <a:ext uri="{FF2B5EF4-FFF2-40B4-BE49-F238E27FC236}">
-                <a16:creationId xmlns:a16="http://schemas.microsoft.com/office/drawing/2014/main" id="{D73A4570-DBB8-4720-9ADD-0A6A02B3BC99}"/>
+                <a16:creationId xmlns:a16="http://schemas.microsoft.com/office/drawing/2014/main" id="{778701BA-80F6-4A11-90D6-A64C32D2A8EC}"/>
               </a:ext>
             </a:extLst>
           </p:cNvPr>
@@ -9517,7 +9517,7 @@
           <p:cNvPr id="21" name="Text 19">
             <a:extLst xmlns:a="http://schemas.openxmlformats.org/drawingml/2006/main">
               <a:ext uri="{FF2B5EF4-FFF2-40B4-BE49-F238E27FC236}">
-                <a16:creationId xmlns:a16="http://schemas.microsoft.com/office/drawing/2014/main" id="{8A5CEB6A-95E8-412D-BC31-7539229C3778}"/>
+                <a16:creationId xmlns:a16="http://schemas.microsoft.com/office/drawing/2014/main" id="{3756D15D-FCC2-424E-AC51-6ADD411F817B}"/>
               </a:ext>
             </a:extLst>
           </p:cNvPr>
@@ -9565,7 +9565,7 @@
           <p:cNvPr id="22" name="Text 20">
             <a:extLst xmlns:a="http://schemas.openxmlformats.org/drawingml/2006/main">
               <a:ext uri="{FF2B5EF4-FFF2-40B4-BE49-F238E27FC236}">
-                <a16:creationId xmlns:a16="http://schemas.microsoft.com/office/drawing/2014/main" id="{CB10EFA1-E2AB-4F31-A759-E2E506B1B668}"/>
+                <a16:creationId xmlns:a16="http://schemas.microsoft.com/office/drawing/2014/main" id="{0A6A0F85-B5F7-4568-B7CB-A92F97E72034}"/>
               </a:ext>
             </a:extLst>
           </p:cNvPr>
@@ -9613,7 +9613,7 @@
           <p:cNvPr id="23" name="Text 21">
             <a:extLst xmlns:a="http://schemas.openxmlformats.org/drawingml/2006/main">
               <a:ext uri="{FF2B5EF4-FFF2-40B4-BE49-F238E27FC236}">
-                <a16:creationId xmlns:a16="http://schemas.microsoft.com/office/drawing/2014/main" id="{27877A22-89B2-4D42-AA5D-7E4B5F4F9B46}"/>
+                <a16:creationId xmlns:a16="http://schemas.microsoft.com/office/drawing/2014/main" id="{1F1939E1-1D2F-43B8-ADC3-7BE5A24590D1}"/>
               </a:ext>
             </a:extLst>
           </p:cNvPr>
@@ -9708,7 +9708,7 @@
           <p:cNvPr id="24" name="Shape 22">
             <a:extLst xmlns:a="http://schemas.openxmlformats.org/drawingml/2006/main">
               <a:ext uri="{FF2B5EF4-FFF2-40B4-BE49-F238E27FC236}">
-                <a16:creationId xmlns:a16="http://schemas.microsoft.com/office/drawing/2014/main" id="{72258A75-CE72-4F8A-B741-C10C9D18FCFD}"/>
+                <a16:creationId xmlns:a16="http://schemas.microsoft.com/office/drawing/2014/main" id="{F2850125-E4B1-427D-80D2-842BDE397861}"/>
               </a:ext>
             </a:extLst>
           </p:cNvPr>
@@ -9755,7 +9755,7 @@
           <p:cNvPr id="25" name="Text 23">
             <a:extLst xmlns:a="http://schemas.openxmlformats.org/drawingml/2006/main">
               <a:ext uri="{FF2B5EF4-FFF2-40B4-BE49-F238E27FC236}">
-                <a16:creationId xmlns:a16="http://schemas.microsoft.com/office/drawing/2014/main" id="{ED5701AA-71F1-4876-BB06-AED206D3052A}"/>
+                <a16:creationId xmlns:a16="http://schemas.microsoft.com/office/drawing/2014/main" id="{366B3631-4CB3-4776-AEEB-40B3C4EE3C68}"/>
               </a:ext>
             </a:extLst>
           </p:cNvPr>
@@ -9809,7 +9809,7 @@
     </p:spTree>
     <p:extLst>
       <p:ext uri="{BB962C8B-B14F-4D97-AF65-F5344CB8AC3E}">
-        <p14:creationId xmlns:p14="http://schemas.microsoft.com/office/powerpoint/2010/main" val="1346961955"/>
+        <p14:creationId xmlns:p14="http://schemas.microsoft.com/office/powerpoint/2010/main" val="2057704928"/>
       </p:ext>
     </p:extLst>
   </p:cSld>
@@ -9840,7 +9840,7 @@
           <p:cNvPr id="2" name="Text 0">
             <a:extLst xmlns:a="http://schemas.openxmlformats.org/drawingml/2006/main">
               <a:ext uri="{FF2B5EF4-FFF2-40B4-BE49-F238E27FC236}">
-                <a16:creationId xmlns:a16="http://schemas.microsoft.com/office/drawing/2014/main" id="{7F6C7933-F5EF-4DD6-9E7C-5FF082E49635}"/>
+                <a16:creationId xmlns:a16="http://schemas.microsoft.com/office/drawing/2014/main" id="{BF5691BB-F8F4-4F55-AE25-55A95992BC78}"/>
               </a:ext>
             </a:extLst>
           </p:cNvPr>
@@ -9885,7 +9885,7 @@
           <p:cNvPr id="3" name="Text 1">
             <a:extLst xmlns:a="http://schemas.openxmlformats.org/drawingml/2006/main">
               <a:ext uri="{FF2B5EF4-FFF2-40B4-BE49-F238E27FC236}">
-                <a16:creationId xmlns:a16="http://schemas.microsoft.com/office/drawing/2014/main" id="{A7C7BC70-727C-498B-A63B-4F2F5E885124}"/>
+                <a16:creationId xmlns:a16="http://schemas.microsoft.com/office/drawing/2014/main" id="{83918F5A-7648-42E4-9F1D-7A493878B376}"/>
               </a:ext>
             </a:extLst>
           </p:cNvPr>
@@ -9930,7 +9930,7 @@
           <p:cNvPr id="4" name="Text 2">
             <a:extLst xmlns:a="http://schemas.openxmlformats.org/drawingml/2006/main">
               <a:ext uri="{FF2B5EF4-FFF2-40B4-BE49-F238E27FC236}">
-                <a16:creationId xmlns:a16="http://schemas.microsoft.com/office/drawing/2014/main" id="{9CED4C8D-483F-4A7E-A418-C51534AA18C1}"/>
+                <a16:creationId xmlns:a16="http://schemas.microsoft.com/office/drawing/2014/main" id="{CC72D636-DC95-4E7A-B3E1-CFB1EA379D44}"/>
               </a:ext>
             </a:extLst>
           </p:cNvPr>
@@ -9975,7 +9975,7 @@
           <p:cNvPr id="5" name="Text 3">
             <a:extLst xmlns:a="http://schemas.openxmlformats.org/drawingml/2006/main">
               <a:ext uri="{FF2B5EF4-FFF2-40B4-BE49-F238E27FC236}">
-                <a16:creationId xmlns:a16="http://schemas.microsoft.com/office/drawing/2014/main" id="{6BA9C743-6411-4FA9-958E-FDF5E95C4647}"/>
+                <a16:creationId xmlns:a16="http://schemas.microsoft.com/office/drawing/2014/main" id="{E59296BF-6542-42B5-8FEE-F0F4D5FDC0AE}"/>
               </a:ext>
             </a:extLst>
           </p:cNvPr>
@@ -10020,7 +10020,7 @@
           <p:cNvPr id="6" name="Text 4">
             <a:extLst xmlns:a="http://schemas.openxmlformats.org/drawingml/2006/main">
               <a:ext uri="{FF2B5EF4-FFF2-40B4-BE49-F238E27FC236}">
-                <a16:creationId xmlns:a16="http://schemas.microsoft.com/office/drawing/2014/main" id="{C313D3EB-17AC-43E0-A747-329724DD95F8}"/>
+                <a16:creationId xmlns:a16="http://schemas.microsoft.com/office/drawing/2014/main" id="{6737B239-C842-46DA-BC8C-A6B118080E30}"/>
               </a:ext>
             </a:extLst>
           </p:cNvPr>
@@ -10115,7 +10115,7 @@
           <p:cNvPr id="7" name="Shape 5">
             <a:extLst xmlns:a="http://schemas.openxmlformats.org/drawingml/2006/main">
               <a:ext uri="{FF2B5EF4-FFF2-40B4-BE49-F238E27FC236}">
-                <a16:creationId xmlns:a16="http://schemas.microsoft.com/office/drawing/2014/main" id="{F939D547-3307-4594-BDDE-89FBBFF02E26}"/>
+                <a16:creationId xmlns:a16="http://schemas.microsoft.com/office/drawing/2014/main" id="{412FA6D3-11AB-47F2-A16B-D22BFC9E1699}"/>
               </a:ext>
             </a:extLst>
           </p:cNvPr>
@@ -10162,7 +10162,7 @@
           <p:cNvPr id="8" name="Text 6">
             <a:extLst xmlns:a="http://schemas.openxmlformats.org/drawingml/2006/main">
               <a:ext uri="{FF2B5EF4-FFF2-40B4-BE49-F238E27FC236}">
-                <a16:creationId xmlns:a16="http://schemas.microsoft.com/office/drawing/2014/main" id="{47B2AE5D-6685-43DC-93AA-637D0C12C2B6}"/>
+                <a16:creationId xmlns:a16="http://schemas.microsoft.com/office/drawing/2014/main" id="{D13EBD82-61B3-4F57-BF79-FBE7B8621F89}"/>
               </a:ext>
             </a:extLst>
           </p:cNvPr>
@@ -10228,7 +10228,7 @@
         </p:xfrm>
         <a:graphic xmlns:a="http://schemas.openxmlformats.org/drawingml/2006/main">
           <a:graphicData uri="http://schemas.openxmlformats.org/drawingml/2006/chart">
-            <c:chart xmlns:r="http://schemas.openxmlformats.org/officeDocument/2006/relationships" xmlns:c="http://schemas.openxmlformats.org/drawingml/2006/chart" r:id="Reea853aca92a4cfb"/>
+            <c:chart xmlns:r="http://schemas.openxmlformats.org/officeDocument/2006/relationships" xmlns:c="http://schemas.openxmlformats.org/drawingml/2006/chart" r:id="Rfbf31868e22641f2"/>
           </a:graphicData>
         </a:graphic>
       </p:graphicFrame>
@@ -10237,7 +10237,7 @@
           <p:cNvPr id="10" name="Shape 7">
             <a:extLst xmlns:a="http://schemas.openxmlformats.org/drawingml/2006/main">
               <a:ext uri="{FF2B5EF4-FFF2-40B4-BE49-F238E27FC236}">
-                <a16:creationId xmlns:a16="http://schemas.microsoft.com/office/drawing/2014/main" id="{A9706CDF-0FE1-4BCA-846C-ED8660BFE9C8}"/>
+                <a16:creationId xmlns:a16="http://schemas.microsoft.com/office/drawing/2014/main" id="{7DC29135-2AA7-4BD6-BF8E-88873473266D}"/>
               </a:ext>
             </a:extLst>
           </p:cNvPr>
@@ -10284,7 +10284,7 @@
           <p:cNvPr id="11" name="Text 8">
             <a:extLst xmlns:a="http://schemas.openxmlformats.org/drawingml/2006/main">
               <a:ext uri="{FF2B5EF4-FFF2-40B4-BE49-F238E27FC236}">
-                <a16:creationId xmlns:a16="http://schemas.microsoft.com/office/drawing/2014/main" id="{0688F34F-485C-4211-9D2F-D54721826230}"/>
+                <a16:creationId xmlns:a16="http://schemas.microsoft.com/office/drawing/2014/main" id="{8F211DEC-2EA4-4607-A409-8F586FBB606C}"/>
               </a:ext>
             </a:extLst>
           </p:cNvPr>
@@ -10329,7 +10329,7 @@
           <p:cNvPr id="12" name="Text 9">
             <a:extLst xmlns:a="http://schemas.openxmlformats.org/drawingml/2006/main">
               <a:ext uri="{FF2B5EF4-FFF2-40B4-BE49-F238E27FC236}">
-                <a16:creationId xmlns:a16="http://schemas.microsoft.com/office/drawing/2014/main" id="{D99FE56C-C6B1-4B7F-86DB-FBE10DF81773}"/>
+                <a16:creationId xmlns:a16="http://schemas.microsoft.com/office/drawing/2014/main" id="{59B7B2B2-A0A9-412F-9EA1-D2E556D64D8F}"/>
               </a:ext>
             </a:extLst>
           </p:cNvPr>
@@ -10377,7 +10377,7 @@
           <p:cNvPr id="13" name="Shape 10">
             <a:extLst xmlns:a="http://schemas.openxmlformats.org/drawingml/2006/main">
               <a:ext uri="{FF2B5EF4-FFF2-40B4-BE49-F238E27FC236}">
-                <a16:creationId xmlns:a16="http://schemas.microsoft.com/office/drawing/2014/main" id="{8D7BF3CA-1C93-47A7-B1E0-2BC08F0BD20E}"/>
+                <a16:creationId xmlns:a16="http://schemas.microsoft.com/office/drawing/2014/main" id="{BE36B501-3E6A-4230-949A-2D303D7FCEC4}"/>
               </a:ext>
             </a:extLst>
           </p:cNvPr>
@@ -10424,7 +10424,7 @@
           <p:cNvPr id="14" name="Text 11">
             <a:extLst xmlns:a="http://schemas.openxmlformats.org/drawingml/2006/main">
               <a:ext uri="{FF2B5EF4-FFF2-40B4-BE49-F238E27FC236}">
-                <a16:creationId xmlns:a16="http://schemas.microsoft.com/office/drawing/2014/main" id="{3CA2F270-EBCF-4363-8BAD-D4AF4672C11D}"/>
+                <a16:creationId xmlns:a16="http://schemas.microsoft.com/office/drawing/2014/main" id="{A9020143-E86F-43A4-A12D-E9FD1CCF41A6}"/>
               </a:ext>
             </a:extLst>
           </p:cNvPr>
@@ -10469,7 +10469,7 @@
           <p:cNvPr id="15" name="Text 12">
             <a:extLst xmlns:a="http://schemas.openxmlformats.org/drawingml/2006/main">
               <a:ext uri="{FF2B5EF4-FFF2-40B4-BE49-F238E27FC236}">
-                <a16:creationId xmlns:a16="http://schemas.microsoft.com/office/drawing/2014/main" id="{6C4834C0-2D61-498F-A2D2-045F36610535}"/>
+                <a16:creationId xmlns:a16="http://schemas.microsoft.com/office/drawing/2014/main" id="{D5C0C69D-954F-450D-A35E-F30883501906}"/>
               </a:ext>
             </a:extLst>
           </p:cNvPr>
@@ -10517,7 +10517,7 @@
           <p:cNvPr id="16" name="Shape 13">
             <a:extLst xmlns:a="http://schemas.openxmlformats.org/drawingml/2006/main">
               <a:ext uri="{FF2B5EF4-FFF2-40B4-BE49-F238E27FC236}">
-                <a16:creationId xmlns:a16="http://schemas.microsoft.com/office/drawing/2014/main" id="{1349432D-03CF-4546-A405-6F164BE17ED8}"/>
+                <a16:creationId xmlns:a16="http://schemas.microsoft.com/office/drawing/2014/main" id="{4394EC85-84FA-4799-8DE4-99AC2ED94F1D}"/>
               </a:ext>
             </a:extLst>
           </p:cNvPr>
@@ -10564,7 +10564,7 @@
           <p:cNvPr id="17" name="Text 14">
             <a:extLst xmlns:a="http://schemas.openxmlformats.org/drawingml/2006/main">
               <a:ext uri="{FF2B5EF4-FFF2-40B4-BE49-F238E27FC236}">
-                <a16:creationId xmlns:a16="http://schemas.microsoft.com/office/drawing/2014/main" id="{65B92DF9-0B85-4C20-8185-60F2F1D07A55}"/>
+                <a16:creationId xmlns:a16="http://schemas.microsoft.com/office/drawing/2014/main" id="{E0F55307-349B-4E2E-8925-B8FE5BD7652D}"/>
               </a:ext>
             </a:extLst>
           </p:cNvPr>
@@ -10609,7 +10609,7 @@
           <p:cNvPr id="18" name="Text 15">
             <a:extLst xmlns:a="http://schemas.openxmlformats.org/drawingml/2006/main">
               <a:ext uri="{FF2B5EF4-FFF2-40B4-BE49-F238E27FC236}">
-                <a16:creationId xmlns:a16="http://schemas.microsoft.com/office/drawing/2014/main" id="{CAD28E0D-8FDD-4107-B2D0-D0F230A50B93}"/>
+                <a16:creationId xmlns:a16="http://schemas.microsoft.com/office/drawing/2014/main" id="{539E32D6-A5C0-48F8-81D8-DE797BCE28AA}"/>
               </a:ext>
             </a:extLst>
           </p:cNvPr>
@@ -10657,7 +10657,7 @@
           <p:cNvPr id="19" name="Shape 16">
             <a:extLst xmlns:a="http://schemas.openxmlformats.org/drawingml/2006/main">
               <a:ext uri="{FF2B5EF4-FFF2-40B4-BE49-F238E27FC236}">
-                <a16:creationId xmlns:a16="http://schemas.microsoft.com/office/drawing/2014/main" id="{6DD6FC29-CEB8-4CE5-8C71-2B98A766F2CF}"/>
+                <a16:creationId xmlns:a16="http://schemas.microsoft.com/office/drawing/2014/main" id="{C42A4D82-4243-4E57-95B7-00B12A2AF0B1}"/>
               </a:ext>
             </a:extLst>
           </p:cNvPr>
@@ -10704,7 +10704,7 @@
           <p:cNvPr id="20" name="Text 17">
             <a:extLst xmlns:a="http://schemas.openxmlformats.org/drawingml/2006/main">
               <a:ext uri="{FF2B5EF4-FFF2-40B4-BE49-F238E27FC236}">
-                <a16:creationId xmlns:a16="http://schemas.microsoft.com/office/drawing/2014/main" id="{1AEB4289-D3A4-4D2F-8742-775FD5FCB132}"/>
+                <a16:creationId xmlns:a16="http://schemas.microsoft.com/office/drawing/2014/main" id="{BB611D54-3BAD-438B-8219-5D8CCEC58682}"/>
               </a:ext>
             </a:extLst>
           </p:cNvPr>
@@ -10749,7 +10749,7 @@
           <p:cNvPr id="21" name="Text 18">
             <a:extLst xmlns:a="http://schemas.openxmlformats.org/drawingml/2006/main">
               <a:ext uri="{FF2B5EF4-FFF2-40B4-BE49-F238E27FC236}">
-                <a16:creationId xmlns:a16="http://schemas.microsoft.com/office/drawing/2014/main" id="{3F28998E-FC3D-4A2E-8983-AD32BB62B2FA}"/>
+                <a16:creationId xmlns:a16="http://schemas.microsoft.com/office/drawing/2014/main" id="{133DF6E6-86BE-41B9-A082-812D5F75D287}"/>
               </a:ext>
             </a:extLst>
           </p:cNvPr>
@@ -10795,7 +10795,7 @@
     </p:spTree>
     <p:extLst>
       <p:ext uri="{BB962C8B-B14F-4D97-AF65-F5344CB8AC3E}">
-        <p14:creationId xmlns:p14="http://schemas.microsoft.com/office/powerpoint/2010/main" val="1315596605"/>
+        <p14:creationId xmlns:p14="http://schemas.microsoft.com/office/powerpoint/2010/main" val="2101126883"/>
       </p:ext>
     </p:extLst>
   </p:cSld>
@@ -10826,7 +10826,7 @@
           <p:cNvPr id="2" name="Text 0">
             <a:extLst xmlns:a="http://schemas.openxmlformats.org/drawingml/2006/main">
               <a:ext uri="{FF2B5EF4-FFF2-40B4-BE49-F238E27FC236}">
-                <a16:creationId xmlns:a16="http://schemas.microsoft.com/office/drawing/2014/main" id="{79553275-1EA3-4BB9-BE9B-A84B11863B66}"/>
+                <a16:creationId xmlns:a16="http://schemas.microsoft.com/office/drawing/2014/main" id="{ADE81562-3DB8-4773-B1D9-427C1FB3731F}"/>
               </a:ext>
             </a:extLst>
           </p:cNvPr>
@@ -10871,7 +10871,7 @@
           <p:cNvPr id="3" name="Text 1">
             <a:extLst xmlns:a="http://schemas.openxmlformats.org/drawingml/2006/main">
               <a:ext uri="{FF2B5EF4-FFF2-40B4-BE49-F238E27FC236}">
-                <a16:creationId xmlns:a16="http://schemas.microsoft.com/office/drawing/2014/main" id="{EB9E3515-E4CB-4267-B609-1023D62DF2E2}"/>
+                <a16:creationId xmlns:a16="http://schemas.microsoft.com/office/drawing/2014/main" id="{FF999CC3-0252-4B1C-BF4F-668AFC3BB06A}"/>
               </a:ext>
             </a:extLst>
           </p:cNvPr>
@@ -10916,7 +10916,7 @@
           <p:cNvPr id="4" name="Text 2">
             <a:extLst xmlns:a="http://schemas.openxmlformats.org/drawingml/2006/main">
               <a:ext uri="{FF2B5EF4-FFF2-40B4-BE49-F238E27FC236}">
-                <a16:creationId xmlns:a16="http://schemas.microsoft.com/office/drawing/2014/main" id="{5F4CE21C-E36B-4768-AA90-25AE1D490059}"/>
+                <a16:creationId xmlns:a16="http://schemas.microsoft.com/office/drawing/2014/main" id="{9E5E8EF0-CFC6-444B-839A-8900320F00A4}"/>
               </a:ext>
             </a:extLst>
           </p:cNvPr>
@@ -10961,7 +10961,7 @@
           <p:cNvPr id="5" name="Text 3">
             <a:extLst xmlns:a="http://schemas.openxmlformats.org/drawingml/2006/main">
               <a:ext uri="{FF2B5EF4-FFF2-40B4-BE49-F238E27FC236}">
-                <a16:creationId xmlns:a16="http://schemas.microsoft.com/office/drawing/2014/main" id="{E3544ADB-3F89-4DB9-9D44-A0D3F03C2CF7}"/>
+                <a16:creationId xmlns:a16="http://schemas.microsoft.com/office/drawing/2014/main" id="{E9228F54-4A6C-402E-AA6A-0F6F3A4C6E59}"/>
               </a:ext>
             </a:extLst>
           </p:cNvPr>
@@ -11013,7 +11013,7 @@
         </p:xfrm>
         <a:graphic xmlns:a="http://schemas.openxmlformats.org/drawingml/2006/main">
           <a:graphicData uri="http://schemas.openxmlformats.org/drawingml/2006/chart">
-            <c:chart xmlns:r="http://schemas.openxmlformats.org/officeDocument/2006/relationships" xmlns:c="http://schemas.openxmlformats.org/drawingml/2006/chart" r:id="R3449963e262e476c"/>
+            <c:chart xmlns:r="http://schemas.openxmlformats.org/officeDocument/2006/relationships" xmlns:c="http://schemas.openxmlformats.org/drawingml/2006/chart" r:id="R5f6ce53ac87b4f49"/>
           </a:graphicData>
         </a:graphic>
       </p:graphicFrame>
@@ -11022,7 +11022,7 @@
           <p:cNvPr id="7" name="Shape 4">
             <a:extLst xmlns:a="http://schemas.openxmlformats.org/drawingml/2006/main">
               <a:ext uri="{FF2B5EF4-FFF2-40B4-BE49-F238E27FC236}">
-                <a16:creationId xmlns:a16="http://schemas.microsoft.com/office/drawing/2014/main" id="{5AE05AC0-163F-44C8-BB54-8BCCCBD30483}"/>
+                <a16:creationId xmlns:a16="http://schemas.microsoft.com/office/drawing/2014/main" id="{45704B42-9677-4652-8760-E67B295D4349}"/>
               </a:ext>
             </a:extLst>
           </p:cNvPr>
@@ -11069,7 +11069,7 @@
           <p:cNvPr id="8" name="Text 5">
             <a:extLst xmlns:a="http://schemas.openxmlformats.org/drawingml/2006/main">
               <a:ext uri="{FF2B5EF4-FFF2-40B4-BE49-F238E27FC236}">
-                <a16:creationId xmlns:a16="http://schemas.microsoft.com/office/drawing/2014/main" id="{53E4B2F7-ACCD-4AC0-9906-AED4C538063A}"/>
+                <a16:creationId xmlns:a16="http://schemas.microsoft.com/office/drawing/2014/main" id="{47D9DFB5-DCA4-4302-BA74-440B3B228B79}"/>
               </a:ext>
             </a:extLst>
           </p:cNvPr>
@@ -11114,7 +11114,7 @@
           <p:cNvPr id="9" name="Text 6">
             <a:extLst xmlns:a="http://schemas.openxmlformats.org/drawingml/2006/main">
               <a:ext uri="{FF2B5EF4-FFF2-40B4-BE49-F238E27FC236}">
-                <a16:creationId xmlns:a16="http://schemas.microsoft.com/office/drawing/2014/main" id="{45DACA85-FD33-4DA9-82C5-3476ADAC17C2}"/>
+                <a16:creationId xmlns:a16="http://schemas.microsoft.com/office/drawing/2014/main" id="{D0A0162E-77CC-4AFD-BC20-AD3B6489442E}"/>
               </a:ext>
             </a:extLst>
           </p:cNvPr>
@@ -11231,7 +11231,7 @@
           <p:cNvPr id="10" name="Shape 7">
             <a:extLst xmlns:a="http://schemas.openxmlformats.org/drawingml/2006/main">
               <a:ext uri="{FF2B5EF4-FFF2-40B4-BE49-F238E27FC236}">
-                <a16:creationId xmlns:a16="http://schemas.microsoft.com/office/drawing/2014/main" id="{80A30DC7-6C2D-4816-B9C3-2EE2D91D8122}"/>
+                <a16:creationId xmlns:a16="http://schemas.microsoft.com/office/drawing/2014/main" id="{50E1DC71-4E09-4B0B-8E3E-C512C6CBA908}"/>
               </a:ext>
             </a:extLst>
           </p:cNvPr>
@@ -11278,7 +11278,7 @@
           <p:cNvPr id="11" name="Text 8">
             <a:extLst xmlns:a="http://schemas.openxmlformats.org/drawingml/2006/main">
               <a:ext uri="{FF2B5EF4-FFF2-40B4-BE49-F238E27FC236}">
-                <a16:creationId xmlns:a16="http://schemas.microsoft.com/office/drawing/2014/main" id="{5D9FC6BA-4F2F-4466-9662-EAEE9168288B}"/>
+                <a16:creationId xmlns:a16="http://schemas.microsoft.com/office/drawing/2014/main" id="{13412F7F-013A-4E69-B783-9E26B4392C63}"/>
               </a:ext>
             </a:extLst>
           </p:cNvPr>
@@ -11323,7 +11323,7 @@
           <p:cNvPr id="12" name="Text 9">
             <a:extLst xmlns:a="http://schemas.openxmlformats.org/drawingml/2006/main">
               <a:ext uri="{FF2B5EF4-FFF2-40B4-BE49-F238E27FC236}">
-                <a16:creationId xmlns:a16="http://schemas.microsoft.com/office/drawing/2014/main" id="{E0F0ACDD-253C-4EEF-965D-3DD3FFA412D1}"/>
+                <a16:creationId xmlns:a16="http://schemas.microsoft.com/office/drawing/2014/main" id="{9B5AB5BA-ED1F-40AB-81DB-8636FD501A78}"/>
               </a:ext>
             </a:extLst>
           </p:cNvPr>
@@ -11371,7 +11371,7 @@
           <p:cNvPr id="13" name="Shape 10">
             <a:extLst xmlns:a="http://schemas.openxmlformats.org/drawingml/2006/main">
               <a:ext uri="{FF2B5EF4-FFF2-40B4-BE49-F238E27FC236}">
-                <a16:creationId xmlns:a16="http://schemas.microsoft.com/office/drawing/2014/main" id="{FB034015-9CD5-410D-AA33-82F140CAD076}"/>
+                <a16:creationId xmlns:a16="http://schemas.microsoft.com/office/drawing/2014/main" id="{387C16C2-6ACE-48B4-B11A-C8014E1632E7}"/>
               </a:ext>
             </a:extLst>
           </p:cNvPr>
@@ -11418,7 +11418,7 @@
           <p:cNvPr id="14" name="Text 11">
             <a:extLst xmlns:a="http://schemas.openxmlformats.org/drawingml/2006/main">
               <a:ext uri="{FF2B5EF4-FFF2-40B4-BE49-F238E27FC236}">
-                <a16:creationId xmlns:a16="http://schemas.microsoft.com/office/drawing/2014/main" id="{E07F4613-7B80-401C-B492-33753E7D130F}"/>
+                <a16:creationId xmlns:a16="http://schemas.microsoft.com/office/drawing/2014/main" id="{E00A489F-FAB4-4C74-B5F9-0DA16E5A8CFC}"/>
               </a:ext>
             </a:extLst>
           </p:cNvPr>
@@ -11463,7 +11463,7 @@
           <p:cNvPr id="15" name="Text 12">
             <a:extLst xmlns:a="http://schemas.openxmlformats.org/drawingml/2006/main">
               <a:ext uri="{FF2B5EF4-FFF2-40B4-BE49-F238E27FC236}">
-                <a16:creationId xmlns:a16="http://schemas.microsoft.com/office/drawing/2014/main" id="{3ED651A5-0AC4-4388-9A57-8AE41BB17AF4}"/>
+                <a16:creationId xmlns:a16="http://schemas.microsoft.com/office/drawing/2014/main" id="{E3E24E26-E84A-42CF-9467-4AAEBAF597EB}"/>
               </a:ext>
             </a:extLst>
           </p:cNvPr>
@@ -11511,7 +11511,7 @@
           <p:cNvPr id="16" name="Shape 13">
             <a:extLst xmlns:a="http://schemas.openxmlformats.org/drawingml/2006/main">
               <a:ext uri="{FF2B5EF4-FFF2-40B4-BE49-F238E27FC236}">
-                <a16:creationId xmlns:a16="http://schemas.microsoft.com/office/drawing/2014/main" id="{38CA1435-96DF-4C3C-8B70-BA1F32912487}"/>
+                <a16:creationId xmlns:a16="http://schemas.microsoft.com/office/drawing/2014/main" id="{A327BD91-5B93-4387-B815-943124911252}"/>
               </a:ext>
             </a:extLst>
           </p:cNvPr>
@@ -11558,7 +11558,7 @@
           <p:cNvPr id="17" name="Text 14">
             <a:extLst xmlns:a="http://schemas.openxmlformats.org/drawingml/2006/main">
               <a:ext uri="{FF2B5EF4-FFF2-40B4-BE49-F238E27FC236}">
-                <a16:creationId xmlns:a16="http://schemas.microsoft.com/office/drawing/2014/main" id="{20BD4638-5E81-41A5-A6EF-08BBB537BE2C}"/>
+                <a16:creationId xmlns:a16="http://schemas.microsoft.com/office/drawing/2014/main" id="{269E3F82-A10D-40A6-8F94-8292238CC9AF}"/>
               </a:ext>
             </a:extLst>
           </p:cNvPr>
@@ -11603,7 +11603,7 @@
           <p:cNvPr id="18" name="Text 15">
             <a:extLst xmlns:a="http://schemas.openxmlformats.org/drawingml/2006/main">
               <a:ext uri="{FF2B5EF4-FFF2-40B4-BE49-F238E27FC236}">
-                <a16:creationId xmlns:a16="http://schemas.microsoft.com/office/drawing/2014/main" id="{CA2890FB-8590-425B-8013-7F5E34C291A9}"/>
+                <a16:creationId xmlns:a16="http://schemas.microsoft.com/office/drawing/2014/main" id="{48836F9C-65BF-4F65-A828-D36C49535DCE}"/>
               </a:ext>
             </a:extLst>
           </p:cNvPr>
@@ -11651,7 +11651,7 @@
           <p:cNvPr id="19" name="Shape 16">
             <a:extLst xmlns:a="http://schemas.openxmlformats.org/drawingml/2006/main">
               <a:ext uri="{FF2B5EF4-FFF2-40B4-BE49-F238E27FC236}">
-                <a16:creationId xmlns:a16="http://schemas.microsoft.com/office/drawing/2014/main" id="{47CB0229-8601-4EEE-A841-5824F6DCDC7B}"/>
+                <a16:creationId xmlns:a16="http://schemas.microsoft.com/office/drawing/2014/main" id="{EE1AAA35-A411-4AAF-94A7-535985A77430}"/>
               </a:ext>
             </a:extLst>
           </p:cNvPr>
@@ -11698,7 +11698,7 @@
           <p:cNvPr id="20" name="Text 17">
             <a:extLst xmlns:a="http://schemas.openxmlformats.org/drawingml/2006/main">
               <a:ext uri="{FF2B5EF4-FFF2-40B4-BE49-F238E27FC236}">
-                <a16:creationId xmlns:a16="http://schemas.microsoft.com/office/drawing/2014/main" id="{B2E8E823-4D78-4EEF-9F47-1F5AC4B34A91}"/>
+                <a16:creationId xmlns:a16="http://schemas.microsoft.com/office/drawing/2014/main" id="{B4698BFD-FDEE-48F5-8299-11E445313A0E}"/>
               </a:ext>
             </a:extLst>
           </p:cNvPr>
@@ -11743,7 +11743,7 @@
           <p:cNvPr id="21" name="Text 18">
             <a:extLst xmlns:a="http://schemas.openxmlformats.org/drawingml/2006/main">
               <a:ext uri="{FF2B5EF4-FFF2-40B4-BE49-F238E27FC236}">
-                <a16:creationId xmlns:a16="http://schemas.microsoft.com/office/drawing/2014/main" id="{A67E70DC-E9F3-453D-A8C2-658007CE8380}"/>
+                <a16:creationId xmlns:a16="http://schemas.microsoft.com/office/drawing/2014/main" id="{64DFC59B-103C-4E36-B510-F8E99E81E1D2}"/>
               </a:ext>
             </a:extLst>
           </p:cNvPr>
@@ -11791,7 +11791,7 @@
           <p:cNvPr id="22" name="Shape 19">
             <a:extLst xmlns:a="http://schemas.openxmlformats.org/drawingml/2006/main">
               <a:ext uri="{FF2B5EF4-FFF2-40B4-BE49-F238E27FC236}">
-                <a16:creationId xmlns:a16="http://schemas.microsoft.com/office/drawing/2014/main" id="{20E936FD-B21E-4A4B-8654-909A38A85608}"/>
+                <a16:creationId xmlns:a16="http://schemas.microsoft.com/office/drawing/2014/main" id="{002E8C43-7C67-4F1E-B040-6D2A35E2E13B}"/>
               </a:ext>
             </a:extLst>
           </p:cNvPr>
@@ -11838,7 +11838,7 @@
           <p:cNvPr id="23" name="Text 20">
             <a:extLst xmlns:a="http://schemas.openxmlformats.org/drawingml/2006/main">
               <a:ext uri="{FF2B5EF4-FFF2-40B4-BE49-F238E27FC236}">
-                <a16:creationId xmlns:a16="http://schemas.microsoft.com/office/drawing/2014/main" id="{FFC26D4B-8598-45E1-8A4F-0DC92701CBFE}"/>
+                <a16:creationId xmlns:a16="http://schemas.microsoft.com/office/drawing/2014/main" id="{EE6A5351-486D-42F6-9548-BC83AAFD9092}"/>
               </a:ext>
             </a:extLst>
           </p:cNvPr>
@@ -11883,7 +11883,7 @@
           <p:cNvPr id="24" name="Text 21">
             <a:extLst xmlns:a="http://schemas.openxmlformats.org/drawingml/2006/main">
               <a:ext uri="{FF2B5EF4-FFF2-40B4-BE49-F238E27FC236}">
-                <a16:creationId xmlns:a16="http://schemas.microsoft.com/office/drawing/2014/main" id="{538792A4-50E0-4747-BBF0-1898462C4F26}"/>
+                <a16:creationId xmlns:a16="http://schemas.microsoft.com/office/drawing/2014/main" id="{137DF8EF-3E3A-4676-80F9-460B00C7D1DD}"/>
               </a:ext>
             </a:extLst>
           </p:cNvPr>
@@ -11929,7 +11929,7 @@
     </p:spTree>
     <p:extLst>
       <p:ext uri="{BB962C8B-B14F-4D97-AF65-F5344CB8AC3E}">
-        <p14:creationId xmlns:p14="http://schemas.microsoft.com/office/powerpoint/2010/main" val="86244661"/>
+        <p14:creationId xmlns:p14="http://schemas.microsoft.com/office/powerpoint/2010/main" val="1467933089"/>
       </p:ext>
     </p:extLst>
   </p:cSld>
@@ -11960,7 +11960,7 @@
           <p:cNvPr id="2" name="Text 0">
             <a:extLst xmlns:a="http://schemas.openxmlformats.org/drawingml/2006/main">
               <a:ext uri="{FF2B5EF4-FFF2-40B4-BE49-F238E27FC236}">
-                <a16:creationId xmlns:a16="http://schemas.microsoft.com/office/drawing/2014/main" id="{02706F30-9E4F-42CE-860B-D2B018B4DC8B}"/>
+                <a16:creationId xmlns:a16="http://schemas.microsoft.com/office/drawing/2014/main" id="{D648F763-0DA1-445C-8B22-3B232FD3549D}"/>
               </a:ext>
             </a:extLst>
           </p:cNvPr>
@@ -12005,7 +12005,7 @@
           <p:cNvPr id="3" name="Text 1">
             <a:extLst xmlns:a="http://schemas.openxmlformats.org/drawingml/2006/main">
               <a:ext uri="{FF2B5EF4-FFF2-40B4-BE49-F238E27FC236}">
-                <a16:creationId xmlns:a16="http://schemas.microsoft.com/office/drawing/2014/main" id="{5D552FDF-4B9F-4D37-9228-F0E5BE4A6FBE}"/>
+                <a16:creationId xmlns:a16="http://schemas.microsoft.com/office/drawing/2014/main" id="{02D39A5C-A0BB-493A-961D-BB56C17247B3}"/>
               </a:ext>
             </a:extLst>
           </p:cNvPr>
@@ -12050,7 +12050,7 @@
           <p:cNvPr id="4" name="Text 2">
             <a:extLst xmlns:a="http://schemas.openxmlformats.org/drawingml/2006/main">
               <a:ext uri="{FF2B5EF4-FFF2-40B4-BE49-F238E27FC236}">
-                <a16:creationId xmlns:a16="http://schemas.microsoft.com/office/drawing/2014/main" id="{1A959164-41AA-41BC-A644-840BCACBD2B3}"/>
+                <a16:creationId xmlns:a16="http://schemas.microsoft.com/office/drawing/2014/main" id="{34192B08-7E5F-4BAE-867E-C382569C37AA}"/>
               </a:ext>
             </a:extLst>
           </p:cNvPr>
@@ -12095,7 +12095,7 @@
           <p:cNvPr id="5" name="Text 3">
             <a:extLst xmlns:a="http://schemas.openxmlformats.org/drawingml/2006/main">
               <a:ext uri="{FF2B5EF4-FFF2-40B4-BE49-F238E27FC236}">
-                <a16:creationId xmlns:a16="http://schemas.microsoft.com/office/drawing/2014/main" id="{84D36AC8-ED79-4D2F-A380-AFC1E1FA2C18}"/>
+                <a16:creationId xmlns:a16="http://schemas.microsoft.com/office/drawing/2014/main" id="{56EEDE8D-F6DA-4182-B384-73AAA509CEEE}"/>
               </a:ext>
             </a:extLst>
           </p:cNvPr>
@@ -12140,7 +12140,7 @@
           <p:cNvPr id="6" name="Shape 4">
             <a:extLst xmlns:a="http://schemas.openxmlformats.org/drawingml/2006/main">
               <a:ext uri="{FF2B5EF4-FFF2-40B4-BE49-F238E27FC236}">
-                <a16:creationId xmlns:a16="http://schemas.microsoft.com/office/drawing/2014/main" id="{DE26631C-C702-41B0-86EA-76920167ED7F}"/>
+                <a16:creationId xmlns:a16="http://schemas.microsoft.com/office/drawing/2014/main" id="{49B143FF-AA44-44A7-9965-903566F2A6E2}"/>
               </a:ext>
             </a:extLst>
           </p:cNvPr>
@@ -12187,7 +12187,7 @@
           <p:cNvPr id="7" name="Text 5">
             <a:extLst xmlns:a="http://schemas.openxmlformats.org/drawingml/2006/main">
               <a:ext uri="{FF2B5EF4-FFF2-40B4-BE49-F238E27FC236}">
-                <a16:creationId xmlns:a16="http://schemas.microsoft.com/office/drawing/2014/main" id="{0CF3704A-CA56-4137-AA47-9BE3A68D416D}"/>
+                <a16:creationId xmlns:a16="http://schemas.microsoft.com/office/drawing/2014/main" id="{B1B3B84F-7979-4670-AB8F-F10CE22867A5}"/>
               </a:ext>
             </a:extLst>
           </p:cNvPr>
@@ -12232,7 +12232,7 @@
           <p:cNvPr id="8" name="Text 6">
             <a:extLst xmlns:a="http://schemas.openxmlformats.org/drawingml/2006/main">
               <a:ext uri="{FF2B5EF4-FFF2-40B4-BE49-F238E27FC236}">
-                <a16:creationId xmlns:a16="http://schemas.microsoft.com/office/drawing/2014/main" id="{D4015760-2178-4E1C-BAE2-580E0906D11F}"/>
+                <a16:creationId xmlns:a16="http://schemas.microsoft.com/office/drawing/2014/main" id="{E43D4DC8-4A8F-4BC6-BECF-021E46A20554}"/>
               </a:ext>
             </a:extLst>
           </p:cNvPr>
@@ -12277,7 +12277,7 @@
           <p:cNvPr id="9" name="Text 7">
             <a:extLst xmlns:a="http://schemas.openxmlformats.org/drawingml/2006/main">
               <a:ext uri="{FF2B5EF4-FFF2-40B4-BE49-F238E27FC236}">
-                <a16:creationId xmlns:a16="http://schemas.microsoft.com/office/drawing/2014/main" id="{D28F1F19-C57B-4C96-A25D-93C9336EDBA2}"/>
+                <a16:creationId xmlns:a16="http://schemas.microsoft.com/office/drawing/2014/main" id="{4F3B46DF-0E84-456A-B702-59434AF1CA1E}"/>
               </a:ext>
             </a:extLst>
           </p:cNvPr>
@@ -12322,7 +12322,7 @@
           <p:cNvPr id="10" name="Text 8">
             <a:extLst xmlns:a="http://schemas.openxmlformats.org/drawingml/2006/main">
               <a:ext uri="{FF2B5EF4-FFF2-40B4-BE49-F238E27FC236}">
-                <a16:creationId xmlns:a16="http://schemas.microsoft.com/office/drawing/2014/main" id="{D6354A36-D054-4659-82F0-E0E12AD7AF09}"/>
+                <a16:creationId xmlns:a16="http://schemas.microsoft.com/office/drawing/2014/main" id="{1B8F2EC5-1D48-4620-AD78-E44B037A1D0E}"/>
               </a:ext>
             </a:extLst>
           </p:cNvPr>
@@ -12367,7 +12367,7 @@
           <p:cNvPr id="11" name="Text 9">
             <a:extLst xmlns:a="http://schemas.openxmlformats.org/drawingml/2006/main">
               <a:ext uri="{FF2B5EF4-FFF2-40B4-BE49-F238E27FC236}">
-                <a16:creationId xmlns:a16="http://schemas.microsoft.com/office/drawing/2014/main" id="{8B56560D-2D71-46D1-A7D0-710EB1EA17E1}"/>
+                <a16:creationId xmlns:a16="http://schemas.microsoft.com/office/drawing/2014/main" id="{AD618EEB-DEC1-4CEE-8A99-E2932409A992}"/>
               </a:ext>
             </a:extLst>
           </p:cNvPr>
@@ -12412,7 +12412,7 @@
           <p:cNvPr id="12" name="Text 10">
             <a:extLst xmlns:a="http://schemas.openxmlformats.org/drawingml/2006/main">
               <a:ext uri="{FF2B5EF4-FFF2-40B4-BE49-F238E27FC236}">
-                <a16:creationId xmlns:a16="http://schemas.microsoft.com/office/drawing/2014/main" id="{93676C1F-91A4-41F6-97D7-34144B313E84}"/>
+                <a16:creationId xmlns:a16="http://schemas.microsoft.com/office/drawing/2014/main" id="{8711EA13-0217-4EFA-99B0-29F68076D0E8}"/>
               </a:ext>
             </a:extLst>
           </p:cNvPr>
@@ -12457,7 +12457,7 @@
           <p:cNvPr id="13" name="Text 11">
             <a:extLst xmlns:a="http://schemas.openxmlformats.org/drawingml/2006/main">
               <a:ext uri="{FF2B5EF4-FFF2-40B4-BE49-F238E27FC236}">
-                <a16:creationId xmlns:a16="http://schemas.microsoft.com/office/drawing/2014/main" id="{6647C1BD-131D-46DD-AC51-920FCB580967}"/>
+                <a16:creationId xmlns:a16="http://schemas.microsoft.com/office/drawing/2014/main" id="{2D54B73A-1A4C-4B58-8828-76FB6A464CA9}"/>
               </a:ext>
             </a:extLst>
           </p:cNvPr>
@@ -12502,7 +12502,7 @@
           <p:cNvPr id="14" name="Text 12">
             <a:extLst xmlns:a="http://schemas.openxmlformats.org/drawingml/2006/main">
               <a:ext uri="{FF2B5EF4-FFF2-40B4-BE49-F238E27FC236}">
-                <a16:creationId xmlns:a16="http://schemas.microsoft.com/office/drawing/2014/main" id="{93296786-8C77-4D95-8CDA-2ADBD336835F}"/>
+                <a16:creationId xmlns:a16="http://schemas.microsoft.com/office/drawing/2014/main" id="{288892AB-4974-4D5C-A047-C95F922CFF0E}"/>
               </a:ext>
             </a:extLst>
           </p:cNvPr>
@@ -12547,7 +12547,7 @@
           <p:cNvPr id="15" name="Text 13">
             <a:extLst xmlns:a="http://schemas.openxmlformats.org/drawingml/2006/main">
               <a:ext uri="{FF2B5EF4-FFF2-40B4-BE49-F238E27FC236}">
-                <a16:creationId xmlns:a16="http://schemas.microsoft.com/office/drawing/2014/main" id="{FEBD2CA6-F42D-45C3-89D3-B600FECA6A03}"/>
+                <a16:creationId xmlns:a16="http://schemas.microsoft.com/office/drawing/2014/main" id="{9BD8D5BF-4A3D-4DBA-B0E3-7E322C4BCE12}"/>
               </a:ext>
             </a:extLst>
           </p:cNvPr>
@@ -12595,7 +12595,7 @@
           <p:cNvPr id="16" name="Shape 14">
             <a:extLst xmlns:a="http://schemas.openxmlformats.org/drawingml/2006/main">
               <a:ext uri="{FF2B5EF4-FFF2-40B4-BE49-F238E27FC236}">
-                <a16:creationId xmlns:a16="http://schemas.microsoft.com/office/drawing/2014/main" id="{3746EC86-9110-4F94-8D17-5704F28A439E}"/>
+                <a16:creationId xmlns:a16="http://schemas.microsoft.com/office/drawing/2014/main" id="{9907535A-F0C6-4B7B-9180-E50B137AF74E}"/>
               </a:ext>
             </a:extLst>
           </p:cNvPr>
@@ -12642,7 +12642,7 @@
           <p:cNvPr id="17" name="Text 15">
             <a:extLst xmlns:a="http://schemas.openxmlformats.org/drawingml/2006/main">
               <a:ext uri="{FF2B5EF4-FFF2-40B4-BE49-F238E27FC236}">
-                <a16:creationId xmlns:a16="http://schemas.microsoft.com/office/drawing/2014/main" id="{F15B39C9-7097-43AB-B254-16104660BCED}"/>
+                <a16:creationId xmlns:a16="http://schemas.microsoft.com/office/drawing/2014/main" id="{B44028FC-F452-408D-BF00-3D6BE3AE3895}"/>
               </a:ext>
             </a:extLst>
           </p:cNvPr>
@@ -12687,7 +12687,7 @@
           <p:cNvPr id="18" name="Text 16">
             <a:extLst xmlns:a="http://schemas.openxmlformats.org/drawingml/2006/main">
               <a:ext uri="{FF2B5EF4-FFF2-40B4-BE49-F238E27FC236}">
-                <a16:creationId xmlns:a16="http://schemas.microsoft.com/office/drawing/2014/main" id="{5F5785D0-99C5-4B5A-9F1D-A5C38AE46BBE}"/>
+                <a16:creationId xmlns:a16="http://schemas.microsoft.com/office/drawing/2014/main" id="{A217BEE7-E54E-4778-9121-0237826661F5}"/>
               </a:ext>
             </a:extLst>
           </p:cNvPr>
@@ -12732,7 +12732,7 @@
           <p:cNvPr id="19" name="Text 17">
             <a:extLst xmlns:a="http://schemas.openxmlformats.org/drawingml/2006/main">
               <a:ext uri="{FF2B5EF4-FFF2-40B4-BE49-F238E27FC236}">
-                <a16:creationId xmlns:a16="http://schemas.microsoft.com/office/drawing/2014/main" id="{A30DC838-DC63-4A5E-8034-3648E1FA81D0}"/>
+                <a16:creationId xmlns:a16="http://schemas.microsoft.com/office/drawing/2014/main" id="{D70E72A3-2532-4F59-8263-F17418220CBD}"/>
               </a:ext>
             </a:extLst>
           </p:cNvPr>
@@ -12777,7 +12777,7 @@
           <p:cNvPr id="20" name="Text 18">
             <a:extLst xmlns:a="http://schemas.openxmlformats.org/drawingml/2006/main">
               <a:ext uri="{FF2B5EF4-FFF2-40B4-BE49-F238E27FC236}">
-                <a16:creationId xmlns:a16="http://schemas.microsoft.com/office/drawing/2014/main" id="{F62A36AF-CAB6-451F-90BC-A60E8C7AAAF0}"/>
+                <a16:creationId xmlns:a16="http://schemas.microsoft.com/office/drawing/2014/main" id="{7F18F047-1C2D-49A4-AA8E-8B767CD7D8DB}"/>
               </a:ext>
             </a:extLst>
           </p:cNvPr>
@@ -12822,7 +12822,7 @@
           <p:cNvPr id="21" name="Text 19">
             <a:extLst xmlns:a="http://schemas.openxmlformats.org/drawingml/2006/main">
               <a:ext uri="{FF2B5EF4-FFF2-40B4-BE49-F238E27FC236}">
-                <a16:creationId xmlns:a16="http://schemas.microsoft.com/office/drawing/2014/main" id="{44014ED5-F2B3-404C-938A-8A18C3A9D6B5}"/>
+                <a16:creationId xmlns:a16="http://schemas.microsoft.com/office/drawing/2014/main" id="{E19E88E0-AC30-4FFA-BE22-CB33E6D12C6B}"/>
               </a:ext>
             </a:extLst>
           </p:cNvPr>
@@ -12867,7 +12867,7 @@
           <p:cNvPr id="22" name="Text 20">
             <a:extLst xmlns:a="http://schemas.openxmlformats.org/drawingml/2006/main">
               <a:ext uri="{FF2B5EF4-FFF2-40B4-BE49-F238E27FC236}">
-                <a16:creationId xmlns:a16="http://schemas.microsoft.com/office/drawing/2014/main" id="{1811C409-DC78-46F5-B1C6-B0D9422DAE86}"/>
+                <a16:creationId xmlns:a16="http://schemas.microsoft.com/office/drawing/2014/main" id="{80EF22BE-20A0-4D2D-B1C2-7154B1691322}"/>
               </a:ext>
             </a:extLst>
           </p:cNvPr>
@@ -12912,7 +12912,7 @@
           <p:cNvPr id="23" name="Text 21">
             <a:extLst xmlns:a="http://schemas.openxmlformats.org/drawingml/2006/main">
               <a:ext uri="{FF2B5EF4-FFF2-40B4-BE49-F238E27FC236}">
-                <a16:creationId xmlns:a16="http://schemas.microsoft.com/office/drawing/2014/main" id="{EBF58775-7F0F-4DE8-AFCD-C93A85E37E41}"/>
+                <a16:creationId xmlns:a16="http://schemas.microsoft.com/office/drawing/2014/main" id="{CB81D0AB-9DA6-4F25-B0B8-6B23834C81DF}"/>
               </a:ext>
             </a:extLst>
           </p:cNvPr>
@@ -12957,7 +12957,7 @@
           <p:cNvPr id="24" name="Text 22">
             <a:extLst xmlns:a="http://schemas.openxmlformats.org/drawingml/2006/main">
               <a:ext uri="{FF2B5EF4-FFF2-40B4-BE49-F238E27FC236}">
-                <a16:creationId xmlns:a16="http://schemas.microsoft.com/office/drawing/2014/main" id="{821B4846-38B5-4D1F-A506-58512657C671}"/>
+                <a16:creationId xmlns:a16="http://schemas.microsoft.com/office/drawing/2014/main" id="{262BFC05-D779-4E11-B3F1-E1DE6AEF8E32}"/>
               </a:ext>
             </a:extLst>
           </p:cNvPr>
@@ -13002,7 +13002,7 @@
           <p:cNvPr id="25" name="Text 23">
             <a:extLst xmlns:a="http://schemas.openxmlformats.org/drawingml/2006/main">
               <a:ext uri="{FF2B5EF4-FFF2-40B4-BE49-F238E27FC236}">
-                <a16:creationId xmlns:a16="http://schemas.microsoft.com/office/drawing/2014/main" id="{8B11F8F3-B6C7-4DD0-9292-33EB7A465B9D}"/>
+                <a16:creationId xmlns:a16="http://schemas.microsoft.com/office/drawing/2014/main" id="{45C8EFF6-713D-484F-8D23-D7732AA9852E}"/>
               </a:ext>
             </a:extLst>
           </p:cNvPr>
@@ -13050,7 +13050,7 @@
           <p:cNvPr id="26" name="Shape 24">
             <a:extLst xmlns:a="http://schemas.openxmlformats.org/drawingml/2006/main">
               <a:ext uri="{FF2B5EF4-FFF2-40B4-BE49-F238E27FC236}">
-                <a16:creationId xmlns:a16="http://schemas.microsoft.com/office/drawing/2014/main" id="{1CE4F021-D3FD-4CB3-B2F6-5B61F8E16207}"/>
+                <a16:creationId xmlns:a16="http://schemas.microsoft.com/office/drawing/2014/main" id="{952FEFA3-B6D0-4705-9454-6F562B25BCFF}"/>
               </a:ext>
             </a:extLst>
           </p:cNvPr>
@@ -13097,7 +13097,7 @@
           <p:cNvPr id="27" name="Shape 25">
             <a:extLst xmlns:a="http://schemas.openxmlformats.org/drawingml/2006/main">
               <a:ext uri="{FF2B5EF4-FFF2-40B4-BE49-F238E27FC236}">
-                <a16:creationId xmlns:a16="http://schemas.microsoft.com/office/drawing/2014/main" id="{F674FD1E-F0FE-4F77-B32F-77379E0CB1FD}"/>
+                <a16:creationId xmlns:a16="http://schemas.microsoft.com/office/drawing/2014/main" id="{FB5F9349-A0CC-430A-B8CF-5CC55368DF4E}"/>
               </a:ext>
             </a:extLst>
           </p:cNvPr>
@@ -13135,7 +13135,7 @@
           <p:cNvPr id="28" name="Text 26">
             <a:extLst xmlns:a="http://schemas.openxmlformats.org/drawingml/2006/main">
               <a:ext uri="{FF2B5EF4-FFF2-40B4-BE49-F238E27FC236}">
-                <a16:creationId xmlns:a16="http://schemas.microsoft.com/office/drawing/2014/main" id="{8F9CD963-4213-4B2D-A68A-92B6644C8573}"/>
+                <a16:creationId xmlns:a16="http://schemas.microsoft.com/office/drawing/2014/main" id="{D16C8558-8EAC-42A6-8CD6-4A62FE6D6F9E}"/>
               </a:ext>
             </a:extLst>
           </p:cNvPr>
@@ -13180,7 +13180,7 @@
           <p:cNvPr id="29" name="Text 27">
             <a:extLst xmlns:a="http://schemas.openxmlformats.org/drawingml/2006/main">
               <a:ext uri="{FF2B5EF4-FFF2-40B4-BE49-F238E27FC236}">
-                <a16:creationId xmlns:a16="http://schemas.microsoft.com/office/drawing/2014/main" id="{CAB81B64-27CB-45C5-9243-042607CBECA8}"/>
+                <a16:creationId xmlns:a16="http://schemas.microsoft.com/office/drawing/2014/main" id="{16DA0EF4-0DF9-4C9F-A13D-E774C88667F2}"/>
               </a:ext>
             </a:extLst>
           </p:cNvPr>
@@ -13225,7 +13225,7 @@
           <p:cNvPr id="30" name="Text 28">
             <a:extLst xmlns:a="http://schemas.openxmlformats.org/drawingml/2006/main">
               <a:ext uri="{FF2B5EF4-FFF2-40B4-BE49-F238E27FC236}">
-                <a16:creationId xmlns:a16="http://schemas.microsoft.com/office/drawing/2014/main" id="{3E24692A-75C9-440D-A427-8E6DE389F816}"/>
+                <a16:creationId xmlns:a16="http://schemas.microsoft.com/office/drawing/2014/main" id="{3B73DB76-0581-47F8-9F9F-E1D47B7BC35C}"/>
               </a:ext>
             </a:extLst>
           </p:cNvPr>
@@ -13271,7 +13271,7 @@
     </p:spTree>
     <p:extLst>
       <p:ext uri="{BB962C8B-B14F-4D97-AF65-F5344CB8AC3E}">
-        <p14:creationId xmlns:p14="http://schemas.microsoft.com/office/powerpoint/2010/main" val="1770356036"/>
+        <p14:creationId xmlns:p14="http://schemas.microsoft.com/office/powerpoint/2010/main" val="86988382"/>
       </p:ext>
     </p:extLst>
   </p:cSld>
@@ -13302,7 +13302,7 @@
           <p:cNvPr id="2" name="Text 0">
             <a:extLst xmlns:a="http://schemas.openxmlformats.org/drawingml/2006/main">
               <a:ext uri="{FF2B5EF4-FFF2-40B4-BE49-F238E27FC236}">
-                <a16:creationId xmlns:a16="http://schemas.microsoft.com/office/drawing/2014/main" id="{B89A4212-7F51-4E92-A641-48476C9D0D79}"/>
+                <a16:creationId xmlns:a16="http://schemas.microsoft.com/office/drawing/2014/main" id="{489419D8-2B2E-4F09-8376-2350BC6D58EF}"/>
               </a:ext>
             </a:extLst>
           </p:cNvPr>
@@ -13347,7 +13347,7 @@
           <p:cNvPr id="3" name="Text 1">
             <a:extLst xmlns:a="http://schemas.openxmlformats.org/drawingml/2006/main">
               <a:ext uri="{FF2B5EF4-FFF2-40B4-BE49-F238E27FC236}">
-                <a16:creationId xmlns:a16="http://schemas.microsoft.com/office/drawing/2014/main" id="{83461DA4-2E70-471D-B050-ACD926ED2D47}"/>
+                <a16:creationId xmlns:a16="http://schemas.microsoft.com/office/drawing/2014/main" id="{EDC70FA9-5223-422F-8CCA-AE950A8800F7}"/>
               </a:ext>
             </a:extLst>
           </p:cNvPr>
@@ -13392,7 +13392,7 @@
           <p:cNvPr id="4" name="Text 2">
             <a:extLst xmlns:a="http://schemas.openxmlformats.org/drawingml/2006/main">
               <a:ext uri="{FF2B5EF4-FFF2-40B4-BE49-F238E27FC236}">
-                <a16:creationId xmlns:a16="http://schemas.microsoft.com/office/drawing/2014/main" id="{407ACB59-E853-4771-AC18-B58BCD107872}"/>
+                <a16:creationId xmlns:a16="http://schemas.microsoft.com/office/drawing/2014/main" id="{82F24F00-EBDC-488F-9EA8-B0FE561F0391}"/>
               </a:ext>
             </a:extLst>
           </p:cNvPr>
@@ -13437,7 +13437,7 @@
           <p:cNvPr id="5" name="Text 3">
             <a:extLst xmlns:a="http://schemas.openxmlformats.org/drawingml/2006/main">
               <a:ext uri="{FF2B5EF4-FFF2-40B4-BE49-F238E27FC236}">
-                <a16:creationId xmlns:a16="http://schemas.microsoft.com/office/drawing/2014/main" id="{2846E097-1551-40FD-B23B-8DADAC85E8F1}"/>
+                <a16:creationId xmlns:a16="http://schemas.microsoft.com/office/drawing/2014/main" id="{7BFD3F25-80B5-407B-AFE6-382E8DE3C39B}"/>
               </a:ext>
             </a:extLst>
           </p:cNvPr>
@@ -13489,7 +13489,7 @@
         </p:xfrm>
         <a:graphic xmlns:a="http://schemas.openxmlformats.org/drawingml/2006/main">
           <a:graphicData uri="http://schemas.openxmlformats.org/drawingml/2006/chart">
-            <c:chart xmlns:r="http://schemas.openxmlformats.org/officeDocument/2006/relationships" xmlns:c="http://schemas.openxmlformats.org/drawingml/2006/chart" r:id="R7f56c977bce348c3"/>
+            <c:chart xmlns:r="http://schemas.openxmlformats.org/officeDocument/2006/relationships" xmlns:c="http://schemas.openxmlformats.org/drawingml/2006/chart" r:id="R6529d3fdfbc94ff7"/>
           </a:graphicData>
         </a:graphic>
       </p:graphicFrame>
@@ -13498,7 +13498,7 @@
           <p:cNvPr id="7" name="Shape 4">
             <a:extLst xmlns:a="http://schemas.openxmlformats.org/drawingml/2006/main">
               <a:ext uri="{FF2B5EF4-FFF2-40B4-BE49-F238E27FC236}">
-                <a16:creationId xmlns:a16="http://schemas.microsoft.com/office/drawing/2014/main" id="{E6673C37-C106-4E55-8D24-CCB6D44DAA8B}"/>
+                <a16:creationId xmlns:a16="http://schemas.microsoft.com/office/drawing/2014/main" id="{B163CF5D-FAF2-41D0-8AC4-444BACBD2870}"/>
               </a:ext>
             </a:extLst>
           </p:cNvPr>
@@ -13545,7 +13545,7 @@
           <p:cNvPr id="8" name="Text 5">
             <a:extLst xmlns:a="http://schemas.openxmlformats.org/drawingml/2006/main">
               <a:ext uri="{FF2B5EF4-FFF2-40B4-BE49-F238E27FC236}">
-                <a16:creationId xmlns:a16="http://schemas.microsoft.com/office/drawing/2014/main" id="{CB8E87FA-63B9-4261-B733-5D3E3A6DC28A}"/>
+                <a16:creationId xmlns:a16="http://schemas.microsoft.com/office/drawing/2014/main" id="{5521BC01-B774-4D4F-9678-7B8F961FC590}"/>
               </a:ext>
             </a:extLst>
           </p:cNvPr>
@@ -13593,7 +13593,7 @@
           <p:cNvPr id="9" name="Text 6">
             <a:extLst xmlns:a="http://schemas.openxmlformats.org/drawingml/2006/main">
               <a:ext uri="{FF2B5EF4-FFF2-40B4-BE49-F238E27FC236}">
-                <a16:creationId xmlns:a16="http://schemas.microsoft.com/office/drawing/2014/main" id="{61492F0B-8870-4463-9235-BE098A79EBB4}"/>
+                <a16:creationId xmlns:a16="http://schemas.microsoft.com/office/drawing/2014/main" id="{649EA69D-571E-4481-B987-D6E66CD57FB9}"/>
               </a:ext>
             </a:extLst>
           </p:cNvPr>
@@ -13641,7 +13641,7 @@
           <p:cNvPr id="10" name="Shape 7">
             <a:extLst xmlns:a="http://schemas.openxmlformats.org/drawingml/2006/main">
               <a:ext uri="{FF2B5EF4-FFF2-40B4-BE49-F238E27FC236}">
-                <a16:creationId xmlns:a16="http://schemas.microsoft.com/office/drawing/2014/main" id="{9CB43F25-F84C-48E6-B5FE-211105BDB4E1}"/>
+                <a16:creationId xmlns:a16="http://schemas.microsoft.com/office/drawing/2014/main" id="{60CBA5CC-2442-45C8-824D-9C518E74C053}"/>
               </a:ext>
             </a:extLst>
           </p:cNvPr>
@@ -13688,7 +13688,7 @@
           <p:cNvPr id="11" name="Text 8">
             <a:extLst xmlns:a="http://schemas.openxmlformats.org/drawingml/2006/main">
               <a:ext uri="{FF2B5EF4-FFF2-40B4-BE49-F238E27FC236}">
-                <a16:creationId xmlns:a16="http://schemas.microsoft.com/office/drawing/2014/main" id="{3D43A330-A9DC-4AB5-9F76-A0CF1BFA98E2}"/>
+                <a16:creationId xmlns:a16="http://schemas.microsoft.com/office/drawing/2014/main" id="{4EA8F315-1F11-4F77-8CA8-8C7458C875E3}"/>
               </a:ext>
             </a:extLst>
           </p:cNvPr>
@@ -13736,7 +13736,7 @@
           <p:cNvPr id="12" name="Text 9">
             <a:extLst xmlns:a="http://schemas.openxmlformats.org/drawingml/2006/main">
               <a:ext uri="{FF2B5EF4-FFF2-40B4-BE49-F238E27FC236}">
-                <a16:creationId xmlns:a16="http://schemas.microsoft.com/office/drawing/2014/main" id="{8496899E-8C66-4248-83E2-6E6E78E02B56}"/>
+                <a16:creationId xmlns:a16="http://schemas.microsoft.com/office/drawing/2014/main" id="{258EC6DE-19C7-4B1C-A1CC-2DD145DBCB06}"/>
               </a:ext>
             </a:extLst>
           </p:cNvPr>
@@ -13784,7 +13784,7 @@
           <p:cNvPr id="13" name="Shape 10">
             <a:extLst xmlns:a="http://schemas.openxmlformats.org/drawingml/2006/main">
               <a:ext uri="{FF2B5EF4-FFF2-40B4-BE49-F238E27FC236}">
-                <a16:creationId xmlns:a16="http://schemas.microsoft.com/office/drawing/2014/main" id="{8DD7570E-21D3-4A54-BDC5-B4A0BD682A8D}"/>
+                <a16:creationId xmlns:a16="http://schemas.microsoft.com/office/drawing/2014/main" id="{BF17A57B-BCAD-4795-80E5-85BCABEA95D7}"/>
               </a:ext>
             </a:extLst>
           </p:cNvPr>
@@ -13831,7 +13831,7 @@
           <p:cNvPr id="14" name="Text 11">
             <a:extLst xmlns:a="http://schemas.openxmlformats.org/drawingml/2006/main">
               <a:ext uri="{FF2B5EF4-FFF2-40B4-BE49-F238E27FC236}">
-                <a16:creationId xmlns:a16="http://schemas.microsoft.com/office/drawing/2014/main" id="{01F8CD3C-003B-4308-B1F9-3D57206A747F}"/>
+                <a16:creationId xmlns:a16="http://schemas.microsoft.com/office/drawing/2014/main" id="{A5F1ED2F-8C12-4FC9-8F59-F23A94373945}"/>
               </a:ext>
             </a:extLst>
           </p:cNvPr>
@@ -13879,7 +13879,7 @@
           <p:cNvPr id="15" name="Text 12">
             <a:extLst xmlns:a="http://schemas.openxmlformats.org/drawingml/2006/main">
               <a:ext uri="{FF2B5EF4-FFF2-40B4-BE49-F238E27FC236}">
-                <a16:creationId xmlns:a16="http://schemas.microsoft.com/office/drawing/2014/main" id="{46FBB58B-A5B8-4797-BC5B-6F5EABB9F002}"/>
+                <a16:creationId xmlns:a16="http://schemas.microsoft.com/office/drawing/2014/main" id="{E41D426D-B9C8-43FD-8228-0816FB9942DF}"/>
               </a:ext>
             </a:extLst>
           </p:cNvPr>
@@ -13927,7 +13927,7 @@
           <p:cNvPr id="16" name="Text 13">
             <a:extLst xmlns:a="http://schemas.openxmlformats.org/drawingml/2006/main">
               <a:ext uri="{FF2B5EF4-FFF2-40B4-BE49-F238E27FC236}">
-                <a16:creationId xmlns:a16="http://schemas.microsoft.com/office/drawing/2014/main" id="{1D52E68E-A45F-4E76-B21F-51E59208E7D8}"/>
+                <a16:creationId xmlns:a16="http://schemas.microsoft.com/office/drawing/2014/main" id="{22755F6F-0ABF-4475-AD95-5B102D7A2EBA}"/>
               </a:ext>
             </a:extLst>
           </p:cNvPr>
@@ -13973,7 +13973,7 @@
     </p:spTree>
     <p:extLst>
       <p:ext uri="{BB962C8B-B14F-4D97-AF65-F5344CB8AC3E}">
-        <p14:creationId xmlns:p14="http://schemas.microsoft.com/office/powerpoint/2010/main" val="318178044"/>
+        <p14:creationId xmlns:p14="http://schemas.microsoft.com/office/powerpoint/2010/main" val="581719265"/>
       </p:ext>
     </p:extLst>
   </p:cSld>
@@ -14004,7 +14004,7 @@
           <p:cNvPr id="2" name="Text 0">
             <a:extLst xmlns:a="http://schemas.openxmlformats.org/drawingml/2006/main">
               <a:ext uri="{FF2B5EF4-FFF2-40B4-BE49-F238E27FC236}">
-                <a16:creationId xmlns:a16="http://schemas.microsoft.com/office/drawing/2014/main" id="{22C0D279-1504-432D-BBED-D777404DDBDE}"/>
+                <a16:creationId xmlns:a16="http://schemas.microsoft.com/office/drawing/2014/main" id="{44028E39-32C1-43E6-BDB4-59E72E7A6019}"/>
               </a:ext>
             </a:extLst>
           </p:cNvPr>
@@ -14049,7 +14049,7 @@
           <p:cNvPr id="3" name="Text 1">
             <a:extLst xmlns:a="http://schemas.openxmlformats.org/drawingml/2006/main">
               <a:ext uri="{FF2B5EF4-FFF2-40B4-BE49-F238E27FC236}">
-                <a16:creationId xmlns:a16="http://schemas.microsoft.com/office/drawing/2014/main" id="{CF7F5267-9315-4891-BF00-DF3D5A3D70DB}"/>
+                <a16:creationId xmlns:a16="http://schemas.microsoft.com/office/drawing/2014/main" id="{D375D2F9-6904-495D-929D-659A34152333}"/>
               </a:ext>
             </a:extLst>
           </p:cNvPr>
@@ -14094,7 +14094,7 @@
           <p:cNvPr id="4" name="Text 2">
             <a:extLst xmlns:a="http://schemas.openxmlformats.org/drawingml/2006/main">
               <a:ext uri="{FF2B5EF4-FFF2-40B4-BE49-F238E27FC236}">
-                <a16:creationId xmlns:a16="http://schemas.microsoft.com/office/drawing/2014/main" id="{0B759F3C-4809-4FBD-9A19-D9BDBD6F1829}"/>
+                <a16:creationId xmlns:a16="http://schemas.microsoft.com/office/drawing/2014/main" id="{0126D1AA-AD8A-46B9-BCC5-7C505E4C6C8A}"/>
               </a:ext>
             </a:extLst>
           </p:cNvPr>
@@ -14139,7 +14139,7 @@
           <p:cNvPr id="5" name="Text 3">
             <a:extLst xmlns:a="http://schemas.openxmlformats.org/drawingml/2006/main">
               <a:ext uri="{FF2B5EF4-FFF2-40B4-BE49-F238E27FC236}">
-                <a16:creationId xmlns:a16="http://schemas.microsoft.com/office/drawing/2014/main" id="{54DBE803-C2DD-4131-ABBF-2A67D8DDC178}"/>
+                <a16:creationId xmlns:a16="http://schemas.microsoft.com/office/drawing/2014/main" id="{D74512B7-17E5-4D3D-B608-1089FF0E82E9}"/>
               </a:ext>
             </a:extLst>
           </p:cNvPr>
@@ -14184,7 +14184,7 @@
           <p:cNvPr id="6" name="Text 4">
             <a:extLst xmlns:a="http://schemas.openxmlformats.org/drawingml/2006/main">
               <a:ext uri="{FF2B5EF4-FFF2-40B4-BE49-F238E27FC236}">
-                <a16:creationId xmlns:a16="http://schemas.microsoft.com/office/drawing/2014/main" id="{85288096-E575-4C2F-A3E7-BA0E79AA216A}"/>
+                <a16:creationId xmlns:a16="http://schemas.microsoft.com/office/drawing/2014/main" id="{83EAE4CD-3153-4741-8F3B-AD9F950E0636}"/>
               </a:ext>
             </a:extLst>
           </p:cNvPr>
@@ -14232,7 +14232,7 @@
           <p:cNvPr id="7" name="Text 5">
             <a:extLst xmlns:a="http://schemas.openxmlformats.org/drawingml/2006/main">
               <a:ext uri="{FF2B5EF4-FFF2-40B4-BE49-F238E27FC236}">
-                <a16:creationId xmlns:a16="http://schemas.microsoft.com/office/drawing/2014/main" id="{C0621218-F176-4CD7-AA70-4F571901DF6B}"/>
+                <a16:creationId xmlns:a16="http://schemas.microsoft.com/office/drawing/2014/main" id="{465A4AFA-9977-49A2-9AA7-DF0BD7D95ECD}"/>
               </a:ext>
             </a:extLst>
           </p:cNvPr>
@@ -15537,7 +15537,7 @@
           <p:cNvPr id="9" name="Text 6">
             <a:extLst xmlns:a="http://schemas.openxmlformats.org/drawingml/2006/main">
               <a:ext uri="{FF2B5EF4-FFF2-40B4-BE49-F238E27FC236}">
-                <a16:creationId xmlns:a16="http://schemas.microsoft.com/office/drawing/2014/main" id="{0982597A-CA25-4A74-BA43-CE916C22DB9C}"/>
+                <a16:creationId xmlns:a16="http://schemas.microsoft.com/office/drawing/2014/main" id="{63AAB81D-1C3B-448F-915B-71FF28060537}"/>
               </a:ext>
             </a:extLst>
           </p:cNvPr>
@@ -15596,7 +15596,7 @@
           <p:cNvPr id="10" name="Shape 7">
             <a:extLst xmlns:a="http://schemas.openxmlformats.org/drawingml/2006/main">
               <a:ext uri="{FF2B5EF4-FFF2-40B4-BE49-F238E27FC236}">
-                <a16:creationId xmlns:a16="http://schemas.microsoft.com/office/drawing/2014/main" id="{C87DE052-D4FC-4914-927D-10DD14CD4B35}"/>
+                <a16:creationId xmlns:a16="http://schemas.microsoft.com/office/drawing/2014/main" id="{036EAB61-6670-4F1D-94DA-7EF6AD6EA4AA}"/>
               </a:ext>
             </a:extLst>
           </p:cNvPr>
@@ -15643,7 +15643,7 @@
           <p:cNvPr id="11" name="Shape 8">
             <a:extLst xmlns:a="http://schemas.openxmlformats.org/drawingml/2006/main">
               <a:ext uri="{FF2B5EF4-FFF2-40B4-BE49-F238E27FC236}">
-                <a16:creationId xmlns:a16="http://schemas.microsoft.com/office/drawing/2014/main" id="{054CD327-64BE-4FA5-974F-EAED530D8071}"/>
+                <a16:creationId xmlns:a16="http://schemas.microsoft.com/office/drawing/2014/main" id="{E71ACDBA-5C44-48EB-953A-9DFDC94D7010}"/>
               </a:ext>
             </a:extLst>
           </p:cNvPr>
@@ -15681,7 +15681,7 @@
           <p:cNvPr id="12" name="Text 9">
             <a:extLst xmlns:a="http://schemas.openxmlformats.org/drawingml/2006/main">
               <a:ext uri="{FF2B5EF4-FFF2-40B4-BE49-F238E27FC236}">
-                <a16:creationId xmlns:a16="http://schemas.microsoft.com/office/drawing/2014/main" id="{2E886399-FA77-46E7-AF39-6729B4BCB293}"/>
+                <a16:creationId xmlns:a16="http://schemas.microsoft.com/office/drawing/2014/main" id="{E505A6E6-BD1D-482E-AC23-940EA5F5DBEF}"/>
               </a:ext>
             </a:extLst>
           </p:cNvPr>
@@ -15726,7 +15726,7 @@
           <p:cNvPr id="13" name="Text 10">
             <a:extLst xmlns:a="http://schemas.openxmlformats.org/drawingml/2006/main">
               <a:ext uri="{FF2B5EF4-FFF2-40B4-BE49-F238E27FC236}">
-                <a16:creationId xmlns:a16="http://schemas.microsoft.com/office/drawing/2014/main" id="{71DADF03-553C-4D0C-930E-DC9C7FC3C0EB}"/>
+                <a16:creationId xmlns:a16="http://schemas.microsoft.com/office/drawing/2014/main" id="{BB2EFDEF-DD02-449B-8774-3D78806C789C}"/>
               </a:ext>
             </a:extLst>
           </p:cNvPr>
@@ -15771,7 +15771,7 @@
           <p:cNvPr id="14" name="Text 11">
             <a:extLst xmlns:a="http://schemas.openxmlformats.org/drawingml/2006/main">
               <a:ext uri="{FF2B5EF4-FFF2-40B4-BE49-F238E27FC236}">
-                <a16:creationId xmlns:a16="http://schemas.microsoft.com/office/drawing/2014/main" id="{B34CB675-8D0D-4FD7-A3C1-3710D182FC35}"/>
+                <a16:creationId xmlns:a16="http://schemas.microsoft.com/office/drawing/2014/main" id="{6F9554DB-0F93-4610-B2CF-20AE6B3EB248}"/>
               </a:ext>
             </a:extLst>
           </p:cNvPr>
@@ -15866,7 +15866,7 @@
           <p:cNvPr id="15" name="Shape 12">
             <a:extLst xmlns:a="http://schemas.openxmlformats.org/drawingml/2006/main">
               <a:ext uri="{FF2B5EF4-FFF2-40B4-BE49-F238E27FC236}">
-                <a16:creationId xmlns:a16="http://schemas.microsoft.com/office/drawing/2014/main" id="{330BA409-DD0A-4066-9AB8-55D80C3A2D51}"/>
+                <a16:creationId xmlns:a16="http://schemas.microsoft.com/office/drawing/2014/main" id="{3200D553-F517-440A-8612-A0089360A9AE}"/>
               </a:ext>
             </a:extLst>
           </p:cNvPr>
@@ -15913,7 +15913,7 @@
           <p:cNvPr id="16" name="Shape 13">
             <a:extLst xmlns:a="http://schemas.openxmlformats.org/drawingml/2006/main">
               <a:ext uri="{FF2B5EF4-FFF2-40B4-BE49-F238E27FC236}">
-                <a16:creationId xmlns:a16="http://schemas.microsoft.com/office/drawing/2014/main" id="{FE1404C4-A8D9-4AF7-B8BE-D83874F4A303}"/>
+                <a16:creationId xmlns:a16="http://schemas.microsoft.com/office/drawing/2014/main" id="{A4F68ED1-384A-42EE-A8BC-CF2B49AD2FE8}"/>
               </a:ext>
             </a:extLst>
           </p:cNvPr>
@@ -15951,7 +15951,7 @@
           <p:cNvPr id="17" name="Text 14">
             <a:extLst xmlns:a="http://schemas.openxmlformats.org/drawingml/2006/main">
               <a:ext uri="{FF2B5EF4-FFF2-40B4-BE49-F238E27FC236}">
-                <a16:creationId xmlns:a16="http://schemas.microsoft.com/office/drawing/2014/main" id="{28F35CF6-64EA-4B6C-93BB-84B82A388156}"/>
+                <a16:creationId xmlns:a16="http://schemas.microsoft.com/office/drawing/2014/main" id="{B1823758-D638-4F8A-A9BC-14B395B77FB6}"/>
               </a:ext>
             </a:extLst>
           </p:cNvPr>
@@ -15996,7 +15996,7 @@
           <p:cNvPr id="18" name="Text 15">
             <a:extLst xmlns:a="http://schemas.openxmlformats.org/drawingml/2006/main">
               <a:ext uri="{FF2B5EF4-FFF2-40B4-BE49-F238E27FC236}">
-                <a16:creationId xmlns:a16="http://schemas.microsoft.com/office/drawing/2014/main" id="{E2894A91-423A-4EB3-B773-A067BE0BF387}"/>
+                <a16:creationId xmlns:a16="http://schemas.microsoft.com/office/drawing/2014/main" id="{443CA312-A127-4628-9B85-60A1FBDD9AF9}"/>
               </a:ext>
             </a:extLst>
           </p:cNvPr>
@@ -16041,7 +16041,7 @@
           <p:cNvPr id="8" name="Text 16">
             <a:extLst xmlns:a="http://schemas.openxmlformats.org/drawingml/2006/main">
               <a:ext uri="{FF2B5EF4-FFF2-40B4-BE49-F238E27FC236}">
-                <a16:creationId xmlns:a16="http://schemas.microsoft.com/office/drawing/2014/main" id="{66DB7AFA-30B9-4B02-979E-5C73841399A8}"/>
+                <a16:creationId xmlns:a16="http://schemas.microsoft.com/office/drawing/2014/main" id="{AABE4EAE-1A8F-4BEA-9788-A257E96AE5E3}"/>
               </a:ext>
             </a:extLst>
           </p:cNvPr>
@@ -16136,7 +16136,7 @@
           <p:cNvPr id="20" name="Shape 17">
             <a:extLst xmlns:a="http://schemas.openxmlformats.org/drawingml/2006/main">
               <a:ext uri="{FF2B5EF4-FFF2-40B4-BE49-F238E27FC236}">
-                <a16:creationId xmlns:a16="http://schemas.microsoft.com/office/drawing/2014/main" id="{396A84DB-ABA9-47E1-9DC2-5562BB2DE627}"/>
+                <a16:creationId xmlns:a16="http://schemas.microsoft.com/office/drawing/2014/main" id="{530C6C4F-39DC-4D00-9CC5-2B089063F384}"/>
               </a:ext>
             </a:extLst>
           </p:cNvPr>
@@ -16183,7 +16183,7 @@
           <p:cNvPr id="21" name="Text 18">
             <a:extLst xmlns:a="http://schemas.openxmlformats.org/drawingml/2006/main">
               <a:ext uri="{FF2B5EF4-FFF2-40B4-BE49-F238E27FC236}">
-                <a16:creationId xmlns:a16="http://schemas.microsoft.com/office/drawing/2014/main" id="{6C6E4B08-E1D2-4269-9096-17AEAB1D867D}"/>
+                <a16:creationId xmlns:a16="http://schemas.microsoft.com/office/drawing/2014/main" id="{E9437180-D84B-45A1-BD55-DCB946BFCD49}"/>
               </a:ext>
             </a:extLst>
           </p:cNvPr>
@@ -16240,7 +16240,7 @@
     </p:spTree>
     <p:extLst>
       <p:ext uri="{BB962C8B-B14F-4D97-AF65-F5344CB8AC3E}">
-        <p14:creationId xmlns:p14="http://schemas.microsoft.com/office/powerpoint/2010/main" val="1425324894"/>
+        <p14:creationId xmlns:p14="http://schemas.microsoft.com/office/powerpoint/2010/main" val="514222194"/>
       </p:ext>
     </p:extLst>
   </p:cSld>
@@ -16271,7 +16271,7 @@
           <p:cNvPr id="2" name="Text 0">
             <a:extLst xmlns:a="http://schemas.openxmlformats.org/drawingml/2006/main">
               <a:ext uri="{FF2B5EF4-FFF2-40B4-BE49-F238E27FC236}">
-                <a16:creationId xmlns:a16="http://schemas.microsoft.com/office/drawing/2014/main" id="{22C0D279-1504-432D-BBED-D777404DDBDE}"/>
+                <a16:creationId xmlns:a16="http://schemas.microsoft.com/office/drawing/2014/main" id="{44028E39-32C1-43E6-BDB4-59E72E7A6019}"/>
               </a:ext>
             </a:extLst>
           </p:cNvPr>
@@ -16316,7 +16316,7 @@
           <p:cNvPr id="3" name="Text 1">
             <a:extLst xmlns:a="http://schemas.openxmlformats.org/drawingml/2006/main">
               <a:ext uri="{FF2B5EF4-FFF2-40B4-BE49-F238E27FC236}">
-                <a16:creationId xmlns:a16="http://schemas.microsoft.com/office/drawing/2014/main" id="{CF7F5267-9315-4891-BF00-DF3D5A3D70DB}"/>
+                <a16:creationId xmlns:a16="http://schemas.microsoft.com/office/drawing/2014/main" id="{D375D2F9-6904-495D-929D-659A34152333}"/>
               </a:ext>
             </a:extLst>
           </p:cNvPr>
@@ -16361,7 +16361,7 @@
           <p:cNvPr id="4" name="Text 2">
             <a:extLst xmlns:a="http://schemas.openxmlformats.org/drawingml/2006/main">
               <a:ext uri="{FF2B5EF4-FFF2-40B4-BE49-F238E27FC236}">
-                <a16:creationId xmlns:a16="http://schemas.microsoft.com/office/drawing/2014/main" id="{0B759F3C-4809-4FBD-9A19-D9BDBD6F1829}"/>
+                <a16:creationId xmlns:a16="http://schemas.microsoft.com/office/drawing/2014/main" id="{0126D1AA-AD8A-46B9-BCC5-7C505E4C6C8A}"/>
               </a:ext>
             </a:extLst>
           </p:cNvPr>
@@ -16396,7 +16396,7 @@
                 <a:ea typeface="Calibri"/>
                 <a:cs typeface="Calibri"/>
               </a:rPr>
-              <a:t>GCS  ·  FRESH REAL-PROVIDER COMPARISON</a:t>
+              <a:t>COMPARATORS  ·  FAIR PRE-MODEL PLACEMENT + GEPA</a:t>
             </a:r>
           </a:p>
         </p:txBody>
@@ -16406,7 +16406,7 @@
           <p:cNvPr id="5" name="Text 3">
             <a:extLst xmlns:a="http://schemas.openxmlformats.org/drawingml/2006/main">
               <a:ext uri="{FF2B5EF4-FFF2-40B4-BE49-F238E27FC236}">
-                <a16:creationId xmlns:a16="http://schemas.microsoft.com/office/drawing/2014/main" id="{54DBE803-C2DD-4131-ABBF-2A67D8DDC178}"/>
+                <a16:creationId xmlns:a16="http://schemas.microsoft.com/office/drawing/2014/main" id="{D74512B7-17E5-4D3D-B608-1089FF0E82E9}"/>
               </a:ext>
             </a:extLst>
           </p:cNvPr>
@@ -16441,7 +16441,7 @@
                 <a:ea typeface="Cambria"/>
                 <a:cs typeface="Cambria"/>
               </a:rPr>
-              <a:t>GCS removes the measured macro's extra model turn</a:t>
+              <a:t>Fair placement ties GCS; bounded GEPA retains its seed</a:t>
             </a:r>
           </a:p>
         </p:txBody>
@@ -16451,7 +16451,7 @@
           <p:cNvPr id="6" name="Text 4">
             <a:extLst xmlns:a="http://schemas.openxmlformats.org/drawingml/2006/main">
               <a:ext uri="{FF2B5EF4-FFF2-40B4-BE49-F238E27FC236}">
-                <a16:creationId xmlns:a16="http://schemas.microsoft.com/office/drawing/2014/main" id="{85288096-E575-4C2F-A3E7-BA0E79AA216A}"/>
+                <a16:creationId xmlns:a16="http://schemas.microsoft.com/office/drawing/2014/main" id="{83EAE4CD-3153-4741-8F3B-AD9F950E0636}"/>
               </a:ext>
             </a:extLst>
           </p:cNvPr>
@@ -16489,7 +16489,7 @@
                 <a:ea typeface="Calibri"/>
                 <a:cs typeface="Calibri"/>
               </a:rPr>
-              <a:t>Both arms pass 12/12 exact contracts. GCS executes the admitted three-read program before request one and returns one task-specific observation.</a:t>
+              <a:t>All five arms pass 6/6. GCS ties the fair manual program structurally; GEPA retains its seed and leaves requests unchanged.</a:t>
             </a:r>
           </a:p>
         </p:txBody>
@@ -16499,7 +16499,7 @@
           <p:cNvPr id="7" name="Text 5">
             <a:extLst xmlns:a="http://schemas.openxmlformats.org/drawingml/2006/main">
               <a:ext uri="{FF2B5EF4-FFF2-40B4-BE49-F238E27FC236}">
-                <a16:creationId xmlns:a16="http://schemas.microsoft.com/office/drawing/2014/main" id="{C0621218-F176-4CD7-AA70-4F571901DF6B}"/>
+                <a16:creationId xmlns:a16="http://schemas.microsoft.com/office/drawing/2014/main" id="{465A4AFA-9977-49A2-9AA7-DF0BD7D95ECD}"/>
               </a:ext>
             </a:extLst>
           </p:cNvPr>
@@ -16534,7 +16534,7 @@
                 <a:ea typeface="Calibri"/>
                 <a:cs typeface="Calibri"/>
               </a:rPr>
-              <a:t>12 FRESH, CALIBRATION-DISJOINT PUBLIC ISSUES — LOWER RESOURCE USE IS BETTER</a:t>
+              <a:t>6 FRESH HELD-OUT PUBLIC ISSUES — OPTIMIZATION COST EXCLUDED FROM DEPLOYMENT</a:t>
             </a:r>
           </a:p>
         </p:txBody>
@@ -16577,7 +16577,7 @@
                           <a:ea typeface="Calibri"/>
                           <a:cs typeface="Calibri"/>
                         </a:rPr>
-                        <a:t>Metric</a:t>
+                        <a:t>Condition</a:t>
                       </a:r>
                     </a:p>
                   </a:txBody>
@@ -16628,7 +16628,7 @@
                           <a:ea typeface="Calibri"/>
                           <a:cs typeface="Calibri"/>
                         </a:rPr>
-                        <a:t>Macro</a:t>
+                        <a:t>Requests</a:t>
                       </a:r>
                     </a:p>
                   </a:txBody>
@@ -16679,7 +16679,7 @@
                           <a:ea typeface="Calibri"/>
                           <a:cs typeface="Calibri"/>
                         </a:rPr>
-                        <a:t>GCS</a:t>
+                        <a:t>Interfaces</a:t>
                       </a:r>
                     </a:p>
                   </a:txBody>
@@ -16730,7 +16730,7 @@
                           <a:ea typeface="Calibri"/>
                           <a:cs typeface="Calibri"/>
                         </a:rPr>
-                        <a:t>Result</a:t>
+                        <a:t>Exact</a:t>
                       </a:r>
                     </a:p>
                   </a:txBody>
@@ -16783,7 +16783,7 @@
                           <a:ea typeface="Calibri"/>
                           <a:cs typeface="Calibri"/>
                         </a:rPr>
-                        <a:t>Provider requests</a:t>
+                        <a:t>Unchanged</a:t>
                       </a:r>
                     </a:p>
                   </a:txBody>
@@ -16834,7 +16834,7 @@
                           <a:ea typeface="Calibri"/>
                           <a:cs typeface="Calibri"/>
                         </a:rPr>
-                        <a:t>2.00</a:t>
+                        <a:t>4.0</a:t>
                       </a:r>
                     </a:p>
                   </a:txBody>
@@ -16885,7 +16885,7 @@
                           <a:ea typeface="Calibri"/>
                           <a:cs typeface="Calibri"/>
                         </a:rPr>
-                        <a:t>1.00</a:t>
+                        <a:t>3.0</a:t>
                       </a:r>
                     </a:p>
                   </a:txBody>
@@ -16936,7 +16936,7 @@
                           <a:ea typeface="Calibri"/>
                           <a:cs typeface="Calibri"/>
                         </a:rPr>
-                        <a:t>−50.0%</a:t>
+                        <a:t>6/6</a:t>
                       </a:r>
                     </a:p>
                   </a:txBody>
@@ -16989,7 +16989,7 @@
                           <a:ea typeface="Calibri"/>
                           <a:cs typeface="Calibri"/>
                         </a:rPr>
-                        <a:t>Tool interfaces</a:t>
+                        <a:t>GEPA · seed</a:t>
                       </a:r>
                     </a:p>
                   </a:txBody>
@@ -17040,7 +17040,7 @@
                           <a:ea typeface="Calibri"/>
                           <a:cs typeface="Calibri"/>
                         </a:rPr>
-                        <a:t>1.00</a:t>
+                        <a:t>4.0</a:t>
                       </a:r>
                     </a:p>
                   </a:txBody>
@@ -17091,7 +17091,7 @@
                           <a:ea typeface="Calibri"/>
                           <a:cs typeface="Calibri"/>
                         </a:rPr>
-                        <a:t>1.00</a:t>
+                        <a:t>3.0</a:t>
                       </a:r>
                     </a:p>
                   </a:txBody>
@@ -17142,7 +17142,7 @@
                           <a:ea typeface="Calibri"/>
                           <a:cs typeface="Calibri"/>
                         </a:rPr>
-                        <a:t>tie</a:t>
+                        <a:t>6/6</a:t>
                       </a:r>
                     </a:p>
                   </a:txBody>
@@ -17195,7 +17195,7 @@
                           <a:ea typeface="Calibri"/>
                           <a:cs typeface="Calibri"/>
                         </a:rPr>
-                        <a:t>Total tokens</a:t>
+                        <a:t>GCS</a:t>
                       </a:r>
                     </a:p>
                   </a:txBody>
@@ -17246,7 +17246,7 @@
                           <a:ea typeface="Calibri"/>
                           <a:cs typeface="Calibri"/>
                         </a:rPr>
-                        <a:t>1,524</a:t>
+                        <a:t>1.0</a:t>
                       </a:r>
                     </a:p>
                   </a:txBody>
@@ -17297,7 +17297,7 @@
                           <a:ea typeface="Calibri"/>
                           <a:cs typeface="Calibri"/>
                         </a:rPr>
-                        <a:t>931</a:t>
+                        <a:t>1.0</a:t>
                       </a:r>
                     </a:p>
                   </a:txBody>
@@ -17348,7 +17348,7 @@
                           <a:ea typeface="Calibri"/>
                           <a:cs typeface="Calibri"/>
                         </a:rPr>
-                        <a:t>−38.9%</a:t>
+                        <a:t>6/6</a:t>
                       </a:r>
                     </a:p>
                   </a:txBody>
@@ -17401,7 +17401,7 @@
                           <a:ea typeface="Calibri"/>
                           <a:cs typeface="Calibri"/>
                         </a:rPr>
-                        <a:t>Wall latency</a:t>
+                        <a:t>GCS + seed</a:t>
                       </a:r>
                     </a:p>
                   </a:txBody>
@@ -17452,7 +17452,7 @@
                           <a:ea typeface="Calibri"/>
                           <a:cs typeface="Calibri"/>
                         </a:rPr>
-                        <a:t>2,485 ms</a:t>
+                        <a:t>1.0</a:t>
                       </a:r>
                     </a:p>
                   </a:txBody>
@@ -17503,7 +17503,7 @@
                           <a:ea typeface="Calibri"/>
                           <a:cs typeface="Calibri"/>
                         </a:rPr>
-                        <a:t>1,490 ms</a:t>
+                        <a:t>1.0</a:t>
                       </a:r>
                     </a:p>
                   </a:txBody>
@@ -17554,7 +17554,7 @@
                           <a:ea typeface="Calibri"/>
                           <a:cs typeface="Calibri"/>
                         </a:rPr>
-                        <a:t>−40.0%</a:t>
+                        <a:t>6/6</a:t>
                       </a:r>
                     </a:p>
                   </a:txBody>
@@ -17607,7 +17607,7 @@
                           <a:ea typeface="Calibri"/>
                           <a:cs typeface="Calibri"/>
                         </a:rPr>
-                        <a:t>Estimated cost</a:t>
+                        <a:t>Manual pre-model</a:t>
                       </a:r>
                     </a:p>
                   </a:txBody>
@@ -17658,7 +17658,7 @@
                           <a:ea typeface="Calibri"/>
                           <a:cs typeface="Calibri"/>
                         </a:rPr>
-                        <a:t>$0.000430</a:t>
+                        <a:t>1.0</a:t>
                       </a:r>
                     </a:p>
                   </a:txBody>
@@ -17709,7 +17709,7 @@
                           <a:ea typeface="Calibri"/>
                           <a:cs typeface="Calibri"/>
                         </a:rPr>
-                        <a:t>$0.000291</a:t>
+                        <a:t>1.0</a:t>
                       </a:r>
                     </a:p>
                   </a:txBody>
@@ -17760,7 +17760,7 @@
                           <a:ea typeface="Calibri"/>
                           <a:cs typeface="Calibri"/>
                         </a:rPr>
-                        <a:t>−32.3%</a:t>
+                        <a:t>6/6</a:t>
                       </a:r>
                     </a:p>
                   </a:txBody>
@@ -17804,7 +17804,7 @@
           <p:cNvPr id="9" name="Text 6">
             <a:extLst xmlns:a="http://schemas.openxmlformats.org/drawingml/2006/main">
               <a:ext uri="{FF2B5EF4-FFF2-40B4-BE49-F238E27FC236}">
-                <a16:creationId xmlns:a16="http://schemas.microsoft.com/office/drawing/2014/main" id="{0982597A-CA25-4A74-BA43-CE916C22DB9C}"/>
+                <a16:creationId xmlns:a16="http://schemas.microsoft.com/office/drawing/2014/main" id="{63AAB81D-1C3B-448F-915B-71FF28060537}"/>
               </a:ext>
             </a:extLst>
           </p:cNvPr>
@@ -17842,7 +17842,7 @@
                 <a:ea typeface="Calibri"/>
                 <a:cs typeface="Calibri"/>
               </a:rPr>
-              <a:t>Real public issue records, live provider calls, counterbalanced order, and no overlap with 424 earlier issue IDs. Interfaces tie 1–1; source reads tie 3–3.</a:t>
+              <a:t>Live provider calls on disjoint 4/2/6 splits frozen before optimization. The question category was unavailable after strict prior-cohort exclusion.</a:t>
             </a:r>
           </a:p>
         </p:txBody>
@@ -17852,7 +17852,7 @@
           <p:cNvPr id="10" name="Shape 7">
             <a:extLst xmlns:a="http://schemas.openxmlformats.org/drawingml/2006/main">
               <a:ext uri="{FF2B5EF4-FFF2-40B4-BE49-F238E27FC236}">
-                <a16:creationId xmlns:a16="http://schemas.microsoft.com/office/drawing/2014/main" id="{C87DE052-D4FC-4914-927D-10DD14CD4B35}"/>
+                <a16:creationId xmlns:a16="http://schemas.microsoft.com/office/drawing/2014/main" id="{036EAB61-6670-4F1D-94DA-7EF6AD6EA4AA}"/>
               </a:ext>
             </a:extLst>
           </p:cNvPr>
@@ -17899,7 +17899,7 @@
           <p:cNvPr id="11" name="Shape 8">
             <a:extLst xmlns:a="http://schemas.openxmlformats.org/drawingml/2006/main">
               <a:ext uri="{FF2B5EF4-FFF2-40B4-BE49-F238E27FC236}">
-                <a16:creationId xmlns:a16="http://schemas.microsoft.com/office/drawing/2014/main" id="{054CD327-64BE-4FA5-974F-EAED530D8071}"/>
+                <a16:creationId xmlns:a16="http://schemas.microsoft.com/office/drawing/2014/main" id="{E71ACDBA-5C44-48EB-953A-9DFDC94D7010}"/>
               </a:ext>
             </a:extLst>
           </p:cNvPr>
@@ -17937,7 +17937,7 @@
           <p:cNvPr id="12" name="Text 9">
             <a:extLst xmlns:a="http://schemas.openxmlformats.org/drawingml/2006/main">
               <a:ext uri="{FF2B5EF4-FFF2-40B4-BE49-F238E27FC236}">
-                <a16:creationId xmlns:a16="http://schemas.microsoft.com/office/drawing/2014/main" id="{2E886399-FA77-46E7-AF39-6729B4BCB293}"/>
+                <a16:creationId xmlns:a16="http://schemas.microsoft.com/office/drawing/2014/main" id="{E505A6E6-BD1D-482E-AC23-940EA5F5DBEF}"/>
               </a:ext>
             </a:extLst>
           </p:cNvPr>
@@ -17982,7 +17982,7 @@
           <p:cNvPr id="13" name="Text 10">
             <a:extLst xmlns:a="http://schemas.openxmlformats.org/drawingml/2006/main">
               <a:ext uri="{FF2B5EF4-FFF2-40B4-BE49-F238E27FC236}">
-                <a16:creationId xmlns:a16="http://schemas.microsoft.com/office/drawing/2014/main" id="{71DADF03-553C-4D0C-930E-DC9C7FC3C0EB}"/>
+                <a16:creationId xmlns:a16="http://schemas.microsoft.com/office/drawing/2014/main" id="{BB2EFDEF-DD02-449B-8774-3D78806C789C}"/>
               </a:ext>
             </a:extLst>
           </p:cNvPr>
@@ -18017,7 +18017,7 @@
                 <a:ea typeface="Cambria"/>
                 <a:cs typeface="Cambria"/>
               </a:rPr>
-              <a:t>GCS wins the measured interface when…</a:t>
+              <a:t>What the fair test resolves…</a:t>
             </a:r>
           </a:p>
         </p:txBody>
@@ -18027,7 +18027,7 @@
           <p:cNvPr id="14" name="Text 11">
             <a:extLst xmlns:a="http://schemas.openxmlformats.org/drawingml/2006/main">
               <a:ext uri="{FF2B5EF4-FFF2-40B4-BE49-F238E27FC236}">
-                <a16:creationId xmlns:a16="http://schemas.microsoft.com/office/drawing/2014/main" id="{B34CB675-8D0D-4FD7-A3C1-3710D182FC35}"/>
+                <a16:creationId xmlns:a16="http://schemas.microsoft.com/office/drawing/2014/main" id="{6F9554DB-0F93-4610-B2CF-20AE6B3EB248}"/>
               </a:ext>
             </a:extLst>
           </p:cNvPr>
@@ -18068,7 +18068,7 @@
                 <a:ea typeface="Calibri"/>
                 <a:cs typeface="Calibri"/>
               </a:rPr>
-              <a:t>the read program already passed admission</a:t>
+              <a:t>manual placement can remove the same turns</a:t>
             </a:r>
           </a:p>
           <a:p xmlns:a="http://schemas.openxmlformats.org/drawingml/2006/main">
@@ -18090,7 +18090,7 @@
                 <a:ea typeface="Calibri"/>
                 <a:cs typeface="Calibri"/>
               </a:rPr>
-              <a:t>task projection is live-out-only and bounded</a:t>
+              <a:t>GCS value shifts to discovery + admission</a:t>
             </a:r>
           </a:p>
           <a:p xmlns:a="http://schemas.openxmlformats.org/drawingml/2006/main">
@@ -18112,7 +18112,7 @@
                 <a:ea typeface="Calibri"/>
                 <a:cs typeface="Calibri"/>
               </a:rPr>
-              <a:t>the continuation manifest is pinned exactly</a:t>
+              <a:t>GEPA does not improve this bounded run</a:t>
             </a:r>
           </a:p>
         </p:txBody>
@@ -18122,7 +18122,7 @@
           <p:cNvPr id="15" name="Shape 12">
             <a:extLst xmlns:a="http://schemas.openxmlformats.org/drawingml/2006/main">
               <a:ext uri="{FF2B5EF4-FFF2-40B4-BE49-F238E27FC236}">
-                <a16:creationId xmlns:a16="http://schemas.microsoft.com/office/drawing/2014/main" id="{330BA409-DD0A-4066-9AB8-55D80C3A2D51}"/>
+                <a16:creationId xmlns:a16="http://schemas.microsoft.com/office/drawing/2014/main" id="{3200D553-F517-440A-8612-A0089360A9AE}"/>
               </a:ext>
             </a:extLst>
           </p:cNvPr>
@@ -18169,7 +18169,7 @@
           <p:cNvPr id="16" name="Shape 13">
             <a:extLst xmlns:a="http://schemas.openxmlformats.org/drawingml/2006/main">
               <a:ext uri="{FF2B5EF4-FFF2-40B4-BE49-F238E27FC236}">
-                <a16:creationId xmlns:a16="http://schemas.microsoft.com/office/drawing/2014/main" id="{FE1404C4-A8D9-4AF7-B8BE-D83874F4A303}"/>
+                <a16:creationId xmlns:a16="http://schemas.microsoft.com/office/drawing/2014/main" id="{A4F68ED1-384A-42EE-A8BC-CF2B49AD2FE8}"/>
               </a:ext>
             </a:extLst>
           </p:cNvPr>
@@ -18207,7 +18207,7 @@
           <p:cNvPr id="17" name="Text 14">
             <a:extLst xmlns:a="http://schemas.openxmlformats.org/drawingml/2006/main">
               <a:ext uri="{FF2B5EF4-FFF2-40B4-BE49-F238E27FC236}">
-                <a16:creationId xmlns:a16="http://schemas.microsoft.com/office/drawing/2014/main" id="{28F35CF6-64EA-4B6C-93BB-84B82A388156}"/>
+                <a16:creationId xmlns:a16="http://schemas.microsoft.com/office/drawing/2014/main" id="{B1823758-D638-4F8A-A9BC-14B395B77FB6}"/>
               </a:ext>
             </a:extLst>
           </p:cNvPr>
@@ -18252,7 +18252,7 @@
           <p:cNvPr id="18" name="Text 15">
             <a:extLst xmlns:a="http://schemas.openxmlformats.org/drawingml/2006/main">
               <a:ext uri="{FF2B5EF4-FFF2-40B4-BE49-F238E27FC236}">
-                <a16:creationId xmlns:a16="http://schemas.microsoft.com/office/drawing/2014/main" id="{E2894A91-423A-4EB3-B773-A067BE0BF387}"/>
+                <a16:creationId xmlns:a16="http://schemas.microsoft.com/office/drawing/2014/main" id="{443CA312-A127-4628-9B85-60A1FBDD9AF9}"/>
               </a:ext>
             </a:extLst>
           </p:cNvPr>
@@ -18287,7 +18287,7 @@
                 <a:ea typeface="Cambria"/>
                 <a:cs typeface="Cambria"/>
               </a:rPr>
-              <a:t>The remaining comparator…</a:t>
+              <a:t>What remains unresolved…</a:t>
             </a:r>
           </a:p>
         </p:txBody>
@@ -18297,7 +18297,7 @@
           <p:cNvPr id="8" name="Text 16">
             <a:extLst xmlns:a="http://schemas.openxmlformats.org/drawingml/2006/main">
               <a:ext uri="{FF2B5EF4-FFF2-40B4-BE49-F238E27FC236}">
-                <a16:creationId xmlns:a16="http://schemas.microsoft.com/office/drawing/2014/main" id="{66DB7AFA-30B9-4B02-979E-5C73841399A8}"/>
+                <a16:creationId xmlns:a16="http://schemas.microsoft.com/office/drawing/2014/main" id="{AABE4EAE-1A8F-4BEA-9788-A257E96AE5E3}"/>
               </a:ext>
             </a:extLst>
           </p:cNvPr>
@@ -18338,7 +18338,7 @@
                 <a:ea typeface="Calibri"/>
                 <a:cs typeface="Calibri"/>
               </a:rPr>
-              <a:t>an equally pre-executed manual macro</a:t>
+              <a:t>manual engineering and review effort</a:t>
             </a:r>
           </a:p>
           <a:p xmlns:a="http://schemas.openxmlformats.org/drawingml/2006/main">
@@ -18360,7 +18360,7 @@
                 <a:ea typeface="Calibri"/>
                 <a:cs typeface="Calibri"/>
               </a:rPr>
-              <a:t>the same projection and continuation contract</a:t>
+              <a:t>AWO · Agent JIT · EvoC2F execution</a:t>
             </a:r>
           </a:p>
           <a:p xmlns:a="http://schemas.openxmlformats.org/drawingml/2006/main">
@@ -18382,7 +18382,7 @@
                 <a:ea typeface="Calibri"/>
                 <a:cs typeface="Calibri"/>
               </a:rPr>
-              <a:t>multiple workflow families and time-forward drift</a:t>
+              <a:t>multiple families and time-forward drift</a:t>
             </a:r>
           </a:p>
         </p:txBody>
@@ -18392,7 +18392,7 @@
           <p:cNvPr id="20" name="Shape 17">
             <a:extLst xmlns:a="http://schemas.openxmlformats.org/drawingml/2006/main">
               <a:ext uri="{FF2B5EF4-FFF2-40B4-BE49-F238E27FC236}">
-                <a16:creationId xmlns:a16="http://schemas.microsoft.com/office/drawing/2014/main" id="{396A84DB-ABA9-47E1-9DC2-5562BB2DE627}"/>
+                <a16:creationId xmlns:a16="http://schemas.microsoft.com/office/drawing/2014/main" id="{530C6C4F-39DC-4D00-9CC5-2B089063F384}"/>
               </a:ext>
             </a:extLst>
           </p:cNvPr>
@@ -18439,7 +18439,7 @@
           <p:cNvPr id="21" name="Text 18">
             <a:extLst xmlns:a="http://schemas.openxmlformats.org/drawingml/2006/main">
               <a:ext uri="{FF2B5EF4-FFF2-40B4-BE49-F238E27FC236}">
-                <a16:creationId xmlns:a16="http://schemas.microsoft.com/office/drawing/2014/main" id="{6C6E4B08-E1D2-4269-9096-17AEAB1D867D}"/>
+                <a16:creationId xmlns:a16="http://schemas.microsoft.com/office/drawing/2014/main" id="{E9437180-D84B-45A1-BD55-DCB946BFCD49}"/>
               </a:ext>
             </a:extLst>
           </p:cNvPr>
@@ -18477,7 +18477,7 @@
                 <a:ea typeface="Calibri"/>
                 <a:cs typeface="Calibri"/>
               </a:rPr>
-              <a:t>Placement explains the gain: the provider-visible macro spends one request selecting its composite and another answering; GCS verifies and executes before request one. This is exploratory one-family evidence and does not test an equally pre-executed manual macro.</a:t>
+              <a:t>Fair placement removes the confound: GCS and manual execution tie structurally at 6/6 exact quality. GEPA retains its seed after 14 task evaluations; 59 optimization requests are accounted separately. One family, six held-out cases.</a:t>
             </a:r>
           </a:p>
         </p:txBody>
@@ -18485,7 +18485,7 @@
     </p:spTree>
     <p:extLst>
       <p:ext uri="{BB962C8B-B14F-4D97-AF65-F5344CB8AC3E}">
-        <p14:creationId xmlns:p14="http://schemas.microsoft.com/office/powerpoint/2010/main" val="1425324894"/>
+        <p14:creationId xmlns:p14="http://schemas.microsoft.com/office/powerpoint/2010/main" val="514222194"/>
       </p:ext>
     </p:extLst>
   </p:cSld>
@@ -18516,7 +18516,7 @@
           <p:cNvPr id="2" name="Text 0">
             <a:extLst xmlns:a="http://schemas.openxmlformats.org/drawingml/2006/main">
               <a:ext uri="{FF2B5EF4-FFF2-40B4-BE49-F238E27FC236}">
-                <a16:creationId xmlns:a16="http://schemas.microsoft.com/office/drawing/2014/main" id="{055406C2-444F-42D1-B891-120729CD2D31}"/>
+                <a16:creationId xmlns:a16="http://schemas.microsoft.com/office/drawing/2014/main" id="{2CAD9099-6330-4643-A574-9E6E9751F327}"/>
               </a:ext>
             </a:extLst>
           </p:cNvPr>
@@ -18561,7 +18561,7 @@
           <p:cNvPr id="3" name="Text 1">
             <a:extLst xmlns:a="http://schemas.openxmlformats.org/drawingml/2006/main">
               <a:ext uri="{FF2B5EF4-FFF2-40B4-BE49-F238E27FC236}">
-                <a16:creationId xmlns:a16="http://schemas.microsoft.com/office/drawing/2014/main" id="{46C02314-4649-46F7-9304-CD472E5786CE}"/>
+                <a16:creationId xmlns:a16="http://schemas.microsoft.com/office/drawing/2014/main" id="{090C1223-BD47-42EC-A341-9112E3104D6A}"/>
               </a:ext>
             </a:extLst>
           </p:cNvPr>
@@ -18606,7 +18606,7 @@
           <p:cNvPr id="4" name="Text 2">
             <a:extLst xmlns:a="http://schemas.openxmlformats.org/drawingml/2006/main">
               <a:ext uri="{FF2B5EF4-FFF2-40B4-BE49-F238E27FC236}">
-                <a16:creationId xmlns:a16="http://schemas.microsoft.com/office/drawing/2014/main" id="{CB5C920E-AF7B-466C-977A-380D034401CB}"/>
+                <a16:creationId xmlns:a16="http://schemas.microsoft.com/office/drawing/2014/main" id="{66CA584C-D925-4739-8F44-5F087451F797}"/>
               </a:ext>
             </a:extLst>
           </p:cNvPr>
@@ -18651,7 +18651,7 @@
           <p:cNvPr id="5" name="Text 3">
             <a:extLst xmlns:a="http://schemas.openxmlformats.org/drawingml/2006/main">
               <a:ext uri="{FF2B5EF4-FFF2-40B4-BE49-F238E27FC236}">
-                <a16:creationId xmlns:a16="http://schemas.microsoft.com/office/drawing/2014/main" id="{884CE860-A193-434D-AC5E-2D8285725F4F}"/>
+                <a16:creationId xmlns:a16="http://schemas.microsoft.com/office/drawing/2014/main" id="{DE85156D-603D-42CA-9F8D-CF176AAC483B}"/>
               </a:ext>
             </a:extLst>
           </p:cNvPr>
@@ -18696,7 +18696,7 @@
           <p:cNvPr id="6" name="Shape 4">
             <a:extLst xmlns:a="http://schemas.openxmlformats.org/drawingml/2006/main">
               <a:ext uri="{FF2B5EF4-FFF2-40B4-BE49-F238E27FC236}">
-                <a16:creationId xmlns:a16="http://schemas.microsoft.com/office/drawing/2014/main" id="{C0116E85-AAAE-4779-8493-B503E98E792A}"/>
+                <a16:creationId xmlns:a16="http://schemas.microsoft.com/office/drawing/2014/main" id="{C9D5E26B-3DAD-4255-9731-55BB046B6488}"/>
               </a:ext>
             </a:extLst>
           </p:cNvPr>
@@ -18743,7 +18743,7 @@
           <p:cNvPr id="7" name="Text 5">
             <a:extLst xmlns:a="http://schemas.openxmlformats.org/drawingml/2006/main">
               <a:ext uri="{FF2B5EF4-FFF2-40B4-BE49-F238E27FC236}">
-                <a16:creationId xmlns:a16="http://schemas.microsoft.com/office/drawing/2014/main" id="{DB8FA57D-0DA9-4C7F-B1EE-6FAD9077F78D}"/>
+                <a16:creationId xmlns:a16="http://schemas.microsoft.com/office/drawing/2014/main" id="{EF14CA84-1147-417F-864B-97F3B3FFD40A}"/>
               </a:ext>
             </a:extLst>
           </p:cNvPr>
@@ -18813,7 +18813,7 @@
           <p:cNvPr id="8" name="Shape 6">
             <a:extLst xmlns:a="http://schemas.openxmlformats.org/drawingml/2006/main">
               <a:ext uri="{FF2B5EF4-FFF2-40B4-BE49-F238E27FC236}">
-                <a16:creationId xmlns:a16="http://schemas.microsoft.com/office/drawing/2014/main" id="{C4857744-83B9-4138-BD54-D5D3F2F2F6AF}"/>
+                <a16:creationId xmlns:a16="http://schemas.microsoft.com/office/drawing/2014/main" id="{6B43C3F7-409B-47EC-96D8-14D811318DBA}"/>
               </a:ext>
             </a:extLst>
           </p:cNvPr>
@@ -18860,7 +18860,7 @@
           <p:cNvPr id="9" name="Text 7">
             <a:extLst xmlns:a="http://schemas.openxmlformats.org/drawingml/2006/main">
               <a:ext uri="{FF2B5EF4-FFF2-40B4-BE49-F238E27FC236}">
-                <a16:creationId xmlns:a16="http://schemas.microsoft.com/office/drawing/2014/main" id="{FC234B2A-081F-4997-9844-CF404BC05C04}"/>
+                <a16:creationId xmlns:a16="http://schemas.microsoft.com/office/drawing/2014/main" id="{F544924A-F20D-4994-AB79-CAFDAD1193C5}"/>
               </a:ext>
             </a:extLst>
           </p:cNvPr>
@@ -18905,7 +18905,7 @@
           <p:cNvPr id="10" name="Text 8">
             <a:extLst xmlns:a="http://schemas.openxmlformats.org/drawingml/2006/main">
               <a:ext uri="{FF2B5EF4-FFF2-40B4-BE49-F238E27FC236}">
-                <a16:creationId xmlns:a16="http://schemas.microsoft.com/office/drawing/2014/main" id="{DBFF50B2-4239-4DF3-A57D-7BE8E3B8DA6E}"/>
+                <a16:creationId xmlns:a16="http://schemas.microsoft.com/office/drawing/2014/main" id="{5E3A9677-7952-45C7-A712-3D6D600A9F69}"/>
               </a:ext>
             </a:extLst>
           </p:cNvPr>
@@ -18953,7 +18953,7 @@
           <p:cNvPr id="11" name="Shape 9">
             <a:extLst xmlns:a="http://schemas.openxmlformats.org/drawingml/2006/main">
               <a:ext uri="{FF2B5EF4-FFF2-40B4-BE49-F238E27FC236}">
-                <a16:creationId xmlns:a16="http://schemas.microsoft.com/office/drawing/2014/main" id="{1C145ED0-C837-4090-8AF0-27F7B5AEE49E}"/>
+                <a16:creationId xmlns:a16="http://schemas.microsoft.com/office/drawing/2014/main" id="{43E1ED6E-6A6C-421C-9E70-72FF4FBDCF4B}"/>
               </a:ext>
             </a:extLst>
           </p:cNvPr>
@@ -19000,7 +19000,7 @@
           <p:cNvPr id="12" name="Text 10">
             <a:extLst xmlns:a="http://schemas.openxmlformats.org/drawingml/2006/main">
               <a:ext uri="{FF2B5EF4-FFF2-40B4-BE49-F238E27FC236}">
-                <a16:creationId xmlns:a16="http://schemas.microsoft.com/office/drawing/2014/main" id="{16660549-1CC2-41AF-8210-C3AAEEADBC2C}"/>
+                <a16:creationId xmlns:a16="http://schemas.microsoft.com/office/drawing/2014/main" id="{AF5D0CDF-CD27-47B9-B4DF-CF0FCCC7FE56}"/>
               </a:ext>
             </a:extLst>
           </p:cNvPr>
@@ -19045,7 +19045,7 @@
           <p:cNvPr id="13" name="Text 11">
             <a:extLst xmlns:a="http://schemas.openxmlformats.org/drawingml/2006/main">
               <a:ext uri="{FF2B5EF4-FFF2-40B4-BE49-F238E27FC236}">
-                <a16:creationId xmlns:a16="http://schemas.microsoft.com/office/drawing/2014/main" id="{64008871-96FF-4F8D-98DD-49E989F859EA}"/>
+                <a16:creationId xmlns:a16="http://schemas.microsoft.com/office/drawing/2014/main" id="{F1801C25-6233-4345-8471-E4745B520AD7}"/>
               </a:ext>
             </a:extLst>
           </p:cNvPr>
@@ -19093,7 +19093,7 @@
           <p:cNvPr id="14" name="Shape 12">
             <a:extLst xmlns:a="http://schemas.openxmlformats.org/drawingml/2006/main">
               <a:ext uri="{FF2B5EF4-FFF2-40B4-BE49-F238E27FC236}">
-                <a16:creationId xmlns:a16="http://schemas.microsoft.com/office/drawing/2014/main" id="{73D41BB5-07A0-45F8-9199-04850BF4891F}"/>
+                <a16:creationId xmlns:a16="http://schemas.microsoft.com/office/drawing/2014/main" id="{5C8356E6-F29A-4792-B864-41EA304F18D8}"/>
               </a:ext>
             </a:extLst>
           </p:cNvPr>
@@ -19140,7 +19140,7 @@
           <p:cNvPr id="15" name="Text 13">
             <a:extLst xmlns:a="http://schemas.openxmlformats.org/drawingml/2006/main">
               <a:ext uri="{FF2B5EF4-FFF2-40B4-BE49-F238E27FC236}">
-                <a16:creationId xmlns:a16="http://schemas.microsoft.com/office/drawing/2014/main" id="{7312A036-5995-474B-8715-58B6CEDE5D2B}"/>
+                <a16:creationId xmlns:a16="http://schemas.microsoft.com/office/drawing/2014/main" id="{9667FB08-7142-44AD-873B-41556BC24DA8}"/>
               </a:ext>
             </a:extLst>
           </p:cNvPr>
@@ -19185,7 +19185,7 @@
           <p:cNvPr id="16" name="Text 14">
             <a:extLst xmlns:a="http://schemas.openxmlformats.org/drawingml/2006/main">
               <a:ext uri="{FF2B5EF4-FFF2-40B4-BE49-F238E27FC236}">
-                <a16:creationId xmlns:a16="http://schemas.microsoft.com/office/drawing/2014/main" id="{2C841C3B-69BA-4739-A408-BFF2ECE47A49}"/>
+                <a16:creationId xmlns:a16="http://schemas.microsoft.com/office/drawing/2014/main" id="{D4B321B9-78C0-477E-BB3E-0FD3CA7294E5}"/>
               </a:ext>
             </a:extLst>
           </p:cNvPr>
@@ -19233,7 +19233,7 @@
           <p:cNvPr id="17" name="Shape 15">
             <a:extLst xmlns:a="http://schemas.openxmlformats.org/drawingml/2006/main">
               <a:ext uri="{FF2B5EF4-FFF2-40B4-BE49-F238E27FC236}">
-                <a16:creationId xmlns:a16="http://schemas.microsoft.com/office/drawing/2014/main" id="{42306E0F-5588-4F3C-A711-319E06C5A3F6}"/>
+                <a16:creationId xmlns:a16="http://schemas.microsoft.com/office/drawing/2014/main" id="{37BB2A11-D1EF-43BE-8345-A9A61D09B577}"/>
               </a:ext>
             </a:extLst>
           </p:cNvPr>
@@ -19280,7 +19280,7 @@
           <p:cNvPr id="18" name="Text 16">
             <a:extLst xmlns:a="http://schemas.openxmlformats.org/drawingml/2006/main">
               <a:ext uri="{FF2B5EF4-FFF2-40B4-BE49-F238E27FC236}">
-                <a16:creationId xmlns:a16="http://schemas.microsoft.com/office/drawing/2014/main" id="{4731466A-4E17-4D0D-8F95-93B5087DDC47}"/>
+                <a16:creationId xmlns:a16="http://schemas.microsoft.com/office/drawing/2014/main" id="{BD021035-328B-4B43-B532-E1FF3235AB29}"/>
               </a:ext>
             </a:extLst>
           </p:cNvPr>
@@ -19325,7 +19325,7 @@
           <p:cNvPr id="19" name="Text 17">
             <a:extLst xmlns:a="http://schemas.openxmlformats.org/drawingml/2006/main">
               <a:ext uri="{FF2B5EF4-FFF2-40B4-BE49-F238E27FC236}">
-                <a16:creationId xmlns:a16="http://schemas.microsoft.com/office/drawing/2014/main" id="{B08BBA3A-EB0B-4450-AD2E-C7E0AB8724DA}"/>
+                <a16:creationId xmlns:a16="http://schemas.microsoft.com/office/drawing/2014/main" id="{7DAEBF02-317E-407D-8C10-2ADF41244F8D}"/>
               </a:ext>
             </a:extLst>
           </p:cNvPr>
@@ -19373,7 +19373,7 @@
           <p:cNvPr id="20" name="Text 18">
             <a:extLst xmlns:a="http://schemas.openxmlformats.org/drawingml/2006/main">
               <a:ext uri="{FF2B5EF4-FFF2-40B4-BE49-F238E27FC236}">
-                <a16:creationId xmlns:a16="http://schemas.microsoft.com/office/drawing/2014/main" id="{D88E2468-C586-4C36-AB9B-D564EFA78173}"/>
+                <a16:creationId xmlns:a16="http://schemas.microsoft.com/office/drawing/2014/main" id="{96FF56F4-854C-4A77-ACC6-1CE2DFC17FA7}"/>
               </a:ext>
             </a:extLst>
           </p:cNvPr>
@@ -19418,7 +19418,7 @@
           <p:cNvPr id="21" name="Text 19">
             <a:extLst xmlns:a="http://schemas.openxmlformats.org/drawingml/2006/main">
               <a:ext uri="{FF2B5EF4-FFF2-40B4-BE49-F238E27FC236}">
-                <a16:creationId xmlns:a16="http://schemas.microsoft.com/office/drawing/2014/main" id="{649E7329-BE8D-476C-8533-742ABBFECDBA}"/>
+                <a16:creationId xmlns:a16="http://schemas.microsoft.com/office/drawing/2014/main" id="{E76102A9-2CB1-48DB-9687-925D7AA8AD63}"/>
               </a:ext>
             </a:extLst>
           </p:cNvPr>
@@ -19459,7 +19459,7 @@
                 <a:ea typeface="Calibri"/>
                 <a:cs typeface="Calibri"/>
               </a:rPr>
-              <a:t>The efficiency win is real but narrow: partial GRC removes redundant model turns, not the source reads that gather evidence.</a:t>
+              <a:t>The efficiency win is real but narrow: partial GRC removes model turns, not source reads.</a:t>
             </a:r>
           </a:p>
           <a:p xmlns:a="http://schemas.openxmlformats.org/drawingml/2006/main">
@@ -19481,7 +19481,7 @@
                 <a:ea typeface="Calibri"/>
                 <a:cs typeface="Calibri"/>
               </a:rPr>
-              <a:t>Manual composition beats partial GRC on this fixed workflow; GCS later removes the measured provider-visible macro's extra model turn at equal 12/12 quality.</a:t>
+              <a:t>Manual composition beats partial GRC; when both execute before request one, manual and GCS tie structurally at 6/6 exact quality.</a:t>
             </a:r>
           </a:p>
           <a:p xmlns:a="http://schemas.openxmlformats.org/drawingml/2006/main">
@@ -19503,7 +19503,7 @@
                 <a:ea typeface="Calibri"/>
                 <a:cs typeface="Calibri"/>
               </a:rPr>
-              <a:t>That result is post-study and one-family: the best equally pre-executed manual comparator remains untested.</a:t>
+              <a:t>Bounded official GEPA retains its seed. The contribution is guarded automatic specialization—not runtime dominance.</a:t>
             </a:r>
           </a:p>
         </p:txBody>
@@ -19511,7 +19511,7 @@
     </p:spTree>
     <p:extLst>
       <p:ext uri="{BB962C8B-B14F-4D97-AF65-F5344CB8AC3E}">
-        <p14:creationId xmlns:p14="http://schemas.microsoft.com/office/powerpoint/2010/main" val="695982750"/>
+        <p14:creationId xmlns:p14="http://schemas.microsoft.com/office/powerpoint/2010/main" val="759821740"/>
       </p:ext>
     </p:extLst>
   </p:cSld>
@@ -19542,7 +19542,7 @@
           <p:cNvPr id="2" name="Text 0">
             <a:extLst xmlns:a="http://schemas.openxmlformats.org/drawingml/2006/main">
               <a:ext uri="{FF2B5EF4-FFF2-40B4-BE49-F238E27FC236}">
-                <a16:creationId xmlns:a16="http://schemas.microsoft.com/office/drawing/2014/main" id="{3C22F317-1A13-4777-915D-888161FB494C}"/>
+                <a16:creationId xmlns:a16="http://schemas.microsoft.com/office/drawing/2014/main" id="{E82CE1B7-FD5D-4C08-9A69-86B0D5A6D85E}"/>
               </a:ext>
             </a:extLst>
           </p:cNvPr>
@@ -19587,7 +19587,7 @@
           <p:cNvPr id="3" name="Text 1">
             <a:extLst xmlns:a="http://schemas.openxmlformats.org/drawingml/2006/main">
               <a:ext uri="{FF2B5EF4-FFF2-40B4-BE49-F238E27FC236}">
-                <a16:creationId xmlns:a16="http://schemas.microsoft.com/office/drawing/2014/main" id="{19BDAEB5-C847-41EA-B8D8-38AB14741BAC}"/>
+                <a16:creationId xmlns:a16="http://schemas.microsoft.com/office/drawing/2014/main" id="{86D726E8-B814-483E-A19A-269CE41309AA}"/>
               </a:ext>
             </a:extLst>
           </p:cNvPr>
@@ -19632,7 +19632,7 @@
           <p:cNvPr id="4" name="Text 2">
             <a:extLst xmlns:a="http://schemas.openxmlformats.org/drawingml/2006/main">
               <a:ext uri="{FF2B5EF4-FFF2-40B4-BE49-F238E27FC236}">
-                <a16:creationId xmlns:a16="http://schemas.microsoft.com/office/drawing/2014/main" id="{8A84BEE6-8C76-4E33-B8CD-9F8D51FF7A1A}"/>
+                <a16:creationId xmlns:a16="http://schemas.microsoft.com/office/drawing/2014/main" id="{EE3F99E5-FC45-406C-BA9F-B945090A1240}"/>
               </a:ext>
             </a:extLst>
           </p:cNvPr>
@@ -19677,7 +19677,7 @@
           <p:cNvPr id="5" name="Text 3">
             <a:extLst xmlns:a="http://schemas.openxmlformats.org/drawingml/2006/main">
               <a:ext uri="{FF2B5EF4-FFF2-40B4-BE49-F238E27FC236}">
-                <a16:creationId xmlns:a16="http://schemas.microsoft.com/office/drawing/2014/main" id="{FB0FD7D5-0B49-40F2-B3D3-95445E18C181}"/>
+                <a16:creationId xmlns:a16="http://schemas.microsoft.com/office/drawing/2014/main" id="{CF8DAC78-396D-4514-B87C-4469A91DF23D}"/>
               </a:ext>
             </a:extLst>
           </p:cNvPr>
@@ -19722,7 +19722,7 @@
           <p:cNvPr id="6" name="Text 4">
             <a:extLst xmlns:a="http://schemas.openxmlformats.org/drawingml/2006/main">
               <a:ext uri="{FF2B5EF4-FFF2-40B4-BE49-F238E27FC236}">
-                <a16:creationId xmlns:a16="http://schemas.microsoft.com/office/drawing/2014/main" id="{0B8A190D-8207-4321-A11C-9E46A287DB0D}"/>
+                <a16:creationId xmlns:a16="http://schemas.microsoft.com/office/drawing/2014/main" id="{E73BB0A9-8D65-4F9A-A459-AC5AFAC107AF}"/>
               </a:ext>
             </a:extLst>
           </p:cNvPr>
@@ -19824,7 +19824,7 @@
         </p:xfrm>
         <a:graphic xmlns:a="http://schemas.openxmlformats.org/drawingml/2006/main">
           <a:graphicData uri="http://schemas.openxmlformats.org/drawingml/2006/chart">
-            <c:chart xmlns:r="http://schemas.openxmlformats.org/officeDocument/2006/relationships" xmlns:c="http://schemas.openxmlformats.org/drawingml/2006/chart" r:id="Rbcbff712ee0449ad"/>
+            <c:chart xmlns:r="http://schemas.openxmlformats.org/officeDocument/2006/relationships" xmlns:c="http://schemas.openxmlformats.org/drawingml/2006/chart" r:id="R6ef1693e41bf49a1"/>
           </a:graphicData>
         </a:graphic>
       </p:graphicFrame>
@@ -19833,7 +19833,7 @@
           <p:cNvPr id="8" name="Text 5">
             <a:extLst xmlns:a="http://schemas.openxmlformats.org/drawingml/2006/main">
               <a:ext uri="{FF2B5EF4-FFF2-40B4-BE49-F238E27FC236}">
-                <a16:creationId xmlns:a16="http://schemas.microsoft.com/office/drawing/2014/main" id="{450F6A55-666F-4C2B-A377-3701B7CC9214}"/>
+                <a16:creationId xmlns:a16="http://schemas.microsoft.com/office/drawing/2014/main" id="{CC4C23D0-ABB8-4368-B7E0-E06F28BE6305}"/>
               </a:ext>
             </a:extLst>
           </p:cNvPr>
@@ -19881,7 +19881,7 @@
           <p:cNvPr id="9" name="Shape 6">
             <a:extLst xmlns:a="http://schemas.openxmlformats.org/drawingml/2006/main">
               <a:ext uri="{FF2B5EF4-FFF2-40B4-BE49-F238E27FC236}">
-                <a16:creationId xmlns:a16="http://schemas.microsoft.com/office/drawing/2014/main" id="{0AD97B5E-9BAC-4EF6-A238-AD7548E6FDB5}"/>
+                <a16:creationId xmlns:a16="http://schemas.microsoft.com/office/drawing/2014/main" id="{B96EF5AA-65AC-46CA-A19E-5163CD5284F5}"/>
               </a:ext>
             </a:extLst>
           </p:cNvPr>
@@ -19928,7 +19928,7 @@
           <p:cNvPr id="10" name="Text 7">
             <a:extLst xmlns:a="http://schemas.openxmlformats.org/drawingml/2006/main">
               <a:ext uri="{FF2B5EF4-FFF2-40B4-BE49-F238E27FC236}">
-                <a16:creationId xmlns:a16="http://schemas.microsoft.com/office/drawing/2014/main" id="{680B248A-0F83-4430-A60F-9F50289AF491}"/>
+                <a16:creationId xmlns:a16="http://schemas.microsoft.com/office/drawing/2014/main" id="{49FC87D3-6679-435C-91DD-D2271562D366}"/>
               </a:ext>
             </a:extLst>
           </p:cNvPr>
@@ -19973,7 +19973,7 @@
           <p:cNvPr id="11" name="Text 8">
             <a:extLst xmlns:a="http://schemas.openxmlformats.org/drawingml/2006/main">
               <a:ext uri="{FF2B5EF4-FFF2-40B4-BE49-F238E27FC236}">
-                <a16:creationId xmlns:a16="http://schemas.microsoft.com/office/drawing/2014/main" id="{A5E98FF0-D79D-4750-95A2-4079CDA12FA9}"/>
+                <a16:creationId xmlns:a16="http://schemas.microsoft.com/office/drawing/2014/main" id="{751C0B1F-C4AC-4011-8B10-4AA9ED1AD3BE}"/>
               </a:ext>
             </a:extLst>
           </p:cNvPr>
@@ -20018,7 +20018,7 @@
           <p:cNvPr id="12" name="Text 9">
             <a:extLst xmlns:a="http://schemas.openxmlformats.org/drawingml/2006/main">
               <a:ext uri="{FF2B5EF4-FFF2-40B4-BE49-F238E27FC236}">
-                <a16:creationId xmlns:a16="http://schemas.microsoft.com/office/drawing/2014/main" id="{21E1517A-5B2F-411A-A532-A05D3B1C06EC}"/>
+                <a16:creationId xmlns:a16="http://schemas.microsoft.com/office/drawing/2014/main" id="{6D6F7C54-5FF4-41E6-B92D-F7E70A03D346}"/>
               </a:ext>
             </a:extLst>
           </p:cNvPr>
@@ -20063,7 +20063,7 @@
           <p:cNvPr id="13" name="Text 10">
             <a:extLst xmlns:a="http://schemas.openxmlformats.org/drawingml/2006/main">
               <a:ext uri="{FF2B5EF4-FFF2-40B4-BE49-F238E27FC236}">
-                <a16:creationId xmlns:a16="http://schemas.microsoft.com/office/drawing/2014/main" id="{362E3831-1138-41F5-AE9A-580BF7E5D109}"/>
+                <a16:creationId xmlns:a16="http://schemas.microsoft.com/office/drawing/2014/main" id="{4374FB40-31A3-4904-8444-3F048CCA0705}"/>
               </a:ext>
             </a:extLst>
           </p:cNvPr>
@@ -20108,7 +20108,7 @@
           <p:cNvPr id="14" name="Text 11">
             <a:extLst xmlns:a="http://schemas.openxmlformats.org/drawingml/2006/main">
               <a:ext uri="{FF2B5EF4-FFF2-40B4-BE49-F238E27FC236}">
-                <a16:creationId xmlns:a16="http://schemas.microsoft.com/office/drawing/2014/main" id="{4CF7735D-4CBA-4808-B76E-A8EB57CC084C}"/>
+                <a16:creationId xmlns:a16="http://schemas.microsoft.com/office/drawing/2014/main" id="{16E1033E-9B4B-449E-96DD-DC83B223C4E9}"/>
               </a:ext>
             </a:extLst>
           </p:cNvPr>
@@ -20153,7 +20153,7 @@
           <p:cNvPr id="15" name="Text 12">
             <a:extLst xmlns:a="http://schemas.openxmlformats.org/drawingml/2006/main">
               <a:ext uri="{FF2B5EF4-FFF2-40B4-BE49-F238E27FC236}">
-                <a16:creationId xmlns:a16="http://schemas.microsoft.com/office/drawing/2014/main" id="{7FE9E0A0-E91A-47D7-AB60-2E57D41FF363}"/>
+                <a16:creationId xmlns:a16="http://schemas.microsoft.com/office/drawing/2014/main" id="{EED169C7-DED1-456F-9274-8399C24325FB}"/>
               </a:ext>
             </a:extLst>
           </p:cNvPr>
@@ -20198,7 +20198,7 @@
           <p:cNvPr id="16" name="Text 13">
             <a:extLst xmlns:a="http://schemas.openxmlformats.org/drawingml/2006/main">
               <a:ext uri="{FF2B5EF4-FFF2-40B4-BE49-F238E27FC236}">
-                <a16:creationId xmlns:a16="http://schemas.microsoft.com/office/drawing/2014/main" id="{9E427EB9-B2C0-45AF-91A0-D509675412A0}"/>
+                <a16:creationId xmlns:a16="http://schemas.microsoft.com/office/drawing/2014/main" id="{D5F02AA8-D833-4675-883D-22BA0EBEEC77}"/>
               </a:ext>
             </a:extLst>
           </p:cNvPr>
@@ -20243,7 +20243,7 @@
           <p:cNvPr id="17" name="Text 14">
             <a:extLst xmlns:a="http://schemas.openxmlformats.org/drawingml/2006/main">
               <a:ext uri="{FF2B5EF4-FFF2-40B4-BE49-F238E27FC236}">
-                <a16:creationId xmlns:a16="http://schemas.microsoft.com/office/drawing/2014/main" id="{269A9ED8-86F4-46B2-AE0D-FD457290C40C}"/>
+                <a16:creationId xmlns:a16="http://schemas.microsoft.com/office/drawing/2014/main" id="{23F25084-A1AD-4338-9322-74EE5DEE7213}"/>
               </a:ext>
             </a:extLst>
           </p:cNvPr>
@@ -20288,7 +20288,7 @@
           <p:cNvPr id="18" name="Text 15">
             <a:extLst xmlns:a="http://schemas.openxmlformats.org/drawingml/2006/main">
               <a:ext uri="{FF2B5EF4-FFF2-40B4-BE49-F238E27FC236}">
-                <a16:creationId xmlns:a16="http://schemas.microsoft.com/office/drawing/2014/main" id="{E3651301-C52D-4758-BE0A-3784CF5B0AC2}"/>
+                <a16:creationId xmlns:a16="http://schemas.microsoft.com/office/drawing/2014/main" id="{2D78065D-E3F3-47BA-B7AC-E07732A7188E}"/>
               </a:ext>
             </a:extLst>
           </p:cNvPr>
@@ -20333,7 +20333,7 @@
           <p:cNvPr id="19" name="Text 16">
             <a:extLst xmlns:a="http://schemas.openxmlformats.org/drawingml/2006/main">
               <a:ext uri="{FF2B5EF4-FFF2-40B4-BE49-F238E27FC236}">
-                <a16:creationId xmlns:a16="http://schemas.microsoft.com/office/drawing/2014/main" id="{62F51241-259D-4183-BE40-9D723FEECD11}"/>
+                <a16:creationId xmlns:a16="http://schemas.microsoft.com/office/drawing/2014/main" id="{BE3DD901-BEF1-47ED-8B81-BB5D015CD6E5}"/>
               </a:ext>
             </a:extLst>
           </p:cNvPr>
@@ -20378,7 +20378,7 @@
           <p:cNvPr id="20" name="Text 17">
             <a:extLst xmlns:a="http://schemas.openxmlformats.org/drawingml/2006/main">
               <a:ext uri="{FF2B5EF4-FFF2-40B4-BE49-F238E27FC236}">
-                <a16:creationId xmlns:a16="http://schemas.microsoft.com/office/drawing/2014/main" id="{A87474DA-AABB-4654-9026-7AB8C18505F7}"/>
+                <a16:creationId xmlns:a16="http://schemas.microsoft.com/office/drawing/2014/main" id="{DBAA49D8-F19E-4FC1-BFC5-1C8C7EAE7479}"/>
               </a:ext>
             </a:extLst>
           </p:cNvPr>
@@ -20423,7 +20423,7 @@
           <p:cNvPr id="21" name="Text 18">
             <a:extLst xmlns:a="http://schemas.openxmlformats.org/drawingml/2006/main">
               <a:ext uri="{FF2B5EF4-FFF2-40B4-BE49-F238E27FC236}">
-                <a16:creationId xmlns:a16="http://schemas.microsoft.com/office/drawing/2014/main" id="{A2E4302D-60F3-4DC7-83ED-D3875D5C47FC}"/>
+                <a16:creationId xmlns:a16="http://schemas.microsoft.com/office/drawing/2014/main" id="{384DB8D4-1D71-46AB-9C16-992AB54A2527}"/>
               </a:ext>
             </a:extLst>
           </p:cNvPr>
@@ -20468,7 +20468,7 @@
           <p:cNvPr id="22" name="Text 19">
             <a:extLst xmlns:a="http://schemas.openxmlformats.org/drawingml/2006/main">
               <a:ext uri="{FF2B5EF4-FFF2-40B4-BE49-F238E27FC236}">
-                <a16:creationId xmlns:a16="http://schemas.microsoft.com/office/drawing/2014/main" id="{97975C15-34C9-473D-B672-0C9124C58A1D}"/>
+                <a16:creationId xmlns:a16="http://schemas.microsoft.com/office/drawing/2014/main" id="{3D22BA26-12B0-413E-BFEC-63DFD80BD4AD}"/>
               </a:ext>
             </a:extLst>
           </p:cNvPr>
@@ -20513,7 +20513,7 @@
           <p:cNvPr id="23" name="Text 20">
             <a:extLst xmlns:a="http://schemas.openxmlformats.org/drawingml/2006/main">
               <a:ext uri="{FF2B5EF4-FFF2-40B4-BE49-F238E27FC236}">
-                <a16:creationId xmlns:a16="http://schemas.microsoft.com/office/drawing/2014/main" id="{C6E2B558-3B4B-4A2D-B713-057F629A49A7}"/>
+                <a16:creationId xmlns:a16="http://schemas.microsoft.com/office/drawing/2014/main" id="{D8CD1E18-7DD1-4E58-9A8E-C0EA842F6B15}"/>
               </a:ext>
             </a:extLst>
           </p:cNvPr>
@@ -20561,7 +20561,7 @@
           <p:cNvPr id="24" name="Shape 21">
             <a:extLst xmlns:a="http://schemas.openxmlformats.org/drawingml/2006/main">
               <a:ext uri="{FF2B5EF4-FFF2-40B4-BE49-F238E27FC236}">
-                <a16:creationId xmlns:a16="http://schemas.microsoft.com/office/drawing/2014/main" id="{9E814CE8-A60B-4B6C-B1F8-44204F78ECF7}"/>
+                <a16:creationId xmlns:a16="http://schemas.microsoft.com/office/drawing/2014/main" id="{115C1C3C-ABFB-4606-85CE-BB3A487F7047}"/>
               </a:ext>
             </a:extLst>
           </p:cNvPr>
@@ -20601,7 +20601,7 @@
           <p:cNvPr id="25" name="Text 22">
             <a:extLst xmlns:a="http://schemas.openxmlformats.org/drawingml/2006/main">
               <a:ext uri="{FF2B5EF4-FFF2-40B4-BE49-F238E27FC236}">
-                <a16:creationId xmlns:a16="http://schemas.microsoft.com/office/drawing/2014/main" id="{0B6276FF-7CD5-4724-B517-C31A43F0CB13}"/>
+                <a16:creationId xmlns:a16="http://schemas.microsoft.com/office/drawing/2014/main" id="{A53647CE-6F46-495F-B54E-9181AEA2FA13}"/>
               </a:ext>
             </a:extLst>
           </p:cNvPr>
@@ -20647,7 +20647,7 @@
     </p:spTree>
     <p:extLst>
       <p:ext uri="{BB962C8B-B14F-4D97-AF65-F5344CB8AC3E}">
-        <p14:creationId xmlns:p14="http://schemas.microsoft.com/office/powerpoint/2010/main" val="223661462"/>
+        <p14:creationId xmlns:p14="http://schemas.microsoft.com/office/powerpoint/2010/main" val="1259239661"/>
       </p:ext>
     </p:extLst>
   </p:cSld>
@@ -20678,7 +20678,7 @@
           <p:cNvPr id="2" name="Text 0">
             <a:extLst xmlns:a="http://schemas.openxmlformats.org/drawingml/2006/main">
               <a:ext uri="{FF2B5EF4-FFF2-40B4-BE49-F238E27FC236}">
-                <a16:creationId xmlns:a16="http://schemas.microsoft.com/office/drawing/2014/main" id="{740A2B00-23BA-48B6-85CB-AC0C0A83F46C}"/>
+                <a16:creationId xmlns:a16="http://schemas.microsoft.com/office/drawing/2014/main" id="{19C484A9-60E9-4C13-8DB8-998046EBCD75}"/>
               </a:ext>
             </a:extLst>
           </p:cNvPr>
@@ -20723,7 +20723,7 @@
           <p:cNvPr id="3" name="Text 1">
             <a:extLst xmlns:a="http://schemas.openxmlformats.org/drawingml/2006/main">
               <a:ext uri="{FF2B5EF4-FFF2-40B4-BE49-F238E27FC236}">
-                <a16:creationId xmlns:a16="http://schemas.microsoft.com/office/drawing/2014/main" id="{0572F48A-AC12-4333-84DC-82585BB93564}"/>
+                <a16:creationId xmlns:a16="http://schemas.microsoft.com/office/drawing/2014/main" id="{9E41A3FC-A51D-4566-8882-318AD033E9BC}"/>
               </a:ext>
             </a:extLst>
           </p:cNvPr>
@@ -20768,7 +20768,7 @@
           <p:cNvPr id="4" name="Text 2">
             <a:extLst xmlns:a="http://schemas.openxmlformats.org/drawingml/2006/main">
               <a:ext uri="{FF2B5EF4-FFF2-40B4-BE49-F238E27FC236}">
-                <a16:creationId xmlns:a16="http://schemas.microsoft.com/office/drawing/2014/main" id="{E9B982BD-9944-4445-A52C-9FC80987CEB6}"/>
+                <a16:creationId xmlns:a16="http://schemas.microsoft.com/office/drawing/2014/main" id="{C014ACE8-694D-414A-923F-14D785F7E390}"/>
               </a:ext>
             </a:extLst>
           </p:cNvPr>
@@ -20813,7 +20813,7 @@
           <p:cNvPr id="5" name="Text 3">
             <a:extLst xmlns:a="http://schemas.openxmlformats.org/drawingml/2006/main">
               <a:ext uri="{FF2B5EF4-FFF2-40B4-BE49-F238E27FC236}">
-                <a16:creationId xmlns:a16="http://schemas.microsoft.com/office/drawing/2014/main" id="{3C05887B-50C0-4879-982A-3315573F3362}"/>
+                <a16:creationId xmlns:a16="http://schemas.microsoft.com/office/drawing/2014/main" id="{B1F5451E-F603-465B-A467-EB18D624D0DF}"/>
               </a:ext>
             </a:extLst>
           </p:cNvPr>
@@ -20858,7 +20858,7 @@
           <p:cNvPr id="6" name="Shape 4">
             <a:extLst xmlns:a="http://schemas.openxmlformats.org/drawingml/2006/main">
               <a:ext uri="{FF2B5EF4-FFF2-40B4-BE49-F238E27FC236}">
-                <a16:creationId xmlns:a16="http://schemas.microsoft.com/office/drawing/2014/main" id="{2BAD5207-CA2D-468A-95FD-147446E98365}"/>
+                <a16:creationId xmlns:a16="http://schemas.microsoft.com/office/drawing/2014/main" id="{6FCFF69F-71AA-4D4E-8B22-4AB9C0E6B63D}"/>
               </a:ext>
             </a:extLst>
           </p:cNvPr>
@@ -20905,7 +20905,7 @@
           <p:cNvPr id="7" name="Shape 5">
             <a:extLst xmlns:a="http://schemas.openxmlformats.org/drawingml/2006/main">
               <a:ext uri="{FF2B5EF4-FFF2-40B4-BE49-F238E27FC236}">
-                <a16:creationId xmlns:a16="http://schemas.microsoft.com/office/drawing/2014/main" id="{61DB1D3A-3485-4B02-AA10-B5225D7E2E33}"/>
+                <a16:creationId xmlns:a16="http://schemas.microsoft.com/office/drawing/2014/main" id="{BCFE44EE-2AD9-4AD1-B706-45FF6771ECF7}"/>
               </a:ext>
             </a:extLst>
           </p:cNvPr>
@@ -20943,7 +20943,7 @@
           <p:cNvPr id="8" name="Text 6">
             <a:extLst xmlns:a="http://schemas.openxmlformats.org/drawingml/2006/main">
               <a:ext uri="{FF2B5EF4-FFF2-40B4-BE49-F238E27FC236}">
-                <a16:creationId xmlns:a16="http://schemas.microsoft.com/office/drawing/2014/main" id="{77E0A5CA-8519-4246-80B3-7BA6F1629A68}"/>
+                <a16:creationId xmlns:a16="http://schemas.microsoft.com/office/drawing/2014/main" id="{650ABD3A-92A2-4331-ABA9-3D0C0D2DB6CC}"/>
               </a:ext>
             </a:extLst>
           </p:cNvPr>
@@ -20988,7 +20988,7 @@
           <p:cNvPr id="9" name="Text 7">
             <a:extLst xmlns:a="http://schemas.openxmlformats.org/drawingml/2006/main">
               <a:ext uri="{FF2B5EF4-FFF2-40B4-BE49-F238E27FC236}">
-                <a16:creationId xmlns:a16="http://schemas.microsoft.com/office/drawing/2014/main" id="{C98BC01A-09F9-47F7-AB44-4C9CA36AB4D8}"/>
+                <a16:creationId xmlns:a16="http://schemas.microsoft.com/office/drawing/2014/main" id="{F25EBBCB-7F6D-41F1-B45F-598CAC371736}"/>
               </a:ext>
             </a:extLst>
           </p:cNvPr>
@@ -21036,7 +21036,7 @@
           <p:cNvPr id="10" name="Text 8">
             <a:extLst xmlns:a="http://schemas.openxmlformats.org/drawingml/2006/main">
               <a:ext uri="{FF2B5EF4-FFF2-40B4-BE49-F238E27FC236}">
-                <a16:creationId xmlns:a16="http://schemas.microsoft.com/office/drawing/2014/main" id="{4C5CFF8E-C051-4D92-A440-4915385FE752}"/>
+                <a16:creationId xmlns:a16="http://schemas.microsoft.com/office/drawing/2014/main" id="{00E88583-3E49-45F6-AA22-C0768EECBB70}"/>
               </a:ext>
             </a:extLst>
           </p:cNvPr>
@@ -21084,7 +21084,7 @@
           <p:cNvPr id="11" name="Shape 9">
             <a:extLst xmlns:a="http://schemas.openxmlformats.org/drawingml/2006/main">
               <a:ext uri="{FF2B5EF4-FFF2-40B4-BE49-F238E27FC236}">
-                <a16:creationId xmlns:a16="http://schemas.microsoft.com/office/drawing/2014/main" id="{A2DCB8B4-4CA5-4423-884D-EA781FAC4A60}"/>
+                <a16:creationId xmlns:a16="http://schemas.microsoft.com/office/drawing/2014/main" id="{9F347DB2-5012-4294-9667-8A374CF201E0}"/>
               </a:ext>
             </a:extLst>
           </p:cNvPr>
@@ -21131,7 +21131,7 @@
           <p:cNvPr id="12" name="Shape 10">
             <a:extLst xmlns:a="http://schemas.openxmlformats.org/drawingml/2006/main">
               <a:ext uri="{FF2B5EF4-FFF2-40B4-BE49-F238E27FC236}">
-                <a16:creationId xmlns:a16="http://schemas.microsoft.com/office/drawing/2014/main" id="{0D9D05F5-3063-4103-8F14-3BDFD79CEBBE}"/>
+                <a16:creationId xmlns:a16="http://schemas.microsoft.com/office/drawing/2014/main" id="{6B0BD6C2-8FA4-4620-A7F6-EF0B36F1E311}"/>
               </a:ext>
             </a:extLst>
           </p:cNvPr>
@@ -21169,7 +21169,7 @@
           <p:cNvPr id="13" name="Text 11">
             <a:extLst xmlns:a="http://schemas.openxmlformats.org/drawingml/2006/main">
               <a:ext uri="{FF2B5EF4-FFF2-40B4-BE49-F238E27FC236}">
-                <a16:creationId xmlns:a16="http://schemas.microsoft.com/office/drawing/2014/main" id="{0F99A343-CC47-4359-BA86-08B9D90BBFD2}"/>
+                <a16:creationId xmlns:a16="http://schemas.microsoft.com/office/drawing/2014/main" id="{44B094D6-AD66-40BC-86F3-BE455320C996}"/>
               </a:ext>
             </a:extLst>
           </p:cNvPr>
@@ -21214,7 +21214,7 @@
           <p:cNvPr id="14" name="Text 12">
             <a:extLst xmlns:a="http://schemas.openxmlformats.org/drawingml/2006/main">
               <a:ext uri="{FF2B5EF4-FFF2-40B4-BE49-F238E27FC236}">
-                <a16:creationId xmlns:a16="http://schemas.microsoft.com/office/drawing/2014/main" id="{A6EEB3A3-DE56-4E81-B4D4-043CACF567BD}"/>
+                <a16:creationId xmlns:a16="http://schemas.microsoft.com/office/drawing/2014/main" id="{C76BEAF0-2836-4015-BF00-3EB6775988FC}"/>
               </a:ext>
             </a:extLst>
           </p:cNvPr>
@@ -21262,7 +21262,7 @@
           <p:cNvPr id="15" name="Text 13">
             <a:extLst xmlns:a="http://schemas.openxmlformats.org/drawingml/2006/main">
               <a:ext uri="{FF2B5EF4-FFF2-40B4-BE49-F238E27FC236}">
-                <a16:creationId xmlns:a16="http://schemas.microsoft.com/office/drawing/2014/main" id="{F3F6E5CF-D85D-453F-ACAA-50208F5A0607}"/>
+                <a16:creationId xmlns:a16="http://schemas.microsoft.com/office/drawing/2014/main" id="{91F3BC9E-A3EF-4170-9B46-25E353C3760B}"/>
               </a:ext>
             </a:extLst>
           </p:cNvPr>
@@ -21310,7 +21310,7 @@
           <p:cNvPr id="16" name="Shape 14">
             <a:extLst xmlns:a="http://schemas.openxmlformats.org/drawingml/2006/main">
               <a:ext uri="{FF2B5EF4-FFF2-40B4-BE49-F238E27FC236}">
-                <a16:creationId xmlns:a16="http://schemas.microsoft.com/office/drawing/2014/main" id="{C1B5F5F4-E926-4189-A335-06C9AC4C017A}"/>
+                <a16:creationId xmlns:a16="http://schemas.microsoft.com/office/drawing/2014/main" id="{9CDB2293-9679-44B4-9BA8-A12C55286DA2}"/>
               </a:ext>
             </a:extLst>
           </p:cNvPr>
@@ -21357,7 +21357,7 @@
           <p:cNvPr id="17" name="Shape 15">
             <a:extLst xmlns:a="http://schemas.openxmlformats.org/drawingml/2006/main">
               <a:ext uri="{FF2B5EF4-FFF2-40B4-BE49-F238E27FC236}">
-                <a16:creationId xmlns:a16="http://schemas.microsoft.com/office/drawing/2014/main" id="{4F3C769A-E1A8-48BB-8B35-111668B0891E}"/>
+                <a16:creationId xmlns:a16="http://schemas.microsoft.com/office/drawing/2014/main" id="{807F8545-F75B-4F4F-A9C6-AB1A0E4CDD34}"/>
               </a:ext>
             </a:extLst>
           </p:cNvPr>
@@ -21395,7 +21395,7 @@
           <p:cNvPr id="18" name="Text 16">
             <a:extLst xmlns:a="http://schemas.openxmlformats.org/drawingml/2006/main">
               <a:ext uri="{FF2B5EF4-FFF2-40B4-BE49-F238E27FC236}">
-                <a16:creationId xmlns:a16="http://schemas.microsoft.com/office/drawing/2014/main" id="{744FA337-F2A8-4B06-9455-09D34F51E478}"/>
+                <a16:creationId xmlns:a16="http://schemas.microsoft.com/office/drawing/2014/main" id="{86243D4E-A7FC-427F-AFC6-885E30D7B4B0}"/>
               </a:ext>
             </a:extLst>
           </p:cNvPr>
@@ -21440,7 +21440,7 @@
           <p:cNvPr id="19" name="Text 17">
             <a:extLst xmlns:a="http://schemas.openxmlformats.org/drawingml/2006/main">
               <a:ext uri="{FF2B5EF4-FFF2-40B4-BE49-F238E27FC236}">
-                <a16:creationId xmlns:a16="http://schemas.microsoft.com/office/drawing/2014/main" id="{DA89E2A2-DC9E-402F-A300-2243CB026B4A}"/>
+                <a16:creationId xmlns:a16="http://schemas.microsoft.com/office/drawing/2014/main" id="{16AA156F-9DF5-4D67-B64A-5530666EEA23}"/>
               </a:ext>
             </a:extLst>
           </p:cNvPr>
@@ -21488,7 +21488,7 @@
           <p:cNvPr id="20" name="Text 18">
             <a:extLst xmlns:a="http://schemas.openxmlformats.org/drawingml/2006/main">
               <a:ext uri="{FF2B5EF4-FFF2-40B4-BE49-F238E27FC236}">
-                <a16:creationId xmlns:a16="http://schemas.microsoft.com/office/drawing/2014/main" id="{3AB80F9F-5FDB-44C8-BA59-DFC30A456848}"/>
+                <a16:creationId xmlns:a16="http://schemas.microsoft.com/office/drawing/2014/main" id="{FCC98C4A-5A0F-4B32-B419-1EDC24B1A28B}"/>
               </a:ext>
             </a:extLst>
           </p:cNvPr>
@@ -21536,7 +21536,7 @@
           <p:cNvPr id="21" name="Shape 19">
             <a:extLst xmlns:a="http://schemas.openxmlformats.org/drawingml/2006/main">
               <a:ext uri="{FF2B5EF4-FFF2-40B4-BE49-F238E27FC236}">
-                <a16:creationId xmlns:a16="http://schemas.microsoft.com/office/drawing/2014/main" id="{BB6AC263-A843-4279-AB44-1709FF978D4D}"/>
+                <a16:creationId xmlns:a16="http://schemas.microsoft.com/office/drawing/2014/main" id="{B7E6EE65-EA28-4A20-9F56-59DA19CFBF58}"/>
               </a:ext>
             </a:extLst>
           </p:cNvPr>
@@ -21583,7 +21583,7 @@
           <p:cNvPr id="22" name="Shape 20">
             <a:extLst xmlns:a="http://schemas.openxmlformats.org/drawingml/2006/main">
               <a:ext uri="{FF2B5EF4-FFF2-40B4-BE49-F238E27FC236}">
-                <a16:creationId xmlns:a16="http://schemas.microsoft.com/office/drawing/2014/main" id="{49536F3E-452B-41FF-9F67-B8E1853E2C47}"/>
+                <a16:creationId xmlns:a16="http://schemas.microsoft.com/office/drawing/2014/main" id="{0D0F0514-EAA7-46B3-8D7E-B2771B2505B9}"/>
               </a:ext>
             </a:extLst>
           </p:cNvPr>
@@ -21621,7 +21621,7 @@
           <p:cNvPr id="23" name="Text 21">
             <a:extLst xmlns:a="http://schemas.openxmlformats.org/drawingml/2006/main">
               <a:ext uri="{FF2B5EF4-FFF2-40B4-BE49-F238E27FC236}">
-                <a16:creationId xmlns:a16="http://schemas.microsoft.com/office/drawing/2014/main" id="{CFD7988A-EDFD-408F-BC90-53C4A72B1226}"/>
+                <a16:creationId xmlns:a16="http://schemas.microsoft.com/office/drawing/2014/main" id="{C9657B51-3476-463B-BE72-7E03FC4013AA}"/>
               </a:ext>
             </a:extLst>
           </p:cNvPr>
@@ -21666,7 +21666,7 @@
           <p:cNvPr id="24" name="Text 22">
             <a:extLst xmlns:a="http://schemas.openxmlformats.org/drawingml/2006/main">
               <a:ext uri="{FF2B5EF4-FFF2-40B4-BE49-F238E27FC236}">
-                <a16:creationId xmlns:a16="http://schemas.microsoft.com/office/drawing/2014/main" id="{0748FD60-96DA-40FB-AD4F-73ADB551506E}"/>
+                <a16:creationId xmlns:a16="http://schemas.microsoft.com/office/drawing/2014/main" id="{BC940A75-A8AF-4E13-AE4E-97FAF4DBC465}"/>
               </a:ext>
             </a:extLst>
           </p:cNvPr>
@@ -21714,7 +21714,7 @@
           <p:cNvPr id="25" name="Text 23">
             <a:extLst xmlns:a="http://schemas.openxmlformats.org/drawingml/2006/main">
               <a:ext uri="{FF2B5EF4-FFF2-40B4-BE49-F238E27FC236}">
-                <a16:creationId xmlns:a16="http://schemas.microsoft.com/office/drawing/2014/main" id="{56E24E03-6E2D-4449-9B61-6B6480751AFC}"/>
+                <a16:creationId xmlns:a16="http://schemas.microsoft.com/office/drawing/2014/main" id="{379B5C7E-C0A4-4D8E-B5CB-47C4C48E18AB}"/>
               </a:ext>
             </a:extLst>
           </p:cNvPr>
@@ -21762,7 +21762,7 @@
           <p:cNvPr id="26" name="Shape 24">
             <a:extLst xmlns:a="http://schemas.openxmlformats.org/drawingml/2006/main">
               <a:ext uri="{FF2B5EF4-FFF2-40B4-BE49-F238E27FC236}">
-                <a16:creationId xmlns:a16="http://schemas.microsoft.com/office/drawing/2014/main" id="{DDD55207-63C0-4EE2-9DA1-E6B23B74C7AA}"/>
+                <a16:creationId xmlns:a16="http://schemas.microsoft.com/office/drawing/2014/main" id="{AB55D738-D8F2-45C7-87F2-351135CA87D9}"/>
               </a:ext>
             </a:extLst>
           </p:cNvPr>
@@ -21809,7 +21809,7 @@
           <p:cNvPr id="27" name="Shape 25">
             <a:extLst xmlns:a="http://schemas.openxmlformats.org/drawingml/2006/main">
               <a:ext uri="{FF2B5EF4-FFF2-40B4-BE49-F238E27FC236}">
-                <a16:creationId xmlns:a16="http://schemas.microsoft.com/office/drawing/2014/main" id="{F5E2784C-504B-4950-A81B-2A3BBCC1BC2C}"/>
+                <a16:creationId xmlns:a16="http://schemas.microsoft.com/office/drawing/2014/main" id="{3F576C4E-8B6B-459C-95A5-668F15E2C9A8}"/>
               </a:ext>
             </a:extLst>
           </p:cNvPr>
@@ -21847,7 +21847,7 @@
           <p:cNvPr id="28" name="Text 26">
             <a:extLst xmlns:a="http://schemas.openxmlformats.org/drawingml/2006/main">
               <a:ext uri="{FF2B5EF4-FFF2-40B4-BE49-F238E27FC236}">
-                <a16:creationId xmlns:a16="http://schemas.microsoft.com/office/drawing/2014/main" id="{C73CF81D-52B8-4DBF-A584-4709CA7528A5}"/>
+                <a16:creationId xmlns:a16="http://schemas.microsoft.com/office/drawing/2014/main" id="{102D8A6D-B0C8-4026-8B2E-8DBE7DC6B1F8}"/>
               </a:ext>
             </a:extLst>
           </p:cNvPr>
@@ -21892,7 +21892,7 @@
           <p:cNvPr id="29" name="Text 27">
             <a:extLst xmlns:a="http://schemas.openxmlformats.org/drawingml/2006/main">
               <a:ext uri="{FF2B5EF4-FFF2-40B4-BE49-F238E27FC236}">
-                <a16:creationId xmlns:a16="http://schemas.microsoft.com/office/drawing/2014/main" id="{8B676385-847B-43D2-BEA6-D1F0524E2360}"/>
+                <a16:creationId xmlns:a16="http://schemas.microsoft.com/office/drawing/2014/main" id="{CC0234D1-4E7E-4885-BB27-0399DBF8A4D8}"/>
               </a:ext>
             </a:extLst>
           </p:cNvPr>
@@ -21940,7 +21940,7 @@
           <p:cNvPr id="30" name="Text 28">
             <a:extLst xmlns:a="http://schemas.openxmlformats.org/drawingml/2006/main">
               <a:ext uri="{FF2B5EF4-FFF2-40B4-BE49-F238E27FC236}">
-                <a16:creationId xmlns:a16="http://schemas.microsoft.com/office/drawing/2014/main" id="{454EABE4-AD81-4BBF-A360-C6743C128446}"/>
+                <a16:creationId xmlns:a16="http://schemas.microsoft.com/office/drawing/2014/main" id="{AA5CFC16-7381-427A-8620-144C8F9614D8}"/>
               </a:ext>
             </a:extLst>
           </p:cNvPr>
@@ -21988,7 +21988,7 @@
           <p:cNvPr id="31" name="Shape 29">
             <a:extLst xmlns:a="http://schemas.openxmlformats.org/drawingml/2006/main">
               <a:ext uri="{FF2B5EF4-FFF2-40B4-BE49-F238E27FC236}">
-                <a16:creationId xmlns:a16="http://schemas.microsoft.com/office/drawing/2014/main" id="{CC366C70-CE70-443E-8C23-0F5D8435225E}"/>
+                <a16:creationId xmlns:a16="http://schemas.microsoft.com/office/drawing/2014/main" id="{BAB74900-0D2B-46F6-AD61-29974109B849}"/>
               </a:ext>
             </a:extLst>
           </p:cNvPr>
@@ -22035,7 +22035,7 @@
           <p:cNvPr id="32" name="Text 30">
             <a:extLst xmlns:a="http://schemas.openxmlformats.org/drawingml/2006/main">
               <a:ext uri="{FF2B5EF4-FFF2-40B4-BE49-F238E27FC236}">
-                <a16:creationId xmlns:a16="http://schemas.microsoft.com/office/drawing/2014/main" id="{A80C8FB2-17DB-4669-82FE-CFC469962F66}"/>
+                <a16:creationId xmlns:a16="http://schemas.microsoft.com/office/drawing/2014/main" id="{766A1D64-FF9F-42BE-9770-68C8919FFF67}"/>
               </a:ext>
             </a:extLst>
           </p:cNvPr>
@@ -22080,7 +22080,7 @@
           <p:cNvPr id="33" name="Text 31">
             <a:extLst xmlns:a="http://schemas.openxmlformats.org/drawingml/2006/main">
               <a:ext uri="{FF2B5EF4-FFF2-40B4-BE49-F238E27FC236}">
-                <a16:creationId xmlns:a16="http://schemas.microsoft.com/office/drawing/2014/main" id="{C4B81BB0-D98D-451A-B2AB-4381CBA60557}"/>
+                <a16:creationId xmlns:a16="http://schemas.microsoft.com/office/drawing/2014/main" id="{2CF41F15-ABE8-4B8C-A3D9-C8701D6723C2}"/>
               </a:ext>
             </a:extLst>
           </p:cNvPr>
@@ -22143,7 +22143,7 @@
                 <a:ea typeface="Calibri"/>
                 <a:cs typeface="Calibri"/>
               </a:rPr>
-              <a:t>GCS is exploratory evidence from one workflow family</a:t>
+              <a:t>Fair placement / GEPA has only six held-out cases</a:t>
             </a:r>
           </a:p>
           <a:p xmlns:a="http://schemas.openxmlformats.org/drawingml/2006/main">
@@ -22165,7 +22165,7 @@
                 <a:ea typeface="Calibri"/>
                 <a:cs typeface="Calibri"/>
               </a:rPr>
-              <a:t>No equally pre-executed manual-macro arm was tested</a:t>
+              <a:t>AWO · Agent JIT · EvoC2F remain unexecuted</a:t>
             </a:r>
           </a:p>
           <a:p xmlns:a="http://schemas.openxmlformats.org/drawingml/2006/main">
@@ -22195,7 +22195,7 @@
     </p:spTree>
     <p:extLst>
       <p:ext uri="{BB962C8B-B14F-4D97-AF65-F5344CB8AC3E}">
-        <p14:creationId xmlns:p14="http://schemas.microsoft.com/office/powerpoint/2010/main" val="1810271075"/>
+        <p14:creationId xmlns:p14="http://schemas.microsoft.com/office/powerpoint/2010/main" val="406618266"/>
       </p:ext>
     </p:extLst>
   </p:cSld>
@@ -22226,7 +22226,7 @@
           <p:cNvPr id="2" name="Text 0">
             <a:extLst xmlns:a="http://schemas.openxmlformats.org/drawingml/2006/main">
               <a:ext uri="{FF2B5EF4-FFF2-40B4-BE49-F238E27FC236}">
-                <a16:creationId xmlns:a16="http://schemas.microsoft.com/office/drawing/2014/main" id="{F1D1474D-7142-4DF4-BAF5-29BC71641BD4}"/>
+                <a16:creationId xmlns:a16="http://schemas.microsoft.com/office/drawing/2014/main" id="{C5404C00-2709-4DA5-843A-AD2CD4303187}"/>
               </a:ext>
             </a:extLst>
           </p:cNvPr>
@@ -22271,7 +22271,7 @@
           <p:cNvPr id="3" name="Text 1">
             <a:extLst xmlns:a="http://schemas.openxmlformats.org/drawingml/2006/main">
               <a:ext uri="{FF2B5EF4-FFF2-40B4-BE49-F238E27FC236}">
-                <a16:creationId xmlns:a16="http://schemas.microsoft.com/office/drawing/2014/main" id="{C59BB8EC-461D-45FA-85EA-B34F6C792347}"/>
+                <a16:creationId xmlns:a16="http://schemas.microsoft.com/office/drawing/2014/main" id="{ADB1CC54-5A97-4E4C-BBE2-F7307BFAFE0B}"/>
               </a:ext>
             </a:extLst>
           </p:cNvPr>
@@ -22316,7 +22316,7 @@
           <p:cNvPr id="4" name="Shape 2">
             <a:extLst xmlns:a="http://schemas.openxmlformats.org/drawingml/2006/main">
               <a:ext uri="{FF2B5EF4-FFF2-40B4-BE49-F238E27FC236}">
-                <a16:creationId xmlns:a16="http://schemas.microsoft.com/office/drawing/2014/main" id="{8E6D97C5-423E-41B2-9D23-E5BB7919D0B4}"/>
+                <a16:creationId xmlns:a16="http://schemas.microsoft.com/office/drawing/2014/main" id="{02F49E45-B5CF-4AF7-B9E9-78BC8C08B7F2}"/>
               </a:ext>
             </a:extLst>
           </p:cNvPr>
@@ -22356,7 +22356,7 @@
           <p:cNvPr id="5" name="Shape 3">
             <a:extLst xmlns:a="http://schemas.openxmlformats.org/drawingml/2006/main">
               <a:ext uri="{FF2B5EF4-FFF2-40B4-BE49-F238E27FC236}">
-                <a16:creationId xmlns:a16="http://schemas.microsoft.com/office/drawing/2014/main" id="{F9E79C12-8F44-4EED-B89E-6A32C16DD5DA}"/>
+                <a16:creationId xmlns:a16="http://schemas.microsoft.com/office/drawing/2014/main" id="{740F362A-C568-4C7D-BC58-36638ADF0340}"/>
               </a:ext>
             </a:extLst>
           </p:cNvPr>
@@ -22396,7 +22396,7 @@
           <p:cNvPr id="6" name="Text 4">
             <a:extLst xmlns:a="http://schemas.openxmlformats.org/drawingml/2006/main">
               <a:ext uri="{FF2B5EF4-FFF2-40B4-BE49-F238E27FC236}">
-                <a16:creationId xmlns:a16="http://schemas.microsoft.com/office/drawing/2014/main" id="{AED4B47E-BCCA-401A-BE49-47975260C48D}"/>
+                <a16:creationId xmlns:a16="http://schemas.microsoft.com/office/drawing/2014/main" id="{E53FE9D9-B567-4443-8A3D-A9D9EED35538}"/>
               </a:ext>
             </a:extLst>
           </p:cNvPr>
@@ -22441,7 +22441,7 @@
           <p:cNvPr id="7" name="Text 5">
             <a:extLst xmlns:a="http://schemas.openxmlformats.org/drawingml/2006/main">
               <a:ext uri="{FF2B5EF4-FFF2-40B4-BE49-F238E27FC236}">
-                <a16:creationId xmlns:a16="http://schemas.microsoft.com/office/drawing/2014/main" id="{35EAFAA4-2311-489D-96AD-5EAAE795053D}"/>
+                <a16:creationId xmlns:a16="http://schemas.microsoft.com/office/drawing/2014/main" id="{E28C376E-D60D-40EB-8C85-ECF2ABD48D46}"/>
               </a:ext>
             </a:extLst>
           </p:cNvPr>
@@ -22486,7 +22486,7 @@
           <p:cNvPr id="8" name="Shape 6">
             <a:extLst xmlns:a="http://schemas.openxmlformats.org/drawingml/2006/main">
               <a:ext uri="{FF2B5EF4-FFF2-40B4-BE49-F238E27FC236}">
-                <a16:creationId xmlns:a16="http://schemas.microsoft.com/office/drawing/2014/main" id="{E2622B89-B89C-4E8E-AC18-A931CFA433EF}"/>
+                <a16:creationId xmlns:a16="http://schemas.microsoft.com/office/drawing/2014/main" id="{076FAC6B-AAE9-44AB-931B-FA18970F6A8E}"/>
               </a:ext>
             </a:extLst>
           </p:cNvPr>
@@ -22524,7 +22524,7 @@
           <p:cNvPr id="9" name="Text 7">
             <a:extLst xmlns:a="http://schemas.openxmlformats.org/drawingml/2006/main">
               <a:ext uri="{FF2B5EF4-FFF2-40B4-BE49-F238E27FC236}">
-                <a16:creationId xmlns:a16="http://schemas.microsoft.com/office/drawing/2014/main" id="{3CBE8A3A-014C-44DF-8BF2-83A1406B9DE9}"/>
+                <a16:creationId xmlns:a16="http://schemas.microsoft.com/office/drawing/2014/main" id="{BAAD2E14-4836-4F66-BC22-63D6C1294AE6}"/>
               </a:ext>
             </a:extLst>
           </p:cNvPr>
@@ -22569,7 +22569,7 @@
           <p:cNvPr id="10" name="Text 8">
             <a:extLst xmlns:a="http://schemas.openxmlformats.org/drawingml/2006/main">
               <a:ext uri="{FF2B5EF4-FFF2-40B4-BE49-F238E27FC236}">
-                <a16:creationId xmlns:a16="http://schemas.microsoft.com/office/drawing/2014/main" id="{23C94934-3CF0-4DF7-9936-665779FD10B7}"/>
+                <a16:creationId xmlns:a16="http://schemas.microsoft.com/office/drawing/2014/main" id="{91EE7DCA-CA40-4F09-8726-78031AAA3C5F}"/>
               </a:ext>
             </a:extLst>
           </p:cNvPr>
@@ -22617,7 +22617,7 @@
           <p:cNvPr id="11" name="Text 9">
             <a:extLst xmlns:a="http://schemas.openxmlformats.org/drawingml/2006/main">
               <a:ext uri="{FF2B5EF4-FFF2-40B4-BE49-F238E27FC236}">
-                <a16:creationId xmlns:a16="http://schemas.microsoft.com/office/drawing/2014/main" id="{24315BE2-02A5-46F9-8EA4-276C2AF691BC}"/>
+                <a16:creationId xmlns:a16="http://schemas.microsoft.com/office/drawing/2014/main" id="{62533E1E-5F51-40B8-849A-4D0D67318DF7}"/>
               </a:ext>
             </a:extLst>
           </p:cNvPr>
@@ -22665,7 +22665,7 @@
           <p:cNvPr id="12" name="Shape 10">
             <a:extLst xmlns:a="http://schemas.openxmlformats.org/drawingml/2006/main">
               <a:ext uri="{FF2B5EF4-FFF2-40B4-BE49-F238E27FC236}">
-                <a16:creationId xmlns:a16="http://schemas.microsoft.com/office/drawing/2014/main" id="{E13BCC94-1D36-44EC-B7DB-BBF34C24344B}"/>
+                <a16:creationId xmlns:a16="http://schemas.microsoft.com/office/drawing/2014/main" id="{C02C807E-0255-458A-928B-1AC2808CF8CB}"/>
               </a:ext>
             </a:extLst>
           </p:cNvPr>
@@ -22703,7 +22703,7 @@
           <p:cNvPr id="13" name="Text 11">
             <a:extLst xmlns:a="http://schemas.openxmlformats.org/drawingml/2006/main">
               <a:ext uri="{FF2B5EF4-FFF2-40B4-BE49-F238E27FC236}">
-                <a16:creationId xmlns:a16="http://schemas.microsoft.com/office/drawing/2014/main" id="{893D4CBD-382C-4163-862C-D1DE09B84C5C}"/>
+                <a16:creationId xmlns:a16="http://schemas.microsoft.com/office/drawing/2014/main" id="{BE0532F0-139F-4963-8A4C-0E0C3A7E6664}"/>
               </a:ext>
             </a:extLst>
           </p:cNvPr>
@@ -22748,7 +22748,7 @@
           <p:cNvPr id="14" name="Text 12">
             <a:extLst xmlns:a="http://schemas.openxmlformats.org/drawingml/2006/main">
               <a:ext uri="{FF2B5EF4-FFF2-40B4-BE49-F238E27FC236}">
-                <a16:creationId xmlns:a16="http://schemas.microsoft.com/office/drawing/2014/main" id="{71D8958B-0C36-47DC-9C5E-1F176E52B21C}"/>
+                <a16:creationId xmlns:a16="http://schemas.microsoft.com/office/drawing/2014/main" id="{F6C217D7-52C9-4C92-8569-2E3842A04315}"/>
               </a:ext>
             </a:extLst>
           </p:cNvPr>
@@ -22796,7 +22796,7 @@
           <p:cNvPr id="15" name="Text 13">
             <a:extLst xmlns:a="http://schemas.openxmlformats.org/drawingml/2006/main">
               <a:ext uri="{FF2B5EF4-FFF2-40B4-BE49-F238E27FC236}">
-                <a16:creationId xmlns:a16="http://schemas.microsoft.com/office/drawing/2014/main" id="{B1728FC6-3A0E-45B6-86E9-3443618F7DDC}"/>
+                <a16:creationId xmlns:a16="http://schemas.microsoft.com/office/drawing/2014/main" id="{4F81520C-21D6-4356-BADA-5BE64118A256}"/>
               </a:ext>
             </a:extLst>
           </p:cNvPr>
@@ -22834,7 +22834,7 @@
                 <a:ea typeface="Calibri"/>
                 <a:cs typeface="Calibri"/>
               </a:rPr>
-              <a:t>Manual composition beats partial GRC on the stable workflow. GCS then beats the measured provider-visible macro by moving the admitted program before request one; an equally pre-executed manual macro remains the required comparator.</a:t>
+              <a:t>Manual composition beats partial GRC on the stable workflow. At equal pre-model placement, manual and GCS tie requests, interfaces, input tokens, and exact quality. Automatic guarded discovery—not runtime dominance—is the remaining value claim.</a:t>
             </a:r>
           </a:p>
         </p:txBody>
@@ -22844,7 +22844,7 @@
           <p:cNvPr id="16" name="Shape 14">
             <a:extLst xmlns:a="http://schemas.openxmlformats.org/drawingml/2006/main">
               <a:ext uri="{FF2B5EF4-FFF2-40B4-BE49-F238E27FC236}">
-                <a16:creationId xmlns:a16="http://schemas.microsoft.com/office/drawing/2014/main" id="{5509F2DB-26F5-4BBC-81FA-C493A2118A68}"/>
+                <a16:creationId xmlns:a16="http://schemas.microsoft.com/office/drawing/2014/main" id="{DED4DF9F-284C-46D3-8747-7C40C36C4BC1}"/>
               </a:ext>
             </a:extLst>
           </p:cNvPr>
@@ -22882,7 +22882,7 @@
           <p:cNvPr id="17" name="Text 15">
             <a:extLst xmlns:a="http://schemas.openxmlformats.org/drawingml/2006/main">
               <a:ext uri="{FF2B5EF4-FFF2-40B4-BE49-F238E27FC236}">
-                <a16:creationId xmlns:a16="http://schemas.microsoft.com/office/drawing/2014/main" id="{6C26E7F5-8EE5-4B0F-91DB-0EDF222C81CE}"/>
+                <a16:creationId xmlns:a16="http://schemas.microsoft.com/office/drawing/2014/main" id="{5EC8D5AB-ABF6-48BE-AFF4-1EFD84FD531E}"/>
               </a:ext>
             </a:extLst>
           </p:cNvPr>
@@ -22927,7 +22927,7 @@
           <p:cNvPr id="18" name="Text 16">
             <a:extLst xmlns:a="http://schemas.openxmlformats.org/drawingml/2006/main">
               <a:ext uri="{FF2B5EF4-FFF2-40B4-BE49-F238E27FC236}">
-                <a16:creationId xmlns:a16="http://schemas.microsoft.com/office/drawing/2014/main" id="{04201D09-241D-48FA-A97D-2E94A8E87E12}"/>
+                <a16:creationId xmlns:a16="http://schemas.microsoft.com/office/drawing/2014/main" id="{5FF1CCFE-2E3D-41CA-B2F3-11DE8B137822}"/>
               </a:ext>
             </a:extLst>
           </p:cNvPr>
@@ -22975,7 +22975,7 @@
           <p:cNvPr id="19" name="Text 17">
             <a:extLst xmlns:a="http://schemas.openxmlformats.org/drawingml/2006/main">
               <a:ext uri="{FF2B5EF4-FFF2-40B4-BE49-F238E27FC236}">
-                <a16:creationId xmlns:a16="http://schemas.microsoft.com/office/drawing/2014/main" id="{E2350BEF-A290-4D0E-945D-02BD99D958D6}"/>
+                <a16:creationId xmlns:a16="http://schemas.microsoft.com/office/drawing/2014/main" id="{4174AEFA-D447-4C87-9225-B8B11DF93956}"/>
               </a:ext>
             </a:extLst>
           </p:cNvPr>
@@ -23023,7 +23023,7 @@
           <p:cNvPr id="20" name="Shape 18">
             <a:extLst xmlns:a="http://schemas.openxmlformats.org/drawingml/2006/main">
               <a:ext uri="{FF2B5EF4-FFF2-40B4-BE49-F238E27FC236}">
-                <a16:creationId xmlns:a16="http://schemas.microsoft.com/office/drawing/2014/main" id="{7AC90108-8CDA-4EBF-8EF7-09C7A0F70402}"/>
+                <a16:creationId xmlns:a16="http://schemas.microsoft.com/office/drawing/2014/main" id="{2E8AC3E7-E7DF-46A8-9866-A2FF4A8C6081}"/>
               </a:ext>
             </a:extLst>
           </p:cNvPr>
@@ -23061,7 +23061,7 @@
           <p:cNvPr id="21" name="Text 19">
             <a:extLst xmlns:a="http://schemas.openxmlformats.org/drawingml/2006/main">
               <a:ext uri="{FF2B5EF4-FFF2-40B4-BE49-F238E27FC236}">
-                <a16:creationId xmlns:a16="http://schemas.microsoft.com/office/drawing/2014/main" id="{B8F2AE53-0E9B-47D1-AF56-B93E7DFC917B}"/>
+                <a16:creationId xmlns:a16="http://schemas.microsoft.com/office/drawing/2014/main" id="{AA66EFEB-2281-4812-9A46-230C9DB798B0}"/>
               </a:ext>
             </a:extLst>
           </p:cNvPr>
@@ -23106,7 +23106,7 @@
           <p:cNvPr id="22" name="Text 20">
             <a:extLst xmlns:a="http://schemas.openxmlformats.org/drawingml/2006/main">
               <a:ext uri="{FF2B5EF4-FFF2-40B4-BE49-F238E27FC236}">
-                <a16:creationId xmlns:a16="http://schemas.microsoft.com/office/drawing/2014/main" id="{ABDBD175-7DFB-4BC3-BC8B-5F93C6F6AE22}"/>
+                <a16:creationId xmlns:a16="http://schemas.microsoft.com/office/drawing/2014/main" id="{6521E63D-E734-476A-B3CA-28E9F216DE14}"/>
               </a:ext>
             </a:extLst>
           </p:cNvPr>
@@ -23154,7 +23154,7 @@
           <p:cNvPr id="23" name="Text 21">
             <a:extLst xmlns:a="http://schemas.openxmlformats.org/drawingml/2006/main">
               <a:ext uri="{FF2B5EF4-FFF2-40B4-BE49-F238E27FC236}">
-                <a16:creationId xmlns:a16="http://schemas.microsoft.com/office/drawing/2014/main" id="{B500C245-BFAF-4DCB-8C51-510280C22588}"/>
+                <a16:creationId xmlns:a16="http://schemas.microsoft.com/office/drawing/2014/main" id="{FDD6B79F-BC8D-4278-8D24-08C53ED921FC}"/>
               </a:ext>
             </a:extLst>
           </p:cNvPr>
@@ -23202,7 +23202,7 @@
           <p:cNvPr id="24" name="Text 22">
             <a:extLst xmlns:a="http://schemas.openxmlformats.org/drawingml/2006/main">
               <a:ext uri="{FF2B5EF4-FFF2-40B4-BE49-F238E27FC236}">
-                <a16:creationId xmlns:a16="http://schemas.microsoft.com/office/drawing/2014/main" id="{302EF520-87A1-4312-9AD7-5AF1582F6E9F}"/>
+                <a16:creationId xmlns:a16="http://schemas.microsoft.com/office/drawing/2014/main" id="{A54A34A9-2406-4C43-B673-246F4A35BDB6}"/>
               </a:ext>
             </a:extLst>
           </p:cNvPr>
@@ -23245,7 +23245,7 @@
     </p:spTree>
     <p:extLst>
       <p:ext uri="{BB962C8B-B14F-4D97-AF65-F5344CB8AC3E}">
-        <p14:creationId xmlns:p14="http://schemas.microsoft.com/office/powerpoint/2010/main" val="467078906"/>
+        <p14:creationId xmlns:p14="http://schemas.microsoft.com/office/powerpoint/2010/main" val="943430613"/>
       </p:ext>
     </p:extLst>
   </p:cSld>
@@ -23276,7 +23276,7 @@
           <p:cNvPr id="2" name="Text 0">
             <a:extLst xmlns:a="http://schemas.openxmlformats.org/drawingml/2006/main">
               <a:ext uri="{FF2B5EF4-FFF2-40B4-BE49-F238E27FC236}">
-                <a16:creationId xmlns:a16="http://schemas.microsoft.com/office/drawing/2014/main" id="{0ABFB197-DCC3-4D24-A86A-BF4D64A0DB5B}"/>
+                <a16:creationId xmlns:a16="http://schemas.microsoft.com/office/drawing/2014/main" id="{1C37A884-3EC5-4FD6-8DEE-58A71DC7377E}"/>
               </a:ext>
             </a:extLst>
           </p:cNvPr>
@@ -23321,7 +23321,7 @@
           <p:cNvPr id="3" name="Text 1">
             <a:extLst xmlns:a="http://schemas.openxmlformats.org/drawingml/2006/main">
               <a:ext uri="{FF2B5EF4-FFF2-40B4-BE49-F238E27FC236}">
-                <a16:creationId xmlns:a16="http://schemas.microsoft.com/office/drawing/2014/main" id="{70CCD614-0278-47D2-95A1-FDE14E2B0970}"/>
+                <a16:creationId xmlns:a16="http://schemas.microsoft.com/office/drawing/2014/main" id="{2EB5131F-5BB6-4D9D-8CF1-226ADE63077E}"/>
               </a:ext>
             </a:extLst>
           </p:cNvPr>
@@ -23366,7 +23366,7 @@
           <p:cNvPr id="4" name="Text 2">
             <a:extLst xmlns:a="http://schemas.openxmlformats.org/drawingml/2006/main">
               <a:ext uri="{FF2B5EF4-FFF2-40B4-BE49-F238E27FC236}">
-                <a16:creationId xmlns:a16="http://schemas.microsoft.com/office/drawing/2014/main" id="{6228B9FC-67A2-4B72-A844-34C056842292}"/>
+                <a16:creationId xmlns:a16="http://schemas.microsoft.com/office/drawing/2014/main" id="{6F5F0F6D-540C-49D5-9C86-544B4DE7B58D}"/>
               </a:ext>
             </a:extLst>
           </p:cNvPr>
@@ -23411,7 +23411,7 @@
           <p:cNvPr id="5" name="Text 3">
             <a:extLst xmlns:a="http://schemas.openxmlformats.org/drawingml/2006/main">
               <a:ext uri="{FF2B5EF4-FFF2-40B4-BE49-F238E27FC236}">
-                <a16:creationId xmlns:a16="http://schemas.microsoft.com/office/drawing/2014/main" id="{A16478AB-2F7A-4FFA-A2AA-65757FCA83D5}"/>
+                <a16:creationId xmlns:a16="http://schemas.microsoft.com/office/drawing/2014/main" id="{8ACAAA2F-F9BC-4755-8E31-DB1AC26DA67B}"/>
               </a:ext>
             </a:extLst>
           </p:cNvPr>
@@ -23456,7 +23456,7 @@
           <p:cNvPr id="6" name="Text 4">
             <a:extLst xmlns:a="http://schemas.openxmlformats.org/drawingml/2006/main">
               <a:ext uri="{FF2B5EF4-FFF2-40B4-BE49-F238E27FC236}">
-                <a16:creationId xmlns:a16="http://schemas.microsoft.com/office/drawing/2014/main" id="{EEDE2664-E862-4C1B-A62B-7E8BC05F616C}"/>
+                <a16:creationId xmlns:a16="http://schemas.microsoft.com/office/drawing/2014/main" id="{FE91E8E5-824F-4F77-8C94-89A2FF92F8B5}"/>
               </a:ext>
             </a:extLst>
           </p:cNvPr>
@@ -23551,7 +23551,7 @@
           <p:cNvPr id="7" name="Shape 5">
             <a:extLst xmlns:a="http://schemas.openxmlformats.org/drawingml/2006/main">
               <a:ext uri="{FF2B5EF4-FFF2-40B4-BE49-F238E27FC236}">
-                <a16:creationId xmlns:a16="http://schemas.microsoft.com/office/drawing/2014/main" id="{93B41482-413E-4AC2-9B55-EF87892A1A38}"/>
+                <a16:creationId xmlns:a16="http://schemas.microsoft.com/office/drawing/2014/main" id="{EDD97C67-8AFC-48F3-BC60-D5DE68FEEC6C}"/>
               </a:ext>
             </a:extLst>
           </p:cNvPr>
@@ -23598,7 +23598,7 @@
           <p:cNvPr id="8" name="Text 6">
             <a:extLst xmlns:a="http://schemas.openxmlformats.org/drawingml/2006/main">
               <a:ext uri="{FF2B5EF4-FFF2-40B4-BE49-F238E27FC236}">
-                <a16:creationId xmlns:a16="http://schemas.microsoft.com/office/drawing/2014/main" id="{152DE20E-E7E6-43A6-A033-5C204674CCB4}"/>
+                <a16:creationId xmlns:a16="http://schemas.microsoft.com/office/drawing/2014/main" id="{C5891F38-51D8-4285-818B-C479841F9F01}"/>
               </a:ext>
             </a:extLst>
           </p:cNvPr>
@@ -23643,7 +23643,7 @@
           <p:cNvPr id="9" name="Shape 7">
             <a:extLst xmlns:a="http://schemas.openxmlformats.org/drawingml/2006/main">
               <a:ext uri="{FF2B5EF4-FFF2-40B4-BE49-F238E27FC236}">
-                <a16:creationId xmlns:a16="http://schemas.microsoft.com/office/drawing/2014/main" id="{43E9C31C-3E9B-4B3C-915B-12BBE2536BF3}"/>
+                <a16:creationId xmlns:a16="http://schemas.microsoft.com/office/drawing/2014/main" id="{AAEC4346-0DFF-4825-8217-E8156BECF11E}"/>
               </a:ext>
             </a:extLst>
           </p:cNvPr>
@@ -23690,7 +23690,7 @@
           <p:cNvPr id="10" name="Text 8">
             <a:extLst xmlns:a="http://schemas.openxmlformats.org/drawingml/2006/main">
               <a:ext uri="{FF2B5EF4-FFF2-40B4-BE49-F238E27FC236}">
-                <a16:creationId xmlns:a16="http://schemas.microsoft.com/office/drawing/2014/main" id="{9BD10761-F69A-484D-81B3-D1F02E8F7636}"/>
+                <a16:creationId xmlns:a16="http://schemas.microsoft.com/office/drawing/2014/main" id="{89BAB768-96C4-4A4C-B8DD-884573F8B8E1}"/>
               </a:ext>
             </a:extLst>
           </p:cNvPr>
@@ -23735,7 +23735,7 @@
           <p:cNvPr id="11" name="Shape 9">
             <a:extLst xmlns:a="http://schemas.openxmlformats.org/drawingml/2006/main">
               <a:ext uri="{FF2B5EF4-FFF2-40B4-BE49-F238E27FC236}">
-                <a16:creationId xmlns:a16="http://schemas.microsoft.com/office/drawing/2014/main" id="{A3F7C4DD-C1F6-45F4-9CDC-8C973208BF92}"/>
+                <a16:creationId xmlns:a16="http://schemas.microsoft.com/office/drawing/2014/main" id="{523F3F36-B064-43D2-9E1C-F4ABCB583E8F}"/>
               </a:ext>
             </a:extLst>
           </p:cNvPr>
@@ -23773,7 +23773,7 @@
           <p:cNvPr id="12" name="Text 10">
             <a:extLst xmlns:a="http://schemas.openxmlformats.org/drawingml/2006/main">
               <a:ext uri="{FF2B5EF4-FFF2-40B4-BE49-F238E27FC236}">
-                <a16:creationId xmlns:a16="http://schemas.microsoft.com/office/drawing/2014/main" id="{EF3A89DF-719D-4CB2-9099-44A8FABA531F}"/>
+                <a16:creationId xmlns:a16="http://schemas.microsoft.com/office/drawing/2014/main" id="{9A09B869-5ABF-430C-A659-7401E9928524}"/>
               </a:ext>
             </a:extLst>
           </p:cNvPr>
@@ -23818,7 +23818,7 @@
           <p:cNvPr id="13" name="Text 11">
             <a:extLst xmlns:a="http://schemas.openxmlformats.org/drawingml/2006/main">
               <a:ext uri="{FF2B5EF4-FFF2-40B4-BE49-F238E27FC236}">
-                <a16:creationId xmlns:a16="http://schemas.microsoft.com/office/drawing/2014/main" id="{2EB5CBC6-A47A-49DA-8835-462D0DC16675}"/>
+                <a16:creationId xmlns:a16="http://schemas.microsoft.com/office/drawing/2014/main" id="{AD0C0E6F-659F-4A6D-940C-E1606C12EBD0}"/>
               </a:ext>
             </a:extLst>
           </p:cNvPr>
@@ -23863,7 +23863,7 @@
           <p:cNvPr id="14" name="Text 12">
             <a:extLst xmlns:a="http://schemas.openxmlformats.org/drawingml/2006/main">
               <a:ext uri="{FF2B5EF4-FFF2-40B4-BE49-F238E27FC236}">
-                <a16:creationId xmlns:a16="http://schemas.microsoft.com/office/drawing/2014/main" id="{AE009AE8-6A71-4E6D-8058-9989009BF583}"/>
+                <a16:creationId xmlns:a16="http://schemas.microsoft.com/office/drawing/2014/main" id="{7CC575AE-C7F1-4A2A-A201-AE213CB9E84D}"/>
               </a:ext>
             </a:extLst>
           </p:cNvPr>
@@ -23908,7 +23908,7 @@
           <p:cNvPr id="15" name="Shape 13">
             <a:extLst xmlns:a="http://schemas.openxmlformats.org/drawingml/2006/main">
               <a:ext uri="{FF2B5EF4-FFF2-40B4-BE49-F238E27FC236}">
-                <a16:creationId xmlns:a16="http://schemas.microsoft.com/office/drawing/2014/main" id="{F7614E32-9702-457E-81FA-4A2C627B23C5}"/>
+                <a16:creationId xmlns:a16="http://schemas.microsoft.com/office/drawing/2014/main" id="{A11533A5-EBBD-4D86-96CD-792673E27AC4}"/>
               </a:ext>
             </a:extLst>
           </p:cNvPr>
@@ -23946,7 +23946,7 @@
           <p:cNvPr id="16" name="Text 14">
             <a:extLst xmlns:a="http://schemas.openxmlformats.org/drawingml/2006/main">
               <a:ext uri="{FF2B5EF4-FFF2-40B4-BE49-F238E27FC236}">
-                <a16:creationId xmlns:a16="http://schemas.microsoft.com/office/drawing/2014/main" id="{A63BF632-770F-42D3-BC50-F72072E9B812}"/>
+                <a16:creationId xmlns:a16="http://schemas.microsoft.com/office/drawing/2014/main" id="{1DFE4A59-4030-4351-B976-07F8D930E71C}"/>
               </a:ext>
             </a:extLst>
           </p:cNvPr>
@@ -23991,7 +23991,7 @@
           <p:cNvPr id="17" name="Text 15">
             <a:extLst xmlns:a="http://schemas.openxmlformats.org/drawingml/2006/main">
               <a:ext uri="{FF2B5EF4-FFF2-40B4-BE49-F238E27FC236}">
-                <a16:creationId xmlns:a16="http://schemas.microsoft.com/office/drawing/2014/main" id="{0C45B305-B337-4C08-BFD7-667318E3137B}"/>
+                <a16:creationId xmlns:a16="http://schemas.microsoft.com/office/drawing/2014/main" id="{C669A8B7-6F3F-4D62-9680-BC3F035DF63C}"/>
               </a:ext>
             </a:extLst>
           </p:cNvPr>
@@ -24036,7 +24036,7 @@
           <p:cNvPr id="18" name="Text 16">
             <a:extLst xmlns:a="http://schemas.openxmlformats.org/drawingml/2006/main">
               <a:ext uri="{FF2B5EF4-FFF2-40B4-BE49-F238E27FC236}">
-                <a16:creationId xmlns:a16="http://schemas.microsoft.com/office/drawing/2014/main" id="{1F25B78F-88A0-43DE-A7AE-DFAC128989AA}"/>
+                <a16:creationId xmlns:a16="http://schemas.microsoft.com/office/drawing/2014/main" id="{E079276A-8476-4CB9-9537-CF35337369CC}"/>
               </a:ext>
             </a:extLst>
           </p:cNvPr>
@@ -24081,7 +24081,7 @@
           <p:cNvPr id="19" name="Shape 17">
             <a:extLst xmlns:a="http://schemas.openxmlformats.org/drawingml/2006/main">
               <a:ext uri="{FF2B5EF4-FFF2-40B4-BE49-F238E27FC236}">
-                <a16:creationId xmlns:a16="http://schemas.microsoft.com/office/drawing/2014/main" id="{CDBCA5DA-5BBD-4DBC-A7C3-F648103A6BE2}"/>
+                <a16:creationId xmlns:a16="http://schemas.microsoft.com/office/drawing/2014/main" id="{B816ECE4-9702-4814-B67F-5780193BE864}"/>
               </a:ext>
             </a:extLst>
           </p:cNvPr>
@@ -24119,7 +24119,7 @@
           <p:cNvPr id="20" name="Text 18">
             <a:extLst xmlns:a="http://schemas.openxmlformats.org/drawingml/2006/main">
               <a:ext uri="{FF2B5EF4-FFF2-40B4-BE49-F238E27FC236}">
-                <a16:creationId xmlns:a16="http://schemas.microsoft.com/office/drawing/2014/main" id="{C4B7A24B-23D9-4902-8811-D1BCFFB08AAD}"/>
+                <a16:creationId xmlns:a16="http://schemas.microsoft.com/office/drawing/2014/main" id="{6AF5B768-D019-436A-BF21-0843370384ED}"/>
               </a:ext>
             </a:extLst>
           </p:cNvPr>
@@ -24164,7 +24164,7 @@
           <p:cNvPr id="21" name="Text 19">
             <a:extLst xmlns:a="http://schemas.openxmlformats.org/drawingml/2006/main">
               <a:ext uri="{FF2B5EF4-FFF2-40B4-BE49-F238E27FC236}">
-                <a16:creationId xmlns:a16="http://schemas.microsoft.com/office/drawing/2014/main" id="{AC662C5C-1519-417C-93FE-0B3C7324D619}"/>
+                <a16:creationId xmlns:a16="http://schemas.microsoft.com/office/drawing/2014/main" id="{CBC741EB-6D5D-42C2-A5C6-0CCCB43A33D1}"/>
               </a:ext>
             </a:extLst>
           </p:cNvPr>
@@ -24209,7 +24209,7 @@
           <p:cNvPr id="22" name="Text 20">
             <a:extLst xmlns:a="http://schemas.openxmlformats.org/drawingml/2006/main">
               <a:ext uri="{FF2B5EF4-FFF2-40B4-BE49-F238E27FC236}">
-                <a16:creationId xmlns:a16="http://schemas.microsoft.com/office/drawing/2014/main" id="{8C3522BF-6CFD-4334-BDBC-B36BEF904794}"/>
+                <a16:creationId xmlns:a16="http://schemas.microsoft.com/office/drawing/2014/main" id="{79051278-C7E7-48D0-8A3F-CBF23B9A714B}"/>
               </a:ext>
             </a:extLst>
           </p:cNvPr>
@@ -24254,7 +24254,7 @@
           <p:cNvPr id="23" name="Shape 21">
             <a:extLst xmlns:a="http://schemas.openxmlformats.org/drawingml/2006/main">
               <a:ext uri="{FF2B5EF4-FFF2-40B4-BE49-F238E27FC236}">
-                <a16:creationId xmlns:a16="http://schemas.microsoft.com/office/drawing/2014/main" id="{B7368845-B573-4304-8416-72E4AA4446CC}"/>
+                <a16:creationId xmlns:a16="http://schemas.microsoft.com/office/drawing/2014/main" id="{DF4E6856-2EBF-4B07-B759-D4B6119DB947}"/>
               </a:ext>
             </a:extLst>
           </p:cNvPr>
@@ -24292,7 +24292,7 @@
           <p:cNvPr id="24" name="Text 22">
             <a:extLst xmlns:a="http://schemas.openxmlformats.org/drawingml/2006/main">
               <a:ext uri="{FF2B5EF4-FFF2-40B4-BE49-F238E27FC236}">
-                <a16:creationId xmlns:a16="http://schemas.microsoft.com/office/drawing/2014/main" id="{357DCD30-08C2-412E-AAA2-4E03A59D86D8}"/>
+                <a16:creationId xmlns:a16="http://schemas.microsoft.com/office/drawing/2014/main" id="{86AB149C-CEA0-46E6-8C5C-6DE08CA41665}"/>
               </a:ext>
             </a:extLst>
           </p:cNvPr>
@@ -24337,7 +24337,7 @@
           <p:cNvPr id="25" name="Text 23">
             <a:extLst xmlns:a="http://schemas.openxmlformats.org/drawingml/2006/main">
               <a:ext uri="{FF2B5EF4-FFF2-40B4-BE49-F238E27FC236}">
-                <a16:creationId xmlns:a16="http://schemas.microsoft.com/office/drawing/2014/main" id="{2633ADF5-376A-48D0-9CA5-D3284EA4FD31}"/>
+                <a16:creationId xmlns:a16="http://schemas.microsoft.com/office/drawing/2014/main" id="{0F3CBD22-A8E9-44DD-B24C-BB8367B3DA53}"/>
               </a:ext>
             </a:extLst>
           </p:cNvPr>
@@ -24382,7 +24382,7 @@
           <p:cNvPr id="26" name="Text 24">
             <a:extLst xmlns:a="http://schemas.openxmlformats.org/drawingml/2006/main">
               <a:ext uri="{FF2B5EF4-FFF2-40B4-BE49-F238E27FC236}">
-                <a16:creationId xmlns:a16="http://schemas.microsoft.com/office/drawing/2014/main" id="{E9529929-7CB4-4827-8C3E-A2300BEC87B4}"/>
+                <a16:creationId xmlns:a16="http://schemas.microsoft.com/office/drawing/2014/main" id="{1BA1F86B-D5A8-4984-9CEF-EDAB227FD0EB}"/>
               </a:ext>
             </a:extLst>
           </p:cNvPr>
@@ -24427,7 +24427,7 @@
           <p:cNvPr id="27" name="Shape 25">
             <a:extLst xmlns:a="http://schemas.openxmlformats.org/drawingml/2006/main">
               <a:ext uri="{FF2B5EF4-FFF2-40B4-BE49-F238E27FC236}">
-                <a16:creationId xmlns:a16="http://schemas.microsoft.com/office/drawing/2014/main" id="{F9E2ACEB-DDC1-4BB0-84F6-EE9DF5E2E7F0}"/>
+                <a16:creationId xmlns:a16="http://schemas.microsoft.com/office/drawing/2014/main" id="{37A6BB2E-63E6-40AF-947F-1D51F7172566}"/>
               </a:ext>
             </a:extLst>
           </p:cNvPr>
@@ -24465,7 +24465,7 @@
           <p:cNvPr id="28" name="Text 26">
             <a:extLst xmlns:a="http://schemas.openxmlformats.org/drawingml/2006/main">
               <a:ext uri="{FF2B5EF4-FFF2-40B4-BE49-F238E27FC236}">
-                <a16:creationId xmlns:a16="http://schemas.microsoft.com/office/drawing/2014/main" id="{EA566150-6D2D-4AEC-A0AF-6EE245F91CF9}"/>
+                <a16:creationId xmlns:a16="http://schemas.microsoft.com/office/drawing/2014/main" id="{25A10C41-EC6C-4AFC-9996-E49B169B6E6D}"/>
               </a:ext>
             </a:extLst>
           </p:cNvPr>
@@ -24510,7 +24510,7 @@
           <p:cNvPr id="29" name="Text 27">
             <a:extLst xmlns:a="http://schemas.openxmlformats.org/drawingml/2006/main">
               <a:ext uri="{FF2B5EF4-FFF2-40B4-BE49-F238E27FC236}">
-                <a16:creationId xmlns:a16="http://schemas.microsoft.com/office/drawing/2014/main" id="{A8A59620-3C7C-4F00-9C12-942828702CE2}"/>
+                <a16:creationId xmlns:a16="http://schemas.microsoft.com/office/drawing/2014/main" id="{7D544BD6-F5A3-40CC-A2E8-5BA773C1512F}"/>
               </a:ext>
             </a:extLst>
           </p:cNvPr>
@@ -24555,7 +24555,7 @@
           <p:cNvPr id="30" name="Text 28">
             <a:extLst xmlns:a="http://schemas.openxmlformats.org/drawingml/2006/main">
               <a:ext uri="{FF2B5EF4-FFF2-40B4-BE49-F238E27FC236}">
-                <a16:creationId xmlns:a16="http://schemas.microsoft.com/office/drawing/2014/main" id="{50119F68-A745-4FAD-B41B-73AC9FDED90C}"/>
+                <a16:creationId xmlns:a16="http://schemas.microsoft.com/office/drawing/2014/main" id="{EE57DAC0-9116-4106-BE0C-3690521CC9C3}"/>
               </a:ext>
             </a:extLst>
           </p:cNvPr>
@@ -24600,7 +24600,7 @@
           <p:cNvPr id="31" name="Shape 29">
             <a:extLst xmlns:a="http://schemas.openxmlformats.org/drawingml/2006/main">
               <a:ext uri="{FF2B5EF4-FFF2-40B4-BE49-F238E27FC236}">
-                <a16:creationId xmlns:a16="http://schemas.microsoft.com/office/drawing/2014/main" id="{27F3CF90-2EC5-4CFA-BBDE-8477020AE306}"/>
+                <a16:creationId xmlns:a16="http://schemas.microsoft.com/office/drawing/2014/main" id="{D6D3A884-6204-42FF-9B21-3F0E9C769BB3}"/>
               </a:ext>
             </a:extLst>
           </p:cNvPr>
@@ -24638,7 +24638,7 @@
           <p:cNvPr id="32" name="Text 30">
             <a:extLst xmlns:a="http://schemas.openxmlformats.org/drawingml/2006/main">
               <a:ext uri="{FF2B5EF4-FFF2-40B4-BE49-F238E27FC236}">
-                <a16:creationId xmlns:a16="http://schemas.microsoft.com/office/drawing/2014/main" id="{B0979228-BCD3-4944-A7FA-303E1596B24A}"/>
+                <a16:creationId xmlns:a16="http://schemas.microsoft.com/office/drawing/2014/main" id="{AF91DE46-7797-4CFE-993B-E157A1DBF5CF}"/>
               </a:ext>
             </a:extLst>
           </p:cNvPr>
@@ -24683,7 +24683,7 @@
           <p:cNvPr id="33" name="Text 31">
             <a:extLst xmlns:a="http://schemas.openxmlformats.org/drawingml/2006/main">
               <a:ext uri="{FF2B5EF4-FFF2-40B4-BE49-F238E27FC236}">
-                <a16:creationId xmlns:a16="http://schemas.microsoft.com/office/drawing/2014/main" id="{0D058477-9BEF-494C-BB9B-2E68984499D1}"/>
+                <a16:creationId xmlns:a16="http://schemas.microsoft.com/office/drawing/2014/main" id="{E7D70CA8-DF86-4860-9B3E-5017F5DEB276}"/>
               </a:ext>
             </a:extLst>
           </p:cNvPr>
@@ -24728,7 +24728,7 @@
           <p:cNvPr id="34" name="Text 32">
             <a:extLst xmlns:a="http://schemas.openxmlformats.org/drawingml/2006/main">
               <a:ext uri="{FF2B5EF4-FFF2-40B4-BE49-F238E27FC236}">
-                <a16:creationId xmlns:a16="http://schemas.microsoft.com/office/drawing/2014/main" id="{89B0099D-98AE-4B33-B5B8-2C4BE7C0C00E}"/>
+                <a16:creationId xmlns:a16="http://schemas.microsoft.com/office/drawing/2014/main" id="{93005994-7358-4492-9872-E8123D00383D}"/>
               </a:ext>
             </a:extLst>
           </p:cNvPr>
@@ -24773,7 +24773,7 @@
           <p:cNvPr id="35" name="Shape 33">
             <a:extLst xmlns:a="http://schemas.openxmlformats.org/drawingml/2006/main">
               <a:ext uri="{FF2B5EF4-FFF2-40B4-BE49-F238E27FC236}">
-                <a16:creationId xmlns:a16="http://schemas.microsoft.com/office/drawing/2014/main" id="{6EA54B28-AC15-42A9-9C7E-645DB20738C9}"/>
+                <a16:creationId xmlns:a16="http://schemas.microsoft.com/office/drawing/2014/main" id="{0812427C-BE8C-43D1-AC20-426A44F4E7EE}"/>
               </a:ext>
             </a:extLst>
           </p:cNvPr>
@@ -24811,7 +24811,7 @@
           <p:cNvPr id="36" name="Text 34">
             <a:extLst xmlns:a="http://schemas.openxmlformats.org/drawingml/2006/main">
               <a:ext uri="{FF2B5EF4-FFF2-40B4-BE49-F238E27FC236}">
-                <a16:creationId xmlns:a16="http://schemas.microsoft.com/office/drawing/2014/main" id="{E69D8D6E-8ACD-49F2-98EA-B323800DBFB2}"/>
+                <a16:creationId xmlns:a16="http://schemas.microsoft.com/office/drawing/2014/main" id="{20CFC0BB-A8E2-4976-A0EB-37597F342503}"/>
               </a:ext>
             </a:extLst>
           </p:cNvPr>
@@ -24856,7 +24856,7 @@
           <p:cNvPr id="37" name="Text 35">
             <a:extLst xmlns:a="http://schemas.openxmlformats.org/drawingml/2006/main">
               <a:ext uri="{FF2B5EF4-FFF2-40B4-BE49-F238E27FC236}">
-                <a16:creationId xmlns:a16="http://schemas.microsoft.com/office/drawing/2014/main" id="{6B6F7FD4-6D51-410D-9973-4ED9D6E832DF}"/>
+                <a16:creationId xmlns:a16="http://schemas.microsoft.com/office/drawing/2014/main" id="{70064253-050B-4B3E-9ADE-6D3FAE173A9E}"/>
               </a:ext>
             </a:extLst>
           </p:cNvPr>
@@ -24901,7 +24901,7 @@
           <p:cNvPr id="38" name="Text 36">
             <a:extLst xmlns:a="http://schemas.openxmlformats.org/drawingml/2006/main">
               <a:ext uri="{FF2B5EF4-FFF2-40B4-BE49-F238E27FC236}">
-                <a16:creationId xmlns:a16="http://schemas.microsoft.com/office/drawing/2014/main" id="{1DE343D1-B13B-4268-A4E6-7601A36E7717}"/>
+                <a16:creationId xmlns:a16="http://schemas.microsoft.com/office/drawing/2014/main" id="{5B6BD76A-22BE-4506-90EB-3E8F04F828CA}"/>
               </a:ext>
             </a:extLst>
           </p:cNvPr>
@@ -24946,7 +24946,7 @@
           <p:cNvPr id="39" name="Shape 37">
             <a:extLst xmlns:a="http://schemas.openxmlformats.org/drawingml/2006/main">
               <a:ext uri="{FF2B5EF4-FFF2-40B4-BE49-F238E27FC236}">
-                <a16:creationId xmlns:a16="http://schemas.microsoft.com/office/drawing/2014/main" id="{3E0CDB52-937B-4EB3-8B2C-D04484BE3B31}"/>
+                <a16:creationId xmlns:a16="http://schemas.microsoft.com/office/drawing/2014/main" id="{0AAF1896-075C-45E1-A626-BD44412CC51B}"/>
               </a:ext>
             </a:extLst>
           </p:cNvPr>
@@ -24982,7 +24982,7 @@
           <p:cNvPr id="40" name="Text 38">
             <a:extLst xmlns:a="http://schemas.openxmlformats.org/drawingml/2006/main">
               <a:ext uri="{FF2B5EF4-FFF2-40B4-BE49-F238E27FC236}">
-                <a16:creationId xmlns:a16="http://schemas.microsoft.com/office/drawing/2014/main" id="{48ED31E9-D47A-4B0E-A9B5-3F02B44CBEC5}"/>
+                <a16:creationId xmlns:a16="http://schemas.microsoft.com/office/drawing/2014/main" id="{A9B34EEC-EE8D-4CE8-999D-DAC9F47EA224}"/>
               </a:ext>
             </a:extLst>
           </p:cNvPr>
@@ -25027,7 +25027,7 @@
           <p:cNvPr id="41" name="Text 39">
             <a:extLst xmlns:a="http://schemas.openxmlformats.org/drawingml/2006/main">
               <a:ext uri="{FF2B5EF4-FFF2-40B4-BE49-F238E27FC236}">
-                <a16:creationId xmlns:a16="http://schemas.microsoft.com/office/drawing/2014/main" id="{0F346172-D4ED-4F5D-9D0C-C3C98DA36D28}"/>
+                <a16:creationId xmlns:a16="http://schemas.microsoft.com/office/drawing/2014/main" id="{1E01FA21-6098-4006-A6BE-7576915A2EA3}"/>
               </a:ext>
             </a:extLst>
           </p:cNvPr>
@@ -25072,7 +25072,7 @@
           <p:cNvPr id="42" name="Text 40">
             <a:extLst xmlns:a="http://schemas.openxmlformats.org/drawingml/2006/main">
               <a:ext uri="{FF2B5EF4-FFF2-40B4-BE49-F238E27FC236}">
-                <a16:creationId xmlns:a16="http://schemas.microsoft.com/office/drawing/2014/main" id="{FABC9EC0-2E7A-409E-803D-6A0AF5BEDA96}"/>
+                <a16:creationId xmlns:a16="http://schemas.microsoft.com/office/drawing/2014/main" id="{E61951BD-1D9B-4110-87ED-C3DE387FDF47}"/>
               </a:ext>
             </a:extLst>
           </p:cNvPr>
@@ -25117,7 +25117,7 @@
           <p:cNvPr id="43" name="Text 41">
             <a:extLst xmlns:a="http://schemas.openxmlformats.org/drawingml/2006/main">
               <a:ext uri="{FF2B5EF4-FFF2-40B4-BE49-F238E27FC236}">
-                <a16:creationId xmlns:a16="http://schemas.microsoft.com/office/drawing/2014/main" id="{379CEFAE-D684-4868-90BD-364FC73A9961}"/>
+                <a16:creationId xmlns:a16="http://schemas.microsoft.com/office/drawing/2014/main" id="{9002B2EF-F47B-41A4-9D7D-D5B8678A9551}"/>
               </a:ext>
             </a:extLst>
           </p:cNvPr>
@@ -25162,7 +25162,7 @@
           <p:cNvPr id="44" name="Text 42">
             <a:extLst xmlns:a="http://schemas.openxmlformats.org/drawingml/2006/main">
               <a:ext uri="{FF2B5EF4-FFF2-40B4-BE49-F238E27FC236}">
-                <a16:creationId xmlns:a16="http://schemas.microsoft.com/office/drawing/2014/main" id="{48DE4C6D-5F93-4FB8-BDE3-5793A317F8E0}"/>
+                <a16:creationId xmlns:a16="http://schemas.microsoft.com/office/drawing/2014/main" id="{CC868B6F-F679-4189-9A95-F4A38A889C88}"/>
               </a:ext>
             </a:extLst>
           </p:cNvPr>
@@ -25207,7 +25207,7 @@
           <p:cNvPr id="45" name="Text 43">
             <a:extLst xmlns:a="http://schemas.openxmlformats.org/drawingml/2006/main">
               <a:ext uri="{FF2B5EF4-FFF2-40B4-BE49-F238E27FC236}">
-                <a16:creationId xmlns:a16="http://schemas.microsoft.com/office/drawing/2014/main" id="{2E447A3C-088D-4711-B388-C41FF087854A}"/>
+                <a16:creationId xmlns:a16="http://schemas.microsoft.com/office/drawing/2014/main" id="{E3B0B133-E11B-4F04-807B-B8D24E47359F}"/>
               </a:ext>
             </a:extLst>
           </p:cNvPr>
@@ -25252,7 +25252,7 @@
           <p:cNvPr id="46" name="Text 44">
             <a:extLst xmlns:a="http://schemas.openxmlformats.org/drawingml/2006/main">
               <a:ext uri="{FF2B5EF4-FFF2-40B4-BE49-F238E27FC236}">
-                <a16:creationId xmlns:a16="http://schemas.microsoft.com/office/drawing/2014/main" id="{219447C6-A35F-441E-82DC-2BB4D3A679FA}"/>
+                <a16:creationId xmlns:a16="http://schemas.microsoft.com/office/drawing/2014/main" id="{E8ED964B-A22A-449C-A032-82700115EC4D}"/>
               </a:ext>
             </a:extLst>
           </p:cNvPr>
@@ -25297,7 +25297,7 @@
           <p:cNvPr id="47" name="Text 45">
             <a:extLst xmlns:a="http://schemas.openxmlformats.org/drawingml/2006/main">
               <a:ext uri="{FF2B5EF4-FFF2-40B4-BE49-F238E27FC236}">
-                <a16:creationId xmlns:a16="http://schemas.microsoft.com/office/drawing/2014/main" id="{83575E35-5B89-482D-A926-8A8FAF8B436F}"/>
+                <a16:creationId xmlns:a16="http://schemas.microsoft.com/office/drawing/2014/main" id="{5D4494E3-DD38-4F86-855F-189E5CE7ACFA}"/>
               </a:ext>
             </a:extLst>
           </p:cNvPr>
@@ -25342,7 +25342,7 @@
           <p:cNvPr id="48" name="Text 46">
             <a:extLst xmlns:a="http://schemas.openxmlformats.org/drawingml/2006/main">
               <a:ext uri="{FF2B5EF4-FFF2-40B4-BE49-F238E27FC236}">
-                <a16:creationId xmlns:a16="http://schemas.microsoft.com/office/drawing/2014/main" id="{FE969CE5-37F6-4A43-9D65-4719DE2C7788}"/>
+                <a16:creationId xmlns:a16="http://schemas.microsoft.com/office/drawing/2014/main" id="{717A800C-961F-4ADA-8D72-4714D3F473DF}"/>
               </a:ext>
             </a:extLst>
           </p:cNvPr>
@@ -25385,7 +25385,7 @@
     </p:spTree>
     <p:extLst>
       <p:ext uri="{BB962C8B-B14F-4D97-AF65-F5344CB8AC3E}">
-        <p14:creationId xmlns:p14="http://schemas.microsoft.com/office/powerpoint/2010/main" val="84282963"/>
+        <p14:creationId xmlns:p14="http://schemas.microsoft.com/office/powerpoint/2010/main" val="38298428"/>
       </p:ext>
     </p:extLst>
   </p:cSld>
@@ -25416,7 +25416,7 @@
           <p:cNvPr id="2" name="Text 0">
             <a:extLst xmlns:a="http://schemas.openxmlformats.org/drawingml/2006/main">
               <a:ext uri="{FF2B5EF4-FFF2-40B4-BE49-F238E27FC236}">
-                <a16:creationId xmlns:a16="http://schemas.microsoft.com/office/drawing/2014/main" id="{FBC6645B-6E6F-4BD9-AB16-07DD30E29337}"/>
+                <a16:creationId xmlns:a16="http://schemas.microsoft.com/office/drawing/2014/main" id="{FA563E90-8A0E-4CC5-93AC-2B7BE4EC9D20}"/>
               </a:ext>
             </a:extLst>
           </p:cNvPr>
@@ -25461,7 +25461,7 @@
           <p:cNvPr id="3" name="Text 1">
             <a:extLst xmlns:a="http://schemas.openxmlformats.org/drawingml/2006/main">
               <a:ext uri="{FF2B5EF4-FFF2-40B4-BE49-F238E27FC236}">
-                <a16:creationId xmlns:a16="http://schemas.microsoft.com/office/drawing/2014/main" id="{0DA78FA1-F78B-4F01-BAD6-3367F1DE6E3E}"/>
+                <a16:creationId xmlns:a16="http://schemas.microsoft.com/office/drawing/2014/main" id="{CED9B957-5BC1-404D-B726-549718745472}"/>
               </a:ext>
             </a:extLst>
           </p:cNvPr>
@@ -25506,7 +25506,7 @@
           <p:cNvPr id="4" name="Text 2">
             <a:extLst xmlns:a="http://schemas.openxmlformats.org/drawingml/2006/main">
               <a:ext uri="{FF2B5EF4-FFF2-40B4-BE49-F238E27FC236}">
-                <a16:creationId xmlns:a16="http://schemas.microsoft.com/office/drawing/2014/main" id="{18F8B7C3-53CA-4020-A13E-FFF557A0D137}"/>
+                <a16:creationId xmlns:a16="http://schemas.microsoft.com/office/drawing/2014/main" id="{F2025F46-977E-4F3E-8366-0157F277E664}"/>
               </a:ext>
             </a:extLst>
           </p:cNvPr>
@@ -25551,7 +25551,7 @@
           <p:cNvPr id="5" name="Text 3">
             <a:extLst xmlns:a="http://schemas.openxmlformats.org/drawingml/2006/main">
               <a:ext uri="{FF2B5EF4-FFF2-40B4-BE49-F238E27FC236}">
-                <a16:creationId xmlns:a16="http://schemas.microsoft.com/office/drawing/2014/main" id="{62A84075-CA64-453B-8B06-EBD872E183B0}"/>
+                <a16:creationId xmlns:a16="http://schemas.microsoft.com/office/drawing/2014/main" id="{FBA71158-7751-4DBC-B04E-B9DAAD6C729F}"/>
               </a:ext>
             </a:extLst>
           </p:cNvPr>
@@ -25596,7 +25596,7 @@
           <p:cNvPr id="6" name="Shape 4">
             <a:extLst xmlns:a="http://schemas.openxmlformats.org/drawingml/2006/main">
               <a:ext uri="{FF2B5EF4-FFF2-40B4-BE49-F238E27FC236}">
-                <a16:creationId xmlns:a16="http://schemas.microsoft.com/office/drawing/2014/main" id="{12CA80D1-A563-4B47-9268-B79DE99D887D}"/>
+                <a16:creationId xmlns:a16="http://schemas.microsoft.com/office/drawing/2014/main" id="{A664F74F-AC8A-4E62-8DEB-397FF9A1D4A8}"/>
               </a:ext>
             </a:extLst>
           </p:cNvPr>
@@ -25643,7 +25643,7 @@
           <p:cNvPr id="7" name="Shape 5">
             <a:extLst xmlns:a="http://schemas.openxmlformats.org/drawingml/2006/main">
               <a:ext uri="{FF2B5EF4-FFF2-40B4-BE49-F238E27FC236}">
-                <a16:creationId xmlns:a16="http://schemas.microsoft.com/office/drawing/2014/main" id="{5E9634E4-B315-44BE-A1C2-8E9EAE8A579C}"/>
+                <a16:creationId xmlns:a16="http://schemas.microsoft.com/office/drawing/2014/main" id="{B7A86646-3928-4F5C-89DF-70FD8C32175D}"/>
               </a:ext>
             </a:extLst>
           </p:cNvPr>
@@ -25681,7 +25681,7 @@
           <p:cNvPr id="8" name="Text 6">
             <a:extLst xmlns:a="http://schemas.openxmlformats.org/drawingml/2006/main">
               <a:ext uri="{FF2B5EF4-FFF2-40B4-BE49-F238E27FC236}">
-                <a16:creationId xmlns:a16="http://schemas.microsoft.com/office/drawing/2014/main" id="{36FBBBE7-69F7-4C91-ADE1-C5F4774F0AEF}"/>
+                <a16:creationId xmlns:a16="http://schemas.microsoft.com/office/drawing/2014/main" id="{CCF3867B-E8B1-4578-949D-4E01143D0D1E}"/>
               </a:ext>
             </a:extLst>
           </p:cNvPr>
@@ -25726,7 +25726,7 @@
           <p:cNvPr id="9" name="Text 7">
             <a:extLst xmlns:a="http://schemas.openxmlformats.org/drawingml/2006/main">
               <a:ext uri="{FF2B5EF4-FFF2-40B4-BE49-F238E27FC236}">
-                <a16:creationId xmlns:a16="http://schemas.microsoft.com/office/drawing/2014/main" id="{537554E5-8D4F-4415-958A-3F07904B6D35}"/>
+                <a16:creationId xmlns:a16="http://schemas.microsoft.com/office/drawing/2014/main" id="{AAB24A4F-43F8-4BCA-8EDC-DCD58DBFDE00}"/>
               </a:ext>
             </a:extLst>
           </p:cNvPr>
@@ -25771,7 +25771,7 @@
           <p:cNvPr id="10" name="Text 8">
             <a:extLst xmlns:a="http://schemas.openxmlformats.org/drawingml/2006/main">
               <a:ext uri="{FF2B5EF4-FFF2-40B4-BE49-F238E27FC236}">
-                <a16:creationId xmlns:a16="http://schemas.microsoft.com/office/drawing/2014/main" id="{A2DCA175-1F3F-4B9F-82AB-1806616C927A}"/>
+                <a16:creationId xmlns:a16="http://schemas.microsoft.com/office/drawing/2014/main" id="{DE5582D4-D0A5-4EFF-BDF0-918A1B19CCCB}"/>
               </a:ext>
             </a:extLst>
           </p:cNvPr>
@@ -25819,7 +25819,7 @@
           <p:cNvPr id="11" name="Shape 9">
             <a:extLst xmlns:a="http://schemas.openxmlformats.org/drawingml/2006/main">
               <a:ext uri="{FF2B5EF4-FFF2-40B4-BE49-F238E27FC236}">
-                <a16:creationId xmlns:a16="http://schemas.microsoft.com/office/drawing/2014/main" id="{2AEA030B-DCA0-4175-ABAB-54A0297532B0}"/>
+                <a16:creationId xmlns:a16="http://schemas.microsoft.com/office/drawing/2014/main" id="{D3CE7536-F311-4879-892F-14027CB962E1}"/>
               </a:ext>
             </a:extLst>
           </p:cNvPr>
@@ -25866,7 +25866,7 @@
           <p:cNvPr id="12" name="Shape 10">
             <a:extLst xmlns:a="http://schemas.openxmlformats.org/drawingml/2006/main">
               <a:ext uri="{FF2B5EF4-FFF2-40B4-BE49-F238E27FC236}">
-                <a16:creationId xmlns:a16="http://schemas.microsoft.com/office/drawing/2014/main" id="{FFA01044-F3F8-4E75-80AC-5E4C368139FF}"/>
+                <a16:creationId xmlns:a16="http://schemas.microsoft.com/office/drawing/2014/main" id="{BE2C5DD9-7B75-4930-88E3-9DAFFACEEC12}"/>
               </a:ext>
             </a:extLst>
           </p:cNvPr>
@@ -25904,7 +25904,7 @@
           <p:cNvPr id="13" name="Text 11">
             <a:extLst xmlns:a="http://schemas.openxmlformats.org/drawingml/2006/main">
               <a:ext uri="{FF2B5EF4-FFF2-40B4-BE49-F238E27FC236}">
-                <a16:creationId xmlns:a16="http://schemas.microsoft.com/office/drawing/2014/main" id="{40AE7DBA-677C-4316-8908-51943AEDC686}"/>
+                <a16:creationId xmlns:a16="http://schemas.microsoft.com/office/drawing/2014/main" id="{5C89817F-F2DD-4950-9322-97B619B346E8}"/>
               </a:ext>
             </a:extLst>
           </p:cNvPr>
@@ -25949,7 +25949,7 @@
           <p:cNvPr id="14" name="Text 12">
             <a:extLst xmlns:a="http://schemas.openxmlformats.org/drawingml/2006/main">
               <a:ext uri="{FF2B5EF4-FFF2-40B4-BE49-F238E27FC236}">
-                <a16:creationId xmlns:a16="http://schemas.microsoft.com/office/drawing/2014/main" id="{6C2F30E2-15C5-4EA9-A335-5A9A09A94112}"/>
+                <a16:creationId xmlns:a16="http://schemas.microsoft.com/office/drawing/2014/main" id="{2E830FA3-0F77-474C-9E22-8134C3C4DBCB}"/>
               </a:ext>
             </a:extLst>
           </p:cNvPr>
@@ -25994,7 +25994,7 @@
           <p:cNvPr id="15" name="Text 13">
             <a:extLst xmlns:a="http://schemas.openxmlformats.org/drawingml/2006/main">
               <a:ext uri="{FF2B5EF4-FFF2-40B4-BE49-F238E27FC236}">
-                <a16:creationId xmlns:a16="http://schemas.microsoft.com/office/drawing/2014/main" id="{0B0C5CC9-555A-403A-A02D-8B7AAFF1E0E1}"/>
+                <a16:creationId xmlns:a16="http://schemas.microsoft.com/office/drawing/2014/main" id="{4C9C7AB3-5C43-475A-B472-C56263B8FF99}"/>
               </a:ext>
             </a:extLst>
           </p:cNvPr>
@@ -26042,7 +26042,7 @@
           <p:cNvPr id="16" name="Shape 14">
             <a:extLst xmlns:a="http://schemas.openxmlformats.org/drawingml/2006/main">
               <a:ext uri="{FF2B5EF4-FFF2-40B4-BE49-F238E27FC236}">
-                <a16:creationId xmlns:a16="http://schemas.microsoft.com/office/drawing/2014/main" id="{D5C637DF-EE4B-4056-80B5-141F710422E7}"/>
+                <a16:creationId xmlns:a16="http://schemas.microsoft.com/office/drawing/2014/main" id="{272EE950-B3C0-4DEC-A0E5-5B5B999A5CB6}"/>
               </a:ext>
             </a:extLst>
           </p:cNvPr>
@@ -26089,7 +26089,7 @@
           <p:cNvPr id="17" name="Shape 15">
             <a:extLst xmlns:a="http://schemas.openxmlformats.org/drawingml/2006/main">
               <a:ext uri="{FF2B5EF4-FFF2-40B4-BE49-F238E27FC236}">
-                <a16:creationId xmlns:a16="http://schemas.microsoft.com/office/drawing/2014/main" id="{2BAB4E82-E702-4CE9-A81E-B1A1BFE09FEB}"/>
+                <a16:creationId xmlns:a16="http://schemas.microsoft.com/office/drawing/2014/main" id="{843A2546-139C-4D6B-9B0C-D15685B0824E}"/>
               </a:ext>
             </a:extLst>
           </p:cNvPr>
@@ -26127,7 +26127,7 @@
           <p:cNvPr id="18" name="Text 16">
             <a:extLst xmlns:a="http://schemas.openxmlformats.org/drawingml/2006/main">
               <a:ext uri="{FF2B5EF4-FFF2-40B4-BE49-F238E27FC236}">
-                <a16:creationId xmlns:a16="http://schemas.microsoft.com/office/drawing/2014/main" id="{81830F66-92D8-4949-A15F-1C7433A4C2C9}"/>
+                <a16:creationId xmlns:a16="http://schemas.microsoft.com/office/drawing/2014/main" id="{A732172A-3806-477B-BCCA-6C195C3D4D6B}"/>
               </a:ext>
             </a:extLst>
           </p:cNvPr>
@@ -26172,7 +26172,7 @@
           <p:cNvPr id="19" name="Text 17">
             <a:extLst xmlns:a="http://schemas.openxmlformats.org/drawingml/2006/main">
               <a:ext uri="{FF2B5EF4-FFF2-40B4-BE49-F238E27FC236}">
-                <a16:creationId xmlns:a16="http://schemas.microsoft.com/office/drawing/2014/main" id="{2FC881CD-47F1-4E8E-AAC2-6DC37A279442}"/>
+                <a16:creationId xmlns:a16="http://schemas.microsoft.com/office/drawing/2014/main" id="{70C15ECC-4802-4977-8E52-0C2C54D112F5}"/>
               </a:ext>
             </a:extLst>
           </p:cNvPr>
@@ -26217,7 +26217,7 @@
           <p:cNvPr id="20" name="Text 18">
             <a:extLst xmlns:a="http://schemas.openxmlformats.org/drawingml/2006/main">
               <a:ext uri="{FF2B5EF4-FFF2-40B4-BE49-F238E27FC236}">
-                <a16:creationId xmlns:a16="http://schemas.microsoft.com/office/drawing/2014/main" id="{B9FBB159-C7D3-4A28-A5E4-83A8540581C8}"/>
+                <a16:creationId xmlns:a16="http://schemas.microsoft.com/office/drawing/2014/main" id="{06381CD0-492E-4210-BC0A-2C7E37603F4A}"/>
               </a:ext>
             </a:extLst>
           </p:cNvPr>
@@ -26265,7 +26265,7 @@
           <p:cNvPr id="21" name="Shape 19">
             <a:extLst xmlns:a="http://schemas.openxmlformats.org/drawingml/2006/main">
               <a:ext uri="{FF2B5EF4-FFF2-40B4-BE49-F238E27FC236}">
-                <a16:creationId xmlns:a16="http://schemas.microsoft.com/office/drawing/2014/main" id="{4121BD3D-3B58-48CF-953D-DE434ADADCED}"/>
+                <a16:creationId xmlns:a16="http://schemas.microsoft.com/office/drawing/2014/main" id="{9AEC4C18-7559-4403-92B0-ABFC6EBAA1F5}"/>
               </a:ext>
             </a:extLst>
           </p:cNvPr>
@@ -26312,7 +26312,7 @@
           <p:cNvPr id="22" name="Shape 20">
             <a:extLst xmlns:a="http://schemas.openxmlformats.org/drawingml/2006/main">
               <a:ext uri="{FF2B5EF4-FFF2-40B4-BE49-F238E27FC236}">
-                <a16:creationId xmlns:a16="http://schemas.microsoft.com/office/drawing/2014/main" id="{1EC611F0-BC50-4569-80D4-F8C7BB897E37}"/>
+                <a16:creationId xmlns:a16="http://schemas.microsoft.com/office/drawing/2014/main" id="{D70FA136-C011-4A8F-89CD-80DA76380122}"/>
               </a:ext>
             </a:extLst>
           </p:cNvPr>
@@ -26350,7 +26350,7 @@
           <p:cNvPr id="23" name="Text 21">
             <a:extLst xmlns:a="http://schemas.openxmlformats.org/drawingml/2006/main">
               <a:ext uri="{FF2B5EF4-FFF2-40B4-BE49-F238E27FC236}">
-                <a16:creationId xmlns:a16="http://schemas.microsoft.com/office/drawing/2014/main" id="{FB046290-6E47-46A7-A1B7-29F49E2CB86D}"/>
+                <a16:creationId xmlns:a16="http://schemas.microsoft.com/office/drawing/2014/main" id="{76086F7A-E274-4F7F-AE2B-CBF4020601F2}"/>
               </a:ext>
             </a:extLst>
           </p:cNvPr>
@@ -26395,7 +26395,7 @@
           <p:cNvPr id="24" name="Text 22">
             <a:extLst xmlns:a="http://schemas.openxmlformats.org/drawingml/2006/main">
               <a:ext uri="{FF2B5EF4-FFF2-40B4-BE49-F238E27FC236}">
-                <a16:creationId xmlns:a16="http://schemas.microsoft.com/office/drawing/2014/main" id="{1DDD5D53-7B4D-4C0F-A08E-88A89B6A59DA}"/>
+                <a16:creationId xmlns:a16="http://schemas.microsoft.com/office/drawing/2014/main" id="{22E7C5CF-F2FE-4564-ABF7-D5C6F7C4F7F3}"/>
               </a:ext>
             </a:extLst>
           </p:cNvPr>
@@ -26440,7 +26440,7 @@
           <p:cNvPr id="25" name="Text 23">
             <a:extLst xmlns:a="http://schemas.openxmlformats.org/drawingml/2006/main">
               <a:ext uri="{FF2B5EF4-FFF2-40B4-BE49-F238E27FC236}">
-                <a16:creationId xmlns:a16="http://schemas.microsoft.com/office/drawing/2014/main" id="{7E274ED7-F3D9-497A-AFFC-C69A22AE69FA}"/>
+                <a16:creationId xmlns:a16="http://schemas.microsoft.com/office/drawing/2014/main" id="{0221A140-2BBB-4957-9808-AAB83ED1AC56}"/>
               </a:ext>
             </a:extLst>
           </p:cNvPr>
@@ -26488,7 +26488,7 @@
           <p:cNvPr id="26" name="Shape 24">
             <a:extLst xmlns:a="http://schemas.openxmlformats.org/drawingml/2006/main">
               <a:ext uri="{FF2B5EF4-FFF2-40B4-BE49-F238E27FC236}">
-                <a16:creationId xmlns:a16="http://schemas.microsoft.com/office/drawing/2014/main" id="{C6C6F19B-0EE3-4621-ACE9-E09BA9F26E0F}"/>
+                <a16:creationId xmlns:a16="http://schemas.microsoft.com/office/drawing/2014/main" id="{26D18804-A69C-4E7B-938C-71116E23FE04}"/>
               </a:ext>
             </a:extLst>
           </p:cNvPr>
@@ -26535,7 +26535,7 @@
           <p:cNvPr id="27" name="Text 25">
             <a:extLst xmlns:a="http://schemas.openxmlformats.org/drawingml/2006/main">
               <a:ext uri="{FF2B5EF4-FFF2-40B4-BE49-F238E27FC236}">
-                <a16:creationId xmlns:a16="http://schemas.microsoft.com/office/drawing/2014/main" id="{1CA8744D-C78D-4658-9ACE-CF17B1B32C0F}"/>
+                <a16:creationId xmlns:a16="http://schemas.microsoft.com/office/drawing/2014/main" id="{7A8CD07D-019A-4572-8C6A-682A49692E0E}"/>
               </a:ext>
             </a:extLst>
           </p:cNvPr>
@@ -26592,7 +26592,7 @@
     </p:spTree>
     <p:extLst>
       <p:ext uri="{BB962C8B-B14F-4D97-AF65-F5344CB8AC3E}">
-        <p14:creationId xmlns:p14="http://schemas.microsoft.com/office/powerpoint/2010/main" val="1343628792"/>
+        <p14:creationId xmlns:p14="http://schemas.microsoft.com/office/powerpoint/2010/main" val="574210842"/>
       </p:ext>
     </p:extLst>
   </p:cSld>
@@ -26623,7 +26623,7 @@
           <p:cNvPr id="2" name="Text 0">
             <a:extLst xmlns:a="http://schemas.openxmlformats.org/drawingml/2006/main">
               <a:ext uri="{FF2B5EF4-FFF2-40B4-BE49-F238E27FC236}">
-                <a16:creationId xmlns:a16="http://schemas.microsoft.com/office/drawing/2014/main" id="{2C9F38AF-5CF5-4C5C-BC80-DC4511CFBE4E}"/>
+                <a16:creationId xmlns:a16="http://schemas.microsoft.com/office/drawing/2014/main" id="{015D602E-9D0D-4B37-8EB5-FB4F51A4AE30}"/>
               </a:ext>
             </a:extLst>
           </p:cNvPr>
@@ -26668,7 +26668,7 @@
           <p:cNvPr id="3" name="Text 1">
             <a:extLst xmlns:a="http://schemas.openxmlformats.org/drawingml/2006/main">
               <a:ext uri="{FF2B5EF4-FFF2-40B4-BE49-F238E27FC236}">
-                <a16:creationId xmlns:a16="http://schemas.microsoft.com/office/drawing/2014/main" id="{2FDA4A9D-25EE-421A-A198-2ECCB1B61F09}"/>
+                <a16:creationId xmlns:a16="http://schemas.microsoft.com/office/drawing/2014/main" id="{0161105D-F07B-427E-9686-0EAB34C11A81}"/>
               </a:ext>
             </a:extLst>
           </p:cNvPr>
@@ -26713,7 +26713,7 @@
           <p:cNvPr id="4" name="Text 2">
             <a:extLst xmlns:a="http://schemas.openxmlformats.org/drawingml/2006/main">
               <a:ext uri="{FF2B5EF4-FFF2-40B4-BE49-F238E27FC236}">
-                <a16:creationId xmlns:a16="http://schemas.microsoft.com/office/drawing/2014/main" id="{87A38A09-9F9C-491C-B11C-2E48F6712F73}"/>
+                <a16:creationId xmlns:a16="http://schemas.microsoft.com/office/drawing/2014/main" id="{3BAEECA6-BE6C-44D2-A2AE-9071B99DBEA8}"/>
               </a:ext>
             </a:extLst>
           </p:cNvPr>
@@ -26758,7 +26758,7 @@
           <p:cNvPr id="5" name="Text 3">
             <a:extLst xmlns:a="http://schemas.openxmlformats.org/drawingml/2006/main">
               <a:ext uri="{FF2B5EF4-FFF2-40B4-BE49-F238E27FC236}">
-                <a16:creationId xmlns:a16="http://schemas.microsoft.com/office/drawing/2014/main" id="{0E842083-EB41-495D-A73F-C1FF795DCB72}"/>
+                <a16:creationId xmlns:a16="http://schemas.microsoft.com/office/drawing/2014/main" id="{00252808-691F-436C-8B33-4FECC7C12025}"/>
               </a:ext>
             </a:extLst>
           </p:cNvPr>
@@ -26803,7 +26803,7 @@
           <p:cNvPr id="6" name="Shape 4">
             <a:extLst xmlns:a="http://schemas.openxmlformats.org/drawingml/2006/main">
               <a:ext uri="{FF2B5EF4-FFF2-40B4-BE49-F238E27FC236}">
-                <a16:creationId xmlns:a16="http://schemas.microsoft.com/office/drawing/2014/main" id="{9D9A3FD4-8BE3-45A0-AAB8-09946BCC2F97}"/>
+                <a16:creationId xmlns:a16="http://schemas.microsoft.com/office/drawing/2014/main" id="{41A56079-9C03-43B3-9FE3-AB09EF2FA184}"/>
               </a:ext>
             </a:extLst>
           </p:cNvPr>
@@ -26850,7 +26850,7 @@
           <p:cNvPr id="7" name="Text 5">
             <a:extLst xmlns:a="http://schemas.openxmlformats.org/drawingml/2006/main">
               <a:ext uri="{FF2B5EF4-FFF2-40B4-BE49-F238E27FC236}">
-                <a16:creationId xmlns:a16="http://schemas.microsoft.com/office/drawing/2014/main" id="{34FB3C2B-AED0-4CEF-B34E-49E28B6A3FD7}"/>
+                <a16:creationId xmlns:a16="http://schemas.microsoft.com/office/drawing/2014/main" id="{8360AB1B-063E-4043-888C-F54DD535D352}"/>
               </a:ext>
             </a:extLst>
           </p:cNvPr>
@@ -26898,7 +26898,7 @@
           <p:cNvPr id="8" name="Text 6">
             <a:extLst xmlns:a="http://schemas.openxmlformats.org/drawingml/2006/main">
               <a:ext uri="{FF2B5EF4-FFF2-40B4-BE49-F238E27FC236}">
-                <a16:creationId xmlns:a16="http://schemas.microsoft.com/office/drawing/2014/main" id="{72A88180-A477-4FF1-864E-3E94BFF1F821}"/>
+                <a16:creationId xmlns:a16="http://schemas.microsoft.com/office/drawing/2014/main" id="{932AF395-AA1E-40C5-B34F-DEE9F0632D8B}"/>
               </a:ext>
             </a:extLst>
           </p:cNvPr>
@@ -26943,7 +26943,7 @@
           <p:cNvPr id="9" name="Shape 7">
             <a:extLst xmlns:a="http://schemas.openxmlformats.org/drawingml/2006/main">
               <a:ext uri="{FF2B5EF4-FFF2-40B4-BE49-F238E27FC236}">
-                <a16:creationId xmlns:a16="http://schemas.microsoft.com/office/drawing/2014/main" id="{9B6680E0-701B-4E38-8EA1-0EDD54656B24}"/>
+                <a16:creationId xmlns:a16="http://schemas.microsoft.com/office/drawing/2014/main" id="{D8A236A4-A3D8-4D0E-9C82-972E659240E0}"/>
               </a:ext>
             </a:extLst>
           </p:cNvPr>
@@ -26981,7 +26981,7 @@
           <p:cNvPr id="10" name="Text 8">
             <a:extLst xmlns:a="http://schemas.openxmlformats.org/drawingml/2006/main">
               <a:ext uri="{FF2B5EF4-FFF2-40B4-BE49-F238E27FC236}">
-                <a16:creationId xmlns:a16="http://schemas.microsoft.com/office/drawing/2014/main" id="{D1B2F5DB-06D8-4C10-8984-618434A473AA}"/>
+                <a16:creationId xmlns:a16="http://schemas.microsoft.com/office/drawing/2014/main" id="{CA67F273-FF93-4C61-B5F1-A0016FB8E21F}"/>
               </a:ext>
             </a:extLst>
           </p:cNvPr>
@@ -27015,7 +27015,7 @@
           <p:cNvPr id="11" name="Text 9">
             <a:extLst xmlns:a="http://schemas.openxmlformats.org/drawingml/2006/main">
               <a:ext uri="{FF2B5EF4-FFF2-40B4-BE49-F238E27FC236}">
-                <a16:creationId xmlns:a16="http://schemas.microsoft.com/office/drawing/2014/main" id="{25D4A52C-E9F4-4BF0-B4D8-23737D7F512C}"/>
+                <a16:creationId xmlns:a16="http://schemas.microsoft.com/office/drawing/2014/main" id="{A7688975-2F74-4765-8FD0-8E7681895D26}"/>
               </a:ext>
             </a:extLst>
           </p:cNvPr>
@@ -27060,7 +27060,7 @@
           <p:cNvPr id="12" name="Text 10">
             <a:extLst xmlns:a="http://schemas.openxmlformats.org/drawingml/2006/main">
               <a:ext uri="{FF2B5EF4-FFF2-40B4-BE49-F238E27FC236}">
-                <a16:creationId xmlns:a16="http://schemas.microsoft.com/office/drawing/2014/main" id="{691F27F4-B7A4-4327-B455-43427509A1D8}"/>
+                <a16:creationId xmlns:a16="http://schemas.microsoft.com/office/drawing/2014/main" id="{A83F7FD9-12B8-4F7D-8147-D7F665DFA063}"/>
               </a:ext>
             </a:extLst>
           </p:cNvPr>
@@ -27108,7 +27108,7 @@
           <p:cNvPr id="13" name="Shape 11">
             <a:extLst xmlns:a="http://schemas.openxmlformats.org/drawingml/2006/main">
               <a:ext uri="{FF2B5EF4-FFF2-40B4-BE49-F238E27FC236}">
-                <a16:creationId xmlns:a16="http://schemas.microsoft.com/office/drawing/2014/main" id="{53ACD803-B185-4898-B6A3-E52AF117BC94}"/>
+                <a16:creationId xmlns:a16="http://schemas.microsoft.com/office/drawing/2014/main" id="{AFAB833F-76DB-4F16-BF12-E9758807A8D1}"/>
               </a:ext>
             </a:extLst>
           </p:cNvPr>
@@ -27144,7 +27144,7 @@
           <p:cNvPr id="14" name="Shape 12">
             <a:extLst xmlns:a="http://schemas.openxmlformats.org/drawingml/2006/main">
               <a:ext uri="{FF2B5EF4-FFF2-40B4-BE49-F238E27FC236}">
-                <a16:creationId xmlns:a16="http://schemas.microsoft.com/office/drawing/2014/main" id="{7C07A3C4-5545-46E5-9E84-6C49EEF539BB}"/>
+                <a16:creationId xmlns:a16="http://schemas.microsoft.com/office/drawing/2014/main" id="{42108CAE-B1EC-4478-81F1-1BF55F6A538A}"/>
               </a:ext>
             </a:extLst>
           </p:cNvPr>
@@ -27182,7 +27182,7 @@
           <p:cNvPr id="15" name="Text 13">
             <a:extLst xmlns:a="http://schemas.openxmlformats.org/drawingml/2006/main">
               <a:ext uri="{FF2B5EF4-FFF2-40B4-BE49-F238E27FC236}">
-                <a16:creationId xmlns:a16="http://schemas.microsoft.com/office/drawing/2014/main" id="{EFF6A3E0-15CF-4CE0-A122-BA26C963764C}"/>
+                <a16:creationId xmlns:a16="http://schemas.microsoft.com/office/drawing/2014/main" id="{B750993E-57D1-4741-9B79-837D0842BCA8}"/>
               </a:ext>
             </a:extLst>
           </p:cNvPr>
@@ -27216,7 +27216,7 @@
           <p:cNvPr id="16" name="Text 14">
             <a:extLst xmlns:a="http://schemas.openxmlformats.org/drawingml/2006/main">
               <a:ext uri="{FF2B5EF4-FFF2-40B4-BE49-F238E27FC236}">
-                <a16:creationId xmlns:a16="http://schemas.microsoft.com/office/drawing/2014/main" id="{B46C40F5-0148-4E4A-B728-A9FE799720FB}"/>
+                <a16:creationId xmlns:a16="http://schemas.microsoft.com/office/drawing/2014/main" id="{3C3C466D-CBD6-48DD-AC15-F25FB32F3BF6}"/>
               </a:ext>
             </a:extLst>
           </p:cNvPr>
@@ -27261,7 +27261,7 @@
           <p:cNvPr id="17" name="Text 15">
             <a:extLst xmlns:a="http://schemas.openxmlformats.org/drawingml/2006/main">
               <a:ext uri="{FF2B5EF4-FFF2-40B4-BE49-F238E27FC236}">
-                <a16:creationId xmlns:a16="http://schemas.microsoft.com/office/drawing/2014/main" id="{EDA6DF17-275A-4F0B-8A3B-48598F948161}"/>
+                <a16:creationId xmlns:a16="http://schemas.microsoft.com/office/drawing/2014/main" id="{B78C4674-10EE-48BD-81CA-64A6D2FF374C}"/>
               </a:ext>
             </a:extLst>
           </p:cNvPr>
@@ -27309,7 +27309,7 @@
           <p:cNvPr id="18" name="Shape 16">
             <a:extLst xmlns:a="http://schemas.openxmlformats.org/drawingml/2006/main">
               <a:ext uri="{FF2B5EF4-FFF2-40B4-BE49-F238E27FC236}">
-                <a16:creationId xmlns:a16="http://schemas.microsoft.com/office/drawing/2014/main" id="{2857323C-E02D-4A5D-8742-3EB9414315E6}"/>
+                <a16:creationId xmlns:a16="http://schemas.microsoft.com/office/drawing/2014/main" id="{B0030DE4-5797-4301-85B4-081529995EAA}"/>
               </a:ext>
             </a:extLst>
           </p:cNvPr>
@@ -27345,7 +27345,7 @@
           <p:cNvPr id="19" name="Shape 17">
             <a:extLst xmlns:a="http://schemas.openxmlformats.org/drawingml/2006/main">
               <a:ext uri="{FF2B5EF4-FFF2-40B4-BE49-F238E27FC236}">
-                <a16:creationId xmlns:a16="http://schemas.microsoft.com/office/drawing/2014/main" id="{68C2954C-339C-41CD-8548-DF1154545F02}"/>
+                <a16:creationId xmlns:a16="http://schemas.microsoft.com/office/drawing/2014/main" id="{50779BF1-8A3A-4150-8098-2A23698643C1}"/>
               </a:ext>
             </a:extLst>
           </p:cNvPr>
@@ -27383,7 +27383,7 @@
           <p:cNvPr id="20" name="Text 18">
             <a:extLst xmlns:a="http://schemas.openxmlformats.org/drawingml/2006/main">
               <a:ext uri="{FF2B5EF4-FFF2-40B4-BE49-F238E27FC236}">
-                <a16:creationId xmlns:a16="http://schemas.microsoft.com/office/drawing/2014/main" id="{11749EE6-AF43-48DB-A833-B1EAD90539D6}"/>
+                <a16:creationId xmlns:a16="http://schemas.microsoft.com/office/drawing/2014/main" id="{DF66EBE3-AE4D-41B9-ADD9-5A6138DBE128}"/>
               </a:ext>
             </a:extLst>
           </p:cNvPr>
@@ -27417,7 +27417,7 @@
           <p:cNvPr id="21" name="Text 19">
             <a:extLst xmlns:a="http://schemas.openxmlformats.org/drawingml/2006/main">
               <a:ext uri="{FF2B5EF4-FFF2-40B4-BE49-F238E27FC236}">
-                <a16:creationId xmlns:a16="http://schemas.microsoft.com/office/drawing/2014/main" id="{15532A2B-5042-492D-BF6B-54D23D8EBDBF}"/>
+                <a16:creationId xmlns:a16="http://schemas.microsoft.com/office/drawing/2014/main" id="{B4659AD2-2B59-4BD0-9730-C912C79C23BF}"/>
               </a:ext>
             </a:extLst>
           </p:cNvPr>
@@ -27462,7 +27462,7 @@
           <p:cNvPr id="22" name="Text 20">
             <a:extLst xmlns:a="http://schemas.openxmlformats.org/drawingml/2006/main">
               <a:ext uri="{FF2B5EF4-FFF2-40B4-BE49-F238E27FC236}">
-                <a16:creationId xmlns:a16="http://schemas.microsoft.com/office/drawing/2014/main" id="{FD364F9E-92F8-4D9E-A4B3-BE2D3C3F4DF0}"/>
+                <a16:creationId xmlns:a16="http://schemas.microsoft.com/office/drawing/2014/main" id="{369D1796-6EE1-466B-870C-977BECA4FD92}"/>
               </a:ext>
             </a:extLst>
           </p:cNvPr>
@@ -27510,7 +27510,7 @@
           <p:cNvPr id="23" name="Shape 21">
             <a:extLst xmlns:a="http://schemas.openxmlformats.org/drawingml/2006/main">
               <a:ext uri="{FF2B5EF4-FFF2-40B4-BE49-F238E27FC236}">
-                <a16:creationId xmlns:a16="http://schemas.microsoft.com/office/drawing/2014/main" id="{F2561A5C-9968-4752-A779-42028912209F}"/>
+                <a16:creationId xmlns:a16="http://schemas.microsoft.com/office/drawing/2014/main" id="{DCCEC528-852F-4976-9B83-E96F9C003365}"/>
               </a:ext>
             </a:extLst>
           </p:cNvPr>
@@ -27546,7 +27546,7 @@
           <p:cNvPr id="24" name="Shape 22">
             <a:extLst xmlns:a="http://schemas.openxmlformats.org/drawingml/2006/main">
               <a:ext uri="{FF2B5EF4-FFF2-40B4-BE49-F238E27FC236}">
-                <a16:creationId xmlns:a16="http://schemas.microsoft.com/office/drawing/2014/main" id="{0392A439-6EC2-485F-A167-DEE08642C753}"/>
+                <a16:creationId xmlns:a16="http://schemas.microsoft.com/office/drawing/2014/main" id="{866D7C32-AEE1-4B78-AECD-3775CB9A25B2}"/>
               </a:ext>
             </a:extLst>
           </p:cNvPr>
@@ -27584,7 +27584,7 @@
           <p:cNvPr id="25" name="Text 23">
             <a:extLst xmlns:a="http://schemas.openxmlformats.org/drawingml/2006/main">
               <a:ext uri="{FF2B5EF4-FFF2-40B4-BE49-F238E27FC236}">
-                <a16:creationId xmlns:a16="http://schemas.microsoft.com/office/drawing/2014/main" id="{9FC60366-6837-4BEC-A41B-FDE65735D4D1}"/>
+                <a16:creationId xmlns:a16="http://schemas.microsoft.com/office/drawing/2014/main" id="{18FFFD1F-4709-45F5-AB4E-C765A2C8CCAA}"/>
               </a:ext>
             </a:extLst>
           </p:cNvPr>
@@ -27618,7 +27618,7 @@
           <p:cNvPr id="26" name="Text 24">
             <a:extLst xmlns:a="http://schemas.openxmlformats.org/drawingml/2006/main">
               <a:ext uri="{FF2B5EF4-FFF2-40B4-BE49-F238E27FC236}">
-                <a16:creationId xmlns:a16="http://schemas.microsoft.com/office/drawing/2014/main" id="{4AF06532-2C98-4AD0-9038-D2B67AC7D59D}"/>
+                <a16:creationId xmlns:a16="http://schemas.microsoft.com/office/drawing/2014/main" id="{DCDC8C3B-9E2D-404B-A1C4-FCEEC162FFD6}"/>
               </a:ext>
             </a:extLst>
           </p:cNvPr>
@@ -27663,7 +27663,7 @@
           <p:cNvPr id="27" name="Text 25">
             <a:extLst xmlns:a="http://schemas.openxmlformats.org/drawingml/2006/main">
               <a:ext uri="{FF2B5EF4-FFF2-40B4-BE49-F238E27FC236}">
-                <a16:creationId xmlns:a16="http://schemas.microsoft.com/office/drawing/2014/main" id="{26FF2DC8-E07B-45F0-A313-2889E1D0AF8D}"/>
+                <a16:creationId xmlns:a16="http://schemas.microsoft.com/office/drawing/2014/main" id="{15F026D7-3FDB-469A-B2D3-364C88051CFC}"/>
               </a:ext>
             </a:extLst>
           </p:cNvPr>
@@ -27711,7 +27711,7 @@
           <p:cNvPr id="28" name="Shape 26">
             <a:extLst xmlns:a="http://schemas.openxmlformats.org/drawingml/2006/main">
               <a:ext uri="{FF2B5EF4-FFF2-40B4-BE49-F238E27FC236}">
-                <a16:creationId xmlns:a16="http://schemas.microsoft.com/office/drawing/2014/main" id="{FD49C9C2-ED4A-4A26-AABE-63A7D4BEE23E}"/>
+                <a16:creationId xmlns:a16="http://schemas.microsoft.com/office/drawing/2014/main" id="{F998025A-1DDE-4297-AB9E-FE971D770E57}"/>
               </a:ext>
             </a:extLst>
           </p:cNvPr>
@@ -27747,7 +27747,7 @@
           <p:cNvPr id="29" name="Shape 27">
             <a:extLst xmlns:a="http://schemas.openxmlformats.org/drawingml/2006/main">
               <a:ext uri="{FF2B5EF4-FFF2-40B4-BE49-F238E27FC236}">
-                <a16:creationId xmlns:a16="http://schemas.microsoft.com/office/drawing/2014/main" id="{B6CE1371-81CF-4BA7-99A3-88CCE6B91298}"/>
+                <a16:creationId xmlns:a16="http://schemas.microsoft.com/office/drawing/2014/main" id="{4E1D58D7-B873-4C7F-B540-F0DD4CCA93BA}"/>
               </a:ext>
             </a:extLst>
           </p:cNvPr>
@@ -27785,7 +27785,7 @@
           <p:cNvPr id="30" name="Text 28">
             <a:extLst xmlns:a="http://schemas.openxmlformats.org/drawingml/2006/main">
               <a:ext uri="{FF2B5EF4-FFF2-40B4-BE49-F238E27FC236}">
-                <a16:creationId xmlns:a16="http://schemas.microsoft.com/office/drawing/2014/main" id="{7FC1D093-7ED8-462C-8286-B404EB12607B}"/>
+                <a16:creationId xmlns:a16="http://schemas.microsoft.com/office/drawing/2014/main" id="{DE285CD5-0C5D-4934-8C22-56EA8E0456E9}"/>
               </a:ext>
             </a:extLst>
           </p:cNvPr>
@@ -27819,7 +27819,7 @@
           <p:cNvPr id="31" name="Text 29">
             <a:extLst xmlns:a="http://schemas.openxmlformats.org/drawingml/2006/main">
               <a:ext uri="{FF2B5EF4-FFF2-40B4-BE49-F238E27FC236}">
-                <a16:creationId xmlns:a16="http://schemas.microsoft.com/office/drawing/2014/main" id="{5EBF2569-74A3-40E6-ABEE-D66946D7C2A8}"/>
+                <a16:creationId xmlns:a16="http://schemas.microsoft.com/office/drawing/2014/main" id="{C67A887A-1D17-45B1-9D1B-68EFCE1E4359}"/>
               </a:ext>
             </a:extLst>
           </p:cNvPr>
@@ -27864,7 +27864,7 @@
           <p:cNvPr id="32" name="Text 30">
             <a:extLst xmlns:a="http://schemas.openxmlformats.org/drawingml/2006/main">
               <a:ext uri="{FF2B5EF4-FFF2-40B4-BE49-F238E27FC236}">
-                <a16:creationId xmlns:a16="http://schemas.microsoft.com/office/drawing/2014/main" id="{EF9D92A3-89D1-4D7A-B4D7-00B4971E00BA}"/>
+                <a16:creationId xmlns:a16="http://schemas.microsoft.com/office/drawing/2014/main" id="{953AAB9D-9F70-4263-A10A-6F586D85B18F}"/>
               </a:ext>
             </a:extLst>
           </p:cNvPr>
@@ -27910,7 +27910,7 @@
     </p:spTree>
     <p:extLst>
       <p:ext uri="{BB962C8B-B14F-4D97-AF65-F5344CB8AC3E}">
-        <p14:creationId xmlns:p14="http://schemas.microsoft.com/office/powerpoint/2010/main" val="793718260"/>
+        <p14:creationId xmlns:p14="http://schemas.microsoft.com/office/powerpoint/2010/main" val="762328345"/>
       </p:ext>
     </p:extLst>
   </p:cSld>
@@ -27941,7 +27941,7 @@
           <p:cNvPr id="2" name="Text 0">
             <a:extLst xmlns:a="http://schemas.openxmlformats.org/drawingml/2006/main">
               <a:ext uri="{FF2B5EF4-FFF2-40B4-BE49-F238E27FC236}">
-                <a16:creationId xmlns:a16="http://schemas.microsoft.com/office/drawing/2014/main" id="{4BB67CA1-CFEA-4957-AE8B-EA9BF678D433}"/>
+                <a16:creationId xmlns:a16="http://schemas.microsoft.com/office/drawing/2014/main" id="{0942A1D3-EDD1-4908-A11C-9CB82DE0CA23}"/>
               </a:ext>
             </a:extLst>
           </p:cNvPr>
@@ -27986,7 +27986,7 @@
           <p:cNvPr id="3" name="Text 1">
             <a:extLst xmlns:a="http://schemas.openxmlformats.org/drawingml/2006/main">
               <a:ext uri="{FF2B5EF4-FFF2-40B4-BE49-F238E27FC236}">
-                <a16:creationId xmlns:a16="http://schemas.microsoft.com/office/drawing/2014/main" id="{5C388BAC-0C00-43E6-97D5-4A768B911BDE}"/>
+                <a16:creationId xmlns:a16="http://schemas.microsoft.com/office/drawing/2014/main" id="{66F27114-D736-4F33-9BFD-AAFC98FEC57F}"/>
               </a:ext>
             </a:extLst>
           </p:cNvPr>
@@ -28031,7 +28031,7 @@
           <p:cNvPr id="4" name="Text 2">
             <a:extLst xmlns:a="http://schemas.openxmlformats.org/drawingml/2006/main">
               <a:ext uri="{FF2B5EF4-FFF2-40B4-BE49-F238E27FC236}">
-                <a16:creationId xmlns:a16="http://schemas.microsoft.com/office/drawing/2014/main" id="{01537B0F-22D2-4ABC-8B67-10D02776883C}"/>
+                <a16:creationId xmlns:a16="http://schemas.microsoft.com/office/drawing/2014/main" id="{3EFDFD35-C9CE-4A1A-9C4A-058D3756136A}"/>
               </a:ext>
             </a:extLst>
           </p:cNvPr>
@@ -28076,7 +28076,7 @@
           <p:cNvPr id="5" name="Text 3">
             <a:extLst xmlns:a="http://schemas.openxmlformats.org/drawingml/2006/main">
               <a:ext uri="{FF2B5EF4-FFF2-40B4-BE49-F238E27FC236}">
-                <a16:creationId xmlns:a16="http://schemas.microsoft.com/office/drawing/2014/main" id="{AF41F639-8494-4523-B27E-211A285AE3A0}"/>
+                <a16:creationId xmlns:a16="http://schemas.microsoft.com/office/drawing/2014/main" id="{40259342-F965-44C5-AF75-72E048C2EA77}"/>
               </a:ext>
             </a:extLst>
           </p:cNvPr>
@@ -28121,7 +28121,7 @@
           <p:cNvPr id="6" name="Shape 4">
             <a:extLst xmlns:a="http://schemas.openxmlformats.org/drawingml/2006/main">
               <a:ext uri="{FF2B5EF4-FFF2-40B4-BE49-F238E27FC236}">
-                <a16:creationId xmlns:a16="http://schemas.microsoft.com/office/drawing/2014/main" id="{000142AA-F295-4B8A-9710-F42606C475FE}"/>
+                <a16:creationId xmlns:a16="http://schemas.microsoft.com/office/drawing/2014/main" id="{84C3CD37-6888-4977-A2A4-48D843C8DBD6}"/>
               </a:ext>
             </a:extLst>
           </p:cNvPr>
@@ -28168,7 +28168,7 @@
           <p:cNvPr id="7" name="Text 5">
             <a:extLst xmlns:a="http://schemas.openxmlformats.org/drawingml/2006/main">
               <a:ext uri="{FF2B5EF4-FFF2-40B4-BE49-F238E27FC236}">
-                <a16:creationId xmlns:a16="http://schemas.microsoft.com/office/drawing/2014/main" id="{FDC8F925-764D-4F60-94E5-74486166BC43}"/>
+                <a16:creationId xmlns:a16="http://schemas.microsoft.com/office/drawing/2014/main" id="{DA415B68-3D4E-45E6-AFF8-B267B63680B4}"/>
               </a:ext>
             </a:extLst>
           </p:cNvPr>
@@ -28246,7 +28246,7 @@
           <p:cNvPr id="8" name="Shape 6">
             <a:extLst xmlns:a="http://schemas.openxmlformats.org/drawingml/2006/main">
               <a:ext uri="{FF2B5EF4-FFF2-40B4-BE49-F238E27FC236}">
-                <a16:creationId xmlns:a16="http://schemas.microsoft.com/office/drawing/2014/main" id="{3660DB4E-6C54-4ADF-8673-B405319A0C7F}"/>
+                <a16:creationId xmlns:a16="http://schemas.microsoft.com/office/drawing/2014/main" id="{03417A19-E8DE-4DA6-91EB-004ADA26A464}"/>
               </a:ext>
             </a:extLst>
           </p:cNvPr>
@@ -28293,7 +28293,7 @@
           <p:cNvPr id="9" name="Shape 7">
             <a:extLst xmlns:a="http://schemas.openxmlformats.org/drawingml/2006/main">
               <a:ext uri="{FF2B5EF4-FFF2-40B4-BE49-F238E27FC236}">
-                <a16:creationId xmlns:a16="http://schemas.microsoft.com/office/drawing/2014/main" id="{F0D8FDC0-5C3F-47C6-9F31-7B145D6A288F}"/>
+                <a16:creationId xmlns:a16="http://schemas.microsoft.com/office/drawing/2014/main" id="{EBB2E1FB-D68A-4DEF-8AA5-999DDCDB6FA5}"/>
               </a:ext>
             </a:extLst>
           </p:cNvPr>
@@ -28331,7 +28331,7 @@
           <p:cNvPr id="10" name="Text 8">
             <a:extLst xmlns:a="http://schemas.openxmlformats.org/drawingml/2006/main">
               <a:ext uri="{FF2B5EF4-FFF2-40B4-BE49-F238E27FC236}">
-                <a16:creationId xmlns:a16="http://schemas.microsoft.com/office/drawing/2014/main" id="{AE0AB7C0-50AD-434C-97A7-3A0A1C4CA707}"/>
+                <a16:creationId xmlns:a16="http://schemas.microsoft.com/office/drawing/2014/main" id="{71459C7B-213F-4E54-BB0D-945B6395D017}"/>
               </a:ext>
             </a:extLst>
           </p:cNvPr>
@@ -28376,7 +28376,7 @@
           <p:cNvPr id="11" name="Text 9">
             <a:extLst xmlns:a="http://schemas.openxmlformats.org/drawingml/2006/main">
               <a:ext uri="{FF2B5EF4-FFF2-40B4-BE49-F238E27FC236}">
-                <a16:creationId xmlns:a16="http://schemas.microsoft.com/office/drawing/2014/main" id="{BA2E8237-82B3-44BD-80C4-9A27413FF69A}"/>
+                <a16:creationId xmlns:a16="http://schemas.microsoft.com/office/drawing/2014/main" id="{479196E7-9EB3-4F73-AAFD-95FF83CE7755}"/>
               </a:ext>
             </a:extLst>
           </p:cNvPr>
@@ -28421,7 +28421,7 @@
           <p:cNvPr id="12" name="Text 10">
             <a:extLst xmlns:a="http://schemas.openxmlformats.org/drawingml/2006/main">
               <a:ext uri="{FF2B5EF4-FFF2-40B4-BE49-F238E27FC236}">
-                <a16:creationId xmlns:a16="http://schemas.microsoft.com/office/drawing/2014/main" id="{2BAED257-62F6-4C2D-AD2B-51B6BC58E10B}"/>
+                <a16:creationId xmlns:a16="http://schemas.microsoft.com/office/drawing/2014/main" id="{83CDD551-1564-4447-ABC1-A3B7320B5EBB}"/>
               </a:ext>
             </a:extLst>
           </p:cNvPr>
@@ -28560,7 +28560,7 @@
           <p:cNvPr id="13" name="Shape 11">
             <a:extLst xmlns:a="http://schemas.openxmlformats.org/drawingml/2006/main">
               <a:ext uri="{FF2B5EF4-FFF2-40B4-BE49-F238E27FC236}">
-                <a16:creationId xmlns:a16="http://schemas.microsoft.com/office/drawing/2014/main" id="{2C1F9B09-D7A0-46EA-AB01-3A0BA8ED8075}"/>
+                <a16:creationId xmlns:a16="http://schemas.microsoft.com/office/drawing/2014/main" id="{FDE246BB-3A39-4E58-96DE-B453D1C18E81}"/>
               </a:ext>
             </a:extLst>
           </p:cNvPr>
@@ -28607,7 +28607,7 @@
           <p:cNvPr id="14" name="Shape 12">
             <a:extLst xmlns:a="http://schemas.openxmlformats.org/drawingml/2006/main">
               <a:ext uri="{FF2B5EF4-FFF2-40B4-BE49-F238E27FC236}">
-                <a16:creationId xmlns:a16="http://schemas.microsoft.com/office/drawing/2014/main" id="{7CEC45E3-8BB9-43A5-A4E1-CAAFDEBC8FFB}"/>
+                <a16:creationId xmlns:a16="http://schemas.microsoft.com/office/drawing/2014/main" id="{9221EDE1-39B0-44BF-B6D9-DCB3C8215763}"/>
               </a:ext>
             </a:extLst>
           </p:cNvPr>
@@ -28645,7 +28645,7 @@
           <p:cNvPr id="15" name="Text 13">
             <a:extLst xmlns:a="http://schemas.openxmlformats.org/drawingml/2006/main">
               <a:ext uri="{FF2B5EF4-FFF2-40B4-BE49-F238E27FC236}">
-                <a16:creationId xmlns:a16="http://schemas.microsoft.com/office/drawing/2014/main" id="{7414D189-A8EE-410E-B2E4-658DA81CC025}"/>
+                <a16:creationId xmlns:a16="http://schemas.microsoft.com/office/drawing/2014/main" id="{2D51251F-7C92-4AA0-9AD1-BE816ED57159}"/>
               </a:ext>
             </a:extLst>
           </p:cNvPr>
@@ -28690,7 +28690,7 @@
           <p:cNvPr id="16" name="Text 14">
             <a:extLst xmlns:a="http://schemas.openxmlformats.org/drawingml/2006/main">
               <a:ext uri="{FF2B5EF4-FFF2-40B4-BE49-F238E27FC236}">
-                <a16:creationId xmlns:a16="http://schemas.microsoft.com/office/drawing/2014/main" id="{31C6847A-34B1-4CB2-BB5A-8BC85BE9D160}"/>
+                <a16:creationId xmlns:a16="http://schemas.microsoft.com/office/drawing/2014/main" id="{0BAA132A-61AC-4E68-B14B-DE5BC457A468}"/>
               </a:ext>
             </a:extLst>
           </p:cNvPr>
@@ -28735,7 +28735,7 @@
           <p:cNvPr id="17" name="Text 15">
             <a:extLst xmlns:a="http://schemas.openxmlformats.org/drawingml/2006/main">
               <a:ext uri="{FF2B5EF4-FFF2-40B4-BE49-F238E27FC236}">
-                <a16:creationId xmlns:a16="http://schemas.microsoft.com/office/drawing/2014/main" id="{02B6BC54-6E25-48CB-A38F-7A2369D095E3}"/>
+                <a16:creationId xmlns:a16="http://schemas.microsoft.com/office/drawing/2014/main" id="{5176482D-05F0-4488-A475-99EFFE33E322}"/>
               </a:ext>
             </a:extLst>
           </p:cNvPr>
@@ -28874,7 +28874,7 @@
           <p:cNvPr id="18" name="Text 16">
             <a:extLst xmlns:a="http://schemas.openxmlformats.org/drawingml/2006/main">
               <a:ext uri="{FF2B5EF4-FFF2-40B4-BE49-F238E27FC236}">
-                <a16:creationId xmlns:a16="http://schemas.microsoft.com/office/drawing/2014/main" id="{7B8357CE-46B2-4CFC-8E03-D0C1AA461157}"/>
+                <a16:creationId xmlns:a16="http://schemas.microsoft.com/office/drawing/2014/main" id="{9EC0C25F-39DA-44BE-8CA7-05E9F6BDC790}"/>
               </a:ext>
             </a:extLst>
           </p:cNvPr>
@@ -28917,7 +28917,7 @@
     </p:spTree>
     <p:extLst>
       <p:ext uri="{BB962C8B-B14F-4D97-AF65-F5344CB8AC3E}">
-        <p14:creationId xmlns:p14="http://schemas.microsoft.com/office/powerpoint/2010/main" val="1967510291"/>
+        <p14:creationId xmlns:p14="http://schemas.microsoft.com/office/powerpoint/2010/main" val="1892899838"/>
       </p:ext>
     </p:extLst>
   </p:cSld>
@@ -28948,7 +28948,7 @@
           <p:cNvPr id="2" name="Text 0">
             <a:extLst xmlns:a="http://schemas.openxmlformats.org/drawingml/2006/main">
               <a:ext uri="{FF2B5EF4-FFF2-40B4-BE49-F238E27FC236}">
-                <a16:creationId xmlns:a16="http://schemas.microsoft.com/office/drawing/2014/main" id="{C9C067D7-8B6E-4039-AC82-40E89A4CE028}"/>
+                <a16:creationId xmlns:a16="http://schemas.microsoft.com/office/drawing/2014/main" id="{B130FFCF-7AE8-41F5-8AC7-DBAF562DD137}"/>
               </a:ext>
             </a:extLst>
           </p:cNvPr>
@@ -28993,7 +28993,7 @@
           <p:cNvPr id="3" name="Text 1">
             <a:extLst xmlns:a="http://schemas.openxmlformats.org/drawingml/2006/main">
               <a:ext uri="{FF2B5EF4-FFF2-40B4-BE49-F238E27FC236}">
-                <a16:creationId xmlns:a16="http://schemas.microsoft.com/office/drawing/2014/main" id="{F713BB51-F57B-4174-9495-4A1F2DD153BC}"/>
+                <a16:creationId xmlns:a16="http://schemas.microsoft.com/office/drawing/2014/main" id="{D83787DC-0610-4899-8BBF-A6838786E1DF}"/>
               </a:ext>
             </a:extLst>
           </p:cNvPr>
@@ -29038,7 +29038,7 @@
           <p:cNvPr id="4" name="Text 2">
             <a:extLst xmlns:a="http://schemas.openxmlformats.org/drawingml/2006/main">
               <a:ext uri="{FF2B5EF4-FFF2-40B4-BE49-F238E27FC236}">
-                <a16:creationId xmlns:a16="http://schemas.microsoft.com/office/drawing/2014/main" id="{234F48A0-8114-4E37-8008-5112FA698764}"/>
+                <a16:creationId xmlns:a16="http://schemas.microsoft.com/office/drawing/2014/main" id="{E880EA5A-2865-4A96-962A-A0A98ED6BC8F}"/>
               </a:ext>
             </a:extLst>
           </p:cNvPr>
@@ -29083,7 +29083,7 @@
           <p:cNvPr id="5" name="Text 3">
             <a:extLst xmlns:a="http://schemas.openxmlformats.org/drawingml/2006/main">
               <a:ext uri="{FF2B5EF4-FFF2-40B4-BE49-F238E27FC236}">
-                <a16:creationId xmlns:a16="http://schemas.microsoft.com/office/drawing/2014/main" id="{FA1715D5-5908-48A3-9AA8-4E001FF2BE98}"/>
+                <a16:creationId xmlns:a16="http://schemas.microsoft.com/office/drawing/2014/main" id="{14C9921F-1163-4DC8-8EF5-F328FB77B9C2}"/>
               </a:ext>
             </a:extLst>
           </p:cNvPr>
@@ -29128,7 +29128,7 @@
           <p:cNvPr id="6" name="Shape 4">
             <a:extLst xmlns:a="http://schemas.openxmlformats.org/drawingml/2006/main">
               <a:ext uri="{FF2B5EF4-FFF2-40B4-BE49-F238E27FC236}">
-                <a16:creationId xmlns:a16="http://schemas.microsoft.com/office/drawing/2014/main" id="{27DD340C-2E6A-4C63-A5AE-F7056E2EB4E2}"/>
+                <a16:creationId xmlns:a16="http://schemas.microsoft.com/office/drawing/2014/main" id="{5ABF4159-7A99-48A6-85AD-D4F3186AD32D}"/>
               </a:ext>
             </a:extLst>
           </p:cNvPr>
@@ -29175,7 +29175,7 @@
           <p:cNvPr id="7" name="Shape 5">
             <a:extLst xmlns:a="http://schemas.openxmlformats.org/drawingml/2006/main">
               <a:ext uri="{FF2B5EF4-FFF2-40B4-BE49-F238E27FC236}">
-                <a16:creationId xmlns:a16="http://schemas.microsoft.com/office/drawing/2014/main" id="{5097877C-DF32-42BC-AA50-193BF49323A7}"/>
+                <a16:creationId xmlns:a16="http://schemas.microsoft.com/office/drawing/2014/main" id="{7E6459E5-F040-447D-AFD2-804DE26D2915}"/>
               </a:ext>
             </a:extLst>
           </p:cNvPr>
@@ -29213,7 +29213,7 @@
           <p:cNvPr id="8" name="Text 6">
             <a:extLst xmlns:a="http://schemas.openxmlformats.org/drawingml/2006/main">
               <a:ext uri="{FF2B5EF4-FFF2-40B4-BE49-F238E27FC236}">
-                <a16:creationId xmlns:a16="http://schemas.microsoft.com/office/drawing/2014/main" id="{03F8FA97-62E5-473A-902A-906B3DADFBB4}"/>
+                <a16:creationId xmlns:a16="http://schemas.microsoft.com/office/drawing/2014/main" id="{B302C6D2-9371-4202-BCC1-84EE6EE97D85}"/>
               </a:ext>
             </a:extLst>
           </p:cNvPr>
@@ -29258,7 +29258,7 @@
           <p:cNvPr id="9" name="Text 7">
             <a:extLst xmlns:a="http://schemas.openxmlformats.org/drawingml/2006/main">
               <a:ext uri="{FF2B5EF4-FFF2-40B4-BE49-F238E27FC236}">
-                <a16:creationId xmlns:a16="http://schemas.microsoft.com/office/drawing/2014/main" id="{82D01E47-1643-449A-A83A-09E60220E471}"/>
+                <a16:creationId xmlns:a16="http://schemas.microsoft.com/office/drawing/2014/main" id="{2B106F4E-12A8-49F3-A3D1-B6F0D872D8B3}"/>
               </a:ext>
             </a:extLst>
           </p:cNvPr>
@@ -29303,7 +29303,7 @@
           <p:cNvPr id="10" name="Text 8">
             <a:extLst xmlns:a="http://schemas.openxmlformats.org/drawingml/2006/main">
               <a:ext uri="{FF2B5EF4-FFF2-40B4-BE49-F238E27FC236}">
-                <a16:creationId xmlns:a16="http://schemas.microsoft.com/office/drawing/2014/main" id="{19A6C709-2C4A-47C3-A4D1-8601A0336676}"/>
+                <a16:creationId xmlns:a16="http://schemas.microsoft.com/office/drawing/2014/main" id="{91F66A94-230F-4401-BCF4-EFA089E912E8}"/>
               </a:ext>
             </a:extLst>
           </p:cNvPr>
@@ -29398,7 +29398,7 @@
           <p:cNvPr id="11" name="Shape 9">
             <a:extLst xmlns:a="http://schemas.openxmlformats.org/drawingml/2006/main">
               <a:ext uri="{FF2B5EF4-FFF2-40B4-BE49-F238E27FC236}">
-                <a16:creationId xmlns:a16="http://schemas.microsoft.com/office/drawing/2014/main" id="{136D134C-51DF-45E3-9318-5A7BC527EEC7}"/>
+                <a16:creationId xmlns:a16="http://schemas.microsoft.com/office/drawing/2014/main" id="{5916C9DC-6635-4837-B79D-549484134EA7}"/>
               </a:ext>
             </a:extLst>
           </p:cNvPr>
@@ -29436,7 +29436,7 @@
           <p:cNvPr id="12" name="Shape 10">
             <a:extLst xmlns:a="http://schemas.openxmlformats.org/drawingml/2006/main">
               <a:ext uri="{FF2B5EF4-FFF2-40B4-BE49-F238E27FC236}">
-                <a16:creationId xmlns:a16="http://schemas.microsoft.com/office/drawing/2014/main" id="{BDD60231-3707-41AD-9DFA-475DB87ADC2F}"/>
+                <a16:creationId xmlns:a16="http://schemas.microsoft.com/office/drawing/2014/main" id="{87D5EB03-685F-4F80-9C76-A197B35715B1}"/>
               </a:ext>
             </a:extLst>
           </p:cNvPr>
@@ -29483,7 +29483,7 @@
           <p:cNvPr id="13" name="Shape 11">
             <a:extLst xmlns:a="http://schemas.openxmlformats.org/drawingml/2006/main">
               <a:ext uri="{FF2B5EF4-FFF2-40B4-BE49-F238E27FC236}">
-                <a16:creationId xmlns:a16="http://schemas.microsoft.com/office/drawing/2014/main" id="{8D8BB932-79B7-4139-B009-057591727F7D}"/>
+                <a16:creationId xmlns:a16="http://schemas.microsoft.com/office/drawing/2014/main" id="{6EFCC3FC-5068-4B47-9EAD-78D77E344D93}"/>
               </a:ext>
             </a:extLst>
           </p:cNvPr>
@@ -29521,7 +29521,7 @@
           <p:cNvPr id="14" name="Text 12">
             <a:extLst xmlns:a="http://schemas.openxmlformats.org/drawingml/2006/main">
               <a:ext uri="{FF2B5EF4-FFF2-40B4-BE49-F238E27FC236}">
-                <a16:creationId xmlns:a16="http://schemas.microsoft.com/office/drawing/2014/main" id="{A3A868EF-08BE-4BD0-B1C6-B420B0FE9CEA}"/>
+                <a16:creationId xmlns:a16="http://schemas.microsoft.com/office/drawing/2014/main" id="{4FF6841D-7756-499C-AA64-B04CCF3715F4}"/>
               </a:ext>
             </a:extLst>
           </p:cNvPr>
@@ -29566,7 +29566,7 @@
           <p:cNvPr id="15" name="Text 13">
             <a:extLst xmlns:a="http://schemas.openxmlformats.org/drawingml/2006/main">
               <a:ext uri="{FF2B5EF4-FFF2-40B4-BE49-F238E27FC236}">
-                <a16:creationId xmlns:a16="http://schemas.microsoft.com/office/drawing/2014/main" id="{90630511-88DC-4D12-AC5B-8F9D7838F699}"/>
+                <a16:creationId xmlns:a16="http://schemas.microsoft.com/office/drawing/2014/main" id="{3D85A232-69B8-4154-8ACF-8AA954E85FBA}"/>
               </a:ext>
             </a:extLst>
           </p:cNvPr>
@@ -29611,7 +29611,7 @@
           <p:cNvPr id="16" name="Text 14">
             <a:extLst xmlns:a="http://schemas.openxmlformats.org/drawingml/2006/main">
               <a:ext uri="{FF2B5EF4-FFF2-40B4-BE49-F238E27FC236}">
-                <a16:creationId xmlns:a16="http://schemas.microsoft.com/office/drawing/2014/main" id="{687F3B3D-1252-4DB3-A721-0F70D5E2C627}"/>
+                <a16:creationId xmlns:a16="http://schemas.microsoft.com/office/drawing/2014/main" id="{A247DA0A-EB24-4AF0-B760-D34B768E3C1D}"/>
               </a:ext>
             </a:extLst>
           </p:cNvPr>
@@ -29706,7 +29706,7 @@
           <p:cNvPr id="17" name="Shape 15">
             <a:extLst xmlns:a="http://schemas.openxmlformats.org/drawingml/2006/main">
               <a:ext uri="{FF2B5EF4-FFF2-40B4-BE49-F238E27FC236}">
-                <a16:creationId xmlns:a16="http://schemas.microsoft.com/office/drawing/2014/main" id="{38EB57C9-42F3-4651-AF36-CFC2A139A7A0}"/>
+                <a16:creationId xmlns:a16="http://schemas.microsoft.com/office/drawing/2014/main" id="{3CE574C1-E7AC-4556-BE97-FE042EC75C40}"/>
               </a:ext>
             </a:extLst>
           </p:cNvPr>
@@ -29744,7 +29744,7 @@
           <p:cNvPr id="18" name="Shape 16">
             <a:extLst xmlns:a="http://schemas.openxmlformats.org/drawingml/2006/main">
               <a:ext uri="{FF2B5EF4-FFF2-40B4-BE49-F238E27FC236}">
-                <a16:creationId xmlns:a16="http://schemas.microsoft.com/office/drawing/2014/main" id="{99AC3F95-970A-429E-AE5C-064FAB01B81E}"/>
+                <a16:creationId xmlns:a16="http://schemas.microsoft.com/office/drawing/2014/main" id="{E3B6508B-2ACD-47C0-86C1-E8409FED4BB1}"/>
               </a:ext>
             </a:extLst>
           </p:cNvPr>
@@ -29791,7 +29791,7 @@
           <p:cNvPr id="19" name="Shape 17">
             <a:extLst xmlns:a="http://schemas.openxmlformats.org/drawingml/2006/main">
               <a:ext uri="{FF2B5EF4-FFF2-40B4-BE49-F238E27FC236}">
-                <a16:creationId xmlns:a16="http://schemas.microsoft.com/office/drawing/2014/main" id="{18B6A46B-DB69-4C33-836F-F0B729DA5A8D}"/>
+                <a16:creationId xmlns:a16="http://schemas.microsoft.com/office/drawing/2014/main" id="{787DF5D3-910D-4D9D-B80E-D469D6A9F6DA}"/>
               </a:ext>
             </a:extLst>
           </p:cNvPr>
@@ -29829,7 +29829,7 @@
           <p:cNvPr id="20" name="Text 18">
             <a:extLst xmlns:a="http://schemas.openxmlformats.org/drawingml/2006/main">
               <a:ext uri="{FF2B5EF4-FFF2-40B4-BE49-F238E27FC236}">
-                <a16:creationId xmlns:a16="http://schemas.microsoft.com/office/drawing/2014/main" id="{9F0C98FB-CEBB-4FF5-B3BF-CBD70EDDADE4}"/>
+                <a16:creationId xmlns:a16="http://schemas.microsoft.com/office/drawing/2014/main" id="{8B818F1A-F937-47B4-9E65-8E42FA4DEE28}"/>
               </a:ext>
             </a:extLst>
           </p:cNvPr>
@@ -29874,7 +29874,7 @@
           <p:cNvPr id="21" name="Text 19">
             <a:extLst xmlns:a="http://schemas.openxmlformats.org/drawingml/2006/main">
               <a:ext uri="{FF2B5EF4-FFF2-40B4-BE49-F238E27FC236}">
-                <a16:creationId xmlns:a16="http://schemas.microsoft.com/office/drawing/2014/main" id="{9FCE5D7F-3232-4E01-A2EF-D2AD577D9BE3}"/>
+                <a16:creationId xmlns:a16="http://schemas.microsoft.com/office/drawing/2014/main" id="{B2BE3070-1FDD-46CB-81A4-E26A8553F47F}"/>
               </a:ext>
             </a:extLst>
           </p:cNvPr>
@@ -29919,7 +29919,7 @@
           <p:cNvPr id="22" name="Text 20">
             <a:extLst xmlns:a="http://schemas.openxmlformats.org/drawingml/2006/main">
               <a:ext uri="{FF2B5EF4-FFF2-40B4-BE49-F238E27FC236}">
-                <a16:creationId xmlns:a16="http://schemas.microsoft.com/office/drawing/2014/main" id="{BE316CC3-9161-4482-AFAD-448261D32742}"/>
+                <a16:creationId xmlns:a16="http://schemas.microsoft.com/office/drawing/2014/main" id="{741C94F2-FBBE-4600-8B02-700351C32D33}"/>
               </a:ext>
             </a:extLst>
           </p:cNvPr>
@@ -30014,7 +30014,7 @@
           <p:cNvPr id="23" name="Shape 21">
             <a:extLst xmlns:a="http://schemas.openxmlformats.org/drawingml/2006/main">
               <a:ext uri="{FF2B5EF4-FFF2-40B4-BE49-F238E27FC236}">
-                <a16:creationId xmlns:a16="http://schemas.microsoft.com/office/drawing/2014/main" id="{16879C53-3364-4E90-9CF0-6495655A4319}"/>
+                <a16:creationId xmlns:a16="http://schemas.microsoft.com/office/drawing/2014/main" id="{A2F6223C-2971-4590-9F3A-C202A9A14CAF}"/>
               </a:ext>
             </a:extLst>
           </p:cNvPr>
@@ -30061,7 +30061,7 @@
           <p:cNvPr id="24" name="Text 22">
             <a:extLst xmlns:a="http://schemas.openxmlformats.org/drawingml/2006/main">
               <a:ext uri="{FF2B5EF4-FFF2-40B4-BE49-F238E27FC236}">
-                <a16:creationId xmlns:a16="http://schemas.microsoft.com/office/drawing/2014/main" id="{BA55EFD1-6358-4555-999A-7BFEAFB0B993}"/>
+                <a16:creationId xmlns:a16="http://schemas.microsoft.com/office/drawing/2014/main" id="{1D7ECCB1-93E0-44FE-A3B4-A3F247552FA3}"/>
               </a:ext>
             </a:extLst>
           </p:cNvPr>
@@ -30106,7 +30106,7 @@
           <p:cNvPr id="25" name="Text 23">
             <a:extLst xmlns:a="http://schemas.openxmlformats.org/drawingml/2006/main">
               <a:ext uri="{FF2B5EF4-FFF2-40B4-BE49-F238E27FC236}">
-                <a16:creationId xmlns:a16="http://schemas.microsoft.com/office/drawing/2014/main" id="{56C91770-9DAF-4340-B48C-0A6C341BD432}"/>
+                <a16:creationId xmlns:a16="http://schemas.microsoft.com/office/drawing/2014/main" id="{33FC3096-9CA2-4295-8238-55393283434C}"/>
               </a:ext>
             </a:extLst>
           </p:cNvPr>
@@ -30154,7 +30154,7 @@
           <p:cNvPr id="26" name="Text 24">
             <a:extLst xmlns:a="http://schemas.openxmlformats.org/drawingml/2006/main">
               <a:ext uri="{FF2B5EF4-FFF2-40B4-BE49-F238E27FC236}">
-                <a16:creationId xmlns:a16="http://schemas.microsoft.com/office/drawing/2014/main" id="{D72314EA-C72A-4A8F-A372-1272AA261634}"/>
+                <a16:creationId xmlns:a16="http://schemas.microsoft.com/office/drawing/2014/main" id="{15F3817D-DAF2-4BA4-8331-F0305BF2CA89}"/>
               </a:ext>
             </a:extLst>
           </p:cNvPr>
@@ -30197,7 +30197,7 @@
     </p:spTree>
     <p:extLst>
       <p:ext uri="{BB962C8B-B14F-4D97-AF65-F5344CB8AC3E}">
-        <p14:creationId xmlns:p14="http://schemas.microsoft.com/office/powerpoint/2010/main" val="1052172232"/>
+        <p14:creationId xmlns:p14="http://schemas.microsoft.com/office/powerpoint/2010/main" val="1276104226"/>
       </p:ext>
     </p:extLst>
   </p:cSld>
@@ -30228,7 +30228,7 @@
           <p:cNvPr id="2" name="Text 0">
             <a:extLst xmlns:a="http://schemas.openxmlformats.org/drawingml/2006/main">
               <a:ext uri="{FF2B5EF4-FFF2-40B4-BE49-F238E27FC236}">
-                <a16:creationId xmlns:a16="http://schemas.microsoft.com/office/drawing/2014/main" id="{0691CFA9-633F-4814-93DA-ABC1D1F650C2}"/>
+                <a16:creationId xmlns:a16="http://schemas.microsoft.com/office/drawing/2014/main" id="{6AEF08F4-AB55-4414-9C16-DBDE3F2DDCF9}"/>
               </a:ext>
             </a:extLst>
           </p:cNvPr>
@@ -30273,7 +30273,7 @@
           <p:cNvPr id="3" name="Text 1">
             <a:extLst xmlns:a="http://schemas.openxmlformats.org/drawingml/2006/main">
               <a:ext uri="{FF2B5EF4-FFF2-40B4-BE49-F238E27FC236}">
-                <a16:creationId xmlns:a16="http://schemas.microsoft.com/office/drawing/2014/main" id="{F1BA691A-6ABF-423C-85FA-C28468545583}"/>
+                <a16:creationId xmlns:a16="http://schemas.microsoft.com/office/drawing/2014/main" id="{210CD9DC-CE6C-4751-B5FD-5B74CE4853DA}"/>
               </a:ext>
             </a:extLst>
           </p:cNvPr>
@@ -30318,7 +30318,7 @@
           <p:cNvPr id="4" name="Text 2">
             <a:extLst xmlns:a="http://schemas.openxmlformats.org/drawingml/2006/main">
               <a:ext uri="{FF2B5EF4-FFF2-40B4-BE49-F238E27FC236}">
-                <a16:creationId xmlns:a16="http://schemas.microsoft.com/office/drawing/2014/main" id="{7C4F4140-CDCD-4407-8C7E-3A716D94781A}"/>
+                <a16:creationId xmlns:a16="http://schemas.microsoft.com/office/drawing/2014/main" id="{57DB15BB-3A1A-46C3-ABAA-01C098B0C7CA}"/>
               </a:ext>
             </a:extLst>
           </p:cNvPr>
@@ -30363,7 +30363,7 @@
           <p:cNvPr id="5" name="Text 3">
             <a:extLst xmlns:a="http://schemas.openxmlformats.org/drawingml/2006/main">
               <a:ext uri="{FF2B5EF4-FFF2-40B4-BE49-F238E27FC236}">
-                <a16:creationId xmlns:a16="http://schemas.microsoft.com/office/drawing/2014/main" id="{8DBA8B97-657A-4B19-9D45-073229180E5C}"/>
+                <a16:creationId xmlns:a16="http://schemas.microsoft.com/office/drawing/2014/main" id="{250AA2F4-1FCB-48A1-B75F-F782859E2978}"/>
               </a:ext>
             </a:extLst>
           </p:cNvPr>
@@ -30408,7 +30408,7 @@
           <p:cNvPr id="6" name="Shape 4">
             <a:extLst xmlns:a="http://schemas.openxmlformats.org/drawingml/2006/main">
               <a:ext uri="{FF2B5EF4-FFF2-40B4-BE49-F238E27FC236}">
-                <a16:creationId xmlns:a16="http://schemas.microsoft.com/office/drawing/2014/main" id="{B44F8FDD-AAF9-47D2-9178-26372E71AD7D}"/>
+                <a16:creationId xmlns:a16="http://schemas.microsoft.com/office/drawing/2014/main" id="{94E2013B-2212-498A-B069-1EFA9C79AFE5}"/>
               </a:ext>
             </a:extLst>
           </p:cNvPr>
@@ -30446,7 +30446,7 @@
           <p:cNvPr id="7" name="Text 5">
             <a:extLst xmlns:a="http://schemas.openxmlformats.org/drawingml/2006/main">
               <a:ext uri="{FF2B5EF4-FFF2-40B4-BE49-F238E27FC236}">
-                <a16:creationId xmlns:a16="http://schemas.microsoft.com/office/drawing/2014/main" id="{7B57ECF5-2100-4AB4-8E67-2F1DEF9ACE57}"/>
+                <a16:creationId xmlns:a16="http://schemas.microsoft.com/office/drawing/2014/main" id="{B877AF27-3D45-4F02-93BE-06986BD724C6}"/>
               </a:ext>
             </a:extLst>
           </p:cNvPr>
@@ -30491,7 +30491,7 @@
           <p:cNvPr id="8" name="Text 6">
             <a:extLst xmlns:a="http://schemas.openxmlformats.org/drawingml/2006/main">
               <a:ext uri="{FF2B5EF4-FFF2-40B4-BE49-F238E27FC236}">
-                <a16:creationId xmlns:a16="http://schemas.microsoft.com/office/drawing/2014/main" id="{EF052E00-EF6A-494D-BCCC-8422270622DE}"/>
+                <a16:creationId xmlns:a16="http://schemas.microsoft.com/office/drawing/2014/main" id="{9D08B610-6C1E-4B2C-9594-85012C4C517F}"/>
               </a:ext>
             </a:extLst>
           </p:cNvPr>
@@ -30536,7 +30536,7 @@
           <p:cNvPr id="9" name="Text 7">
             <a:extLst xmlns:a="http://schemas.openxmlformats.org/drawingml/2006/main">
               <a:ext uri="{FF2B5EF4-FFF2-40B4-BE49-F238E27FC236}">
-                <a16:creationId xmlns:a16="http://schemas.microsoft.com/office/drawing/2014/main" id="{BFFD3EE6-829C-4E85-BBFD-5E7CCC2585C0}"/>
+                <a16:creationId xmlns:a16="http://schemas.microsoft.com/office/drawing/2014/main" id="{37DEF447-C56B-44D4-8C12-10756607795A}"/>
               </a:ext>
             </a:extLst>
           </p:cNvPr>
@@ -30584,7 +30584,7 @@
           <p:cNvPr id="10" name="Shape 8">
             <a:extLst xmlns:a="http://schemas.openxmlformats.org/drawingml/2006/main">
               <a:ext uri="{FF2B5EF4-FFF2-40B4-BE49-F238E27FC236}">
-                <a16:creationId xmlns:a16="http://schemas.microsoft.com/office/drawing/2014/main" id="{3242F6EA-461B-49F1-9FB9-5EC62A4C40BD}"/>
+                <a16:creationId xmlns:a16="http://schemas.microsoft.com/office/drawing/2014/main" id="{24C0B85E-56B7-4808-AEBB-58B0B5E17E90}"/>
               </a:ext>
             </a:extLst>
           </p:cNvPr>
@@ -30622,7 +30622,7 @@
           <p:cNvPr id="11" name="Text 9">
             <a:extLst xmlns:a="http://schemas.openxmlformats.org/drawingml/2006/main">
               <a:ext uri="{FF2B5EF4-FFF2-40B4-BE49-F238E27FC236}">
-                <a16:creationId xmlns:a16="http://schemas.microsoft.com/office/drawing/2014/main" id="{32D7F6CA-AF18-4B69-B8EC-2E91C640E8FD}"/>
+                <a16:creationId xmlns:a16="http://schemas.microsoft.com/office/drawing/2014/main" id="{33817395-1581-4211-BABF-ACA67E66D2C8}"/>
               </a:ext>
             </a:extLst>
           </p:cNvPr>
@@ -30667,7 +30667,7 @@
           <p:cNvPr id="12" name="Text 10">
             <a:extLst xmlns:a="http://schemas.openxmlformats.org/drawingml/2006/main">
               <a:ext uri="{FF2B5EF4-FFF2-40B4-BE49-F238E27FC236}">
-                <a16:creationId xmlns:a16="http://schemas.microsoft.com/office/drawing/2014/main" id="{10501138-DDC6-45A3-8FDE-D605172A28C4}"/>
+                <a16:creationId xmlns:a16="http://schemas.microsoft.com/office/drawing/2014/main" id="{23855CEA-CA6E-4349-B51C-02DE42DDBDF4}"/>
               </a:ext>
             </a:extLst>
           </p:cNvPr>
@@ -30712,7 +30712,7 @@
           <p:cNvPr id="13" name="Text 11">
             <a:extLst xmlns:a="http://schemas.openxmlformats.org/drawingml/2006/main">
               <a:ext uri="{FF2B5EF4-FFF2-40B4-BE49-F238E27FC236}">
-                <a16:creationId xmlns:a16="http://schemas.microsoft.com/office/drawing/2014/main" id="{00F87D36-C4A6-4D2A-B35F-1FA05D50CF3B}"/>
+                <a16:creationId xmlns:a16="http://schemas.microsoft.com/office/drawing/2014/main" id="{AD0F15DB-87BC-49A0-A1D7-032ED5CE52B5}"/>
               </a:ext>
             </a:extLst>
           </p:cNvPr>
@@ -30760,7 +30760,7 @@
           <p:cNvPr id="14" name="Shape 12">
             <a:extLst xmlns:a="http://schemas.openxmlformats.org/drawingml/2006/main">
               <a:ext uri="{FF2B5EF4-FFF2-40B4-BE49-F238E27FC236}">
-                <a16:creationId xmlns:a16="http://schemas.microsoft.com/office/drawing/2014/main" id="{AB152570-18AC-4D6B-ACAA-73606D9B5E41}"/>
+                <a16:creationId xmlns:a16="http://schemas.microsoft.com/office/drawing/2014/main" id="{9EEB0B5F-3004-4C2F-8C3B-A32B86D2F91F}"/>
               </a:ext>
             </a:extLst>
           </p:cNvPr>
@@ -30798,7 +30798,7 @@
           <p:cNvPr id="15" name="Text 13">
             <a:extLst xmlns:a="http://schemas.openxmlformats.org/drawingml/2006/main">
               <a:ext uri="{FF2B5EF4-FFF2-40B4-BE49-F238E27FC236}">
-                <a16:creationId xmlns:a16="http://schemas.microsoft.com/office/drawing/2014/main" id="{7E896B8F-B5D5-4AA2-9CFC-92D0EA46A6B5}"/>
+                <a16:creationId xmlns:a16="http://schemas.microsoft.com/office/drawing/2014/main" id="{795123CC-1FEC-402E-92F4-DAA2C637C20C}"/>
               </a:ext>
             </a:extLst>
           </p:cNvPr>
@@ -30843,7 +30843,7 @@
           <p:cNvPr id="16" name="Text 14">
             <a:extLst xmlns:a="http://schemas.openxmlformats.org/drawingml/2006/main">
               <a:ext uri="{FF2B5EF4-FFF2-40B4-BE49-F238E27FC236}">
-                <a16:creationId xmlns:a16="http://schemas.microsoft.com/office/drawing/2014/main" id="{39EFD2AA-A429-4833-A6BC-BE7C14EA4016}"/>
+                <a16:creationId xmlns:a16="http://schemas.microsoft.com/office/drawing/2014/main" id="{F4CDF31F-7037-491D-882A-0DFDCE8036AC}"/>
               </a:ext>
             </a:extLst>
           </p:cNvPr>
@@ -30888,7 +30888,7 @@
           <p:cNvPr id="17" name="Text 15">
             <a:extLst xmlns:a="http://schemas.openxmlformats.org/drawingml/2006/main">
               <a:ext uri="{FF2B5EF4-FFF2-40B4-BE49-F238E27FC236}">
-                <a16:creationId xmlns:a16="http://schemas.microsoft.com/office/drawing/2014/main" id="{58C82687-48A6-457D-8442-BF6C281A3776}"/>
+                <a16:creationId xmlns:a16="http://schemas.microsoft.com/office/drawing/2014/main" id="{097C3B3C-F67A-43A2-B79A-890B8AB073F0}"/>
               </a:ext>
             </a:extLst>
           </p:cNvPr>
@@ -30936,7 +30936,7 @@
           <p:cNvPr id="18" name="Shape 16">
             <a:extLst xmlns:a="http://schemas.openxmlformats.org/drawingml/2006/main">
               <a:ext uri="{FF2B5EF4-FFF2-40B4-BE49-F238E27FC236}">
-                <a16:creationId xmlns:a16="http://schemas.microsoft.com/office/drawing/2014/main" id="{B7D8A3AF-1443-4623-AC34-A1E36AEFE62A}"/>
+                <a16:creationId xmlns:a16="http://schemas.microsoft.com/office/drawing/2014/main" id="{CD02F384-894B-480B-B401-925DBD354832}"/>
               </a:ext>
             </a:extLst>
           </p:cNvPr>
@@ -30974,7 +30974,7 @@
           <p:cNvPr id="19" name="Text 17">
             <a:extLst xmlns:a="http://schemas.openxmlformats.org/drawingml/2006/main">
               <a:ext uri="{FF2B5EF4-FFF2-40B4-BE49-F238E27FC236}">
-                <a16:creationId xmlns:a16="http://schemas.microsoft.com/office/drawing/2014/main" id="{89C1CA70-5CFE-46D1-8A5F-0B339034F01B}"/>
+                <a16:creationId xmlns:a16="http://schemas.microsoft.com/office/drawing/2014/main" id="{1F6417A5-7B18-4AFA-B64B-EE506BC07531}"/>
               </a:ext>
             </a:extLst>
           </p:cNvPr>
@@ -31019,7 +31019,7 @@
           <p:cNvPr id="20" name="Text 18">
             <a:extLst xmlns:a="http://schemas.openxmlformats.org/drawingml/2006/main">
               <a:ext uri="{FF2B5EF4-FFF2-40B4-BE49-F238E27FC236}">
-                <a16:creationId xmlns:a16="http://schemas.microsoft.com/office/drawing/2014/main" id="{048FACA7-4D80-4504-8F72-2CB400BD4B4E}"/>
+                <a16:creationId xmlns:a16="http://schemas.microsoft.com/office/drawing/2014/main" id="{70575F60-18EC-480F-95FE-EFF8F11C71B4}"/>
               </a:ext>
             </a:extLst>
           </p:cNvPr>
@@ -31064,7 +31064,7 @@
           <p:cNvPr id="21" name="Text 19">
             <a:extLst xmlns:a="http://schemas.openxmlformats.org/drawingml/2006/main">
               <a:ext uri="{FF2B5EF4-FFF2-40B4-BE49-F238E27FC236}">
-                <a16:creationId xmlns:a16="http://schemas.microsoft.com/office/drawing/2014/main" id="{B5DCC567-AFE7-4A40-B370-F8FB9DD81E96}"/>
+                <a16:creationId xmlns:a16="http://schemas.microsoft.com/office/drawing/2014/main" id="{71D13AD3-3124-460C-8BB8-3E333273A2E0}"/>
               </a:ext>
             </a:extLst>
           </p:cNvPr>
@@ -31112,7 +31112,7 @@
           <p:cNvPr id="22" name="Shape 20">
             <a:extLst xmlns:a="http://schemas.openxmlformats.org/drawingml/2006/main">
               <a:ext uri="{FF2B5EF4-FFF2-40B4-BE49-F238E27FC236}">
-                <a16:creationId xmlns:a16="http://schemas.microsoft.com/office/drawing/2014/main" id="{98749983-5E74-4339-AE7D-DD1469C96779}"/>
+                <a16:creationId xmlns:a16="http://schemas.microsoft.com/office/drawing/2014/main" id="{C49206EB-6421-4ECD-A03A-7833E6A2CD71}"/>
               </a:ext>
             </a:extLst>
           </p:cNvPr>
@@ -31150,7 +31150,7 @@
           <p:cNvPr id="23" name="Text 21">
             <a:extLst xmlns:a="http://schemas.openxmlformats.org/drawingml/2006/main">
               <a:ext uri="{FF2B5EF4-FFF2-40B4-BE49-F238E27FC236}">
-                <a16:creationId xmlns:a16="http://schemas.microsoft.com/office/drawing/2014/main" id="{14D1A348-39FE-4617-AE61-A6747DAA948A}"/>
+                <a16:creationId xmlns:a16="http://schemas.microsoft.com/office/drawing/2014/main" id="{6B8F5D26-95D3-443A-B062-04C6B85DB369}"/>
               </a:ext>
             </a:extLst>
           </p:cNvPr>
@@ -31195,7 +31195,7 @@
           <p:cNvPr id="24" name="Text 22">
             <a:extLst xmlns:a="http://schemas.openxmlformats.org/drawingml/2006/main">
               <a:ext uri="{FF2B5EF4-FFF2-40B4-BE49-F238E27FC236}">
-                <a16:creationId xmlns:a16="http://schemas.microsoft.com/office/drawing/2014/main" id="{EF172C33-5494-456D-B37F-B0A34D396194}"/>
+                <a16:creationId xmlns:a16="http://schemas.microsoft.com/office/drawing/2014/main" id="{8C9F6DE9-5B19-4A14-BC58-2BDA6F3E014B}"/>
               </a:ext>
             </a:extLst>
           </p:cNvPr>
@@ -31240,7 +31240,7 @@
           <p:cNvPr id="25" name="Text 23">
             <a:extLst xmlns:a="http://schemas.openxmlformats.org/drawingml/2006/main">
               <a:ext uri="{FF2B5EF4-FFF2-40B4-BE49-F238E27FC236}">
-                <a16:creationId xmlns:a16="http://schemas.microsoft.com/office/drawing/2014/main" id="{2744CC00-0489-4F81-AC04-776217F2B71A}"/>
+                <a16:creationId xmlns:a16="http://schemas.microsoft.com/office/drawing/2014/main" id="{DF3A52A6-29FE-4D0C-B202-C9ECA6437EF2}"/>
               </a:ext>
             </a:extLst>
           </p:cNvPr>
@@ -31288,7 +31288,7 @@
           <p:cNvPr id="26" name="Shape 24">
             <a:extLst xmlns:a="http://schemas.openxmlformats.org/drawingml/2006/main">
               <a:ext uri="{FF2B5EF4-FFF2-40B4-BE49-F238E27FC236}">
-                <a16:creationId xmlns:a16="http://schemas.microsoft.com/office/drawing/2014/main" id="{98DE72EF-6D8F-4C74-8201-E624ACD1B8D6}"/>
+                <a16:creationId xmlns:a16="http://schemas.microsoft.com/office/drawing/2014/main" id="{467459E6-4A5E-4BE0-8311-10C92734D64B}"/>
               </a:ext>
             </a:extLst>
           </p:cNvPr>
@@ -31326,7 +31326,7 @@
           <p:cNvPr id="27" name="Text 25">
             <a:extLst xmlns:a="http://schemas.openxmlformats.org/drawingml/2006/main">
               <a:ext uri="{FF2B5EF4-FFF2-40B4-BE49-F238E27FC236}">
-                <a16:creationId xmlns:a16="http://schemas.microsoft.com/office/drawing/2014/main" id="{37248FC4-FB3C-4E14-BD65-A543EB713923}"/>
+                <a16:creationId xmlns:a16="http://schemas.microsoft.com/office/drawing/2014/main" id="{3057AA67-828F-4308-AE96-0E96F1B9A15D}"/>
               </a:ext>
             </a:extLst>
           </p:cNvPr>
@@ -31371,7 +31371,7 @@
           <p:cNvPr id="28" name="Text 26">
             <a:extLst xmlns:a="http://schemas.openxmlformats.org/drawingml/2006/main">
               <a:ext uri="{FF2B5EF4-FFF2-40B4-BE49-F238E27FC236}">
-                <a16:creationId xmlns:a16="http://schemas.microsoft.com/office/drawing/2014/main" id="{93B593CA-A9CC-4D09-B6BF-FE30DB48719F}"/>
+                <a16:creationId xmlns:a16="http://schemas.microsoft.com/office/drawing/2014/main" id="{D576EFA7-F299-44FF-AB82-0B5BC184DACB}"/>
               </a:ext>
             </a:extLst>
           </p:cNvPr>
@@ -31416,7 +31416,7 @@
           <p:cNvPr id="29" name="Text 27">
             <a:extLst xmlns:a="http://schemas.openxmlformats.org/drawingml/2006/main">
               <a:ext uri="{FF2B5EF4-FFF2-40B4-BE49-F238E27FC236}">
-                <a16:creationId xmlns:a16="http://schemas.microsoft.com/office/drawing/2014/main" id="{D495075C-4C52-4FF8-8AA6-01B2A19D8F9E}"/>
+                <a16:creationId xmlns:a16="http://schemas.microsoft.com/office/drawing/2014/main" id="{800B10C9-BA3E-4A38-8890-C03149A525C8}"/>
               </a:ext>
             </a:extLst>
           </p:cNvPr>
@@ -31464,7 +31464,7 @@
           <p:cNvPr id="30" name="Shape 28">
             <a:extLst xmlns:a="http://schemas.openxmlformats.org/drawingml/2006/main">
               <a:ext uri="{FF2B5EF4-FFF2-40B4-BE49-F238E27FC236}">
-                <a16:creationId xmlns:a16="http://schemas.microsoft.com/office/drawing/2014/main" id="{FB0F4B66-E515-404A-98FF-0627177EA0BB}"/>
+                <a16:creationId xmlns:a16="http://schemas.microsoft.com/office/drawing/2014/main" id="{B116B8C8-F922-4674-9F20-87EB94527E05}"/>
               </a:ext>
             </a:extLst>
           </p:cNvPr>
@@ -31511,7 +31511,7 @@
           <p:cNvPr id="31" name="Text 29">
             <a:extLst xmlns:a="http://schemas.openxmlformats.org/drawingml/2006/main">
               <a:ext uri="{FF2B5EF4-FFF2-40B4-BE49-F238E27FC236}">
-                <a16:creationId xmlns:a16="http://schemas.microsoft.com/office/drawing/2014/main" id="{F5266C53-B785-4F19-A628-DC54A6B6B8F2}"/>
+                <a16:creationId xmlns:a16="http://schemas.microsoft.com/office/drawing/2014/main" id="{86EE92C5-A0C7-4207-902A-7ADE08B3560B}"/>
               </a:ext>
             </a:extLst>
           </p:cNvPr>
@@ -31557,7 +31557,7 @@
     </p:spTree>
     <p:extLst>
       <p:ext uri="{BB962C8B-B14F-4D97-AF65-F5344CB8AC3E}">
-        <p14:creationId xmlns:p14="http://schemas.microsoft.com/office/powerpoint/2010/main" val="178851970"/>
+        <p14:creationId xmlns:p14="http://schemas.microsoft.com/office/powerpoint/2010/main" val="113090164"/>
       </p:ext>
     </p:extLst>
   </p:cSld>
@@ -31588,7 +31588,7 @@
           <p:cNvPr id="2" name="Text 0">
             <a:extLst xmlns:a="http://schemas.openxmlformats.org/drawingml/2006/main">
               <a:ext uri="{FF2B5EF4-FFF2-40B4-BE49-F238E27FC236}">
-                <a16:creationId xmlns:a16="http://schemas.microsoft.com/office/drawing/2014/main" id="{375D2AE4-2EA6-4CBD-9ED6-EC05B892E88D}"/>
+                <a16:creationId xmlns:a16="http://schemas.microsoft.com/office/drawing/2014/main" id="{BF494A68-57FF-4F02-9FD9-198D0659E413}"/>
               </a:ext>
             </a:extLst>
           </p:cNvPr>
@@ -31633,7 +31633,7 @@
           <p:cNvPr id="3" name="Text 1">
             <a:extLst xmlns:a="http://schemas.openxmlformats.org/drawingml/2006/main">
               <a:ext uri="{FF2B5EF4-FFF2-40B4-BE49-F238E27FC236}">
-                <a16:creationId xmlns:a16="http://schemas.microsoft.com/office/drawing/2014/main" id="{C699BA56-B8CC-40BC-BF2B-180F33C069E9}"/>
+                <a16:creationId xmlns:a16="http://schemas.microsoft.com/office/drawing/2014/main" id="{AF0E11E0-6407-44ED-8F95-2C6F751FE71A}"/>
               </a:ext>
             </a:extLst>
           </p:cNvPr>
@@ -31678,7 +31678,7 @@
           <p:cNvPr id="4" name="Text 2">
             <a:extLst xmlns:a="http://schemas.openxmlformats.org/drawingml/2006/main">
               <a:ext uri="{FF2B5EF4-FFF2-40B4-BE49-F238E27FC236}">
-                <a16:creationId xmlns:a16="http://schemas.microsoft.com/office/drawing/2014/main" id="{8CBB9103-1B61-4471-A11E-383CB9124CBE}"/>
+                <a16:creationId xmlns:a16="http://schemas.microsoft.com/office/drawing/2014/main" id="{F87D1E17-B9BE-4A8A-B5AD-34FF5A268864}"/>
               </a:ext>
             </a:extLst>
           </p:cNvPr>
@@ -31723,7 +31723,7 @@
           <p:cNvPr id="5" name="Text 3">
             <a:extLst xmlns:a="http://schemas.openxmlformats.org/drawingml/2006/main">
               <a:ext uri="{FF2B5EF4-FFF2-40B4-BE49-F238E27FC236}">
-                <a16:creationId xmlns:a16="http://schemas.microsoft.com/office/drawing/2014/main" id="{2E106DD9-B6C0-42BB-9342-8A0A337B0A01}"/>
+                <a16:creationId xmlns:a16="http://schemas.microsoft.com/office/drawing/2014/main" id="{016A16CE-2EF2-4EFB-B45D-A2E54CE00B24}"/>
               </a:ext>
             </a:extLst>
           </p:cNvPr>
@@ -31768,7 +31768,7 @@
           <p:cNvPr id="6" name="Text 4">
             <a:extLst xmlns:a="http://schemas.openxmlformats.org/drawingml/2006/main">
               <a:ext uri="{FF2B5EF4-FFF2-40B4-BE49-F238E27FC236}">
-                <a16:creationId xmlns:a16="http://schemas.microsoft.com/office/drawing/2014/main" id="{5566A30E-FDD3-421E-9C31-36121FBB3D35}"/>
+                <a16:creationId xmlns:a16="http://schemas.microsoft.com/office/drawing/2014/main" id="{6745680C-1AA1-42E3-AD40-3EE5E7F7CE80}"/>
               </a:ext>
             </a:extLst>
           </p:cNvPr>
@@ -31816,7 +31816,7 @@
           <p:cNvPr id="7" name="Shape 5">
             <a:extLst xmlns:a="http://schemas.openxmlformats.org/drawingml/2006/main">
               <a:ext uri="{FF2B5EF4-FFF2-40B4-BE49-F238E27FC236}">
-                <a16:creationId xmlns:a16="http://schemas.microsoft.com/office/drawing/2014/main" id="{34D132E3-1FDB-49BF-8D8A-C2B96E586A7B}"/>
+                <a16:creationId xmlns:a16="http://schemas.microsoft.com/office/drawing/2014/main" id="{257BDB95-66D1-41FB-B204-2D0EB821C29D}"/>
               </a:ext>
             </a:extLst>
           </p:cNvPr>
@@ -31863,7 +31863,7 @@
           <p:cNvPr id="8" name="Shape 6">
             <a:extLst xmlns:a="http://schemas.openxmlformats.org/drawingml/2006/main">
               <a:ext uri="{FF2B5EF4-FFF2-40B4-BE49-F238E27FC236}">
-                <a16:creationId xmlns:a16="http://schemas.microsoft.com/office/drawing/2014/main" id="{965C6C7A-A4CF-4BD4-AAA0-D0731CB18D7B}"/>
+                <a16:creationId xmlns:a16="http://schemas.microsoft.com/office/drawing/2014/main" id="{7D52081A-F850-4EC8-8A32-14E6814491C4}"/>
               </a:ext>
             </a:extLst>
           </p:cNvPr>
@@ -31901,7 +31901,7 @@
           <p:cNvPr id="9" name="Text 7">
             <a:extLst xmlns:a="http://schemas.openxmlformats.org/drawingml/2006/main">
               <a:ext uri="{FF2B5EF4-FFF2-40B4-BE49-F238E27FC236}">
-                <a16:creationId xmlns:a16="http://schemas.microsoft.com/office/drawing/2014/main" id="{4911733A-7B5A-495A-8BEE-3A9B8CFCCC93}"/>
+                <a16:creationId xmlns:a16="http://schemas.microsoft.com/office/drawing/2014/main" id="{6F436092-4CCA-4D05-BB57-71B2D3C2F070}"/>
               </a:ext>
             </a:extLst>
           </p:cNvPr>
@@ -31946,7 +31946,7 @@
           <p:cNvPr id="10" name="Text 8">
             <a:extLst xmlns:a="http://schemas.openxmlformats.org/drawingml/2006/main">
               <a:ext uri="{FF2B5EF4-FFF2-40B4-BE49-F238E27FC236}">
-                <a16:creationId xmlns:a16="http://schemas.microsoft.com/office/drawing/2014/main" id="{9CFF791F-002A-4F9A-A533-9ED7371A120E}"/>
+                <a16:creationId xmlns:a16="http://schemas.microsoft.com/office/drawing/2014/main" id="{407DE302-AC27-4E3B-8F20-C80D9374BE0B}"/>
               </a:ext>
             </a:extLst>
           </p:cNvPr>
@@ -31991,7 +31991,7 @@
           <p:cNvPr id="11" name="Text 9">
             <a:extLst xmlns:a="http://schemas.openxmlformats.org/drawingml/2006/main">
               <a:ext uri="{FF2B5EF4-FFF2-40B4-BE49-F238E27FC236}">
-                <a16:creationId xmlns:a16="http://schemas.microsoft.com/office/drawing/2014/main" id="{246BB11D-1E8C-4237-82F9-537DE88F8492}"/>
+                <a16:creationId xmlns:a16="http://schemas.microsoft.com/office/drawing/2014/main" id="{15EC22C8-8176-4A3D-B892-0D8B77C292A3}"/>
               </a:ext>
             </a:extLst>
           </p:cNvPr>
@@ -32039,7 +32039,7 @@
           <p:cNvPr id="12" name="Shape 10">
             <a:extLst xmlns:a="http://schemas.openxmlformats.org/drawingml/2006/main">
               <a:ext uri="{FF2B5EF4-FFF2-40B4-BE49-F238E27FC236}">
-                <a16:creationId xmlns:a16="http://schemas.microsoft.com/office/drawing/2014/main" id="{93459DC0-8312-449C-BA86-FBFE0187EA46}"/>
+                <a16:creationId xmlns:a16="http://schemas.microsoft.com/office/drawing/2014/main" id="{D5103447-BC45-40E3-8BEE-0CF69FAD726B}"/>
               </a:ext>
             </a:extLst>
           </p:cNvPr>
@@ -32086,7 +32086,7 @@
           <p:cNvPr id="13" name="Shape 11">
             <a:extLst xmlns:a="http://schemas.openxmlformats.org/drawingml/2006/main">
               <a:ext uri="{FF2B5EF4-FFF2-40B4-BE49-F238E27FC236}">
-                <a16:creationId xmlns:a16="http://schemas.microsoft.com/office/drawing/2014/main" id="{B69874EA-84ED-4050-862A-B976E8EC0BA1}"/>
+                <a16:creationId xmlns:a16="http://schemas.microsoft.com/office/drawing/2014/main" id="{7DCE93C5-2809-48CE-8672-A835C17076E5}"/>
               </a:ext>
             </a:extLst>
           </p:cNvPr>
@@ -32124,7 +32124,7 @@
           <p:cNvPr id="14" name="Text 12">
             <a:extLst xmlns:a="http://schemas.openxmlformats.org/drawingml/2006/main">
               <a:ext uri="{FF2B5EF4-FFF2-40B4-BE49-F238E27FC236}">
-                <a16:creationId xmlns:a16="http://schemas.microsoft.com/office/drawing/2014/main" id="{C3FB1472-D313-486B-9F6A-6E698D9DF62D}"/>
+                <a16:creationId xmlns:a16="http://schemas.microsoft.com/office/drawing/2014/main" id="{9B5DEF8C-2D99-4F68-840A-58E131147791}"/>
               </a:ext>
             </a:extLst>
           </p:cNvPr>
@@ -32169,7 +32169,7 @@
           <p:cNvPr id="15" name="Text 13">
             <a:extLst xmlns:a="http://schemas.openxmlformats.org/drawingml/2006/main">
               <a:ext uri="{FF2B5EF4-FFF2-40B4-BE49-F238E27FC236}">
-                <a16:creationId xmlns:a16="http://schemas.microsoft.com/office/drawing/2014/main" id="{89C9E306-AE45-40D3-BAE1-73FE7FC4FE74}"/>
+                <a16:creationId xmlns:a16="http://schemas.microsoft.com/office/drawing/2014/main" id="{0130EAFB-AB7C-4244-B72E-30D507441FE2}"/>
               </a:ext>
             </a:extLst>
           </p:cNvPr>
@@ -32214,7 +32214,7 @@
           <p:cNvPr id="16" name="Text 14">
             <a:extLst xmlns:a="http://schemas.openxmlformats.org/drawingml/2006/main">
               <a:ext uri="{FF2B5EF4-FFF2-40B4-BE49-F238E27FC236}">
-                <a16:creationId xmlns:a16="http://schemas.microsoft.com/office/drawing/2014/main" id="{076A6327-541F-4239-91C2-8B3C448B11E0}"/>
+                <a16:creationId xmlns:a16="http://schemas.microsoft.com/office/drawing/2014/main" id="{545F449C-C1A4-45B6-A4AF-680C22AE7ECA}"/>
               </a:ext>
             </a:extLst>
           </p:cNvPr>
@@ -32262,7 +32262,7 @@
           <p:cNvPr id="17" name="Shape 15">
             <a:extLst xmlns:a="http://schemas.openxmlformats.org/drawingml/2006/main">
               <a:ext uri="{FF2B5EF4-FFF2-40B4-BE49-F238E27FC236}">
-                <a16:creationId xmlns:a16="http://schemas.microsoft.com/office/drawing/2014/main" id="{D2B3CF56-36FF-4843-A0A9-FD56E240B1BF}"/>
+                <a16:creationId xmlns:a16="http://schemas.microsoft.com/office/drawing/2014/main" id="{829B5711-BD90-42A1-A35F-3F02A5EC5544}"/>
               </a:ext>
             </a:extLst>
           </p:cNvPr>
@@ -32309,7 +32309,7 @@
           <p:cNvPr id="18" name="Shape 16">
             <a:extLst xmlns:a="http://schemas.openxmlformats.org/drawingml/2006/main">
               <a:ext uri="{FF2B5EF4-FFF2-40B4-BE49-F238E27FC236}">
-                <a16:creationId xmlns:a16="http://schemas.microsoft.com/office/drawing/2014/main" id="{7A52D49C-3D54-4DB3-8C5A-1AAA977E00CB}"/>
+                <a16:creationId xmlns:a16="http://schemas.microsoft.com/office/drawing/2014/main" id="{41CFC8EB-ABA6-4289-B42D-2ADE61DDA611}"/>
               </a:ext>
             </a:extLst>
           </p:cNvPr>
@@ -32347,7 +32347,7 @@
           <p:cNvPr id="19" name="Text 17">
             <a:extLst xmlns:a="http://schemas.openxmlformats.org/drawingml/2006/main">
               <a:ext uri="{FF2B5EF4-FFF2-40B4-BE49-F238E27FC236}">
-                <a16:creationId xmlns:a16="http://schemas.microsoft.com/office/drawing/2014/main" id="{47090BED-0F18-4C8B-B221-9623C4E02522}"/>
+                <a16:creationId xmlns:a16="http://schemas.microsoft.com/office/drawing/2014/main" id="{B35CABF1-2EFD-46E5-9F04-A65F7946EAC5}"/>
               </a:ext>
             </a:extLst>
           </p:cNvPr>
@@ -32392,7 +32392,7 @@
           <p:cNvPr id="20" name="Text 18">
             <a:extLst xmlns:a="http://schemas.openxmlformats.org/drawingml/2006/main">
               <a:ext uri="{FF2B5EF4-FFF2-40B4-BE49-F238E27FC236}">
-                <a16:creationId xmlns:a16="http://schemas.microsoft.com/office/drawing/2014/main" id="{C8AB27AC-FD36-4449-B6FE-4E7F51CFEA80}"/>
+                <a16:creationId xmlns:a16="http://schemas.microsoft.com/office/drawing/2014/main" id="{BBD1CAC1-E5E6-40C0-84F8-0219A310B7D9}"/>
               </a:ext>
             </a:extLst>
           </p:cNvPr>
@@ -32437,7 +32437,7 @@
           <p:cNvPr id="21" name="Text 19">
             <a:extLst xmlns:a="http://schemas.openxmlformats.org/drawingml/2006/main">
               <a:ext uri="{FF2B5EF4-FFF2-40B4-BE49-F238E27FC236}">
-                <a16:creationId xmlns:a16="http://schemas.microsoft.com/office/drawing/2014/main" id="{230401BD-FC5B-401B-B9B2-8C200D882498}"/>
+                <a16:creationId xmlns:a16="http://schemas.microsoft.com/office/drawing/2014/main" id="{837E4D88-4C7B-4075-A27B-5BAE564B3F92}"/>
               </a:ext>
             </a:extLst>
           </p:cNvPr>
@@ -32485,7 +32485,7 @@
           <p:cNvPr id="22" name="Text 20">
             <a:extLst xmlns:a="http://schemas.openxmlformats.org/drawingml/2006/main">
               <a:ext uri="{FF2B5EF4-FFF2-40B4-BE49-F238E27FC236}">
-                <a16:creationId xmlns:a16="http://schemas.microsoft.com/office/drawing/2014/main" id="{5383C563-7B96-437F-8F4E-619F570C6964}"/>
+                <a16:creationId xmlns:a16="http://schemas.microsoft.com/office/drawing/2014/main" id="{3439C423-A626-499E-8749-C1D29BF597EF}"/>
               </a:ext>
             </a:extLst>
           </p:cNvPr>
@@ -32530,7 +32530,7 @@
           <p:cNvPr id="23" name="Shape 21">
             <a:extLst xmlns:a="http://schemas.openxmlformats.org/drawingml/2006/main">
               <a:ext uri="{FF2B5EF4-FFF2-40B4-BE49-F238E27FC236}">
-                <a16:creationId xmlns:a16="http://schemas.microsoft.com/office/drawing/2014/main" id="{33B4C19E-F176-430A-AE1D-CEE808ECF05A}"/>
+                <a16:creationId xmlns:a16="http://schemas.microsoft.com/office/drawing/2014/main" id="{337A23F9-FF0D-4192-91DA-5CFE9FC4DA5A}"/>
               </a:ext>
             </a:extLst>
           </p:cNvPr>
@@ -32577,7 +32577,7 @@
           <p:cNvPr id="24" name="Text 22">
             <a:extLst xmlns:a="http://schemas.openxmlformats.org/drawingml/2006/main">
               <a:ext uri="{FF2B5EF4-FFF2-40B4-BE49-F238E27FC236}">
-                <a16:creationId xmlns:a16="http://schemas.microsoft.com/office/drawing/2014/main" id="{C6172FF6-277C-4720-86AB-8969F5016DCB}"/>
+                <a16:creationId xmlns:a16="http://schemas.microsoft.com/office/drawing/2014/main" id="{1E378927-2C57-4230-BDBB-676BD9C93FF3}"/>
               </a:ext>
             </a:extLst>
           </p:cNvPr>
@@ -32622,7 +32622,7 @@
           <p:cNvPr id="25" name="Text 23">
             <a:extLst xmlns:a="http://schemas.openxmlformats.org/drawingml/2006/main">
               <a:ext uri="{FF2B5EF4-FFF2-40B4-BE49-F238E27FC236}">
-                <a16:creationId xmlns:a16="http://schemas.microsoft.com/office/drawing/2014/main" id="{59DBF53A-C3B8-414B-8D2F-3A66CE649DBC}"/>
+                <a16:creationId xmlns:a16="http://schemas.microsoft.com/office/drawing/2014/main" id="{C93ABC84-F224-4F5E-B921-ACE247FFDCD6}"/>
               </a:ext>
             </a:extLst>
           </p:cNvPr>
@@ -32689,7 +32689,7 @@
           <p:cNvPr id="26" name="Shape 24">
             <a:extLst xmlns:a="http://schemas.openxmlformats.org/drawingml/2006/main">
               <a:ext uri="{FF2B5EF4-FFF2-40B4-BE49-F238E27FC236}">
-                <a16:creationId xmlns:a16="http://schemas.microsoft.com/office/drawing/2014/main" id="{20F472BD-CD87-44FB-9704-D2C92EC3B7E3}"/>
+                <a16:creationId xmlns:a16="http://schemas.microsoft.com/office/drawing/2014/main" id="{01CB446A-C79C-49BC-9B52-30039FEB268A}"/>
               </a:ext>
             </a:extLst>
           </p:cNvPr>
@@ -32736,7 +32736,7 @@
           <p:cNvPr id="27" name="Text 25">
             <a:extLst xmlns:a="http://schemas.openxmlformats.org/drawingml/2006/main">
               <a:ext uri="{FF2B5EF4-FFF2-40B4-BE49-F238E27FC236}">
-                <a16:creationId xmlns:a16="http://schemas.microsoft.com/office/drawing/2014/main" id="{BF463728-267E-4E91-870A-6D8B40BE7C5E}"/>
+                <a16:creationId xmlns:a16="http://schemas.microsoft.com/office/drawing/2014/main" id="{C67F06C1-B85A-4FBD-80D5-85D2A774AE10}"/>
               </a:ext>
             </a:extLst>
           </p:cNvPr>
@@ -32781,7 +32781,7 @@
           <p:cNvPr id="28" name="Text 26">
             <a:extLst xmlns:a="http://schemas.openxmlformats.org/drawingml/2006/main">
               <a:ext uri="{FF2B5EF4-FFF2-40B4-BE49-F238E27FC236}">
-                <a16:creationId xmlns:a16="http://schemas.microsoft.com/office/drawing/2014/main" id="{37E2A82B-9F32-4BAE-AA3B-46A5DF3F2D3E}"/>
+                <a16:creationId xmlns:a16="http://schemas.microsoft.com/office/drawing/2014/main" id="{CB074792-7CD4-4370-B6FA-2508BCDE912F}"/>
               </a:ext>
             </a:extLst>
           </p:cNvPr>
@@ -32848,7 +32848,7 @@
           <p:cNvPr id="29" name="Shape 27">
             <a:extLst xmlns:a="http://schemas.openxmlformats.org/drawingml/2006/main">
               <a:ext uri="{FF2B5EF4-FFF2-40B4-BE49-F238E27FC236}">
-                <a16:creationId xmlns:a16="http://schemas.microsoft.com/office/drawing/2014/main" id="{C07E1B5B-3180-4995-AD7D-DA2B0E443653}"/>
+                <a16:creationId xmlns:a16="http://schemas.microsoft.com/office/drawing/2014/main" id="{68C46272-EB2D-4B24-93B0-7A25574477AB}"/>
               </a:ext>
             </a:extLst>
           </p:cNvPr>
@@ -32895,7 +32895,7 @@
           <p:cNvPr id="30" name="Text 28">
             <a:extLst xmlns:a="http://schemas.openxmlformats.org/drawingml/2006/main">
               <a:ext uri="{FF2B5EF4-FFF2-40B4-BE49-F238E27FC236}">
-                <a16:creationId xmlns:a16="http://schemas.microsoft.com/office/drawing/2014/main" id="{C43C7B6F-4A59-4DD6-90EA-C7FF89C3D0CC}"/>
+                <a16:creationId xmlns:a16="http://schemas.microsoft.com/office/drawing/2014/main" id="{EEB9EAC1-4F0F-4DBD-BD20-AAE9F5A42E1F}"/>
               </a:ext>
             </a:extLst>
           </p:cNvPr>
@@ -32940,7 +32940,7 @@
           <p:cNvPr id="31" name="Text 29">
             <a:extLst xmlns:a="http://schemas.openxmlformats.org/drawingml/2006/main">
               <a:ext uri="{FF2B5EF4-FFF2-40B4-BE49-F238E27FC236}">
-                <a16:creationId xmlns:a16="http://schemas.microsoft.com/office/drawing/2014/main" id="{7AE5B250-C391-47D5-BDF7-60FBAD0D8FB4}"/>
+                <a16:creationId xmlns:a16="http://schemas.microsoft.com/office/drawing/2014/main" id="{17C89455-F709-4D7B-B872-F2F423B7E6A7}"/>
               </a:ext>
             </a:extLst>
           </p:cNvPr>
@@ -33007,7 +33007,7 @@
           <p:cNvPr id="32" name="Shape 30">
             <a:extLst xmlns:a="http://schemas.openxmlformats.org/drawingml/2006/main">
               <a:ext uri="{FF2B5EF4-FFF2-40B4-BE49-F238E27FC236}">
-                <a16:creationId xmlns:a16="http://schemas.microsoft.com/office/drawing/2014/main" id="{C0023022-7E67-4F99-91BE-656971D14B31}"/>
+                <a16:creationId xmlns:a16="http://schemas.microsoft.com/office/drawing/2014/main" id="{F8146442-8BB5-4BB3-A35E-50297A6CD769}"/>
               </a:ext>
             </a:extLst>
           </p:cNvPr>
@@ -33054,7 +33054,7 @@
           <p:cNvPr id="33" name="Text 31">
             <a:extLst xmlns:a="http://schemas.openxmlformats.org/drawingml/2006/main">
               <a:ext uri="{FF2B5EF4-FFF2-40B4-BE49-F238E27FC236}">
-                <a16:creationId xmlns:a16="http://schemas.microsoft.com/office/drawing/2014/main" id="{89BE4D85-F85B-4589-B93F-35BC85A78A17}"/>
+                <a16:creationId xmlns:a16="http://schemas.microsoft.com/office/drawing/2014/main" id="{28237682-FE43-4DA3-BC7C-52D4A3E985E8}"/>
               </a:ext>
             </a:extLst>
           </p:cNvPr>
@@ -33099,7 +33099,7 @@
           <p:cNvPr id="34" name="Text 32">
             <a:extLst xmlns:a="http://schemas.openxmlformats.org/drawingml/2006/main">
               <a:ext uri="{FF2B5EF4-FFF2-40B4-BE49-F238E27FC236}">
-                <a16:creationId xmlns:a16="http://schemas.microsoft.com/office/drawing/2014/main" id="{F4813B4F-601F-4381-819F-9CD63B1C7DEE}"/>
+                <a16:creationId xmlns:a16="http://schemas.microsoft.com/office/drawing/2014/main" id="{F490D661-4140-49D8-9726-EEA97FB737CF}"/>
               </a:ext>
             </a:extLst>
           </p:cNvPr>
@@ -33166,7 +33166,7 @@
           <p:cNvPr id="35" name="Shape 33">
             <a:extLst xmlns:a="http://schemas.openxmlformats.org/drawingml/2006/main">
               <a:ext uri="{FF2B5EF4-FFF2-40B4-BE49-F238E27FC236}">
-                <a16:creationId xmlns:a16="http://schemas.microsoft.com/office/drawing/2014/main" id="{248D2624-374A-4AB9-8896-65259F9EF309}"/>
+                <a16:creationId xmlns:a16="http://schemas.microsoft.com/office/drawing/2014/main" id="{65E48163-681F-48DF-BA4E-E1C33D2664B4}"/>
               </a:ext>
             </a:extLst>
           </p:cNvPr>
@@ -33213,7 +33213,7 @@
           <p:cNvPr id="36" name="Text 34">
             <a:extLst xmlns:a="http://schemas.openxmlformats.org/drawingml/2006/main">
               <a:ext uri="{FF2B5EF4-FFF2-40B4-BE49-F238E27FC236}">
-                <a16:creationId xmlns:a16="http://schemas.microsoft.com/office/drawing/2014/main" id="{2F4BE2C5-3D0C-4E06-B6C1-4B6FA6C12126}"/>
+                <a16:creationId xmlns:a16="http://schemas.microsoft.com/office/drawing/2014/main" id="{824B3531-694D-458F-A6D0-CA26DB69A71F}"/>
               </a:ext>
             </a:extLst>
           </p:cNvPr>
@@ -33258,7 +33258,7 @@
           <p:cNvPr id="37" name="Text 35">
             <a:extLst xmlns:a="http://schemas.openxmlformats.org/drawingml/2006/main">
               <a:ext uri="{FF2B5EF4-FFF2-40B4-BE49-F238E27FC236}">
-                <a16:creationId xmlns:a16="http://schemas.microsoft.com/office/drawing/2014/main" id="{5A316A50-8233-43E4-969D-44A2A46BDA12}"/>
+                <a16:creationId xmlns:a16="http://schemas.microsoft.com/office/drawing/2014/main" id="{6979ABE3-FF63-446F-B9B6-F94014333E7D}"/>
               </a:ext>
             </a:extLst>
           </p:cNvPr>
@@ -33325,7 +33325,7 @@
           <p:cNvPr id="38" name="Text 36">
             <a:extLst xmlns:a="http://schemas.openxmlformats.org/drawingml/2006/main">
               <a:ext uri="{FF2B5EF4-FFF2-40B4-BE49-F238E27FC236}">
-                <a16:creationId xmlns:a16="http://schemas.microsoft.com/office/drawing/2014/main" id="{9C5EE344-B5E2-4225-862D-090D9782A231}"/>
+                <a16:creationId xmlns:a16="http://schemas.microsoft.com/office/drawing/2014/main" id="{19FD3092-E773-415E-82D3-01311019349E}"/>
               </a:ext>
             </a:extLst>
           </p:cNvPr>
@@ -33371,7 +33371,7 @@
     </p:spTree>
     <p:extLst>
       <p:ext uri="{BB962C8B-B14F-4D97-AF65-F5344CB8AC3E}">
-        <p14:creationId xmlns:p14="http://schemas.microsoft.com/office/powerpoint/2010/main" val="48665453"/>
+        <p14:creationId xmlns:p14="http://schemas.microsoft.com/office/powerpoint/2010/main" val="615136987"/>
       </p:ext>
     </p:extLst>
   </p:cSld>

--- a/paper/slides/compiling-recurrent-agent-workflows-into-guarded-programs-detailed.pptx
+++ b/paper/slides/compiling-recurrent-agent-workflows-into-guarded-programs-detailed.pptx
@@ -2,35 +2,35 @@
 <file path=ppt/presentation.xml><?xml version="1.0" encoding="utf-8"?>
 <p:presentation xmlns:p="http://schemas.openxmlformats.org/presentationml/2006/main">
   <p:sldMasterIdLst>
-    <p:sldMasterId xmlns:r="http://schemas.openxmlformats.org/officeDocument/2006/relationships" id="2147483648" r:id="R7d2545b02eb6444f"/>
+    <p:sldMasterId xmlns:r="http://schemas.openxmlformats.org/officeDocument/2006/relationships" id="2147483648" r:id="R2917628162914d1e"/>
   </p:sldMasterIdLst>
   <p:notesMasterIdLst>
-    <p:notesMasterId xmlns:r="http://schemas.openxmlformats.org/officeDocument/2006/relationships" r:id="Rfa184fc8969946ba"/>
+    <p:notesMasterId xmlns:r="http://schemas.openxmlformats.org/officeDocument/2006/relationships" r:id="R51155b39e1c743b9"/>
   </p:notesMasterIdLst>
   <p:sldIdLst>
-    <p:sldId xmlns:r="http://schemas.openxmlformats.org/officeDocument/2006/relationships" id="256" r:id="R4fbf81d5fc7c436c"/>
-    <p:sldId xmlns:r="http://schemas.openxmlformats.org/officeDocument/2006/relationships" id="257" r:id="R4b0bb2541db340bf"/>
-    <p:sldId xmlns:r="http://schemas.openxmlformats.org/officeDocument/2006/relationships" id="258" r:id="Re6034180648d4bd6"/>
-    <p:sldId xmlns:r="http://schemas.openxmlformats.org/officeDocument/2006/relationships" id="259" r:id="Rcbb3ea067f43451d"/>
-    <p:sldId xmlns:r="http://schemas.openxmlformats.org/officeDocument/2006/relationships" id="260" r:id="R3051b54454df44f8"/>
-    <p:sldId xmlns:r="http://schemas.openxmlformats.org/officeDocument/2006/relationships" id="261" r:id="Rcc94ad9cafed44c9"/>
-    <p:sldId xmlns:r="http://schemas.openxmlformats.org/officeDocument/2006/relationships" id="262" r:id="R8e165d1059f34382"/>
-    <p:sldId xmlns:r="http://schemas.openxmlformats.org/officeDocument/2006/relationships" id="263" r:id="Rd523fc7d844d4268"/>
-    <p:sldId xmlns:r="http://schemas.openxmlformats.org/officeDocument/2006/relationships" id="264" r:id="R74de90632df442a5"/>
-    <p:sldId xmlns:r="http://schemas.openxmlformats.org/officeDocument/2006/relationships" id="265" r:id="Rbac03a2444ce4e0b"/>
-    <p:sldId xmlns:r="http://schemas.openxmlformats.org/officeDocument/2006/relationships" id="266" r:id="R688cd04d33624118"/>
-    <p:sldId xmlns:r="http://schemas.openxmlformats.org/officeDocument/2006/relationships" id="267" r:id="R638d372f579440cf"/>
-    <p:sldId xmlns:r="http://schemas.openxmlformats.org/officeDocument/2006/relationships" id="268" r:id="Rb7ddbaa9cc584458"/>
-    <p:sldId xmlns:r="http://schemas.openxmlformats.org/officeDocument/2006/relationships" id="269" r:id="R15ef5141abb64fa1"/>
-    <p:sldId xmlns:r="http://schemas.openxmlformats.org/officeDocument/2006/relationships" id="270" r:id="R8bf658fcfbc746c2"/>
-    <p:sldId xmlns:r="http://schemas.openxmlformats.org/officeDocument/2006/relationships" id="271" r:id="R6acb6214cbab4163"/>
-    <p:sldId xmlns:r="http://schemas.openxmlformats.org/officeDocument/2006/relationships" id="272" r:id="R43e88087f7ca4ac2"/>
-    <p:sldId xmlns:r="http://schemas.openxmlformats.org/officeDocument/2006/relationships" id="273" r:id="R5630f6302198416f"/>
-    <p:sldId xmlns:r="http://schemas.openxmlformats.org/officeDocument/2006/relationships" id="274" r:id="R234ea63cc2be4e0a"/>
-    <p:sldId xmlns:r="http://schemas.openxmlformats.org/officeDocument/2006/relationships" id="275" r:id="Rb7231ea8b27c4970"/>
-    <p:sldId xmlns:r="http://schemas.openxmlformats.org/officeDocument/2006/relationships" id="276" r:id="R06c8679f94a24c9c"/>
-    <p:sldId xmlns:r="http://schemas.openxmlformats.org/officeDocument/2006/relationships" id="277" r:id="R5c8c089e28f04c5e"/>
-    <p:sldId xmlns:r="http://schemas.openxmlformats.org/officeDocument/2006/relationships" id="278" r:id="R40b0628645d741f4"/>
+    <p:sldId xmlns:r="http://schemas.openxmlformats.org/officeDocument/2006/relationships" id="256" r:id="R7b200759591140a4"/>
+    <p:sldId xmlns:r="http://schemas.openxmlformats.org/officeDocument/2006/relationships" id="257" r:id="Rcdd073d1231e447e"/>
+    <p:sldId xmlns:r="http://schemas.openxmlformats.org/officeDocument/2006/relationships" id="258" r:id="R2f3fb017e8f44618"/>
+    <p:sldId xmlns:r="http://schemas.openxmlformats.org/officeDocument/2006/relationships" id="259" r:id="R19ad41f41c4d4b4b"/>
+    <p:sldId xmlns:r="http://schemas.openxmlformats.org/officeDocument/2006/relationships" id="260" r:id="Rb66844644b5a403e"/>
+    <p:sldId xmlns:r="http://schemas.openxmlformats.org/officeDocument/2006/relationships" id="261" r:id="Ra97694e12af44b92"/>
+    <p:sldId xmlns:r="http://schemas.openxmlformats.org/officeDocument/2006/relationships" id="262" r:id="Ra9ce098ec7d0422c"/>
+    <p:sldId xmlns:r="http://schemas.openxmlformats.org/officeDocument/2006/relationships" id="263" r:id="R08f1a90d97044bb6"/>
+    <p:sldId xmlns:r="http://schemas.openxmlformats.org/officeDocument/2006/relationships" id="264" r:id="R5b79bf1e2fe844f0"/>
+    <p:sldId xmlns:r="http://schemas.openxmlformats.org/officeDocument/2006/relationships" id="265" r:id="R34e6cc880a904674"/>
+    <p:sldId xmlns:r="http://schemas.openxmlformats.org/officeDocument/2006/relationships" id="266" r:id="R0891b48b0fb741ec"/>
+    <p:sldId xmlns:r="http://schemas.openxmlformats.org/officeDocument/2006/relationships" id="267" r:id="R472ae0aeff474ef4"/>
+    <p:sldId xmlns:r="http://schemas.openxmlformats.org/officeDocument/2006/relationships" id="268" r:id="Ra2b45d4f686c482c"/>
+    <p:sldId xmlns:r="http://schemas.openxmlformats.org/officeDocument/2006/relationships" id="269" r:id="R22662b8bd250428f"/>
+    <p:sldId xmlns:r="http://schemas.openxmlformats.org/officeDocument/2006/relationships" id="270" r:id="R5cf9ef7b20ca405f"/>
+    <p:sldId xmlns:r="http://schemas.openxmlformats.org/officeDocument/2006/relationships" id="271" r:id="R7a78c30dd57a440c"/>
+    <p:sldId xmlns:r="http://schemas.openxmlformats.org/officeDocument/2006/relationships" id="272" r:id="Rce313349cf3245a1"/>
+    <p:sldId xmlns:r="http://schemas.openxmlformats.org/officeDocument/2006/relationships" id="273" r:id="R76148ec7f38e46d3"/>
+    <p:sldId xmlns:r="http://schemas.openxmlformats.org/officeDocument/2006/relationships" id="274" r:id="R748f5cf51c074193"/>
+    <p:sldId xmlns:r="http://schemas.openxmlformats.org/officeDocument/2006/relationships" id="275" r:id="R4425bde99f874ad8"/>
+    <p:sldId xmlns:r="http://schemas.openxmlformats.org/officeDocument/2006/relationships" id="276" r:id="R687d7ef8eb0c4c16"/>
+    <p:sldId xmlns:r="http://schemas.openxmlformats.org/officeDocument/2006/relationships" id="277" r:id="R456f80bb21bd41a5"/>
+    <p:sldId xmlns:r="http://schemas.openxmlformats.org/officeDocument/2006/relationships" id="278" r:id="Rc5f5e43c2a30464e"/>
   </p:sldIdLst>
   <p:sldSz cx="12192000" cy="6858000"/>
   <p:notesSz cx="6858000" cy="9144000"/>
@@ -2072,7 +2072,7 @@
   </p:cSld>
   <p:clrMap bg1="lt1" tx1="dk1" bg2="lt2" tx2="dk2" accent1="accent1" accent2="accent2" accent3="accent3" accent4="accent4" accent5="accent5" accent6="accent6" hlink="hlink" folHlink="folHlink"/>
   <p:sldLayoutIdLst>
-    <p:sldLayoutId xmlns:r="http://schemas.openxmlformats.org/officeDocument/2006/relationships" id="2147483649" r:id="R30aa0d9d8f154e80"/>
+    <p:sldLayoutId xmlns:r="http://schemas.openxmlformats.org/officeDocument/2006/relationships" id="2147483649" r:id="R526642455d8c4fe3"/>
   </p:sldLayoutIdLst>
   <p:txStyles>
     <p:titleStyle>
@@ -2345,7 +2345,7 @@
                 <a:ea typeface="Calibri"/>
                 <a:cs typeface="Calibri"/>
               </a:rPr>
-              <a:t>NESTFUL: independent group records available vs required</a:t>
+              <a:t>Token reduction by workflow family</a:t>
             </a:r>
           </a:p>
         </c:rich>
@@ -2384,7 +2384,7 @@
               <c:strCache>
                 <c:ptCount val="1"/>
                 <c:pt idx="0">
-                  <c:v>Group records</c:v>
+                  <c:v>Token reduction (%)</c:v>
                 </c:pt>
               </c:strCache>
             </c:strRef>
@@ -2406,12 +2406,15 @@
             <c:strRef>
               <c:f>Sheet1!$A$2:$A$3</c:f>
               <c:strCache>
-                <c:ptCount val="2"/>
+                <c:ptCount val="3"/>
                 <c:pt idx="0">
-                  <c:v>Best family support</c:v>
+                  <c:v>Issue type</c:v>
                 </c:pt>
                 <c:pt idx="1">
-                  <c:v>Gate requirement</c:v>
+                  <c:v>PR outcome</c:v>
+                </c:pt>
+                <c:pt idx="2">
+                  <c:v>Backlog attention</c:v>
                 </c:pt>
               </c:strCache>
             </c:strRef>
@@ -2421,12 +2424,15 @@
               <c:f>Sheet1!$B$2:$B$3</c:f>
               <c:numCache>
                 <c:formatCode>General</c:formatCode>
-                <c:ptCount val="2"/>
+                <c:ptCount val="3"/>
                 <c:pt idx="0">
-                  <c:v>26</c:v>
+                  <c:v>39.5</c:v>
                 </c:pt>
                 <c:pt idx="1">
-                  <c:v>92</c:v>
+                  <c:v>80.8</c:v>
+                </c:pt>
+                <c:pt idx="2">
+                  <c:v>81.4</c:v>
                 </c:pt>
               </c:numCache>
             </c:numRef>
@@ -2502,7 +2508,7 @@
             </a:ln>
           </c:spPr>
         </c:majorGridlines>
-        <c:numFmt formatCode="General" sourceLinked="0"/>
+        <c:numFmt formatCode="0\%" sourceLinked="0"/>
         <c:majorTickMark val="out"/>
         <c:minorTickMark val="none"/>
         <c:tickLblPos val="nextTo"/>
@@ -2565,7 +2571,7 @@
                 <a:ea typeface="Calibri"/>
                 <a:cs typeface="Calibri"/>
               </a:rPr>
-              <a:t>NESTFUL: independent group records available vs required</a:t>
+              <a:t>Token reduction by workflow family</a:t>
             </a:r>
           </a:p>
         </c:rich>
@@ -2604,7 +2610,7 @@
               <c:strCache>
                 <c:ptCount val="1"/>
                 <c:pt idx="0">
-                  <c:v>Group records</c:v>
+                  <c:v>Token reduction (%)</c:v>
                 </c:pt>
               </c:strCache>
             </c:strRef>
@@ -2626,12 +2632,15 @@
             <c:strRef>
               <c:f>Sheet1!$A$2:$A$3</c:f>
               <c:strCache>
-                <c:ptCount val="2"/>
+                <c:ptCount val="3"/>
                 <c:pt idx="0">
-                  <c:v>Best family support</c:v>
+                  <c:v>Issue type</c:v>
                 </c:pt>
                 <c:pt idx="1">
-                  <c:v>Gate requirement</c:v>
+                  <c:v>PR outcome</c:v>
+                </c:pt>
+                <c:pt idx="2">
+                  <c:v>Backlog attention</c:v>
                 </c:pt>
               </c:strCache>
             </c:strRef>
@@ -2641,12 +2650,15 @@
               <c:f>Sheet1!$B$2:$B$3</c:f>
               <c:numCache>
                 <c:formatCode>General</c:formatCode>
-                <c:ptCount val="2"/>
+                <c:ptCount val="3"/>
                 <c:pt idx="0">
-                  <c:v>26</c:v>
+                  <c:v>39.5</c:v>
                 </c:pt>
                 <c:pt idx="1">
-                  <c:v>92</c:v>
+                  <c:v>80.8</c:v>
+                </c:pt>
+                <c:pt idx="2">
+                  <c:v>81.4</c:v>
                 </c:pt>
               </c:numCache>
             </c:numRef>
@@ -2722,7 +2734,7 @@
             </a:ln>
           </c:spPr>
         </c:majorGridlines>
-        <c:numFmt formatCode="General" sourceLinked="0"/>
+        <c:numFmt formatCode="0\%" sourceLinked="0"/>
         <c:majorTickMark val="out"/>
         <c:minorTickMark val="none"/>
         <c:tickLblPos val="nextTo"/>
@@ -3725,7 +3737,7 @@
           <p:cNvPr id="2" name="Shape 0">
             <a:extLst xmlns:a="http://schemas.openxmlformats.org/drawingml/2006/main">
               <a:ext uri="{FF2B5EF4-FFF2-40B4-BE49-F238E27FC236}">
-                <a16:creationId xmlns:a16="http://schemas.microsoft.com/office/drawing/2014/main" id="{7298F396-4480-4055-ACB2-E077B9EAC982}"/>
+                <a16:creationId xmlns:a16="http://schemas.microsoft.com/office/drawing/2014/main" id="{A471E1E7-BD24-4DF5-9E2C-E696E8FAFD2E}"/>
               </a:ext>
             </a:extLst>
           </p:cNvPr>
@@ -3765,7 +3777,7 @@
           <p:cNvPr id="3" name="Shape 1">
             <a:extLst xmlns:a="http://schemas.openxmlformats.org/drawingml/2006/main">
               <a:ext uri="{FF2B5EF4-FFF2-40B4-BE49-F238E27FC236}">
-                <a16:creationId xmlns:a16="http://schemas.microsoft.com/office/drawing/2014/main" id="{436081EA-EBE7-4781-85AC-5E34CCB2CDCF}"/>
+                <a16:creationId xmlns:a16="http://schemas.microsoft.com/office/drawing/2014/main" id="{C0B08A06-A798-4348-8F46-F636D291A458}"/>
               </a:ext>
             </a:extLst>
           </p:cNvPr>
@@ -3805,7 +3817,7 @@
           <p:cNvPr id="4" name="Shape 2">
             <a:extLst xmlns:a="http://schemas.openxmlformats.org/drawingml/2006/main">
               <a:ext uri="{FF2B5EF4-FFF2-40B4-BE49-F238E27FC236}">
-                <a16:creationId xmlns:a16="http://schemas.microsoft.com/office/drawing/2014/main" id="{E4437B17-2AFB-4EC6-A98E-1260F8C17675}"/>
+                <a16:creationId xmlns:a16="http://schemas.microsoft.com/office/drawing/2014/main" id="{58710CAD-AFC3-44E5-B458-D1117E366FAF}"/>
               </a:ext>
             </a:extLst>
           </p:cNvPr>
@@ -3845,7 +3857,7 @@
           <p:cNvPr id="5" name="Text 3">
             <a:extLst xmlns:a="http://schemas.openxmlformats.org/drawingml/2006/main">
               <a:ext uri="{FF2B5EF4-FFF2-40B4-BE49-F238E27FC236}">
-                <a16:creationId xmlns:a16="http://schemas.microsoft.com/office/drawing/2014/main" id="{CCDB81EC-232E-4C1E-A21B-BE8A08B385FF}"/>
+                <a16:creationId xmlns:a16="http://schemas.microsoft.com/office/drawing/2014/main" id="{E1DAA5CB-A6FA-4353-B1B2-096AF33CC547}"/>
               </a:ext>
             </a:extLst>
           </p:cNvPr>
@@ -3890,7 +3902,7 @@
           <p:cNvPr id="6" name="Text 4">
             <a:extLst xmlns:a="http://schemas.openxmlformats.org/drawingml/2006/main">
               <a:ext uri="{FF2B5EF4-FFF2-40B4-BE49-F238E27FC236}">
-                <a16:creationId xmlns:a16="http://schemas.microsoft.com/office/drawing/2014/main" id="{BD33DC8E-90FB-42A9-81CB-7C503174CB22}"/>
+                <a16:creationId xmlns:a16="http://schemas.microsoft.com/office/drawing/2014/main" id="{F83EDA68-DCB7-42BE-ABE0-EB734A51D14F}"/>
               </a:ext>
             </a:extLst>
           </p:cNvPr>
@@ -3938,7 +3950,7 @@
           <p:cNvPr id="7" name="Text 5">
             <a:extLst xmlns:a="http://schemas.openxmlformats.org/drawingml/2006/main">
               <a:ext uri="{FF2B5EF4-FFF2-40B4-BE49-F238E27FC236}">
-                <a16:creationId xmlns:a16="http://schemas.microsoft.com/office/drawing/2014/main" id="{FEDC1E34-F045-4AAA-A907-D4602A024451}"/>
+                <a16:creationId xmlns:a16="http://schemas.microsoft.com/office/drawing/2014/main" id="{CDA1F912-C113-44DE-B0C0-E901657A8BD3}"/>
               </a:ext>
             </a:extLst>
           </p:cNvPr>
@@ -3997,7 +4009,7 @@
           <p:cNvPr id="8" name="Text 6">
             <a:extLst xmlns:a="http://schemas.openxmlformats.org/drawingml/2006/main">
               <a:ext uri="{FF2B5EF4-FFF2-40B4-BE49-F238E27FC236}">
-                <a16:creationId xmlns:a16="http://schemas.microsoft.com/office/drawing/2014/main" id="{60ABAE2E-2D91-4DD6-B3AE-B7CAA8B9FAF3}"/>
+                <a16:creationId xmlns:a16="http://schemas.microsoft.com/office/drawing/2014/main" id="{4632A3E1-F8DB-400A-9F4E-FCEEBF20ED9E}"/>
               </a:ext>
             </a:extLst>
           </p:cNvPr>
@@ -4032,7 +4044,7 @@
                 <a:ea typeface="Cambria"/>
                 <a:cs typeface="Cambria"/>
               </a:rPr>
-              <a:t>10</a:t>
+              <a:t>3</a:t>
             </a:r>
           </a:p>
         </p:txBody>
@@ -4042,7 +4054,7 @@
           <p:cNvPr id="9" name="Text 7">
             <a:extLst xmlns:a="http://schemas.openxmlformats.org/drawingml/2006/main">
               <a:ext uri="{FF2B5EF4-FFF2-40B4-BE49-F238E27FC236}">
-                <a16:creationId xmlns:a16="http://schemas.microsoft.com/office/drawing/2014/main" id="{CD0DC033-6B20-4075-800C-2EB65941B70A}"/>
+                <a16:creationId xmlns:a16="http://schemas.microsoft.com/office/drawing/2014/main" id="{FAEF1424-88D7-4216-BE51-595A7086077C}"/>
               </a:ext>
             </a:extLst>
           </p:cNvPr>
@@ -4080,7 +4092,7 @@
                 <a:ea typeface="Calibri"/>
                 <a:cs typeface="Calibri"/>
               </a:rPr>
-              <a:t>public benchmark families with explicit dispositions</a:t>
+              <a:t>real workflow families with distinct tools and graders</a:t>
             </a:r>
           </a:p>
         </p:txBody>
@@ -4090,7 +4102,7 @@
           <p:cNvPr id="10" name="Text 8">
             <a:extLst xmlns:a="http://schemas.openxmlformats.org/drawingml/2006/main">
               <a:ext uri="{FF2B5EF4-FFF2-40B4-BE49-F238E27FC236}">
-                <a16:creationId xmlns:a16="http://schemas.microsoft.com/office/drawing/2014/main" id="{156A5947-F8F3-42A5-89E5-432450AC320B}"/>
+                <a16:creationId xmlns:a16="http://schemas.microsoft.com/office/drawing/2014/main" id="{4D2DB96F-5903-4A38-9915-F33549523277}"/>
               </a:ext>
             </a:extLst>
           </p:cNvPr>
@@ -4125,7 +4137,7 @@
                 <a:ea typeface="Cambria"/>
                 <a:cs typeface="Cambria"/>
               </a:rPr>
-              <a:t>6</a:t>
+              <a:t>90</a:t>
             </a:r>
           </a:p>
         </p:txBody>
@@ -4135,7 +4147,7 @@
           <p:cNvPr id="11" name="Text 9">
             <a:extLst xmlns:a="http://schemas.openxmlformats.org/drawingml/2006/main">
               <a:ext uri="{FF2B5EF4-FFF2-40B4-BE49-F238E27FC236}">
-                <a16:creationId xmlns:a16="http://schemas.microsoft.com/office/drawing/2014/main" id="{48866611-3B6E-42B0-B27C-2E0449044565}"/>
+                <a16:creationId xmlns:a16="http://schemas.microsoft.com/office/drawing/2014/main" id="{303D36E2-15B5-48B9-A6BC-2D50EF6CC572}"/>
               </a:ext>
             </a:extLst>
           </p:cNvPr>
@@ -4183,7 +4195,7 @@
           <p:cNvPr id="12" name="Text 10">
             <a:extLst xmlns:a="http://schemas.openxmlformats.org/drawingml/2006/main">
               <a:ext uri="{FF2B5EF4-FFF2-40B4-BE49-F238E27FC236}">
-                <a16:creationId xmlns:a16="http://schemas.microsoft.com/office/drawing/2014/main" id="{055A943E-5960-4D84-9084-DA282074A16D}"/>
+                <a16:creationId xmlns:a16="http://schemas.microsoft.com/office/drawing/2014/main" id="{B6BBFBC7-856B-48D6-8C6E-D8F2A7C86C29}"/>
               </a:ext>
             </a:extLst>
           </p:cNvPr>
@@ -4228,7 +4240,7 @@
           <p:cNvPr id="13" name="Text 11">
             <a:extLst xmlns:a="http://schemas.openxmlformats.org/drawingml/2006/main">
               <a:ext uri="{FF2B5EF4-FFF2-40B4-BE49-F238E27FC236}">
-                <a16:creationId xmlns:a16="http://schemas.microsoft.com/office/drawing/2014/main" id="{1334B5F6-1C30-47F0-9A60-453C3AE5A91B}"/>
+                <a16:creationId xmlns:a16="http://schemas.microsoft.com/office/drawing/2014/main" id="{62D65F39-4267-4E95-B63B-93ADB5B6F26C}"/>
               </a:ext>
             </a:extLst>
           </p:cNvPr>
@@ -4276,7 +4288,7 @@
           <p:cNvPr id="14" name="Text 12">
             <a:extLst xmlns:a="http://schemas.openxmlformats.org/drawingml/2006/main">
               <a:ext uri="{FF2B5EF4-FFF2-40B4-BE49-F238E27FC236}">
-                <a16:creationId xmlns:a16="http://schemas.microsoft.com/office/drawing/2014/main" id="{B0DD8F0B-CEDB-4F4F-A6F6-0DD783CC9B02}"/>
+                <a16:creationId xmlns:a16="http://schemas.microsoft.com/office/drawing/2014/main" id="{DFC5C9D4-C070-4A2F-82C5-A02B3215B957}"/>
               </a:ext>
             </a:extLst>
           </p:cNvPr>
@@ -4319,7 +4331,7 @@
     </p:spTree>
     <p:extLst>
       <p:ext uri="{BB962C8B-B14F-4D97-AF65-F5344CB8AC3E}">
-        <p14:creationId xmlns:p14="http://schemas.microsoft.com/office/powerpoint/2010/main" val="1755578711"/>
+        <p14:creationId xmlns:p14="http://schemas.microsoft.com/office/powerpoint/2010/main" val="1300227833"/>
       </p:ext>
     </p:extLst>
   </p:cSld>
@@ -4350,7 +4362,7 @@
           <p:cNvPr id="2" name="Text 0">
             <a:extLst xmlns:a="http://schemas.openxmlformats.org/drawingml/2006/main">
               <a:ext uri="{FF2B5EF4-FFF2-40B4-BE49-F238E27FC236}">
-                <a16:creationId xmlns:a16="http://schemas.microsoft.com/office/drawing/2014/main" id="{6F619EFC-8844-457C-B483-FEECF86DA532}"/>
+                <a16:creationId xmlns:a16="http://schemas.microsoft.com/office/drawing/2014/main" id="{56BED763-C5C9-43F0-B00C-5562C22FE56D}"/>
               </a:ext>
             </a:extLst>
           </p:cNvPr>
@@ -4395,7 +4407,7 @@
           <p:cNvPr id="3" name="Text 1">
             <a:extLst xmlns:a="http://schemas.openxmlformats.org/drawingml/2006/main">
               <a:ext uri="{FF2B5EF4-FFF2-40B4-BE49-F238E27FC236}">
-                <a16:creationId xmlns:a16="http://schemas.microsoft.com/office/drawing/2014/main" id="{048D5C88-154F-46A9-AAB1-161853F02F79}"/>
+                <a16:creationId xmlns:a16="http://schemas.microsoft.com/office/drawing/2014/main" id="{1C4EB47A-6816-48FC-9FDC-32438F96899F}"/>
               </a:ext>
             </a:extLst>
           </p:cNvPr>
@@ -4440,7 +4452,7 @@
           <p:cNvPr id="4" name="Text 2">
             <a:extLst xmlns:a="http://schemas.openxmlformats.org/drawingml/2006/main">
               <a:ext uri="{FF2B5EF4-FFF2-40B4-BE49-F238E27FC236}">
-                <a16:creationId xmlns:a16="http://schemas.microsoft.com/office/drawing/2014/main" id="{128ADB8F-1E8D-48C7-9588-AF81C19F52A9}"/>
+                <a16:creationId xmlns:a16="http://schemas.microsoft.com/office/drawing/2014/main" id="{F18F8BED-99DB-4EA3-88F0-8102BABABDF7}"/>
               </a:ext>
             </a:extLst>
           </p:cNvPr>
@@ -4485,7 +4497,7 @@
           <p:cNvPr id="5" name="Text 3">
             <a:extLst xmlns:a="http://schemas.openxmlformats.org/drawingml/2006/main">
               <a:ext uri="{FF2B5EF4-FFF2-40B4-BE49-F238E27FC236}">
-                <a16:creationId xmlns:a16="http://schemas.microsoft.com/office/drawing/2014/main" id="{443D9826-D2CC-4530-8824-859C82D862F6}"/>
+                <a16:creationId xmlns:a16="http://schemas.microsoft.com/office/drawing/2014/main" id="{AD2CA07C-8B27-43E8-9F40-7A584236E08D}"/>
               </a:ext>
             </a:extLst>
           </p:cNvPr>
@@ -4530,7 +4542,7 @@
           <p:cNvPr id="6" name="Text 4">
             <a:extLst xmlns:a="http://schemas.openxmlformats.org/drawingml/2006/main">
               <a:ext uri="{FF2B5EF4-FFF2-40B4-BE49-F238E27FC236}">
-                <a16:creationId xmlns:a16="http://schemas.microsoft.com/office/drawing/2014/main" id="{AEF397C3-0DD9-448C-AC43-A7CF242458B7}"/>
+                <a16:creationId xmlns:a16="http://schemas.microsoft.com/office/drawing/2014/main" id="{4420915B-7196-4EC9-B047-C0C0711D713A}"/>
               </a:ext>
             </a:extLst>
           </p:cNvPr>
@@ -4575,7 +4587,7 @@
           <p:cNvPr id="7" name="Shape 5">
             <a:extLst xmlns:a="http://schemas.openxmlformats.org/drawingml/2006/main">
               <a:ext uri="{FF2B5EF4-FFF2-40B4-BE49-F238E27FC236}">
-                <a16:creationId xmlns:a16="http://schemas.microsoft.com/office/drawing/2014/main" id="{ED607EC1-B512-4FF6-8500-41F35069E8C2}"/>
+                <a16:creationId xmlns:a16="http://schemas.microsoft.com/office/drawing/2014/main" id="{8D2F2993-9993-4659-B5EE-B4308730C220}"/>
               </a:ext>
             </a:extLst>
           </p:cNvPr>
@@ -4622,7 +4634,7 @@
           <p:cNvPr id="8" name="Text 6">
             <a:extLst xmlns:a="http://schemas.openxmlformats.org/drawingml/2006/main">
               <a:ext uri="{FF2B5EF4-FFF2-40B4-BE49-F238E27FC236}">
-                <a16:creationId xmlns:a16="http://schemas.microsoft.com/office/drawing/2014/main" id="{AD12ACA7-84CE-4532-9DA2-F1E4E3E6DFA5}"/>
+                <a16:creationId xmlns:a16="http://schemas.microsoft.com/office/drawing/2014/main" id="{144FA36E-BE79-4B2A-855A-063244CC1934}"/>
               </a:ext>
             </a:extLst>
           </p:cNvPr>
@@ -4667,7 +4679,7 @@
           <p:cNvPr id="9" name="Text 7">
             <a:extLst xmlns:a="http://schemas.openxmlformats.org/drawingml/2006/main">
               <a:ext uri="{FF2B5EF4-FFF2-40B4-BE49-F238E27FC236}">
-                <a16:creationId xmlns:a16="http://schemas.microsoft.com/office/drawing/2014/main" id="{04D33811-21F0-450D-9C12-088CE5062607}"/>
+                <a16:creationId xmlns:a16="http://schemas.microsoft.com/office/drawing/2014/main" id="{728EBEDD-6765-4D65-BF57-836AF2624688}"/>
               </a:ext>
             </a:extLst>
           </p:cNvPr>
@@ -4715,7 +4727,7 @@
           <p:cNvPr id="10" name="Shape 8">
             <a:extLst xmlns:a="http://schemas.openxmlformats.org/drawingml/2006/main">
               <a:ext uri="{FF2B5EF4-FFF2-40B4-BE49-F238E27FC236}">
-                <a16:creationId xmlns:a16="http://schemas.microsoft.com/office/drawing/2014/main" id="{623DB0E7-C8A8-4328-B144-D49845116F12}"/>
+                <a16:creationId xmlns:a16="http://schemas.microsoft.com/office/drawing/2014/main" id="{E5535894-D1B9-4B71-9C26-400B99D0FC51}"/>
               </a:ext>
             </a:extLst>
           </p:cNvPr>
@@ -4762,7 +4774,7 @@
           <p:cNvPr id="11" name="Text 9">
             <a:extLst xmlns:a="http://schemas.openxmlformats.org/drawingml/2006/main">
               <a:ext uri="{FF2B5EF4-FFF2-40B4-BE49-F238E27FC236}">
-                <a16:creationId xmlns:a16="http://schemas.microsoft.com/office/drawing/2014/main" id="{F5EAE674-F187-4B8F-8E18-5289BA164AAD}"/>
+                <a16:creationId xmlns:a16="http://schemas.microsoft.com/office/drawing/2014/main" id="{5695D146-97C8-4426-B298-53CEAE3C1771}"/>
               </a:ext>
             </a:extLst>
           </p:cNvPr>
@@ -4807,7 +4819,7 @@
           <p:cNvPr id="12" name="Text 10">
             <a:extLst xmlns:a="http://schemas.openxmlformats.org/drawingml/2006/main">
               <a:ext uri="{FF2B5EF4-FFF2-40B4-BE49-F238E27FC236}">
-                <a16:creationId xmlns:a16="http://schemas.microsoft.com/office/drawing/2014/main" id="{07306322-8EB7-4405-900D-668709AD2D49}"/>
+                <a16:creationId xmlns:a16="http://schemas.microsoft.com/office/drawing/2014/main" id="{1CF64C9C-8847-441B-82FA-DE52B9650BD3}"/>
               </a:ext>
             </a:extLst>
           </p:cNvPr>
@@ -4855,7 +4867,7 @@
           <p:cNvPr id="13" name="Shape 11">
             <a:extLst xmlns:a="http://schemas.openxmlformats.org/drawingml/2006/main">
               <a:ext uri="{FF2B5EF4-FFF2-40B4-BE49-F238E27FC236}">
-                <a16:creationId xmlns:a16="http://schemas.microsoft.com/office/drawing/2014/main" id="{AB881819-C2E0-4429-A5F3-44EC5DEB362F}"/>
+                <a16:creationId xmlns:a16="http://schemas.microsoft.com/office/drawing/2014/main" id="{A89C16A7-1A49-4898-BC94-2F9B643C8272}"/>
               </a:ext>
             </a:extLst>
           </p:cNvPr>
@@ -4902,7 +4914,7 @@
           <p:cNvPr id="14" name="Text 12">
             <a:extLst xmlns:a="http://schemas.openxmlformats.org/drawingml/2006/main">
               <a:ext uri="{FF2B5EF4-FFF2-40B4-BE49-F238E27FC236}">
-                <a16:creationId xmlns:a16="http://schemas.microsoft.com/office/drawing/2014/main" id="{47652A76-4165-4A54-976C-90D0722ECF68}"/>
+                <a16:creationId xmlns:a16="http://schemas.microsoft.com/office/drawing/2014/main" id="{FF52ABD6-3D49-4EFE-9837-56161EA4B9A6}"/>
               </a:ext>
             </a:extLst>
           </p:cNvPr>
@@ -4947,7 +4959,7 @@
           <p:cNvPr id="15" name="Text 13">
             <a:extLst xmlns:a="http://schemas.openxmlformats.org/drawingml/2006/main">
               <a:ext uri="{FF2B5EF4-FFF2-40B4-BE49-F238E27FC236}">
-                <a16:creationId xmlns:a16="http://schemas.microsoft.com/office/drawing/2014/main" id="{9FE812DB-7536-4E31-8202-B2F048C4A692}"/>
+                <a16:creationId xmlns:a16="http://schemas.microsoft.com/office/drawing/2014/main" id="{CDB165C5-E8F7-440A-A3DD-98C8D75341FE}"/>
               </a:ext>
             </a:extLst>
           </p:cNvPr>
@@ -4995,7 +5007,7 @@
           <p:cNvPr id="16" name="Shape 14">
             <a:extLst xmlns:a="http://schemas.openxmlformats.org/drawingml/2006/main">
               <a:ext uri="{FF2B5EF4-FFF2-40B4-BE49-F238E27FC236}">
-                <a16:creationId xmlns:a16="http://schemas.microsoft.com/office/drawing/2014/main" id="{48BB4245-0508-499E-964B-4C7AD88F0D84}"/>
+                <a16:creationId xmlns:a16="http://schemas.microsoft.com/office/drawing/2014/main" id="{DCF4E060-8B5F-4D14-A338-CD881E7819D6}"/>
               </a:ext>
             </a:extLst>
           </p:cNvPr>
@@ -5042,7 +5054,7 @@
           <p:cNvPr id="17" name="Text 15">
             <a:extLst xmlns:a="http://schemas.openxmlformats.org/drawingml/2006/main">
               <a:ext uri="{FF2B5EF4-FFF2-40B4-BE49-F238E27FC236}">
-                <a16:creationId xmlns:a16="http://schemas.microsoft.com/office/drawing/2014/main" id="{F3DBE8FD-5FD1-4CA6-961B-92D2EE886496}"/>
+                <a16:creationId xmlns:a16="http://schemas.microsoft.com/office/drawing/2014/main" id="{1A6963FC-304A-432D-AF9F-452AA7DE77F0}"/>
               </a:ext>
             </a:extLst>
           </p:cNvPr>
@@ -5087,7 +5099,7 @@
           <p:cNvPr id="18" name="Text 16">
             <a:extLst xmlns:a="http://schemas.openxmlformats.org/drawingml/2006/main">
               <a:ext uri="{FF2B5EF4-FFF2-40B4-BE49-F238E27FC236}">
-                <a16:creationId xmlns:a16="http://schemas.microsoft.com/office/drawing/2014/main" id="{9C619F35-18ED-453F-90BC-5309FDFA6633}"/>
+                <a16:creationId xmlns:a16="http://schemas.microsoft.com/office/drawing/2014/main" id="{4859788E-5F8C-46CA-8FB0-AE6050FF49E9}"/>
               </a:ext>
             </a:extLst>
           </p:cNvPr>
@@ -5135,7 +5147,7 @@
           <p:cNvPr id="19" name="Shape 17">
             <a:extLst xmlns:a="http://schemas.openxmlformats.org/drawingml/2006/main">
               <a:ext uri="{FF2B5EF4-FFF2-40B4-BE49-F238E27FC236}">
-                <a16:creationId xmlns:a16="http://schemas.microsoft.com/office/drawing/2014/main" id="{E3F8BFDD-3F89-41E7-BE55-6216C9E1D270}"/>
+                <a16:creationId xmlns:a16="http://schemas.microsoft.com/office/drawing/2014/main" id="{288A1A4D-8024-4D29-B48B-A5C306C5B503}"/>
               </a:ext>
             </a:extLst>
           </p:cNvPr>
@@ -5182,7 +5194,7 @@
           <p:cNvPr id="20" name="Text 18">
             <a:extLst xmlns:a="http://schemas.openxmlformats.org/drawingml/2006/main">
               <a:ext uri="{FF2B5EF4-FFF2-40B4-BE49-F238E27FC236}">
-                <a16:creationId xmlns:a16="http://schemas.microsoft.com/office/drawing/2014/main" id="{6C70C914-A7A8-40C0-8BC8-F59A4E144493}"/>
+                <a16:creationId xmlns:a16="http://schemas.microsoft.com/office/drawing/2014/main" id="{DAFA891F-13B5-42F7-B132-2471A72345EA}"/>
               </a:ext>
             </a:extLst>
           </p:cNvPr>
@@ -5227,7 +5239,7 @@
           <p:cNvPr id="21" name="Text 19">
             <a:extLst xmlns:a="http://schemas.openxmlformats.org/drawingml/2006/main">
               <a:ext uri="{FF2B5EF4-FFF2-40B4-BE49-F238E27FC236}">
-                <a16:creationId xmlns:a16="http://schemas.microsoft.com/office/drawing/2014/main" id="{DE058D5F-5872-46C0-AF0F-1CCD6D80A34F}"/>
+                <a16:creationId xmlns:a16="http://schemas.microsoft.com/office/drawing/2014/main" id="{A93948D4-54CA-47CC-8033-C350026BA6E3}"/>
               </a:ext>
             </a:extLst>
           </p:cNvPr>
@@ -5275,7 +5287,7 @@
           <p:cNvPr id="22" name="Shape 20">
             <a:extLst xmlns:a="http://schemas.openxmlformats.org/drawingml/2006/main">
               <a:ext uri="{FF2B5EF4-FFF2-40B4-BE49-F238E27FC236}">
-                <a16:creationId xmlns:a16="http://schemas.microsoft.com/office/drawing/2014/main" id="{E3F0C018-B9B1-4C54-AD73-E7E32E9ED7B2}"/>
+                <a16:creationId xmlns:a16="http://schemas.microsoft.com/office/drawing/2014/main" id="{E4F8FCD1-C8C8-4C4C-B69B-D6AD8D6B8EF0}"/>
               </a:ext>
             </a:extLst>
           </p:cNvPr>
@@ -5322,7 +5334,7 @@
           <p:cNvPr id="23" name="Text 21">
             <a:extLst xmlns:a="http://schemas.openxmlformats.org/drawingml/2006/main">
               <a:ext uri="{FF2B5EF4-FFF2-40B4-BE49-F238E27FC236}">
-                <a16:creationId xmlns:a16="http://schemas.microsoft.com/office/drawing/2014/main" id="{DBBB71C1-CA7B-4E40-BA9B-80295254DCEB}"/>
+                <a16:creationId xmlns:a16="http://schemas.microsoft.com/office/drawing/2014/main" id="{6AF27568-7206-4F44-8A36-AE007C057356}"/>
               </a:ext>
             </a:extLst>
           </p:cNvPr>
@@ -5367,7 +5379,7 @@
           <p:cNvPr id="24" name="Text 22">
             <a:extLst xmlns:a="http://schemas.openxmlformats.org/drawingml/2006/main">
               <a:ext uri="{FF2B5EF4-FFF2-40B4-BE49-F238E27FC236}">
-                <a16:creationId xmlns:a16="http://schemas.microsoft.com/office/drawing/2014/main" id="{89086A17-2725-44CB-B56B-264B89B55178}"/>
+                <a16:creationId xmlns:a16="http://schemas.microsoft.com/office/drawing/2014/main" id="{72354991-4DEB-41F6-81C3-22D62924ABD8}"/>
               </a:ext>
             </a:extLst>
           </p:cNvPr>
@@ -5415,7 +5427,7 @@
           <p:cNvPr id="25" name="Text 23">
             <a:extLst xmlns:a="http://schemas.openxmlformats.org/drawingml/2006/main">
               <a:ext uri="{FF2B5EF4-FFF2-40B4-BE49-F238E27FC236}">
-                <a16:creationId xmlns:a16="http://schemas.microsoft.com/office/drawing/2014/main" id="{731C0B21-D210-48BF-81EC-ADB6AEE091AF}"/>
+                <a16:creationId xmlns:a16="http://schemas.microsoft.com/office/drawing/2014/main" id="{F3A62102-74ED-4529-8ECA-F17355B942DF}"/>
               </a:ext>
             </a:extLst>
           </p:cNvPr>
@@ -5460,7 +5472,7 @@
           <p:cNvPr id="26" name="Shape 24">
             <a:extLst xmlns:a="http://schemas.openxmlformats.org/drawingml/2006/main">
               <a:ext uri="{FF2B5EF4-FFF2-40B4-BE49-F238E27FC236}">
-                <a16:creationId xmlns:a16="http://schemas.microsoft.com/office/drawing/2014/main" id="{B70F599F-BCDA-4E3D-BD64-9F773A204B4B}"/>
+                <a16:creationId xmlns:a16="http://schemas.microsoft.com/office/drawing/2014/main" id="{062E456B-96B2-4559-8C76-E3B55279F9F2}"/>
               </a:ext>
             </a:extLst>
           </p:cNvPr>
@@ -5500,7 +5512,7 @@
           <p:cNvPr id="27" name="Text 25">
             <a:extLst xmlns:a="http://schemas.openxmlformats.org/drawingml/2006/main">
               <a:ext uri="{FF2B5EF4-FFF2-40B4-BE49-F238E27FC236}">
-                <a16:creationId xmlns:a16="http://schemas.microsoft.com/office/drawing/2014/main" id="{E1370B9D-DBD2-482D-80B8-D431E306C0E4}"/>
+                <a16:creationId xmlns:a16="http://schemas.microsoft.com/office/drawing/2014/main" id="{721D0758-F702-4DFD-80AD-E15B74CC23E3}"/>
               </a:ext>
             </a:extLst>
           </p:cNvPr>
@@ -5545,7 +5557,7 @@
           <p:cNvPr id="28" name="Shape 26">
             <a:extLst xmlns:a="http://schemas.openxmlformats.org/drawingml/2006/main">
               <a:ext uri="{FF2B5EF4-FFF2-40B4-BE49-F238E27FC236}">
-                <a16:creationId xmlns:a16="http://schemas.microsoft.com/office/drawing/2014/main" id="{9899CEC4-9DF0-46C2-B853-B95B049AFBF1}"/>
+                <a16:creationId xmlns:a16="http://schemas.microsoft.com/office/drawing/2014/main" id="{5EBD5787-921A-418C-9EC4-162C8EE9E434}"/>
               </a:ext>
             </a:extLst>
           </p:cNvPr>
@@ -5585,7 +5597,7 @@
           <p:cNvPr id="29" name="Text 27">
             <a:extLst xmlns:a="http://schemas.openxmlformats.org/drawingml/2006/main">
               <a:ext uri="{FF2B5EF4-FFF2-40B4-BE49-F238E27FC236}">
-                <a16:creationId xmlns:a16="http://schemas.microsoft.com/office/drawing/2014/main" id="{6DFDB2A8-5AA0-40DD-A8F7-BDB9500A883B}"/>
+                <a16:creationId xmlns:a16="http://schemas.microsoft.com/office/drawing/2014/main" id="{BFA939F7-10E4-417C-9E80-686C2FD8672C}"/>
               </a:ext>
             </a:extLst>
           </p:cNvPr>
@@ -5630,7 +5642,7 @@
           <p:cNvPr id="30" name="Shape 28">
             <a:extLst xmlns:a="http://schemas.openxmlformats.org/drawingml/2006/main">
               <a:ext uri="{FF2B5EF4-FFF2-40B4-BE49-F238E27FC236}">
-                <a16:creationId xmlns:a16="http://schemas.microsoft.com/office/drawing/2014/main" id="{A751A7B3-88F4-45BE-829F-56FB82A8CFE1}"/>
+                <a16:creationId xmlns:a16="http://schemas.microsoft.com/office/drawing/2014/main" id="{76F4891D-E6E0-4DE9-830C-BBEAC17D5247}"/>
               </a:ext>
             </a:extLst>
           </p:cNvPr>
@@ -5670,7 +5682,7 @@
           <p:cNvPr id="31" name="Text 29">
             <a:extLst xmlns:a="http://schemas.openxmlformats.org/drawingml/2006/main">
               <a:ext uri="{FF2B5EF4-FFF2-40B4-BE49-F238E27FC236}">
-                <a16:creationId xmlns:a16="http://schemas.microsoft.com/office/drawing/2014/main" id="{DFEBAFF0-B479-4BC9-A52F-CE479C9BF8CA}"/>
+                <a16:creationId xmlns:a16="http://schemas.microsoft.com/office/drawing/2014/main" id="{31FE2530-891E-4698-A64E-9109C7202FED}"/>
               </a:ext>
             </a:extLst>
           </p:cNvPr>
@@ -5715,7 +5727,7 @@
           <p:cNvPr id="32" name="Shape 30">
             <a:extLst xmlns:a="http://schemas.openxmlformats.org/drawingml/2006/main">
               <a:ext uri="{FF2B5EF4-FFF2-40B4-BE49-F238E27FC236}">
-                <a16:creationId xmlns:a16="http://schemas.microsoft.com/office/drawing/2014/main" id="{3CF62664-F795-494B-9384-CBA54A35BD85}"/>
+                <a16:creationId xmlns:a16="http://schemas.microsoft.com/office/drawing/2014/main" id="{308F2CCC-BB12-4E7B-81D2-3E457439840F}"/>
               </a:ext>
             </a:extLst>
           </p:cNvPr>
@@ -5755,7 +5767,7 @@
           <p:cNvPr id="33" name="Text 31">
             <a:extLst xmlns:a="http://schemas.openxmlformats.org/drawingml/2006/main">
               <a:ext uri="{FF2B5EF4-FFF2-40B4-BE49-F238E27FC236}">
-                <a16:creationId xmlns:a16="http://schemas.microsoft.com/office/drawing/2014/main" id="{C6E57B51-D71A-4D47-B585-4EFA4B8C3F12}"/>
+                <a16:creationId xmlns:a16="http://schemas.microsoft.com/office/drawing/2014/main" id="{88F702C6-9B68-4A24-9ECD-7451F29B38BB}"/>
               </a:ext>
             </a:extLst>
           </p:cNvPr>
@@ -5800,7 +5812,7 @@
           <p:cNvPr id="34" name="Shape 32">
             <a:extLst xmlns:a="http://schemas.openxmlformats.org/drawingml/2006/main">
               <a:ext uri="{FF2B5EF4-FFF2-40B4-BE49-F238E27FC236}">
-                <a16:creationId xmlns:a16="http://schemas.microsoft.com/office/drawing/2014/main" id="{86084259-466A-4072-8ECA-7B85686AC718}"/>
+                <a16:creationId xmlns:a16="http://schemas.microsoft.com/office/drawing/2014/main" id="{3482E8B1-6680-49AC-9435-8BE384A1A147}"/>
               </a:ext>
             </a:extLst>
           </p:cNvPr>
@@ -5840,7 +5852,7 @@
           <p:cNvPr id="35" name="Text 33">
             <a:extLst xmlns:a="http://schemas.openxmlformats.org/drawingml/2006/main">
               <a:ext uri="{FF2B5EF4-FFF2-40B4-BE49-F238E27FC236}">
-                <a16:creationId xmlns:a16="http://schemas.microsoft.com/office/drawing/2014/main" id="{B3F8BD7E-02C3-44E1-A3C4-4A9FB2FE8667}"/>
+                <a16:creationId xmlns:a16="http://schemas.microsoft.com/office/drawing/2014/main" id="{BF931AC8-C408-4FFD-9B64-C2B92EBCEC55}"/>
               </a:ext>
             </a:extLst>
           </p:cNvPr>
@@ -5885,7 +5897,7 @@
           <p:cNvPr id="36" name="Shape 34">
             <a:extLst xmlns:a="http://schemas.openxmlformats.org/drawingml/2006/main">
               <a:ext uri="{FF2B5EF4-FFF2-40B4-BE49-F238E27FC236}">
-                <a16:creationId xmlns:a16="http://schemas.microsoft.com/office/drawing/2014/main" id="{406C9348-6489-47BD-86CD-EDE58D464F14}"/>
+                <a16:creationId xmlns:a16="http://schemas.microsoft.com/office/drawing/2014/main" id="{F0360A5C-B736-4AF8-A69B-43CBF8F72B62}"/>
               </a:ext>
             </a:extLst>
           </p:cNvPr>
@@ -5925,7 +5937,7 @@
           <p:cNvPr id="37" name="Text 35">
             <a:extLst xmlns:a="http://schemas.openxmlformats.org/drawingml/2006/main">
               <a:ext uri="{FF2B5EF4-FFF2-40B4-BE49-F238E27FC236}">
-                <a16:creationId xmlns:a16="http://schemas.microsoft.com/office/drawing/2014/main" id="{FA013DFC-8C42-4C55-B119-B15B9CF536EA}"/>
+                <a16:creationId xmlns:a16="http://schemas.microsoft.com/office/drawing/2014/main" id="{CDD7BC88-63BA-45A1-ACF3-C9B610003077}"/>
               </a:ext>
             </a:extLst>
           </p:cNvPr>
@@ -5970,7 +5982,7 @@
           <p:cNvPr id="38" name="Shape 36">
             <a:extLst xmlns:a="http://schemas.openxmlformats.org/drawingml/2006/main">
               <a:ext uri="{FF2B5EF4-FFF2-40B4-BE49-F238E27FC236}">
-                <a16:creationId xmlns:a16="http://schemas.microsoft.com/office/drawing/2014/main" id="{3E516FE6-928E-4C1D-BA27-B781FDD2BA3A}"/>
+                <a16:creationId xmlns:a16="http://schemas.microsoft.com/office/drawing/2014/main" id="{FD31E965-40F8-4EAB-BCD7-F3115635AFA0}"/>
               </a:ext>
             </a:extLst>
           </p:cNvPr>
@@ -6017,7 +6029,7 @@
           <p:cNvPr id="39" name="Text 37">
             <a:extLst xmlns:a="http://schemas.openxmlformats.org/drawingml/2006/main">
               <a:ext uri="{FF2B5EF4-FFF2-40B4-BE49-F238E27FC236}">
-                <a16:creationId xmlns:a16="http://schemas.microsoft.com/office/drawing/2014/main" id="{97F55B37-8EC3-4539-A1B1-7A6A1CCEF481}"/>
+                <a16:creationId xmlns:a16="http://schemas.microsoft.com/office/drawing/2014/main" id="{24E57056-A0E6-416E-91E9-41F39FBA15BC}"/>
               </a:ext>
             </a:extLst>
           </p:cNvPr>
@@ -6062,7 +6074,7 @@
           <p:cNvPr id="40" name="Text 38">
             <a:extLst xmlns:a="http://schemas.openxmlformats.org/drawingml/2006/main">
               <a:ext uri="{FF2B5EF4-FFF2-40B4-BE49-F238E27FC236}">
-                <a16:creationId xmlns:a16="http://schemas.microsoft.com/office/drawing/2014/main" id="{7846D7FD-C318-4C15-9236-4E81370B9FBD}"/>
+                <a16:creationId xmlns:a16="http://schemas.microsoft.com/office/drawing/2014/main" id="{64D6516D-F545-4442-B689-D851348770E4}"/>
               </a:ext>
             </a:extLst>
           </p:cNvPr>
@@ -6107,7 +6119,7 @@
           <p:cNvPr id="41" name="Text 39">
             <a:extLst xmlns:a="http://schemas.openxmlformats.org/drawingml/2006/main">
               <a:ext uri="{FF2B5EF4-FFF2-40B4-BE49-F238E27FC236}">
-                <a16:creationId xmlns:a16="http://schemas.microsoft.com/office/drawing/2014/main" id="{849634E1-F17C-4268-8793-C53C28D37B8E}"/>
+                <a16:creationId xmlns:a16="http://schemas.microsoft.com/office/drawing/2014/main" id="{741AB64A-4F07-4943-8089-DCBF587DB77F}"/>
               </a:ext>
             </a:extLst>
           </p:cNvPr>
@@ -6155,7 +6167,7 @@
           <p:cNvPr id="42" name="Shape 40">
             <a:extLst xmlns:a="http://schemas.openxmlformats.org/drawingml/2006/main">
               <a:ext uri="{FF2B5EF4-FFF2-40B4-BE49-F238E27FC236}">
-                <a16:creationId xmlns:a16="http://schemas.microsoft.com/office/drawing/2014/main" id="{5BB48E1C-BC6C-4E78-B3FF-9C8B94BAE7CD}"/>
+                <a16:creationId xmlns:a16="http://schemas.microsoft.com/office/drawing/2014/main" id="{C6138756-C457-4911-98BF-81F90F0F4F5F}"/>
               </a:ext>
             </a:extLst>
           </p:cNvPr>
@@ -6202,7 +6214,7 @@
           <p:cNvPr id="43" name="Text 41">
             <a:extLst xmlns:a="http://schemas.openxmlformats.org/drawingml/2006/main">
               <a:ext uri="{FF2B5EF4-FFF2-40B4-BE49-F238E27FC236}">
-                <a16:creationId xmlns:a16="http://schemas.microsoft.com/office/drawing/2014/main" id="{E24D4542-FB6E-4995-8D8F-1CDDB9A83578}"/>
+                <a16:creationId xmlns:a16="http://schemas.microsoft.com/office/drawing/2014/main" id="{6D098DFF-ED6E-4D45-BFB1-3C24F452603D}"/>
               </a:ext>
             </a:extLst>
           </p:cNvPr>
@@ -6247,7 +6259,7 @@
           <p:cNvPr id="44" name="Text 42">
             <a:extLst xmlns:a="http://schemas.openxmlformats.org/drawingml/2006/main">
               <a:ext uri="{FF2B5EF4-FFF2-40B4-BE49-F238E27FC236}">
-                <a16:creationId xmlns:a16="http://schemas.microsoft.com/office/drawing/2014/main" id="{A179ABE1-538A-4233-9B42-1ADA8CD7E554}"/>
+                <a16:creationId xmlns:a16="http://schemas.microsoft.com/office/drawing/2014/main" id="{71ACE5AF-9D79-4C38-A3B5-8F1CF6D43CC8}"/>
               </a:ext>
             </a:extLst>
           </p:cNvPr>
@@ -6292,7 +6304,7 @@
           <p:cNvPr id="45" name="Text 43">
             <a:extLst xmlns:a="http://schemas.openxmlformats.org/drawingml/2006/main">
               <a:ext uri="{FF2B5EF4-FFF2-40B4-BE49-F238E27FC236}">
-                <a16:creationId xmlns:a16="http://schemas.microsoft.com/office/drawing/2014/main" id="{187B3E68-5669-40E6-89FC-CB1A3764A296}"/>
+                <a16:creationId xmlns:a16="http://schemas.microsoft.com/office/drawing/2014/main" id="{071986E3-3369-4155-9195-06EE5167C25D}"/>
               </a:ext>
             </a:extLst>
           </p:cNvPr>
@@ -6340,7 +6352,7 @@
           <p:cNvPr id="46" name="Shape 44">
             <a:extLst xmlns:a="http://schemas.openxmlformats.org/drawingml/2006/main">
               <a:ext uri="{FF2B5EF4-FFF2-40B4-BE49-F238E27FC236}">
-                <a16:creationId xmlns:a16="http://schemas.microsoft.com/office/drawing/2014/main" id="{B694D149-8B5C-48D3-B55D-4664975EF8BF}"/>
+                <a16:creationId xmlns:a16="http://schemas.microsoft.com/office/drawing/2014/main" id="{688F1056-C55A-477C-80BA-9BD3BD0B2320}"/>
               </a:ext>
             </a:extLst>
           </p:cNvPr>
@@ -6387,7 +6399,7 @@
           <p:cNvPr id="47" name="Text 45">
             <a:extLst xmlns:a="http://schemas.openxmlformats.org/drawingml/2006/main">
               <a:ext uri="{FF2B5EF4-FFF2-40B4-BE49-F238E27FC236}">
-                <a16:creationId xmlns:a16="http://schemas.microsoft.com/office/drawing/2014/main" id="{E9023F70-D0CA-4601-8952-D058FAA8118F}"/>
+                <a16:creationId xmlns:a16="http://schemas.microsoft.com/office/drawing/2014/main" id="{D922A04B-25B6-461C-9AF7-2E27888037E1}"/>
               </a:ext>
             </a:extLst>
           </p:cNvPr>
@@ -6432,7 +6444,7 @@
           <p:cNvPr id="48" name="Text 46">
             <a:extLst xmlns:a="http://schemas.openxmlformats.org/drawingml/2006/main">
               <a:ext uri="{FF2B5EF4-FFF2-40B4-BE49-F238E27FC236}">
-                <a16:creationId xmlns:a16="http://schemas.microsoft.com/office/drawing/2014/main" id="{199E7C2E-3A68-40E0-AAB7-0F26573E820D}"/>
+                <a16:creationId xmlns:a16="http://schemas.microsoft.com/office/drawing/2014/main" id="{CCA41507-36DE-4C54-B460-E38EDA5656D9}"/>
               </a:ext>
             </a:extLst>
           </p:cNvPr>
@@ -6477,7 +6489,7 @@
           <p:cNvPr id="49" name="Text 47">
             <a:extLst xmlns:a="http://schemas.openxmlformats.org/drawingml/2006/main">
               <a:ext uri="{FF2B5EF4-FFF2-40B4-BE49-F238E27FC236}">
-                <a16:creationId xmlns:a16="http://schemas.microsoft.com/office/drawing/2014/main" id="{FF3D86DB-A306-47FB-8B13-F751D45613FE}"/>
+                <a16:creationId xmlns:a16="http://schemas.microsoft.com/office/drawing/2014/main" id="{298A972B-B3F3-4A3D-BDE1-91628229B3CA}"/>
               </a:ext>
             </a:extLst>
           </p:cNvPr>
@@ -6525,7 +6537,7 @@
           <p:cNvPr id="50" name="Shape 48">
             <a:extLst xmlns:a="http://schemas.openxmlformats.org/drawingml/2006/main">
               <a:ext uri="{FF2B5EF4-FFF2-40B4-BE49-F238E27FC236}">
-                <a16:creationId xmlns:a16="http://schemas.microsoft.com/office/drawing/2014/main" id="{3C5CA54B-D02F-4994-8252-830D497E6481}"/>
+                <a16:creationId xmlns:a16="http://schemas.microsoft.com/office/drawing/2014/main" id="{CC90A260-D8E0-4447-9051-43229CC7F1DC}"/>
               </a:ext>
             </a:extLst>
           </p:cNvPr>
@@ -6572,7 +6584,7 @@
           <p:cNvPr id="51" name="Text 49">
             <a:extLst xmlns:a="http://schemas.openxmlformats.org/drawingml/2006/main">
               <a:ext uri="{FF2B5EF4-FFF2-40B4-BE49-F238E27FC236}">
-                <a16:creationId xmlns:a16="http://schemas.microsoft.com/office/drawing/2014/main" id="{C73C1333-6417-42DE-BA90-94F46C21F2DB}"/>
+                <a16:creationId xmlns:a16="http://schemas.microsoft.com/office/drawing/2014/main" id="{CF403D51-E42B-47EB-B4A3-DC446E6853BB}"/>
               </a:ext>
             </a:extLst>
           </p:cNvPr>
@@ -6618,7 +6630,7 @@
     </p:spTree>
     <p:extLst>
       <p:ext uri="{BB962C8B-B14F-4D97-AF65-F5344CB8AC3E}">
-        <p14:creationId xmlns:p14="http://schemas.microsoft.com/office/powerpoint/2010/main" val="284763771"/>
+        <p14:creationId xmlns:p14="http://schemas.microsoft.com/office/powerpoint/2010/main" val="16682408"/>
       </p:ext>
     </p:extLst>
   </p:cSld>
@@ -6649,7 +6661,7 @@
           <p:cNvPr id="2" name="Text 0">
             <a:extLst xmlns:a="http://schemas.openxmlformats.org/drawingml/2006/main">
               <a:ext uri="{FF2B5EF4-FFF2-40B4-BE49-F238E27FC236}">
-                <a16:creationId xmlns:a16="http://schemas.microsoft.com/office/drawing/2014/main" id="{7E843DC1-44C9-43D4-B011-D716B620E20A}"/>
+                <a16:creationId xmlns:a16="http://schemas.microsoft.com/office/drawing/2014/main" id="{C9FE3A47-37FF-454E-A4ED-EF2BDA76839F}"/>
               </a:ext>
             </a:extLst>
           </p:cNvPr>
@@ -6694,7 +6706,7 @@
           <p:cNvPr id="3" name="Text 1">
             <a:extLst xmlns:a="http://schemas.openxmlformats.org/drawingml/2006/main">
               <a:ext uri="{FF2B5EF4-FFF2-40B4-BE49-F238E27FC236}">
-                <a16:creationId xmlns:a16="http://schemas.microsoft.com/office/drawing/2014/main" id="{AE4A94A6-0521-4717-8E32-3863DE94FEE4}"/>
+                <a16:creationId xmlns:a16="http://schemas.microsoft.com/office/drawing/2014/main" id="{2F65C90F-4D82-442A-8492-27EEBCE4ADA7}"/>
               </a:ext>
             </a:extLst>
           </p:cNvPr>
@@ -6739,7 +6751,7 @@
           <p:cNvPr id="4" name="Text 2">
             <a:extLst xmlns:a="http://schemas.openxmlformats.org/drawingml/2006/main">
               <a:ext uri="{FF2B5EF4-FFF2-40B4-BE49-F238E27FC236}">
-                <a16:creationId xmlns:a16="http://schemas.microsoft.com/office/drawing/2014/main" id="{E811B333-51D1-46EB-9EE6-93E7293178E1}"/>
+                <a16:creationId xmlns:a16="http://schemas.microsoft.com/office/drawing/2014/main" id="{6E7C94BC-593C-4EC1-AFC3-54C86328126D}"/>
               </a:ext>
             </a:extLst>
           </p:cNvPr>
@@ -6784,7 +6796,7 @@
           <p:cNvPr id="5" name="Text 3">
             <a:extLst xmlns:a="http://schemas.openxmlformats.org/drawingml/2006/main">
               <a:ext uri="{FF2B5EF4-FFF2-40B4-BE49-F238E27FC236}">
-                <a16:creationId xmlns:a16="http://schemas.microsoft.com/office/drawing/2014/main" id="{39B7DAE2-AAE7-4132-99E3-1258AC801E5F}"/>
+                <a16:creationId xmlns:a16="http://schemas.microsoft.com/office/drawing/2014/main" id="{BDCDD6DE-B663-4A2E-8C00-CF5449FC2FA4}"/>
               </a:ext>
             </a:extLst>
           </p:cNvPr>
@@ -6829,7 +6841,7 @@
           <p:cNvPr id="6" name="Text 4">
             <a:extLst xmlns:a="http://schemas.openxmlformats.org/drawingml/2006/main">
               <a:ext uri="{FF2B5EF4-FFF2-40B4-BE49-F238E27FC236}">
-                <a16:creationId xmlns:a16="http://schemas.microsoft.com/office/drawing/2014/main" id="{BEE5E40A-8BC6-4682-BC66-808D7DD8C700}"/>
+                <a16:creationId xmlns:a16="http://schemas.microsoft.com/office/drawing/2014/main" id="{86E66930-FE27-415C-8001-2678CD5579BF}"/>
               </a:ext>
             </a:extLst>
           </p:cNvPr>
@@ -6924,7 +6936,7 @@
           <p:cNvPr id="7" name="Shape 5">
             <a:extLst xmlns:a="http://schemas.openxmlformats.org/drawingml/2006/main">
               <a:ext uri="{FF2B5EF4-FFF2-40B4-BE49-F238E27FC236}">
-                <a16:creationId xmlns:a16="http://schemas.microsoft.com/office/drawing/2014/main" id="{403D8927-93D2-42FD-B3ED-DF45B7D231A6}"/>
+                <a16:creationId xmlns:a16="http://schemas.microsoft.com/office/drawing/2014/main" id="{DA490126-7228-4EFF-8850-F9137FEB3ACF}"/>
               </a:ext>
             </a:extLst>
           </p:cNvPr>
@@ -6971,7 +6983,7 @@
           <p:cNvPr id="8" name="Text 6">
             <a:extLst xmlns:a="http://schemas.openxmlformats.org/drawingml/2006/main">
               <a:ext uri="{FF2B5EF4-FFF2-40B4-BE49-F238E27FC236}">
-                <a16:creationId xmlns:a16="http://schemas.microsoft.com/office/drawing/2014/main" id="{9E539087-C8AB-4CD3-98F8-E0A172F8E932}"/>
+                <a16:creationId xmlns:a16="http://schemas.microsoft.com/office/drawing/2014/main" id="{D95DBC86-CBAF-49A0-997B-0B7AD0BF1637}"/>
               </a:ext>
             </a:extLst>
           </p:cNvPr>
@@ -7016,7 +7028,7 @@
           <p:cNvPr id="9" name="Text 7">
             <a:extLst xmlns:a="http://schemas.openxmlformats.org/drawingml/2006/main">
               <a:ext uri="{FF2B5EF4-FFF2-40B4-BE49-F238E27FC236}">
-                <a16:creationId xmlns:a16="http://schemas.microsoft.com/office/drawing/2014/main" id="{3923DA40-8519-4C58-8F60-5BA934CC0DE4}"/>
+                <a16:creationId xmlns:a16="http://schemas.microsoft.com/office/drawing/2014/main" id="{6C88B10E-FDA2-45FF-93CF-93DA1FCA63DC}"/>
               </a:ext>
             </a:extLst>
           </p:cNvPr>
@@ -7064,7 +7076,7 @@
           <p:cNvPr id="10" name="Shape 8">
             <a:extLst xmlns:a="http://schemas.openxmlformats.org/drawingml/2006/main">
               <a:ext uri="{FF2B5EF4-FFF2-40B4-BE49-F238E27FC236}">
-                <a16:creationId xmlns:a16="http://schemas.microsoft.com/office/drawing/2014/main" id="{29AAD462-4322-4E00-8DE4-495498372629}"/>
+                <a16:creationId xmlns:a16="http://schemas.microsoft.com/office/drawing/2014/main" id="{7C58C2EA-8DDC-4A12-9BA2-C9EAFB2F4C0D}"/>
               </a:ext>
             </a:extLst>
           </p:cNvPr>
@@ -7111,7 +7123,7 @@
           <p:cNvPr id="11" name="Text 9">
             <a:extLst xmlns:a="http://schemas.openxmlformats.org/drawingml/2006/main">
               <a:ext uri="{FF2B5EF4-FFF2-40B4-BE49-F238E27FC236}">
-                <a16:creationId xmlns:a16="http://schemas.microsoft.com/office/drawing/2014/main" id="{37BFDAAF-9FFB-4C90-9F62-8D78C8C4862A}"/>
+                <a16:creationId xmlns:a16="http://schemas.microsoft.com/office/drawing/2014/main" id="{EEC43439-8CFD-4374-AB8B-3F9891FB0CE7}"/>
               </a:ext>
             </a:extLst>
           </p:cNvPr>
@@ -7156,7 +7168,7 @@
           <p:cNvPr id="12" name="Text 10">
             <a:extLst xmlns:a="http://schemas.openxmlformats.org/drawingml/2006/main">
               <a:ext uri="{FF2B5EF4-FFF2-40B4-BE49-F238E27FC236}">
-                <a16:creationId xmlns:a16="http://schemas.microsoft.com/office/drawing/2014/main" id="{655F9A15-9CC3-4F39-B0F3-2DD6B34E2FCC}"/>
+                <a16:creationId xmlns:a16="http://schemas.microsoft.com/office/drawing/2014/main" id="{58C4652C-D11A-470A-83B1-4498F140CD01}"/>
               </a:ext>
             </a:extLst>
           </p:cNvPr>
@@ -7201,7 +7213,7 @@
           <p:cNvPr id="13" name="Text 11">
             <a:extLst xmlns:a="http://schemas.openxmlformats.org/drawingml/2006/main">
               <a:ext uri="{FF2B5EF4-FFF2-40B4-BE49-F238E27FC236}">
-                <a16:creationId xmlns:a16="http://schemas.microsoft.com/office/drawing/2014/main" id="{57B4E528-0003-4765-A8A5-18E9EC5188E0}"/>
+                <a16:creationId xmlns:a16="http://schemas.microsoft.com/office/drawing/2014/main" id="{169E969E-D533-4F01-BA07-6AE8D6C307AB}"/>
               </a:ext>
             </a:extLst>
           </p:cNvPr>
@@ -7246,7 +7258,7 @@
           <p:cNvPr id="14" name="Text 12">
             <a:extLst xmlns:a="http://schemas.openxmlformats.org/drawingml/2006/main">
               <a:ext uri="{FF2B5EF4-FFF2-40B4-BE49-F238E27FC236}">
-                <a16:creationId xmlns:a16="http://schemas.microsoft.com/office/drawing/2014/main" id="{BB33744A-2E0B-4D90-B5FB-3F82BF79D10B}"/>
+                <a16:creationId xmlns:a16="http://schemas.microsoft.com/office/drawing/2014/main" id="{BE6EDCD4-84D7-4C98-98E5-79EAD712B856}"/>
               </a:ext>
             </a:extLst>
           </p:cNvPr>
@@ -7291,7 +7303,7 @@
           <p:cNvPr id="15" name="Text 13">
             <a:extLst xmlns:a="http://schemas.openxmlformats.org/drawingml/2006/main">
               <a:ext uri="{FF2B5EF4-FFF2-40B4-BE49-F238E27FC236}">
-                <a16:creationId xmlns:a16="http://schemas.microsoft.com/office/drawing/2014/main" id="{F7A06EF0-D99E-4B16-9DC4-E2E410813398}"/>
+                <a16:creationId xmlns:a16="http://schemas.microsoft.com/office/drawing/2014/main" id="{7AFC4A13-7E13-4AE4-B169-E8E05EA5CA72}"/>
               </a:ext>
             </a:extLst>
           </p:cNvPr>
@@ -7336,7 +7348,7 @@
           <p:cNvPr id="16" name="Text 14">
             <a:extLst xmlns:a="http://schemas.openxmlformats.org/drawingml/2006/main">
               <a:ext uri="{FF2B5EF4-FFF2-40B4-BE49-F238E27FC236}">
-                <a16:creationId xmlns:a16="http://schemas.microsoft.com/office/drawing/2014/main" id="{5B617684-C1B0-43A7-997F-75C94748D54C}"/>
+                <a16:creationId xmlns:a16="http://schemas.microsoft.com/office/drawing/2014/main" id="{656C3771-B781-4362-8C4C-1BABBFFA61DC}"/>
               </a:ext>
             </a:extLst>
           </p:cNvPr>
@@ -7381,7 +7393,7 @@
           <p:cNvPr id="17" name="Text 15">
             <a:extLst xmlns:a="http://schemas.openxmlformats.org/drawingml/2006/main">
               <a:ext uri="{FF2B5EF4-FFF2-40B4-BE49-F238E27FC236}">
-                <a16:creationId xmlns:a16="http://schemas.microsoft.com/office/drawing/2014/main" id="{5BCD3536-BC84-4563-8ABA-CDE2185A5C36}"/>
+                <a16:creationId xmlns:a16="http://schemas.microsoft.com/office/drawing/2014/main" id="{F82AEF11-B2F0-4DBB-BDA9-B79D8A2180DA}"/>
               </a:ext>
             </a:extLst>
           </p:cNvPr>
@@ -7426,7 +7438,7 @@
           <p:cNvPr id="18" name="Shape 16">
             <a:extLst xmlns:a="http://schemas.openxmlformats.org/drawingml/2006/main">
               <a:ext uri="{FF2B5EF4-FFF2-40B4-BE49-F238E27FC236}">
-                <a16:creationId xmlns:a16="http://schemas.microsoft.com/office/drawing/2014/main" id="{02665107-7BAD-4237-B19A-F00EB657AECD}"/>
+                <a16:creationId xmlns:a16="http://schemas.microsoft.com/office/drawing/2014/main" id="{D0467D4C-E0FC-4A18-9F0F-ED79F2836730}"/>
               </a:ext>
             </a:extLst>
           </p:cNvPr>
@@ -7462,7 +7474,7 @@
           <p:cNvPr id="19" name="Text 17">
             <a:extLst xmlns:a="http://schemas.openxmlformats.org/drawingml/2006/main">
               <a:ext uri="{FF2B5EF4-FFF2-40B4-BE49-F238E27FC236}">
-                <a16:creationId xmlns:a16="http://schemas.microsoft.com/office/drawing/2014/main" id="{AD7E6625-3171-420F-8799-3269CB8D3DCB}"/>
+                <a16:creationId xmlns:a16="http://schemas.microsoft.com/office/drawing/2014/main" id="{BB5A93F1-E241-49D6-9BE9-5BE953FA7146}"/>
               </a:ext>
             </a:extLst>
           </p:cNvPr>
@@ -7507,7 +7519,7 @@
           <p:cNvPr id="20" name="Text 18">
             <a:extLst xmlns:a="http://schemas.openxmlformats.org/drawingml/2006/main">
               <a:ext uri="{FF2B5EF4-FFF2-40B4-BE49-F238E27FC236}">
-                <a16:creationId xmlns:a16="http://schemas.microsoft.com/office/drawing/2014/main" id="{2681E1D8-0F44-4101-ADA8-D2DEA3490346}"/>
+                <a16:creationId xmlns:a16="http://schemas.microsoft.com/office/drawing/2014/main" id="{97256384-C8DC-4D8C-AD9B-51AC277829A7}"/>
               </a:ext>
             </a:extLst>
           </p:cNvPr>
@@ -7555,7 +7567,7 @@
           <p:cNvPr id="21" name="Text 19">
             <a:extLst xmlns:a="http://schemas.openxmlformats.org/drawingml/2006/main">
               <a:ext uri="{FF2B5EF4-FFF2-40B4-BE49-F238E27FC236}">
-                <a16:creationId xmlns:a16="http://schemas.microsoft.com/office/drawing/2014/main" id="{CEB59541-A941-4DF1-9472-E56DD87D3661}"/>
+                <a16:creationId xmlns:a16="http://schemas.microsoft.com/office/drawing/2014/main" id="{9F7DFE80-8AD0-4C4C-94AE-2E8F41698733}"/>
               </a:ext>
             </a:extLst>
           </p:cNvPr>
@@ -7603,7 +7615,7 @@
           <p:cNvPr id="22" name="Shape 20">
             <a:extLst xmlns:a="http://schemas.openxmlformats.org/drawingml/2006/main">
               <a:ext uri="{FF2B5EF4-FFF2-40B4-BE49-F238E27FC236}">
-                <a16:creationId xmlns:a16="http://schemas.microsoft.com/office/drawing/2014/main" id="{62A21F59-D243-49A2-9DDB-AFF66646DEC3}"/>
+                <a16:creationId xmlns:a16="http://schemas.microsoft.com/office/drawing/2014/main" id="{CFF6CCF6-B090-4ECC-B767-A3C041F23AC0}"/>
               </a:ext>
             </a:extLst>
           </p:cNvPr>
@@ -7650,7 +7662,7 @@
           <p:cNvPr id="23" name="Text 21">
             <a:extLst xmlns:a="http://schemas.openxmlformats.org/drawingml/2006/main">
               <a:ext uri="{FF2B5EF4-FFF2-40B4-BE49-F238E27FC236}">
-                <a16:creationId xmlns:a16="http://schemas.microsoft.com/office/drawing/2014/main" id="{80D03781-4399-4812-93AD-3E68BF0EB447}"/>
+                <a16:creationId xmlns:a16="http://schemas.microsoft.com/office/drawing/2014/main" id="{0DD723B8-1A83-41D6-BACF-E5FFB2BAD0D2}"/>
               </a:ext>
             </a:extLst>
           </p:cNvPr>
@@ -7707,7 +7719,7 @@
     </p:spTree>
     <p:extLst>
       <p:ext uri="{BB962C8B-B14F-4D97-AF65-F5344CB8AC3E}">
-        <p14:creationId xmlns:p14="http://schemas.microsoft.com/office/powerpoint/2010/main" val="1081128559"/>
+        <p14:creationId xmlns:p14="http://schemas.microsoft.com/office/powerpoint/2010/main" val="1549054632"/>
       </p:ext>
     </p:extLst>
   </p:cSld>
@@ -7738,7 +7750,7 @@
           <p:cNvPr id="2" name="Text 0">
             <a:extLst xmlns:a="http://schemas.openxmlformats.org/drawingml/2006/main">
               <a:ext uri="{FF2B5EF4-FFF2-40B4-BE49-F238E27FC236}">
-                <a16:creationId xmlns:a16="http://schemas.microsoft.com/office/drawing/2014/main" id="{C64BB705-3B34-41FD-BE5A-8D5F68363673}"/>
+                <a16:creationId xmlns:a16="http://schemas.microsoft.com/office/drawing/2014/main" id="{4DA29BCC-3FC3-40B0-8A44-393BA99A0B62}"/>
               </a:ext>
             </a:extLst>
           </p:cNvPr>
@@ -7783,7 +7795,7 @@
           <p:cNvPr id="3" name="Text 1">
             <a:extLst xmlns:a="http://schemas.openxmlformats.org/drawingml/2006/main">
               <a:ext uri="{FF2B5EF4-FFF2-40B4-BE49-F238E27FC236}">
-                <a16:creationId xmlns:a16="http://schemas.microsoft.com/office/drawing/2014/main" id="{5944B903-6E05-4FA7-96F4-6FD6C3736BE5}"/>
+                <a16:creationId xmlns:a16="http://schemas.microsoft.com/office/drawing/2014/main" id="{E17F2F97-958A-4785-8CB9-47075F2E303A}"/>
               </a:ext>
             </a:extLst>
           </p:cNvPr>
@@ -7828,7 +7840,7 @@
           <p:cNvPr id="4" name="Text 2">
             <a:extLst xmlns:a="http://schemas.openxmlformats.org/drawingml/2006/main">
               <a:ext uri="{FF2B5EF4-FFF2-40B4-BE49-F238E27FC236}">
-                <a16:creationId xmlns:a16="http://schemas.microsoft.com/office/drawing/2014/main" id="{6C3648BD-C19C-4B65-AEAF-C1567821F7F9}"/>
+                <a16:creationId xmlns:a16="http://schemas.microsoft.com/office/drawing/2014/main" id="{8E484AF0-7F1A-40B7-BC06-84C254C930C2}"/>
               </a:ext>
             </a:extLst>
           </p:cNvPr>
@@ -7873,7 +7885,7 @@
           <p:cNvPr id="5" name="Text 3">
             <a:extLst xmlns:a="http://schemas.openxmlformats.org/drawingml/2006/main">
               <a:ext uri="{FF2B5EF4-FFF2-40B4-BE49-F238E27FC236}">
-                <a16:creationId xmlns:a16="http://schemas.microsoft.com/office/drawing/2014/main" id="{219E84FF-B9F2-4A95-A87C-8A80781E68AE}"/>
+                <a16:creationId xmlns:a16="http://schemas.microsoft.com/office/drawing/2014/main" id="{80BFAFB3-DDA4-4CCC-85B3-3CDA8D3D05A7}"/>
               </a:ext>
             </a:extLst>
           </p:cNvPr>
@@ -7918,7 +7930,7 @@
           <p:cNvPr id="6" name="Text 4">
             <a:extLst xmlns:a="http://schemas.openxmlformats.org/drawingml/2006/main">
               <a:ext uri="{FF2B5EF4-FFF2-40B4-BE49-F238E27FC236}">
-                <a16:creationId xmlns:a16="http://schemas.microsoft.com/office/drawing/2014/main" id="{5F94EAC8-B452-4DF0-9DE9-E6F3B9A052A9}"/>
+                <a16:creationId xmlns:a16="http://schemas.microsoft.com/office/drawing/2014/main" id="{484C000D-AB41-4E24-A3E2-8119CF5F6702}"/>
               </a:ext>
             </a:extLst>
           </p:cNvPr>
@@ -7966,7 +7978,7 @@
           <p:cNvPr id="7" name="Shape 5">
             <a:extLst xmlns:a="http://schemas.openxmlformats.org/drawingml/2006/main">
               <a:ext uri="{FF2B5EF4-FFF2-40B4-BE49-F238E27FC236}">
-                <a16:creationId xmlns:a16="http://schemas.microsoft.com/office/drawing/2014/main" id="{AEE3FCB0-45E8-44B0-92E5-3E6598C83D0A}"/>
+                <a16:creationId xmlns:a16="http://schemas.microsoft.com/office/drawing/2014/main" id="{72C667E9-E68E-4146-B9AB-CDD7BC123A4B}"/>
               </a:ext>
             </a:extLst>
           </p:cNvPr>
@@ -8013,7 +8025,7 @@
           <p:cNvPr id="8" name="Text 6">
             <a:extLst xmlns:a="http://schemas.openxmlformats.org/drawingml/2006/main">
               <a:ext uri="{FF2B5EF4-FFF2-40B4-BE49-F238E27FC236}">
-                <a16:creationId xmlns:a16="http://schemas.microsoft.com/office/drawing/2014/main" id="{24812D97-E0FA-464D-BCF1-F57581C4BFA6}"/>
+                <a16:creationId xmlns:a16="http://schemas.microsoft.com/office/drawing/2014/main" id="{CC227831-6E31-47E9-8BC5-E86BD763B5B9}"/>
               </a:ext>
             </a:extLst>
           </p:cNvPr>
@@ -8058,7 +8070,7 @@
           <p:cNvPr id="9" name="Text 7">
             <a:extLst xmlns:a="http://schemas.openxmlformats.org/drawingml/2006/main">
               <a:ext uri="{FF2B5EF4-FFF2-40B4-BE49-F238E27FC236}">
-                <a16:creationId xmlns:a16="http://schemas.microsoft.com/office/drawing/2014/main" id="{4A29A5A1-17ED-4127-BCFD-5B6959C0F1B9}"/>
+                <a16:creationId xmlns:a16="http://schemas.microsoft.com/office/drawing/2014/main" id="{0CB36790-9DEC-4886-8814-91E6263E4D17}"/>
               </a:ext>
             </a:extLst>
           </p:cNvPr>
@@ -8106,7 +8118,7 @@
           <p:cNvPr id="10" name="Shape 8">
             <a:extLst xmlns:a="http://schemas.openxmlformats.org/drawingml/2006/main">
               <a:ext uri="{FF2B5EF4-FFF2-40B4-BE49-F238E27FC236}">
-                <a16:creationId xmlns:a16="http://schemas.microsoft.com/office/drawing/2014/main" id="{71E149B7-819E-4CDF-83B9-DB5BBC9EF31B}"/>
+                <a16:creationId xmlns:a16="http://schemas.microsoft.com/office/drawing/2014/main" id="{75702976-4271-4554-B064-5AD818FDE992}"/>
               </a:ext>
             </a:extLst>
           </p:cNvPr>
@@ -8153,7 +8165,7 @@
           <p:cNvPr id="11" name="Text 9">
             <a:extLst xmlns:a="http://schemas.openxmlformats.org/drawingml/2006/main">
               <a:ext uri="{FF2B5EF4-FFF2-40B4-BE49-F238E27FC236}">
-                <a16:creationId xmlns:a16="http://schemas.microsoft.com/office/drawing/2014/main" id="{75233F26-39DE-4C84-A886-ED32497A3CE2}"/>
+                <a16:creationId xmlns:a16="http://schemas.microsoft.com/office/drawing/2014/main" id="{5FABEEB3-D93A-49DD-8B4A-17629D98BEAC}"/>
               </a:ext>
             </a:extLst>
           </p:cNvPr>
@@ -8201,7 +8213,7 @@
           <p:cNvPr id="12" name="Shape 10">
             <a:extLst xmlns:a="http://schemas.openxmlformats.org/drawingml/2006/main">
               <a:ext uri="{FF2B5EF4-FFF2-40B4-BE49-F238E27FC236}">
-                <a16:creationId xmlns:a16="http://schemas.microsoft.com/office/drawing/2014/main" id="{843DB41C-F9F0-476A-AA42-7D8257AC71A9}"/>
+                <a16:creationId xmlns:a16="http://schemas.microsoft.com/office/drawing/2014/main" id="{3AFC5A08-21C9-4B9E-A46D-9F7D89FC2B72}"/>
               </a:ext>
             </a:extLst>
           </p:cNvPr>
@@ -8248,7 +8260,7 @@
           <p:cNvPr id="13" name="Text 11">
             <a:extLst xmlns:a="http://schemas.openxmlformats.org/drawingml/2006/main">
               <a:ext uri="{FF2B5EF4-FFF2-40B4-BE49-F238E27FC236}">
-                <a16:creationId xmlns:a16="http://schemas.microsoft.com/office/drawing/2014/main" id="{97FEBF1C-6177-4B47-9417-1F2DD8E8700D}"/>
+                <a16:creationId xmlns:a16="http://schemas.microsoft.com/office/drawing/2014/main" id="{7C1EE0E7-FB11-411A-99EA-043777542F05}"/>
               </a:ext>
             </a:extLst>
           </p:cNvPr>
@@ -8293,7 +8305,7 @@
           <p:cNvPr id="14" name="Text 12">
             <a:extLst xmlns:a="http://schemas.openxmlformats.org/drawingml/2006/main">
               <a:ext uri="{FF2B5EF4-FFF2-40B4-BE49-F238E27FC236}">
-                <a16:creationId xmlns:a16="http://schemas.microsoft.com/office/drawing/2014/main" id="{07634137-E481-438D-9A29-93145CC078B1}"/>
+                <a16:creationId xmlns:a16="http://schemas.microsoft.com/office/drawing/2014/main" id="{9C6CAB95-B252-4BB9-A49E-156C616FAF57}"/>
               </a:ext>
             </a:extLst>
           </p:cNvPr>
@@ -8338,7 +8350,7 @@
           <p:cNvPr id="15" name="Text 13">
             <a:extLst xmlns:a="http://schemas.openxmlformats.org/drawingml/2006/main">
               <a:ext uri="{FF2B5EF4-FFF2-40B4-BE49-F238E27FC236}">
-                <a16:creationId xmlns:a16="http://schemas.microsoft.com/office/drawing/2014/main" id="{C838A61F-5B71-4630-A4AC-DFCE7D104DBA}"/>
+                <a16:creationId xmlns:a16="http://schemas.microsoft.com/office/drawing/2014/main" id="{F429579F-B3B8-4457-A284-445ED1529EF4}"/>
               </a:ext>
             </a:extLst>
           </p:cNvPr>
@@ -8383,7 +8395,7 @@
           <p:cNvPr id="16" name="Text 14">
             <a:extLst xmlns:a="http://schemas.openxmlformats.org/drawingml/2006/main">
               <a:ext uri="{FF2B5EF4-FFF2-40B4-BE49-F238E27FC236}">
-                <a16:creationId xmlns:a16="http://schemas.microsoft.com/office/drawing/2014/main" id="{5BB31123-47C2-42BD-95C5-9250745A2A00}"/>
+                <a16:creationId xmlns:a16="http://schemas.microsoft.com/office/drawing/2014/main" id="{536BA493-DD2F-49AB-9C93-DE8EBBF0E7AE}"/>
               </a:ext>
             </a:extLst>
           </p:cNvPr>
@@ -8428,7 +8440,7 @@
           <p:cNvPr id="17" name="Text 15">
             <a:extLst xmlns:a="http://schemas.openxmlformats.org/drawingml/2006/main">
               <a:ext uri="{FF2B5EF4-FFF2-40B4-BE49-F238E27FC236}">
-                <a16:creationId xmlns:a16="http://schemas.microsoft.com/office/drawing/2014/main" id="{5EC16913-E56E-41A7-9A25-C58769CA4CFD}"/>
+                <a16:creationId xmlns:a16="http://schemas.microsoft.com/office/drawing/2014/main" id="{26EA600F-6E9E-4858-A74D-01052C2DEB23}"/>
               </a:ext>
             </a:extLst>
           </p:cNvPr>
@@ -8473,7 +8485,7 @@
           <p:cNvPr id="18" name="Text 16">
             <a:extLst xmlns:a="http://schemas.openxmlformats.org/drawingml/2006/main">
               <a:ext uri="{FF2B5EF4-FFF2-40B4-BE49-F238E27FC236}">
-                <a16:creationId xmlns:a16="http://schemas.microsoft.com/office/drawing/2014/main" id="{CA0229F5-46C8-4FC1-818D-B05CEA2EE7B3}"/>
+                <a16:creationId xmlns:a16="http://schemas.microsoft.com/office/drawing/2014/main" id="{6FF00005-6513-4F26-93C8-E2574EB86B0B}"/>
               </a:ext>
             </a:extLst>
           </p:cNvPr>
@@ -8518,7 +8530,7 @@
           <p:cNvPr id="19" name="Text 17">
             <a:extLst xmlns:a="http://schemas.openxmlformats.org/drawingml/2006/main">
               <a:ext uri="{FF2B5EF4-FFF2-40B4-BE49-F238E27FC236}">
-                <a16:creationId xmlns:a16="http://schemas.microsoft.com/office/drawing/2014/main" id="{B6E48002-47D6-4239-A351-873E1889F7C2}"/>
+                <a16:creationId xmlns:a16="http://schemas.microsoft.com/office/drawing/2014/main" id="{FF126A45-CC77-4815-9EFF-261FD9386935}"/>
               </a:ext>
             </a:extLst>
           </p:cNvPr>
@@ -8563,7 +8575,7 @@
           <p:cNvPr id="20" name="Shape 18">
             <a:extLst xmlns:a="http://schemas.openxmlformats.org/drawingml/2006/main">
               <a:ext uri="{FF2B5EF4-FFF2-40B4-BE49-F238E27FC236}">
-                <a16:creationId xmlns:a16="http://schemas.microsoft.com/office/drawing/2014/main" id="{BD64B675-AD4E-419C-94E5-A989653CAB1F}"/>
+                <a16:creationId xmlns:a16="http://schemas.microsoft.com/office/drawing/2014/main" id="{B7916788-A386-411C-8A2B-7733DC86DE5A}"/>
               </a:ext>
             </a:extLst>
           </p:cNvPr>
@@ -8599,7 +8611,7 @@
           <p:cNvPr id="21" name="Text 19">
             <a:extLst xmlns:a="http://schemas.openxmlformats.org/drawingml/2006/main">
               <a:ext uri="{FF2B5EF4-FFF2-40B4-BE49-F238E27FC236}">
-                <a16:creationId xmlns:a16="http://schemas.microsoft.com/office/drawing/2014/main" id="{9892CBEC-3A02-46B8-BA54-20A3373268EB}"/>
+                <a16:creationId xmlns:a16="http://schemas.microsoft.com/office/drawing/2014/main" id="{83BCCB1E-7F34-48DA-91B8-6DD2AF3E0518}"/>
               </a:ext>
             </a:extLst>
           </p:cNvPr>
@@ -8644,7 +8656,7 @@
           <p:cNvPr id="22" name="Text 20">
             <a:extLst xmlns:a="http://schemas.openxmlformats.org/drawingml/2006/main">
               <a:ext uri="{FF2B5EF4-FFF2-40B4-BE49-F238E27FC236}">
-                <a16:creationId xmlns:a16="http://schemas.microsoft.com/office/drawing/2014/main" id="{05EF513F-B381-46B4-B86D-B790DDA8540F}"/>
+                <a16:creationId xmlns:a16="http://schemas.microsoft.com/office/drawing/2014/main" id="{3FBFD5C4-2870-4105-B417-F99D61302669}"/>
               </a:ext>
             </a:extLst>
           </p:cNvPr>
@@ -8689,7 +8701,7 @@
           <p:cNvPr id="23" name="Text 21">
             <a:extLst xmlns:a="http://schemas.openxmlformats.org/drawingml/2006/main">
               <a:ext uri="{FF2B5EF4-FFF2-40B4-BE49-F238E27FC236}">
-                <a16:creationId xmlns:a16="http://schemas.microsoft.com/office/drawing/2014/main" id="{F8E6DC26-8E2C-4C7C-BA92-04996B035CD4}"/>
+                <a16:creationId xmlns:a16="http://schemas.microsoft.com/office/drawing/2014/main" id="{EB353CB2-47BC-457A-B1AB-5FA6DD9A9B29}"/>
               </a:ext>
             </a:extLst>
           </p:cNvPr>
@@ -8734,7 +8746,7 @@
           <p:cNvPr id="24" name="Text 22">
             <a:extLst xmlns:a="http://schemas.openxmlformats.org/drawingml/2006/main">
               <a:ext uri="{FF2B5EF4-FFF2-40B4-BE49-F238E27FC236}">
-                <a16:creationId xmlns:a16="http://schemas.microsoft.com/office/drawing/2014/main" id="{DD5BDC7D-3E18-4B73-84B5-EB64E1BFDE97}"/>
+                <a16:creationId xmlns:a16="http://schemas.microsoft.com/office/drawing/2014/main" id="{40B3B6C0-18FE-4947-A43D-DA5BBD6043C2}"/>
               </a:ext>
             </a:extLst>
           </p:cNvPr>
@@ -8779,7 +8791,7 @@
           <p:cNvPr id="25" name="Text 23">
             <a:extLst xmlns:a="http://schemas.openxmlformats.org/drawingml/2006/main">
               <a:ext uri="{FF2B5EF4-FFF2-40B4-BE49-F238E27FC236}">
-                <a16:creationId xmlns:a16="http://schemas.microsoft.com/office/drawing/2014/main" id="{9412112C-7A41-45AE-B2C4-BDD2874CD53B}"/>
+                <a16:creationId xmlns:a16="http://schemas.microsoft.com/office/drawing/2014/main" id="{9455B13B-5604-4B8E-8855-77ACF8B8EF85}"/>
               </a:ext>
             </a:extLst>
           </p:cNvPr>
@@ -8825,7 +8837,7 @@
     </p:spTree>
     <p:extLst>
       <p:ext uri="{BB962C8B-B14F-4D97-AF65-F5344CB8AC3E}">
-        <p14:creationId xmlns:p14="http://schemas.microsoft.com/office/powerpoint/2010/main" val="463438741"/>
+        <p14:creationId xmlns:p14="http://schemas.microsoft.com/office/powerpoint/2010/main" val="844669405"/>
       </p:ext>
     </p:extLst>
   </p:cSld>
@@ -8856,7 +8868,7 @@
           <p:cNvPr id="2" name="Text 0">
             <a:extLst xmlns:a="http://schemas.openxmlformats.org/drawingml/2006/main">
               <a:ext uri="{FF2B5EF4-FFF2-40B4-BE49-F238E27FC236}">
-                <a16:creationId xmlns:a16="http://schemas.microsoft.com/office/drawing/2014/main" id="{54FD2B51-8227-45DD-A90B-C46D04C787FA}"/>
+                <a16:creationId xmlns:a16="http://schemas.microsoft.com/office/drawing/2014/main" id="{FFA10BFD-7D7D-4EA8-91D4-C53262DEF8B0}"/>
               </a:ext>
             </a:extLst>
           </p:cNvPr>
@@ -8901,7 +8913,7 @@
           <p:cNvPr id="3" name="Text 1">
             <a:extLst xmlns:a="http://schemas.openxmlformats.org/drawingml/2006/main">
               <a:ext uri="{FF2B5EF4-FFF2-40B4-BE49-F238E27FC236}">
-                <a16:creationId xmlns:a16="http://schemas.microsoft.com/office/drawing/2014/main" id="{BDDCCF33-04F0-4FCA-AE6D-043D9D534D9C}"/>
+                <a16:creationId xmlns:a16="http://schemas.microsoft.com/office/drawing/2014/main" id="{93F30592-C73A-4F79-AD1E-20C88F37BC14}"/>
               </a:ext>
             </a:extLst>
           </p:cNvPr>
@@ -8946,7 +8958,7 @@
           <p:cNvPr id="4" name="Text 2">
             <a:extLst xmlns:a="http://schemas.openxmlformats.org/drawingml/2006/main">
               <a:ext uri="{FF2B5EF4-FFF2-40B4-BE49-F238E27FC236}">
-                <a16:creationId xmlns:a16="http://schemas.microsoft.com/office/drawing/2014/main" id="{8F24AF4E-361B-4A22-8EF8-AFF8334F0427}"/>
+                <a16:creationId xmlns:a16="http://schemas.microsoft.com/office/drawing/2014/main" id="{C86246FE-8A96-4633-B6E2-C94EC5D3D496}"/>
               </a:ext>
             </a:extLst>
           </p:cNvPr>
@@ -8991,7 +9003,7 @@
           <p:cNvPr id="5" name="Text 3">
             <a:extLst xmlns:a="http://schemas.openxmlformats.org/drawingml/2006/main">
               <a:ext uri="{FF2B5EF4-FFF2-40B4-BE49-F238E27FC236}">
-                <a16:creationId xmlns:a16="http://schemas.microsoft.com/office/drawing/2014/main" id="{7DCEBF10-267B-4123-9E24-B5D7129150B1}"/>
+                <a16:creationId xmlns:a16="http://schemas.microsoft.com/office/drawing/2014/main" id="{1FA8FAE0-A2C1-4A94-B453-B7C5B32F9665}"/>
               </a:ext>
             </a:extLst>
           </p:cNvPr>
@@ -9036,7 +9048,7 @@
           <p:cNvPr id="6" name="Shape 4">
             <a:extLst xmlns:a="http://schemas.openxmlformats.org/drawingml/2006/main">
               <a:ext uri="{FF2B5EF4-FFF2-40B4-BE49-F238E27FC236}">
-                <a16:creationId xmlns:a16="http://schemas.microsoft.com/office/drawing/2014/main" id="{6C93D400-AE91-44E3-A168-028ACD49E8C5}"/>
+                <a16:creationId xmlns:a16="http://schemas.microsoft.com/office/drawing/2014/main" id="{10E7A239-72CC-4683-80D0-C0FB1ABA9D52}"/>
               </a:ext>
             </a:extLst>
           </p:cNvPr>
@@ -9083,7 +9095,7 @@
           <p:cNvPr id="7" name="Shape 5">
             <a:extLst xmlns:a="http://schemas.openxmlformats.org/drawingml/2006/main">
               <a:ext uri="{FF2B5EF4-FFF2-40B4-BE49-F238E27FC236}">
-                <a16:creationId xmlns:a16="http://schemas.microsoft.com/office/drawing/2014/main" id="{F6E356A0-BA64-4EB6-972A-F47255600C80}"/>
+                <a16:creationId xmlns:a16="http://schemas.microsoft.com/office/drawing/2014/main" id="{68ACA069-50AA-41D9-BDA6-797B222F4E43}"/>
               </a:ext>
             </a:extLst>
           </p:cNvPr>
@@ -9121,7 +9133,7 @@
           <p:cNvPr id="8" name="Text 6">
             <a:extLst xmlns:a="http://schemas.openxmlformats.org/drawingml/2006/main">
               <a:ext uri="{FF2B5EF4-FFF2-40B4-BE49-F238E27FC236}">
-                <a16:creationId xmlns:a16="http://schemas.microsoft.com/office/drawing/2014/main" id="{1451885B-864B-43D7-8A69-23C765414889}"/>
+                <a16:creationId xmlns:a16="http://schemas.microsoft.com/office/drawing/2014/main" id="{3D21AB53-1FAB-4085-A7F6-5C13B9C45860}"/>
               </a:ext>
             </a:extLst>
           </p:cNvPr>
@@ -9166,7 +9178,7 @@
           <p:cNvPr id="9" name="Text 7">
             <a:extLst xmlns:a="http://schemas.openxmlformats.org/drawingml/2006/main">
               <a:ext uri="{FF2B5EF4-FFF2-40B4-BE49-F238E27FC236}">
-                <a16:creationId xmlns:a16="http://schemas.microsoft.com/office/drawing/2014/main" id="{A6725464-A373-4D28-8E5C-60AFF5390525}"/>
+                <a16:creationId xmlns:a16="http://schemas.microsoft.com/office/drawing/2014/main" id="{7919B152-B53C-492A-9241-11FB0DFFC3F2}"/>
               </a:ext>
             </a:extLst>
           </p:cNvPr>
@@ -9214,7 +9226,7 @@
           <p:cNvPr id="10" name="Text 8">
             <a:extLst xmlns:a="http://schemas.openxmlformats.org/drawingml/2006/main">
               <a:ext uri="{FF2B5EF4-FFF2-40B4-BE49-F238E27FC236}">
-                <a16:creationId xmlns:a16="http://schemas.microsoft.com/office/drawing/2014/main" id="{D0DA9D10-9A19-4124-AD5A-EFCB2D35445A}"/>
+                <a16:creationId xmlns:a16="http://schemas.microsoft.com/office/drawing/2014/main" id="{8E2FCAC2-C3F2-497E-B219-84281ABEFB8C}"/>
               </a:ext>
             </a:extLst>
           </p:cNvPr>
@@ -9262,7 +9274,7 @@
           <p:cNvPr id="11" name="Text 9">
             <a:extLst xmlns:a="http://schemas.openxmlformats.org/drawingml/2006/main">
               <a:ext uri="{FF2B5EF4-FFF2-40B4-BE49-F238E27FC236}">
-                <a16:creationId xmlns:a16="http://schemas.microsoft.com/office/drawing/2014/main" id="{F0E00ECC-6839-4A18-8B3A-20FEEA550F43}"/>
+                <a16:creationId xmlns:a16="http://schemas.microsoft.com/office/drawing/2014/main" id="{18580A80-9403-4ABE-B9EC-E6B44E069BB7}"/>
               </a:ext>
             </a:extLst>
           </p:cNvPr>
@@ -9357,7 +9369,7 @@
           <p:cNvPr id="12" name="Shape 10">
             <a:extLst xmlns:a="http://schemas.openxmlformats.org/drawingml/2006/main">
               <a:ext uri="{FF2B5EF4-FFF2-40B4-BE49-F238E27FC236}">
-                <a16:creationId xmlns:a16="http://schemas.microsoft.com/office/drawing/2014/main" id="{F1BE158B-AAD8-4CAD-A421-E2C2C8F75EBE}"/>
+                <a16:creationId xmlns:a16="http://schemas.microsoft.com/office/drawing/2014/main" id="{B5AE4C16-64E0-4252-A3E9-C271F8A4728A}"/>
               </a:ext>
             </a:extLst>
           </p:cNvPr>
@@ -9404,7 +9416,7 @@
           <p:cNvPr id="13" name="Shape 11">
             <a:extLst xmlns:a="http://schemas.openxmlformats.org/drawingml/2006/main">
               <a:ext uri="{FF2B5EF4-FFF2-40B4-BE49-F238E27FC236}">
-                <a16:creationId xmlns:a16="http://schemas.microsoft.com/office/drawing/2014/main" id="{D3CA93D5-D40A-4ED0-8448-71EF29232CA7}"/>
+                <a16:creationId xmlns:a16="http://schemas.microsoft.com/office/drawing/2014/main" id="{387D8A9D-0A3E-42A3-9CED-1D040B73ED20}"/>
               </a:ext>
             </a:extLst>
           </p:cNvPr>
@@ -9442,7 +9454,7 @@
           <p:cNvPr id="14" name="Text 12">
             <a:extLst xmlns:a="http://schemas.openxmlformats.org/drawingml/2006/main">
               <a:ext uri="{FF2B5EF4-FFF2-40B4-BE49-F238E27FC236}">
-                <a16:creationId xmlns:a16="http://schemas.microsoft.com/office/drawing/2014/main" id="{96E8B447-65CC-457D-8928-308DC122A8A7}"/>
+                <a16:creationId xmlns:a16="http://schemas.microsoft.com/office/drawing/2014/main" id="{0F91CDDF-341C-4AF1-BE56-824F36DCCE13}"/>
               </a:ext>
             </a:extLst>
           </p:cNvPr>
@@ -9487,7 +9499,7 @@
           <p:cNvPr id="15" name="Text 13">
             <a:extLst xmlns:a="http://schemas.openxmlformats.org/drawingml/2006/main">
               <a:ext uri="{FF2B5EF4-FFF2-40B4-BE49-F238E27FC236}">
-                <a16:creationId xmlns:a16="http://schemas.microsoft.com/office/drawing/2014/main" id="{BBDC8279-E52B-4B87-9C11-BA5B242FDB47}"/>
+                <a16:creationId xmlns:a16="http://schemas.microsoft.com/office/drawing/2014/main" id="{02446CE3-BABB-4798-985A-E21635BF54D2}"/>
               </a:ext>
             </a:extLst>
           </p:cNvPr>
@@ -9535,7 +9547,7 @@
           <p:cNvPr id="16" name="Text 14">
             <a:extLst xmlns:a="http://schemas.openxmlformats.org/drawingml/2006/main">
               <a:ext uri="{FF2B5EF4-FFF2-40B4-BE49-F238E27FC236}">
-                <a16:creationId xmlns:a16="http://schemas.microsoft.com/office/drawing/2014/main" id="{82362E4D-D0F6-4C2A-8BEA-1AD4B20603DC}"/>
+                <a16:creationId xmlns:a16="http://schemas.microsoft.com/office/drawing/2014/main" id="{A84EE151-DDE1-4257-A0A2-A8AD5371EBF8}"/>
               </a:ext>
             </a:extLst>
           </p:cNvPr>
@@ -9573,7 +9585,7 @@
                 <a:ea typeface="Calibri"/>
                 <a:cs typeface="Calibri"/>
               </a:rPr>
-              <a:t>Six GitHub protocols on a pinned snapshot, including fair manual placement and bounded GEPA</a:t>
+              <a:t>Three primary GitHub workflow families plus scoped ablations on a pinned snapshot</a:t>
             </a:r>
           </a:p>
         </p:txBody>
@@ -9583,7 +9595,7 @@
           <p:cNvPr id="17" name="Text 15">
             <a:extLst xmlns:a="http://schemas.openxmlformats.org/drawingml/2006/main">
               <a:ext uri="{FF2B5EF4-FFF2-40B4-BE49-F238E27FC236}">
-                <a16:creationId xmlns:a16="http://schemas.microsoft.com/office/drawing/2014/main" id="{E4A51C8C-3F8F-439E-95B8-566D9F2D1ADD}"/>
+                <a16:creationId xmlns:a16="http://schemas.microsoft.com/office/drawing/2014/main" id="{FF67A329-42A2-4C76-B92A-0C17D4F9369C}"/>
               </a:ext>
             </a:extLst>
           </p:cNvPr>
@@ -9678,7 +9690,7 @@
           <p:cNvPr id="18" name="Shape 16">
             <a:extLst xmlns:a="http://schemas.openxmlformats.org/drawingml/2006/main">
               <a:ext uri="{FF2B5EF4-FFF2-40B4-BE49-F238E27FC236}">
-                <a16:creationId xmlns:a16="http://schemas.microsoft.com/office/drawing/2014/main" id="{9FF0F61E-07CD-47DA-A4EB-EF8BE3EC8C1D}"/>
+                <a16:creationId xmlns:a16="http://schemas.microsoft.com/office/drawing/2014/main" id="{201216DF-4A86-40B6-9F73-6AA552B568EC}"/>
               </a:ext>
             </a:extLst>
           </p:cNvPr>
@@ -9725,7 +9737,7 @@
           <p:cNvPr id="19" name="Shape 17">
             <a:extLst xmlns:a="http://schemas.openxmlformats.org/drawingml/2006/main">
               <a:ext uri="{FF2B5EF4-FFF2-40B4-BE49-F238E27FC236}">
-                <a16:creationId xmlns:a16="http://schemas.microsoft.com/office/drawing/2014/main" id="{680D2C1D-ADD5-4174-9E45-BA0E5A0F4014}"/>
+                <a16:creationId xmlns:a16="http://schemas.microsoft.com/office/drawing/2014/main" id="{6E4F01BA-E56F-444C-A694-E0173601A534}"/>
               </a:ext>
             </a:extLst>
           </p:cNvPr>
@@ -9763,7 +9775,7 @@
           <p:cNvPr id="20" name="Text 18">
             <a:extLst xmlns:a="http://schemas.openxmlformats.org/drawingml/2006/main">
               <a:ext uri="{FF2B5EF4-FFF2-40B4-BE49-F238E27FC236}">
-                <a16:creationId xmlns:a16="http://schemas.microsoft.com/office/drawing/2014/main" id="{3A007326-CDA3-44B9-A138-3DC56F16B867}"/>
+                <a16:creationId xmlns:a16="http://schemas.microsoft.com/office/drawing/2014/main" id="{55C86AC5-5F3B-4735-B71C-687D96B998B9}"/>
               </a:ext>
             </a:extLst>
           </p:cNvPr>
@@ -9808,7 +9820,7 @@
           <p:cNvPr id="21" name="Text 19">
             <a:extLst xmlns:a="http://schemas.openxmlformats.org/drawingml/2006/main">
               <a:ext uri="{FF2B5EF4-FFF2-40B4-BE49-F238E27FC236}">
-                <a16:creationId xmlns:a16="http://schemas.microsoft.com/office/drawing/2014/main" id="{12136AB7-2B56-4635-9E03-A6081E444168}"/>
+                <a16:creationId xmlns:a16="http://schemas.microsoft.com/office/drawing/2014/main" id="{DFEE6610-CEC3-4846-8EC3-3F41CFE9DE3D}"/>
               </a:ext>
             </a:extLst>
           </p:cNvPr>
@@ -9856,7 +9868,7 @@
           <p:cNvPr id="22" name="Text 20">
             <a:extLst xmlns:a="http://schemas.openxmlformats.org/drawingml/2006/main">
               <a:ext uri="{FF2B5EF4-FFF2-40B4-BE49-F238E27FC236}">
-                <a16:creationId xmlns:a16="http://schemas.microsoft.com/office/drawing/2014/main" id="{AD9BAC83-4348-4D89-943D-135A4F04742C}"/>
+                <a16:creationId xmlns:a16="http://schemas.microsoft.com/office/drawing/2014/main" id="{B5D6BDB4-6E35-47F8-8E59-259B70473C44}"/>
               </a:ext>
             </a:extLst>
           </p:cNvPr>
@@ -9904,7 +9916,7 @@
           <p:cNvPr id="23" name="Text 21">
             <a:extLst xmlns:a="http://schemas.openxmlformats.org/drawingml/2006/main">
               <a:ext uri="{FF2B5EF4-FFF2-40B4-BE49-F238E27FC236}">
-                <a16:creationId xmlns:a16="http://schemas.microsoft.com/office/drawing/2014/main" id="{72C25088-D8B4-4621-9539-6FE3081A0223}"/>
+                <a16:creationId xmlns:a16="http://schemas.microsoft.com/office/drawing/2014/main" id="{2AFCD0F2-5595-477C-A842-40E72771813A}"/>
               </a:ext>
             </a:extLst>
           </p:cNvPr>
@@ -9999,7 +10011,7 @@
           <p:cNvPr id="24" name="Shape 22">
             <a:extLst xmlns:a="http://schemas.openxmlformats.org/drawingml/2006/main">
               <a:ext uri="{FF2B5EF4-FFF2-40B4-BE49-F238E27FC236}">
-                <a16:creationId xmlns:a16="http://schemas.microsoft.com/office/drawing/2014/main" id="{41073688-BD16-4898-8D2B-410AC9F1E91D}"/>
+                <a16:creationId xmlns:a16="http://schemas.microsoft.com/office/drawing/2014/main" id="{602C2F97-5C2A-4591-BA01-97D9404C1931}"/>
               </a:ext>
             </a:extLst>
           </p:cNvPr>
@@ -10046,7 +10058,7 @@
           <p:cNvPr id="25" name="Text 23">
             <a:extLst xmlns:a="http://schemas.openxmlformats.org/drawingml/2006/main">
               <a:ext uri="{FF2B5EF4-FFF2-40B4-BE49-F238E27FC236}">
-                <a16:creationId xmlns:a16="http://schemas.microsoft.com/office/drawing/2014/main" id="{710A08DE-FA9F-4E6F-948A-D287AFBF4394}"/>
+                <a16:creationId xmlns:a16="http://schemas.microsoft.com/office/drawing/2014/main" id="{4284BB6C-C602-48C8-99ED-9EB36F07B990}"/>
               </a:ext>
             </a:extLst>
           </p:cNvPr>
@@ -10100,7 +10112,7 @@
     </p:spTree>
     <p:extLst>
       <p:ext uri="{BB962C8B-B14F-4D97-AF65-F5344CB8AC3E}">
-        <p14:creationId xmlns:p14="http://schemas.microsoft.com/office/powerpoint/2010/main" val="638777595"/>
+        <p14:creationId xmlns:p14="http://schemas.microsoft.com/office/powerpoint/2010/main" val="2097900581"/>
       </p:ext>
     </p:extLst>
   </p:cSld>
@@ -10131,7 +10143,7 @@
           <p:cNvPr id="2" name="Text 0">
             <a:extLst xmlns:a="http://schemas.openxmlformats.org/drawingml/2006/main">
               <a:ext uri="{FF2B5EF4-FFF2-40B4-BE49-F238E27FC236}">
-                <a16:creationId xmlns:a16="http://schemas.microsoft.com/office/drawing/2014/main" id="{B3DB4A0E-F7B0-4476-B7CD-B6230E4E7FD2}"/>
+                <a16:creationId xmlns:a16="http://schemas.microsoft.com/office/drawing/2014/main" id="{00FBA99E-73BB-4004-9289-2B857D301612}"/>
               </a:ext>
             </a:extLst>
           </p:cNvPr>
@@ -10176,7 +10188,7 @@
           <p:cNvPr id="3" name="Text 1">
             <a:extLst xmlns:a="http://schemas.openxmlformats.org/drawingml/2006/main">
               <a:ext uri="{FF2B5EF4-FFF2-40B4-BE49-F238E27FC236}">
-                <a16:creationId xmlns:a16="http://schemas.microsoft.com/office/drawing/2014/main" id="{338CF783-5BD8-477A-BB22-8CB575BA03D2}"/>
+                <a16:creationId xmlns:a16="http://schemas.microsoft.com/office/drawing/2014/main" id="{18651E73-BCEA-4881-B74B-6E57F46E5482}"/>
               </a:ext>
             </a:extLst>
           </p:cNvPr>
@@ -10221,7 +10233,7 @@
           <p:cNvPr id="4" name="Text 2">
             <a:extLst xmlns:a="http://schemas.openxmlformats.org/drawingml/2006/main">
               <a:ext uri="{FF2B5EF4-FFF2-40B4-BE49-F238E27FC236}">
-                <a16:creationId xmlns:a16="http://schemas.microsoft.com/office/drawing/2014/main" id="{8D401EA4-A93D-404B-B22F-C823317EF085}"/>
+                <a16:creationId xmlns:a16="http://schemas.microsoft.com/office/drawing/2014/main" id="{F1BDD051-7195-47FD-9E25-AE3C5DF4DC76}"/>
               </a:ext>
             </a:extLst>
           </p:cNvPr>
@@ -10266,7 +10278,7 @@
           <p:cNvPr id="5" name="Text 3">
             <a:extLst xmlns:a="http://schemas.openxmlformats.org/drawingml/2006/main">
               <a:ext uri="{FF2B5EF4-FFF2-40B4-BE49-F238E27FC236}">
-                <a16:creationId xmlns:a16="http://schemas.microsoft.com/office/drawing/2014/main" id="{7B05B1AD-47C3-4B94-9636-4096AC951D5B}"/>
+                <a16:creationId xmlns:a16="http://schemas.microsoft.com/office/drawing/2014/main" id="{2371272B-0A7E-4C4B-957E-BB27D52DC85F}"/>
               </a:ext>
             </a:extLst>
           </p:cNvPr>
@@ -10311,7 +10323,7 @@
           <p:cNvPr id="6" name="Text 4">
             <a:extLst xmlns:a="http://schemas.openxmlformats.org/drawingml/2006/main">
               <a:ext uri="{FF2B5EF4-FFF2-40B4-BE49-F238E27FC236}">
-                <a16:creationId xmlns:a16="http://schemas.microsoft.com/office/drawing/2014/main" id="{70AA8BAF-9A5B-4FA6-9FE1-B854EEF70871}"/>
+                <a16:creationId xmlns:a16="http://schemas.microsoft.com/office/drawing/2014/main" id="{F2428EE7-B852-4F10-BEC0-886E444157D7}"/>
               </a:ext>
             </a:extLst>
           </p:cNvPr>
@@ -10406,7 +10418,7 @@
           <p:cNvPr id="7" name="Shape 5">
             <a:extLst xmlns:a="http://schemas.openxmlformats.org/drawingml/2006/main">
               <a:ext uri="{FF2B5EF4-FFF2-40B4-BE49-F238E27FC236}">
-                <a16:creationId xmlns:a16="http://schemas.microsoft.com/office/drawing/2014/main" id="{B828D2DF-A61F-487D-B904-60E22E6C387F}"/>
+                <a16:creationId xmlns:a16="http://schemas.microsoft.com/office/drawing/2014/main" id="{1422955C-1E2C-4452-AAA3-58F800AF249B}"/>
               </a:ext>
             </a:extLst>
           </p:cNvPr>
@@ -10453,7 +10465,7 @@
           <p:cNvPr id="8" name="Text 6">
             <a:extLst xmlns:a="http://schemas.openxmlformats.org/drawingml/2006/main">
               <a:ext uri="{FF2B5EF4-FFF2-40B4-BE49-F238E27FC236}">
-                <a16:creationId xmlns:a16="http://schemas.microsoft.com/office/drawing/2014/main" id="{7ADECB65-E6BF-44CC-8A7E-027AB46BED64}"/>
+                <a16:creationId xmlns:a16="http://schemas.microsoft.com/office/drawing/2014/main" id="{D4D00D00-FBFD-43F4-A80F-3B74A385EAA8}"/>
               </a:ext>
             </a:extLst>
           </p:cNvPr>
@@ -10519,7 +10531,7 @@
         </p:xfrm>
         <a:graphic xmlns:a="http://schemas.openxmlformats.org/drawingml/2006/main">
           <a:graphicData uri="http://schemas.openxmlformats.org/drawingml/2006/chart">
-            <c:chart xmlns:r="http://schemas.openxmlformats.org/officeDocument/2006/relationships" xmlns:c="http://schemas.openxmlformats.org/drawingml/2006/chart" r:id="R42d78707581d44ce"/>
+            <c:chart xmlns:r="http://schemas.openxmlformats.org/officeDocument/2006/relationships" xmlns:c="http://schemas.openxmlformats.org/drawingml/2006/chart" r:id="R35776b59d4cc4db8"/>
           </a:graphicData>
         </a:graphic>
       </p:graphicFrame>
@@ -10528,7 +10540,7 @@
           <p:cNvPr id="10" name="Shape 7">
             <a:extLst xmlns:a="http://schemas.openxmlformats.org/drawingml/2006/main">
               <a:ext uri="{FF2B5EF4-FFF2-40B4-BE49-F238E27FC236}">
-                <a16:creationId xmlns:a16="http://schemas.microsoft.com/office/drawing/2014/main" id="{C53878FC-B425-4B83-93B4-5BC670C14BB6}"/>
+                <a16:creationId xmlns:a16="http://schemas.microsoft.com/office/drawing/2014/main" id="{33EB62EF-4209-4C11-8062-83175421182D}"/>
               </a:ext>
             </a:extLst>
           </p:cNvPr>
@@ -10575,7 +10587,7 @@
           <p:cNvPr id="11" name="Text 8">
             <a:extLst xmlns:a="http://schemas.openxmlformats.org/drawingml/2006/main">
               <a:ext uri="{FF2B5EF4-FFF2-40B4-BE49-F238E27FC236}">
-                <a16:creationId xmlns:a16="http://schemas.microsoft.com/office/drawing/2014/main" id="{1F8377B7-171E-45A9-9A93-C29EEF8351FE}"/>
+                <a16:creationId xmlns:a16="http://schemas.microsoft.com/office/drawing/2014/main" id="{A56060D6-B9C9-4571-B9BC-AE286AFD4181}"/>
               </a:ext>
             </a:extLst>
           </p:cNvPr>
@@ -10620,7 +10632,7 @@
           <p:cNvPr id="12" name="Text 9">
             <a:extLst xmlns:a="http://schemas.openxmlformats.org/drawingml/2006/main">
               <a:ext uri="{FF2B5EF4-FFF2-40B4-BE49-F238E27FC236}">
-                <a16:creationId xmlns:a16="http://schemas.microsoft.com/office/drawing/2014/main" id="{2488BBDD-1948-4603-8D38-3D950E801520}"/>
+                <a16:creationId xmlns:a16="http://schemas.microsoft.com/office/drawing/2014/main" id="{63274AC7-0705-41CB-B75E-3B2F048C8A4C}"/>
               </a:ext>
             </a:extLst>
           </p:cNvPr>
@@ -10668,7 +10680,7 @@
           <p:cNvPr id="13" name="Shape 10">
             <a:extLst xmlns:a="http://schemas.openxmlformats.org/drawingml/2006/main">
               <a:ext uri="{FF2B5EF4-FFF2-40B4-BE49-F238E27FC236}">
-                <a16:creationId xmlns:a16="http://schemas.microsoft.com/office/drawing/2014/main" id="{BED9C33C-F4C5-4B7B-911C-65C6652BDAB3}"/>
+                <a16:creationId xmlns:a16="http://schemas.microsoft.com/office/drawing/2014/main" id="{B25CA90A-B144-4DB9-B114-355D901BD859}"/>
               </a:ext>
             </a:extLst>
           </p:cNvPr>
@@ -10715,7 +10727,7 @@
           <p:cNvPr id="14" name="Text 11">
             <a:extLst xmlns:a="http://schemas.openxmlformats.org/drawingml/2006/main">
               <a:ext uri="{FF2B5EF4-FFF2-40B4-BE49-F238E27FC236}">
-                <a16:creationId xmlns:a16="http://schemas.microsoft.com/office/drawing/2014/main" id="{07B3E917-F58B-42CC-A2B8-20A7856C87EE}"/>
+                <a16:creationId xmlns:a16="http://schemas.microsoft.com/office/drawing/2014/main" id="{5238B9BA-4DD5-4EDA-94B5-C9699300FF10}"/>
               </a:ext>
             </a:extLst>
           </p:cNvPr>
@@ -10760,7 +10772,7 @@
           <p:cNvPr id="15" name="Text 12">
             <a:extLst xmlns:a="http://schemas.openxmlformats.org/drawingml/2006/main">
               <a:ext uri="{FF2B5EF4-FFF2-40B4-BE49-F238E27FC236}">
-                <a16:creationId xmlns:a16="http://schemas.microsoft.com/office/drawing/2014/main" id="{D7A780BE-8F64-4FF3-8A46-0638877837BF}"/>
+                <a16:creationId xmlns:a16="http://schemas.microsoft.com/office/drawing/2014/main" id="{5823BB7A-6AAA-4440-AB74-9A660E230C7C}"/>
               </a:ext>
             </a:extLst>
           </p:cNvPr>
@@ -10808,7 +10820,7 @@
           <p:cNvPr id="16" name="Shape 13">
             <a:extLst xmlns:a="http://schemas.openxmlformats.org/drawingml/2006/main">
               <a:ext uri="{FF2B5EF4-FFF2-40B4-BE49-F238E27FC236}">
-                <a16:creationId xmlns:a16="http://schemas.microsoft.com/office/drawing/2014/main" id="{682763EA-A2D2-4AD8-AF76-8D41D8D6823F}"/>
+                <a16:creationId xmlns:a16="http://schemas.microsoft.com/office/drawing/2014/main" id="{0B9E6D30-BD7C-497B-B5A2-F2E0C12C138A}"/>
               </a:ext>
             </a:extLst>
           </p:cNvPr>
@@ -10855,7 +10867,7 @@
           <p:cNvPr id="17" name="Text 14">
             <a:extLst xmlns:a="http://schemas.openxmlformats.org/drawingml/2006/main">
               <a:ext uri="{FF2B5EF4-FFF2-40B4-BE49-F238E27FC236}">
-                <a16:creationId xmlns:a16="http://schemas.microsoft.com/office/drawing/2014/main" id="{CA817F16-C8E6-40FE-BFD3-0B8DB5956A75}"/>
+                <a16:creationId xmlns:a16="http://schemas.microsoft.com/office/drawing/2014/main" id="{87C78687-4656-46F2-8D2B-6553A3318E84}"/>
               </a:ext>
             </a:extLst>
           </p:cNvPr>
@@ -10900,7 +10912,7 @@
           <p:cNvPr id="18" name="Text 15">
             <a:extLst xmlns:a="http://schemas.openxmlformats.org/drawingml/2006/main">
               <a:ext uri="{FF2B5EF4-FFF2-40B4-BE49-F238E27FC236}">
-                <a16:creationId xmlns:a16="http://schemas.microsoft.com/office/drawing/2014/main" id="{8310FDE0-4355-4B25-90BD-34B917ACDA00}"/>
+                <a16:creationId xmlns:a16="http://schemas.microsoft.com/office/drawing/2014/main" id="{EAD32D67-4545-448F-BFB2-9988E3237018}"/>
               </a:ext>
             </a:extLst>
           </p:cNvPr>
@@ -10948,7 +10960,7 @@
           <p:cNvPr id="19" name="Shape 16">
             <a:extLst xmlns:a="http://schemas.openxmlformats.org/drawingml/2006/main">
               <a:ext uri="{FF2B5EF4-FFF2-40B4-BE49-F238E27FC236}">
-                <a16:creationId xmlns:a16="http://schemas.microsoft.com/office/drawing/2014/main" id="{1771412A-1D80-414F-BEAD-A85DE21324F8}"/>
+                <a16:creationId xmlns:a16="http://schemas.microsoft.com/office/drawing/2014/main" id="{E3406447-0F40-4620-9CC4-74ECB617D99D}"/>
               </a:ext>
             </a:extLst>
           </p:cNvPr>
@@ -10995,7 +11007,7 @@
           <p:cNvPr id="20" name="Text 17">
             <a:extLst xmlns:a="http://schemas.openxmlformats.org/drawingml/2006/main">
               <a:ext uri="{FF2B5EF4-FFF2-40B4-BE49-F238E27FC236}">
-                <a16:creationId xmlns:a16="http://schemas.microsoft.com/office/drawing/2014/main" id="{76C58782-BCE7-4FD8-934E-BF0A1AF21931}"/>
+                <a16:creationId xmlns:a16="http://schemas.microsoft.com/office/drawing/2014/main" id="{D98C6757-D8EA-43B5-BF2E-0BEFCBB93E62}"/>
               </a:ext>
             </a:extLst>
           </p:cNvPr>
@@ -11040,7 +11052,7 @@
           <p:cNvPr id="21" name="Text 18">
             <a:extLst xmlns:a="http://schemas.openxmlformats.org/drawingml/2006/main">
               <a:ext uri="{FF2B5EF4-FFF2-40B4-BE49-F238E27FC236}">
-                <a16:creationId xmlns:a16="http://schemas.microsoft.com/office/drawing/2014/main" id="{11E696D9-CA16-4741-8080-56B2E7A7D33F}"/>
+                <a16:creationId xmlns:a16="http://schemas.microsoft.com/office/drawing/2014/main" id="{A47F989C-281F-4ED7-B81D-B640FA868EC6}"/>
               </a:ext>
             </a:extLst>
           </p:cNvPr>
@@ -11086,7 +11098,7 @@
     </p:spTree>
     <p:extLst>
       <p:ext uri="{BB962C8B-B14F-4D97-AF65-F5344CB8AC3E}">
-        <p14:creationId xmlns:p14="http://schemas.microsoft.com/office/powerpoint/2010/main" val="777652519"/>
+        <p14:creationId xmlns:p14="http://schemas.microsoft.com/office/powerpoint/2010/main" val="1664519256"/>
       </p:ext>
     </p:extLst>
   </p:cSld>
@@ -11117,7 +11129,7 @@
           <p:cNvPr id="2" name="Text 0">
             <a:extLst xmlns:a="http://schemas.openxmlformats.org/drawingml/2006/main">
               <a:ext uri="{FF2B5EF4-FFF2-40B4-BE49-F238E27FC236}">
-                <a16:creationId xmlns:a16="http://schemas.microsoft.com/office/drawing/2014/main" id="{B3DB4A0E-F7B0-4476-B7CD-B6230E4E7FD2}"/>
+                <a16:creationId xmlns:a16="http://schemas.microsoft.com/office/drawing/2014/main" id="{00FBA99E-73BB-4004-9289-2B857D301612}"/>
               </a:ext>
             </a:extLst>
           </p:cNvPr>
@@ -11162,7 +11174,7 @@
           <p:cNvPr id="3" name="Text 1">
             <a:extLst xmlns:a="http://schemas.openxmlformats.org/drawingml/2006/main">
               <a:ext uri="{FF2B5EF4-FFF2-40B4-BE49-F238E27FC236}">
-                <a16:creationId xmlns:a16="http://schemas.microsoft.com/office/drawing/2014/main" id="{338CF783-5BD8-477A-BB22-8CB575BA03D2}"/>
+                <a16:creationId xmlns:a16="http://schemas.microsoft.com/office/drawing/2014/main" id="{18651E73-BCEA-4881-B74B-6E57F46E5482}"/>
               </a:ext>
             </a:extLst>
           </p:cNvPr>
@@ -11207,7 +11219,7 @@
           <p:cNvPr id="4" name="Text 2">
             <a:extLst xmlns:a="http://schemas.openxmlformats.org/drawingml/2006/main">
               <a:ext uri="{FF2B5EF4-FFF2-40B4-BE49-F238E27FC236}">
-                <a16:creationId xmlns:a16="http://schemas.microsoft.com/office/drawing/2014/main" id="{8D401EA4-A93D-404B-B22F-C823317EF085}"/>
+                <a16:creationId xmlns:a16="http://schemas.microsoft.com/office/drawing/2014/main" id="{F1BDD051-7195-47FD-9E25-AE3C5DF4DC76}"/>
               </a:ext>
             </a:extLst>
           </p:cNvPr>
@@ -11242,7 +11254,7 @@
                 <a:ea typeface="Calibri"/>
                 <a:cs typeface="Calibri"/>
               </a:rPr>
-              <a:t>RESULT 2  ·  RQ6  ·  ALL-SOURCE AUDIT</a:t>
+              <a:t>RESULT 2  ·  RQ6  ·  WORKFLOW-FAMILY TRANSFER</a:t>
             </a:r>
           </a:p>
         </p:txBody>
@@ -11252,7 +11264,7 @@
           <p:cNvPr id="5" name="Text 3">
             <a:extLst xmlns:a="http://schemas.openxmlformats.org/drawingml/2006/main">
               <a:ext uri="{FF2B5EF4-FFF2-40B4-BE49-F238E27FC236}">
-                <a16:creationId xmlns:a16="http://schemas.microsoft.com/office/drawing/2014/main" id="{7B05B1AD-47C3-4B94-9636-4096AC951D5B}"/>
+                <a16:creationId xmlns:a16="http://schemas.microsoft.com/office/drawing/2014/main" id="{2371272B-0A7E-4C4B-957E-BB27D52DC85F}"/>
               </a:ext>
             </a:extLst>
           </p:cNvPr>
@@ -11287,7 +11299,7 @@
                 <a:ea typeface="Cambria"/>
                 <a:cs typeface="Cambria"/>
               </a:rPr>
-              <a:t>Two compiler corpora recur; neither reaches admission</a:t>
+              <a:t>Efficiency transfers; manual programs remain the runtime baseline</a:t>
             </a:r>
           </a:p>
         </p:txBody>
@@ -11297,7 +11309,7 @@
           <p:cNvPr id="6" name="Text 4">
             <a:extLst xmlns:a="http://schemas.openxmlformats.org/drawingml/2006/main">
               <a:ext uri="{FF2B5EF4-FFF2-40B4-BE49-F238E27FC236}">
-                <a16:creationId xmlns:a16="http://schemas.microsoft.com/office/drawing/2014/main" id="{70AA8BAF-9A5B-4FA6-9FE1-B854EEF70871}"/>
+                <a16:creationId xmlns:a16="http://schemas.microsoft.com/office/drawing/2014/main" id="{F2428EE7-B852-4F10-BEC0-886E444157D7}"/>
               </a:ext>
             </a:extLst>
           </p:cNvPr>
@@ -11338,7 +11350,7 @@
                 <a:ea typeface="Calibri"/>
                 <a:cs typeface="Calibri"/>
               </a:rPr>
-              <a:t>Eight accessible task adapters cover 5,419 tasks and 17,836 actions. API-Bank is the only additional complete-trace corpus: 212 tasks, 48 candidate windows, and 2 synthesized families.</a:t>
+              <a:t>Issue-type routing, PR-outcome audit, and backlog-attention routing use distinct tools and exact graders over one pinned public snapshot.</a:t>
             </a:r>
           </a:p>
           <a:p xmlns:a="http://schemas.openxmlformats.org/drawingml/2006/main">
@@ -11360,7 +11372,7 @@
                 <a:ea typeface="Calibri"/>
                 <a:cs typeface="Calibri"/>
               </a:rPr>
-              <a:t>Its held-out result is 0 pass / 2 abstain / 0 wrong; maximum support is 8 versus 92 required.</a:t>
+              <a:t>Compiled programs reach 90/90 exact outcomes versus 89/90 baseline. Weighted reductions: requests 66.6%, visible interfaces 44.2%, tokens 63.1%, observed latency 64.2%, and cost 58.7%.</a:t>
             </a:r>
           </a:p>
           <a:p xmlns:a="http://schemas.openxmlformats.org/drawingml/2006/main">
@@ -11382,7 +11394,7 @@
                 <a:ea typeface="Calibri"/>
                 <a:cs typeface="Calibri"/>
               </a:rPr>
-              <a:t>BFCL checks 200/200 gold plans; ToolSandbox scores 0.982; tau passes 0/4; BrowseComp scores 1/3. These are unlike evidence classes, not a pooled score.</a:t>
+              <a:t>Manual programs also reach 90/90, so the learned result is transfer and automation—not runtime superiority.</a:t>
             </a:r>
           </a:p>
         </p:txBody>
@@ -11392,7 +11404,7 @@
           <p:cNvPr id="7" name="Shape 5">
             <a:extLst xmlns:a="http://schemas.openxmlformats.org/drawingml/2006/main">
               <a:ext uri="{FF2B5EF4-FFF2-40B4-BE49-F238E27FC236}">
-                <a16:creationId xmlns:a16="http://schemas.microsoft.com/office/drawing/2014/main" id="{B828D2DF-A61F-487D-B904-60E22E6C387F}"/>
+                <a16:creationId xmlns:a16="http://schemas.microsoft.com/office/drawing/2014/main" id="{1422955C-1E2C-4452-AAA3-58F800AF249B}"/>
               </a:ext>
             </a:extLst>
           </p:cNvPr>
@@ -11439,7 +11451,7 @@
           <p:cNvPr id="8" name="Text 6">
             <a:extLst xmlns:a="http://schemas.openxmlformats.org/drawingml/2006/main">
               <a:ext uri="{FF2B5EF4-FFF2-40B4-BE49-F238E27FC236}">
-                <a16:creationId xmlns:a16="http://schemas.microsoft.com/office/drawing/2014/main" id="{7ADECB65-E6BF-44CC-8A7E-027AB46BED64}"/>
+                <a16:creationId xmlns:a16="http://schemas.microsoft.com/office/drawing/2014/main" id="{D4D00D00-FBFD-43F4-A80F-3B74A385EAA8}"/>
               </a:ext>
             </a:extLst>
           </p:cNvPr>
@@ -11477,7 +11489,7 @@
                 <a:ea typeface="Calibri"/>
                 <a:cs typeface="Calibri"/>
               </a:rPr>
-              <a:t>Breadth does not rescue admission. NESTFUL's maximum support of 26 is already the upper bar shown here; API-Bank reaches only 8. The new corpus independently supports refusal, while task-only, simulated, hosted, and gated paths stay in their own evidence classes.</a:t>
+              <a:t>The two new families compile verified three-read pre-model programs; the original issue family retains its conservative two-read prefix. The study changes decision and tools, but not repository or time: cross-repository and time-forward transfer remain open.</a:t>
             </a:r>
           </a:p>
         </p:txBody>
@@ -11494,7 +11506,7 @@
         </p:xfrm>
         <a:graphic xmlns:a="http://schemas.openxmlformats.org/drawingml/2006/main">
           <a:graphicData uri="http://schemas.openxmlformats.org/drawingml/2006/chart">
-            <c:chart xmlns:r="http://schemas.openxmlformats.org/officeDocument/2006/relationships" xmlns:c="http://schemas.openxmlformats.org/drawingml/2006/chart" r:id="R7a876e220cd34a99"/>
+            <c:chart xmlns:r="http://schemas.openxmlformats.org/officeDocument/2006/relationships" xmlns:c="http://schemas.openxmlformats.org/drawingml/2006/chart" r:id="R584825a2fe5f4db2"/>
           </a:graphicData>
         </a:graphic>
       </p:graphicFrame>
@@ -11503,7 +11515,7 @@
           <p:cNvPr id="10" name="Shape 7">
             <a:extLst xmlns:a="http://schemas.openxmlformats.org/drawingml/2006/main">
               <a:ext uri="{FF2B5EF4-FFF2-40B4-BE49-F238E27FC236}">
-                <a16:creationId xmlns:a16="http://schemas.microsoft.com/office/drawing/2014/main" id="{C53878FC-B425-4B83-93B4-5BC670C14BB6}"/>
+                <a16:creationId xmlns:a16="http://schemas.microsoft.com/office/drawing/2014/main" id="{33EB62EF-4209-4C11-8062-83175421182D}"/>
               </a:ext>
             </a:extLst>
           </p:cNvPr>
@@ -11550,7 +11562,7 @@
           <p:cNvPr id="11" name="Text 8">
             <a:extLst xmlns:a="http://schemas.openxmlformats.org/drawingml/2006/main">
               <a:ext uri="{FF2B5EF4-FFF2-40B4-BE49-F238E27FC236}">
-                <a16:creationId xmlns:a16="http://schemas.microsoft.com/office/drawing/2014/main" id="{1F8377B7-171E-45A9-9A93-C29EEF8351FE}"/>
+                <a16:creationId xmlns:a16="http://schemas.microsoft.com/office/drawing/2014/main" id="{A56060D6-B9C9-4571-B9BC-AE286AFD4181}"/>
               </a:ext>
             </a:extLst>
           </p:cNvPr>
@@ -11585,7 +11597,7 @@
                 <a:ea typeface="Cambria"/>
                 <a:cs typeface="Cambria"/>
               </a:rPr>
-              <a:t>5,419 / 17,836</a:t>
+              <a:t>89 → 90 / 90</a:t>
             </a:r>
           </a:p>
         </p:txBody>
@@ -11595,7 +11607,7 @@
           <p:cNvPr id="12" name="Text 9">
             <a:extLst xmlns:a="http://schemas.openxmlformats.org/drawingml/2006/main">
               <a:ext uri="{FF2B5EF4-FFF2-40B4-BE49-F238E27FC236}">
-                <a16:creationId xmlns:a16="http://schemas.microsoft.com/office/drawing/2014/main" id="{2488BBDD-1948-4603-8D38-3D950E801520}"/>
+                <a16:creationId xmlns:a16="http://schemas.microsoft.com/office/drawing/2014/main" id="{63274AC7-0705-41CB-B75E-3B2F048C8A4C}"/>
               </a:ext>
             </a:extLst>
           </p:cNvPr>
@@ -11633,7 +11645,7 @@
                 <a:ea typeface="Calibri"/>
                 <a:cs typeface="Calibri"/>
               </a:rPr>
-              <a:t>screened tasks / reference actions</a:t>
+              <a:t>baseline → compiled exact</a:t>
             </a:r>
           </a:p>
         </p:txBody>
@@ -11643,7 +11655,7 @@
           <p:cNvPr id="13" name="Shape 10">
             <a:extLst xmlns:a="http://schemas.openxmlformats.org/drawingml/2006/main">
               <a:ext uri="{FF2B5EF4-FFF2-40B4-BE49-F238E27FC236}">
-                <a16:creationId xmlns:a16="http://schemas.microsoft.com/office/drawing/2014/main" id="{BED9C33C-F4C5-4B7B-911C-65C6652BDAB3}"/>
+                <a16:creationId xmlns:a16="http://schemas.microsoft.com/office/drawing/2014/main" id="{B25CA90A-B144-4DB9-B114-355D901BD859}"/>
               </a:ext>
             </a:extLst>
           </p:cNvPr>
@@ -11690,7 +11702,7 @@
           <p:cNvPr id="14" name="Text 11">
             <a:extLst xmlns:a="http://schemas.openxmlformats.org/drawingml/2006/main">
               <a:ext uri="{FF2B5EF4-FFF2-40B4-BE49-F238E27FC236}">
-                <a16:creationId xmlns:a16="http://schemas.microsoft.com/office/drawing/2014/main" id="{07B3E917-F58B-42CC-A2B8-20A7856C87EE}"/>
+                <a16:creationId xmlns:a16="http://schemas.microsoft.com/office/drawing/2014/main" id="{5238B9BA-4DD5-4EDA-94B5-C9699300FF10}"/>
               </a:ext>
             </a:extLst>
           </p:cNvPr>
@@ -11725,7 +11737,7 @@
                 <a:ea typeface="Cambria"/>
                 <a:cs typeface="Cambria"/>
               </a:rPr>
-              <a:t>212 / 389</a:t>
+              <a:t>−66.6 / −63.1%</a:t>
             </a:r>
           </a:p>
         </p:txBody>
@@ -11735,7 +11747,7 @@
           <p:cNvPr id="15" name="Text 12">
             <a:extLst xmlns:a="http://schemas.openxmlformats.org/drawingml/2006/main">
               <a:ext uri="{FF2B5EF4-FFF2-40B4-BE49-F238E27FC236}">
-                <a16:creationId xmlns:a16="http://schemas.microsoft.com/office/drawing/2014/main" id="{D7A780BE-8F64-4FF3-8A46-0638877837BF}"/>
+                <a16:creationId xmlns:a16="http://schemas.microsoft.com/office/drawing/2014/main" id="{5823BB7A-6AAA-4440-AB74-9A660E230C7C}"/>
               </a:ext>
             </a:extLst>
           </p:cNvPr>
@@ -11773,7 +11785,7 @@
                 <a:ea typeface="Calibri"/>
                 <a:cs typeface="Calibri"/>
               </a:rPr>
-              <a:t>API-Bank traces / observed calls</a:t>
+              <a:t>requests / total tokens</a:t>
             </a:r>
           </a:p>
         </p:txBody>
@@ -11783,7 +11795,7 @@
           <p:cNvPr id="16" name="Shape 13">
             <a:extLst xmlns:a="http://schemas.openxmlformats.org/drawingml/2006/main">
               <a:ext uri="{FF2B5EF4-FFF2-40B4-BE49-F238E27FC236}">
-                <a16:creationId xmlns:a16="http://schemas.microsoft.com/office/drawing/2014/main" id="{682763EA-A2D2-4AD8-AF76-8D41D8D6823F}"/>
+                <a16:creationId xmlns:a16="http://schemas.microsoft.com/office/drawing/2014/main" id="{0B9E6D30-BD7C-497B-B5A2-F2E0C12C138A}"/>
               </a:ext>
             </a:extLst>
           </p:cNvPr>
@@ -11830,7 +11842,7 @@
           <p:cNvPr id="17" name="Text 14">
             <a:extLst xmlns:a="http://schemas.openxmlformats.org/drawingml/2006/main">
               <a:ext uri="{FF2B5EF4-FFF2-40B4-BE49-F238E27FC236}">
-                <a16:creationId xmlns:a16="http://schemas.microsoft.com/office/drawing/2014/main" id="{CA817F16-C8E6-40FE-BFD3-0B8DB5956A75}"/>
+                <a16:creationId xmlns:a16="http://schemas.microsoft.com/office/drawing/2014/main" id="{87C78687-4656-46F2-8D2B-6553A3318E84}"/>
               </a:ext>
             </a:extLst>
           </p:cNvPr>
@@ -11865,7 +11877,7 @@
                 <a:ea typeface="Cambria"/>
                 <a:cs typeface="Cambria"/>
               </a:rPr>
-              <a:t>0 / 2 / 0</a:t>
+              <a:t>−64.2 / −58.7%</a:t>
             </a:r>
           </a:p>
         </p:txBody>
@@ -11875,7 +11887,7 @@
           <p:cNvPr id="18" name="Text 15">
             <a:extLst xmlns:a="http://schemas.openxmlformats.org/drawingml/2006/main">
               <a:ext uri="{FF2B5EF4-FFF2-40B4-BE49-F238E27FC236}">
-                <a16:creationId xmlns:a16="http://schemas.microsoft.com/office/drawing/2014/main" id="{8310FDE0-4355-4B25-90BD-34B917ACDA00}"/>
+                <a16:creationId xmlns:a16="http://schemas.microsoft.com/office/drawing/2014/main" id="{EAD32D67-4545-448F-BFB2-9988E3237018}"/>
               </a:ext>
             </a:extLst>
           </p:cNvPr>
@@ -11913,7 +11925,7 @@
                 <a:ea typeface="Calibri"/>
                 <a:cs typeface="Calibri"/>
               </a:rPr>
-              <a:t>held-out pass / abstain / wrong</a:t>
+              <a:t>latency / estimated cost</a:t>
             </a:r>
           </a:p>
         </p:txBody>
@@ -11923,7 +11935,7 @@
           <p:cNvPr id="19" name="Shape 16">
             <a:extLst xmlns:a="http://schemas.openxmlformats.org/drawingml/2006/main">
               <a:ext uri="{FF2B5EF4-FFF2-40B4-BE49-F238E27FC236}">
-                <a16:creationId xmlns:a16="http://schemas.microsoft.com/office/drawing/2014/main" id="{1771412A-1D80-414F-BEAD-A85DE21324F8}"/>
+                <a16:creationId xmlns:a16="http://schemas.microsoft.com/office/drawing/2014/main" id="{E3406447-0F40-4620-9CC4-74ECB617D99D}"/>
               </a:ext>
             </a:extLst>
           </p:cNvPr>
@@ -11970,7 +11982,7 @@
           <p:cNvPr id="20" name="Text 17">
             <a:extLst xmlns:a="http://schemas.openxmlformats.org/drawingml/2006/main">
               <a:ext uri="{FF2B5EF4-FFF2-40B4-BE49-F238E27FC236}">
-                <a16:creationId xmlns:a16="http://schemas.microsoft.com/office/drawing/2014/main" id="{76C58782-BCE7-4FD8-934E-BF0A1AF21931}"/>
+                <a16:creationId xmlns:a16="http://schemas.microsoft.com/office/drawing/2014/main" id="{D98C6757-D8EA-43B5-BF2E-0BEFCBB93E62}"/>
               </a:ext>
             </a:extLst>
           </p:cNvPr>
@@ -12005,7 +12017,7 @@
                 <a:ea typeface="Cambria"/>
                 <a:cs typeface="Cambria"/>
               </a:rPr>
-              <a:t>0</a:t>
+              <a:t>90 / 90</a:t>
             </a:r>
           </a:p>
         </p:txBody>
@@ -12015,7 +12027,7 @@
           <p:cNvPr id="21" name="Text 18">
             <a:extLst xmlns:a="http://schemas.openxmlformats.org/drawingml/2006/main">
               <a:ext uri="{FF2B5EF4-FFF2-40B4-BE49-F238E27FC236}">
-                <a16:creationId xmlns:a16="http://schemas.microsoft.com/office/drawing/2014/main" id="{11E696D9-CA16-4741-8080-56B2E7A7D33F}"/>
+                <a16:creationId xmlns:a16="http://schemas.microsoft.com/office/drawing/2014/main" id="{A47F989C-281F-4ED7-B81D-B640FA868EC6}"/>
               </a:ext>
             </a:extLst>
           </p:cNvPr>
@@ -12053,7 +12065,7 @@
                 <a:ea typeface="Calibri"/>
                 <a:cs typeface="Calibri"/>
               </a:rPr>
-              <a:t>new certifiable families</a:t>
+              <a:t>manual exact; no runtime dominance</a:t>
             </a:r>
           </a:p>
         </p:txBody>
@@ -12061,7 +12073,7 @@
     </p:spTree>
     <p:extLst>
       <p:ext uri="{BB962C8B-B14F-4D97-AF65-F5344CB8AC3E}">
-        <p14:creationId xmlns:p14="http://schemas.microsoft.com/office/powerpoint/2010/main" val="777652519"/>
+        <p14:creationId xmlns:p14="http://schemas.microsoft.com/office/powerpoint/2010/main" val="1664519256"/>
       </p:ext>
     </p:extLst>
   </p:cSld>
@@ -12092,7 +12104,7 @@
           <p:cNvPr id="2" name="Text 0">
             <a:extLst xmlns:a="http://schemas.openxmlformats.org/drawingml/2006/main">
               <a:ext uri="{FF2B5EF4-FFF2-40B4-BE49-F238E27FC236}">
-                <a16:creationId xmlns:a16="http://schemas.microsoft.com/office/drawing/2014/main" id="{CCCEE890-ADA5-4F06-8AFC-A970E991AAF8}"/>
+                <a16:creationId xmlns:a16="http://schemas.microsoft.com/office/drawing/2014/main" id="{DEEC307A-35F9-493F-8D7C-ECE3D3D361D3}"/>
               </a:ext>
             </a:extLst>
           </p:cNvPr>
@@ -12137,7 +12149,7 @@
           <p:cNvPr id="3" name="Text 1">
             <a:extLst xmlns:a="http://schemas.openxmlformats.org/drawingml/2006/main">
               <a:ext uri="{FF2B5EF4-FFF2-40B4-BE49-F238E27FC236}">
-                <a16:creationId xmlns:a16="http://schemas.microsoft.com/office/drawing/2014/main" id="{9908E735-9DA4-4960-A3AF-2E8EEDF002B4}"/>
+                <a16:creationId xmlns:a16="http://schemas.microsoft.com/office/drawing/2014/main" id="{6A29E111-AD99-45A8-984D-83FFFC1B2ADE}"/>
               </a:ext>
             </a:extLst>
           </p:cNvPr>
@@ -12182,7 +12194,7 @@
           <p:cNvPr id="4" name="Text 2">
             <a:extLst xmlns:a="http://schemas.openxmlformats.org/drawingml/2006/main">
               <a:ext uri="{FF2B5EF4-FFF2-40B4-BE49-F238E27FC236}">
-                <a16:creationId xmlns:a16="http://schemas.microsoft.com/office/drawing/2014/main" id="{791549C5-6A55-4471-B19A-2A06C2643C10}"/>
+                <a16:creationId xmlns:a16="http://schemas.microsoft.com/office/drawing/2014/main" id="{1660AE52-5064-486C-B4EA-AD6BAB70BC27}"/>
               </a:ext>
             </a:extLst>
           </p:cNvPr>
@@ -12227,7 +12239,7 @@
           <p:cNvPr id="5" name="Text 3">
             <a:extLst xmlns:a="http://schemas.openxmlformats.org/drawingml/2006/main">
               <a:ext uri="{FF2B5EF4-FFF2-40B4-BE49-F238E27FC236}">
-                <a16:creationId xmlns:a16="http://schemas.microsoft.com/office/drawing/2014/main" id="{6FAC45B7-E000-4587-9BE3-05338412197E}"/>
+                <a16:creationId xmlns:a16="http://schemas.microsoft.com/office/drawing/2014/main" id="{9CF24DEC-7598-421F-9E43-B8527D4694C2}"/>
               </a:ext>
             </a:extLst>
           </p:cNvPr>
@@ -12279,7 +12291,7 @@
         </p:xfrm>
         <a:graphic xmlns:a="http://schemas.openxmlformats.org/drawingml/2006/main">
           <a:graphicData uri="http://schemas.openxmlformats.org/drawingml/2006/chart">
-            <c:chart xmlns:r="http://schemas.openxmlformats.org/officeDocument/2006/relationships" xmlns:c="http://schemas.openxmlformats.org/drawingml/2006/chart" r:id="Rf02dffcdff044b65"/>
+            <c:chart xmlns:r="http://schemas.openxmlformats.org/officeDocument/2006/relationships" xmlns:c="http://schemas.openxmlformats.org/drawingml/2006/chart" r:id="R4930f45f382e4024"/>
           </a:graphicData>
         </a:graphic>
       </p:graphicFrame>
@@ -12288,7 +12300,7 @@
           <p:cNvPr id="7" name="Shape 4">
             <a:extLst xmlns:a="http://schemas.openxmlformats.org/drawingml/2006/main">
               <a:ext uri="{FF2B5EF4-FFF2-40B4-BE49-F238E27FC236}">
-                <a16:creationId xmlns:a16="http://schemas.microsoft.com/office/drawing/2014/main" id="{E425A3FD-AEA2-40D7-AC64-AD83145142A5}"/>
+                <a16:creationId xmlns:a16="http://schemas.microsoft.com/office/drawing/2014/main" id="{B59B1FCF-70A2-478C-86D8-C35A3F5312D1}"/>
               </a:ext>
             </a:extLst>
           </p:cNvPr>
@@ -12335,7 +12347,7 @@
           <p:cNvPr id="8" name="Text 5">
             <a:extLst xmlns:a="http://schemas.openxmlformats.org/drawingml/2006/main">
               <a:ext uri="{FF2B5EF4-FFF2-40B4-BE49-F238E27FC236}">
-                <a16:creationId xmlns:a16="http://schemas.microsoft.com/office/drawing/2014/main" id="{6FF16357-48A6-469D-BB55-C8AA07937900}"/>
+                <a16:creationId xmlns:a16="http://schemas.microsoft.com/office/drawing/2014/main" id="{E16D2229-F357-405C-A6D2-FF8BC4099753}"/>
               </a:ext>
             </a:extLst>
           </p:cNvPr>
@@ -12380,7 +12392,7 @@
           <p:cNvPr id="9" name="Text 6">
             <a:extLst xmlns:a="http://schemas.openxmlformats.org/drawingml/2006/main">
               <a:ext uri="{FF2B5EF4-FFF2-40B4-BE49-F238E27FC236}">
-                <a16:creationId xmlns:a16="http://schemas.microsoft.com/office/drawing/2014/main" id="{701BBB86-81ED-477E-820D-403A82E58544}"/>
+                <a16:creationId xmlns:a16="http://schemas.microsoft.com/office/drawing/2014/main" id="{40837D03-C7D4-462F-837B-FD4B69462883}"/>
               </a:ext>
             </a:extLst>
           </p:cNvPr>
@@ -12497,7 +12509,7 @@
           <p:cNvPr id="10" name="Shape 7">
             <a:extLst xmlns:a="http://schemas.openxmlformats.org/drawingml/2006/main">
               <a:ext uri="{FF2B5EF4-FFF2-40B4-BE49-F238E27FC236}">
-                <a16:creationId xmlns:a16="http://schemas.microsoft.com/office/drawing/2014/main" id="{F8954EE9-6AF3-4193-8BC1-9FEFDCE6900F}"/>
+                <a16:creationId xmlns:a16="http://schemas.microsoft.com/office/drawing/2014/main" id="{6B3875EE-1472-4C1B-B74F-CEE8ACBBCBC7}"/>
               </a:ext>
             </a:extLst>
           </p:cNvPr>
@@ -12544,7 +12556,7 @@
           <p:cNvPr id="11" name="Text 8">
             <a:extLst xmlns:a="http://schemas.openxmlformats.org/drawingml/2006/main">
               <a:ext uri="{FF2B5EF4-FFF2-40B4-BE49-F238E27FC236}">
-                <a16:creationId xmlns:a16="http://schemas.microsoft.com/office/drawing/2014/main" id="{9167D5F3-9B6F-45FB-A731-DCB0BA78F892}"/>
+                <a16:creationId xmlns:a16="http://schemas.microsoft.com/office/drawing/2014/main" id="{590D27D8-08C1-40C2-BCF6-F2FF3BE482E3}"/>
               </a:ext>
             </a:extLst>
           </p:cNvPr>
@@ -12589,7 +12601,7 @@
           <p:cNvPr id="12" name="Text 9">
             <a:extLst xmlns:a="http://schemas.openxmlformats.org/drawingml/2006/main">
               <a:ext uri="{FF2B5EF4-FFF2-40B4-BE49-F238E27FC236}">
-                <a16:creationId xmlns:a16="http://schemas.microsoft.com/office/drawing/2014/main" id="{131B6EC6-B95D-4511-9382-004506E33E00}"/>
+                <a16:creationId xmlns:a16="http://schemas.microsoft.com/office/drawing/2014/main" id="{DB2130BB-4995-46D8-99D7-BC95ABAD1367}"/>
               </a:ext>
             </a:extLst>
           </p:cNvPr>
@@ -12637,7 +12649,7 @@
           <p:cNvPr id="13" name="Shape 10">
             <a:extLst xmlns:a="http://schemas.openxmlformats.org/drawingml/2006/main">
               <a:ext uri="{FF2B5EF4-FFF2-40B4-BE49-F238E27FC236}">
-                <a16:creationId xmlns:a16="http://schemas.microsoft.com/office/drawing/2014/main" id="{F5046363-E8DB-459B-95F1-4DE8C19CF179}"/>
+                <a16:creationId xmlns:a16="http://schemas.microsoft.com/office/drawing/2014/main" id="{C80CE827-9631-4E56-BE94-67626BAB0469}"/>
               </a:ext>
             </a:extLst>
           </p:cNvPr>
@@ -12684,7 +12696,7 @@
           <p:cNvPr id="14" name="Text 11">
             <a:extLst xmlns:a="http://schemas.openxmlformats.org/drawingml/2006/main">
               <a:ext uri="{FF2B5EF4-FFF2-40B4-BE49-F238E27FC236}">
-                <a16:creationId xmlns:a16="http://schemas.microsoft.com/office/drawing/2014/main" id="{48D8CC06-9717-4F25-81EF-86CFC757C0DC}"/>
+                <a16:creationId xmlns:a16="http://schemas.microsoft.com/office/drawing/2014/main" id="{80FB1C2C-3415-44D3-91BC-04C5833D450F}"/>
               </a:ext>
             </a:extLst>
           </p:cNvPr>
@@ -12729,7 +12741,7 @@
           <p:cNvPr id="15" name="Text 12">
             <a:extLst xmlns:a="http://schemas.openxmlformats.org/drawingml/2006/main">
               <a:ext uri="{FF2B5EF4-FFF2-40B4-BE49-F238E27FC236}">
-                <a16:creationId xmlns:a16="http://schemas.microsoft.com/office/drawing/2014/main" id="{544BFEC9-61F0-49AA-9B75-F052ACC69FDA}"/>
+                <a16:creationId xmlns:a16="http://schemas.microsoft.com/office/drawing/2014/main" id="{39D71D2E-3058-43CE-98F9-DABCA06F4A97}"/>
               </a:ext>
             </a:extLst>
           </p:cNvPr>
@@ -12777,7 +12789,7 @@
           <p:cNvPr id="16" name="Shape 13">
             <a:extLst xmlns:a="http://schemas.openxmlformats.org/drawingml/2006/main">
               <a:ext uri="{FF2B5EF4-FFF2-40B4-BE49-F238E27FC236}">
-                <a16:creationId xmlns:a16="http://schemas.microsoft.com/office/drawing/2014/main" id="{E512D823-B29C-4167-9A5B-99F1007F52F6}"/>
+                <a16:creationId xmlns:a16="http://schemas.microsoft.com/office/drawing/2014/main" id="{B6610770-486B-407E-BDDF-70FCA26D37FD}"/>
               </a:ext>
             </a:extLst>
           </p:cNvPr>
@@ -12824,7 +12836,7 @@
           <p:cNvPr id="17" name="Text 14">
             <a:extLst xmlns:a="http://schemas.openxmlformats.org/drawingml/2006/main">
               <a:ext uri="{FF2B5EF4-FFF2-40B4-BE49-F238E27FC236}">
-                <a16:creationId xmlns:a16="http://schemas.microsoft.com/office/drawing/2014/main" id="{58468CF6-9078-42E6-807F-EC4D04CC6A8C}"/>
+                <a16:creationId xmlns:a16="http://schemas.microsoft.com/office/drawing/2014/main" id="{542FF701-B6D1-4538-89EA-10DED97B4EF9}"/>
               </a:ext>
             </a:extLst>
           </p:cNvPr>
@@ -12869,7 +12881,7 @@
           <p:cNvPr id="18" name="Text 15">
             <a:extLst xmlns:a="http://schemas.openxmlformats.org/drawingml/2006/main">
               <a:ext uri="{FF2B5EF4-FFF2-40B4-BE49-F238E27FC236}">
-                <a16:creationId xmlns:a16="http://schemas.microsoft.com/office/drawing/2014/main" id="{F6E96158-39C3-4737-A714-B2E739319366}"/>
+                <a16:creationId xmlns:a16="http://schemas.microsoft.com/office/drawing/2014/main" id="{AC1C7239-6F8C-4ED6-8E4B-26E5435254F4}"/>
               </a:ext>
             </a:extLst>
           </p:cNvPr>
@@ -12917,7 +12929,7 @@
           <p:cNvPr id="19" name="Shape 16">
             <a:extLst xmlns:a="http://schemas.openxmlformats.org/drawingml/2006/main">
               <a:ext uri="{FF2B5EF4-FFF2-40B4-BE49-F238E27FC236}">
-                <a16:creationId xmlns:a16="http://schemas.microsoft.com/office/drawing/2014/main" id="{AA24BACA-CC35-421A-B000-80643D690B7B}"/>
+                <a16:creationId xmlns:a16="http://schemas.microsoft.com/office/drawing/2014/main" id="{D8336D4B-EAAD-43C6-82A4-BF0A1581AF57}"/>
               </a:ext>
             </a:extLst>
           </p:cNvPr>
@@ -12964,7 +12976,7 @@
           <p:cNvPr id="20" name="Text 17">
             <a:extLst xmlns:a="http://schemas.openxmlformats.org/drawingml/2006/main">
               <a:ext uri="{FF2B5EF4-FFF2-40B4-BE49-F238E27FC236}">
-                <a16:creationId xmlns:a16="http://schemas.microsoft.com/office/drawing/2014/main" id="{10683746-E8DC-4ACD-8F63-72A3D47D5464}"/>
+                <a16:creationId xmlns:a16="http://schemas.microsoft.com/office/drawing/2014/main" id="{276D1E70-969C-40B3-BBE4-3B1BCBAA7C4F}"/>
               </a:ext>
             </a:extLst>
           </p:cNvPr>
@@ -13009,7 +13021,7 @@
           <p:cNvPr id="21" name="Text 18">
             <a:extLst xmlns:a="http://schemas.openxmlformats.org/drawingml/2006/main">
               <a:ext uri="{FF2B5EF4-FFF2-40B4-BE49-F238E27FC236}">
-                <a16:creationId xmlns:a16="http://schemas.microsoft.com/office/drawing/2014/main" id="{CFFEC412-D0D1-409C-810C-B5F73349E4AC}"/>
+                <a16:creationId xmlns:a16="http://schemas.microsoft.com/office/drawing/2014/main" id="{DE7DB35A-E3DA-4848-864D-B4EA364C095E}"/>
               </a:ext>
             </a:extLst>
           </p:cNvPr>
@@ -13057,7 +13069,7 @@
           <p:cNvPr id="22" name="Shape 19">
             <a:extLst xmlns:a="http://schemas.openxmlformats.org/drawingml/2006/main">
               <a:ext uri="{FF2B5EF4-FFF2-40B4-BE49-F238E27FC236}">
-                <a16:creationId xmlns:a16="http://schemas.microsoft.com/office/drawing/2014/main" id="{51ED6E28-76F4-4706-9024-E00FAF0AB5A8}"/>
+                <a16:creationId xmlns:a16="http://schemas.microsoft.com/office/drawing/2014/main" id="{B8ECB7C4-7743-4A88-AB85-45AC7145EA17}"/>
               </a:ext>
             </a:extLst>
           </p:cNvPr>
@@ -13104,7 +13116,7 @@
           <p:cNvPr id="23" name="Text 20">
             <a:extLst xmlns:a="http://schemas.openxmlformats.org/drawingml/2006/main">
               <a:ext uri="{FF2B5EF4-FFF2-40B4-BE49-F238E27FC236}">
-                <a16:creationId xmlns:a16="http://schemas.microsoft.com/office/drawing/2014/main" id="{D6FBA907-B337-49A7-88B3-AC1B2F2F3567}"/>
+                <a16:creationId xmlns:a16="http://schemas.microsoft.com/office/drawing/2014/main" id="{3CA33CF3-3176-458C-9B8C-A82BEB5B6B86}"/>
               </a:ext>
             </a:extLst>
           </p:cNvPr>
@@ -13149,7 +13161,7 @@
           <p:cNvPr id="24" name="Text 21">
             <a:extLst xmlns:a="http://schemas.openxmlformats.org/drawingml/2006/main">
               <a:ext uri="{FF2B5EF4-FFF2-40B4-BE49-F238E27FC236}">
-                <a16:creationId xmlns:a16="http://schemas.microsoft.com/office/drawing/2014/main" id="{764A81C1-928F-4B47-BC68-39ED2675519C}"/>
+                <a16:creationId xmlns:a16="http://schemas.microsoft.com/office/drawing/2014/main" id="{8C3EA247-C3B9-4FEC-9E44-71F51443F3B6}"/>
               </a:ext>
             </a:extLst>
           </p:cNvPr>
@@ -13195,7 +13207,7 @@
     </p:spTree>
     <p:extLst>
       <p:ext uri="{BB962C8B-B14F-4D97-AF65-F5344CB8AC3E}">
-        <p14:creationId xmlns:p14="http://schemas.microsoft.com/office/powerpoint/2010/main" val="538731600"/>
+        <p14:creationId xmlns:p14="http://schemas.microsoft.com/office/powerpoint/2010/main" val="1578266239"/>
       </p:ext>
     </p:extLst>
   </p:cSld>
@@ -13226,7 +13238,7 @@
           <p:cNvPr id="2" name="Text 0">
             <a:extLst xmlns:a="http://schemas.openxmlformats.org/drawingml/2006/main">
               <a:ext uri="{FF2B5EF4-FFF2-40B4-BE49-F238E27FC236}">
-                <a16:creationId xmlns:a16="http://schemas.microsoft.com/office/drawing/2014/main" id="{26A70183-0847-4337-8667-F5BA0E093363}"/>
+                <a16:creationId xmlns:a16="http://schemas.microsoft.com/office/drawing/2014/main" id="{8BC303BD-98C4-4972-8E79-271C9F476F5D}"/>
               </a:ext>
             </a:extLst>
           </p:cNvPr>
@@ -13271,7 +13283,7 @@
           <p:cNvPr id="3" name="Text 1">
             <a:extLst xmlns:a="http://schemas.openxmlformats.org/drawingml/2006/main">
               <a:ext uri="{FF2B5EF4-FFF2-40B4-BE49-F238E27FC236}">
-                <a16:creationId xmlns:a16="http://schemas.microsoft.com/office/drawing/2014/main" id="{301587AC-4ECB-4AB8-8D7A-AEEF29741CD1}"/>
+                <a16:creationId xmlns:a16="http://schemas.microsoft.com/office/drawing/2014/main" id="{44B68D2E-09DC-4875-A9D4-9C889868613C}"/>
               </a:ext>
             </a:extLst>
           </p:cNvPr>
@@ -13316,7 +13328,7 @@
           <p:cNvPr id="4" name="Text 2">
             <a:extLst xmlns:a="http://schemas.openxmlformats.org/drawingml/2006/main">
               <a:ext uri="{FF2B5EF4-FFF2-40B4-BE49-F238E27FC236}">
-                <a16:creationId xmlns:a16="http://schemas.microsoft.com/office/drawing/2014/main" id="{A6F6AA1B-AFDF-4CB9-AA8A-7DE192C7ADF9}"/>
+                <a16:creationId xmlns:a16="http://schemas.microsoft.com/office/drawing/2014/main" id="{B31A51C1-4FCE-4169-B24C-9863E9A2C338}"/>
               </a:ext>
             </a:extLst>
           </p:cNvPr>
@@ -13361,7 +13373,7 @@
           <p:cNvPr id="5" name="Text 3">
             <a:extLst xmlns:a="http://schemas.openxmlformats.org/drawingml/2006/main">
               <a:ext uri="{FF2B5EF4-FFF2-40B4-BE49-F238E27FC236}">
-                <a16:creationId xmlns:a16="http://schemas.microsoft.com/office/drawing/2014/main" id="{C268492E-1C02-4385-82DB-6D0FA24AA127}"/>
+                <a16:creationId xmlns:a16="http://schemas.microsoft.com/office/drawing/2014/main" id="{D59019E6-D8A9-4130-9E17-5E36F6A9202A}"/>
               </a:ext>
             </a:extLst>
           </p:cNvPr>
@@ -13406,7 +13418,7 @@
           <p:cNvPr id="6" name="Shape 4">
             <a:extLst xmlns:a="http://schemas.openxmlformats.org/drawingml/2006/main">
               <a:ext uri="{FF2B5EF4-FFF2-40B4-BE49-F238E27FC236}">
-                <a16:creationId xmlns:a16="http://schemas.microsoft.com/office/drawing/2014/main" id="{65D79F63-5D38-4359-9A72-ABFDBD9E14DB}"/>
+                <a16:creationId xmlns:a16="http://schemas.microsoft.com/office/drawing/2014/main" id="{D5BBAE56-6259-42C9-849B-F934E438F8D9}"/>
               </a:ext>
             </a:extLst>
           </p:cNvPr>
@@ -13453,7 +13465,7 @@
           <p:cNvPr id="7" name="Text 5">
             <a:extLst xmlns:a="http://schemas.openxmlformats.org/drawingml/2006/main">
               <a:ext uri="{FF2B5EF4-FFF2-40B4-BE49-F238E27FC236}">
-                <a16:creationId xmlns:a16="http://schemas.microsoft.com/office/drawing/2014/main" id="{BBD76989-3EAF-4E9C-B8E3-E1AFBE96AC85}"/>
+                <a16:creationId xmlns:a16="http://schemas.microsoft.com/office/drawing/2014/main" id="{F84C076D-65C2-49C7-9405-0A9115988BB3}"/>
               </a:ext>
             </a:extLst>
           </p:cNvPr>
@@ -13498,7 +13510,7 @@
           <p:cNvPr id="8" name="Text 6">
             <a:extLst xmlns:a="http://schemas.openxmlformats.org/drawingml/2006/main">
               <a:ext uri="{FF2B5EF4-FFF2-40B4-BE49-F238E27FC236}">
-                <a16:creationId xmlns:a16="http://schemas.microsoft.com/office/drawing/2014/main" id="{2C539036-937C-4F96-A70C-D86B8077CC62}"/>
+                <a16:creationId xmlns:a16="http://schemas.microsoft.com/office/drawing/2014/main" id="{D0441E00-886E-4698-B071-5AEE55178A21}"/>
               </a:ext>
             </a:extLst>
           </p:cNvPr>
@@ -13543,7 +13555,7 @@
           <p:cNvPr id="9" name="Text 7">
             <a:extLst xmlns:a="http://schemas.openxmlformats.org/drawingml/2006/main">
               <a:ext uri="{FF2B5EF4-FFF2-40B4-BE49-F238E27FC236}">
-                <a16:creationId xmlns:a16="http://schemas.microsoft.com/office/drawing/2014/main" id="{53781C20-CA6A-4268-86F6-4AED604DC817}"/>
+                <a16:creationId xmlns:a16="http://schemas.microsoft.com/office/drawing/2014/main" id="{89398951-A8B4-4511-8A9F-25169B33EE4F}"/>
               </a:ext>
             </a:extLst>
           </p:cNvPr>
@@ -13588,7 +13600,7 @@
           <p:cNvPr id="10" name="Text 8">
             <a:extLst xmlns:a="http://schemas.openxmlformats.org/drawingml/2006/main">
               <a:ext uri="{FF2B5EF4-FFF2-40B4-BE49-F238E27FC236}">
-                <a16:creationId xmlns:a16="http://schemas.microsoft.com/office/drawing/2014/main" id="{BD2CA011-C789-4136-BCC3-81A82D136FA7}"/>
+                <a16:creationId xmlns:a16="http://schemas.microsoft.com/office/drawing/2014/main" id="{10103A56-BC52-4715-96BD-C9F34E30D562}"/>
               </a:ext>
             </a:extLst>
           </p:cNvPr>
@@ -13633,7 +13645,7 @@
           <p:cNvPr id="11" name="Text 9">
             <a:extLst xmlns:a="http://schemas.openxmlformats.org/drawingml/2006/main">
               <a:ext uri="{FF2B5EF4-FFF2-40B4-BE49-F238E27FC236}">
-                <a16:creationId xmlns:a16="http://schemas.microsoft.com/office/drawing/2014/main" id="{EE07035B-B29E-4ABD-8133-102575D6D1F1}"/>
+                <a16:creationId xmlns:a16="http://schemas.microsoft.com/office/drawing/2014/main" id="{EA102B2E-77C1-4DCB-8CD9-3F290E43C7BC}"/>
               </a:ext>
             </a:extLst>
           </p:cNvPr>
@@ -13678,7 +13690,7 @@
           <p:cNvPr id="12" name="Text 10">
             <a:extLst xmlns:a="http://schemas.openxmlformats.org/drawingml/2006/main">
               <a:ext uri="{FF2B5EF4-FFF2-40B4-BE49-F238E27FC236}">
-                <a16:creationId xmlns:a16="http://schemas.microsoft.com/office/drawing/2014/main" id="{1DD80221-4295-493E-85A3-9BA99F5427FE}"/>
+                <a16:creationId xmlns:a16="http://schemas.microsoft.com/office/drawing/2014/main" id="{C41AF44C-013D-4B75-BB1D-9E7E734FFCA6}"/>
               </a:ext>
             </a:extLst>
           </p:cNvPr>
@@ -13723,7 +13735,7 @@
           <p:cNvPr id="13" name="Text 11">
             <a:extLst xmlns:a="http://schemas.openxmlformats.org/drawingml/2006/main">
               <a:ext uri="{FF2B5EF4-FFF2-40B4-BE49-F238E27FC236}">
-                <a16:creationId xmlns:a16="http://schemas.microsoft.com/office/drawing/2014/main" id="{314BEC52-2229-4E90-9268-446C80209A1C}"/>
+                <a16:creationId xmlns:a16="http://schemas.microsoft.com/office/drawing/2014/main" id="{5105BDA2-B61E-4674-B31C-59D46A7A7BCF}"/>
               </a:ext>
             </a:extLst>
           </p:cNvPr>
@@ -13768,7 +13780,7 @@
           <p:cNvPr id="14" name="Text 12">
             <a:extLst xmlns:a="http://schemas.openxmlformats.org/drawingml/2006/main">
               <a:ext uri="{FF2B5EF4-FFF2-40B4-BE49-F238E27FC236}">
-                <a16:creationId xmlns:a16="http://schemas.microsoft.com/office/drawing/2014/main" id="{08201D8B-EA3D-4C92-BEA9-16738F2999BE}"/>
+                <a16:creationId xmlns:a16="http://schemas.microsoft.com/office/drawing/2014/main" id="{06B07DBD-4B54-4B3B-8227-D74E37D8341B}"/>
               </a:ext>
             </a:extLst>
           </p:cNvPr>
@@ -13813,7 +13825,7 @@
           <p:cNvPr id="15" name="Text 13">
             <a:extLst xmlns:a="http://schemas.openxmlformats.org/drawingml/2006/main">
               <a:ext uri="{FF2B5EF4-FFF2-40B4-BE49-F238E27FC236}">
-                <a16:creationId xmlns:a16="http://schemas.microsoft.com/office/drawing/2014/main" id="{9154C646-9F58-4DE3-ABC2-3736650B16A5}"/>
+                <a16:creationId xmlns:a16="http://schemas.microsoft.com/office/drawing/2014/main" id="{CF7DC685-9184-4BD2-BF85-4141486656F8}"/>
               </a:ext>
             </a:extLst>
           </p:cNvPr>
@@ -13861,7 +13873,7 @@
           <p:cNvPr id="16" name="Shape 14">
             <a:extLst xmlns:a="http://schemas.openxmlformats.org/drawingml/2006/main">
               <a:ext uri="{FF2B5EF4-FFF2-40B4-BE49-F238E27FC236}">
-                <a16:creationId xmlns:a16="http://schemas.microsoft.com/office/drawing/2014/main" id="{46A658A6-215B-4FF6-A389-5722CD6DB769}"/>
+                <a16:creationId xmlns:a16="http://schemas.microsoft.com/office/drawing/2014/main" id="{98409E27-3417-4DFD-A58A-9F21E99CEFED}"/>
               </a:ext>
             </a:extLst>
           </p:cNvPr>
@@ -13908,7 +13920,7 @@
           <p:cNvPr id="17" name="Text 15">
             <a:extLst xmlns:a="http://schemas.openxmlformats.org/drawingml/2006/main">
               <a:ext uri="{FF2B5EF4-FFF2-40B4-BE49-F238E27FC236}">
-                <a16:creationId xmlns:a16="http://schemas.microsoft.com/office/drawing/2014/main" id="{DC10C1E5-F6B8-4AA5-9FF8-99A5A9D163B3}"/>
+                <a16:creationId xmlns:a16="http://schemas.microsoft.com/office/drawing/2014/main" id="{F8F82C89-E05F-4C44-9CE5-E8D6EC4924FD}"/>
               </a:ext>
             </a:extLst>
           </p:cNvPr>
@@ -13953,7 +13965,7 @@
           <p:cNvPr id="18" name="Text 16">
             <a:extLst xmlns:a="http://schemas.openxmlformats.org/drawingml/2006/main">
               <a:ext uri="{FF2B5EF4-FFF2-40B4-BE49-F238E27FC236}">
-                <a16:creationId xmlns:a16="http://schemas.microsoft.com/office/drawing/2014/main" id="{6FC5C62D-C20B-49C5-ACE0-BBA45C9EDFA4}"/>
+                <a16:creationId xmlns:a16="http://schemas.microsoft.com/office/drawing/2014/main" id="{5A01506A-1C99-4089-886F-2EFC2971CB41}"/>
               </a:ext>
             </a:extLst>
           </p:cNvPr>
@@ -13998,7 +14010,7 @@
           <p:cNvPr id="19" name="Text 17">
             <a:extLst xmlns:a="http://schemas.openxmlformats.org/drawingml/2006/main">
               <a:ext uri="{FF2B5EF4-FFF2-40B4-BE49-F238E27FC236}">
-                <a16:creationId xmlns:a16="http://schemas.microsoft.com/office/drawing/2014/main" id="{80D75D4B-8733-4EA5-BA20-48E876866879}"/>
+                <a16:creationId xmlns:a16="http://schemas.microsoft.com/office/drawing/2014/main" id="{7FF7E91A-6ECC-49C4-B373-F8D20B13A0EC}"/>
               </a:ext>
             </a:extLst>
           </p:cNvPr>
@@ -14043,7 +14055,7 @@
           <p:cNvPr id="20" name="Text 18">
             <a:extLst xmlns:a="http://schemas.openxmlformats.org/drawingml/2006/main">
               <a:ext uri="{FF2B5EF4-FFF2-40B4-BE49-F238E27FC236}">
-                <a16:creationId xmlns:a16="http://schemas.microsoft.com/office/drawing/2014/main" id="{06320029-6D4A-42D0-9D38-3068B9ADB3E4}"/>
+                <a16:creationId xmlns:a16="http://schemas.microsoft.com/office/drawing/2014/main" id="{84D6A9DE-5941-4F97-A14B-21BBEB9B0482}"/>
               </a:ext>
             </a:extLst>
           </p:cNvPr>
@@ -14088,7 +14100,7 @@
           <p:cNvPr id="21" name="Text 19">
             <a:extLst xmlns:a="http://schemas.openxmlformats.org/drawingml/2006/main">
               <a:ext uri="{FF2B5EF4-FFF2-40B4-BE49-F238E27FC236}">
-                <a16:creationId xmlns:a16="http://schemas.microsoft.com/office/drawing/2014/main" id="{70DD1E5E-E560-4CC6-B544-4B6405C9E23E}"/>
+                <a16:creationId xmlns:a16="http://schemas.microsoft.com/office/drawing/2014/main" id="{FC5A91A6-C09C-4194-8754-1385CEDCBDB0}"/>
               </a:ext>
             </a:extLst>
           </p:cNvPr>
@@ -14133,7 +14145,7 @@
           <p:cNvPr id="22" name="Text 20">
             <a:extLst xmlns:a="http://schemas.openxmlformats.org/drawingml/2006/main">
               <a:ext uri="{FF2B5EF4-FFF2-40B4-BE49-F238E27FC236}">
-                <a16:creationId xmlns:a16="http://schemas.microsoft.com/office/drawing/2014/main" id="{44BE6B81-850F-4F08-899D-3FFEF8007155}"/>
+                <a16:creationId xmlns:a16="http://schemas.microsoft.com/office/drawing/2014/main" id="{1842A373-FAB8-4012-85B5-5C43FC7A66EC}"/>
               </a:ext>
             </a:extLst>
           </p:cNvPr>
@@ -14178,7 +14190,7 @@
           <p:cNvPr id="23" name="Text 21">
             <a:extLst xmlns:a="http://schemas.openxmlformats.org/drawingml/2006/main">
               <a:ext uri="{FF2B5EF4-FFF2-40B4-BE49-F238E27FC236}">
-                <a16:creationId xmlns:a16="http://schemas.microsoft.com/office/drawing/2014/main" id="{EA4B2FE2-731B-443D-91F7-67DC1237A62E}"/>
+                <a16:creationId xmlns:a16="http://schemas.microsoft.com/office/drawing/2014/main" id="{B293FB11-4823-4B32-8B1C-42C8BF3C1726}"/>
               </a:ext>
             </a:extLst>
           </p:cNvPr>
@@ -14223,7 +14235,7 @@
           <p:cNvPr id="24" name="Text 22">
             <a:extLst xmlns:a="http://schemas.openxmlformats.org/drawingml/2006/main">
               <a:ext uri="{FF2B5EF4-FFF2-40B4-BE49-F238E27FC236}">
-                <a16:creationId xmlns:a16="http://schemas.microsoft.com/office/drawing/2014/main" id="{D832B2E5-0FB2-401F-B75B-31C6DF04C477}"/>
+                <a16:creationId xmlns:a16="http://schemas.microsoft.com/office/drawing/2014/main" id="{C3F4BBF9-7E54-4F49-9CE2-2988CF0BE414}"/>
               </a:ext>
             </a:extLst>
           </p:cNvPr>
@@ -14268,7 +14280,7 @@
           <p:cNvPr id="25" name="Text 23">
             <a:extLst xmlns:a="http://schemas.openxmlformats.org/drawingml/2006/main">
               <a:ext uri="{FF2B5EF4-FFF2-40B4-BE49-F238E27FC236}">
-                <a16:creationId xmlns:a16="http://schemas.microsoft.com/office/drawing/2014/main" id="{0432C7B8-C96A-40EB-ADEF-A37BD2242DE9}"/>
+                <a16:creationId xmlns:a16="http://schemas.microsoft.com/office/drawing/2014/main" id="{64E713F6-A0F9-4E09-B8CA-53BBB917B3F5}"/>
               </a:ext>
             </a:extLst>
           </p:cNvPr>
@@ -14316,7 +14328,7 @@
           <p:cNvPr id="26" name="Shape 24">
             <a:extLst xmlns:a="http://schemas.openxmlformats.org/drawingml/2006/main">
               <a:ext uri="{FF2B5EF4-FFF2-40B4-BE49-F238E27FC236}">
-                <a16:creationId xmlns:a16="http://schemas.microsoft.com/office/drawing/2014/main" id="{F75E8F80-08E5-4179-8503-C7FB47B83C1A}"/>
+                <a16:creationId xmlns:a16="http://schemas.microsoft.com/office/drawing/2014/main" id="{3DF207FA-ABD5-4768-9580-F5B0DE7D96D0}"/>
               </a:ext>
             </a:extLst>
           </p:cNvPr>
@@ -14363,7 +14375,7 @@
           <p:cNvPr id="27" name="Shape 25">
             <a:extLst xmlns:a="http://schemas.openxmlformats.org/drawingml/2006/main">
               <a:ext uri="{FF2B5EF4-FFF2-40B4-BE49-F238E27FC236}">
-                <a16:creationId xmlns:a16="http://schemas.microsoft.com/office/drawing/2014/main" id="{43F5D503-4DA2-47CA-BB25-D8F238BE7171}"/>
+                <a16:creationId xmlns:a16="http://schemas.microsoft.com/office/drawing/2014/main" id="{978E167D-8FFB-48C9-A9B0-AA167F9D9430}"/>
               </a:ext>
             </a:extLst>
           </p:cNvPr>
@@ -14401,7 +14413,7 @@
           <p:cNvPr id="28" name="Text 26">
             <a:extLst xmlns:a="http://schemas.openxmlformats.org/drawingml/2006/main">
               <a:ext uri="{FF2B5EF4-FFF2-40B4-BE49-F238E27FC236}">
-                <a16:creationId xmlns:a16="http://schemas.microsoft.com/office/drawing/2014/main" id="{81F28EBB-4339-4C46-9BE7-6F0EA916E001}"/>
+                <a16:creationId xmlns:a16="http://schemas.microsoft.com/office/drawing/2014/main" id="{D6C67D28-31A7-4D27-9EA4-7C0B589559BA}"/>
               </a:ext>
             </a:extLst>
           </p:cNvPr>
@@ -14446,7 +14458,7 @@
           <p:cNvPr id="29" name="Text 27">
             <a:extLst xmlns:a="http://schemas.openxmlformats.org/drawingml/2006/main">
               <a:ext uri="{FF2B5EF4-FFF2-40B4-BE49-F238E27FC236}">
-                <a16:creationId xmlns:a16="http://schemas.microsoft.com/office/drawing/2014/main" id="{D48D0D4C-022B-4F72-9477-2462CA8CF42D}"/>
+                <a16:creationId xmlns:a16="http://schemas.microsoft.com/office/drawing/2014/main" id="{58884649-006F-4EB9-9905-6C459C8543FC}"/>
               </a:ext>
             </a:extLst>
           </p:cNvPr>
@@ -14491,7 +14503,7 @@
           <p:cNvPr id="30" name="Text 28">
             <a:extLst xmlns:a="http://schemas.openxmlformats.org/drawingml/2006/main">
               <a:ext uri="{FF2B5EF4-FFF2-40B4-BE49-F238E27FC236}">
-                <a16:creationId xmlns:a16="http://schemas.microsoft.com/office/drawing/2014/main" id="{E1AFA08F-6607-49B6-9EFF-A7EF605CF48C}"/>
+                <a16:creationId xmlns:a16="http://schemas.microsoft.com/office/drawing/2014/main" id="{4ECF5234-C3BE-4836-B1AD-CF1B92AE18B2}"/>
               </a:ext>
             </a:extLst>
           </p:cNvPr>
@@ -14537,7 +14549,7 @@
     </p:spTree>
     <p:extLst>
       <p:ext uri="{BB962C8B-B14F-4D97-AF65-F5344CB8AC3E}">
-        <p14:creationId xmlns:p14="http://schemas.microsoft.com/office/powerpoint/2010/main" val="1891634428"/>
+        <p14:creationId xmlns:p14="http://schemas.microsoft.com/office/powerpoint/2010/main" val="551690555"/>
       </p:ext>
     </p:extLst>
   </p:cSld>
@@ -14568,7 +14580,7 @@
           <p:cNvPr id="2" name="Text 0">
             <a:extLst xmlns:a="http://schemas.openxmlformats.org/drawingml/2006/main">
               <a:ext uri="{FF2B5EF4-FFF2-40B4-BE49-F238E27FC236}">
-                <a16:creationId xmlns:a16="http://schemas.microsoft.com/office/drawing/2014/main" id="{6DFBD0D7-36E2-4777-87D6-DE86E3F2BC5A}"/>
+                <a16:creationId xmlns:a16="http://schemas.microsoft.com/office/drawing/2014/main" id="{4099D59D-2351-4B13-9B05-9896DB0AED1A}"/>
               </a:ext>
             </a:extLst>
           </p:cNvPr>
@@ -14613,7 +14625,7 @@
           <p:cNvPr id="3" name="Text 1">
             <a:extLst xmlns:a="http://schemas.openxmlformats.org/drawingml/2006/main">
               <a:ext uri="{FF2B5EF4-FFF2-40B4-BE49-F238E27FC236}">
-                <a16:creationId xmlns:a16="http://schemas.microsoft.com/office/drawing/2014/main" id="{7AFC6B51-7B93-488E-BAEC-345AFA37B1B1}"/>
+                <a16:creationId xmlns:a16="http://schemas.microsoft.com/office/drawing/2014/main" id="{8BCFCC65-6BFA-4EF9-85BD-54521ABB2DA7}"/>
               </a:ext>
             </a:extLst>
           </p:cNvPr>
@@ -14658,7 +14670,7 @@
           <p:cNvPr id="4" name="Text 2">
             <a:extLst xmlns:a="http://schemas.openxmlformats.org/drawingml/2006/main">
               <a:ext uri="{FF2B5EF4-FFF2-40B4-BE49-F238E27FC236}">
-                <a16:creationId xmlns:a16="http://schemas.microsoft.com/office/drawing/2014/main" id="{7A7C4E20-403C-4160-B875-0733F55450C9}"/>
+                <a16:creationId xmlns:a16="http://schemas.microsoft.com/office/drawing/2014/main" id="{14D77603-58B9-42DD-955C-36CB3111F3F4}"/>
               </a:ext>
             </a:extLst>
           </p:cNvPr>
@@ -14703,7 +14715,7 @@
           <p:cNvPr id="5" name="Text 3">
             <a:extLst xmlns:a="http://schemas.openxmlformats.org/drawingml/2006/main">
               <a:ext uri="{FF2B5EF4-FFF2-40B4-BE49-F238E27FC236}">
-                <a16:creationId xmlns:a16="http://schemas.microsoft.com/office/drawing/2014/main" id="{B5FFDE7B-E989-40DF-91ED-F0E133799173}"/>
+                <a16:creationId xmlns:a16="http://schemas.microsoft.com/office/drawing/2014/main" id="{6A4686B3-3E96-4645-9385-0D00DE862C40}"/>
               </a:ext>
             </a:extLst>
           </p:cNvPr>
@@ -14755,7 +14767,7 @@
         </p:xfrm>
         <a:graphic xmlns:a="http://schemas.openxmlformats.org/drawingml/2006/main">
           <a:graphicData uri="http://schemas.openxmlformats.org/drawingml/2006/chart">
-            <c:chart xmlns:r="http://schemas.openxmlformats.org/officeDocument/2006/relationships" xmlns:c="http://schemas.openxmlformats.org/drawingml/2006/chart" r:id="Rfabbebb52105416b"/>
+            <c:chart xmlns:r="http://schemas.openxmlformats.org/officeDocument/2006/relationships" xmlns:c="http://schemas.openxmlformats.org/drawingml/2006/chart" r:id="Ra1a7e79b88304c3a"/>
           </a:graphicData>
         </a:graphic>
       </p:graphicFrame>
@@ -14764,7 +14776,7 @@
           <p:cNvPr id="7" name="Shape 4">
             <a:extLst xmlns:a="http://schemas.openxmlformats.org/drawingml/2006/main">
               <a:ext uri="{FF2B5EF4-FFF2-40B4-BE49-F238E27FC236}">
-                <a16:creationId xmlns:a16="http://schemas.microsoft.com/office/drawing/2014/main" id="{6BA429EA-BE7A-4A84-9EE9-D26E09159F5D}"/>
+                <a16:creationId xmlns:a16="http://schemas.microsoft.com/office/drawing/2014/main" id="{7E244193-3424-440C-BE42-C4FAAA460690}"/>
               </a:ext>
             </a:extLst>
           </p:cNvPr>
@@ -14811,7 +14823,7 @@
           <p:cNvPr id="8" name="Text 5">
             <a:extLst xmlns:a="http://schemas.openxmlformats.org/drawingml/2006/main">
               <a:ext uri="{FF2B5EF4-FFF2-40B4-BE49-F238E27FC236}">
-                <a16:creationId xmlns:a16="http://schemas.microsoft.com/office/drawing/2014/main" id="{4F7F773D-4D4A-4AF3-A724-7C77D5318808}"/>
+                <a16:creationId xmlns:a16="http://schemas.microsoft.com/office/drawing/2014/main" id="{09E7C1C3-377A-4165-ADE9-11C2AFF5419E}"/>
               </a:ext>
             </a:extLst>
           </p:cNvPr>
@@ -14859,7 +14871,7 @@
           <p:cNvPr id="9" name="Text 6">
             <a:extLst xmlns:a="http://schemas.openxmlformats.org/drawingml/2006/main">
               <a:ext uri="{FF2B5EF4-FFF2-40B4-BE49-F238E27FC236}">
-                <a16:creationId xmlns:a16="http://schemas.microsoft.com/office/drawing/2014/main" id="{D5F55EB1-5DFC-4171-9B95-56E6AA188395}"/>
+                <a16:creationId xmlns:a16="http://schemas.microsoft.com/office/drawing/2014/main" id="{D88B8067-BB50-4130-B88D-F0809551C321}"/>
               </a:ext>
             </a:extLst>
           </p:cNvPr>
@@ -14907,7 +14919,7 @@
           <p:cNvPr id="10" name="Shape 7">
             <a:extLst xmlns:a="http://schemas.openxmlformats.org/drawingml/2006/main">
               <a:ext uri="{FF2B5EF4-FFF2-40B4-BE49-F238E27FC236}">
-                <a16:creationId xmlns:a16="http://schemas.microsoft.com/office/drawing/2014/main" id="{217FD1BC-0EBF-4236-A023-F98261AF8CE3}"/>
+                <a16:creationId xmlns:a16="http://schemas.microsoft.com/office/drawing/2014/main" id="{FC70D6FC-1A40-4B8A-B4A3-D3BE616D4059}"/>
               </a:ext>
             </a:extLst>
           </p:cNvPr>
@@ -14954,7 +14966,7 @@
           <p:cNvPr id="11" name="Text 8">
             <a:extLst xmlns:a="http://schemas.openxmlformats.org/drawingml/2006/main">
               <a:ext uri="{FF2B5EF4-FFF2-40B4-BE49-F238E27FC236}">
-                <a16:creationId xmlns:a16="http://schemas.microsoft.com/office/drawing/2014/main" id="{B5C5A76E-074D-4659-9BF3-8FE212A8CE04}"/>
+                <a16:creationId xmlns:a16="http://schemas.microsoft.com/office/drawing/2014/main" id="{2A7BF60C-37CB-4440-BEF6-9F8A646F477B}"/>
               </a:ext>
             </a:extLst>
           </p:cNvPr>
@@ -15002,7 +15014,7 @@
           <p:cNvPr id="12" name="Text 9">
             <a:extLst xmlns:a="http://schemas.openxmlformats.org/drawingml/2006/main">
               <a:ext uri="{FF2B5EF4-FFF2-40B4-BE49-F238E27FC236}">
-                <a16:creationId xmlns:a16="http://schemas.microsoft.com/office/drawing/2014/main" id="{F9B24739-D226-4842-84D4-E2F800C884F9}"/>
+                <a16:creationId xmlns:a16="http://schemas.microsoft.com/office/drawing/2014/main" id="{656516CD-B8A2-4843-9BFF-9FDF985CEE1D}"/>
               </a:ext>
             </a:extLst>
           </p:cNvPr>
@@ -15050,7 +15062,7 @@
           <p:cNvPr id="13" name="Shape 10">
             <a:extLst xmlns:a="http://schemas.openxmlformats.org/drawingml/2006/main">
               <a:ext uri="{FF2B5EF4-FFF2-40B4-BE49-F238E27FC236}">
-                <a16:creationId xmlns:a16="http://schemas.microsoft.com/office/drawing/2014/main" id="{43CF8877-F3E2-4BEB-9DE0-D56A9C73D2E2}"/>
+                <a16:creationId xmlns:a16="http://schemas.microsoft.com/office/drawing/2014/main" id="{4D5667C3-87A9-4E71-A91A-155EACD63EC2}"/>
               </a:ext>
             </a:extLst>
           </p:cNvPr>
@@ -15097,7 +15109,7 @@
           <p:cNvPr id="14" name="Text 11">
             <a:extLst xmlns:a="http://schemas.openxmlformats.org/drawingml/2006/main">
               <a:ext uri="{FF2B5EF4-FFF2-40B4-BE49-F238E27FC236}">
-                <a16:creationId xmlns:a16="http://schemas.microsoft.com/office/drawing/2014/main" id="{B2C14981-B6BB-4887-AA2B-7E366E0B3CF8}"/>
+                <a16:creationId xmlns:a16="http://schemas.microsoft.com/office/drawing/2014/main" id="{176F46CB-0300-4EE0-9692-77E5FA7CE3D9}"/>
               </a:ext>
             </a:extLst>
           </p:cNvPr>
@@ -15145,7 +15157,7 @@
           <p:cNvPr id="15" name="Text 12">
             <a:extLst xmlns:a="http://schemas.openxmlformats.org/drawingml/2006/main">
               <a:ext uri="{FF2B5EF4-FFF2-40B4-BE49-F238E27FC236}">
-                <a16:creationId xmlns:a16="http://schemas.microsoft.com/office/drawing/2014/main" id="{6F7EEB6B-0E5A-4D41-8B80-7C3A58DB8BD3}"/>
+                <a16:creationId xmlns:a16="http://schemas.microsoft.com/office/drawing/2014/main" id="{83F4CA3E-E46A-457F-A0B4-5CBBB72C5CA0}"/>
               </a:ext>
             </a:extLst>
           </p:cNvPr>
@@ -15193,7 +15205,7 @@
           <p:cNvPr id="16" name="Text 13">
             <a:extLst xmlns:a="http://schemas.openxmlformats.org/drawingml/2006/main">
               <a:ext uri="{FF2B5EF4-FFF2-40B4-BE49-F238E27FC236}">
-                <a16:creationId xmlns:a16="http://schemas.microsoft.com/office/drawing/2014/main" id="{1CD6D4DE-5E06-48F4-A66E-A3EBE8390D0A}"/>
+                <a16:creationId xmlns:a16="http://schemas.microsoft.com/office/drawing/2014/main" id="{28631543-BADE-4DF4-AC96-00072B4F65F2}"/>
               </a:ext>
             </a:extLst>
           </p:cNvPr>
@@ -15239,7 +15251,7 @@
     </p:spTree>
     <p:extLst>
       <p:ext uri="{BB962C8B-B14F-4D97-AF65-F5344CB8AC3E}">
-        <p14:creationId xmlns:p14="http://schemas.microsoft.com/office/powerpoint/2010/main" val="124953007"/>
+        <p14:creationId xmlns:p14="http://schemas.microsoft.com/office/powerpoint/2010/main" val="1036704389"/>
       </p:ext>
     </p:extLst>
   </p:cSld>
@@ -15270,7 +15282,7 @@
           <p:cNvPr id="2" name="Text 0">
             <a:extLst xmlns:a="http://schemas.openxmlformats.org/drawingml/2006/main">
               <a:ext uri="{FF2B5EF4-FFF2-40B4-BE49-F238E27FC236}">
-                <a16:creationId xmlns:a16="http://schemas.microsoft.com/office/drawing/2014/main" id="{8345F0BE-ACF6-4F7C-B499-2F8F0F86E7FE}"/>
+                <a16:creationId xmlns:a16="http://schemas.microsoft.com/office/drawing/2014/main" id="{5FCAC2B3-FFCC-4FC5-B878-A34BE19A99FB}"/>
               </a:ext>
             </a:extLst>
           </p:cNvPr>
@@ -15315,7 +15327,7 @@
           <p:cNvPr id="3" name="Text 1">
             <a:extLst xmlns:a="http://schemas.openxmlformats.org/drawingml/2006/main">
               <a:ext uri="{FF2B5EF4-FFF2-40B4-BE49-F238E27FC236}">
-                <a16:creationId xmlns:a16="http://schemas.microsoft.com/office/drawing/2014/main" id="{CADD179A-361E-424A-A896-431333366F3C}"/>
+                <a16:creationId xmlns:a16="http://schemas.microsoft.com/office/drawing/2014/main" id="{BB91F973-A6E9-498F-A73E-A1401DB2979E}"/>
               </a:ext>
             </a:extLst>
           </p:cNvPr>
@@ -15360,7 +15372,7 @@
           <p:cNvPr id="4" name="Text 2">
             <a:extLst xmlns:a="http://schemas.openxmlformats.org/drawingml/2006/main">
               <a:ext uri="{FF2B5EF4-FFF2-40B4-BE49-F238E27FC236}">
-                <a16:creationId xmlns:a16="http://schemas.microsoft.com/office/drawing/2014/main" id="{04D45D05-9F27-4388-BD19-97B61D6DB6CD}"/>
+                <a16:creationId xmlns:a16="http://schemas.microsoft.com/office/drawing/2014/main" id="{DF145F2A-F2C9-44B7-B4B5-FBF02FCAE369}"/>
               </a:ext>
             </a:extLst>
           </p:cNvPr>
@@ -15405,7 +15417,7 @@
           <p:cNvPr id="5" name="Text 3">
             <a:extLst xmlns:a="http://schemas.openxmlformats.org/drawingml/2006/main">
               <a:ext uri="{FF2B5EF4-FFF2-40B4-BE49-F238E27FC236}">
-                <a16:creationId xmlns:a16="http://schemas.microsoft.com/office/drawing/2014/main" id="{6D09C62C-4438-44B7-ACD1-7281A982220D}"/>
+                <a16:creationId xmlns:a16="http://schemas.microsoft.com/office/drawing/2014/main" id="{7C7186E8-925E-4434-A638-D6208139F182}"/>
               </a:ext>
             </a:extLst>
           </p:cNvPr>
@@ -15450,7 +15462,7 @@
           <p:cNvPr id="6" name="Text 4">
             <a:extLst xmlns:a="http://schemas.openxmlformats.org/drawingml/2006/main">
               <a:ext uri="{FF2B5EF4-FFF2-40B4-BE49-F238E27FC236}">
-                <a16:creationId xmlns:a16="http://schemas.microsoft.com/office/drawing/2014/main" id="{35E9191A-A68D-40B4-ABBB-524444C58BDC}"/>
+                <a16:creationId xmlns:a16="http://schemas.microsoft.com/office/drawing/2014/main" id="{CCF7C199-6E6D-44D6-B057-27580600F28C}"/>
               </a:ext>
             </a:extLst>
           </p:cNvPr>
@@ -15498,7 +15510,7 @@
           <p:cNvPr id="7" name="Text 5">
             <a:extLst xmlns:a="http://schemas.openxmlformats.org/drawingml/2006/main">
               <a:ext uri="{FF2B5EF4-FFF2-40B4-BE49-F238E27FC236}">
-                <a16:creationId xmlns:a16="http://schemas.microsoft.com/office/drawing/2014/main" id="{084428C9-375E-45A4-9D7B-436D4B5D2FB7}"/>
+                <a16:creationId xmlns:a16="http://schemas.microsoft.com/office/drawing/2014/main" id="{2E971890-AFBB-4210-A5AE-8A87470E48BD}"/>
               </a:ext>
             </a:extLst>
           </p:cNvPr>
@@ -16803,7 +16815,7 @@
           <p:cNvPr id="9" name="Text 6">
             <a:extLst xmlns:a="http://schemas.openxmlformats.org/drawingml/2006/main">
               <a:ext uri="{FF2B5EF4-FFF2-40B4-BE49-F238E27FC236}">
-                <a16:creationId xmlns:a16="http://schemas.microsoft.com/office/drawing/2014/main" id="{0F1FA367-C54E-405D-8856-3475B55CEF2F}"/>
+                <a16:creationId xmlns:a16="http://schemas.microsoft.com/office/drawing/2014/main" id="{1262D91E-1819-402D-ABD1-D8BBBD1EFA9B}"/>
               </a:ext>
             </a:extLst>
           </p:cNvPr>
@@ -16862,7 +16874,7 @@
           <p:cNvPr id="10" name="Shape 7">
             <a:extLst xmlns:a="http://schemas.openxmlformats.org/drawingml/2006/main">
               <a:ext uri="{FF2B5EF4-FFF2-40B4-BE49-F238E27FC236}">
-                <a16:creationId xmlns:a16="http://schemas.microsoft.com/office/drawing/2014/main" id="{40703B2C-C01A-4F6E-8143-9B2A203FB014}"/>
+                <a16:creationId xmlns:a16="http://schemas.microsoft.com/office/drawing/2014/main" id="{DE8FC14F-BC9A-48EA-BDAC-241AC44FEDF8}"/>
               </a:ext>
             </a:extLst>
           </p:cNvPr>
@@ -16909,7 +16921,7 @@
           <p:cNvPr id="11" name="Shape 8">
             <a:extLst xmlns:a="http://schemas.openxmlformats.org/drawingml/2006/main">
               <a:ext uri="{FF2B5EF4-FFF2-40B4-BE49-F238E27FC236}">
-                <a16:creationId xmlns:a16="http://schemas.microsoft.com/office/drawing/2014/main" id="{71CD05DA-9CE0-47F5-8CEB-2082EA22B0F5}"/>
+                <a16:creationId xmlns:a16="http://schemas.microsoft.com/office/drawing/2014/main" id="{C31C9154-0E42-48B1-AAFA-86383A60317C}"/>
               </a:ext>
             </a:extLst>
           </p:cNvPr>
@@ -16947,7 +16959,7 @@
           <p:cNvPr id="12" name="Text 9">
             <a:extLst xmlns:a="http://schemas.openxmlformats.org/drawingml/2006/main">
               <a:ext uri="{FF2B5EF4-FFF2-40B4-BE49-F238E27FC236}">
-                <a16:creationId xmlns:a16="http://schemas.microsoft.com/office/drawing/2014/main" id="{11847296-1FF2-40EE-87AC-8F1330903060}"/>
+                <a16:creationId xmlns:a16="http://schemas.microsoft.com/office/drawing/2014/main" id="{33E4E41B-A593-48CD-9B10-5C3583E0286E}"/>
               </a:ext>
             </a:extLst>
           </p:cNvPr>
@@ -16992,7 +17004,7 @@
           <p:cNvPr id="13" name="Text 10">
             <a:extLst xmlns:a="http://schemas.openxmlformats.org/drawingml/2006/main">
               <a:ext uri="{FF2B5EF4-FFF2-40B4-BE49-F238E27FC236}">
-                <a16:creationId xmlns:a16="http://schemas.microsoft.com/office/drawing/2014/main" id="{0F962DA8-8CFD-4E2E-9EA4-9A9EF1DC2C64}"/>
+                <a16:creationId xmlns:a16="http://schemas.microsoft.com/office/drawing/2014/main" id="{EF38C8CB-2848-401F-91BE-A2BB5774CA81}"/>
               </a:ext>
             </a:extLst>
           </p:cNvPr>
@@ -17037,7 +17049,7 @@
           <p:cNvPr id="14" name="Text 11">
             <a:extLst xmlns:a="http://schemas.openxmlformats.org/drawingml/2006/main">
               <a:ext uri="{FF2B5EF4-FFF2-40B4-BE49-F238E27FC236}">
-                <a16:creationId xmlns:a16="http://schemas.microsoft.com/office/drawing/2014/main" id="{272CFABA-6D6E-4D26-BCE2-E476B0239042}"/>
+                <a16:creationId xmlns:a16="http://schemas.microsoft.com/office/drawing/2014/main" id="{8599F66A-2D71-4348-BDBF-C1147639AD74}"/>
               </a:ext>
             </a:extLst>
           </p:cNvPr>
@@ -17132,7 +17144,7 @@
           <p:cNvPr id="15" name="Shape 12">
             <a:extLst xmlns:a="http://schemas.openxmlformats.org/drawingml/2006/main">
               <a:ext uri="{FF2B5EF4-FFF2-40B4-BE49-F238E27FC236}">
-                <a16:creationId xmlns:a16="http://schemas.microsoft.com/office/drawing/2014/main" id="{7EB9CB76-1148-4D9D-8C99-117B5B219D5D}"/>
+                <a16:creationId xmlns:a16="http://schemas.microsoft.com/office/drawing/2014/main" id="{468D5A6B-75E2-48F6-BE01-A150E6E4A54D}"/>
               </a:ext>
             </a:extLst>
           </p:cNvPr>
@@ -17179,7 +17191,7 @@
           <p:cNvPr id="16" name="Shape 13">
             <a:extLst xmlns:a="http://schemas.openxmlformats.org/drawingml/2006/main">
               <a:ext uri="{FF2B5EF4-FFF2-40B4-BE49-F238E27FC236}">
-                <a16:creationId xmlns:a16="http://schemas.microsoft.com/office/drawing/2014/main" id="{EE6870D0-8D32-482D-993C-E4978E21B0E0}"/>
+                <a16:creationId xmlns:a16="http://schemas.microsoft.com/office/drawing/2014/main" id="{D9527E66-9F7E-4BA3-A2FC-10E2C79434B5}"/>
               </a:ext>
             </a:extLst>
           </p:cNvPr>
@@ -17217,7 +17229,7 @@
           <p:cNvPr id="17" name="Text 14">
             <a:extLst xmlns:a="http://schemas.openxmlformats.org/drawingml/2006/main">
               <a:ext uri="{FF2B5EF4-FFF2-40B4-BE49-F238E27FC236}">
-                <a16:creationId xmlns:a16="http://schemas.microsoft.com/office/drawing/2014/main" id="{82B9517F-F668-42D4-8D88-99948F034476}"/>
+                <a16:creationId xmlns:a16="http://schemas.microsoft.com/office/drawing/2014/main" id="{089D14B1-B833-4378-B490-9FB941AC0828}"/>
               </a:ext>
             </a:extLst>
           </p:cNvPr>
@@ -17262,7 +17274,7 @@
           <p:cNvPr id="18" name="Text 15">
             <a:extLst xmlns:a="http://schemas.openxmlformats.org/drawingml/2006/main">
               <a:ext uri="{FF2B5EF4-FFF2-40B4-BE49-F238E27FC236}">
-                <a16:creationId xmlns:a16="http://schemas.microsoft.com/office/drawing/2014/main" id="{2BF9956C-5C0A-4DAE-AB47-F5BA7562AA23}"/>
+                <a16:creationId xmlns:a16="http://schemas.microsoft.com/office/drawing/2014/main" id="{7C915287-0AA9-40D7-8A41-1AB1D4B7D31E}"/>
               </a:ext>
             </a:extLst>
           </p:cNvPr>
@@ -17307,7 +17319,7 @@
           <p:cNvPr id="8" name="Text 16">
             <a:extLst xmlns:a="http://schemas.openxmlformats.org/drawingml/2006/main">
               <a:ext uri="{FF2B5EF4-FFF2-40B4-BE49-F238E27FC236}">
-                <a16:creationId xmlns:a16="http://schemas.microsoft.com/office/drawing/2014/main" id="{66C37D34-9532-4EEF-BEDE-18D0C7A6DB33}"/>
+                <a16:creationId xmlns:a16="http://schemas.microsoft.com/office/drawing/2014/main" id="{F85380C3-0B69-42D6-9E51-D8B93381A6E6}"/>
               </a:ext>
             </a:extLst>
           </p:cNvPr>
@@ -17402,7 +17414,7 @@
           <p:cNvPr id="20" name="Shape 17">
             <a:extLst xmlns:a="http://schemas.openxmlformats.org/drawingml/2006/main">
               <a:ext uri="{FF2B5EF4-FFF2-40B4-BE49-F238E27FC236}">
-                <a16:creationId xmlns:a16="http://schemas.microsoft.com/office/drawing/2014/main" id="{5CAC6923-BFFD-42C1-9359-82F998EAF306}"/>
+                <a16:creationId xmlns:a16="http://schemas.microsoft.com/office/drawing/2014/main" id="{E96EA5E8-2331-42AF-AF34-34A8BA238108}"/>
               </a:ext>
             </a:extLst>
           </p:cNvPr>
@@ -17449,7 +17461,7 @@
           <p:cNvPr id="21" name="Text 18">
             <a:extLst xmlns:a="http://schemas.openxmlformats.org/drawingml/2006/main">
               <a:ext uri="{FF2B5EF4-FFF2-40B4-BE49-F238E27FC236}">
-                <a16:creationId xmlns:a16="http://schemas.microsoft.com/office/drawing/2014/main" id="{40A029B8-42F5-4F75-B0C4-CBACB19739FA}"/>
+                <a16:creationId xmlns:a16="http://schemas.microsoft.com/office/drawing/2014/main" id="{6ADB69A1-63C1-4D69-A79A-6B6A7CF57C8B}"/>
               </a:ext>
             </a:extLst>
           </p:cNvPr>
@@ -17506,7 +17518,7 @@
     </p:spTree>
     <p:extLst>
       <p:ext uri="{BB962C8B-B14F-4D97-AF65-F5344CB8AC3E}">
-        <p14:creationId xmlns:p14="http://schemas.microsoft.com/office/powerpoint/2010/main" val="403752927"/>
+        <p14:creationId xmlns:p14="http://schemas.microsoft.com/office/powerpoint/2010/main" val="1837912288"/>
       </p:ext>
     </p:extLst>
   </p:cSld>
@@ -17537,7 +17549,7 @@
           <p:cNvPr id="2" name="Text 0">
             <a:extLst xmlns:a="http://schemas.openxmlformats.org/drawingml/2006/main">
               <a:ext uri="{FF2B5EF4-FFF2-40B4-BE49-F238E27FC236}">
-                <a16:creationId xmlns:a16="http://schemas.microsoft.com/office/drawing/2014/main" id="{6FF60FED-E292-4857-AF6F-518962EB365D}"/>
+                <a16:creationId xmlns:a16="http://schemas.microsoft.com/office/drawing/2014/main" id="{58633C90-9649-40D3-A938-9BC14216815F}"/>
               </a:ext>
             </a:extLst>
           </p:cNvPr>
@@ -17582,7 +17594,7 @@
           <p:cNvPr id="3" name="Text 1">
             <a:extLst xmlns:a="http://schemas.openxmlformats.org/drawingml/2006/main">
               <a:ext uri="{FF2B5EF4-FFF2-40B4-BE49-F238E27FC236}">
-                <a16:creationId xmlns:a16="http://schemas.microsoft.com/office/drawing/2014/main" id="{BEC13800-4C68-4F30-9130-20B29CB52259}"/>
+                <a16:creationId xmlns:a16="http://schemas.microsoft.com/office/drawing/2014/main" id="{E86ECFE1-0E7E-4745-AFC8-9AF57CAC12F0}"/>
               </a:ext>
             </a:extLst>
           </p:cNvPr>
@@ -17627,7 +17639,7 @@
           <p:cNvPr id="4" name="Text 2">
             <a:extLst xmlns:a="http://schemas.openxmlformats.org/drawingml/2006/main">
               <a:ext uri="{FF2B5EF4-FFF2-40B4-BE49-F238E27FC236}">
-                <a16:creationId xmlns:a16="http://schemas.microsoft.com/office/drawing/2014/main" id="{088C609D-453C-44C8-BC6C-54F65741F838}"/>
+                <a16:creationId xmlns:a16="http://schemas.microsoft.com/office/drawing/2014/main" id="{F1BC4AE8-507D-405F-855B-8C916FC87C6C}"/>
               </a:ext>
             </a:extLst>
           </p:cNvPr>
@@ -17672,7 +17684,7 @@
           <p:cNvPr id="5" name="Text 3">
             <a:extLst xmlns:a="http://schemas.openxmlformats.org/drawingml/2006/main">
               <a:ext uri="{FF2B5EF4-FFF2-40B4-BE49-F238E27FC236}">
-                <a16:creationId xmlns:a16="http://schemas.microsoft.com/office/drawing/2014/main" id="{1EBAE8FD-FDB5-482C-8040-E213A40D275A}"/>
+                <a16:creationId xmlns:a16="http://schemas.microsoft.com/office/drawing/2014/main" id="{A06E0870-62E4-4461-B213-C79FEC0CA01C}"/>
               </a:ext>
             </a:extLst>
           </p:cNvPr>
@@ -17717,7 +17729,7 @@
           <p:cNvPr id="6" name="Shape 4">
             <a:extLst xmlns:a="http://schemas.openxmlformats.org/drawingml/2006/main">
               <a:ext uri="{FF2B5EF4-FFF2-40B4-BE49-F238E27FC236}">
-                <a16:creationId xmlns:a16="http://schemas.microsoft.com/office/drawing/2014/main" id="{D479FFF0-8424-4403-8CDD-3CFD8DFB3368}"/>
+                <a16:creationId xmlns:a16="http://schemas.microsoft.com/office/drawing/2014/main" id="{06890709-D5C6-4563-B7CB-B75982AF18E7}"/>
               </a:ext>
             </a:extLst>
           </p:cNvPr>
@@ -17764,7 +17776,7 @@
           <p:cNvPr id="7" name="Text 5">
             <a:extLst xmlns:a="http://schemas.openxmlformats.org/drawingml/2006/main">
               <a:ext uri="{FF2B5EF4-FFF2-40B4-BE49-F238E27FC236}">
-                <a16:creationId xmlns:a16="http://schemas.microsoft.com/office/drawing/2014/main" id="{CAF2D52D-3DAD-41DF-9A95-9B90DEE8E8D0}"/>
+                <a16:creationId xmlns:a16="http://schemas.microsoft.com/office/drawing/2014/main" id="{2F51AAFF-122C-41BB-93A4-3BE6B701737D}"/>
               </a:ext>
             </a:extLst>
           </p:cNvPr>
@@ -17834,7 +17846,7 @@
           <p:cNvPr id="8" name="Shape 6">
             <a:extLst xmlns:a="http://schemas.openxmlformats.org/drawingml/2006/main">
               <a:ext uri="{FF2B5EF4-FFF2-40B4-BE49-F238E27FC236}">
-                <a16:creationId xmlns:a16="http://schemas.microsoft.com/office/drawing/2014/main" id="{7E6EF1AC-A3F9-408D-86BF-FB9114DB358F}"/>
+                <a16:creationId xmlns:a16="http://schemas.microsoft.com/office/drawing/2014/main" id="{DF3124C7-2BCE-4AF7-9ECD-19B1AA32DB49}"/>
               </a:ext>
             </a:extLst>
           </p:cNvPr>
@@ -17881,7 +17893,7 @@
           <p:cNvPr id="9" name="Text 7">
             <a:extLst xmlns:a="http://schemas.openxmlformats.org/drawingml/2006/main">
               <a:ext uri="{FF2B5EF4-FFF2-40B4-BE49-F238E27FC236}">
-                <a16:creationId xmlns:a16="http://schemas.microsoft.com/office/drawing/2014/main" id="{56774CBC-69F2-4FB9-A8F5-46C127EF7C90}"/>
+                <a16:creationId xmlns:a16="http://schemas.microsoft.com/office/drawing/2014/main" id="{080CDB36-8585-4989-8271-9C8310F0D05C}"/>
               </a:ext>
             </a:extLst>
           </p:cNvPr>
@@ -17926,7 +17938,7 @@
           <p:cNvPr id="10" name="Text 8">
             <a:extLst xmlns:a="http://schemas.openxmlformats.org/drawingml/2006/main">
               <a:ext uri="{FF2B5EF4-FFF2-40B4-BE49-F238E27FC236}">
-                <a16:creationId xmlns:a16="http://schemas.microsoft.com/office/drawing/2014/main" id="{59C72DAD-EB25-492B-88E7-711C03AAAAF9}"/>
+                <a16:creationId xmlns:a16="http://schemas.microsoft.com/office/drawing/2014/main" id="{80ED6D64-C48A-462B-AAFD-73A56F106202}"/>
               </a:ext>
             </a:extLst>
           </p:cNvPr>
@@ -17974,7 +17986,7 @@
           <p:cNvPr id="11" name="Shape 9">
             <a:extLst xmlns:a="http://schemas.openxmlformats.org/drawingml/2006/main">
               <a:ext uri="{FF2B5EF4-FFF2-40B4-BE49-F238E27FC236}">
-                <a16:creationId xmlns:a16="http://schemas.microsoft.com/office/drawing/2014/main" id="{4DBB168C-506D-4580-A7C8-F23DB5B907D6}"/>
+                <a16:creationId xmlns:a16="http://schemas.microsoft.com/office/drawing/2014/main" id="{2A5BF72A-F199-47FC-A026-ACC0545B0706}"/>
               </a:ext>
             </a:extLst>
           </p:cNvPr>
@@ -18021,7 +18033,7 @@
           <p:cNvPr id="12" name="Text 10">
             <a:extLst xmlns:a="http://schemas.openxmlformats.org/drawingml/2006/main">
               <a:ext uri="{FF2B5EF4-FFF2-40B4-BE49-F238E27FC236}">
-                <a16:creationId xmlns:a16="http://schemas.microsoft.com/office/drawing/2014/main" id="{056FCFF6-E1A0-4DD5-AA0B-92E10D3AD2C9}"/>
+                <a16:creationId xmlns:a16="http://schemas.microsoft.com/office/drawing/2014/main" id="{E0014AA4-06B3-4FF8-9AF0-32749589E25D}"/>
               </a:ext>
             </a:extLst>
           </p:cNvPr>
@@ -18066,7 +18078,7 @@
           <p:cNvPr id="13" name="Text 11">
             <a:extLst xmlns:a="http://schemas.openxmlformats.org/drawingml/2006/main">
               <a:ext uri="{FF2B5EF4-FFF2-40B4-BE49-F238E27FC236}">
-                <a16:creationId xmlns:a16="http://schemas.microsoft.com/office/drawing/2014/main" id="{399821E9-3155-455C-9232-A0A7C9EF15B2}"/>
+                <a16:creationId xmlns:a16="http://schemas.microsoft.com/office/drawing/2014/main" id="{A3E61A8C-706F-4C4E-A2A4-B36D7E3799E1}"/>
               </a:ext>
             </a:extLst>
           </p:cNvPr>
@@ -18114,7 +18126,7 @@
           <p:cNvPr id="14" name="Shape 12">
             <a:extLst xmlns:a="http://schemas.openxmlformats.org/drawingml/2006/main">
               <a:ext uri="{FF2B5EF4-FFF2-40B4-BE49-F238E27FC236}">
-                <a16:creationId xmlns:a16="http://schemas.microsoft.com/office/drawing/2014/main" id="{4D407D38-4CEC-431E-BAB2-CC73E8355E6A}"/>
+                <a16:creationId xmlns:a16="http://schemas.microsoft.com/office/drawing/2014/main" id="{D1031922-E69E-434C-BA6C-26B73334F240}"/>
               </a:ext>
             </a:extLst>
           </p:cNvPr>
@@ -18161,7 +18173,7 @@
           <p:cNvPr id="15" name="Text 13">
             <a:extLst xmlns:a="http://schemas.openxmlformats.org/drawingml/2006/main">
               <a:ext uri="{FF2B5EF4-FFF2-40B4-BE49-F238E27FC236}">
-                <a16:creationId xmlns:a16="http://schemas.microsoft.com/office/drawing/2014/main" id="{65558D39-838D-4235-A9A4-E51315A1D855}"/>
+                <a16:creationId xmlns:a16="http://schemas.microsoft.com/office/drawing/2014/main" id="{EE1D67BF-7E08-451E-B1E9-9F42254D01B4}"/>
               </a:ext>
             </a:extLst>
           </p:cNvPr>
@@ -18206,7 +18218,7 @@
           <p:cNvPr id="16" name="Text 14">
             <a:extLst xmlns:a="http://schemas.openxmlformats.org/drawingml/2006/main">
               <a:ext uri="{FF2B5EF4-FFF2-40B4-BE49-F238E27FC236}">
-                <a16:creationId xmlns:a16="http://schemas.microsoft.com/office/drawing/2014/main" id="{0E3FDCD3-1AB9-44D8-86F9-5CE0B3D5A429}"/>
+                <a16:creationId xmlns:a16="http://schemas.microsoft.com/office/drawing/2014/main" id="{1DF9CDA5-E44E-4BF4-AD9E-26701432A955}"/>
               </a:ext>
             </a:extLst>
           </p:cNvPr>
@@ -18254,7 +18266,7 @@
           <p:cNvPr id="17" name="Shape 15">
             <a:extLst xmlns:a="http://schemas.openxmlformats.org/drawingml/2006/main">
               <a:ext uri="{FF2B5EF4-FFF2-40B4-BE49-F238E27FC236}">
-                <a16:creationId xmlns:a16="http://schemas.microsoft.com/office/drawing/2014/main" id="{4BC46B76-86BB-491B-980B-84E0D31123D9}"/>
+                <a16:creationId xmlns:a16="http://schemas.microsoft.com/office/drawing/2014/main" id="{BBFD53E5-F9A0-4457-87D4-FCE9E483B85B}"/>
               </a:ext>
             </a:extLst>
           </p:cNvPr>
@@ -18301,7 +18313,7 @@
           <p:cNvPr id="18" name="Text 16">
             <a:extLst xmlns:a="http://schemas.openxmlformats.org/drawingml/2006/main">
               <a:ext uri="{FF2B5EF4-FFF2-40B4-BE49-F238E27FC236}">
-                <a16:creationId xmlns:a16="http://schemas.microsoft.com/office/drawing/2014/main" id="{369A1D21-992B-4043-A423-8EF9E977658D}"/>
+                <a16:creationId xmlns:a16="http://schemas.microsoft.com/office/drawing/2014/main" id="{959E4332-E7AF-4978-A3F5-1DA93ECD3447}"/>
               </a:ext>
             </a:extLst>
           </p:cNvPr>
@@ -18346,7 +18358,7 @@
           <p:cNvPr id="19" name="Text 17">
             <a:extLst xmlns:a="http://schemas.openxmlformats.org/drawingml/2006/main">
               <a:ext uri="{FF2B5EF4-FFF2-40B4-BE49-F238E27FC236}">
-                <a16:creationId xmlns:a16="http://schemas.microsoft.com/office/drawing/2014/main" id="{392C0DA6-39A7-4CEF-9290-C6BC8C6A9AF9}"/>
+                <a16:creationId xmlns:a16="http://schemas.microsoft.com/office/drawing/2014/main" id="{CFFCF908-DA57-4941-9EEA-0916055A00E1}"/>
               </a:ext>
             </a:extLst>
           </p:cNvPr>
@@ -18394,7 +18406,7 @@
           <p:cNvPr id="20" name="Text 18">
             <a:extLst xmlns:a="http://schemas.openxmlformats.org/drawingml/2006/main">
               <a:ext uri="{FF2B5EF4-FFF2-40B4-BE49-F238E27FC236}">
-                <a16:creationId xmlns:a16="http://schemas.microsoft.com/office/drawing/2014/main" id="{E51B3E8F-EA7D-41A5-A19C-24ADCD5531CA}"/>
+                <a16:creationId xmlns:a16="http://schemas.microsoft.com/office/drawing/2014/main" id="{611F7CC4-71E0-4DC0-87D7-954C5248BE6D}"/>
               </a:ext>
             </a:extLst>
           </p:cNvPr>
@@ -18439,7 +18451,7 @@
           <p:cNvPr id="21" name="Text 19">
             <a:extLst xmlns:a="http://schemas.openxmlformats.org/drawingml/2006/main">
               <a:ext uri="{FF2B5EF4-FFF2-40B4-BE49-F238E27FC236}">
-                <a16:creationId xmlns:a16="http://schemas.microsoft.com/office/drawing/2014/main" id="{17F872CE-6420-4F5C-B91C-05CD797D6287}"/>
+                <a16:creationId xmlns:a16="http://schemas.microsoft.com/office/drawing/2014/main" id="{58DA4F38-7430-41B7-A00A-3F2A03BF4314}"/>
               </a:ext>
             </a:extLst>
           </p:cNvPr>
@@ -18532,7 +18544,7 @@
     </p:spTree>
     <p:extLst>
       <p:ext uri="{BB962C8B-B14F-4D97-AF65-F5344CB8AC3E}">
-        <p14:creationId xmlns:p14="http://schemas.microsoft.com/office/powerpoint/2010/main" val="650653971"/>
+        <p14:creationId xmlns:p14="http://schemas.microsoft.com/office/powerpoint/2010/main" val="324765129"/>
       </p:ext>
     </p:extLst>
   </p:cSld>
@@ -18563,7 +18575,7 @@
           <p:cNvPr id="2" name="Text 0">
             <a:extLst xmlns:a="http://schemas.openxmlformats.org/drawingml/2006/main">
               <a:ext uri="{FF2B5EF4-FFF2-40B4-BE49-F238E27FC236}">
-                <a16:creationId xmlns:a16="http://schemas.microsoft.com/office/drawing/2014/main" id="{8345F0BE-ACF6-4F7C-B499-2F8F0F86E7FE}"/>
+                <a16:creationId xmlns:a16="http://schemas.microsoft.com/office/drawing/2014/main" id="{5FCAC2B3-FFCC-4FC5-B878-A34BE19A99FB}"/>
               </a:ext>
             </a:extLst>
           </p:cNvPr>
@@ -18608,7 +18620,7 @@
           <p:cNvPr id="3" name="Text 1">
             <a:extLst xmlns:a="http://schemas.openxmlformats.org/drawingml/2006/main">
               <a:ext uri="{FF2B5EF4-FFF2-40B4-BE49-F238E27FC236}">
-                <a16:creationId xmlns:a16="http://schemas.microsoft.com/office/drawing/2014/main" id="{CADD179A-361E-424A-A896-431333366F3C}"/>
+                <a16:creationId xmlns:a16="http://schemas.microsoft.com/office/drawing/2014/main" id="{BB91F973-A6E9-498F-A73E-A1401DB2979E}"/>
               </a:ext>
             </a:extLst>
           </p:cNvPr>
@@ -18653,7 +18665,7 @@
           <p:cNvPr id="4" name="Text 2">
             <a:extLst xmlns:a="http://schemas.openxmlformats.org/drawingml/2006/main">
               <a:ext uri="{FF2B5EF4-FFF2-40B4-BE49-F238E27FC236}">
-                <a16:creationId xmlns:a16="http://schemas.microsoft.com/office/drawing/2014/main" id="{04D45D05-9F27-4388-BD19-97B61D6DB6CD}"/>
+                <a16:creationId xmlns:a16="http://schemas.microsoft.com/office/drawing/2014/main" id="{DF145F2A-F2C9-44B7-B4B5-FBF02FCAE369}"/>
               </a:ext>
             </a:extLst>
           </p:cNvPr>
@@ -18698,7 +18710,7 @@
           <p:cNvPr id="5" name="Text 3">
             <a:extLst xmlns:a="http://schemas.openxmlformats.org/drawingml/2006/main">
               <a:ext uri="{FF2B5EF4-FFF2-40B4-BE49-F238E27FC236}">
-                <a16:creationId xmlns:a16="http://schemas.microsoft.com/office/drawing/2014/main" id="{6D09C62C-4438-44B7-ACD1-7281A982220D}"/>
+                <a16:creationId xmlns:a16="http://schemas.microsoft.com/office/drawing/2014/main" id="{7C7186E8-925E-4434-A638-D6208139F182}"/>
               </a:ext>
             </a:extLst>
           </p:cNvPr>
@@ -18743,7 +18755,7 @@
           <p:cNvPr id="6" name="Text 4">
             <a:extLst xmlns:a="http://schemas.openxmlformats.org/drawingml/2006/main">
               <a:ext uri="{FF2B5EF4-FFF2-40B4-BE49-F238E27FC236}">
-                <a16:creationId xmlns:a16="http://schemas.microsoft.com/office/drawing/2014/main" id="{35E9191A-A68D-40B4-ABBB-524444C58BDC}"/>
+                <a16:creationId xmlns:a16="http://schemas.microsoft.com/office/drawing/2014/main" id="{CCF7C199-6E6D-44D6-B057-27580600F28C}"/>
               </a:ext>
             </a:extLst>
           </p:cNvPr>
@@ -18791,7 +18803,7 @@
           <p:cNvPr id="7" name="Text 5">
             <a:extLst xmlns:a="http://schemas.openxmlformats.org/drawingml/2006/main">
               <a:ext uri="{FF2B5EF4-FFF2-40B4-BE49-F238E27FC236}">
-                <a16:creationId xmlns:a16="http://schemas.microsoft.com/office/drawing/2014/main" id="{084428C9-375E-45A4-9D7B-436D4B5D2FB7}"/>
+                <a16:creationId xmlns:a16="http://schemas.microsoft.com/office/drawing/2014/main" id="{2E971890-AFBB-4210-A5AE-8A87470E48BD}"/>
               </a:ext>
             </a:extLst>
           </p:cNvPr>
@@ -20096,7 +20108,7 @@
           <p:cNvPr id="9" name="Text 6">
             <a:extLst xmlns:a="http://schemas.openxmlformats.org/drawingml/2006/main">
               <a:ext uri="{FF2B5EF4-FFF2-40B4-BE49-F238E27FC236}">
-                <a16:creationId xmlns:a16="http://schemas.microsoft.com/office/drawing/2014/main" id="{0F1FA367-C54E-405D-8856-3475B55CEF2F}"/>
+                <a16:creationId xmlns:a16="http://schemas.microsoft.com/office/drawing/2014/main" id="{1262D91E-1819-402D-ABD1-D8BBBD1EFA9B}"/>
               </a:ext>
             </a:extLst>
           </p:cNvPr>
@@ -20144,7 +20156,7 @@
           <p:cNvPr id="10" name="Shape 7">
             <a:extLst xmlns:a="http://schemas.openxmlformats.org/drawingml/2006/main">
               <a:ext uri="{FF2B5EF4-FFF2-40B4-BE49-F238E27FC236}">
-                <a16:creationId xmlns:a16="http://schemas.microsoft.com/office/drawing/2014/main" id="{40703B2C-C01A-4F6E-8143-9B2A203FB014}"/>
+                <a16:creationId xmlns:a16="http://schemas.microsoft.com/office/drawing/2014/main" id="{DE8FC14F-BC9A-48EA-BDAC-241AC44FEDF8}"/>
               </a:ext>
             </a:extLst>
           </p:cNvPr>
@@ -20191,7 +20203,7 @@
           <p:cNvPr id="11" name="Shape 8">
             <a:extLst xmlns:a="http://schemas.openxmlformats.org/drawingml/2006/main">
               <a:ext uri="{FF2B5EF4-FFF2-40B4-BE49-F238E27FC236}">
-                <a16:creationId xmlns:a16="http://schemas.microsoft.com/office/drawing/2014/main" id="{71CD05DA-9CE0-47F5-8CEB-2082EA22B0F5}"/>
+                <a16:creationId xmlns:a16="http://schemas.microsoft.com/office/drawing/2014/main" id="{C31C9154-0E42-48B1-AAFA-86383A60317C}"/>
               </a:ext>
             </a:extLst>
           </p:cNvPr>
@@ -20229,7 +20241,7 @@
           <p:cNvPr id="12" name="Text 9">
             <a:extLst xmlns:a="http://schemas.openxmlformats.org/drawingml/2006/main">
               <a:ext uri="{FF2B5EF4-FFF2-40B4-BE49-F238E27FC236}">
-                <a16:creationId xmlns:a16="http://schemas.microsoft.com/office/drawing/2014/main" id="{11847296-1FF2-40EE-87AC-8F1330903060}"/>
+                <a16:creationId xmlns:a16="http://schemas.microsoft.com/office/drawing/2014/main" id="{33E4E41B-A593-48CD-9B10-5C3583E0286E}"/>
               </a:ext>
             </a:extLst>
           </p:cNvPr>
@@ -20274,7 +20286,7 @@
           <p:cNvPr id="13" name="Text 10">
             <a:extLst xmlns:a="http://schemas.openxmlformats.org/drawingml/2006/main">
               <a:ext uri="{FF2B5EF4-FFF2-40B4-BE49-F238E27FC236}">
-                <a16:creationId xmlns:a16="http://schemas.microsoft.com/office/drawing/2014/main" id="{0F962DA8-8CFD-4E2E-9EA4-9A9EF1DC2C64}"/>
+                <a16:creationId xmlns:a16="http://schemas.microsoft.com/office/drawing/2014/main" id="{EF38C8CB-2848-401F-91BE-A2BB5774CA81}"/>
               </a:ext>
             </a:extLst>
           </p:cNvPr>
@@ -20319,7 +20331,7 @@
           <p:cNvPr id="14" name="Text 11">
             <a:extLst xmlns:a="http://schemas.openxmlformats.org/drawingml/2006/main">
               <a:ext uri="{FF2B5EF4-FFF2-40B4-BE49-F238E27FC236}">
-                <a16:creationId xmlns:a16="http://schemas.microsoft.com/office/drawing/2014/main" id="{272CFABA-6D6E-4D26-BCE2-E476B0239042}"/>
+                <a16:creationId xmlns:a16="http://schemas.microsoft.com/office/drawing/2014/main" id="{8599F66A-2D71-4348-BDBF-C1147639AD74}"/>
               </a:ext>
             </a:extLst>
           </p:cNvPr>
@@ -20414,7 +20426,7 @@
           <p:cNvPr id="15" name="Shape 12">
             <a:extLst xmlns:a="http://schemas.openxmlformats.org/drawingml/2006/main">
               <a:ext uri="{FF2B5EF4-FFF2-40B4-BE49-F238E27FC236}">
-                <a16:creationId xmlns:a16="http://schemas.microsoft.com/office/drawing/2014/main" id="{7EB9CB76-1148-4D9D-8C99-117B5B219D5D}"/>
+                <a16:creationId xmlns:a16="http://schemas.microsoft.com/office/drawing/2014/main" id="{468D5A6B-75E2-48F6-BE01-A150E6E4A54D}"/>
               </a:ext>
             </a:extLst>
           </p:cNvPr>
@@ -20461,7 +20473,7 @@
           <p:cNvPr id="16" name="Shape 13">
             <a:extLst xmlns:a="http://schemas.openxmlformats.org/drawingml/2006/main">
               <a:ext uri="{FF2B5EF4-FFF2-40B4-BE49-F238E27FC236}">
-                <a16:creationId xmlns:a16="http://schemas.microsoft.com/office/drawing/2014/main" id="{EE6870D0-8D32-482D-993C-E4978E21B0E0}"/>
+                <a16:creationId xmlns:a16="http://schemas.microsoft.com/office/drawing/2014/main" id="{D9527E66-9F7E-4BA3-A2FC-10E2C79434B5}"/>
               </a:ext>
             </a:extLst>
           </p:cNvPr>
@@ -20499,7 +20511,7 @@
           <p:cNvPr id="17" name="Text 14">
             <a:extLst xmlns:a="http://schemas.openxmlformats.org/drawingml/2006/main">
               <a:ext uri="{FF2B5EF4-FFF2-40B4-BE49-F238E27FC236}">
-                <a16:creationId xmlns:a16="http://schemas.microsoft.com/office/drawing/2014/main" id="{82B9517F-F668-42D4-8D88-99948F034476}"/>
+                <a16:creationId xmlns:a16="http://schemas.microsoft.com/office/drawing/2014/main" id="{089D14B1-B833-4378-B490-9FB941AC0828}"/>
               </a:ext>
             </a:extLst>
           </p:cNvPr>
@@ -20544,7 +20556,7 @@
           <p:cNvPr id="18" name="Text 15">
             <a:extLst xmlns:a="http://schemas.openxmlformats.org/drawingml/2006/main">
               <a:ext uri="{FF2B5EF4-FFF2-40B4-BE49-F238E27FC236}">
-                <a16:creationId xmlns:a16="http://schemas.microsoft.com/office/drawing/2014/main" id="{2BF9956C-5C0A-4DAE-AB47-F5BA7562AA23}"/>
+                <a16:creationId xmlns:a16="http://schemas.microsoft.com/office/drawing/2014/main" id="{7C915287-0AA9-40D7-8A41-1AB1D4B7D31E}"/>
               </a:ext>
             </a:extLst>
           </p:cNvPr>
@@ -20589,7 +20601,7 @@
           <p:cNvPr id="8" name="Text 16">
             <a:extLst xmlns:a="http://schemas.openxmlformats.org/drawingml/2006/main">
               <a:ext uri="{FF2B5EF4-FFF2-40B4-BE49-F238E27FC236}">
-                <a16:creationId xmlns:a16="http://schemas.microsoft.com/office/drawing/2014/main" id="{66C37D34-9532-4EEF-BEDE-18D0C7A6DB33}"/>
+                <a16:creationId xmlns:a16="http://schemas.microsoft.com/office/drawing/2014/main" id="{F85380C3-0B69-42D6-9E51-D8B93381A6E6}"/>
               </a:ext>
             </a:extLst>
           </p:cNvPr>
@@ -20684,7 +20696,7 @@
           <p:cNvPr id="20" name="Shape 17">
             <a:extLst xmlns:a="http://schemas.openxmlformats.org/drawingml/2006/main">
               <a:ext uri="{FF2B5EF4-FFF2-40B4-BE49-F238E27FC236}">
-                <a16:creationId xmlns:a16="http://schemas.microsoft.com/office/drawing/2014/main" id="{5CAC6923-BFFD-42C1-9359-82F998EAF306}"/>
+                <a16:creationId xmlns:a16="http://schemas.microsoft.com/office/drawing/2014/main" id="{E96EA5E8-2331-42AF-AF34-34A8BA238108}"/>
               </a:ext>
             </a:extLst>
           </p:cNvPr>
@@ -20731,7 +20743,7 @@
           <p:cNvPr id="21" name="Text 18">
             <a:extLst xmlns:a="http://schemas.openxmlformats.org/drawingml/2006/main">
               <a:ext uri="{FF2B5EF4-FFF2-40B4-BE49-F238E27FC236}">
-                <a16:creationId xmlns:a16="http://schemas.microsoft.com/office/drawing/2014/main" id="{40A029B8-42F5-4F75-B0C4-CBACB19739FA}"/>
+                <a16:creationId xmlns:a16="http://schemas.microsoft.com/office/drawing/2014/main" id="{6ADB69A1-63C1-4D69-A79A-6B6A7CF57C8B}"/>
               </a:ext>
             </a:extLst>
           </p:cNvPr>
@@ -20777,7 +20789,7 @@
     </p:spTree>
     <p:extLst>
       <p:ext uri="{BB962C8B-B14F-4D97-AF65-F5344CB8AC3E}">
-        <p14:creationId xmlns:p14="http://schemas.microsoft.com/office/powerpoint/2010/main" val="403752927"/>
+        <p14:creationId xmlns:p14="http://schemas.microsoft.com/office/powerpoint/2010/main" val="1837912288"/>
       </p:ext>
     </p:extLst>
   </p:cSld>
@@ -20808,7 +20820,7 @@
           <p:cNvPr id="2" name="Text 0">
             <a:extLst xmlns:a="http://schemas.openxmlformats.org/drawingml/2006/main">
               <a:ext uri="{FF2B5EF4-FFF2-40B4-BE49-F238E27FC236}">
-                <a16:creationId xmlns:a16="http://schemas.microsoft.com/office/drawing/2014/main" id="{F821820D-FD9B-4E4E-8B50-C1B6278A9851}"/>
+                <a16:creationId xmlns:a16="http://schemas.microsoft.com/office/drawing/2014/main" id="{A1F424D0-CEC8-4ECB-AA11-BB19B66D8559}"/>
               </a:ext>
             </a:extLst>
           </p:cNvPr>
@@ -20853,7 +20865,7 @@
           <p:cNvPr id="3" name="Text 1">
             <a:extLst xmlns:a="http://schemas.openxmlformats.org/drawingml/2006/main">
               <a:ext uri="{FF2B5EF4-FFF2-40B4-BE49-F238E27FC236}">
-                <a16:creationId xmlns:a16="http://schemas.microsoft.com/office/drawing/2014/main" id="{167F6394-AC20-4724-AFA9-0B6F2D8F023C}"/>
+                <a16:creationId xmlns:a16="http://schemas.microsoft.com/office/drawing/2014/main" id="{FC576A05-E2DB-4F2A-8CD3-AFE0859A396B}"/>
               </a:ext>
             </a:extLst>
           </p:cNvPr>
@@ -20898,7 +20910,7 @@
           <p:cNvPr id="4" name="Text 2">
             <a:extLst xmlns:a="http://schemas.openxmlformats.org/drawingml/2006/main">
               <a:ext uri="{FF2B5EF4-FFF2-40B4-BE49-F238E27FC236}">
-                <a16:creationId xmlns:a16="http://schemas.microsoft.com/office/drawing/2014/main" id="{7A17C4B1-A391-43B3-935A-8AD66D4D3C92}"/>
+                <a16:creationId xmlns:a16="http://schemas.microsoft.com/office/drawing/2014/main" id="{C22745E4-7594-4E90-B31D-76662F8EE38C}"/>
               </a:ext>
             </a:extLst>
           </p:cNvPr>
@@ -20943,7 +20955,7 @@
           <p:cNvPr id="5" name="Text 3">
             <a:extLst xmlns:a="http://schemas.openxmlformats.org/drawingml/2006/main">
               <a:ext uri="{FF2B5EF4-FFF2-40B4-BE49-F238E27FC236}">
-                <a16:creationId xmlns:a16="http://schemas.microsoft.com/office/drawing/2014/main" id="{D29EFFA5-3002-4747-AC8C-438D74E241D2}"/>
+                <a16:creationId xmlns:a16="http://schemas.microsoft.com/office/drawing/2014/main" id="{4D528470-0EDB-49DB-B354-5F27B581E778}"/>
               </a:ext>
             </a:extLst>
           </p:cNvPr>
@@ -20988,7 +21000,7 @@
           <p:cNvPr id="6" name="Text 4">
             <a:extLst xmlns:a="http://schemas.openxmlformats.org/drawingml/2006/main">
               <a:ext uri="{FF2B5EF4-FFF2-40B4-BE49-F238E27FC236}">
-                <a16:creationId xmlns:a16="http://schemas.microsoft.com/office/drawing/2014/main" id="{E1B734D7-BF5A-4C59-8FE6-E2D95C12006A}"/>
+                <a16:creationId xmlns:a16="http://schemas.microsoft.com/office/drawing/2014/main" id="{33324CC1-BE30-49BB-B843-1E4D0B62CB6D}"/>
               </a:ext>
             </a:extLst>
           </p:cNvPr>
@@ -21090,7 +21102,7 @@
         </p:xfrm>
         <a:graphic xmlns:a="http://schemas.openxmlformats.org/drawingml/2006/main">
           <a:graphicData uri="http://schemas.openxmlformats.org/drawingml/2006/chart">
-            <c:chart xmlns:r="http://schemas.openxmlformats.org/officeDocument/2006/relationships" xmlns:c="http://schemas.openxmlformats.org/drawingml/2006/chart" r:id="R4c9d439527184025"/>
+            <c:chart xmlns:r="http://schemas.openxmlformats.org/officeDocument/2006/relationships" xmlns:c="http://schemas.openxmlformats.org/drawingml/2006/chart" r:id="R3e7a999f88744db4"/>
           </a:graphicData>
         </a:graphic>
       </p:graphicFrame>
@@ -21099,7 +21111,7 @@
           <p:cNvPr id="8" name="Text 5">
             <a:extLst xmlns:a="http://schemas.openxmlformats.org/drawingml/2006/main">
               <a:ext uri="{FF2B5EF4-FFF2-40B4-BE49-F238E27FC236}">
-                <a16:creationId xmlns:a16="http://schemas.microsoft.com/office/drawing/2014/main" id="{D3F3CFD3-971E-4C6F-A30D-F34E145B8627}"/>
+                <a16:creationId xmlns:a16="http://schemas.microsoft.com/office/drawing/2014/main" id="{1BD9B4C3-C0FC-493C-A2B8-2C9CC3BD8729}"/>
               </a:ext>
             </a:extLst>
           </p:cNvPr>
@@ -21147,7 +21159,7 @@
           <p:cNvPr id="9" name="Shape 6">
             <a:extLst xmlns:a="http://schemas.openxmlformats.org/drawingml/2006/main">
               <a:ext uri="{FF2B5EF4-FFF2-40B4-BE49-F238E27FC236}">
-                <a16:creationId xmlns:a16="http://schemas.microsoft.com/office/drawing/2014/main" id="{843D6B3C-17E3-4A74-9049-4B73F574F44F}"/>
+                <a16:creationId xmlns:a16="http://schemas.microsoft.com/office/drawing/2014/main" id="{5EA1DCB4-A9D0-409A-A992-1662BC1B8C7D}"/>
               </a:ext>
             </a:extLst>
           </p:cNvPr>
@@ -21194,7 +21206,7 @@
           <p:cNvPr id="10" name="Text 7">
             <a:extLst xmlns:a="http://schemas.openxmlformats.org/drawingml/2006/main">
               <a:ext uri="{FF2B5EF4-FFF2-40B4-BE49-F238E27FC236}">
-                <a16:creationId xmlns:a16="http://schemas.microsoft.com/office/drawing/2014/main" id="{C32F2465-B5BA-4BAE-8DD7-9A4E06606153}"/>
+                <a16:creationId xmlns:a16="http://schemas.microsoft.com/office/drawing/2014/main" id="{747D6464-60A8-457E-A091-BD05930FDDFD}"/>
               </a:ext>
             </a:extLst>
           </p:cNvPr>
@@ -21239,7 +21251,7 @@
           <p:cNvPr id="11" name="Text 8">
             <a:extLst xmlns:a="http://schemas.openxmlformats.org/drawingml/2006/main">
               <a:ext uri="{FF2B5EF4-FFF2-40B4-BE49-F238E27FC236}">
-                <a16:creationId xmlns:a16="http://schemas.microsoft.com/office/drawing/2014/main" id="{61FC7AFA-169C-4BD0-B887-8DFFD54A606F}"/>
+                <a16:creationId xmlns:a16="http://schemas.microsoft.com/office/drawing/2014/main" id="{4B368126-7F90-4ACB-B897-C8846D7BDB75}"/>
               </a:ext>
             </a:extLst>
           </p:cNvPr>
@@ -21284,7 +21296,7 @@
           <p:cNvPr id="12" name="Text 9">
             <a:extLst xmlns:a="http://schemas.openxmlformats.org/drawingml/2006/main">
               <a:ext uri="{FF2B5EF4-FFF2-40B4-BE49-F238E27FC236}">
-                <a16:creationId xmlns:a16="http://schemas.microsoft.com/office/drawing/2014/main" id="{DA580D12-38F2-4E6A-A676-7B995D64E503}"/>
+                <a16:creationId xmlns:a16="http://schemas.microsoft.com/office/drawing/2014/main" id="{E02F3B0B-37F5-45F9-892E-474251BD115D}"/>
               </a:ext>
             </a:extLst>
           </p:cNvPr>
@@ -21329,7 +21341,7 @@
           <p:cNvPr id="13" name="Text 10">
             <a:extLst xmlns:a="http://schemas.openxmlformats.org/drawingml/2006/main">
               <a:ext uri="{FF2B5EF4-FFF2-40B4-BE49-F238E27FC236}">
-                <a16:creationId xmlns:a16="http://schemas.microsoft.com/office/drawing/2014/main" id="{217AA25D-E8FE-4601-9ABE-35A81B9043F7}"/>
+                <a16:creationId xmlns:a16="http://schemas.microsoft.com/office/drawing/2014/main" id="{0BEEAB4C-1A92-4F98-90CE-976EFDF70C77}"/>
               </a:ext>
             </a:extLst>
           </p:cNvPr>
@@ -21374,7 +21386,7 @@
           <p:cNvPr id="14" name="Text 11">
             <a:extLst xmlns:a="http://schemas.openxmlformats.org/drawingml/2006/main">
               <a:ext uri="{FF2B5EF4-FFF2-40B4-BE49-F238E27FC236}">
-                <a16:creationId xmlns:a16="http://schemas.microsoft.com/office/drawing/2014/main" id="{18935AEA-9C60-4D72-AF9C-C4EBCE89617A}"/>
+                <a16:creationId xmlns:a16="http://schemas.microsoft.com/office/drawing/2014/main" id="{D4AC70F0-6E48-46AF-83D6-296961AF2581}"/>
               </a:ext>
             </a:extLst>
           </p:cNvPr>
@@ -21419,7 +21431,7 @@
           <p:cNvPr id="15" name="Text 12">
             <a:extLst xmlns:a="http://schemas.openxmlformats.org/drawingml/2006/main">
               <a:ext uri="{FF2B5EF4-FFF2-40B4-BE49-F238E27FC236}">
-                <a16:creationId xmlns:a16="http://schemas.microsoft.com/office/drawing/2014/main" id="{A20B3C4D-1827-4B33-9B18-18BA8E6E50DD}"/>
+                <a16:creationId xmlns:a16="http://schemas.microsoft.com/office/drawing/2014/main" id="{FF10F5F8-711C-4639-8924-CF32A14B652A}"/>
               </a:ext>
             </a:extLst>
           </p:cNvPr>
@@ -21464,7 +21476,7 @@
           <p:cNvPr id="16" name="Text 13">
             <a:extLst xmlns:a="http://schemas.openxmlformats.org/drawingml/2006/main">
               <a:ext uri="{FF2B5EF4-FFF2-40B4-BE49-F238E27FC236}">
-                <a16:creationId xmlns:a16="http://schemas.microsoft.com/office/drawing/2014/main" id="{49B0137C-D910-425E-AAD4-A8B61E8122E8}"/>
+                <a16:creationId xmlns:a16="http://schemas.microsoft.com/office/drawing/2014/main" id="{32BBBB49-689E-42BF-8D68-90646D1F209D}"/>
               </a:ext>
             </a:extLst>
           </p:cNvPr>
@@ -21509,7 +21521,7 @@
           <p:cNvPr id="17" name="Text 14">
             <a:extLst xmlns:a="http://schemas.openxmlformats.org/drawingml/2006/main">
               <a:ext uri="{FF2B5EF4-FFF2-40B4-BE49-F238E27FC236}">
-                <a16:creationId xmlns:a16="http://schemas.microsoft.com/office/drawing/2014/main" id="{3E6EA1CF-FE1A-4EBF-BE90-E01BD4A9573C}"/>
+                <a16:creationId xmlns:a16="http://schemas.microsoft.com/office/drawing/2014/main" id="{00D3680F-3DC7-47A4-ADF4-278E7A543F1F}"/>
               </a:ext>
             </a:extLst>
           </p:cNvPr>
@@ -21554,7 +21566,7 @@
           <p:cNvPr id="18" name="Text 15">
             <a:extLst xmlns:a="http://schemas.openxmlformats.org/drawingml/2006/main">
               <a:ext uri="{FF2B5EF4-FFF2-40B4-BE49-F238E27FC236}">
-                <a16:creationId xmlns:a16="http://schemas.microsoft.com/office/drawing/2014/main" id="{A640EA3E-9E9E-4D46-927B-2C7600B0D25F}"/>
+                <a16:creationId xmlns:a16="http://schemas.microsoft.com/office/drawing/2014/main" id="{079FD012-3391-4031-B274-41D32C581BE3}"/>
               </a:ext>
             </a:extLst>
           </p:cNvPr>
@@ -21599,7 +21611,7 @@
           <p:cNvPr id="19" name="Text 16">
             <a:extLst xmlns:a="http://schemas.openxmlformats.org/drawingml/2006/main">
               <a:ext uri="{FF2B5EF4-FFF2-40B4-BE49-F238E27FC236}">
-                <a16:creationId xmlns:a16="http://schemas.microsoft.com/office/drawing/2014/main" id="{3AC6A32C-AC6C-4A23-9B87-D191B76EDDC7}"/>
+                <a16:creationId xmlns:a16="http://schemas.microsoft.com/office/drawing/2014/main" id="{4538C00A-E4BD-42E9-A068-456962B859F1}"/>
               </a:ext>
             </a:extLst>
           </p:cNvPr>
@@ -21644,7 +21656,7 @@
           <p:cNvPr id="20" name="Text 17">
             <a:extLst xmlns:a="http://schemas.openxmlformats.org/drawingml/2006/main">
               <a:ext uri="{FF2B5EF4-FFF2-40B4-BE49-F238E27FC236}">
-                <a16:creationId xmlns:a16="http://schemas.microsoft.com/office/drawing/2014/main" id="{F29B8608-026B-417D-AC5E-B01EB66B64E9}"/>
+                <a16:creationId xmlns:a16="http://schemas.microsoft.com/office/drawing/2014/main" id="{E4FDEDF0-9291-4947-BD76-5D2F505215AD}"/>
               </a:ext>
             </a:extLst>
           </p:cNvPr>
@@ -21689,7 +21701,7 @@
           <p:cNvPr id="21" name="Text 18">
             <a:extLst xmlns:a="http://schemas.openxmlformats.org/drawingml/2006/main">
               <a:ext uri="{FF2B5EF4-FFF2-40B4-BE49-F238E27FC236}">
-                <a16:creationId xmlns:a16="http://schemas.microsoft.com/office/drawing/2014/main" id="{719578D3-8EA9-43E5-9591-A88A734AFF74}"/>
+                <a16:creationId xmlns:a16="http://schemas.microsoft.com/office/drawing/2014/main" id="{11BFB884-42A0-4014-BCC8-1F358F1FEF54}"/>
               </a:ext>
             </a:extLst>
           </p:cNvPr>
@@ -21734,7 +21746,7 @@
           <p:cNvPr id="22" name="Text 19">
             <a:extLst xmlns:a="http://schemas.openxmlformats.org/drawingml/2006/main">
               <a:ext uri="{FF2B5EF4-FFF2-40B4-BE49-F238E27FC236}">
-                <a16:creationId xmlns:a16="http://schemas.microsoft.com/office/drawing/2014/main" id="{431431D9-8B4F-4327-879A-FF38307C095D}"/>
+                <a16:creationId xmlns:a16="http://schemas.microsoft.com/office/drawing/2014/main" id="{6D08E918-ADE9-4B59-B447-6FBBC810C4D8}"/>
               </a:ext>
             </a:extLst>
           </p:cNvPr>
@@ -21779,7 +21791,7 @@
           <p:cNvPr id="23" name="Text 20">
             <a:extLst xmlns:a="http://schemas.openxmlformats.org/drawingml/2006/main">
               <a:ext uri="{FF2B5EF4-FFF2-40B4-BE49-F238E27FC236}">
-                <a16:creationId xmlns:a16="http://schemas.microsoft.com/office/drawing/2014/main" id="{C055098E-6588-439B-8376-274B28A192E7}"/>
+                <a16:creationId xmlns:a16="http://schemas.microsoft.com/office/drawing/2014/main" id="{3371787C-072B-42F9-BF8A-857F56762B1E}"/>
               </a:ext>
             </a:extLst>
           </p:cNvPr>
@@ -21827,7 +21839,7 @@
           <p:cNvPr id="24" name="Shape 21">
             <a:extLst xmlns:a="http://schemas.openxmlformats.org/drawingml/2006/main">
               <a:ext uri="{FF2B5EF4-FFF2-40B4-BE49-F238E27FC236}">
-                <a16:creationId xmlns:a16="http://schemas.microsoft.com/office/drawing/2014/main" id="{53E35BF3-3AB8-4CD2-8A02-712EC7C80F91}"/>
+                <a16:creationId xmlns:a16="http://schemas.microsoft.com/office/drawing/2014/main" id="{2CF01001-3385-4D3E-B164-CDF2E67B439F}"/>
               </a:ext>
             </a:extLst>
           </p:cNvPr>
@@ -21867,7 +21879,7 @@
           <p:cNvPr id="25" name="Text 22">
             <a:extLst xmlns:a="http://schemas.openxmlformats.org/drawingml/2006/main">
               <a:ext uri="{FF2B5EF4-FFF2-40B4-BE49-F238E27FC236}">
-                <a16:creationId xmlns:a16="http://schemas.microsoft.com/office/drawing/2014/main" id="{8D913E1C-5E8E-47EC-99E1-4C2D9397259B}"/>
+                <a16:creationId xmlns:a16="http://schemas.microsoft.com/office/drawing/2014/main" id="{3E8FFDAA-6308-4F4F-91AE-1215C0CB0590}"/>
               </a:ext>
             </a:extLst>
           </p:cNvPr>
@@ -21913,7 +21925,7 @@
     </p:spTree>
     <p:extLst>
       <p:ext uri="{BB962C8B-B14F-4D97-AF65-F5344CB8AC3E}">
-        <p14:creationId xmlns:p14="http://schemas.microsoft.com/office/powerpoint/2010/main" val="1988210898"/>
+        <p14:creationId xmlns:p14="http://schemas.microsoft.com/office/powerpoint/2010/main" val="1428090890"/>
       </p:ext>
     </p:extLst>
   </p:cSld>
@@ -21944,7 +21956,7 @@
           <p:cNvPr id="2" name="Text 0">
             <a:extLst xmlns:a="http://schemas.openxmlformats.org/drawingml/2006/main">
               <a:ext uri="{FF2B5EF4-FFF2-40B4-BE49-F238E27FC236}">
-                <a16:creationId xmlns:a16="http://schemas.microsoft.com/office/drawing/2014/main" id="{6E1E6824-8A89-4122-B7BF-E81034787495}"/>
+                <a16:creationId xmlns:a16="http://schemas.microsoft.com/office/drawing/2014/main" id="{D2D0203F-C441-4750-B35F-C5940EB9F0AE}"/>
               </a:ext>
             </a:extLst>
           </p:cNvPr>
@@ -21989,7 +22001,7 @@
           <p:cNvPr id="3" name="Text 1">
             <a:extLst xmlns:a="http://schemas.openxmlformats.org/drawingml/2006/main">
               <a:ext uri="{FF2B5EF4-FFF2-40B4-BE49-F238E27FC236}">
-                <a16:creationId xmlns:a16="http://schemas.microsoft.com/office/drawing/2014/main" id="{B7FD7A37-4556-4370-9033-7D6760252092}"/>
+                <a16:creationId xmlns:a16="http://schemas.microsoft.com/office/drawing/2014/main" id="{4734279E-414F-4B20-8160-F49B89815544}"/>
               </a:ext>
             </a:extLst>
           </p:cNvPr>
@@ -22034,7 +22046,7 @@
           <p:cNvPr id="4" name="Text 2">
             <a:extLst xmlns:a="http://schemas.openxmlformats.org/drawingml/2006/main">
               <a:ext uri="{FF2B5EF4-FFF2-40B4-BE49-F238E27FC236}">
-                <a16:creationId xmlns:a16="http://schemas.microsoft.com/office/drawing/2014/main" id="{30E51FC5-8E05-4568-912E-649362DCCB42}"/>
+                <a16:creationId xmlns:a16="http://schemas.microsoft.com/office/drawing/2014/main" id="{124B59A0-0620-4A62-A965-E9AA19BD8C62}"/>
               </a:ext>
             </a:extLst>
           </p:cNvPr>
@@ -22079,7 +22091,7 @@
           <p:cNvPr id="5" name="Text 3">
             <a:extLst xmlns:a="http://schemas.openxmlformats.org/drawingml/2006/main">
               <a:ext uri="{FF2B5EF4-FFF2-40B4-BE49-F238E27FC236}">
-                <a16:creationId xmlns:a16="http://schemas.microsoft.com/office/drawing/2014/main" id="{51CB5909-5965-4FC4-950C-B8B4EC2A21A6}"/>
+                <a16:creationId xmlns:a16="http://schemas.microsoft.com/office/drawing/2014/main" id="{6A9CF75E-5A6D-4B57-91DC-F2233AC6DCA7}"/>
               </a:ext>
             </a:extLst>
           </p:cNvPr>
@@ -22124,7 +22136,7 @@
           <p:cNvPr id="6" name="Shape 4">
             <a:extLst xmlns:a="http://schemas.openxmlformats.org/drawingml/2006/main">
               <a:ext uri="{FF2B5EF4-FFF2-40B4-BE49-F238E27FC236}">
-                <a16:creationId xmlns:a16="http://schemas.microsoft.com/office/drawing/2014/main" id="{8EA23D07-C946-4D8D-B301-D54BAD9B88F3}"/>
+                <a16:creationId xmlns:a16="http://schemas.microsoft.com/office/drawing/2014/main" id="{04068910-ACEF-4785-880A-31F212D5FE5E}"/>
               </a:ext>
             </a:extLst>
           </p:cNvPr>
@@ -22171,7 +22183,7 @@
           <p:cNvPr id="7" name="Shape 5">
             <a:extLst xmlns:a="http://schemas.openxmlformats.org/drawingml/2006/main">
               <a:ext uri="{FF2B5EF4-FFF2-40B4-BE49-F238E27FC236}">
-                <a16:creationId xmlns:a16="http://schemas.microsoft.com/office/drawing/2014/main" id="{40897E9E-194D-4BE5-9251-F64295AF1E90}"/>
+                <a16:creationId xmlns:a16="http://schemas.microsoft.com/office/drawing/2014/main" id="{965E0F47-CADA-4177-98E2-443AE79FCD1E}"/>
               </a:ext>
             </a:extLst>
           </p:cNvPr>
@@ -22209,7 +22221,7 @@
           <p:cNvPr id="8" name="Text 6">
             <a:extLst xmlns:a="http://schemas.openxmlformats.org/drawingml/2006/main">
               <a:ext uri="{FF2B5EF4-FFF2-40B4-BE49-F238E27FC236}">
-                <a16:creationId xmlns:a16="http://schemas.microsoft.com/office/drawing/2014/main" id="{3D519195-D0DA-4C4F-ABFB-40211577DD93}"/>
+                <a16:creationId xmlns:a16="http://schemas.microsoft.com/office/drawing/2014/main" id="{8E7E49C9-C2E1-4E69-8915-1255EE7CB640}"/>
               </a:ext>
             </a:extLst>
           </p:cNvPr>
@@ -22254,7 +22266,7 @@
           <p:cNvPr id="9" name="Text 7">
             <a:extLst xmlns:a="http://schemas.openxmlformats.org/drawingml/2006/main">
               <a:ext uri="{FF2B5EF4-FFF2-40B4-BE49-F238E27FC236}">
-                <a16:creationId xmlns:a16="http://schemas.microsoft.com/office/drawing/2014/main" id="{11257410-6443-4802-B5DA-0DCB6455A732}"/>
+                <a16:creationId xmlns:a16="http://schemas.microsoft.com/office/drawing/2014/main" id="{158175AB-9C78-412C-8121-F2B162E35AC5}"/>
               </a:ext>
             </a:extLst>
           </p:cNvPr>
@@ -22302,7 +22314,7 @@
           <p:cNvPr id="10" name="Text 8">
             <a:extLst xmlns:a="http://schemas.openxmlformats.org/drawingml/2006/main">
               <a:ext uri="{FF2B5EF4-FFF2-40B4-BE49-F238E27FC236}">
-                <a16:creationId xmlns:a16="http://schemas.microsoft.com/office/drawing/2014/main" id="{B88986FC-624F-4755-AF6F-FF8276A2E70E}"/>
+                <a16:creationId xmlns:a16="http://schemas.microsoft.com/office/drawing/2014/main" id="{D8911589-4AD6-4D2E-BC1C-18B356042426}"/>
               </a:ext>
             </a:extLst>
           </p:cNvPr>
@@ -22350,7 +22362,7 @@
           <p:cNvPr id="11" name="Shape 9">
             <a:extLst xmlns:a="http://schemas.openxmlformats.org/drawingml/2006/main">
               <a:ext uri="{FF2B5EF4-FFF2-40B4-BE49-F238E27FC236}">
-                <a16:creationId xmlns:a16="http://schemas.microsoft.com/office/drawing/2014/main" id="{FE5A653C-8385-42A7-B228-114CBBE7CC37}"/>
+                <a16:creationId xmlns:a16="http://schemas.microsoft.com/office/drawing/2014/main" id="{EA62080D-8DFA-4E46-BF17-299073F283B8}"/>
               </a:ext>
             </a:extLst>
           </p:cNvPr>
@@ -22397,7 +22409,7 @@
           <p:cNvPr id="12" name="Shape 10">
             <a:extLst xmlns:a="http://schemas.openxmlformats.org/drawingml/2006/main">
               <a:ext uri="{FF2B5EF4-FFF2-40B4-BE49-F238E27FC236}">
-                <a16:creationId xmlns:a16="http://schemas.microsoft.com/office/drawing/2014/main" id="{24EF786F-BDD6-4FB6-A03E-1C760B645975}"/>
+                <a16:creationId xmlns:a16="http://schemas.microsoft.com/office/drawing/2014/main" id="{6E6C63E8-3F1A-4F6B-84CF-FCF7E243DF25}"/>
               </a:ext>
             </a:extLst>
           </p:cNvPr>
@@ -22435,7 +22447,7 @@
           <p:cNvPr id="13" name="Text 11">
             <a:extLst xmlns:a="http://schemas.openxmlformats.org/drawingml/2006/main">
               <a:ext uri="{FF2B5EF4-FFF2-40B4-BE49-F238E27FC236}">
-                <a16:creationId xmlns:a16="http://schemas.microsoft.com/office/drawing/2014/main" id="{22B954B9-5FD0-4750-A65D-9E63118C6ECE}"/>
+                <a16:creationId xmlns:a16="http://schemas.microsoft.com/office/drawing/2014/main" id="{9FE73C95-C9EF-4EBA-B93D-662239771851}"/>
               </a:ext>
             </a:extLst>
           </p:cNvPr>
@@ -22480,7 +22492,7 @@
           <p:cNvPr id="14" name="Text 12">
             <a:extLst xmlns:a="http://schemas.openxmlformats.org/drawingml/2006/main">
               <a:ext uri="{FF2B5EF4-FFF2-40B4-BE49-F238E27FC236}">
-                <a16:creationId xmlns:a16="http://schemas.microsoft.com/office/drawing/2014/main" id="{64F6B96F-0802-41B0-84FC-A60519FA73E3}"/>
+                <a16:creationId xmlns:a16="http://schemas.microsoft.com/office/drawing/2014/main" id="{78206E7C-DC2D-4DE6-B9E7-8DD2BA23319A}"/>
               </a:ext>
             </a:extLst>
           </p:cNvPr>
@@ -22528,7 +22540,7 @@
           <p:cNvPr id="15" name="Text 13">
             <a:extLst xmlns:a="http://schemas.openxmlformats.org/drawingml/2006/main">
               <a:ext uri="{FF2B5EF4-FFF2-40B4-BE49-F238E27FC236}">
-                <a16:creationId xmlns:a16="http://schemas.microsoft.com/office/drawing/2014/main" id="{A31239F9-3E9D-4E12-A9EC-0535B7727D0F}"/>
+                <a16:creationId xmlns:a16="http://schemas.microsoft.com/office/drawing/2014/main" id="{EEA97670-11A8-45EA-87C1-FE41F6152A78}"/>
               </a:ext>
             </a:extLst>
           </p:cNvPr>
@@ -22576,7 +22588,7 @@
           <p:cNvPr id="16" name="Shape 14">
             <a:extLst xmlns:a="http://schemas.openxmlformats.org/drawingml/2006/main">
               <a:ext uri="{FF2B5EF4-FFF2-40B4-BE49-F238E27FC236}">
-                <a16:creationId xmlns:a16="http://schemas.microsoft.com/office/drawing/2014/main" id="{FE391180-261A-4F9C-975F-148EBAA74C96}"/>
+                <a16:creationId xmlns:a16="http://schemas.microsoft.com/office/drawing/2014/main" id="{66EB99D7-D37A-4562-BBCA-2707BAD2C955}"/>
               </a:ext>
             </a:extLst>
           </p:cNvPr>
@@ -22623,7 +22635,7 @@
           <p:cNvPr id="17" name="Shape 15">
             <a:extLst xmlns:a="http://schemas.openxmlformats.org/drawingml/2006/main">
               <a:ext uri="{FF2B5EF4-FFF2-40B4-BE49-F238E27FC236}">
-                <a16:creationId xmlns:a16="http://schemas.microsoft.com/office/drawing/2014/main" id="{CA9D50A5-AE0A-4030-9AE6-BF1EF60DECE1}"/>
+                <a16:creationId xmlns:a16="http://schemas.microsoft.com/office/drawing/2014/main" id="{0981754E-A6CD-46D5-897B-3402C3293909}"/>
               </a:ext>
             </a:extLst>
           </p:cNvPr>
@@ -22661,7 +22673,7 @@
           <p:cNvPr id="18" name="Text 16">
             <a:extLst xmlns:a="http://schemas.openxmlformats.org/drawingml/2006/main">
               <a:ext uri="{FF2B5EF4-FFF2-40B4-BE49-F238E27FC236}">
-                <a16:creationId xmlns:a16="http://schemas.microsoft.com/office/drawing/2014/main" id="{1E81A2AD-480E-4D6B-B26F-53494928C7AB}"/>
+                <a16:creationId xmlns:a16="http://schemas.microsoft.com/office/drawing/2014/main" id="{8FB6F049-4DE6-44A0-9F13-7AAD3F181A98}"/>
               </a:ext>
             </a:extLst>
           </p:cNvPr>
@@ -22706,7 +22718,7 @@
           <p:cNvPr id="19" name="Text 17">
             <a:extLst xmlns:a="http://schemas.openxmlformats.org/drawingml/2006/main">
               <a:ext uri="{FF2B5EF4-FFF2-40B4-BE49-F238E27FC236}">
-                <a16:creationId xmlns:a16="http://schemas.microsoft.com/office/drawing/2014/main" id="{FCEE35C5-D992-4A90-9AF2-F8DACB447B53}"/>
+                <a16:creationId xmlns:a16="http://schemas.microsoft.com/office/drawing/2014/main" id="{2CC8A5DF-BC51-42D1-955D-79DF9EF652D9}"/>
               </a:ext>
             </a:extLst>
           </p:cNvPr>
@@ -22754,7 +22766,7 @@
           <p:cNvPr id="20" name="Text 18">
             <a:extLst xmlns:a="http://schemas.openxmlformats.org/drawingml/2006/main">
               <a:ext uri="{FF2B5EF4-FFF2-40B4-BE49-F238E27FC236}">
-                <a16:creationId xmlns:a16="http://schemas.microsoft.com/office/drawing/2014/main" id="{DDB68E35-685D-4703-81F2-7227B676EA19}"/>
+                <a16:creationId xmlns:a16="http://schemas.microsoft.com/office/drawing/2014/main" id="{3F5A85E6-3701-4313-B807-28AB00E24C55}"/>
               </a:ext>
             </a:extLst>
           </p:cNvPr>
@@ -22802,7 +22814,7 @@
           <p:cNvPr id="21" name="Shape 19">
             <a:extLst xmlns:a="http://schemas.openxmlformats.org/drawingml/2006/main">
               <a:ext uri="{FF2B5EF4-FFF2-40B4-BE49-F238E27FC236}">
-                <a16:creationId xmlns:a16="http://schemas.microsoft.com/office/drawing/2014/main" id="{F37D60F3-A652-451C-9A33-420F2F05C028}"/>
+                <a16:creationId xmlns:a16="http://schemas.microsoft.com/office/drawing/2014/main" id="{8D62DA20-BD4B-4B8F-B68C-95B305DFC224}"/>
               </a:ext>
             </a:extLst>
           </p:cNvPr>
@@ -22849,7 +22861,7 @@
           <p:cNvPr id="22" name="Shape 20">
             <a:extLst xmlns:a="http://schemas.openxmlformats.org/drawingml/2006/main">
               <a:ext uri="{FF2B5EF4-FFF2-40B4-BE49-F238E27FC236}">
-                <a16:creationId xmlns:a16="http://schemas.microsoft.com/office/drawing/2014/main" id="{7DA3E860-6EFA-4C41-AF80-44553E1EABAC}"/>
+                <a16:creationId xmlns:a16="http://schemas.microsoft.com/office/drawing/2014/main" id="{25DBDB07-6B17-45A5-BE34-04D4995EB968}"/>
               </a:ext>
             </a:extLst>
           </p:cNvPr>
@@ -22887,7 +22899,7 @@
           <p:cNvPr id="23" name="Text 21">
             <a:extLst xmlns:a="http://schemas.openxmlformats.org/drawingml/2006/main">
               <a:ext uri="{FF2B5EF4-FFF2-40B4-BE49-F238E27FC236}">
-                <a16:creationId xmlns:a16="http://schemas.microsoft.com/office/drawing/2014/main" id="{31BDC494-E137-4651-A640-AD6998A7C31B}"/>
+                <a16:creationId xmlns:a16="http://schemas.microsoft.com/office/drawing/2014/main" id="{AA121019-AD2D-4513-8DB1-9F9983919F69}"/>
               </a:ext>
             </a:extLst>
           </p:cNvPr>
@@ -22932,7 +22944,7 @@
           <p:cNvPr id="24" name="Text 22">
             <a:extLst xmlns:a="http://schemas.openxmlformats.org/drawingml/2006/main">
               <a:ext uri="{FF2B5EF4-FFF2-40B4-BE49-F238E27FC236}">
-                <a16:creationId xmlns:a16="http://schemas.microsoft.com/office/drawing/2014/main" id="{F899B91F-9AB2-411D-8384-CC15E6A0363F}"/>
+                <a16:creationId xmlns:a16="http://schemas.microsoft.com/office/drawing/2014/main" id="{522B9EB1-E24E-46FD-B8B6-5566620FC39A}"/>
               </a:ext>
             </a:extLst>
           </p:cNvPr>
@@ -22980,7 +22992,7 @@
           <p:cNvPr id="25" name="Text 23">
             <a:extLst xmlns:a="http://schemas.openxmlformats.org/drawingml/2006/main">
               <a:ext uri="{FF2B5EF4-FFF2-40B4-BE49-F238E27FC236}">
-                <a16:creationId xmlns:a16="http://schemas.microsoft.com/office/drawing/2014/main" id="{C8C8ED22-984F-4FE6-A68F-E186B0D8F23F}"/>
+                <a16:creationId xmlns:a16="http://schemas.microsoft.com/office/drawing/2014/main" id="{9B5A1247-5766-4C22-9249-C99FB6FB9A28}"/>
               </a:ext>
             </a:extLst>
           </p:cNvPr>
@@ -23028,7 +23040,7 @@
           <p:cNvPr id="26" name="Shape 24">
             <a:extLst xmlns:a="http://schemas.openxmlformats.org/drawingml/2006/main">
               <a:ext uri="{FF2B5EF4-FFF2-40B4-BE49-F238E27FC236}">
-                <a16:creationId xmlns:a16="http://schemas.microsoft.com/office/drawing/2014/main" id="{E6580569-4730-4B5E-9786-EFC9EB1B965A}"/>
+                <a16:creationId xmlns:a16="http://schemas.microsoft.com/office/drawing/2014/main" id="{6318A738-D241-4DB5-B741-AD4870477268}"/>
               </a:ext>
             </a:extLst>
           </p:cNvPr>
@@ -23075,7 +23087,7 @@
           <p:cNvPr id="27" name="Shape 25">
             <a:extLst xmlns:a="http://schemas.openxmlformats.org/drawingml/2006/main">
               <a:ext uri="{FF2B5EF4-FFF2-40B4-BE49-F238E27FC236}">
-                <a16:creationId xmlns:a16="http://schemas.microsoft.com/office/drawing/2014/main" id="{BA96127E-8039-438E-977B-7591E30D2517}"/>
+                <a16:creationId xmlns:a16="http://schemas.microsoft.com/office/drawing/2014/main" id="{F61AD632-16ED-46F4-9E3C-BE841F8EC03B}"/>
               </a:ext>
             </a:extLst>
           </p:cNvPr>
@@ -23113,7 +23125,7 @@
           <p:cNvPr id="28" name="Text 26">
             <a:extLst xmlns:a="http://schemas.openxmlformats.org/drawingml/2006/main">
               <a:ext uri="{FF2B5EF4-FFF2-40B4-BE49-F238E27FC236}">
-                <a16:creationId xmlns:a16="http://schemas.microsoft.com/office/drawing/2014/main" id="{EF92BB5C-66F5-44CD-9241-5BF139A03BDA}"/>
+                <a16:creationId xmlns:a16="http://schemas.microsoft.com/office/drawing/2014/main" id="{A65B11D1-BFF8-4121-9C62-05EE4EC800A4}"/>
               </a:ext>
             </a:extLst>
           </p:cNvPr>
@@ -23158,7 +23170,7 @@
           <p:cNvPr id="29" name="Text 27">
             <a:extLst xmlns:a="http://schemas.openxmlformats.org/drawingml/2006/main">
               <a:ext uri="{FF2B5EF4-FFF2-40B4-BE49-F238E27FC236}">
-                <a16:creationId xmlns:a16="http://schemas.microsoft.com/office/drawing/2014/main" id="{7577E63D-1F99-43EC-88A6-00AFDB251AA2}"/>
+                <a16:creationId xmlns:a16="http://schemas.microsoft.com/office/drawing/2014/main" id="{EA6B9AD1-CC92-4D39-ABE3-D6C423062123}"/>
               </a:ext>
             </a:extLst>
           </p:cNvPr>
@@ -23206,7 +23218,7 @@
           <p:cNvPr id="30" name="Text 28">
             <a:extLst xmlns:a="http://schemas.openxmlformats.org/drawingml/2006/main">
               <a:ext uri="{FF2B5EF4-FFF2-40B4-BE49-F238E27FC236}">
-                <a16:creationId xmlns:a16="http://schemas.microsoft.com/office/drawing/2014/main" id="{5284942C-FFDA-4A10-9B83-D0722D428277}"/>
+                <a16:creationId xmlns:a16="http://schemas.microsoft.com/office/drawing/2014/main" id="{53DAB653-DBF3-42DD-B479-18F60E9B7185}"/>
               </a:ext>
             </a:extLst>
           </p:cNvPr>
@@ -23254,7 +23266,7 @@
           <p:cNvPr id="31" name="Shape 29">
             <a:extLst xmlns:a="http://schemas.openxmlformats.org/drawingml/2006/main">
               <a:ext uri="{FF2B5EF4-FFF2-40B4-BE49-F238E27FC236}">
-                <a16:creationId xmlns:a16="http://schemas.microsoft.com/office/drawing/2014/main" id="{FBEE7FD5-421F-40AD-8913-D87B9B859679}"/>
+                <a16:creationId xmlns:a16="http://schemas.microsoft.com/office/drawing/2014/main" id="{C202DE46-DB98-489B-AE63-0AAD432B59B1}"/>
               </a:ext>
             </a:extLst>
           </p:cNvPr>
@@ -23301,7 +23313,7 @@
           <p:cNvPr id="32" name="Text 30">
             <a:extLst xmlns:a="http://schemas.openxmlformats.org/drawingml/2006/main">
               <a:ext uri="{FF2B5EF4-FFF2-40B4-BE49-F238E27FC236}">
-                <a16:creationId xmlns:a16="http://schemas.microsoft.com/office/drawing/2014/main" id="{8702ADE3-89F8-4E86-89ED-41BD278B0858}"/>
+                <a16:creationId xmlns:a16="http://schemas.microsoft.com/office/drawing/2014/main" id="{8257EDFC-2132-42D8-9E21-5C31C41A64A1}"/>
               </a:ext>
             </a:extLst>
           </p:cNvPr>
@@ -23346,7 +23358,7 @@
           <p:cNvPr id="33" name="Text 31">
             <a:extLst xmlns:a="http://schemas.openxmlformats.org/drawingml/2006/main">
               <a:ext uri="{FF2B5EF4-FFF2-40B4-BE49-F238E27FC236}">
-                <a16:creationId xmlns:a16="http://schemas.microsoft.com/office/drawing/2014/main" id="{B8C8EBB8-8CB9-4BED-B491-74B7CE51045C}"/>
+                <a16:creationId xmlns:a16="http://schemas.microsoft.com/office/drawing/2014/main" id="{7D538046-5D02-4FC3-9D4C-3C05F52F993D}"/>
               </a:ext>
             </a:extLst>
           </p:cNvPr>
@@ -23461,7 +23473,7 @@
     </p:spTree>
     <p:extLst>
       <p:ext uri="{BB962C8B-B14F-4D97-AF65-F5344CB8AC3E}">
-        <p14:creationId xmlns:p14="http://schemas.microsoft.com/office/powerpoint/2010/main" val="1605412961"/>
+        <p14:creationId xmlns:p14="http://schemas.microsoft.com/office/powerpoint/2010/main" val="1456158940"/>
       </p:ext>
     </p:extLst>
   </p:cSld>
@@ -23492,7 +23504,7 @@
           <p:cNvPr id="2" name="Text 0">
             <a:extLst xmlns:a="http://schemas.openxmlformats.org/drawingml/2006/main">
               <a:ext uri="{FF2B5EF4-FFF2-40B4-BE49-F238E27FC236}">
-                <a16:creationId xmlns:a16="http://schemas.microsoft.com/office/drawing/2014/main" id="{0C5AB7AF-373B-4BE8-82EF-E97BEE604EA6}"/>
+                <a16:creationId xmlns:a16="http://schemas.microsoft.com/office/drawing/2014/main" id="{5FB4712F-5230-4656-A9E8-36B75FE4D6CD}"/>
               </a:ext>
             </a:extLst>
           </p:cNvPr>
@@ -23537,7 +23549,7 @@
           <p:cNvPr id="3" name="Text 1">
             <a:extLst xmlns:a="http://schemas.openxmlformats.org/drawingml/2006/main">
               <a:ext uri="{FF2B5EF4-FFF2-40B4-BE49-F238E27FC236}">
-                <a16:creationId xmlns:a16="http://schemas.microsoft.com/office/drawing/2014/main" id="{BFD92AB7-3402-4B6F-9309-10904DC68476}"/>
+                <a16:creationId xmlns:a16="http://schemas.microsoft.com/office/drawing/2014/main" id="{C6886FEC-884C-4B40-B3E0-CB6210E74258}"/>
               </a:ext>
             </a:extLst>
           </p:cNvPr>
@@ -23582,7 +23594,7 @@
           <p:cNvPr id="4" name="Shape 2">
             <a:extLst xmlns:a="http://schemas.openxmlformats.org/drawingml/2006/main">
               <a:ext uri="{FF2B5EF4-FFF2-40B4-BE49-F238E27FC236}">
-                <a16:creationId xmlns:a16="http://schemas.microsoft.com/office/drawing/2014/main" id="{FA01FEE0-4EE5-49DB-AC93-1DDFBB85B8C7}"/>
+                <a16:creationId xmlns:a16="http://schemas.microsoft.com/office/drawing/2014/main" id="{50A1D5EE-C090-4B8F-A3CC-5BC7EC1B4126}"/>
               </a:ext>
             </a:extLst>
           </p:cNvPr>
@@ -23622,7 +23634,7 @@
           <p:cNvPr id="5" name="Shape 3">
             <a:extLst xmlns:a="http://schemas.openxmlformats.org/drawingml/2006/main">
               <a:ext uri="{FF2B5EF4-FFF2-40B4-BE49-F238E27FC236}">
-                <a16:creationId xmlns:a16="http://schemas.microsoft.com/office/drawing/2014/main" id="{E35BDDA8-54CA-495A-A05F-CEDEFCC27A5D}"/>
+                <a16:creationId xmlns:a16="http://schemas.microsoft.com/office/drawing/2014/main" id="{E418D7B6-4E18-4B32-88A0-0DC945DEE022}"/>
               </a:ext>
             </a:extLst>
           </p:cNvPr>
@@ -23662,7 +23674,7 @@
           <p:cNvPr id="6" name="Text 4">
             <a:extLst xmlns:a="http://schemas.openxmlformats.org/drawingml/2006/main">
               <a:ext uri="{FF2B5EF4-FFF2-40B4-BE49-F238E27FC236}">
-                <a16:creationId xmlns:a16="http://schemas.microsoft.com/office/drawing/2014/main" id="{14A21516-E5ED-4867-A792-8D5AE1EB3A0A}"/>
+                <a16:creationId xmlns:a16="http://schemas.microsoft.com/office/drawing/2014/main" id="{221E3EFB-29A8-4F85-825F-DD1E449C6F1B}"/>
               </a:ext>
             </a:extLst>
           </p:cNvPr>
@@ -23707,7 +23719,7 @@
           <p:cNvPr id="7" name="Text 5">
             <a:extLst xmlns:a="http://schemas.openxmlformats.org/drawingml/2006/main">
               <a:ext uri="{FF2B5EF4-FFF2-40B4-BE49-F238E27FC236}">
-                <a16:creationId xmlns:a16="http://schemas.microsoft.com/office/drawing/2014/main" id="{DA7373AF-FE12-4C5B-8C08-CF6B40D12A8B}"/>
+                <a16:creationId xmlns:a16="http://schemas.microsoft.com/office/drawing/2014/main" id="{3DEF5C89-330C-4EEB-9F79-53148D00F85E}"/>
               </a:ext>
             </a:extLst>
           </p:cNvPr>
@@ -23752,7 +23764,7 @@
           <p:cNvPr id="8" name="Shape 6">
             <a:extLst xmlns:a="http://schemas.openxmlformats.org/drawingml/2006/main">
               <a:ext uri="{FF2B5EF4-FFF2-40B4-BE49-F238E27FC236}">
-                <a16:creationId xmlns:a16="http://schemas.microsoft.com/office/drawing/2014/main" id="{7C5D1F39-CD9C-49D8-BF83-861A819D4A42}"/>
+                <a16:creationId xmlns:a16="http://schemas.microsoft.com/office/drawing/2014/main" id="{A07DC257-081F-4A86-8594-E5438A5E2AAA}"/>
               </a:ext>
             </a:extLst>
           </p:cNvPr>
@@ -23790,7 +23802,7 @@
           <p:cNvPr id="9" name="Text 7">
             <a:extLst xmlns:a="http://schemas.openxmlformats.org/drawingml/2006/main">
               <a:ext uri="{FF2B5EF4-FFF2-40B4-BE49-F238E27FC236}">
-                <a16:creationId xmlns:a16="http://schemas.microsoft.com/office/drawing/2014/main" id="{D6B4DA7F-E579-4BD8-8642-5796747DE60B}"/>
+                <a16:creationId xmlns:a16="http://schemas.microsoft.com/office/drawing/2014/main" id="{F359064C-D56C-4676-BA12-5A756707C3BA}"/>
               </a:ext>
             </a:extLst>
           </p:cNvPr>
@@ -23835,7 +23847,7 @@
           <p:cNvPr id="10" name="Text 8">
             <a:extLst xmlns:a="http://schemas.openxmlformats.org/drawingml/2006/main">
               <a:ext uri="{FF2B5EF4-FFF2-40B4-BE49-F238E27FC236}">
-                <a16:creationId xmlns:a16="http://schemas.microsoft.com/office/drawing/2014/main" id="{6E27E1E2-BC46-45BF-ABF6-AF4B419AA734}"/>
+                <a16:creationId xmlns:a16="http://schemas.microsoft.com/office/drawing/2014/main" id="{2E2E96E3-68A3-4DCB-B6F6-601E2BE97FA0}"/>
               </a:ext>
             </a:extLst>
           </p:cNvPr>
@@ -23883,7 +23895,7 @@
           <p:cNvPr id="11" name="Text 9">
             <a:extLst xmlns:a="http://schemas.openxmlformats.org/drawingml/2006/main">
               <a:ext uri="{FF2B5EF4-FFF2-40B4-BE49-F238E27FC236}">
-                <a16:creationId xmlns:a16="http://schemas.microsoft.com/office/drawing/2014/main" id="{CF3D151F-7F43-42E1-B5CF-8D4CA9849899}"/>
+                <a16:creationId xmlns:a16="http://schemas.microsoft.com/office/drawing/2014/main" id="{E6B5BCC4-423A-43BD-9221-87FB43A6C0A1}"/>
               </a:ext>
             </a:extLst>
           </p:cNvPr>
@@ -23931,7 +23943,7 @@
           <p:cNvPr id="12" name="Shape 10">
             <a:extLst xmlns:a="http://schemas.openxmlformats.org/drawingml/2006/main">
               <a:ext uri="{FF2B5EF4-FFF2-40B4-BE49-F238E27FC236}">
-                <a16:creationId xmlns:a16="http://schemas.microsoft.com/office/drawing/2014/main" id="{F0D9B585-C311-4589-8EAB-2D3727FEB1B4}"/>
+                <a16:creationId xmlns:a16="http://schemas.microsoft.com/office/drawing/2014/main" id="{7A925616-EC9B-4A6C-86FB-A1FA20607155}"/>
               </a:ext>
             </a:extLst>
           </p:cNvPr>
@@ -23969,7 +23981,7 @@
           <p:cNvPr id="13" name="Text 11">
             <a:extLst xmlns:a="http://schemas.openxmlformats.org/drawingml/2006/main">
               <a:ext uri="{FF2B5EF4-FFF2-40B4-BE49-F238E27FC236}">
-                <a16:creationId xmlns:a16="http://schemas.microsoft.com/office/drawing/2014/main" id="{A84A5CE9-3897-4C55-B731-1467A523E0E1}"/>
+                <a16:creationId xmlns:a16="http://schemas.microsoft.com/office/drawing/2014/main" id="{42CB2DCC-09D2-4E1A-9069-0E734AD34E60}"/>
               </a:ext>
             </a:extLst>
           </p:cNvPr>
@@ -24014,7 +24026,7 @@
           <p:cNvPr id="14" name="Text 12">
             <a:extLst xmlns:a="http://schemas.openxmlformats.org/drawingml/2006/main">
               <a:ext uri="{FF2B5EF4-FFF2-40B4-BE49-F238E27FC236}">
-                <a16:creationId xmlns:a16="http://schemas.microsoft.com/office/drawing/2014/main" id="{EF849C5F-106B-446C-AD05-3683D7B71C89}"/>
+                <a16:creationId xmlns:a16="http://schemas.microsoft.com/office/drawing/2014/main" id="{F93AD070-6D64-40B3-8008-A777D4F5B742}"/>
               </a:ext>
             </a:extLst>
           </p:cNvPr>
@@ -24062,7 +24074,7 @@
           <p:cNvPr id="15" name="Text 13">
             <a:extLst xmlns:a="http://schemas.openxmlformats.org/drawingml/2006/main">
               <a:ext uri="{FF2B5EF4-FFF2-40B4-BE49-F238E27FC236}">
-                <a16:creationId xmlns:a16="http://schemas.microsoft.com/office/drawing/2014/main" id="{9E1F1091-03DA-4BF4-AA70-960F75FDB404}"/>
+                <a16:creationId xmlns:a16="http://schemas.microsoft.com/office/drawing/2014/main" id="{6B6DF907-881C-4972-9A7C-D279C3C4EF19}"/>
               </a:ext>
             </a:extLst>
           </p:cNvPr>
@@ -24110,7 +24122,7 @@
           <p:cNvPr id="16" name="Shape 14">
             <a:extLst xmlns:a="http://schemas.openxmlformats.org/drawingml/2006/main">
               <a:ext uri="{FF2B5EF4-FFF2-40B4-BE49-F238E27FC236}">
-                <a16:creationId xmlns:a16="http://schemas.microsoft.com/office/drawing/2014/main" id="{7AEA2AC1-3771-4C4C-9737-05DCD9939D3B}"/>
+                <a16:creationId xmlns:a16="http://schemas.microsoft.com/office/drawing/2014/main" id="{66B4504F-26F8-4D7D-B559-9CAE582975AE}"/>
               </a:ext>
             </a:extLst>
           </p:cNvPr>
@@ -24148,7 +24160,7 @@
           <p:cNvPr id="17" name="Text 15">
             <a:extLst xmlns:a="http://schemas.openxmlformats.org/drawingml/2006/main">
               <a:ext uri="{FF2B5EF4-FFF2-40B4-BE49-F238E27FC236}">
-                <a16:creationId xmlns:a16="http://schemas.microsoft.com/office/drawing/2014/main" id="{EFC6C016-95F5-4BB9-B1CA-8BCA07F8993C}"/>
+                <a16:creationId xmlns:a16="http://schemas.microsoft.com/office/drawing/2014/main" id="{544FDEEC-6CCD-453E-AD35-2EEDB1945250}"/>
               </a:ext>
             </a:extLst>
           </p:cNvPr>
@@ -24193,7 +24205,7 @@
           <p:cNvPr id="18" name="Text 16">
             <a:extLst xmlns:a="http://schemas.openxmlformats.org/drawingml/2006/main">
               <a:ext uri="{FF2B5EF4-FFF2-40B4-BE49-F238E27FC236}">
-                <a16:creationId xmlns:a16="http://schemas.microsoft.com/office/drawing/2014/main" id="{52BAF457-C8B4-4DA4-BEE3-A7B1173D1680}"/>
+                <a16:creationId xmlns:a16="http://schemas.microsoft.com/office/drawing/2014/main" id="{1B568BBC-11C8-4851-B222-E8D33CBE577F}"/>
               </a:ext>
             </a:extLst>
           </p:cNvPr>
@@ -24241,7 +24253,7 @@
           <p:cNvPr id="19" name="Text 17">
             <a:extLst xmlns:a="http://schemas.openxmlformats.org/drawingml/2006/main">
               <a:ext uri="{FF2B5EF4-FFF2-40B4-BE49-F238E27FC236}">
-                <a16:creationId xmlns:a16="http://schemas.microsoft.com/office/drawing/2014/main" id="{6D86E20F-3E62-4E70-A4DE-81EE4A752483}"/>
+                <a16:creationId xmlns:a16="http://schemas.microsoft.com/office/drawing/2014/main" id="{FCCD5285-65A3-44F5-AC45-A3A47A78177A}"/>
               </a:ext>
             </a:extLst>
           </p:cNvPr>
@@ -24289,7 +24301,7 @@
           <p:cNvPr id="20" name="Shape 18">
             <a:extLst xmlns:a="http://schemas.openxmlformats.org/drawingml/2006/main">
               <a:ext uri="{FF2B5EF4-FFF2-40B4-BE49-F238E27FC236}">
-                <a16:creationId xmlns:a16="http://schemas.microsoft.com/office/drawing/2014/main" id="{1C18C31F-C690-4ED3-A8C2-ABFA2C6223CB}"/>
+                <a16:creationId xmlns:a16="http://schemas.microsoft.com/office/drawing/2014/main" id="{2E05827A-D818-4FB6-8900-77BF892AEF19}"/>
               </a:ext>
             </a:extLst>
           </p:cNvPr>
@@ -24327,7 +24339,7 @@
           <p:cNvPr id="21" name="Text 19">
             <a:extLst xmlns:a="http://schemas.openxmlformats.org/drawingml/2006/main">
               <a:ext uri="{FF2B5EF4-FFF2-40B4-BE49-F238E27FC236}">
-                <a16:creationId xmlns:a16="http://schemas.microsoft.com/office/drawing/2014/main" id="{1AD3A353-3B35-40D2-9F26-DBE63E62CA43}"/>
+                <a16:creationId xmlns:a16="http://schemas.microsoft.com/office/drawing/2014/main" id="{F87831E4-252B-4671-B9BF-CD126F66419A}"/>
               </a:ext>
             </a:extLst>
           </p:cNvPr>
@@ -24372,7 +24384,7 @@
           <p:cNvPr id="22" name="Text 20">
             <a:extLst xmlns:a="http://schemas.openxmlformats.org/drawingml/2006/main">
               <a:ext uri="{FF2B5EF4-FFF2-40B4-BE49-F238E27FC236}">
-                <a16:creationId xmlns:a16="http://schemas.microsoft.com/office/drawing/2014/main" id="{AA866FFA-E6E6-418B-B51D-9B7269BBF7CE}"/>
+                <a16:creationId xmlns:a16="http://schemas.microsoft.com/office/drawing/2014/main" id="{F4BB75ED-B7DB-4576-86B8-2A35E4410B74}"/>
               </a:ext>
             </a:extLst>
           </p:cNvPr>
@@ -24420,7 +24432,7 @@
           <p:cNvPr id="23" name="Text 21">
             <a:extLst xmlns:a="http://schemas.openxmlformats.org/drawingml/2006/main">
               <a:ext uri="{FF2B5EF4-FFF2-40B4-BE49-F238E27FC236}">
-                <a16:creationId xmlns:a16="http://schemas.microsoft.com/office/drawing/2014/main" id="{DA0ABC7C-CC08-4EF6-87B0-A3A08A17BB80}"/>
+                <a16:creationId xmlns:a16="http://schemas.microsoft.com/office/drawing/2014/main" id="{D98F356F-16B8-40D3-A191-599FE6B94100}"/>
               </a:ext>
             </a:extLst>
           </p:cNvPr>
@@ -24468,7 +24480,7 @@
           <p:cNvPr id="24" name="Text 22">
             <a:extLst xmlns:a="http://schemas.openxmlformats.org/drawingml/2006/main">
               <a:ext uri="{FF2B5EF4-FFF2-40B4-BE49-F238E27FC236}">
-                <a16:creationId xmlns:a16="http://schemas.microsoft.com/office/drawing/2014/main" id="{15B1CDBC-1D01-40A0-9A0F-3AC9259F6F47}"/>
+                <a16:creationId xmlns:a16="http://schemas.microsoft.com/office/drawing/2014/main" id="{B5E7B106-3F7E-4422-86F2-8363113BB3DD}"/>
               </a:ext>
             </a:extLst>
           </p:cNvPr>
@@ -24511,7 +24523,7 @@
     </p:spTree>
     <p:extLst>
       <p:ext uri="{BB962C8B-B14F-4D97-AF65-F5344CB8AC3E}">
-        <p14:creationId xmlns:p14="http://schemas.microsoft.com/office/powerpoint/2010/main" val="2050992037"/>
+        <p14:creationId xmlns:p14="http://schemas.microsoft.com/office/powerpoint/2010/main" val="796660312"/>
       </p:ext>
     </p:extLst>
   </p:cSld>
@@ -24542,7 +24554,7 @@
           <p:cNvPr id="2" name="Text 0">
             <a:extLst xmlns:a="http://schemas.openxmlformats.org/drawingml/2006/main">
               <a:ext uri="{FF2B5EF4-FFF2-40B4-BE49-F238E27FC236}">
-                <a16:creationId xmlns:a16="http://schemas.microsoft.com/office/drawing/2014/main" id="{6C957816-775E-437C-953F-8EC00D940111}"/>
+                <a16:creationId xmlns:a16="http://schemas.microsoft.com/office/drawing/2014/main" id="{C9DA7E9A-53A6-468C-B889-09D72FC2B062}"/>
               </a:ext>
             </a:extLst>
           </p:cNvPr>
@@ -24587,7 +24599,7 @@
           <p:cNvPr id="3" name="Text 1">
             <a:extLst xmlns:a="http://schemas.openxmlformats.org/drawingml/2006/main">
               <a:ext uri="{FF2B5EF4-FFF2-40B4-BE49-F238E27FC236}">
-                <a16:creationId xmlns:a16="http://schemas.microsoft.com/office/drawing/2014/main" id="{BD3ABD68-605B-4626-8E1C-836ED1388681}"/>
+                <a16:creationId xmlns:a16="http://schemas.microsoft.com/office/drawing/2014/main" id="{5BEEE096-DCE0-4F5B-A48E-74D4D42C61BE}"/>
               </a:ext>
             </a:extLst>
           </p:cNvPr>
@@ -24632,7 +24644,7 @@
           <p:cNvPr id="4" name="Text 2">
             <a:extLst xmlns:a="http://schemas.openxmlformats.org/drawingml/2006/main">
               <a:ext uri="{FF2B5EF4-FFF2-40B4-BE49-F238E27FC236}">
-                <a16:creationId xmlns:a16="http://schemas.microsoft.com/office/drawing/2014/main" id="{369DF469-B698-4900-9A69-09FB58DE2866}"/>
+                <a16:creationId xmlns:a16="http://schemas.microsoft.com/office/drawing/2014/main" id="{5919AF9A-6C92-4A00-90AA-8C0AA626B2D3}"/>
               </a:ext>
             </a:extLst>
           </p:cNvPr>
@@ -24677,7 +24689,7 @@
           <p:cNvPr id="5" name="Text 3">
             <a:extLst xmlns:a="http://schemas.openxmlformats.org/drawingml/2006/main">
               <a:ext uri="{FF2B5EF4-FFF2-40B4-BE49-F238E27FC236}">
-                <a16:creationId xmlns:a16="http://schemas.microsoft.com/office/drawing/2014/main" id="{DD370364-0867-44BA-AA43-B3B28E848DDB}"/>
+                <a16:creationId xmlns:a16="http://schemas.microsoft.com/office/drawing/2014/main" id="{6CC39F15-57DB-4A01-98ED-56966B64F87F}"/>
               </a:ext>
             </a:extLst>
           </p:cNvPr>
@@ -24722,7 +24734,7 @@
           <p:cNvPr id="6" name="Text 4">
             <a:extLst xmlns:a="http://schemas.openxmlformats.org/drawingml/2006/main">
               <a:ext uri="{FF2B5EF4-FFF2-40B4-BE49-F238E27FC236}">
-                <a16:creationId xmlns:a16="http://schemas.microsoft.com/office/drawing/2014/main" id="{3EEFBDD0-F188-428A-969A-25A0E86F6B76}"/>
+                <a16:creationId xmlns:a16="http://schemas.microsoft.com/office/drawing/2014/main" id="{B8B3C99E-E4EB-4491-A0F0-FC53027FCADC}"/>
               </a:ext>
             </a:extLst>
           </p:cNvPr>
@@ -24817,7 +24829,7 @@
           <p:cNvPr id="7" name="Shape 5">
             <a:extLst xmlns:a="http://schemas.openxmlformats.org/drawingml/2006/main">
               <a:ext uri="{FF2B5EF4-FFF2-40B4-BE49-F238E27FC236}">
-                <a16:creationId xmlns:a16="http://schemas.microsoft.com/office/drawing/2014/main" id="{BEA89BBC-C322-4A7A-B168-69E2746F9816}"/>
+                <a16:creationId xmlns:a16="http://schemas.microsoft.com/office/drawing/2014/main" id="{1B02EAE7-BEB2-475E-B19E-97949AD81B08}"/>
               </a:ext>
             </a:extLst>
           </p:cNvPr>
@@ -24864,7 +24876,7 @@
           <p:cNvPr id="8" name="Text 6">
             <a:extLst xmlns:a="http://schemas.openxmlformats.org/drawingml/2006/main">
               <a:ext uri="{FF2B5EF4-FFF2-40B4-BE49-F238E27FC236}">
-                <a16:creationId xmlns:a16="http://schemas.microsoft.com/office/drawing/2014/main" id="{B96245C3-8C8E-4BA1-959B-A063C2E4E4DB}"/>
+                <a16:creationId xmlns:a16="http://schemas.microsoft.com/office/drawing/2014/main" id="{D526267F-8876-49E0-8442-1B755ECE9DF9}"/>
               </a:ext>
             </a:extLst>
           </p:cNvPr>
@@ -24909,7 +24921,7 @@
           <p:cNvPr id="9" name="Shape 7">
             <a:extLst xmlns:a="http://schemas.openxmlformats.org/drawingml/2006/main">
               <a:ext uri="{FF2B5EF4-FFF2-40B4-BE49-F238E27FC236}">
-                <a16:creationId xmlns:a16="http://schemas.microsoft.com/office/drawing/2014/main" id="{44BF04FF-A1C1-4DD6-B7AD-E645B7419050}"/>
+                <a16:creationId xmlns:a16="http://schemas.microsoft.com/office/drawing/2014/main" id="{151D20E6-E78C-4DD3-980D-9BDC4C7E2FA1}"/>
               </a:ext>
             </a:extLst>
           </p:cNvPr>
@@ -24956,7 +24968,7 @@
           <p:cNvPr id="10" name="Text 8">
             <a:extLst xmlns:a="http://schemas.openxmlformats.org/drawingml/2006/main">
               <a:ext uri="{FF2B5EF4-FFF2-40B4-BE49-F238E27FC236}">
-                <a16:creationId xmlns:a16="http://schemas.microsoft.com/office/drawing/2014/main" id="{05E570EF-73E5-4D95-91B1-284369FB7F51}"/>
+                <a16:creationId xmlns:a16="http://schemas.microsoft.com/office/drawing/2014/main" id="{AC1D6EE3-FE63-435B-9FA7-9688D258198E}"/>
               </a:ext>
             </a:extLst>
           </p:cNvPr>
@@ -25001,7 +25013,7 @@
           <p:cNvPr id="11" name="Shape 9">
             <a:extLst xmlns:a="http://schemas.openxmlformats.org/drawingml/2006/main">
               <a:ext uri="{FF2B5EF4-FFF2-40B4-BE49-F238E27FC236}">
-                <a16:creationId xmlns:a16="http://schemas.microsoft.com/office/drawing/2014/main" id="{AF1717BA-70B9-425A-B31F-24FF686D40B9}"/>
+                <a16:creationId xmlns:a16="http://schemas.microsoft.com/office/drawing/2014/main" id="{0D6BE682-90AB-42A8-8E44-539B5703D805}"/>
               </a:ext>
             </a:extLst>
           </p:cNvPr>
@@ -25039,7 +25051,7 @@
           <p:cNvPr id="12" name="Text 10">
             <a:extLst xmlns:a="http://schemas.openxmlformats.org/drawingml/2006/main">
               <a:ext uri="{FF2B5EF4-FFF2-40B4-BE49-F238E27FC236}">
-                <a16:creationId xmlns:a16="http://schemas.microsoft.com/office/drawing/2014/main" id="{0E3D02E3-FD5A-460B-9754-2D8B81A44475}"/>
+                <a16:creationId xmlns:a16="http://schemas.microsoft.com/office/drawing/2014/main" id="{AE3327A2-CED3-4A53-8FCF-31033F2A3B1A}"/>
               </a:ext>
             </a:extLst>
           </p:cNvPr>
@@ -25084,7 +25096,7 @@
           <p:cNvPr id="13" name="Text 11">
             <a:extLst xmlns:a="http://schemas.openxmlformats.org/drawingml/2006/main">
               <a:ext uri="{FF2B5EF4-FFF2-40B4-BE49-F238E27FC236}">
-                <a16:creationId xmlns:a16="http://schemas.microsoft.com/office/drawing/2014/main" id="{A7B8F9A8-97C5-457B-8560-572909E6CCBB}"/>
+                <a16:creationId xmlns:a16="http://schemas.microsoft.com/office/drawing/2014/main" id="{7EA209C3-67D0-4699-B448-95FD87D5C04A}"/>
               </a:ext>
             </a:extLst>
           </p:cNvPr>
@@ -25129,7 +25141,7 @@
           <p:cNvPr id="14" name="Text 12">
             <a:extLst xmlns:a="http://schemas.openxmlformats.org/drawingml/2006/main">
               <a:ext uri="{FF2B5EF4-FFF2-40B4-BE49-F238E27FC236}">
-                <a16:creationId xmlns:a16="http://schemas.microsoft.com/office/drawing/2014/main" id="{7020E00D-271E-4989-874D-74BE9A6D3304}"/>
+                <a16:creationId xmlns:a16="http://schemas.microsoft.com/office/drawing/2014/main" id="{1A2A874B-9940-42ED-90B6-A7F47A88C881}"/>
               </a:ext>
             </a:extLst>
           </p:cNvPr>
@@ -25174,7 +25186,7 @@
           <p:cNvPr id="15" name="Shape 13">
             <a:extLst xmlns:a="http://schemas.openxmlformats.org/drawingml/2006/main">
               <a:ext uri="{FF2B5EF4-FFF2-40B4-BE49-F238E27FC236}">
-                <a16:creationId xmlns:a16="http://schemas.microsoft.com/office/drawing/2014/main" id="{C28E9E4C-BF63-489F-ACC4-503ED7EA3D5C}"/>
+                <a16:creationId xmlns:a16="http://schemas.microsoft.com/office/drawing/2014/main" id="{EC53D808-C4BA-40DB-8CEB-5C1EE29EE45B}"/>
               </a:ext>
             </a:extLst>
           </p:cNvPr>
@@ -25212,7 +25224,7 @@
           <p:cNvPr id="16" name="Text 14">
             <a:extLst xmlns:a="http://schemas.openxmlformats.org/drawingml/2006/main">
               <a:ext uri="{FF2B5EF4-FFF2-40B4-BE49-F238E27FC236}">
-                <a16:creationId xmlns:a16="http://schemas.microsoft.com/office/drawing/2014/main" id="{F9ABFBCA-A63B-4AE4-83F6-95BF26334662}"/>
+                <a16:creationId xmlns:a16="http://schemas.microsoft.com/office/drawing/2014/main" id="{A948D813-E22C-4919-9359-39E72C20D3AF}"/>
               </a:ext>
             </a:extLst>
           </p:cNvPr>
@@ -25257,7 +25269,7 @@
           <p:cNvPr id="17" name="Text 15">
             <a:extLst xmlns:a="http://schemas.openxmlformats.org/drawingml/2006/main">
               <a:ext uri="{FF2B5EF4-FFF2-40B4-BE49-F238E27FC236}">
-                <a16:creationId xmlns:a16="http://schemas.microsoft.com/office/drawing/2014/main" id="{9F3DCD46-400C-480C-ADF8-488B0F5023C6}"/>
+                <a16:creationId xmlns:a16="http://schemas.microsoft.com/office/drawing/2014/main" id="{C9A65D0E-EA7B-4A66-B09A-B2AE250006C4}"/>
               </a:ext>
             </a:extLst>
           </p:cNvPr>
@@ -25302,7 +25314,7 @@
           <p:cNvPr id="18" name="Text 16">
             <a:extLst xmlns:a="http://schemas.openxmlformats.org/drawingml/2006/main">
               <a:ext uri="{FF2B5EF4-FFF2-40B4-BE49-F238E27FC236}">
-                <a16:creationId xmlns:a16="http://schemas.microsoft.com/office/drawing/2014/main" id="{AC462D54-EB13-423C-AAE8-6242C1E55FFE}"/>
+                <a16:creationId xmlns:a16="http://schemas.microsoft.com/office/drawing/2014/main" id="{7BBFD22F-7255-4C9B-B0B9-F3915B09949D}"/>
               </a:ext>
             </a:extLst>
           </p:cNvPr>
@@ -25347,7 +25359,7 @@
           <p:cNvPr id="19" name="Shape 17">
             <a:extLst xmlns:a="http://schemas.openxmlformats.org/drawingml/2006/main">
               <a:ext uri="{FF2B5EF4-FFF2-40B4-BE49-F238E27FC236}">
-                <a16:creationId xmlns:a16="http://schemas.microsoft.com/office/drawing/2014/main" id="{935928F4-32ED-4709-BB4C-49B98777954C}"/>
+                <a16:creationId xmlns:a16="http://schemas.microsoft.com/office/drawing/2014/main" id="{8DA79002-BA43-4466-BDCC-C5917C72E773}"/>
               </a:ext>
             </a:extLst>
           </p:cNvPr>
@@ -25385,7 +25397,7 @@
           <p:cNvPr id="20" name="Text 18">
             <a:extLst xmlns:a="http://schemas.openxmlformats.org/drawingml/2006/main">
               <a:ext uri="{FF2B5EF4-FFF2-40B4-BE49-F238E27FC236}">
-                <a16:creationId xmlns:a16="http://schemas.microsoft.com/office/drawing/2014/main" id="{8902EF99-254A-4D36-BF0C-5C060A6B93BC}"/>
+                <a16:creationId xmlns:a16="http://schemas.microsoft.com/office/drawing/2014/main" id="{FC629A5A-5587-4C2F-97E5-09CED538F17D}"/>
               </a:ext>
             </a:extLst>
           </p:cNvPr>
@@ -25430,7 +25442,7 @@
           <p:cNvPr id="21" name="Text 19">
             <a:extLst xmlns:a="http://schemas.openxmlformats.org/drawingml/2006/main">
               <a:ext uri="{FF2B5EF4-FFF2-40B4-BE49-F238E27FC236}">
-                <a16:creationId xmlns:a16="http://schemas.microsoft.com/office/drawing/2014/main" id="{FC94FE37-A0AD-4FF2-AD14-ED2B85ED03CE}"/>
+                <a16:creationId xmlns:a16="http://schemas.microsoft.com/office/drawing/2014/main" id="{4E4D4049-A2BA-4138-B48E-7DA86E8FC02D}"/>
               </a:ext>
             </a:extLst>
           </p:cNvPr>
@@ -25475,7 +25487,7 @@
           <p:cNvPr id="22" name="Text 20">
             <a:extLst xmlns:a="http://schemas.openxmlformats.org/drawingml/2006/main">
               <a:ext uri="{FF2B5EF4-FFF2-40B4-BE49-F238E27FC236}">
-                <a16:creationId xmlns:a16="http://schemas.microsoft.com/office/drawing/2014/main" id="{1353F562-7245-41C3-ACA8-AEDE001BBA21}"/>
+                <a16:creationId xmlns:a16="http://schemas.microsoft.com/office/drawing/2014/main" id="{61F39EB0-4394-43CE-B535-68DBCE4F21B1}"/>
               </a:ext>
             </a:extLst>
           </p:cNvPr>
@@ -25520,7 +25532,7 @@
           <p:cNvPr id="23" name="Shape 21">
             <a:extLst xmlns:a="http://schemas.openxmlformats.org/drawingml/2006/main">
               <a:ext uri="{FF2B5EF4-FFF2-40B4-BE49-F238E27FC236}">
-                <a16:creationId xmlns:a16="http://schemas.microsoft.com/office/drawing/2014/main" id="{A79803F5-FC0D-4F6B-8FAD-D7C158DCE909}"/>
+                <a16:creationId xmlns:a16="http://schemas.microsoft.com/office/drawing/2014/main" id="{BBAF5722-A608-40DA-B5C2-2F7B6391BFC0}"/>
               </a:ext>
             </a:extLst>
           </p:cNvPr>
@@ -25558,7 +25570,7 @@
           <p:cNvPr id="24" name="Text 22">
             <a:extLst xmlns:a="http://schemas.openxmlformats.org/drawingml/2006/main">
               <a:ext uri="{FF2B5EF4-FFF2-40B4-BE49-F238E27FC236}">
-                <a16:creationId xmlns:a16="http://schemas.microsoft.com/office/drawing/2014/main" id="{BE2BE9F6-571F-4360-87EA-379BAA4EB544}"/>
+                <a16:creationId xmlns:a16="http://schemas.microsoft.com/office/drawing/2014/main" id="{59F1FB07-71A4-4956-862E-3DF6FF1917A0}"/>
               </a:ext>
             </a:extLst>
           </p:cNvPr>
@@ -25603,7 +25615,7 @@
           <p:cNvPr id="25" name="Text 23">
             <a:extLst xmlns:a="http://schemas.openxmlformats.org/drawingml/2006/main">
               <a:ext uri="{FF2B5EF4-FFF2-40B4-BE49-F238E27FC236}">
-                <a16:creationId xmlns:a16="http://schemas.microsoft.com/office/drawing/2014/main" id="{9D64B6F3-DDC7-444B-A347-85AD4D117872}"/>
+                <a16:creationId xmlns:a16="http://schemas.microsoft.com/office/drawing/2014/main" id="{B00EEC28-E4A6-4DC7-9D73-7132F34FDD1F}"/>
               </a:ext>
             </a:extLst>
           </p:cNvPr>
@@ -25648,7 +25660,7 @@
           <p:cNvPr id="26" name="Text 24">
             <a:extLst xmlns:a="http://schemas.openxmlformats.org/drawingml/2006/main">
               <a:ext uri="{FF2B5EF4-FFF2-40B4-BE49-F238E27FC236}">
-                <a16:creationId xmlns:a16="http://schemas.microsoft.com/office/drawing/2014/main" id="{AB6A3BB1-418D-4233-ABBF-3188ECF1B55A}"/>
+                <a16:creationId xmlns:a16="http://schemas.microsoft.com/office/drawing/2014/main" id="{452077F4-E5BF-49E9-BC87-3C8F91A2EE4F}"/>
               </a:ext>
             </a:extLst>
           </p:cNvPr>
@@ -25693,7 +25705,7 @@
           <p:cNvPr id="27" name="Shape 25">
             <a:extLst xmlns:a="http://schemas.openxmlformats.org/drawingml/2006/main">
               <a:ext uri="{FF2B5EF4-FFF2-40B4-BE49-F238E27FC236}">
-                <a16:creationId xmlns:a16="http://schemas.microsoft.com/office/drawing/2014/main" id="{7FD32799-8640-4740-BAA1-BE63014EAC5B}"/>
+                <a16:creationId xmlns:a16="http://schemas.microsoft.com/office/drawing/2014/main" id="{CC6ECE56-2B1B-434F-9EF5-478C6FF6ED6D}"/>
               </a:ext>
             </a:extLst>
           </p:cNvPr>
@@ -25731,7 +25743,7 @@
           <p:cNvPr id="28" name="Text 26">
             <a:extLst xmlns:a="http://schemas.openxmlformats.org/drawingml/2006/main">
               <a:ext uri="{FF2B5EF4-FFF2-40B4-BE49-F238E27FC236}">
-                <a16:creationId xmlns:a16="http://schemas.microsoft.com/office/drawing/2014/main" id="{9D0FFC73-FF91-4FC4-8417-A88D492A838A}"/>
+                <a16:creationId xmlns:a16="http://schemas.microsoft.com/office/drawing/2014/main" id="{61E6BED9-B786-433B-B6F7-B78D4F28EE38}"/>
               </a:ext>
             </a:extLst>
           </p:cNvPr>
@@ -25776,7 +25788,7 @@
           <p:cNvPr id="29" name="Text 27">
             <a:extLst xmlns:a="http://schemas.openxmlformats.org/drawingml/2006/main">
               <a:ext uri="{FF2B5EF4-FFF2-40B4-BE49-F238E27FC236}">
-                <a16:creationId xmlns:a16="http://schemas.microsoft.com/office/drawing/2014/main" id="{787AA5AE-D38D-46DB-BDA6-8C0E20D1DAB9}"/>
+                <a16:creationId xmlns:a16="http://schemas.microsoft.com/office/drawing/2014/main" id="{35A0FDA6-C883-46FC-8433-DB61BD001C57}"/>
               </a:ext>
             </a:extLst>
           </p:cNvPr>
@@ -25821,7 +25833,7 @@
           <p:cNvPr id="30" name="Text 28">
             <a:extLst xmlns:a="http://schemas.openxmlformats.org/drawingml/2006/main">
               <a:ext uri="{FF2B5EF4-FFF2-40B4-BE49-F238E27FC236}">
-                <a16:creationId xmlns:a16="http://schemas.microsoft.com/office/drawing/2014/main" id="{23B52D0B-B8EE-468E-AD95-6BBBEE6D2B13}"/>
+                <a16:creationId xmlns:a16="http://schemas.microsoft.com/office/drawing/2014/main" id="{0855A937-BE6D-4B9C-9305-3A9CB38CE347}"/>
               </a:ext>
             </a:extLst>
           </p:cNvPr>
@@ -25866,7 +25878,7 @@
           <p:cNvPr id="31" name="Shape 29">
             <a:extLst xmlns:a="http://schemas.openxmlformats.org/drawingml/2006/main">
               <a:ext uri="{FF2B5EF4-FFF2-40B4-BE49-F238E27FC236}">
-                <a16:creationId xmlns:a16="http://schemas.microsoft.com/office/drawing/2014/main" id="{C19617D9-2EFC-4F54-8BB4-F7959FA97BC0}"/>
+                <a16:creationId xmlns:a16="http://schemas.microsoft.com/office/drawing/2014/main" id="{9D28739C-8C24-4DDC-AB47-F34789CD0730}"/>
               </a:ext>
             </a:extLst>
           </p:cNvPr>
@@ -25904,7 +25916,7 @@
           <p:cNvPr id="32" name="Text 30">
             <a:extLst xmlns:a="http://schemas.openxmlformats.org/drawingml/2006/main">
               <a:ext uri="{FF2B5EF4-FFF2-40B4-BE49-F238E27FC236}">
-                <a16:creationId xmlns:a16="http://schemas.microsoft.com/office/drawing/2014/main" id="{72F87DA4-9097-4EA1-B62E-C84765AAE894}"/>
+                <a16:creationId xmlns:a16="http://schemas.microsoft.com/office/drawing/2014/main" id="{64423555-A2C1-4A09-B918-64A70F16F021}"/>
               </a:ext>
             </a:extLst>
           </p:cNvPr>
@@ -25949,7 +25961,7 @@
           <p:cNvPr id="33" name="Text 31">
             <a:extLst xmlns:a="http://schemas.openxmlformats.org/drawingml/2006/main">
               <a:ext uri="{FF2B5EF4-FFF2-40B4-BE49-F238E27FC236}">
-                <a16:creationId xmlns:a16="http://schemas.microsoft.com/office/drawing/2014/main" id="{E077C4D8-70D7-4099-BA91-C8327EDA7005}"/>
+                <a16:creationId xmlns:a16="http://schemas.microsoft.com/office/drawing/2014/main" id="{8B2BFF72-4195-4647-9BE7-1C1250DBB378}"/>
               </a:ext>
             </a:extLst>
           </p:cNvPr>
@@ -25994,7 +26006,7 @@
           <p:cNvPr id="34" name="Text 32">
             <a:extLst xmlns:a="http://schemas.openxmlformats.org/drawingml/2006/main">
               <a:ext uri="{FF2B5EF4-FFF2-40B4-BE49-F238E27FC236}">
-                <a16:creationId xmlns:a16="http://schemas.microsoft.com/office/drawing/2014/main" id="{5A369D73-F10C-4E54-AE34-E39BAB75B654}"/>
+                <a16:creationId xmlns:a16="http://schemas.microsoft.com/office/drawing/2014/main" id="{EDCA3563-9B8D-4CA0-BC7B-1D5728AE1915}"/>
               </a:ext>
             </a:extLst>
           </p:cNvPr>
@@ -26039,7 +26051,7 @@
           <p:cNvPr id="35" name="Shape 33">
             <a:extLst xmlns:a="http://schemas.openxmlformats.org/drawingml/2006/main">
               <a:ext uri="{FF2B5EF4-FFF2-40B4-BE49-F238E27FC236}">
-                <a16:creationId xmlns:a16="http://schemas.microsoft.com/office/drawing/2014/main" id="{88A46214-28DD-48E1-861E-0254A69E8005}"/>
+                <a16:creationId xmlns:a16="http://schemas.microsoft.com/office/drawing/2014/main" id="{7A9CBC3D-3089-43F6-9608-A57B8C6D4B49}"/>
               </a:ext>
             </a:extLst>
           </p:cNvPr>
@@ -26077,7 +26089,7 @@
           <p:cNvPr id="36" name="Text 34">
             <a:extLst xmlns:a="http://schemas.openxmlformats.org/drawingml/2006/main">
               <a:ext uri="{FF2B5EF4-FFF2-40B4-BE49-F238E27FC236}">
-                <a16:creationId xmlns:a16="http://schemas.microsoft.com/office/drawing/2014/main" id="{38A3C3FB-988E-4FD7-A83C-67E7F73077DB}"/>
+                <a16:creationId xmlns:a16="http://schemas.microsoft.com/office/drawing/2014/main" id="{D60C6C5C-66EF-47F6-B021-BBF6AF681C4A}"/>
               </a:ext>
             </a:extLst>
           </p:cNvPr>
@@ -26122,7 +26134,7 @@
           <p:cNvPr id="37" name="Text 35">
             <a:extLst xmlns:a="http://schemas.openxmlformats.org/drawingml/2006/main">
               <a:ext uri="{FF2B5EF4-FFF2-40B4-BE49-F238E27FC236}">
-                <a16:creationId xmlns:a16="http://schemas.microsoft.com/office/drawing/2014/main" id="{11F3B1A0-A16F-4B33-B04C-0AA3D717DE99}"/>
+                <a16:creationId xmlns:a16="http://schemas.microsoft.com/office/drawing/2014/main" id="{40A57AEF-088D-4ED2-825F-F80317EAA8EA}"/>
               </a:ext>
             </a:extLst>
           </p:cNvPr>
@@ -26167,7 +26179,7 @@
           <p:cNvPr id="38" name="Text 36">
             <a:extLst xmlns:a="http://schemas.openxmlformats.org/drawingml/2006/main">
               <a:ext uri="{FF2B5EF4-FFF2-40B4-BE49-F238E27FC236}">
-                <a16:creationId xmlns:a16="http://schemas.microsoft.com/office/drawing/2014/main" id="{E5B7AD96-FBEF-4D54-8E9C-CAB618C3F373}"/>
+                <a16:creationId xmlns:a16="http://schemas.microsoft.com/office/drawing/2014/main" id="{BEBB9200-0B46-45DD-90D1-360A3251D029}"/>
               </a:ext>
             </a:extLst>
           </p:cNvPr>
@@ -26212,7 +26224,7 @@
           <p:cNvPr id="39" name="Shape 37">
             <a:extLst xmlns:a="http://schemas.openxmlformats.org/drawingml/2006/main">
               <a:ext uri="{FF2B5EF4-FFF2-40B4-BE49-F238E27FC236}">
-                <a16:creationId xmlns:a16="http://schemas.microsoft.com/office/drawing/2014/main" id="{E06132D1-E530-4569-887C-C3D8B52916F2}"/>
+                <a16:creationId xmlns:a16="http://schemas.microsoft.com/office/drawing/2014/main" id="{736B0B2F-147F-4223-852A-EBE464D8AE24}"/>
               </a:ext>
             </a:extLst>
           </p:cNvPr>
@@ -26248,7 +26260,7 @@
           <p:cNvPr id="40" name="Text 38">
             <a:extLst xmlns:a="http://schemas.openxmlformats.org/drawingml/2006/main">
               <a:ext uri="{FF2B5EF4-FFF2-40B4-BE49-F238E27FC236}">
-                <a16:creationId xmlns:a16="http://schemas.microsoft.com/office/drawing/2014/main" id="{ED78A6AE-6B5D-45FE-9956-733943F2829D}"/>
+                <a16:creationId xmlns:a16="http://schemas.microsoft.com/office/drawing/2014/main" id="{04A234AC-3C1A-406E-A3B8-10403DCE1CBF}"/>
               </a:ext>
             </a:extLst>
           </p:cNvPr>
@@ -26293,7 +26305,7 @@
           <p:cNvPr id="41" name="Text 39">
             <a:extLst xmlns:a="http://schemas.openxmlformats.org/drawingml/2006/main">
               <a:ext uri="{FF2B5EF4-FFF2-40B4-BE49-F238E27FC236}">
-                <a16:creationId xmlns:a16="http://schemas.microsoft.com/office/drawing/2014/main" id="{B2D997BD-371D-4592-B39F-7BC0A68B6DD0}"/>
+                <a16:creationId xmlns:a16="http://schemas.microsoft.com/office/drawing/2014/main" id="{32D0AD5A-F17D-40AC-825E-E8482B7ED4C4}"/>
               </a:ext>
             </a:extLst>
           </p:cNvPr>
@@ -26338,7 +26350,7 @@
           <p:cNvPr id="42" name="Text 40">
             <a:extLst xmlns:a="http://schemas.openxmlformats.org/drawingml/2006/main">
               <a:ext uri="{FF2B5EF4-FFF2-40B4-BE49-F238E27FC236}">
-                <a16:creationId xmlns:a16="http://schemas.microsoft.com/office/drawing/2014/main" id="{9F7AB867-0BF5-4C97-ADE2-5AFE4189EE71}"/>
+                <a16:creationId xmlns:a16="http://schemas.microsoft.com/office/drawing/2014/main" id="{F160DFD5-0F9D-4BBC-91C1-2663078BDCAA}"/>
               </a:ext>
             </a:extLst>
           </p:cNvPr>
@@ -26383,7 +26395,7 @@
           <p:cNvPr id="43" name="Text 41">
             <a:extLst xmlns:a="http://schemas.openxmlformats.org/drawingml/2006/main">
               <a:ext uri="{FF2B5EF4-FFF2-40B4-BE49-F238E27FC236}">
-                <a16:creationId xmlns:a16="http://schemas.microsoft.com/office/drawing/2014/main" id="{300FCCE4-FE03-4A8B-A3D8-8CF70B0EE060}"/>
+                <a16:creationId xmlns:a16="http://schemas.microsoft.com/office/drawing/2014/main" id="{5A1C2AEF-2788-47CD-9172-F302BCC2F992}"/>
               </a:ext>
             </a:extLst>
           </p:cNvPr>
@@ -26428,7 +26440,7 @@
           <p:cNvPr id="44" name="Text 42">
             <a:extLst xmlns:a="http://schemas.openxmlformats.org/drawingml/2006/main">
               <a:ext uri="{FF2B5EF4-FFF2-40B4-BE49-F238E27FC236}">
-                <a16:creationId xmlns:a16="http://schemas.microsoft.com/office/drawing/2014/main" id="{881FFC6F-F6F2-4F11-9925-19EB39D64C5C}"/>
+                <a16:creationId xmlns:a16="http://schemas.microsoft.com/office/drawing/2014/main" id="{A25FDF68-7BBB-4082-BA86-D64E491528FA}"/>
               </a:ext>
             </a:extLst>
           </p:cNvPr>
@@ -26473,7 +26485,7 @@
           <p:cNvPr id="45" name="Text 43">
             <a:extLst xmlns:a="http://schemas.openxmlformats.org/drawingml/2006/main">
               <a:ext uri="{FF2B5EF4-FFF2-40B4-BE49-F238E27FC236}">
-                <a16:creationId xmlns:a16="http://schemas.microsoft.com/office/drawing/2014/main" id="{DCC58207-DA95-4CEA-8C0A-A70CE109E1AE}"/>
+                <a16:creationId xmlns:a16="http://schemas.microsoft.com/office/drawing/2014/main" id="{12BC8C8A-979B-4656-96C5-998A7CFDBF08}"/>
               </a:ext>
             </a:extLst>
           </p:cNvPr>
@@ -26518,7 +26530,7 @@
           <p:cNvPr id="46" name="Text 44">
             <a:extLst xmlns:a="http://schemas.openxmlformats.org/drawingml/2006/main">
               <a:ext uri="{FF2B5EF4-FFF2-40B4-BE49-F238E27FC236}">
-                <a16:creationId xmlns:a16="http://schemas.microsoft.com/office/drawing/2014/main" id="{B5B7ECC0-61A9-4411-A00B-45AC97C13D27}"/>
+                <a16:creationId xmlns:a16="http://schemas.microsoft.com/office/drawing/2014/main" id="{F854D337-975D-4C47-B7D8-7C69CDE8B17D}"/>
               </a:ext>
             </a:extLst>
           </p:cNvPr>
@@ -26563,7 +26575,7 @@
           <p:cNvPr id="47" name="Text 45">
             <a:extLst xmlns:a="http://schemas.openxmlformats.org/drawingml/2006/main">
               <a:ext uri="{FF2B5EF4-FFF2-40B4-BE49-F238E27FC236}">
-                <a16:creationId xmlns:a16="http://schemas.microsoft.com/office/drawing/2014/main" id="{1F4218F8-21EA-4A73-919B-D26519B226FE}"/>
+                <a16:creationId xmlns:a16="http://schemas.microsoft.com/office/drawing/2014/main" id="{8A3CD2FA-D638-4845-8F60-2C3A45223801}"/>
               </a:ext>
             </a:extLst>
           </p:cNvPr>
@@ -26608,7 +26620,7 @@
           <p:cNvPr id="48" name="Text 46">
             <a:extLst xmlns:a="http://schemas.openxmlformats.org/drawingml/2006/main">
               <a:ext uri="{FF2B5EF4-FFF2-40B4-BE49-F238E27FC236}">
-                <a16:creationId xmlns:a16="http://schemas.microsoft.com/office/drawing/2014/main" id="{D6A476D5-2A31-45D1-97A7-BDBA795FAE76}"/>
+                <a16:creationId xmlns:a16="http://schemas.microsoft.com/office/drawing/2014/main" id="{B235AA2B-06F0-4A37-800F-399B1D039F97}"/>
               </a:ext>
             </a:extLst>
           </p:cNvPr>
@@ -26651,7 +26663,7 @@
     </p:spTree>
     <p:extLst>
       <p:ext uri="{BB962C8B-B14F-4D97-AF65-F5344CB8AC3E}">
-        <p14:creationId xmlns:p14="http://schemas.microsoft.com/office/powerpoint/2010/main" val="446114729"/>
+        <p14:creationId xmlns:p14="http://schemas.microsoft.com/office/powerpoint/2010/main" val="1285815076"/>
       </p:ext>
     </p:extLst>
   </p:cSld>
@@ -26682,7 +26694,7 @@
           <p:cNvPr id="2" name="Text 0">
             <a:extLst xmlns:a="http://schemas.openxmlformats.org/drawingml/2006/main">
               <a:ext uri="{FF2B5EF4-FFF2-40B4-BE49-F238E27FC236}">
-                <a16:creationId xmlns:a16="http://schemas.microsoft.com/office/drawing/2014/main" id="{B4C072F5-5CE8-415E-A421-E199580BB9A0}"/>
+                <a16:creationId xmlns:a16="http://schemas.microsoft.com/office/drawing/2014/main" id="{EAD86BB8-A928-47E1-9FD8-F486DA841EE9}"/>
               </a:ext>
             </a:extLst>
           </p:cNvPr>
@@ -26727,7 +26739,7 @@
           <p:cNvPr id="3" name="Text 1">
             <a:extLst xmlns:a="http://schemas.openxmlformats.org/drawingml/2006/main">
               <a:ext uri="{FF2B5EF4-FFF2-40B4-BE49-F238E27FC236}">
-                <a16:creationId xmlns:a16="http://schemas.microsoft.com/office/drawing/2014/main" id="{DB77507E-4692-4E0A-825B-2F9F7024A784}"/>
+                <a16:creationId xmlns:a16="http://schemas.microsoft.com/office/drawing/2014/main" id="{ADB68237-8E1D-410B-A7A1-C06F639D9061}"/>
               </a:ext>
             </a:extLst>
           </p:cNvPr>
@@ -26772,7 +26784,7 @@
           <p:cNvPr id="4" name="Text 2">
             <a:extLst xmlns:a="http://schemas.openxmlformats.org/drawingml/2006/main">
               <a:ext uri="{FF2B5EF4-FFF2-40B4-BE49-F238E27FC236}">
-                <a16:creationId xmlns:a16="http://schemas.microsoft.com/office/drawing/2014/main" id="{C374BD6D-423F-4738-98F3-8914A5158EE2}"/>
+                <a16:creationId xmlns:a16="http://schemas.microsoft.com/office/drawing/2014/main" id="{3AC25D7A-453B-4D39-9142-078D0E376ADC}"/>
               </a:ext>
             </a:extLst>
           </p:cNvPr>
@@ -26817,7 +26829,7 @@
           <p:cNvPr id="5" name="Text 3">
             <a:extLst xmlns:a="http://schemas.openxmlformats.org/drawingml/2006/main">
               <a:ext uri="{FF2B5EF4-FFF2-40B4-BE49-F238E27FC236}">
-                <a16:creationId xmlns:a16="http://schemas.microsoft.com/office/drawing/2014/main" id="{34B51FD3-6647-4A47-9838-7F4DA9EA034F}"/>
+                <a16:creationId xmlns:a16="http://schemas.microsoft.com/office/drawing/2014/main" id="{4E3F348D-5160-43D4-96DF-06831B35290F}"/>
               </a:ext>
             </a:extLst>
           </p:cNvPr>
@@ -26862,7 +26874,7 @@
           <p:cNvPr id="6" name="Shape 4">
             <a:extLst xmlns:a="http://schemas.openxmlformats.org/drawingml/2006/main">
               <a:ext uri="{FF2B5EF4-FFF2-40B4-BE49-F238E27FC236}">
-                <a16:creationId xmlns:a16="http://schemas.microsoft.com/office/drawing/2014/main" id="{3405B6A1-0A49-4564-BB5B-7E891D1D7A16}"/>
+                <a16:creationId xmlns:a16="http://schemas.microsoft.com/office/drawing/2014/main" id="{1087CF72-CADD-4FF5-AE96-3DD83B77EAF4}"/>
               </a:ext>
             </a:extLst>
           </p:cNvPr>
@@ -26909,7 +26921,7 @@
           <p:cNvPr id="7" name="Shape 5">
             <a:extLst xmlns:a="http://schemas.openxmlformats.org/drawingml/2006/main">
               <a:ext uri="{FF2B5EF4-FFF2-40B4-BE49-F238E27FC236}">
-                <a16:creationId xmlns:a16="http://schemas.microsoft.com/office/drawing/2014/main" id="{32B1933B-E569-4531-80AA-6ABAB86D98E6}"/>
+                <a16:creationId xmlns:a16="http://schemas.microsoft.com/office/drawing/2014/main" id="{CC38824C-D0CE-42C1-8ABC-E12260E5826C}"/>
               </a:ext>
             </a:extLst>
           </p:cNvPr>
@@ -26947,7 +26959,7 @@
           <p:cNvPr id="8" name="Text 6">
             <a:extLst xmlns:a="http://schemas.openxmlformats.org/drawingml/2006/main">
               <a:ext uri="{FF2B5EF4-FFF2-40B4-BE49-F238E27FC236}">
-                <a16:creationId xmlns:a16="http://schemas.microsoft.com/office/drawing/2014/main" id="{0E6DFF76-3B98-4692-90F7-C6E042D72F65}"/>
+                <a16:creationId xmlns:a16="http://schemas.microsoft.com/office/drawing/2014/main" id="{78E5C98B-FFC8-4E06-A8E2-45297BA3DA31}"/>
               </a:ext>
             </a:extLst>
           </p:cNvPr>
@@ -26992,7 +27004,7 @@
           <p:cNvPr id="9" name="Text 7">
             <a:extLst xmlns:a="http://schemas.openxmlformats.org/drawingml/2006/main">
               <a:ext uri="{FF2B5EF4-FFF2-40B4-BE49-F238E27FC236}">
-                <a16:creationId xmlns:a16="http://schemas.microsoft.com/office/drawing/2014/main" id="{4241D205-A4E3-41C8-9CAB-A4871F7AE2A3}"/>
+                <a16:creationId xmlns:a16="http://schemas.microsoft.com/office/drawing/2014/main" id="{E39C5D58-B007-4ACA-A61A-7E0039900E9C}"/>
               </a:ext>
             </a:extLst>
           </p:cNvPr>
@@ -27037,7 +27049,7 @@
           <p:cNvPr id="10" name="Text 8">
             <a:extLst xmlns:a="http://schemas.openxmlformats.org/drawingml/2006/main">
               <a:ext uri="{FF2B5EF4-FFF2-40B4-BE49-F238E27FC236}">
-                <a16:creationId xmlns:a16="http://schemas.microsoft.com/office/drawing/2014/main" id="{C3BF9783-B372-43D0-BD4F-B0A8575159DB}"/>
+                <a16:creationId xmlns:a16="http://schemas.microsoft.com/office/drawing/2014/main" id="{229074B2-9D66-46FF-AB05-462972B10B6A}"/>
               </a:ext>
             </a:extLst>
           </p:cNvPr>
@@ -27085,7 +27097,7 @@
           <p:cNvPr id="11" name="Shape 9">
             <a:extLst xmlns:a="http://schemas.openxmlformats.org/drawingml/2006/main">
               <a:ext uri="{FF2B5EF4-FFF2-40B4-BE49-F238E27FC236}">
-                <a16:creationId xmlns:a16="http://schemas.microsoft.com/office/drawing/2014/main" id="{EBD8B1E6-2146-4913-B1B8-70E4F4DA3D65}"/>
+                <a16:creationId xmlns:a16="http://schemas.microsoft.com/office/drawing/2014/main" id="{D48AFEF8-AF8C-4208-86F5-AD14188A8BB4}"/>
               </a:ext>
             </a:extLst>
           </p:cNvPr>
@@ -27132,7 +27144,7 @@
           <p:cNvPr id="12" name="Shape 10">
             <a:extLst xmlns:a="http://schemas.openxmlformats.org/drawingml/2006/main">
               <a:ext uri="{FF2B5EF4-FFF2-40B4-BE49-F238E27FC236}">
-                <a16:creationId xmlns:a16="http://schemas.microsoft.com/office/drawing/2014/main" id="{A85272D5-0C1E-42C4-A90B-CCC839B32D6B}"/>
+                <a16:creationId xmlns:a16="http://schemas.microsoft.com/office/drawing/2014/main" id="{748A67D1-F6FB-4089-98A2-4CBA7E1C6829}"/>
               </a:ext>
             </a:extLst>
           </p:cNvPr>
@@ -27170,7 +27182,7 @@
           <p:cNvPr id="13" name="Text 11">
             <a:extLst xmlns:a="http://schemas.openxmlformats.org/drawingml/2006/main">
               <a:ext uri="{FF2B5EF4-FFF2-40B4-BE49-F238E27FC236}">
-                <a16:creationId xmlns:a16="http://schemas.microsoft.com/office/drawing/2014/main" id="{79B4AB3D-5E7D-4114-8585-5B0B65A18643}"/>
+                <a16:creationId xmlns:a16="http://schemas.microsoft.com/office/drawing/2014/main" id="{1DE739D0-8D4F-4CA0-AAC1-0FDF3772FC90}"/>
               </a:ext>
             </a:extLst>
           </p:cNvPr>
@@ -27215,7 +27227,7 @@
           <p:cNvPr id="14" name="Text 12">
             <a:extLst xmlns:a="http://schemas.openxmlformats.org/drawingml/2006/main">
               <a:ext uri="{FF2B5EF4-FFF2-40B4-BE49-F238E27FC236}">
-                <a16:creationId xmlns:a16="http://schemas.microsoft.com/office/drawing/2014/main" id="{F76B10E5-2B4C-4C2B-ADED-D42DD92E5F60}"/>
+                <a16:creationId xmlns:a16="http://schemas.microsoft.com/office/drawing/2014/main" id="{E6F52145-6301-4977-BB21-701E0D409893}"/>
               </a:ext>
             </a:extLst>
           </p:cNvPr>
@@ -27260,7 +27272,7 @@
           <p:cNvPr id="15" name="Text 13">
             <a:extLst xmlns:a="http://schemas.openxmlformats.org/drawingml/2006/main">
               <a:ext uri="{FF2B5EF4-FFF2-40B4-BE49-F238E27FC236}">
-                <a16:creationId xmlns:a16="http://schemas.microsoft.com/office/drawing/2014/main" id="{720AE5E3-AEA3-43C7-A17B-304F775FD749}"/>
+                <a16:creationId xmlns:a16="http://schemas.microsoft.com/office/drawing/2014/main" id="{AC388DFA-B767-44C1-8B4A-B676146178D7}"/>
               </a:ext>
             </a:extLst>
           </p:cNvPr>
@@ -27308,7 +27320,7 @@
           <p:cNvPr id="16" name="Shape 14">
             <a:extLst xmlns:a="http://schemas.openxmlformats.org/drawingml/2006/main">
               <a:ext uri="{FF2B5EF4-FFF2-40B4-BE49-F238E27FC236}">
-                <a16:creationId xmlns:a16="http://schemas.microsoft.com/office/drawing/2014/main" id="{6E074597-7376-4448-BE86-24F2B10970A0}"/>
+                <a16:creationId xmlns:a16="http://schemas.microsoft.com/office/drawing/2014/main" id="{65065943-5C19-410C-AE99-5545666295E5}"/>
               </a:ext>
             </a:extLst>
           </p:cNvPr>
@@ -27355,7 +27367,7 @@
           <p:cNvPr id="17" name="Shape 15">
             <a:extLst xmlns:a="http://schemas.openxmlformats.org/drawingml/2006/main">
               <a:ext uri="{FF2B5EF4-FFF2-40B4-BE49-F238E27FC236}">
-                <a16:creationId xmlns:a16="http://schemas.microsoft.com/office/drawing/2014/main" id="{4C4F8F79-F16C-48A5-829B-365AFC7F07CE}"/>
+                <a16:creationId xmlns:a16="http://schemas.microsoft.com/office/drawing/2014/main" id="{23833885-043C-4410-809E-E884FDC24EB8}"/>
               </a:ext>
             </a:extLst>
           </p:cNvPr>
@@ -27393,7 +27405,7 @@
           <p:cNvPr id="18" name="Text 16">
             <a:extLst xmlns:a="http://schemas.openxmlformats.org/drawingml/2006/main">
               <a:ext uri="{FF2B5EF4-FFF2-40B4-BE49-F238E27FC236}">
-                <a16:creationId xmlns:a16="http://schemas.microsoft.com/office/drawing/2014/main" id="{BEDE486A-DC71-4A70-843C-1760CEF38433}"/>
+                <a16:creationId xmlns:a16="http://schemas.microsoft.com/office/drawing/2014/main" id="{7F02D83E-76EC-4D8F-9C7D-27E125C03990}"/>
               </a:ext>
             </a:extLst>
           </p:cNvPr>
@@ -27438,7 +27450,7 @@
           <p:cNvPr id="19" name="Text 17">
             <a:extLst xmlns:a="http://schemas.openxmlformats.org/drawingml/2006/main">
               <a:ext uri="{FF2B5EF4-FFF2-40B4-BE49-F238E27FC236}">
-                <a16:creationId xmlns:a16="http://schemas.microsoft.com/office/drawing/2014/main" id="{C9343C5C-FD14-4A1E-92EA-91EA4EEC26A9}"/>
+                <a16:creationId xmlns:a16="http://schemas.microsoft.com/office/drawing/2014/main" id="{5BC2B584-9EB1-46D0-B63A-6239D861E186}"/>
               </a:ext>
             </a:extLst>
           </p:cNvPr>
@@ -27483,7 +27495,7 @@
           <p:cNvPr id="20" name="Text 18">
             <a:extLst xmlns:a="http://schemas.openxmlformats.org/drawingml/2006/main">
               <a:ext uri="{FF2B5EF4-FFF2-40B4-BE49-F238E27FC236}">
-                <a16:creationId xmlns:a16="http://schemas.microsoft.com/office/drawing/2014/main" id="{DED9218E-68F8-4BDE-8188-2A54E393F39F}"/>
+                <a16:creationId xmlns:a16="http://schemas.microsoft.com/office/drawing/2014/main" id="{34ECC6B5-058F-4941-B844-FA82C997F002}"/>
               </a:ext>
             </a:extLst>
           </p:cNvPr>
@@ -27531,7 +27543,7 @@
           <p:cNvPr id="21" name="Shape 19">
             <a:extLst xmlns:a="http://schemas.openxmlformats.org/drawingml/2006/main">
               <a:ext uri="{FF2B5EF4-FFF2-40B4-BE49-F238E27FC236}">
-                <a16:creationId xmlns:a16="http://schemas.microsoft.com/office/drawing/2014/main" id="{04F2EC26-FBD4-469C-9C4F-58C1B3267A01}"/>
+                <a16:creationId xmlns:a16="http://schemas.microsoft.com/office/drawing/2014/main" id="{BD2F8A71-C3B4-46DF-8FC8-4790FC3F5B4A}"/>
               </a:ext>
             </a:extLst>
           </p:cNvPr>
@@ -27578,7 +27590,7 @@
           <p:cNvPr id="22" name="Shape 20">
             <a:extLst xmlns:a="http://schemas.openxmlformats.org/drawingml/2006/main">
               <a:ext uri="{FF2B5EF4-FFF2-40B4-BE49-F238E27FC236}">
-                <a16:creationId xmlns:a16="http://schemas.microsoft.com/office/drawing/2014/main" id="{C4A40612-0E1F-4B9B-8590-E3D50689D758}"/>
+                <a16:creationId xmlns:a16="http://schemas.microsoft.com/office/drawing/2014/main" id="{B87C6622-3F5A-403F-B191-52D9061D1452}"/>
               </a:ext>
             </a:extLst>
           </p:cNvPr>
@@ -27616,7 +27628,7 @@
           <p:cNvPr id="23" name="Text 21">
             <a:extLst xmlns:a="http://schemas.openxmlformats.org/drawingml/2006/main">
               <a:ext uri="{FF2B5EF4-FFF2-40B4-BE49-F238E27FC236}">
-                <a16:creationId xmlns:a16="http://schemas.microsoft.com/office/drawing/2014/main" id="{CC5D72E3-9FFE-4EE9-8F69-2DB5AD264E6A}"/>
+                <a16:creationId xmlns:a16="http://schemas.microsoft.com/office/drawing/2014/main" id="{4F72AB5C-39C9-41A2-BE04-8C55F7D6C2A7}"/>
               </a:ext>
             </a:extLst>
           </p:cNvPr>
@@ -27661,7 +27673,7 @@
           <p:cNvPr id="24" name="Text 22">
             <a:extLst xmlns:a="http://schemas.openxmlformats.org/drawingml/2006/main">
               <a:ext uri="{FF2B5EF4-FFF2-40B4-BE49-F238E27FC236}">
-                <a16:creationId xmlns:a16="http://schemas.microsoft.com/office/drawing/2014/main" id="{9B082F38-945F-441B-9E76-F2CB6CDF84D9}"/>
+                <a16:creationId xmlns:a16="http://schemas.microsoft.com/office/drawing/2014/main" id="{EA422D2E-C140-4368-90A0-AC8B198CD889}"/>
               </a:ext>
             </a:extLst>
           </p:cNvPr>
@@ -27706,7 +27718,7 @@
           <p:cNvPr id="25" name="Text 23">
             <a:extLst xmlns:a="http://schemas.openxmlformats.org/drawingml/2006/main">
               <a:ext uri="{FF2B5EF4-FFF2-40B4-BE49-F238E27FC236}">
-                <a16:creationId xmlns:a16="http://schemas.microsoft.com/office/drawing/2014/main" id="{C9D65801-9FA6-481B-984D-C606C1615879}"/>
+                <a16:creationId xmlns:a16="http://schemas.microsoft.com/office/drawing/2014/main" id="{7B720A3B-9A61-4567-AC17-173AAB46A16A}"/>
               </a:ext>
             </a:extLst>
           </p:cNvPr>
@@ -27754,7 +27766,7 @@
           <p:cNvPr id="26" name="Shape 24">
             <a:extLst xmlns:a="http://schemas.openxmlformats.org/drawingml/2006/main">
               <a:ext uri="{FF2B5EF4-FFF2-40B4-BE49-F238E27FC236}">
-                <a16:creationId xmlns:a16="http://schemas.microsoft.com/office/drawing/2014/main" id="{C1D47F97-6FA3-4EBF-A1C9-97A878E4B03E}"/>
+                <a16:creationId xmlns:a16="http://schemas.microsoft.com/office/drawing/2014/main" id="{6266EE77-EA99-4114-987B-8DF145C77DC2}"/>
               </a:ext>
             </a:extLst>
           </p:cNvPr>
@@ -27801,7 +27813,7 @@
           <p:cNvPr id="27" name="Text 25">
             <a:extLst xmlns:a="http://schemas.openxmlformats.org/drawingml/2006/main">
               <a:ext uri="{FF2B5EF4-FFF2-40B4-BE49-F238E27FC236}">
-                <a16:creationId xmlns:a16="http://schemas.microsoft.com/office/drawing/2014/main" id="{AB8BA483-7166-4D19-BE39-5A7108E12B69}"/>
+                <a16:creationId xmlns:a16="http://schemas.microsoft.com/office/drawing/2014/main" id="{8263CA02-728A-4F14-A647-044DD8FCA8BA}"/>
               </a:ext>
             </a:extLst>
           </p:cNvPr>
@@ -27858,7 +27870,7 @@
     </p:spTree>
     <p:extLst>
       <p:ext uri="{BB962C8B-B14F-4D97-AF65-F5344CB8AC3E}">
-        <p14:creationId xmlns:p14="http://schemas.microsoft.com/office/powerpoint/2010/main" val="2144165766"/>
+        <p14:creationId xmlns:p14="http://schemas.microsoft.com/office/powerpoint/2010/main" val="683825646"/>
       </p:ext>
     </p:extLst>
   </p:cSld>
@@ -27889,7 +27901,7 @@
           <p:cNvPr id="2" name="Text 0">
             <a:extLst xmlns:a="http://schemas.openxmlformats.org/drawingml/2006/main">
               <a:ext uri="{FF2B5EF4-FFF2-40B4-BE49-F238E27FC236}">
-                <a16:creationId xmlns:a16="http://schemas.microsoft.com/office/drawing/2014/main" id="{13923E5F-B91B-41D3-B644-47F10C8D3EBC}"/>
+                <a16:creationId xmlns:a16="http://schemas.microsoft.com/office/drawing/2014/main" id="{72D95AFB-8AE6-4466-8949-3615173B1118}"/>
               </a:ext>
             </a:extLst>
           </p:cNvPr>
@@ -27934,7 +27946,7 @@
           <p:cNvPr id="3" name="Text 1">
             <a:extLst xmlns:a="http://schemas.openxmlformats.org/drawingml/2006/main">
               <a:ext uri="{FF2B5EF4-FFF2-40B4-BE49-F238E27FC236}">
-                <a16:creationId xmlns:a16="http://schemas.microsoft.com/office/drawing/2014/main" id="{DE773F33-8102-47EA-BABF-4B3F2BD3AE53}"/>
+                <a16:creationId xmlns:a16="http://schemas.microsoft.com/office/drawing/2014/main" id="{1A06241F-0A2B-4115-B073-50D5A01420EF}"/>
               </a:ext>
             </a:extLst>
           </p:cNvPr>
@@ -27979,7 +27991,7 @@
           <p:cNvPr id="4" name="Text 2">
             <a:extLst xmlns:a="http://schemas.openxmlformats.org/drawingml/2006/main">
               <a:ext uri="{FF2B5EF4-FFF2-40B4-BE49-F238E27FC236}">
-                <a16:creationId xmlns:a16="http://schemas.microsoft.com/office/drawing/2014/main" id="{75ABDB25-B6CE-4CFF-B6BE-4C1929137D4D}"/>
+                <a16:creationId xmlns:a16="http://schemas.microsoft.com/office/drawing/2014/main" id="{F223B578-1B13-42DA-B0BA-2D85DD7EA42A}"/>
               </a:ext>
             </a:extLst>
           </p:cNvPr>
@@ -28024,7 +28036,7 @@
           <p:cNvPr id="5" name="Text 3">
             <a:extLst xmlns:a="http://schemas.openxmlformats.org/drawingml/2006/main">
               <a:ext uri="{FF2B5EF4-FFF2-40B4-BE49-F238E27FC236}">
-                <a16:creationId xmlns:a16="http://schemas.microsoft.com/office/drawing/2014/main" id="{3BFA059A-864A-48F6-B0EA-0EC95B8303C4}"/>
+                <a16:creationId xmlns:a16="http://schemas.microsoft.com/office/drawing/2014/main" id="{240BE1AE-7C2B-48BB-98C1-EFE3C5FB3035}"/>
               </a:ext>
             </a:extLst>
           </p:cNvPr>
@@ -28069,7 +28081,7 @@
           <p:cNvPr id="6" name="Shape 4">
             <a:extLst xmlns:a="http://schemas.openxmlformats.org/drawingml/2006/main">
               <a:ext uri="{FF2B5EF4-FFF2-40B4-BE49-F238E27FC236}">
-                <a16:creationId xmlns:a16="http://schemas.microsoft.com/office/drawing/2014/main" id="{FB9FAB05-95DD-4001-9D2F-94833203DBD4}"/>
+                <a16:creationId xmlns:a16="http://schemas.microsoft.com/office/drawing/2014/main" id="{28E55AB3-542A-466D-8EBA-1373118B9A04}"/>
               </a:ext>
             </a:extLst>
           </p:cNvPr>
@@ -28116,7 +28128,7 @@
           <p:cNvPr id="7" name="Text 5">
             <a:extLst xmlns:a="http://schemas.openxmlformats.org/drawingml/2006/main">
               <a:ext uri="{FF2B5EF4-FFF2-40B4-BE49-F238E27FC236}">
-                <a16:creationId xmlns:a16="http://schemas.microsoft.com/office/drawing/2014/main" id="{CCA6DF7B-9FB2-4ADD-8227-B7312390653F}"/>
+                <a16:creationId xmlns:a16="http://schemas.microsoft.com/office/drawing/2014/main" id="{3AADC727-5119-44AF-B85D-4FD69F9AF8BF}"/>
               </a:ext>
             </a:extLst>
           </p:cNvPr>
@@ -28164,7 +28176,7 @@
           <p:cNvPr id="8" name="Text 6">
             <a:extLst xmlns:a="http://schemas.openxmlformats.org/drawingml/2006/main">
               <a:ext uri="{FF2B5EF4-FFF2-40B4-BE49-F238E27FC236}">
-                <a16:creationId xmlns:a16="http://schemas.microsoft.com/office/drawing/2014/main" id="{9511D772-C65C-4A6D-B976-1E5C8567564E}"/>
+                <a16:creationId xmlns:a16="http://schemas.microsoft.com/office/drawing/2014/main" id="{ED3ACC16-F9D9-419B-95C6-380A13949066}"/>
               </a:ext>
             </a:extLst>
           </p:cNvPr>
@@ -28209,7 +28221,7 @@
           <p:cNvPr id="9" name="Shape 7">
             <a:extLst xmlns:a="http://schemas.openxmlformats.org/drawingml/2006/main">
               <a:ext uri="{FF2B5EF4-FFF2-40B4-BE49-F238E27FC236}">
-                <a16:creationId xmlns:a16="http://schemas.microsoft.com/office/drawing/2014/main" id="{BDE9E2FC-50D3-4B79-9A60-99B201C14570}"/>
+                <a16:creationId xmlns:a16="http://schemas.microsoft.com/office/drawing/2014/main" id="{6379DD43-0A50-4B7F-BDB3-A8C686E7D4F1}"/>
               </a:ext>
             </a:extLst>
           </p:cNvPr>
@@ -28247,7 +28259,7 @@
           <p:cNvPr id="10" name="Text 8">
             <a:extLst xmlns:a="http://schemas.openxmlformats.org/drawingml/2006/main">
               <a:ext uri="{FF2B5EF4-FFF2-40B4-BE49-F238E27FC236}">
-                <a16:creationId xmlns:a16="http://schemas.microsoft.com/office/drawing/2014/main" id="{B56974C4-B5EE-4EE0-8990-81F113F70833}"/>
+                <a16:creationId xmlns:a16="http://schemas.microsoft.com/office/drawing/2014/main" id="{6EC6BB59-CF27-4030-A38A-9D4AC63DBAB9}"/>
               </a:ext>
             </a:extLst>
           </p:cNvPr>
@@ -28281,7 +28293,7 @@
           <p:cNvPr id="11" name="Text 9">
             <a:extLst xmlns:a="http://schemas.openxmlformats.org/drawingml/2006/main">
               <a:ext uri="{FF2B5EF4-FFF2-40B4-BE49-F238E27FC236}">
-                <a16:creationId xmlns:a16="http://schemas.microsoft.com/office/drawing/2014/main" id="{4FF58721-F938-431C-9822-A787E19964D2}"/>
+                <a16:creationId xmlns:a16="http://schemas.microsoft.com/office/drawing/2014/main" id="{8F0E9884-1F37-4A1C-866E-10F3BEE83D78}"/>
               </a:ext>
             </a:extLst>
           </p:cNvPr>
@@ -28326,7 +28338,7 @@
           <p:cNvPr id="12" name="Text 10">
             <a:extLst xmlns:a="http://schemas.openxmlformats.org/drawingml/2006/main">
               <a:ext uri="{FF2B5EF4-FFF2-40B4-BE49-F238E27FC236}">
-                <a16:creationId xmlns:a16="http://schemas.microsoft.com/office/drawing/2014/main" id="{F458486F-484F-4AEC-B2CD-0F88D16CC086}"/>
+                <a16:creationId xmlns:a16="http://schemas.microsoft.com/office/drawing/2014/main" id="{31AB62BF-D857-461B-BB61-6104BA508159}"/>
               </a:ext>
             </a:extLst>
           </p:cNvPr>
@@ -28374,7 +28386,7 @@
           <p:cNvPr id="13" name="Shape 11">
             <a:extLst xmlns:a="http://schemas.openxmlformats.org/drawingml/2006/main">
               <a:ext uri="{FF2B5EF4-FFF2-40B4-BE49-F238E27FC236}">
-                <a16:creationId xmlns:a16="http://schemas.microsoft.com/office/drawing/2014/main" id="{9BD34062-6848-48FE-919E-02FC5A5649B9}"/>
+                <a16:creationId xmlns:a16="http://schemas.microsoft.com/office/drawing/2014/main" id="{69E43413-A9CA-4BCA-8882-75E94E197E62}"/>
               </a:ext>
             </a:extLst>
           </p:cNvPr>
@@ -28410,7 +28422,7 @@
           <p:cNvPr id="14" name="Shape 12">
             <a:extLst xmlns:a="http://schemas.openxmlformats.org/drawingml/2006/main">
               <a:ext uri="{FF2B5EF4-FFF2-40B4-BE49-F238E27FC236}">
-                <a16:creationId xmlns:a16="http://schemas.microsoft.com/office/drawing/2014/main" id="{C77174E1-3E3C-4846-A12D-B22FEB8DF511}"/>
+                <a16:creationId xmlns:a16="http://schemas.microsoft.com/office/drawing/2014/main" id="{AB367824-5F3A-4635-A507-E5479E7DF0CB}"/>
               </a:ext>
             </a:extLst>
           </p:cNvPr>
@@ -28448,7 +28460,7 @@
           <p:cNvPr id="15" name="Text 13">
             <a:extLst xmlns:a="http://schemas.openxmlformats.org/drawingml/2006/main">
               <a:ext uri="{FF2B5EF4-FFF2-40B4-BE49-F238E27FC236}">
-                <a16:creationId xmlns:a16="http://schemas.microsoft.com/office/drawing/2014/main" id="{42B931D3-8355-4CBA-8DEF-DE86BF9CA6E6}"/>
+                <a16:creationId xmlns:a16="http://schemas.microsoft.com/office/drawing/2014/main" id="{8EDDA1AD-F287-4D32-9A6B-05D39B601415}"/>
               </a:ext>
             </a:extLst>
           </p:cNvPr>
@@ -28482,7 +28494,7 @@
           <p:cNvPr id="16" name="Text 14">
             <a:extLst xmlns:a="http://schemas.openxmlformats.org/drawingml/2006/main">
               <a:ext uri="{FF2B5EF4-FFF2-40B4-BE49-F238E27FC236}">
-                <a16:creationId xmlns:a16="http://schemas.microsoft.com/office/drawing/2014/main" id="{9806CCB2-EA9F-4C3F-976A-649A93E97EE9}"/>
+                <a16:creationId xmlns:a16="http://schemas.microsoft.com/office/drawing/2014/main" id="{1653138E-EA87-4761-9F9B-5B0CBC120FF1}"/>
               </a:ext>
             </a:extLst>
           </p:cNvPr>
@@ -28527,7 +28539,7 @@
           <p:cNvPr id="17" name="Text 15">
             <a:extLst xmlns:a="http://schemas.openxmlformats.org/drawingml/2006/main">
               <a:ext uri="{FF2B5EF4-FFF2-40B4-BE49-F238E27FC236}">
-                <a16:creationId xmlns:a16="http://schemas.microsoft.com/office/drawing/2014/main" id="{A4B5E8E9-B431-47E2-8B16-B4B2520C4A1C}"/>
+                <a16:creationId xmlns:a16="http://schemas.microsoft.com/office/drawing/2014/main" id="{7EC061BD-BC76-45F1-9DF4-86CCB6111DBD}"/>
               </a:ext>
             </a:extLst>
           </p:cNvPr>
@@ -28565,7 +28577,7 @@
                 <a:ea typeface="Calibri"/>
                 <a:cs typeface="Calibri"/>
               </a:rPr>
-              <a:t>On unseen real records, how do partial GRC, manual composition, and GCS trade factual quality against requests, tokens, latency, and cost?</a:t>
+              <a:t>Across distinct real-record workflows, do guarded programs preserve exact outcomes while reducing requests, tokens, latency, and cost?</a:t>
             </a:r>
           </a:p>
         </p:txBody>
@@ -28575,7 +28587,7 @@
           <p:cNvPr id="18" name="Shape 16">
             <a:extLst xmlns:a="http://schemas.openxmlformats.org/drawingml/2006/main">
               <a:ext uri="{FF2B5EF4-FFF2-40B4-BE49-F238E27FC236}">
-                <a16:creationId xmlns:a16="http://schemas.microsoft.com/office/drawing/2014/main" id="{F0A108E1-994C-45BD-AAD4-8C2512EDDC84}"/>
+                <a16:creationId xmlns:a16="http://schemas.microsoft.com/office/drawing/2014/main" id="{0D150916-318C-4765-B63F-DA2D13C76377}"/>
               </a:ext>
             </a:extLst>
           </p:cNvPr>
@@ -28611,7 +28623,7 @@
           <p:cNvPr id="19" name="Shape 17">
             <a:extLst xmlns:a="http://schemas.openxmlformats.org/drawingml/2006/main">
               <a:ext uri="{FF2B5EF4-FFF2-40B4-BE49-F238E27FC236}">
-                <a16:creationId xmlns:a16="http://schemas.microsoft.com/office/drawing/2014/main" id="{46FE50D0-385F-4328-91C7-6C33BE5CB929}"/>
+                <a16:creationId xmlns:a16="http://schemas.microsoft.com/office/drawing/2014/main" id="{D1F46BE7-5361-4270-AB46-ED9C747D5375}"/>
               </a:ext>
             </a:extLst>
           </p:cNvPr>
@@ -28649,7 +28661,7 @@
           <p:cNvPr id="20" name="Text 18">
             <a:extLst xmlns:a="http://schemas.openxmlformats.org/drawingml/2006/main">
               <a:ext uri="{FF2B5EF4-FFF2-40B4-BE49-F238E27FC236}">
-                <a16:creationId xmlns:a16="http://schemas.microsoft.com/office/drawing/2014/main" id="{77FDC197-A68C-4BC6-8EB1-78240D46B8BB}"/>
+                <a16:creationId xmlns:a16="http://schemas.microsoft.com/office/drawing/2014/main" id="{958F6846-8928-45FC-8599-D36B024297D7}"/>
               </a:ext>
             </a:extLst>
           </p:cNvPr>
@@ -28683,7 +28695,7 @@
           <p:cNvPr id="21" name="Text 19">
             <a:extLst xmlns:a="http://schemas.openxmlformats.org/drawingml/2006/main">
               <a:ext uri="{FF2B5EF4-FFF2-40B4-BE49-F238E27FC236}">
-                <a16:creationId xmlns:a16="http://schemas.microsoft.com/office/drawing/2014/main" id="{D4017AD7-631E-43F4-A617-3E84A4D2706E}"/>
+                <a16:creationId xmlns:a16="http://schemas.microsoft.com/office/drawing/2014/main" id="{42EFFED7-C650-4A96-93F3-95AFF1F221AF}"/>
               </a:ext>
             </a:extLst>
           </p:cNvPr>
@@ -28728,7 +28740,7 @@
           <p:cNvPr id="22" name="Text 20">
             <a:extLst xmlns:a="http://schemas.openxmlformats.org/drawingml/2006/main">
               <a:ext uri="{FF2B5EF4-FFF2-40B4-BE49-F238E27FC236}">
-                <a16:creationId xmlns:a16="http://schemas.microsoft.com/office/drawing/2014/main" id="{754ED15A-860E-419B-A13C-214E4EF15BB8}"/>
+                <a16:creationId xmlns:a16="http://schemas.microsoft.com/office/drawing/2014/main" id="{815134BB-5B22-4571-BDCA-DAB7A525F027}"/>
               </a:ext>
             </a:extLst>
           </p:cNvPr>
@@ -28776,7 +28788,7 @@
           <p:cNvPr id="23" name="Shape 21">
             <a:extLst xmlns:a="http://schemas.openxmlformats.org/drawingml/2006/main">
               <a:ext uri="{FF2B5EF4-FFF2-40B4-BE49-F238E27FC236}">
-                <a16:creationId xmlns:a16="http://schemas.microsoft.com/office/drawing/2014/main" id="{B94CD497-38D3-4B91-9F04-37B6A9C1B3B1}"/>
+                <a16:creationId xmlns:a16="http://schemas.microsoft.com/office/drawing/2014/main" id="{65BEED18-82F7-44DD-9166-FBE0D57D9A5C}"/>
               </a:ext>
             </a:extLst>
           </p:cNvPr>
@@ -28812,7 +28824,7 @@
           <p:cNvPr id="24" name="Shape 22">
             <a:extLst xmlns:a="http://schemas.openxmlformats.org/drawingml/2006/main">
               <a:ext uri="{FF2B5EF4-FFF2-40B4-BE49-F238E27FC236}">
-                <a16:creationId xmlns:a16="http://schemas.microsoft.com/office/drawing/2014/main" id="{E1A02C66-D0C7-46F5-A2B7-DF5B61B85859}"/>
+                <a16:creationId xmlns:a16="http://schemas.microsoft.com/office/drawing/2014/main" id="{B8286263-6EE6-41E1-A568-2B907528B42E}"/>
               </a:ext>
             </a:extLst>
           </p:cNvPr>
@@ -28850,7 +28862,7 @@
           <p:cNvPr id="25" name="Text 23">
             <a:extLst xmlns:a="http://schemas.openxmlformats.org/drawingml/2006/main">
               <a:ext uri="{FF2B5EF4-FFF2-40B4-BE49-F238E27FC236}">
-                <a16:creationId xmlns:a16="http://schemas.microsoft.com/office/drawing/2014/main" id="{9DDE1525-6C4D-4EFB-BB6D-4D1F0D0D24B2}"/>
+                <a16:creationId xmlns:a16="http://schemas.microsoft.com/office/drawing/2014/main" id="{81A48F54-8F2E-41C7-A24B-81E15F09D425}"/>
               </a:ext>
             </a:extLst>
           </p:cNvPr>
@@ -28884,7 +28896,7 @@
           <p:cNvPr id="26" name="Text 24">
             <a:extLst xmlns:a="http://schemas.openxmlformats.org/drawingml/2006/main">
               <a:ext uri="{FF2B5EF4-FFF2-40B4-BE49-F238E27FC236}">
-                <a16:creationId xmlns:a16="http://schemas.microsoft.com/office/drawing/2014/main" id="{A6408CB3-9BC6-4AE6-A642-63D6807A33CD}"/>
+                <a16:creationId xmlns:a16="http://schemas.microsoft.com/office/drawing/2014/main" id="{5BCCE6C3-D073-4984-9DB9-E6C7A6B69F81}"/>
               </a:ext>
             </a:extLst>
           </p:cNvPr>
@@ -28929,7 +28941,7 @@
           <p:cNvPr id="27" name="Text 25">
             <a:extLst xmlns:a="http://schemas.openxmlformats.org/drawingml/2006/main">
               <a:ext uri="{FF2B5EF4-FFF2-40B4-BE49-F238E27FC236}">
-                <a16:creationId xmlns:a16="http://schemas.microsoft.com/office/drawing/2014/main" id="{CC2E983E-5FB2-40AE-8AD5-5CBF564F18C0}"/>
+                <a16:creationId xmlns:a16="http://schemas.microsoft.com/office/drawing/2014/main" id="{40F2FD10-0019-4C21-BFE9-70357821088D}"/>
               </a:ext>
             </a:extLst>
           </p:cNvPr>
@@ -28977,7 +28989,7 @@
           <p:cNvPr id="28" name="Shape 26">
             <a:extLst xmlns:a="http://schemas.openxmlformats.org/drawingml/2006/main">
               <a:ext uri="{FF2B5EF4-FFF2-40B4-BE49-F238E27FC236}">
-                <a16:creationId xmlns:a16="http://schemas.microsoft.com/office/drawing/2014/main" id="{B9164606-A277-45F0-95FA-045F3BD2301B}"/>
+                <a16:creationId xmlns:a16="http://schemas.microsoft.com/office/drawing/2014/main" id="{BD43A639-7BE4-4DAC-8868-54722CCABD73}"/>
               </a:ext>
             </a:extLst>
           </p:cNvPr>
@@ -29013,7 +29025,7 @@
           <p:cNvPr id="29" name="Shape 27">
             <a:extLst xmlns:a="http://schemas.openxmlformats.org/drawingml/2006/main">
               <a:ext uri="{FF2B5EF4-FFF2-40B4-BE49-F238E27FC236}">
-                <a16:creationId xmlns:a16="http://schemas.microsoft.com/office/drawing/2014/main" id="{7DAB6CDF-CB73-49C2-BCF6-71A7DA143A95}"/>
+                <a16:creationId xmlns:a16="http://schemas.microsoft.com/office/drawing/2014/main" id="{BE3A4F21-0E7C-4ED0-BCC7-9A6FCB037E6E}"/>
               </a:ext>
             </a:extLst>
           </p:cNvPr>
@@ -29051,7 +29063,7 @@
           <p:cNvPr id="30" name="Text 28">
             <a:extLst xmlns:a="http://schemas.openxmlformats.org/drawingml/2006/main">
               <a:ext uri="{FF2B5EF4-FFF2-40B4-BE49-F238E27FC236}">
-                <a16:creationId xmlns:a16="http://schemas.microsoft.com/office/drawing/2014/main" id="{16AF695A-0165-423C-98D6-F6933501B421}"/>
+                <a16:creationId xmlns:a16="http://schemas.microsoft.com/office/drawing/2014/main" id="{870D68BB-BEF7-4C7C-8343-961152F4FFF0}"/>
               </a:ext>
             </a:extLst>
           </p:cNvPr>
@@ -29085,7 +29097,7 @@
           <p:cNvPr id="31" name="Text 29">
             <a:extLst xmlns:a="http://schemas.openxmlformats.org/drawingml/2006/main">
               <a:ext uri="{FF2B5EF4-FFF2-40B4-BE49-F238E27FC236}">
-                <a16:creationId xmlns:a16="http://schemas.microsoft.com/office/drawing/2014/main" id="{032B7A32-6CB2-4C92-9CE3-365FD41C02DA}"/>
+                <a16:creationId xmlns:a16="http://schemas.microsoft.com/office/drawing/2014/main" id="{22D63AE2-0FA7-45DF-8CBA-7ECA7F9296D1}"/>
               </a:ext>
             </a:extLst>
           </p:cNvPr>
@@ -29130,7 +29142,7 @@
           <p:cNvPr id="32" name="Text 30">
             <a:extLst xmlns:a="http://schemas.openxmlformats.org/drawingml/2006/main">
               <a:ext uri="{FF2B5EF4-FFF2-40B4-BE49-F238E27FC236}">
-                <a16:creationId xmlns:a16="http://schemas.microsoft.com/office/drawing/2014/main" id="{FDDF5AB9-1681-4DBD-AAD7-F5BFFA9A1134}"/>
+                <a16:creationId xmlns:a16="http://schemas.microsoft.com/office/drawing/2014/main" id="{534722D8-1E3F-4FB0-8347-BACA267D1584}"/>
               </a:ext>
             </a:extLst>
           </p:cNvPr>
@@ -29176,7 +29188,7 @@
     </p:spTree>
     <p:extLst>
       <p:ext uri="{BB962C8B-B14F-4D97-AF65-F5344CB8AC3E}">
-        <p14:creationId xmlns:p14="http://schemas.microsoft.com/office/powerpoint/2010/main" val="931679653"/>
+        <p14:creationId xmlns:p14="http://schemas.microsoft.com/office/powerpoint/2010/main" val="1158838338"/>
       </p:ext>
     </p:extLst>
   </p:cSld>
@@ -29207,7 +29219,7 @@
           <p:cNvPr id="2" name="Text 0">
             <a:extLst xmlns:a="http://schemas.openxmlformats.org/drawingml/2006/main">
               <a:ext uri="{FF2B5EF4-FFF2-40B4-BE49-F238E27FC236}">
-                <a16:creationId xmlns:a16="http://schemas.microsoft.com/office/drawing/2014/main" id="{8AA70111-5E4E-4FE9-AF23-C13FE02DEFAD}"/>
+                <a16:creationId xmlns:a16="http://schemas.microsoft.com/office/drawing/2014/main" id="{4AB02627-CEC6-4EAF-A934-19E7DD880DF0}"/>
               </a:ext>
             </a:extLst>
           </p:cNvPr>
@@ -29252,7 +29264,7 @@
           <p:cNvPr id="3" name="Text 1">
             <a:extLst xmlns:a="http://schemas.openxmlformats.org/drawingml/2006/main">
               <a:ext uri="{FF2B5EF4-FFF2-40B4-BE49-F238E27FC236}">
-                <a16:creationId xmlns:a16="http://schemas.microsoft.com/office/drawing/2014/main" id="{A3B07FC3-99E1-4C15-84B0-63500B147FA3}"/>
+                <a16:creationId xmlns:a16="http://schemas.microsoft.com/office/drawing/2014/main" id="{16626511-C84A-4E01-94BE-FF62E207F845}"/>
               </a:ext>
             </a:extLst>
           </p:cNvPr>
@@ -29297,7 +29309,7 @@
           <p:cNvPr id="4" name="Text 2">
             <a:extLst xmlns:a="http://schemas.openxmlformats.org/drawingml/2006/main">
               <a:ext uri="{FF2B5EF4-FFF2-40B4-BE49-F238E27FC236}">
-                <a16:creationId xmlns:a16="http://schemas.microsoft.com/office/drawing/2014/main" id="{044392C5-65B6-402D-B6C9-A05A25F1D543}"/>
+                <a16:creationId xmlns:a16="http://schemas.microsoft.com/office/drawing/2014/main" id="{1AD680FF-1D1B-4A8C-BE29-A05432C91647}"/>
               </a:ext>
             </a:extLst>
           </p:cNvPr>
@@ -29342,7 +29354,7 @@
           <p:cNvPr id="5" name="Text 3">
             <a:extLst xmlns:a="http://schemas.openxmlformats.org/drawingml/2006/main">
               <a:ext uri="{FF2B5EF4-FFF2-40B4-BE49-F238E27FC236}">
-                <a16:creationId xmlns:a16="http://schemas.microsoft.com/office/drawing/2014/main" id="{065D9595-02EF-4CF8-8CDD-3AA751C503C2}"/>
+                <a16:creationId xmlns:a16="http://schemas.microsoft.com/office/drawing/2014/main" id="{511842C5-B1C9-459A-A377-ECE54C6EA63C}"/>
               </a:ext>
             </a:extLst>
           </p:cNvPr>
@@ -29387,7 +29399,7 @@
           <p:cNvPr id="6" name="Shape 4">
             <a:extLst xmlns:a="http://schemas.openxmlformats.org/drawingml/2006/main">
               <a:ext uri="{FF2B5EF4-FFF2-40B4-BE49-F238E27FC236}">
-                <a16:creationId xmlns:a16="http://schemas.microsoft.com/office/drawing/2014/main" id="{CDCA4D72-2676-4DB0-9C83-042B8736842B}"/>
+                <a16:creationId xmlns:a16="http://schemas.microsoft.com/office/drawing/2014/main" id="{E442969A-3F6D-456E-86D2-9CBAE806EEF3}"/>
               </a:ext>
             </a:extLst>
           </p:cNvPr>
@@ -29434,7 +29446,7 @@
           <p:cNvPr id="7" name="Text 5">
             <a:extLst xmlns:a="http://schemas.openxmlformats.org/drawingml/2006/main">
               <a:ext uri="{FF2B5EF4-FFF2-40B4-BE49-F238E27FC236}">
-                <a16:creationId xmlns:a16="http://schemas.microsoft.com/office/drawing/2014/main" id="{4789333B-B8AB-496C-8521-5500601D9519}"/>
+                <a16:creationId xmlns:a16="http://schemas.microsoft.com/office/drawing/2014/main" id="{5F912458-A74C-4871-9644-F7FAE4263E50}"/>
               </a:ext>
             </a:extLst>
           </p:cNvPr>
@@ -29512,7 +29524,7 @@
           <p:cNvPr id="8" name="Shape 6">
             <a:extLst xmlns:a="http://schemas.openxmlformats.org/drawingml/2006/main">
               <a:ext uri="{FF2B5EF4-FFF2-40B4-BE49-F238E27FC236}">
-                <a16:creationId xmlns:a16="http://schemas.microsoft.com/office/drawing/2014/main" id="{121F6213-AF03-4911-B834-C59327C7CD53}"/>
+                <a16:creationId xmlns:a16="http://schemas.microsoft.com/office/drawing/2014/main" id="{6612F49B-C3AB-4C95-8919-E67200A4A190}"/>
               </a:ext>
             </a:extLst>
           </p:cNvPr>
@@ -29559,7 +29571,7 @@
           <p:cNvPr id="9" name="Shape 7">
             <a:extLst xmlns:a="http://schemas.openxmlformats.org/drawingml/2006/main">
               <a:ext uri="{FF2B5EF4-FFF2-40B4-BE49-F238E27FC236}">
-                <a16:creationId xmlns:a16="http://schemas.microsoft.com/office/drawing/2014/main" id="{E6479EBF-72B6-4470-9E05-5A5AF0F3F55F}"/>
+                <a16:creationId xmlns:a16="http://schemas.microsoft.com/office/drawing/2014/main" id="{1337E5B6-2C06-4538-9447-BFDF0B48BE2B}"/>
               </a:ext>
             </a:extLst>
           </p:cNvPr>
@@ -29597,7 +29609,7 @@
           <p:cNvPr id="10" name="Text 8">
             <a:extLst xmlns:a="http://schemas.openxmlformats.org/drawingml/2006/main">
               <a:ext uri="{FF2B5EF4-FFF2-40B4-BE49-F238E27FC236}">
-                <a16:creationId xmlns:a16="http://schemas.microsoft.com/office/drawing/2014/main" id="{BF673560-5658-4D4C-A730-C48DE693D6FB}"/>
+                <a16:creationId xmlns:a16="http://schemas.microsoft.com/office/drawing/2014/main" id="{C885CBCC-78B9-47C9-8483-CFE2927979A8}"/>
               </a:ext>
             </a:extLst>
           </p:cNvPr>
@@ -29642,7 +29654,7 @@
           <p:cNvPr id="11" name="Text 9">
             <a:extLst xmlns:a="http://schemas.openxmlformats.org/drawingml/2006/main">
               <a:ext uri="{FF2B5EF4-FFF2-40B4-BE49-F238E27FC236}">
-                <a16:creationId xmlns:a16="http://schemas.microsoft.com/office/drawing/2014/main" id="{EB3DF6BF-693C-4C95-8553-02B2C6A64E27}"/>
+                <a16:creationId xmlns:a16="http://schemas.microsoft.com/office/drawing/2014/main" id="{94031ACA-E724-4967-8E45-0A3F4A9C7D90}"/>
               </a:ext>
             </a:extLst>
           </p:cNvPr>
@@ -29687,7 +29699,7 @@
           <p:cNvPr id="12" name="Text 10">
             <a:extLst xmlns:a="http://schemas.openxmlformats.org/drawingml/2006/main">
               <a:ext uri="{FF2B5EF4-FFF2-40B4-BE49-F238E27FC236}">
-                <a16:creationId xmlns:a16="http://schemas.microsoft.com/office/drawing/2014/main" id="{CF32BDEA-AD1C-4378-A313-DD066ACA3146}"/>
+                <a16:creationId xmlns:a16="http://schemas.microsoft.com/office/drawing/2014/main" id="{6BB11200-5ADC-4F74-9703-F4E980A8B316}"/>
               </a:ext>
             </a:extLst>
           </p:cNvPr>
@@ -29826,7 +29838,7 @@
           <p:cNvPr id="13" name="Shape 11">
             <a:extLst xmlns:a="http://schemas.openxmlformats.org/drawingml/2006/main">
               <a:ext uri="{FF2B5EF4-FFF2-40B4-BE49-F238E27FC236}">
-                <a16:creationId xmlns:a16="http://schemas.microsoft.com/office/drawing/2014/main" id="{ABBC2703-3A65-4341-8C12-7B054867F2E0}"/>
+                <a16:creationId xmlns:a16="http://schemas.microsoft.com/office/drawing/2014/main" id="{00FADDCA-D226-4D28-875D-A6C37054FD2D}"/>
               </a:ext>
             </a:extLst>
           </p:cNvPr>
@@ -29873,7 +29885,7 @@
           <p:cNvPr id="14" name="Shape 12">
             <a:extLst xmlns:a="http://schemas.openxmlformats.org/drawingml/2006/main">
               <a:ext uri="{FF2B5EF4-FFF2-40B4-BE49-F238E27FC236}">
-                <a16:creationId xmlns:a16="http://schemas.microsoft.com/office/drawing/2014/main" id="{C5457719-8519-4AEB-94C3-1BDF26DE9665}"/>
+                <a16:creationId xmlns:a16="http://schemas.microsoft.com/office/drawing/2014/main" id="{D8015DF9-94B9-4EA0-AB70-0BA2AC65A974}"/>
               </a:ext>
             </a:extLst>
           </p:cNvPr>
@@ -29911,7 +29923,7 @@
           <p:cNvPr id="15" name="Text 13">
             <a:extLst xmlns:a="http://schemas.openxmlformats.org/drawingml/2006/main">
               <a:ext uri="{FF2B5EF4-FFF2-40B4-BE49-F238E27FC236}">
-                <a16:creationId xmlns:a16="http://schemas.microsoft.com/office/drawing/2014/main" id="{390CC0FC-6E2E-45E2-B16D-E940D4532EB2}"/>
+                <a16:creationId xmlns:a16="http://schemas.microsoft.com/office/drawing/2014/main" id="{F0C8B681-4719-466F-B96A-863A241C8DD0}"/>
               </a:ext>
             </a:extLst>
           </p:cNvPr>
@@ -29956,7 +29968,7 @@
           <p:cNvPr id="16" name="Text 14">
             <a:extLst xmlns:a="http://schemas.openxmlformats.org/drawingml/2006/main">
               <a:ext uri="{FF2B5EF4-FFF2-40B4-BE49-F238E27FC236}">
-                <a16:creationId xmlns:a16="http://schemas.microsoft.com/office/drawing/2014/main" id="{6F48C36D-ADD5-4953-ABE5-92C85D0724A3}"/>
+                <a16:creationId xmlns:a16="http://schemas.microsoft.com/office/drawing/2014/main" id="{3D9118AF-744D-4FA0-9178-B1869B317EAC}"/>
               </a:ext>
             </a:extLst>
           </p:cNvPr>
@@ -30001,7 +30013,7 @@
           <p:cNvPr id="17" name="Text 15">
             <a:extLst xmlns:a="http://schemas.openxmlformats.org/drawingml/2006/main">
               <a:ext uri="{FF2B5EF4-FFF2-40B4-BE49-F238E27FC236}">
-                <a16:creationId xmlns:a16="http://schemas.microsoft.com/office/drawing/2014/main" id="{D38A8D62-8F41-43FE-8598-4520D14A26CA}"/>
+                <a16:creationId xmlns:a16="http://schemas.microsoft.com/office/drawing/2014/main" id="{2AE878F7-9927-4103-A575-403E26F82C92}"/>
               </a:ext>
             </a:extLst>
           </p:cNvPr>
@@ -30140,7 +30152,7 @@
           <p:cNvPr id="18" name="Text 16">
             <a:extLst xmlns:a="http://schemas.openxmlformats.org/drawingml/2006/main">
               <a:ext uri="{FF2B5EF4-FFF2-40B4-BE49-F238E27FC236}">
-                <a16:creationId xmlns:a16="http://schemas.microsoft.com/office/drawing/2014/main" id="{52BE8379-FA44-45EE-9A56-3AC7D8645009}"/>
+                <a16:creationId xmlns:a16="http://schemas.microsoft.com/office/drawing/2014/main" id="{DD1DF2C8-F6CC-45AC-A125-0157B0439AFB}"/>
               </a:ext>
             </a:extLst>
           </p:cNvPr>
@@ -30183,7 +30195,7 @@
     </p:spTree>
     <p:extLst>
       <p:ext uri="{BB962C8B-B14F-4D97-AF65-F5344CB8AC3E}">
-        <p14:creationId xmlns:p14="http://schemas.microsoft.com/office/powerpoint/2010/main" val="1024814314"/>
+        <p14:creationId xmlns:p14="http://schemas.microsoft.com/office/powerpoint/2010/main" val="1443581303"/>
       </p:ext>
     </p:extLst>
   </p:cSld>
@@ -30214,7 +30226,7 @@
           <p:cNvPr id="2" name="Text 0">
             <a:extLst xmlns:a="http://schemas.openxmlformats.org/drawingml/2006/main">
               <a:ext uri="{FF2B5EF4-FFF2-40B4-BE49-F238E27FC236}">
-                <a16:creationId xmlns:a16="http://schemas.microsoft.com/office/drawing/2014/main" id="{F31B4DE9-5836-4C5C-A11B-C0EBB9C09F14}"/>
+                <a16:creationId xmlns:a16="http://schemas.microsoft.com/office/drawing/2014/main" id="{478E495B-F735-4A03-8F2F-2B1D048A42FF}"/>
               </a:ext>
             </a:extLst>
           </p:cNvPr>
@@ -30259,7 +30271,7 @@
           <p:cNvPr id="3" name="Text 1">
             <a:extLst xmlns:a="http://schemas.openxmlformats.org/drawingml/2006/main">
               <a:ext uri="{FF2B5EF4-FFF2-40B4-BE49-F238E27FC236}">
-                <a16:creationId xmlns:a16="http://schemas.microsoft.com/office/drawing/2014/main" id="{7B7EF647-CE9D-43B9-8005-BD2C84ACD775}"/>
+                <a16:creationId xmlns:a16="http://schemas.microsoft.com/office/drawing/2014/main" id="{8DB9DB8B-DF97-4B17-9115-A9188D33948B}"/>
               </a:ext>
             </a:extLst>
           </p:cNvPr>
@@ -30304,7 +30316,7 @@
           <p:cNvPr id="4" name="Text 2">
             <a:extLst xmlns:a="http://schemas.openxmlformats.org/drawingml/2006/main">
               <a:ext uri="{FF2B5EF4-FFF2-40B4-BE49-F238E27FC236}">
-                <a16:creationId xmlns:a16="http://schemas.microsoft.com/office/drawing/2014/main" id="{A8FD5EC7-1760-44AA-B532-75F606082EA6}"/>
+                <a16:creationId xmlns:a16="http://schemas.microsoft.com/office/drawing/2014/main" id="{8BCAA5A0-6BC8-4FFD-BEC3-CE4ACDE8F2FE}"/>
               </a:ext>
             </a:extLst>
           </p:cNvPr>
@@ -30349,7 +30361,7 @@
           <p:cNvPr id="5" name="Text 3">
             <a:extLst xmlns:a="http://schemas.openxmlformats.org/drawingml/2006/main">
               <a:ext uri="{FF2B5EF4-FFF2-40B4-BE49-F238E27FC236}">
-                <a16:creationId xmlns:a16="http://schemas.microsoft.com/office/drawing/2014/main" id="{9D94CC6C-DAD9-43EA-96A0-6E4EE71B6A0A}"/>
+                <a16:creationId xmlns:a16="http://schemas.microsoft.com/office/drawing/2014/main" id="{C1921022-4434-4180-826A-A7FF11989520}"/>
               </a:ext>
             </a:extLst>
           </p:cNvPr>
@@ -30394,7 +30406,7 @@
           <p:cNvPr id="6" name="Shape 4">
             <a:extLst xmlns:a="http://schemas.openxmlformats.org/drawingml/2006/main">
               <a:ext uri="{FF2B5EF4-FFF2-40B4-BE49-F238E27FC236}">
-                <a16:creationId xmlns:a16="http://schemas.microsoft.com/office/drawing/2014/main" id="{E0C896D1-EA35-4E1F-8AFF-8285608ACB63}"/>
+                <a16:creationId xmlns:a16="http://schemas.microsoft.com/office/drawing/2014/main" id="{4F655729-DE57-4BFE-9D2A-BE273AE03433}"/>
               </a:ext>
             </a:extLst>
           </p:cNvPr>
@@ -30441,7 +30453,7 @@
           <p:cNvPr id="7" name="Shape 5">
             <a:extLst xmlns:a="http://schemas.openxmlformats.org/drawingml/2006/main">
               <a:ext uri="{FF2B5EF4-FFF2-40B4-BE49-F238E27FC236}">
-                <a16:creationId xmlns:a16="http://schemas.microsoft.com/office/drawing/2014/main" id="{C7075C77-2D95-4A59-92E8-F26436BBD95E}"/>
+                <a16:creationId xmlns:a16="http://schemas.microsoft.com/office/drawing/2014/main" id="{632BE3D7-B989-4135-B377-FD7CD7E82EC5}"/>
               </a:ext>
             </a:extLst>
           </p:cNvPr>
@@ -30479,7 +30491,7 @@
           <p:cNvPr id="8" name="Text 6">
             <a:extLst xmlns:a="http://schemas.openxmlformats.org/drawingml/2006/main">
               <a:ext uri="{FF2B5EF4-FFF2-40B4-BE49-F238E27FC236}">
-                <a16:creationId xmlns:a16="http://schemas.microsoft.com/office/drawing/2014/main" id="{D63C932C-7CD7-4240-AD9E-187CC25B0A7A}"/>
+                <a16:creationId xmlns:a16="http://schemas.microsoft.com/office/drawing/2014/main" id="{947ABAD1-7DDB-4A88-A99F-5FF556BA7BEC}"/>
               </a:ext>
             </a:extLst>
           </p:cNvPr>
@@ -30524,7 +30536,7 @@
           <p:cNvPr id="9" name="Text 7">
             <a:extLst xmlns:a="http://schemas.openxmlformats.org/drawingml/2006/main">
               <a:ext uri="{FF2B5EF4-FFF2-40B4-BE49-F238E27FC236}">
-                <a16:creationId xmlns:a16="http://schemas.microsoft.com/office/drawing/2014/main" id="{F8141086-3A91-4E42-B7BF-6DCD17EE6BB9}"/>
+                <a16:creationId xmlns:a16="http://schemas.microsoft.com/office/drawing/2014/main" id="{61308413-5A60-408B-B000-3AFE7FA0323E}"/>
               </a:ext>
             </a:extLst>
           </p:cNvPr>
@@ -30569,7 +30581,7 @@
           <p:cNvPr id="10" name="Text 8">
             <a:extLst xmlns:a="http://schemas.openxmlformats.org/drawingml/2006/main">
               <a:ext uri="{FF2B5EF4-FFF2-40B4-BE49-F238E27FC236}">
-                <a16:creationId xmlns:a16="http://schemas.microsoft.com/office/drawing/2014/main" id="{CA6320CC-7727-4A9C-8AF6-245025BDC174}"/>
+                <a16:creationId xmlns:a16="http://schemas.microsoft.com/office/drawing/2014/main" id="{D0046BE5-F14B-486D-9EBD-D72707475711}"/>
               </a:ext>
             </a:extLst>
           </p:cNvPr>
@@ -30664,7 +30676,7 @@
           <p:cNvPr id="11" name="Shape 9">
             <a:extLst xmlns:a="http://schemas.openxmlformats.org/drawingml/2006/main">
               <a:ext uri="{FF2B5EF4-FFF2-40B4-BE49-F238E27FC236}">
-                <a16:creationId xmlns:a16="http://schemas.microsoft.com/office/drawing/2014/main" id="{7E0D835A-2FC1-4F0B-A6A1-6A34E38958F4}"/>
+                <a16:creationId xmlns:a16="http://schemas.microsoft.com/office/drawing/2014/main" id="{74945B47-6D79-4C26-B452-6D4B8C30D31F}"/>
               </a:ext>
             </a:extLst>
           </p:cNvPr>
@@ -30702,7 +30714,7 @@
           <p:cNvPr id="12" name="Shape 10">
             <a:extLst xmlns:a="http://schemas.openxmlformats.org/drawingml/2006/main">
               <a:ext uri="{FF2B5EF4-FFF2-40B4-BE49-F238E27FC236}">
-                <a16:creationId xmlns:a16="http://schemas.microsoft.com/office/drawing/2014/main" id="{76ED73F6-D0B0-4D4A-A39A-3EB284C3742E}"/>
+                <a16:creationId xmlns:a16="http://schemas.microsoft.com/office/drawing/2014/main" id="{64C0A6C1-2275-4A85-BCCF-F9432BDF7257}"/>
               </a:ext>
             </a:extLst>
           </p:cNvPr>
@@ -30749,7 +30761,7 @@
           <p:cNvPr id="13" name="Shape 11">
             <a:extLst xmlns:a="http://schemas.openxmlformats.org/drawingml/2006/main">
               <a:ext uri="{FF2B5EF4-FFF2-40B4-BE49-F238E27FC236}">
-                <a16:creationId xmlns:a16="http://schemas.microsoft.com/office/drawing/2014/main" id="{CE92A206-C770-4599-883D-CE943E0E32E8}"/>
+                <a16:creationId xmlns:a16="http://schemas.microsoft.com/office/drawing/2014/main" id="{221985DB-A2AA-4B86-9616-0C49861618C8}"/>
               </a:ext>
             </a:extLst>
           </p:cNvPr>
@@ -30787,7 +30799,7 @@
           <p:cNvPr id="14" name="Text 12">
             <a:extLst xmlns:a="http://schemas.openxmlformats.org/drawingml/2006/main">
               <a:ext uri="{FF2B5EF4-FFF2-40B4-BE49-F238E27FC236}">
-                <a16:creationId xmlns:a16="http://schemas.microsoft.com/office/drawing/2014/main" id="{3EC13672-E336-4087-989C-956B4192D1FE}"/>
+                <a16:creationId xmlns:a16="http://schemas.microsoft.com/office/drawing/2014/main" id="{D85F3DE7-CDAC-4F99-96F3-890CDC142D24}"/>
               </a:ext>
             </a:extLst>
           </p:cNvPr>
@@ -30832,7 +30844,7 @@
           <p:cNvPr id="15" name="Text 13">
             <a:extLst xmlns:a="http://schemas.openxmlformats.org/drawingml/2006/main">
               <a:ext uri="{FF2B5EF4-FFF2-40B4-BE49-F238E27FC236}">
-                <a16:creationId xmlns:a16="http://schemas.microsoft.com/office/drawing/2014/main" id="{811B895A-1693-4A5B-97A0-97E72B47E6BA}"/>
+                <a16:creationId xmlns:a16="http://schemas.microsoft.com/office/drawing/2014/main" id="{59CA2139-E506-45C9-947C-BED48BC220D0}"/>
               </a:ext>
             </a:extLst>
           </p:cNvPr>
@@ -30877,7 +30889,7 @@
           <p:cNvPr id="16" name="Text 14">
             <a:extLst xmlns:a="http://schemas.openxmlformats.org/drawingml/2006/main">
               <a:ext uri="{FF2B5EF4-FFF2-40B4-BE49-F238E27FC236}">
-                <a16:creationId xmlns:a16="http://schemas.microsoft.com/office/drawing/2014/main" id="{6731688D-E790-4705-8F52-6166CD669CA5}"/>
+                <a16:creationId xmlns:a16="http://schemas.microsoft.com/office/drawing/2014/main" id="{092BF8B3-3D53-4AD0-8B13-1535F3D68006}"/>
               </a:ext>
             </a:extLst>
           </p:cNvPr>
@@ -30972,7 +30984,7 @@
           <p:cNvPr id="17" name="Shape 15">
             <a:extLst xmlns:a="http://schemas.openxmlformats.org/drawingml/2006/main">
               <a:ext uri="{FF2B5EF4-FFF2-40B4-BE49-F238E27FC236}">
-                <a16:creationId xmlns:a16="http://schemas.microsoft.com/office/drawing/2014/main" id="{B76F828A-EA95-48F4-B551-345A238ADEB3}"/>
+                <a16:creationId xmlns:a16="http://schemas.microsoft.com/office/drawing/2014/main" id="{B3D26381-003B-44B6-A673-D1C87BC0D025}"/>
               </a:ext>
             </a:extLst>
           </p:cNvPr>
@@ -31010,7 +31022,7 @@
           <p:cNvPr id="18" name="Shape 16">
             <a:extLst xmlns:a="http://schemas.openxmlformats.org/drawingml/2006/main">
               <a:ext uri="{FF2B5EF4-FFF2-40B4-BE49-F238E27FC236}">
-                <a16:creationId xmlns:a16="http://schemas.microsoft.com/office/drawing/2014/main" id="{F6A418B2-84A4-4FB5-A139-BEFF89CC2E6A}"/>
+                <a16:creationId xmlns:a16="http://schemas.microsoft.com/office/drawing/2014/main" id="{70766950-5D9A-4E13-AC8B-E52EA8C0CDE0}"/>
               </a:ext>
             </a:extLst>
           </p:cNvPr>
@@ -31057,7 +31069,7 @@
           <p:cNvPr id="19" name="Shape 17">
             <a:extLst xmlns:a="http://schemas.openxmlformats.org/drawingml/2006/main">
               <a:ext uri="{FF2B5EF4-FFF2-40B4-BE49-F238E27FC236}">
-                <a16:creationId xmlns:a16="http://schemas.microsoft.com/office/drawing/2014/main" id="{B3D7B1C8-6FF8-43CA-B71A-3DECFDA06970}"/>
+                <a16:creationId xmlns:a16="http://schemas.microsoft.com/office/drawing/2014/main" id="{C5BDBFFE-BBA1-448C-954D-CDF113EB8DFB}"/>
               </a:ext>
             </a:extLst>
           </p:cNvPr>
@@ -31095,7 +31107,7 @@
           <p:cNvPr id="20" name="Text 18">
             <a:extLst xmlns:a="http://schemas.openxmlformats.org/drawingml/2006/main">
               <a:ext uri="{FF2B5EF4-FFF2-40B4-BE49-F238E27FC236}">
-                <a16:creationId xmlns:a16="http://schemas.microsoft.com/office/drawing/2014/main" id="{7F29FB5B-2D18-4E90-86B1-1ED076ABC6EF}"/>
+                <a16:creationId xmlns:a16="http://schemas.microsoft.com/office/drawing/2014/main" id="{DE9BC910-2819-4B65-BED1-ECFF5C5E60E6}"/>
               </a:ext>
             </a:extLst>
           </p:cNvPr>
@@ -31140,7 +31152,7 @@
           <p:cNvPr id="21" name="Text 19">
             <a:extLst xmlns:a="http://schemas.openxmlformats.org/drawingml/2006/main">
               <a:ext uri="{FF2B5EF4-FFF2-40B4-BE49-F238E27FC236}">
-                <a16:creationId xmlns:a16="http://schemas.microsoft.com/office/drawing/2014/main" id="{62A5CA60-5E88-465F-81D4-4C2855D315FC}"/>
+                <a16:creationId xmlns:a16="http://schemas.microsoft.com/office/drawing/2014/main" id="{8441671F-4574-4298-AE43-DCACB0717312}"/>
               </a:ext>
             </a:extLst>
           </p:cNvPr>
@@ -31185,7 +31197,7 @@
           <p:cNvPr id="22" name="Text 20">
             <a:extLst xmlns:a="http://schemas.openxmlformats.org/drawingml/2006/main">
               <a:ext uri="{FF2B5EF4-FFF2-40B4-BE49-F238E27FC236}">
-                <a16:creationId xmlns:a16="http://schemas.microsoft.com/office/drawing/2014/main" id="{4D3F7D2A-1996-442D-85C1-7335E44E8B3B}"/>
+                <a16:creationId xmlns:a16="http://schemas.microsoft.com/office/drawing/2014/main" id="{25125B4B-3D41-488F-86FA-FB5384700B28}"/>
               </a:ext>
             </a:extLst>
           </p:cNvPr>
@@ -31280,7 +31292,7 @@
           <p:cNvPr id="23" name="Shape 21">
             <a:extLst xmlns:a="http://schemas.openxmlformats.org/drawingml/2006/main">
               <a:ext uri="{FF2B5EF4-FFF2-40B4-BE49-F238E27FC236}">
-                <a16:creationId xmlns:a16="http://schemas.microsoft.com/office/drawing/2014/main" id="{91FDE7CD-3F60-4458-A24A-B5560DBEDA1C}"/>
+                <a16:creationId xmlns:a16="http://schemas.microsoft.com/office/drawing/2014/main" id="{D17A33AE-D9A1-404F-A97C-77B9C11B24C5}"/>
               </a:ext>
             </a:extLst>
           </p:cNvPr>
@@ -31327,7 +31339,7 @@
           <p:cNvPr id="24" name="Text 22">
             <a:extLst xmlns:a="http://schemas.openxmlformats.org/drawingml/2006/main">
               <a:ext uri="{FF2B5EF4-FFF2-40B4-BE49-F238E27FC236}">
-                <a16:creationId xmlns:a16="http://schemas.microsoft.com/office/drawing/2014/main" id="{3D3A374E-1B9D-4229-9CA3-D18E97270C1D}"/>
+                <a16:creationId xmlns:a16="http://schemas.microsoft.com/office/drawing/2014/main" id="{F07A9268-4FAE-4413-97AC-424882674D62}"/>
               </a:ext>
             </a:extLst>
           </p:cNvPr>
@@ -31372,7 +31384,7 @@
           <p:cNvPr id="25" name="Text 23">
             <a:extLst xmlns:a="http://schemas.openxmlformats.org/drawingml/2006/main">
               <a:ext uri="{FF2B5EF4-FFF2-40B4-BE49-F238E27FC236}">
-                <a16:creationId xmlns:a16="http://schemas.microsoft.com/office/drawing/2014/main" id="{3C1D3B7C-A34A-47AE-A8B8-F00C8CA66A58}"/>
+                <a16:creationId xmlns:a16="http://schemas.microsoft.com/office/drawing/2014/main" id="{C5B3E9FC-C1FC-43A9-91CB-D5ED400E112B}"/>
               </a:ext>
             </a:extLst>
           </p:cNvPr>
@@ -31420,7 +31432,7 @@
           <p:cNvPr id="26" name="Text 24">
             <a:extLst xmlns:a="http://schemas.openxmlformats.org/drawingml/2006/main">
               <a:ext uri="{FF2B5EF4-FFF2-40B4-BE49-F238E27FC236}">
-                <a16:creationId xmlns:a16="http://schemas.microsoft.com/office/drawing/2014/main" id="{A17120CF-1BAC-4812-B8A5-6BEED4E4F76A}"/>
+                <a16:creationId xmlns:a16="http://schemas.microsoft.com/office/drawing/2014/main" id="{E088630C-D852-46D8-A6E4-19F5383E602D}"/>
               </a:ext>
             </a:extLst>
           </p:cNvPr>
@@ -31463,7 +31475,7 @@
     </p:spTree>
     <p:extLst>
       <p:ext uri="{BB962C8B-B14F-4D97-AF65-F5344CB8AC3E}">
-        <p14:creationId xmlns:p14="http://schemas.microsoft.com/office/powerpoint/2010/main" val="1985928184"/>
+        <p14:creationId xmlns:p14="http://schemas.microsoft.com/office/powerpoint/2010/main" val="1400876160"/>
       </p:ext>
     </p:extLst>
   </p:cSld>
@@ -31494,7 +31506,7 @@
           <p:cNvPr id="2" name="Text 0">
             <a:extLst xmlns:a="http://schemas.openxmlformats.org/drawingml/2006/main">
               <a:ext uri="{FF2B5EF4-FFF2-40B4-BE49-F238E27FC236}">
-                <a16:creationId xmlns:a16="http://schemas.microsoft.com/office/drawing/2014/main" id="{D53146C7-B133-4F3B-B383-8B84A1922615}"/>
+                <a16:creationId xmlns:a16="http://schemas.microsoft.com/office/drawing/2014/main" id="{560F5FFE-8212-4BA7-AD39-0B21CC5D0644}"/>
               </a:ext>
             </a:extLst>
           </p:cNvPr>
@@ -31539,7 +31551,7 @@
           <p:cNvPr id="3" name="Text 1">
             <a:extLst xmlns:a="http://schemas.openxmlformats.org/drawingml/2006/main">
               <a:ext uri="{FF2B5EF4-FFF2-40B4-BE49-F238E27FC236}">
-                <a16:creationId xmlns:a16="http://schemas.microsoft.com/office/drawing/2014/main" id="{28E06864-2DC6-4DFD-845A-9CE0AF87A994}"/>
+                <a16:creationId xmlns:a16="http://schemas.microsoft.com/office/drawing/2014/main" id="{D12F0618-E40B-473C-A21B-D400BE1346D7}"/>
               </a:ext>
             </a:extLst>
           </p:cNvPr>
@@ -31584,7 +31596,7 @@
           <p:cNvPr id="4" name="Text 2">
             <a:extLst xmlns:a="http://schemas.openxmlformats.org/drawingml/2006/main">
               <a:ext uri="{FF2B5EF4-FFF2-40B4-BE49-F238E27FC236}">
-                <a16:creationId xmlns:a16="http://schemas.microsoft.com/office/drawing/2014/main" id="{34B5B811-1D0C-4175-B4ED-9C4098977459}"/>
+                <a16:creationId xmlns:a16="http://schemas.microsoft.com/office/drawing/2014/main" id="{BCC5A7EB-B872-4FB5-B284-C41879C72969}"/>
               </a:ext>
             </a:extLst>
           </p:cNvPr>
@@ -31629,7 +31641,7 @@
           <p:cNvPr id="5" name="Text 3">
             <a:extLst xmlns:a="http://schemas.openxmlformats.org/drawingml/2006/main">
               <a:ext uri="{FF2B5EF4-FFF2-40B4-BE49-F238E27FC236}">
-                <a16:creationId xmlns:a16="http://schemas.microsoft.com/office/drawing/2014/main" id="{6AC5867F-FDB1-4A31-BA9B-6A13E8678D2B}"/>
+                <a16:creationId xmlns:a16="http://schemas.microsoft.com/office/drawing/2014/main" id="{69837D3F-D0AE-4DE0-AB8A-F6BB115CF2F3}"/>
               </a:ext>
             </a:extLst>
           </p:cNvPr>
@@ -31674,7 +31686,7 @@
           <p:cNvPr id="6" name="Shape 4">
             <a:extLst xmlns:a="http://schemas.openxmlformats.org/drawingml/2006/main">
               <a:ext uri="{FF2B5EF4-FFF2-40B4-BE49-F238E27FC236}">
-                <a16:creationId xmlns:a16="http://schemas.microsoft.com/office/drawing/2014/main" id="{09B00551-8D2A-425B-AEDA-5DB83243ED71}"/>
+                <a16:creationId xmlns:a16="http://schemas.microsoft.com/office/drawing/2014/main" id="{22221813-4373-48E9-A57A-A8F41E74BF61}"/>
               </a:ext>
             </a:extLst>
           </p:cNvPr>
@@ -31712,7 +31724,7 @@
           <p:cNvPr id="7" name="Text 5">
             <a:extLst xmlns:a="http://schemas.openxmlformats.org/drawingml/2006/main">
               <a:ext uri="{FF2B5EF4-FFF2-40B4-BE49-F238E27FC236}">
-                <a16:creationId xmlns:a16="http://schemas.microsoft.com/office/drawing/2014/main" id="{A50A9425-D7C4-4633-9030-9A08B2D78ECA}"/>
+                <a16:creationId xmlns:a16="http://schemas.microsoft.com/office/drawing/2014/main" id="{5B5D8B9A-4212-43D7-975A-1D1E86205937}"/>
               </a:ext>
             </a:extLst>
           </p:cNvPr>
@@ -31757,7 +31769,7 @@
           <p:cNvPr id="8" name="Text 6">
             <a:extLst xmlns:a="http://schemas.openxmlformats.org/drawingml/2006/main">
               <a:ext uri="{FF2B5EF4-FFF2-40B4-BE49-F238E27FC236}">
-                <a16:creationId xmlns:a16="http://schemas.microsoft.com/office/drawing/2014/main" id="{BC2EE629-4222-470E-899F-0435222F0A83}"/>
+                <a16:creationId xmlns:a16="http://schemas.microsoft.com/office/drawing/2014/main" id="{90891EEC-F832-4FD9-8F1C-99FEB69112BC}"/>
               </a:ext>
             </a:extLst>
           </p:cNvPr>
@@ -31802,7 +31814,7 @@
           <p:cNvPr id="9" name="Text 7">
             <a:extLst xmlns:a="http://schemas.openxmlformats.org/drawingml/2006/main">
               <a:ext uri="{FF2B5EF4-FFF2-40B4-BE49-F238E27FC236}">
-                <a16:creationId xmlns:a16="http://schemas.microsoft.com/office/drawing/2014/main" id="{99544F26-E3E4-44AD-9D18-D6A2C78DBAD5}"/>
+                <a16:creationId xmlns:a16="http://schemas.microsoft.com/office/drawing/2014/main" id="{F6739318-5232-41B7-9752-F7C7FDE18504}"/>
               </a:ext>
             </a:extLst>
           </p:cNvPr>
@@ -31850,7 +31862,7 @@
           <p:cNvPr id="10" name="Shape 8">
             <a:extLst xmlns:a="http://schemas.openxmlformats.org/drawingml/2006/main">
               <a:ext uri="{FF2B5EF4-FFF2-40B4-BE49-F238E27FC236}">
-                <a16:creationId xmlns:a16="http://schemas.microsoft.com/office/drawing/2014/main" id="{46EA118F-4CDF-4337-9336-2E69653C0BDD}"/>
+                <a16:creationId xmlns:a16="http://schemas.microsoft.com/office/drawing/2014/main" id="{02B16AE6-131F-4428-BE7C-A8FA166E805B}"/>
               </a:ext>
             </a:extLst>
           </p:cNvPr>
@@ -31888,7 +31900,7 @@
           <p:cNvPr id="11" name="Text 9">
             <a:extLst xmlns:a="http://schemas.openxmlformats.org/drawingml/2006/main">
               <a:ext uri="{FF2B5EF4-FFF2-40B4-BE49-F238E27FC236}">
-                <a16:creationId xmlns:a16="http://schemas.microsoft.com/office/drawing/2014/main" id="{A5F3DCE7-319E-40C7-ACBD-BE04487D4287}"/>
+                <a16:creationId xmlns:a16="http://schemas.microsoft.com/office/drawing/2014/main" id="{EAC6E9EE-052F-4991-8FC4-B901C31AC2D2}"/>
               </a:ext>
             </a:extLst>
           </p:cNvPr>
@@ -31933,7 +31945,7 @@
           <p:cNvPr id="12" name="Text 10">
             <a:extLst xmlns:a="http://schemas.openxmlformats.org/drawingml/2006/main">
               <a:ext uri="{FF2B5EF4-FFF2-40B4-BE49-F238E27FC236}">
-                <a16:creationId xmlns:a16="http://schemas.microsoft.com/office/drawing/2014/main" id="{6B7ED5A9-9781-4C46-A31C-5091315D8D6D}"/>
+                <a16:creationId xmlns:a16="http://schemas.microsoft.com/office/drawing/2014/main" id="{8147CB89-9970-4C71-9006-EDBE7AC2C3B9}"/>
               </a:ext>
             </a:extLst>
           </p:cNvPr>
@@ -31978,7 +31990,7 @@
           <p:cNvPr id="13" name="Text 11">
             <a:extLst xmlns:a="http://schemas.openxmlformats.org/drawingml/2006/main">
               <a:ext uri="{FF2B5EF4-FFF2-40B4-BE49-F238E27FC236}">
-                <a16:creationId xmlns:a16="http://schemas.microsoft.com/office/drawing/2014/main" id="{B34C0411-8A1A-4877-9D80-C67E5003920B}"/>
+                <a16:creationId xmlns:a16="http://schemas.microsoft.com/office/drawing/2014/main" id="{E9CAD641-C873-4C45-A5D5-A6744A89EF3C}"/>
               </a:ext>
             </a:extLst>
           </p:cNvPr>
@@ -32026,7 +32038,7 @@
           <p:cNvPr id="14" name="Shape 12">
             <a:extLst xmlns:a="http://schemas.openxmlformats.org/drawingml/2006/main">
               <a:ext uri="{FF2B5EF4-FFF2-40B4-BE49-F238E27FC236}">
-                <a16:creationId xmlns:a16="http://schemas.microsoft.com/office/drawing/2014/main" id="{71460436-48F5-4413-ACA3-1B25B8658541}"/>
+                <a16:creationId xmlns:a16="http://schemas.microsoft.com/office/drawing/2014/main" id="{038409D9-19E9-4FAB-BB58-650D451AB533}"/>
               </a:ext>
             </a:extLst>
           </p:cNvPr>
@@ -32064,7 +32076,7 @@
           <p:cNvPr id="15" name="Text 13">
             <a:extLst xmlns:a="http://schemas.openxmlformats.org/drawingml/2006/main">
               <a:ext uri="{FF2B5EF4-FFF2-40B4-BE49-F238E27FC236}">
-                <a16:creationId xmlns:a16="http://schemas.microsoft.com/office/drawing/2014/main" id="{5B4B10B1-400E-4A9B-8D9E-3F22FD7E933A}"/>
+                <a16:creationId xmlns:a16="http://schemas.microsoft.com/office/drawing/2014/main" id="{8A8ED110-7178-48F1-AD93-9343461F3023}"/>
               </a:ext>
             </a:extLst>
           </p:cNvPr>
@@ -32109,7 +32121,7 @@
           <p:cNvPr id="16" name="Text 14">
             <a:extLst xmlns:a="http://schemas.openxmlformats.org/drawingml/2006/main">
               <a:ext uri="{FF2B5EF4-FFF2-40B4-BE49-F238E27FC236}">
-                <a16:creationId xmlns:a16="http://schemas.microsoft.com/office/drawing/2014/main" id="{CAA64DBF-87C2-4EA9-B0B2-122373B14802}"/>
+                <a16:creationId xmlns:a16="http://schemas.microsoft.com/office/drawing/2014/main" id="{C1BBD694-3EC6-4A62-8692-A636D11EDB3F}"/>
               </a:ext>
             </a:extLst>
           </p:cNvPr>
@@ -32154,7 +32166,7 @@
           <p:cNvPr id="17" name="Text 15">
             <a:extLst xmlns:a="http://schemas.openxmlformats.org/drawingml/2006/main">
               <a:ext uri="{FF2B5EF4-FFF2-40B4-BE49-F238E27FC236}">
-                <a16:creationId xmlns:a16="http://schemas.microsoft.com/office/drawing/2014/main" id="{9F15B6A8-C6F5-4754-B18E-CA34FB5E3949}"/>
+                <a16:creationId xmlns:a16="http://schemas.microsoft.com/office/drawing/2014/main" id="{313027BF-87E0-4935-B9A9-455188C2A56D}"/>
               </a:ext>
             </a:extLst>
           </p:cNvPr>
@@ -32202,7 +32214,7 @@
           <p:cNvPr id="18" name="Shape 16">
             <a:extLst xmlns:a="http://schemas.openxmlformats.org/drawingml/2006/main">
               <a:ext uri="{FF2B5EF4-FFF2-40B4-BE49-F238E27FC236}">
-                <a16:creationId xmlns:a16="http://schemas.microsoft.com/office/drawing/2014/main" id="{CECCEBB8-5900-4514-9EB0-3A64C5D512D6}"/>
+                <a16:creationId xmlns:a16="http://schemas.microsoft.com/office/drawing/2014/main" id="{3E1E9C80-DDC2-45AD-B3CA-F0F2E41A9FEB}"/>
               </a:ext>
             </a:extLst>
           </p:cNvPr>
@@ -32240,7 +32252,7 @@
           <p:cNvPr id="19" name="Text 17">
             <a:extLst xmlns:a="http://schemas.openxmlformats.org/drawingml/2006/main">
               <a:ext uri="{FF2B5EF4-FFF2-40B4-BE49-F238E27FC236}">
-                <a16:creationId xmlns:a16="http://schemas.microsoft.com/office/drawing/2014/main" id="{05D9E8A6-20C3-49D2-B40E-A97AC9129FDD}"/>
+                <a16:creationId xmlns:a16="http://schemas.microsoft.com/office/drawing/2014/main" id="{37BEC889-75B7-4E5E-AE80-60FF5D0F32E6}"/>
               </a:ext>
             </a:extLst>
           </p:cNvPr>
@@ -32285,7 +32297,7 @@
           <p:cNvPr id="20" name="Text 18">
             <a:extLst xmlns:a="http://schemas.openxmlformats.org/drawingml/2006/main">
               <a:ext uri="{FF2B5EF4-FFF2-40B4-BE49-F238E27FC236}">
-                <a16:creationId xmlns:a16="http://schemas.microsoft.com/office/drawing/2014/main" id="{3C4EFD5C-5791-490C-AB2C-310F4050A17E}"/>
+                <a16:creationId xmlns:a16="http://schemas.microsoft.com/office/drawing/2014/main" id="{755AACE8-21FD-43F3-80CA-DB03CA227CC2}"/>
               </a:ext>
             </a:extLst>
           </p:cNvPr>
@@ -32330,7 +32342,7 @@
           <p:cNvPr id="21" name="Text 19">
             <a:extLst xmlns:a="http://schemas.openxmlformats.org/drawingml/2006/main">
               <a:ext uri="{FF2B5EF4-FFF2-40B4-BE49-F238E27FC236}">
-                <a16:creationId xmlns:a16="http://schemas.microsoft.com/office/drawing/2014/main" id="{8C95EE48-1C87-4E9E-8DCB-5788B8F766BD}"/>
+                <a16:creationId xmlns:a16="http://schemas.microsoft.com/office/drawing/2014/main" id="{3363E19B-9F18-4CF6-B224-F90752B024DA}"/>
               </a:ext>
             </a:extLst>
           </p:cNvPr>
@@ -32378,7 +32390,7 @@
           <p:cNvPr id="22" name="Shape 20">
             <a:extLst xmlns:a="http://schemas.openxmlformats.org/drawingml/2006/main">
               <a:ext uri="{FF2B5EF4-FFF2-40B4-BE49-F238E27FC236}">
-                <a16:creationId xmlns:a16="http://schemas.microsoft.com/office/drawing/2014/main" id="{0B6F9BAC-0A9D-47AE-80C6-367D66BDBC4A}"/>
+                <a16:creationId xmlns:a16="http://schemas.microsoft.com/office/drawing/2014/main" id="{8D71ACC8-2E6F-41E6-9516-9D07218F9407}"/>
               </a:ext>
             </a:extLst>
           </p:cNvPr>
@@ -32416,7 +32428,7 @@
           <p:cNvPr id="23" name="Text 21">
             <a:extLst xmlns:a="http://schemas.openxmlformats.org/drawingml/2006/main">
               <a:ext uri="{FF2B5EF4-FFF2-40B4-BE49-F238E27FC236}">
-                <a16:creationId xmlns:a16="http://schemas.microsoft.com/office/drawing/2014/main" id="{DE1FA4AF-483F-478A-9CC2-4C942887A3F2}"/>
+                <a16:creationId xmlns:a16="http://schemas.microsoft.com/office/drawing/2014/main" id="{27668345-6DFA-42A1-A706-65678DB9FC94}"/>
               </a:ext>
             </a:extLst>
           </p:cNvPr>
@@ -32461,7 +32473,7 @@
           <p:cNvPr id="24" name="Text 22">
             <a:extLst xmlns:a="http://schemas.openxmlformats.org/drawingml/2006/main">
               <a:ext uri="{FF2B5EF4-FFF2-40B4-BE49-F238E27FC236}">
-                <a16:creationId xmlns:a16="http://schemas.microsoft.com/office/drawing/2014/main" id="{D5F42708-DD26-45D1-92D0-58737A527F0A}"/>
+                <a16:creationId xmlns:a16="http://schemas.microsoft.com/office/drawing/2014/main" id="{4383E085-81F7-4C33-886F-A26F26DA2EBD}"/>
               </a:ext>
             </a:extLst>
           </p:cNvPr>
@@ -32506,7 +32518,7 @@
           <p:cNvPr id="25" name="Text 23">
             <a:extLst xmlns:a="http://schemas.openxmlformats.org/drawingml/2006/main">
               <a:ext uri="{FF2B5EF4-FFF2-40B4-BE49-F238E27FC236}">
-                <a16:creationId xmlns:a16="http://schemas.microsoft.com/office/drawing/2014/main" id="{62FEC6E0-1328-42FC-8E8A-4011F786E0A5}"/>
+                <a16:creationId xmlns:a16="http://schemas.microsoft.com/office/drawing/2014/main" id="{32C3766C-7EE3-4BE8-8B9B-88CD72F91F32}"/>
               </a:ext>
             </a:extLst>
           </p:cNvPr>
@@ -32554,7 +32566,7 @@
           <p:cNvPr id="26" name="Shape 24">
             <a:extLst xmlns:a="http://schemas.openxmlformats.org/drawingml/2006/main">
               <a:ext uri="{FF2B5EF4-FFF2-40B4-BE49-F238E27FC236}">
-                <a16:creationId xmlns:a16="http://schemas.microsoft.com/office/drawing/2014/main" id="{8624952D-4CB0-42D9-815B-D75CE8520A46}"/>
+                <a16:creationId xmlns:a16="http://schemas.microsoft.com/office/drawing/2014/main" id="{D25D6F0F-E054-4764-A4E4-696A2C01868A}"/>
               </a:ext>
             </a:extLst>
           </p:cNvPr>
@@ -32592,7 +32604,7 @@
           <p:cNvPr id="27" name="Text 25">
             <a:extLst xmlns:a="http://schemas.openxmlformats.org/drawingml/2006/main">
               <a:ext uri="{FF2B5EF4-FFF2-40B4-BE49-F238E27FC236}">
-                <a16:creationId xmlns:a16="http://schemas.microsoft.com/office/drawing/2014/main" id="{D4A90C13-09C6-40BF-AFD9-369ED2AD6AEF}"/>
+                <a16:creationId xmlns:a16="http://schemas.microsoft.com/office/drawing/2014/main" id="{54EDA3C9-C829-4FBD-A705-10646FAB0B40}"/>
               </a:ext>
             </a:extLst>
           </p:cNvPr>
@@ -32637,7 +32649,7 @@
           <p:cNvPr id="28" name="Text 26">
             <a:extLst xmlns:a="http://schemas.openxmlformats.org/drawingml/2006/main">
               <a:ext uri="{FF2B5EF4-FFF2-40B4-BE49-F238E27FC236}">
-                <a16:creationId xmlns:a16="http://schemas.microsoft.com/office/drawing/2014/main" id="{E1BD0CE2-CFF3-4A56-855A-645C550DAA7B}"/>
+                <a16:creationId xmlns:a16="http://schemas.microsoft.com/office/drawing/2014/main" id="{085C91ED-0C0D-4B04-81FD-3DCF5C5ABF52}"/>
               </a:ext>
             </a:extLst>
           </p:cNvPr>
@@ -32682,7 +32694,7 @@
           <p:cNvPr id="29" name="Text 27">
             <a:extLst xmlns:a="http://schemas.openxmlformats.org/drawingml/2006/main">
               <a:ext uri="{FF2B5EF4-FFF2-40B4-BE49-F238E27FC236}">
-                <a16:creationId xmlns:a16="http://schemas.microsoft.com/office/drawing/2014/main" id="{1A3C07F2-4B30-433A-ADC9-9A6E0DB124F6}"/>
+                <a16:creationId xmlns:a16="http://schemas.microsoft.com/office/drawing/2014/main" id="{AD062A84-2796-4ACA-9B9F-942EBBF9F009}"/>
               </a:ext>
             </a:extLst>
           </p:cNvPr>
@@ -32730,7 +32742,7 @@
           <p:cNvPr id="30" name="Shape 28">
             <a:extLst xmlns:a="http://schemas.openxmlformats.org/drawingml/2006/main">
               <a:ext uri="{FF2B5EF4-FFF2-40B4-BE49-F238E27FC236}">
-                <a16:creationId xmlns:a16="http://schemas.microsoft.com/office/drawing/2014/main" id="{4D33C7D9-4BE6-4CFE-9077-EE0DA3341C25}"/>
+                <a16:creationId xmlns:a16="http://schemas.microsoft.com/office/drawing/2014/main" id="{813B55CF-B8CC-4F2B-B02D-ED2200340308}"/>
               </a:ext>
             </a:extLst>
           </p:cNvPr>
@@ -32777,7 +32789,7 @@
           <p:cNvPr id="31" name="Text 29">
             <a:extLst xmlns:a="http://schemas.openxmlformats.org/drawingml/2006/main">
               <a:ext uri="{FF2B5EF4-FFF2-40B4-BE49-F238E27FC236}">
-                <a16:creationId xmlns:a16="http://schemas.microsoft.com/office/drawing/2014/main" id="{565E0263-EED3-4E1E-B972-F4EF09A808A3}"/>
+                <a16:creationId xmlns:a16="http://schemas.microsoft.com/office/drawing/2014/main" id="{F7470EAF-28B6-4972-A3CF-B67E2562C459}"/>
               </a:ext>
             </a:extLst>
           </p:cNvPr>
@@ -32823,7 +32835,7 @@
     </p:spTree>
     <p:extLst>
       <p:ext uri="{BB962C8B-B14F-4D97-AF65-F5344CB8AC3E}">
-        <p14:creationId xmlns:p14="http://schemas.microsoft.com/office/powerpoint/2010/main" val="1180468761"/>
+        <p14:creationId xmlns:p14="http://schemas.microsoft.com/office/powerpoint/2010/main" val="1549658801"/>
       </p:ext>
     </p:extLst>
   </p:cSld>
@@ -32854,7 +32866,7 @@
           <p:cNvPr id="2" name="Text 0">
             <a:extLst xmlns:a="http://schemas.openxmlformats.org/drawingml/2006/main">
               <a:ext uri="{FF2B5EF4-FFF2-40B4-BE49-F238E27FC236}">
-                <a16:creationId xmlns:a16="http://schemas.microsoft.com/office/drawing/2014/main" id="{BBF1F7DC-CA3B-491E-BA17-609992584FE8}"/>
+                <a16:creationId xmlns:a16="http://schemas.microsoft.com/office/drawing/2014/main" id="{C3442F36-DA73-4382-BC71-1FBDBBC88878}"/>
               </a:ext>
             </a:extLst>
           </p:cNvPr>
@@ -32899,7 +32911,7 @@
           <p:cNvPr id="3" name="Text 1">
             <a:extLst xmlns:a="http://schemas.openxmlformats.org/drawingml/2006/main">
               <a:ext uri="{FF2B5EF4-FFF2-40B4-BE49-F238E27FC236}">
-                <a16:creationId xmlns:a16="http://schemas.microsoft.com/office/drawing/2014/main" id="{2838053A-1B4A-43BE-B07E-F69A7A6A4D0A}"/>
+                <a16:creationId xmlns:a16="http://schemas.microsoft.com/office/drawing/2014/main" id="{9567E7E1-4539-46AB-9BB9-87A23BFDA6AB}"/>
               </a:ext>
             </a:extLst>
           </p:cNvPr>
@@ -32944,7 +32956,7 @@
           <p:cNvPr id="4" name="Text 2">
             <a:extLst xmlns:a="http://schemas.openxmlformats.org/drawingml/2006/main">
               <a:ext uri="{FF2B5EF4-FFF2-40B4-BE49-F238E27FC236}">
-                <a16:creationId xmlns:a16="http://schemas.microsoft.com/office/drawing/2014/main" id="{9E5B8606-98A1-475F-B8C2-85BA1374F9FE}"/>
+                <a16:creationId xmlns:a16="http://schemas.microsoft.com/office/drawing/2014/main" id="{F21B5CA4-76C3-413A-A1A8-94F369E6F1DC}"/>
               </a:ext>
             </a:extLst>
           </p:cNvPr>
@@ -32989,7 +33001,7 @@
           <p:cNvPr id="5" name="Text 3">
             <a:extLst xmlns:a="http://schemas.openxmlformats.org/drawingml/2006/main">
               <a:ext uri="{FF2B5EF4-FFF2-40B4-BE49-F238E27FC236}">
-                <a16:creationId xmlns:a16="http://schemas.microsoft.com/office/drawing/2014/main" id="{F9ABEF75-CB37-4547-8D8B-14C7D755FFC2}"/>
+                <a16:creationId xmlns:a16="http://schemas.microsoft.com/office/drawing/2014/main" id="{5BDCB7F7-6496-4E20-9CDC-5DF1E43554E5}"/>
               </a:ext>
             </a:extLst>
           </p:cNvPr>
@@ -33034,7 +33046,7 @@
           <p:cNvPr id="6" name="Text 4">
             <a:extLst xmlns:a="http://schemas.openxmlformats.org/drawingml/2006/main">
               <a:ext uri="{FF2B5EF4-FFF2-40B4-BE49-F238E27FC236}">
-                <a16:creationId xmlns:a16="http://schemas.microsoft.com/office/drawing/2014/main" id="{7C49882B-AFD7-44BE-B92A-30873C6338B5}"/>
+                <a16:creationId xmlns:a16="http://schemas.microsoft.com/office/drawing/2014/main" id="{9E4CCF7E-0CF1-4418-AE5C-8718F9BE822E}"/>
               </a:ext>
             </a:extLst>
           </p:cNvPr>
@@ -33082,7 +33094,7 @@
           <p:cNvPr id="7" name="Shape 5">
             <a:extLst xmlns:a="http://schemas.openxmlformats.org/drawingml/2006/main">
               <a:ext uri="{FF2B5EF4-FFF2-40B4-BE49-F238E27FC236}">
-                <a16:creationId xmlns:a16="http://schemas.microsoft.com/office/drawing/2014/main" id="{B2E0F2E0-6A17-4281-86CD-D42C7A597FB2}"/>
+                <a16:creationId xmlns:a16="http://schemas.microsoft.com/office/drawing/2014/main" id="{A6D57BF6-8F50-4AC9-8EAA-0FF60E6E5DAD}"/>
               </a:ext>
             </a:extLst>
           </p:cNvPr>
@@ -33129,7 +33141,7 @@
           <p:cNvPr id="8" name="Shape 6">
             <a:extLst xmlns:a="http://schemas.openxmlformats.org/drawingml/2006/main">
               <a:ext uri="{FF2B5EF4-FFF2-40B4-BE49-F238E27FC236}">
-                <a16:creationId xmlns:a16="http://schemas.microsoft.com/office/drawing/2014/main" id="{6527A07C-C768-4130-BD47-6687C5B94482}"/>
+                <a16:creationId xmlns:a16="http://schemas.microsoft.com/office/drawing/2014/main" id="{52EA80B2-1CD7-4A5D-A6BC-20090982C71E}"/>
               </a:ext>
             </a:extLst>
           </p:cNvPr>
@@ -33167,7 +33179,7 @@
           <p:cNvPr id="9" name="Text 7">
             <a:extLst xmlns:a="http://schemas.openxmlformats.org/drawingml/2006/main">
               <a:ext uri="{FF2B5EF4-FFF2-40B4-BE49-F238E27FC236}">
-                <a16:creationId xmlns:a16="http://schemas.microsoft.com/office/drawing/2014/main" id="{57B5CFFD-8284-4379-9DCA-C7E9D447228A}"/>
+                <a16:creationId xmlns:a16="http://schemas.microsoft.com/office/drawing/2014/main" id="{444B385B-570C-4274-858E-9CBFAF7F8D92}"/>
               </a:ext>
             </a:extLst>
           </p:cNvPr>
@@ -33212,7 +33224,7 @@
           <p:cNvPr id="10" name="Text 8">
             <a:extLst xmlns:a="http://schemas.openxmlformats.org/drawingml/2006/main">
               <a:ext uri="{FF2B5EF4-FFF2-40B4-BE49-F238E27FC236}">
-                <a16:creationId xmlns:a16="http://schemas.microsoft.com/office/drawing/2014/main" id="{8C29C541-8EB6-437B-BAF7-77E59D6D91BD}"/>
+                <a16:creationId xmlns:a16="http://schemas.microsoft.com/office/drawing/2014/main" id="{C3B88C4F-6752-4270-82D9-9ECB418C6469}"/>
               </a:ext>
             </a:extLst>
           </p:cNvPr>
@@ -33257,7 +33269,7 @@
           <p:cNvPr id="11" name="Text 9">
             <a:extLst xmlns:a="http://schemas.openxmlformats.org/drawingml/2006/main">
               <a:ext uri="{FF2B5EF4-FFF2-40B4-BE49-F238E27FC236}">
-                <a16:creationId xmlns:a16="http://schemas.microsoft.com/office/drawing/2014/main" id="{ABC4DD25-F29E-4C63-BFB4-4814CBF04DB3}"/>
+                <a16:creationId xmlns:a16="http://schemas.microsoft.com/office/drawing/2014/main" id="{43FFEA6D-D3B3-4A12-95CA-8E975D134DBF}"/>
               </a:ext>
             </a:extLst>
           </p:cNvPr>
@@ -33305,7 +33317,7 @@
           <p:cNvPr id="12" name="Shape 10">
             <a:extLst xmlns:a="http://schemas.openxmlformats.org/drawingml/2006/main">
               <a:ext uri="{FF2B5EF4-FFF2-40B4-BE49-F238E27FC236}">
-                <a16:creationId xmlns:a16="http://schemas.microsoft.com/office/drawing/2014/main" id="{D83E8014-1C57-47E6-AEEB-6716C9A3472F}"/>
+                <a16:creationId xmlns:a16="http://schemas.microsoft.com/office/drawing/2014/main" id="{3BEADF67-1434-4F13-BFE0-3322EC7FA33E}"/>
               </a:ext>
             </a:extLst>
           </p:cNvPr>
@@ -33352,7 +33364,7 @@
           <p:cNvPr id="13" name="Shape 11">
             <a:extLst xmlns:a="http://schemas.openxmlformats.org/drawingml/2006/main">
               <a:ext uri="{FF2B5EF4-FFF2-40B4-BE49-F238E27FC236}">
-                <a16:creationId xmlns:a16="http://schemas.microsoft.com/office/drawing/2014/main" id="{BB8B61FA-6FAD-4014-A8B0-7FEE9C71E696}"/>
+                <a16:creationId xmlns:a16="http://schemas.microsoft.com/office/drawing/2014/main" id="{F5FFE8D8-42DB-435E-90BA-F0FC34066DCD}"/>
               </a:ext>
             </a:extLst>
           </p:cNvPr>
@@ -33390,7 +33402,7 @@
           <p:cNvPr id="14" name="Text 12">
             <a:extLst xmlns:a="http://schemas.openxmlformats.org/drawingml/2006/main">
               <a:ext uri="{FF2B5EF4-FFF2-40B4-BE49-F238E27FC236}">
-                <a16:creationId xmlns:a16="http://schemas.microsoft.com/office/drawing/2014/main" id="{94345BAA-233C-4EAD-8060-FBB452E9B65B}"/>
+                <a16:creationId xmlns:a16="http://schemas.microsoft.com/office/drawing/2014/main" id="{708F6D3E-0799-40E6-9513-972760A4F4D2}"/>
               </a:ext>
             </a:extLst>
           </p:cNvPr>
@@ -33435,7 +33447,7 @@
           <p:cNvPr id="15" name="Text 13">
             <a:extLst xmlns:a="http://schemas.openxmlformats.org/drawingml/2006/main">
               <a:ext uri="{FF2B5EF4-FFF2-40B4-BE49-F238E27FC236}">
-                <a16:creationId xmlns:a16="http://schemas.microsoft.com/office/drawing/2014/main" id="{B4EC8612-972F-4CCB-8D53-C4B53CE49827}"/>
+                <a16:creationId xmlns:a16="http://schemas.microsoft.com/office/drawing/2014/main" id="{6F34D38D-B1C9-43FE-AC04-7918935CFA3B}"/>
               </a:ext>
             </a:extLst>
           </p:cNvPr>
@@ -33480,7 +33492,7 @@
           <p:cNvPr id="16" name="Text 14">
             <a:extLst xmlns:a="http://schemas.openxmlformats.org/drawingml/2006/main">
               <a:ext uri="{FF2B5EF4-FFF2-40B4-BE49-F238E27FC236}">
-                <a16:creationId xmlns:a16="http://schemas.microsoft.com/office/drawing/2014/main" id="{9CED9C1E-596B-47A3-A268-7EB835193018}"/>
+                <a16:creationId xmlns:a16="http://schemas.microsoft.com/office/drawing/2014/main" id="{40FADDFB-78E2-4788-9D10-B98D4F42B108}"/>
               </a:ext>
             </a:extLst>
           </p:cNvPr>
@@ -33528,7 +33540,7 @@
           <p:cNvPr id="17" name="Shape 15">
             <a:extLst xmlns:a="http://schemas.openxmlformats.org/drawingml/2006/main">
               <a:ext uri="{FF2B5EF4-FFF2-40B4-BE49-F238E27FC236}">
-                <a16:creationId xmlns:a16="http://schemas.microsoft.com/office/drawing/2014/main" id="{C9B179A3-4D68-4A7E-BC5F-D9652A85DF70}"/>
+                <a16:creationId xmlns:a16="http://schemas.microsoft.com/office/drawing/2014/main" id="{1B5B1FDD-4B48-4E38-8327-48A09E0EBD66}"/>
               </a:ext>
             </a:extLst>
           </p:cNvPr>
@@ -33575,7 +33587,7 @@
           <p:cNvPr id="18" name="Shape 16">
             <a:extLst xmlns:a="http://schemas.openxmlformats.org/drawingml/2006/main">
               <a:ext uri="{FF2B5EF4-FFF2-40B4-BE49-F238E27FC236}">
-                <a16:creationId xmlns:a16="http://schemas.microsoft.com/office/drawing/2014/main" id="{3C4232E1-31A0-4002-B16A-ADE14BE21DDD}"/>
+                <a16:creationId xmlns:a16="http://schemas.microsoft.com/office/drawing/2014/main" id="{D29D0BC3-FBAA-4064-B337-1D9BE54FCDD0}"/>
               </a:ext>
             </a:extLst>
           </p:cNvPr>
@@ -33613,7 +33625,7 @@
           <p:cNvPr id="19" name="Text 17">
             <a:extLst xmlns:a="http://schemas.openxmlformats.org/drawingml/2006/main">
               <a:ext uri="{FF2B5EF4-FFF2-40B4-BE49-F238E27FC236}">
-                <a16:creationId xmlns:a16="http://schemas.microsoft.com/office/drawing/2014/main" id="{45F22E27-01A7-421C-8EB4-338FA75164E7}"/>
+                <a16:creationId xmlns:a16="http://schemas.microsoft.com/office/drawing/2014/main" id="{92E28994-D84F-476D-9831-E9E38EA236D8}"/>
               </a:ext>
             </a:extLst>
           </p:cNvPr>
@@ -33658,7 +33670,7 @@
           <p:cNvPr id="20" name="Text 18">
             <a:extLst xmlns:a="http://schemas.openxmlformats.org/drawingml/2006/main">
               <a:ext uri="{FF2B5EF4-FFF2-40B4-BE49-F238E27FC236}">
-                <a16:creationId xmlns:a16="http://schemas.microsoft.com/office/drawing/2014/main" id="{6D0A4F1E-7CCA-4408-8E1E-7392259294B5}"/>
+                <a16:creationId xmlns:a16="http://schemas.microsoft.com/office/drawing/2014/main" id="{D5A8FFDD-3D77-4330-BB27-46C7CEFF4F86}"/>
               </a:ext>
             </a:extLst>
           </p:cNvPr>
@@ -33703,7 +33715,7 @@
           <p:cNvPr id="21" name="Text 19">
             <a:extLst xmlns:a="http://schemas.openxmlformats.org/drawingml/2006/main">
               <a:ext uri="{FF2B5EF4-FFF2-40B4-BE49-F238E27FC236}">
-                <a16:creationId xmlns:a16="http://schemas.microsoft.com/office/drawing/2014/main" id="{C473A75F-80AB-4411-A48E-47307B67B6E1}"/>
+                <a16:creationId xmlns:a16="http://schemas.microsoft.com/office/drawing/2014/main" id="{99586589-4474-48E8-9A72-FD0284DF2845}"/>
               </a:ext>
             </a:extLst>
           </p:cNvPr>
@@ -33751,7 +33763,7 @@
           <p:cNvPr id="22" name="Text 20">
             <a:extLst xmlns:a="http://schemas.openxmlformats.org/drawingml/2006/main">
               <a:ext uri="{FF2B5EF4-FFF2-40B4-BE49-F238E27FC236}">
-                <a16:creationId xmlns:a16="http://schemas.microsoft.com/office/drawing/2014/main" id="{827FEA1D-7E7C-4756-BA85-7403FA7FA6CC}"/>
+                <a16:creationId xmlns:a16="http://schemas.microsoft.com/office/drawing/2014/main" id="{E195D87F-D0A8-42BA-A875-B2DF2EC62CD1}"/>
               </a:ext>
             </a:extLst>
           </p:cNvPr>
@@ -33796,7 +33808,7 @@
           <p:cNvPr id="23" name="Shape 21">
             <a:extLst xmlns:a="http://schemas.openxmlformats.org/drawingml/2006/main">
               <a:ext uri="{FF2B5EF4-FFF2-40B4-BE49-F238E27FC236}">
-                <a16:creationId xmlns:a16="http://schemas.microsoft.com/office/drawing/2014/main" id="{10F0F3F9-2830-45E3-BD47-44CFA38BDD58}"/>
+                <a16:creationId xmlns:a16="http://schemas.microsoft.com/office/drawing/2014/main" id="{39CC4B74-D91D-483B-9330-C0276FC2D1F6}"/>
               </a:ext>
             </a:extLst>
           </p:cNvPr>
@@ -33843,7 +33855,7 @@
           <p:cNvPr id="24" name="Text 22">
             <a:extLst xmlns:a="http://schemas.openxmlformats.org/drawingml/2006/main">
               <a:ext uri="{FF2B5EF4-FFF2-40B4-BE49-F238E27FC236}">
-                <a16:creationId xmlns:a16="http://schemas.microsoft.com/office/drawing/2014/main" id="{3D3CF8CF-594E-4D8E-9B91-2721838A619C}"/>
+                <a16:creationId xmlns:a16="http://schemas.microsoft.com/office/drawing/2014/main" id="{6DCBBAAA-6F22-4969-8B5E-F2034482E271}"/>
               </a:ext>
             </a:extLst>
           </p:cNvPr>
@@ -33888,7 +33900,7 @@
           <p:cNvPr id="25" name="Text 23">
             <a:extLst xmlns:a="http://schemas.openxmlformats.org/drawingml/2006/main">
               <a:ext uri="{FF2B5EF4-FFF2-40B4-BE49-F238E27FC236}">
-                <a16:creationId xmlns:a16="http://schemas.microsoft.com/office/drawing/2014/main" id="{7386946C-40C9-4019-9781-9F37AC9F7AA7}"/>
+                <a16:creationId xmlns:a16="http://schemas.microsoft.com/office/drawing/2014/main" id="{6B19254B-791C-4E70-AA15-555FD3FC200E}"/>
               </a:ext>
             </a:extLst>
           </p:cNvPr>
@@ -33955,7 +33967,7 @@
           <p:cNvPr id="26" name="Shape 24">
             <a:extLst xmlns:a="http://schemas.openxmlformats.org/drawingml/2006/main">
               <a:ext uri="{FF2B5EF4-FFF2-40B4-BE49-F238E27FC236}">
-                <a16:creationId xmlns:a16="http://schemas.microsoft.com/office/drawing/2014/main" id="{58E491B7-C995-4E5B-ADD2-9CAE2EEC0212}"/>
+                <a16:creationId xmlns:a16="http://schemas.microsoft.com/office/drawing/2014/main" id="{239D225B-62FF-4C5F-9873-C2A08F25BF12}"/>
               </a:ext>
             </a:extLst>
           </p:cNvPr>
@@ -34002,7 +34014,7 @@
           <p:cNvPr id="27" name="Text 25">
             <a:extLst xmlns:a="http://schemas.openxmlformats.org/drawingml/2006/main">
               <a:ext uri="{FF2B5EF4-FFF2-40B4-BE49-F238E27FC236}">
-                <a16:creationId xmlns:a16="http://schemas.microsoft.com/office/drawing/2014/main" id="{15EFCC4C-AE25-4D75-AA74-B3B20820F837}"/>
+                <a16:creationId xmlns:a16="http://schemas.microsoft.com/office/drawing/2014/main" id="{C9EA20D0-0F9E-4AFC-88C0-054380990BC8}"/>
               </a:ext>
             </a:extLst>
           </p:cNvPr>
@@ -34047,7 +34059,7 @@
           <p:cNvPr id="28" name="Text 26">
             <a:extLst xmlns:a="http://schemas.openxmlformats.org/drawingml/2006/main">
               <a:ext uri="{FF2B5EF4-FFF2-40B4-BE49-F238E27FC236}">
-                <a16:creationId xmlns:a16="http://schemas.microsoft.com/office/drawing/2014/main" id="{70AC7DC9-BCD8-4E0E-BEE0-30CA20991E28}"/>
+                <a16:creationId xmlns:a16="http://schemas.microsoft.com/office/drawing/2014/main" id="{F76B8F14-F7D4-413F-90F8-5C73937622AF}"/>
               </a:ext>
             </a:extLst>
           </p:cNvPr>
@@ -34114,7 +34126,7 @@
           <p:cNvPr id="29" name="Shape 27">
             <a:extLst xmlns:a="http://schemas.openxmlformats.org/drawingml/2006/main">
               <a:ext uri="{FF2B5EF4-FFF2-40B4-BE49-F238E27FC236}">
-                <a16:creationId xmlns:a16="http://schemas.microsoft.com/office/drawing/2014/main" id="{015F96D1-1402-4099-8340-C6A506B4A96E}"/>
+                <a16:creationId xmlns:a16="http://schemas.microsoft.com/office/drawing/2014/main" id="{3577478E-B166-42AA-97CF-50E38A95BED3}"/>
               </a:ext>
             </a:extLst>
           </p:cNvPr>
@@ -34161,7 +34173,7 @@
           <p:cNvPr id="30" name="Text 28">
             <a:extLst xmlns:a="http://schemas.openxmlformats.org/drawingml/2006/main">
               <a:ext uri="{FF2B5EF4-FFF2-40B4-BE49-F238E27FC236}">
-                <a16:creationId xmlns:a16="http://schemas.microsoft.com/office/drawing/2014/main" id="{94A906E9-3A59-4F20-BF98-764FDAC7D84B}"/>
+                <a16:creationId xmlns:a16="http://schemas.microsoft.com/office/drawing/2014/main" id="{3993FD70-F8AA-41AD-96A1-357AB7E18897}"/>
               </a:ext>
             </a:extLst>
           </p:cNvPr>
@@ -34206,7 +34218,7 @@
           <p:cNvPr id="31" name="Text 29">
             <a:extLst xmlns:a="http://schemas.openxmlformats.org/drawingml/2006/main">
               <a:ext uri="{FF2B5EF4-FFF2-40B4-BE49-F238E27FC236}">
-                <a16:creationId xmlns:a16="http://schemas.microsoft.com/office/drawing/2014/main" id="{BCBB0499-3F90-4703-BCB5-C8F4875132C6}"/>
+                <a16:creationId xmlns:a16="http://schemas.microsoft.com/office/drawing/2014/main" id="{F5A484B2-9A1E-46F2-AD72-D59D181762DB}"/>
               </a:ext>
             </a:extLst>
           </p:cNvPr>
@@ -34273,7 +34285,7 @@
           <p:cNvPr id="32" name="Shape 30">
             <a:extLst xmlns:a="http://schemas.openxmlformats.org/drawingml/2006/main">
               <a:ext uri="{FF2B5EF4-FFF2-40B4-BE49-F238E27FC236}">
-                <a16:creationId xmlns:a16="http://schemas.microsoft.com/office/drawing/2014/main" id="{6A34FE96-5DE0-44C0-812B-FE678CC666B2}"/>
+                <a16:creationId xmlns:a16="http://schemas.microsoft.com/office/drawing/2014/main" id="{C928D6C3-6AB2-4D25-A6D8-0E8FB58F86DA}"/>
               </a:ext>
             </a:extLst>
           </p:cNvPr>
@@ -34320,7 +34332,7 @@
           <p:cNvPr id="33" name="Text 31">
             <a:extLst xmlns:a="http://schemas.openxmlformats.org/drawingml/2006/main">
               <a:ext uri="{FF2B5EF4-FFF2-40B4-BE49-F238E27FC236}">
-                <a16:creationId xmlns:a16="http://schemas.microsoft.com/office/drawing/2014/main" id="{D3D79B71-E410-4CBD-AF26-695A597C55AF}"/>
+                <a16:creationId xmlns:a16="http://schemas.microsoft.com/office/drawing/2014/main" id="{0CF5A98E-0EF8-49D7-8599-AEB361648E2A}"/>
               </a:ext>
             </a:extLst>
           </p:cNvPr>
@@ -34365,7 +34377,7 @@
           <p:cNvPr id="34" name="Text 32">
             <a:extLst xmlns:a="http://schemas.openxmlformats.org/drawingml/2006/main">
               <a:ext uri="{FF2B5EF4-FFF2-40B4-BE49-F238E27FC236}">
-                <a16:creationId xmlns:a16="http://schemas.microsoft.com/office/drawing/2014/main" id="{5B90F61B-E333-4442-B692-4582F285F829}"/>
+                <a16:creationId xmlns:a16="http://schemas.microsoft.com/office/drawing/2014/main" id="{F411439B-33E6-4F76-AF6B-063D2EA03E34}"/>
               </a:ext>
             </a:extLst>
           </p:cNvPr>
@@ -34432,7 +34444,7 @@
           <p:cNvPr id="35" name="Shape 33">
             <a:extLst xmlns:a="http://schemas.openxmlformats.org/drawingml/2006/main">
               <a:ext uri="{FF2B5EF4-FFF2-40B4-BE49-F238E27FC236}">
-                <a16:creationId xmlns:a16="http://schemas.microsoft.com/office/drawing/2014/main" id="{5450ABE8-E744-4D8F-9866-12C7726C9EA7}"/>
+                <a16:creationId xmlns:a16="http://schemas.microsoft.com/office/drawing/2014/main" id="{32ADCB52-436C-4D8F-AC3D-4A939254E20E}"/>
               </a:ext>
             </a:extLst>
           </p:cNvPr>
@@ -34479,7 +34491,7 @@
           <p:cNvPr id="36" name="Text 34">
             <a:extLst xmlns:a="http://schemas.openxmlformats.org/drawingml/2006/main">
               <a:ext uri="{FF2B5EF4-FFF2-40B4-BE49-F238E27FC236}">
-                <a16:creationId xmlns:a16="http://schemas.microsoft.com/office/drawing/2014/main" id="{8D7AEC3F-E5A8-4837-97E7-39341D253EEC}"/>
+                <a16:creationId xmlns:a16="http://schemas.microsoft.com/office/drawing/2014/main" id="{5274F13A-2544-48EA-AB47-BD4097B25C3C}"/>
               </a:ext>
             </a:extLst>
           </p:cNvPr>
@@ -34524,7 +34536,7 @@
           <p:cNvPr id="37" name="Text 35">
             <a:extLst xmlns:a="http://schemas.openxmlformats.org/drawingml/2006/main">
               <a:ext uri="{FF2B5EF4-FFF2-40B4-BE49-F238E27FC236}">
-                <a16:creationId xmlns:a16="http://schemas.microsoft.com/office/drawing/2014/main" id="{E570FB15-2008-4109-A1DA-9E55757147DF}"/>
+                <a16:creationId xmlns:a16="http://schemas.microsoft.com/office/drawing/2014/main" id="{E86FFDD6-7FD4-4934-A26D-AFED3BDDFF67}"/>
               </a:ext>
             </a:extLst>
           </p:cNvPr>
@@ -34591,7 +34603,7 @@
           <p:cNvPr id="38" name="Text 36">
             <a:extLst xmlns:a="http://schemas.openxmlformats.org/drawingml/2006/main">
               <a:ext uri="{FF2B5EF4-FFF2-40B4-BE49-F238E27FC236}">
-                <a16:creationId xmlns:a16="http://schemas.microsoft.com/office/drawing/2014/main" id="{34A0D58B-EC31-4E0D-8D0C-8DB504ACBB08}"/>
+                <a16:creationId xmlns:a16="http://schemas.microsoft.com/office/drawing/2014/main" id="{AB36953F-13D8-4CAC-8371-72B995F813D6}"/>
               </a:ext>
             </a:extLst>
           </p:cNvPr>
@@ -34637,7 +34649,7 @@
     </p:spTree>
     <p:extLst>
       <p:ext uri="{BB962C8B-B14F-4D97-AF65-F5344CB8AC3E}">
-        <p14:creationId xmlns:p14="http://schemas.microsoft.com/office/powerpoint/2010/main" val="1756275376"/>
+        <p14:creationId xmlns:p14="http://schemas.microsoft.com/office/powerpoint/2010/main" val="146982927"/>
       </p:ext>
     </p:extLst>
   </p:cSld>

--- a/paper/slides/compiling-recurrent-agent-workflows-into-guarded-programs-detailed.pptx
+++ b/paper/slides/compiling-recurrent-agent-workflows-into-guarded-programs-detailed.pptx
@@ -2,35 +2,35 @@
 <file path=ppt/presentation.xml><?xml version="1.0" encoding="utf-8"?>
 <p:presentation xmlns:p="http://schemas.openxmlformats.org/presentationml/2006/main">
   <p:sldMasterIdLst>
-    <p:sldMasterId xmlns:r="http://schemas.openxmlformats.org/officeDocument/2006/relationships" id="2147483648" r:id="R2917628162914d1e"/>
+    <p:sldMasterId xmlns:r="http://schemas.openxmlformats.org/officeDocument/2006/relationships" id="2147483648" r:id="R3b91fed2d1a84883"/>
   </p:sldMasterIdLst>
   <p:notesMasterIdLst>
-    <p:notesMasterId xmlns:r="http://schemas.openxmlformats.org/officeDocument/2006/relationships" r:id="R51155b39e1c743b9"/>
+    <p:notesMasterId xmlns:r="http://schemas.openxmlformats.org/officeDocument/2006/relationships" r:id="Rd9d1863c62fe4132"/>
   </p:notesMasterIdLst>
   <p:sldIdLst>
-    <p:sldId xmlns:r="http://schemas.openxmlformats.org/officeDocument/2006/relationships" id="256" r:id="R7b200759591140a4"/>
-    <p:sldId xmlns:r="http://schemas.openxmlformats.org/officeDocument/2006/relationships" id="257" r:id="Rcdd073d1231e447e"/>
-    <p:sldId xmlns:r="http://schemas.openxmlformats.org/officeDocument/2006/relationships" id="258" r:id="R2f3fb017e8f44618"/>
-    <p:sldId xmlns:r="http://schemas.openxmlformats.org/officeDocument/2006/relationships" id="259" r:id="R19ad41f41c4d4b4b"/>
-    <p:sldId xmlns:r="http://schemas.openxmlformats.org/officeDocument/2006/relationships" id="260" r:id="Rb66844644b5a403e"/>
-    <p:sldId xmlns:r="http://schemas.openxmlformats.org/officeDocument/2006/relationships" id="261" r:id="Ra97694e12af44b92"/>
-    <p:sldId xmlns:r="http://schemas.openxmlformats.org/officeDocument/2006/relationships" id="262" r:id="Ra9ce098ec7d0422c"/>
-    <p:sldId xmlns:r="http://schemas.openxmlformats.org/officeDocument/2006/relationships" id="263" r:id="R08f1a90d97044bb6"/>
-    <p:sldId xmlns:r="http://schemas.openxmlformats.org/officeDocument/2006/relationships" id="264" r:id="R5b79bf1e2fe844f0"/>
-    <p:sldId xmlns:r="http://schemas.openxmlformats.org/officeDocument/2006/relationships" id="265" r:id="R34e6cc880a904674"/>
-    <p:sldId xmlns:r="http://schemas.openxmlformats.org/officeDocument/2006/relationships" id="266" r:id="R0891b48b0fb741ec"/>
-    <p:sldId xmlns:r="http://schemas.openxmlformats.org/officeDocument/2006/relationships" id="267" r:id="R472ae0aeff474ef4"/>
-    <p:sldId xmlns:r="http://schemas.openxmlformats.org/officeDocument/2006/relationships" id="268" r:id="Ra2b45d4f686c482c"/>
-    <p:sldId xmlns:r="http://schemas.openxmlformats.org/officeDocument/2006/relationships" id="269" r:id="R22662b8bd250428f"/>
-    <p:sldId xmlns:r="http://schemas.openxmlformats.org/officeDocument/2006/relationships" id="270" r:id="R5cf9ef7b20ca405f"/>
-    <p:sldId xmlns:r="http://schemas.openxmlformats.org/officeDocument/2006/relationships" id="271" r:id="R7a78c30dd57a440c"/>
-    <p:sldId xmlns:r="http://schemas.openxmlformats.org/officeDocument/2006/relationships" id="272" r:id="Rce313349cf3245a1"/>
-    <p:sldId xmlns:r="http://schemas.openxmlformats.org/officeDocument/2006/relationships" id="273" r:id="R76148ec7f38e46d3"/>
-    <p:sldId xmlns:r="http://schemas.openxmlformats.org/officeDocument/2006/relationships" id="274" r:id="R748f5cf51c074193"/>
-    <p:sldId xmlns:r="http://schemas.openxmlformats.org/officeDocument/2006/relationships" id="275" r:id="R4425bde99f874ad8"/>
-    <p:sldId xmlns:r="http://schemas.openxmlformats.org/officeDocument/2006/relationships" id="276" r:id="R687d7ef8eb0c4c16"/>
-    <p:sldId xmlns:r="http://schemas.openxmlformats.org/officeDocument/2006/relationships" id="277" r:id="R456f80bb21bd41a5"/>
-    <p:sldId xmlns:r="http://schemas.openxmlformats.org/officeDocument/2006/relationships" id="278" r:id="Rc5f5e43c2a30464e"/>
+    <p:sldId xmlns:r="http://schemas.openxmlformats.org/officeDocument/2006/relationships" id="256" r:id="Rf93737b04bf6451e"/>
+    <p:sldId xmlns:r="http://schemas.openxmlformats.org/officeDocument/2006/relationships" id="257" r:id="Rc5f9c758726348de"/>
+    <p:sldId xmlns:r="http://schemas.openxmlformats.org/officeDocument/2006/relationships" id="258" r:id="R1e56a1bae0104226"/>
+    <p:sldId xmlns:r="http://schemas.openxmlformats.org/officeDocument/2006/relationships" id="259" r:id="Rc71e23c4d1e8446b"/>
+    <p:sldId xmlns:r="http://schemas.openxmlformats.org/officeDocument/2006/relationships" id="260" r:id="R9657b371e7114e85"/>
+    <p:sldId xmlns:r="http://schemas.openxmlformats.org/officeDocument/2006/relationships" id="261" r:id="Rd5eff45a8de548f6"/>
+    <p:sldId xmlns:r="http://schemas.openxmlformats.org/officeDocument/2006/relationships" id="262" r:id="R0bfe3dc91c414645"/>
+    <p:sldId xmlns:r="http://schemas.openxmlformats.org/officeDocument/2006/relationships" id="263" r:id="Raf8481ddfee24319"/>
+    <p:sldId xmlns:r="http://schemas.openxmlformats.org/officeDocument/2006/relationships" id="264" r:id="R80363f276cc44963"/>
+    <p:sldId xmlns:r="http://schemas.openxmlformats.org/officeDocument/2006/relationships" id="265" r:id="R1b75a605cfad4f46"/>
+    <p:sldId xmlns:r="http://schemas.openxmlformats.org/officeDocument/2006/relationships" id="266" r:id="Ra29b4003fd6142a4"/>
+    <p:sldId xmlns:r="http://schemas.openxmlformats.org/officeDocument/2006/relationships" id="267" r:id="R0e10cb8b429a473d"/>
+    <p:sldId xmlns:r="http://schemas.openxmlformats.org/officeDocument/2006/relationships" id="268" r:id="R28d8c54b126e46b6"/>
+    <p:sldId xmlns:r="http://schemas.openxmlformats.org/officeDocument/2006/relationships" id="269" r:id="Rf9949b1fe36045fe"/>
+    <p:sldId xmlns:r="http://schemas.openxmlformats.org/officeDocument/2006/relationships" id="270" r:id="R4901a37a49c2464d"/>
+    <p:sldId xmlns:r="http://schemas.openxmlformats.org/officeDocument/2006/relationships" id="271" r:id="R7eace5bdc09641d8"/>
+    <p:sldId xmlns:r="http://schemas.openxmlformats.org/officeDocument/2006/relationships" id="272" r:id="Rba4ce52713bb4979"/>
+    <p:sldId xmlns:r="http://schemas.openxmlformats.org/officeDocument/2006/relationships" id="273" r:id="Raeb712f68ae54d30"/>
+    <p:sldId xmlns:r="http://schemas.openxmlformats.org/officeDocument/2006/relationships" id="274" r:id="Rafaf854ae72a40ce"/>
+    <p:sldId xmlns:r="http://schemas.openxmlformats.org/officeDocument/2006/relationships" id="275" r:id="R1a70a509fa6043ce"/>
+    <p:sldId xmlns:r="http://schemas.openxmlformats.org/officeDocument/2006/relationships" id="276" r:id="Ra6ab8ee14c62445c"/>
+    <p:sldId xmlns:r="http://schemas.openxmlformats.org/officeDocument/2006/relationships" id="277" r:id="R545a205d38fc40d2"/>
+    <p:sldId xmlns:r="http://schemas.openxmlformats.org/officeDocument/2006/relationships" id="278" r:id="Rdb2e4e95b07042ec"/>
   </p:sldIdLst>
   <p:sldSz cx="12192000" cy="6858000"/>
   <p:notesSz cx="6858000" cy="9144000"/>
@@ -2072,7 +2072,7 @@
   </p:cSld>
   <p:clrMap bg1="lt1" tx1="dk1" bg2="lt2" tx2="dk2" accent1="accent1" accent2="accent2" accent3="accent3" accent4="accent4" accent5="accent5" accent6="accent6" hlink="hlink" folHlink="folHlink"/>
   <p:sldLayoutIdLst>
-    <p:sldLayoutId xmlns:r="http://schemas.openxmlformats.org/officeDocument/2006/relationships" id="2147483649" r:id="R526642455d8c4fe3"/>
+    <p:sldLayoutId xmlns:r="http://schemas.openxmlformats.org/officeDocument/2006/relationships" id="2147483649" r:id="Re9b9c0a98c2c4553"/>
   </p:sldLayoutIdLst>
   <p:txStyles>
     <p:titleStyle>
@@ -3737,7 +3737,7 @@
           <p:cNvPr id="2" name="Shape 0">
             <a:extLst xmlns:a="http://schemas.openxmlformats.org/drawingml/2006/main">
               <a:ext uri="{FF2B5EF4-FFF2-40B4-BE49-F238E27FC236}">
-                <a16:creationId xmlns:a16="http://schemas.microsoft.com/office/drawing/2014/main" id="{A471E1E7-BD24-4DF5-9E2C-E696E8FAFD2E}"/>
+                <a16:creationId xmlns:a16="http://schemas.microsoft.com/office/drawing/2014/main" id="{56750E6C-F6B4-4CAE-94C6-02C9BF4186BF}"/>
               </a:ext>
             </a:extLst>
           </p:cNvPr>
@@ -3777,7 +3777,7 @@
           <p:cNvPr id="3" name="Shape 1">
             <a:extLst xmlns:a="http://schemas.openxmlformats.org/drawingml/2006/main">
               <a:ext uri="{FF2B5EF4-FFF2-40B4-BE49-F238E27FC236}">
-                <a16:creationId xmlns:a16="http://schemas.microsoft.com/office/drawing/2014/main" id="{C0B08A06-A798-4348-8F46-F636D291A458}"/>
+                <a16:creationId xmlns:a16="http://schemas.microsoft.com/office/drawing/2014/main" id="{6C7B56F2-88B9-4E37-95CD-8969BFB78A15}"/>
               </a:ext>
             </a:extLst>
           </p:cNvPr>
@@ -3817,7 +3817,7 @@
           <p:cNvPr id="4" name="Shape 2">
             <a:extLst xmlns:a="http://schemas.openxmlformats.org/drawingml/2006/main">
               <a:ext uri="{FF2B5EF4-FFF2-40B4-BE49-F238E27FC236}">
-                <a16:creationId xmlns:a16="http://schemas.microsoft.com/office/drawing/2014/main" id="{58710CAD-AFC3-44E5-B458-D1117E366FAF}"/>
+                <a16:creationId xmlns:a16="http://schemas.microsoft.com/office/drawing/2014/main" id="{16B859BA-E41D-4730-814A-FD7477665BA5}"/>
               </a:ext>
             </a:extLst>
           </p:cNvPr>
@@ -3857,7 +3857,7 @@
           <p:cNvPr id="5" name="Text 3">
             <a:extLst xmlns:a="http://schemas.openxmlformats.org/drawingml/2006/main">
               <a:ext uri="{FF2B5EF4-FFF2-40B4-BE49-F238E27FC236}">
-                <a16:creationId xmlns:a16="http://schemas.microsoft.com/office/drawing/2014/main" id="{E1DAA5CB-A6FA-4353-B1B2-096AF33CC547}"/>
+                <a16:creationId xmlns:a16="http://schemas.microsoft.com/office/drawing/2014/main" id="{2F01FC73-09EE-4519-8CC6-DABF71D3E6B7}"/>
               </a:ext>
             </a:extLst>
           </p:cNvPr>
@@ -3902,7 +3902,7 @@
           <p:cNvPr id="6" name="Text 4">
             <a:extLst xmlns:a="http://schemas.openxmlformats.org/drawingml/2006/main">
               <a:ext uri="{FF2B5EF4-FFF2-40B4-BE49-F238E27FC236}">
-                <a16:creationId xmlns:a16="http://schemas.microsoft.com/office/drawing/2014/main" id="{F83EDA68-DCB7-42BE-ABE0-EB734A51D14F}"/>
+                <a16:creationId xmlns:a16="http://schemas.microsoft.com/office/drawing/2014/main" id="{D4CF04B9-FBB0-4B15-A16D-52F11A3302CE}"/>
               </a:ext>
             </a:extLst>
           </p:cNvPr>
@@ -3950,7 +3950,7 @@
           <p:cNvPr id="7" name="Text 5">
             <a:extLst xmlns:a="http://schemas.openxmlformats.org/drawingml/2006/main">
               <a:ext uri="{FF2B5EF4-FFF2-40B4-BE49-F238E27FC236}">
-                <a16:creationId xmlns:a16="http://schemas.microsoft.com/office/drawing/2014/main" id="{CDA1F912-C113-44DE-B0C0-E901657A8BD3}"/>
+                <a16:creationId xmlns:a16="http://schemas.microsoft.com/office/drawing/2014/main" id="{1EED095E-F259-4853-9D66-D73FB93CF756}"/>
               </a:ext>
             </a:extLst>
           </p:cNvPr>
@@ -4009,7 +4009,7 @@
           <p:cNvPr id="8" name="Text 6">
             <a:extLst xmlns:a="http://schemas.openxmlformats.org/drawingml/2006/main">
               <a:ext uri="{FF2B5EF4-FFF2-40B4-BE49-F238E27FC236}">
-                <a16:creationId xmlns:a16="http://schemas.microsoft.com/office/drawing/2014/main" id="{4632A3E1-F8DB-400A-9F4E-FCEEBF20ED9E}"/>
+                <a16:creationId xmlns:a16="http://schemas.microsoft.com/office/drawing/2014/main" id="{A67C9C4F-1B0B-4A15-ADA1-D8405C8CCF1F}"/>
               </a:ext>
             </a:extLst>
           </p:cNvPr>
@@ -4054,7 +4054,7 @@
           <p:cNvPr id="9" name="Text 7">
             <a:extLst xmlns:a="http://schemas.openxmlformats.org/drawingml/2006/main">
               <a:ext uri="{FF2B5EF4-FFF2-40B4-BE49-F238E27FC236}">
-                <a16:creationId xmlns:a16="http://schemas.microsoft.com/office/drawing/2014/main" id="{FAEF1424-88D7-4216-BE51-595A7086077C}"/>
+                <a16:creationId xmlns:a16="http://schemas.microsoft.com/office/drawing/2014/main" id="{1E677262-6F85-4E00-9C74-4A9BA5FEB14B}"/>
               </a:ext>
             </a:extLst>
           </p:cNvPr>
@@ -4102,7 +4102,7 @@
           <p:cNvPr id="10" name="Text 8">
             <a:extLst xmlns:a="http://schemas.openxmlformats.org/drawingml/2006/main">
               <a:ext uri="{FF2B5EF4-FFF2-40B4-BE49-F238E27FC236}">
-                <a16:creationId xmlns:a16="http://schemas.microsoft.com/office/drawing/2014/main" id="{4D2DB96F-5903-4A38-9915-F33549523277}"/>
+                <a16:creationId xmlns:a16="http://schemas.microsoft.com/office/drawing/2014/main" id="{F04A7E66-F8A9-422D-A710-4AC9B7A59095}"/>
               </a:ext>
             </a:extLst>
           </p:cNvPr>
@@ -4147,7 +4147,7 @@
           <p:cNvPr id="11" name="Text 9">
             <a:extLst xmlns:a="http://schemas.openxmlformats.org/drawingml/2006/main">
               <a:ext uri="{FF2B5EF4-FFF2-40B4-BE49-F238E27FC236}">
-                <a16:creationId xmlns:a16="http://schemas.microsoft.com/office/drawing/2014/main" id="{303D36E2-15B5-48B9-A6BC-2D50EF6CC572}"/>
+                <a16:creationId xmlns:a16="http://schemas.microsoft.com/office/drawing/2014/main" id="{6180F627-61B1-47C7-9C41-6B5516B1AF98}"/>
               </a:ext>
             </a:extLst>
           </p:cNvPr>
@@ -4195,7 +4195,7 @@
           <p:cNvPr id="12" name="Text 10">
             <a:extLst xmlns:a="http://schemas.openxmlformats.org/drawingml/2006/main">
               <a:ext uri="{FF2B5EF4-FFF2-40B4-BE49-F238E27FC236}">
-                <a16:creationId xmlns:a16="http://schemas.microsoft.com/office/drawing/2014/main" id="{B6BBFBC7-856B-48D6-8C6E-D8F2A7C86C29}"/>
+                <a16:creationId xmlns:a16="http://schemas.microsoft.com/office/drawing/2014/main" id="{075E0008-8F90-4D14-B898-DBE33E47A141}"/>
               </a:ext>
             </a:extLst>
           </p:cNvPr>
@@ -4240,7 +4240,7 @@
           <p:cNvPr id="13" name="Text 11">
             <a:extLst xmlns:a="http://schemas.openxmlformats.org/drawingml/2006/main">
               <a:ext uri="{FF2B5EF4-FFF2-40B4-BE49-F238E27FC236}">
-                <a16:creationId xmlns:a16="http://schemas.microsoft.com/office/drawing/2014/main" id="{62D65F39-4267-4E95-B63B-93ADB5B6F26C}"/>
+                <a16:creationId xmlns:a16="http://schemas.microsoft.com/office/drawing/2014/main" id="{D53EEDE0-C715-4CA3-A4E8-EA18ED7EE1C0}"/>
               </a:ext>
             </a:extLst>
           </p:cNvPr>
@@ -4288,7 +4288,7 @@
           <p:cNvPr id="14" name="Text 12">
             <a:extLst xmlns:a="http://schemas.openxmlformats.org/drawingml/2006/main">
               <a:ext uri="{FF2B5EF4-FFF2-40B4-BE49-F238E27FC236}">
-                <a16:creationId xmlns:a16="http://schemas.microsoft.com/office/drawing/2014/main" id="{DFC5C9D4-C070-4A2F-82C5-A02B3215B957}"/>
+                <a16:creationId xmlns:a16="http://schemas.microsoft.com/office/drawing/2014/main" id="{0057148A-BA07-4081-94BD-5F08AA207235}"/>
               </a:ext>
             </a:extLst>
           </p:cNvPr>
@@ -4331,7 +4331,7 @@
     </p:spTree>
     <p:extLst>
       <p:ext uri="{BB962C8B-B14F-4D97-AF65-F5344CB8AC3E}">
-        <p14:creationId xmlns:p14="http://schemas.microsoft.com/office/powerpoint/2010/main" val="1300227833"/>
+        <p14:creationId xmlns:p14="http://schemas.microsoft.com/office/powerpoint/2010/main" val="930157738"/>
       </p:ext>
     </p:extLst>
   </p:cSld>
@@ -4362,7 +4362,7 @@
           <p:cNvPr id="2" name="Text 0">
             <a:extLst xmlns:a="http://schemas.openxmlformats.org/drawingml/2006/main">
               <a:ext uri="{FF2B5EF4-FFF2-40B4-BE49-F238E27FC236}">
-                <a16:creationId xmlns:a16="http://schemas.microsoft.com/office/drawing/2014/main" id="{56BED763-C5C9-43F0-B00C-5562C22FE56D}"/>
+                <a16:creationId xmlns:a16="http://schemas.microsoft.com/office/drawing/2014/main" id="{645CBA41-998D-4FF6-903F-EE8F5D1AB1D1}"/>
               </a:ext>
             </a:extLst>
           </p:cNvPr>
@@ -4407,7 +4407,7 @@
           <p:cNvPr id="3" name="Text 1">
             <a:extLst xmlns:a="http://schemas.openxmlformats.org/drawingml/2006/main">
               <a:ext uri="{FF2B5EF4-FFF2-40B4-BE49-F238E27FC236}">
-                <a16:creationId xmlns:a16="http://schemas.microsoft.com/office/drawing/2014/main" id="{1C4EB47A-6816-48FC-9FDC-32438F96899F}"/>
+                <a16:creationId xmlns:a16="http://schemas.microsoft.com/office/drawing/2014/main" id="{490E23FA-6050-4BCA-B56F-8B8910FBBC9F}"/>
               </a:ext>
             </a:extLst>
           </p:cNvPr>
@@ -4452,7 +4452,7 @@
           <p:cNvPr id="4" name="Text 2">
             <a:extLst xmlns:a="http://schemas.openxmlformats.org/drawingml/2006/main">
               <a:ext uri="{FF2B5EF4-FFF2-40B4-BE49-F238E27FC236}">
-                <a16:creationId xmlns:a16="http://schemas.microsoft.com/office/drawing/2014/main" id="{F18F8BED-99DB-4EA3-88F0-8102BABABDF7}"/>
+                <a16:creationId xmlns:a16="http://schemas.microsoft.com/office/drawing/2014/main" id="{D630172D-3630-4776-8C40-F73A64AEC6EC}"/>
               </a:ext>
             </a:extLst>
           </p:cNvPr>
@@ -4497,7 +4497,7 @@
           <p:cNvPr id="5" name="Text 3">
             <a:extLst xmlns:a="http://schemas.openxmlformats.org/drawingml/2006/main">
               <a:ext uri="{FF2B5EF4-FFF2-40B4-BE49-F238E27FC236}">
-                <a16:creationId xmlns:a16="http://schemas.microsoft.com/office/drawing/2014/main" id="{AD2CA07C-8B27-43E8-9F40-7A584236E08D}"/>
+                <a16:creationId xmlns:a16="http://schemas.microsoft.com/office/drawing/2014/main" id="{72791DE8-73BB-4AFA-B3CB-FF14837ED29E}"/>
               </a:ext>
             </a:extLst>
           </p:cNvPr>
@@ -4542,7 +4542,7 @@
           <p:cNvPr id="6" name="Text 4">
             <a:extLst xmlns:a="http://schemas.openxmlformats.org/drawingml/2006/main">
               <a:ext uri="{FF2B5EF4-FFF2-40B4-BE49-F238E27FC236}">
-                <a16:creationId xmlns:a16="http://schemas.microsoft.com/office/drawing/2014/main" id="{4420915B-7196-4EC9-B047-C0C0711D713A}"/>
+                <a16:creationId xmlns:a16="http://schemas.microsoft.com/office/drawing/2014/main" id="{CC5907B7-4AD0-40E6-8854-FD4593571151}"/>
               </a:ext>
             </a:extLst>
           </p:cNvPr>
@@ -4587,7 +4587,7 @@
           <p:cNvPr id="7" name="Shape 5">
             <a:extLst xmlns:a="http://schemas.openxmlformats.org/drawingml/2006/main">
               <a:ext uri="{FF2B5EF4-FFF2-40B4-BE49-F238E27FC236}">
-                <a16:creationId xmlns:a16="http://schemas.microsoft.com/office/drawing/2014/main" id="{8D2F2993-9993-4659-B5EE-B4308730C220}"/>
+                <a16:creationId xmlns:a16="http://schemas.microsoft.com/office/drawing/2014/main" id="{5A120A7B-7F85-48D6-91A4-A39CB655A034}"/>
               </a:ext>
             </a:extLst>
           </p:cNvPr>
@@ -4634,7 +4634,7 @@
           <p:cNvPr id="8" name="Text 6">
             <a:extLst xmlns:a="http://schemas.openxmlformats.org/drawingml/2006/main">
               <a:ext uri="{FF2B5EF4-FFF2-40B4-BE49-F238E27FC236}">
-                <a16:creationId xmlns:a16="http://schemas.microsoft.com/office/drawing/2014/main" id="{144FA36E-BE79-4B2A-855A-063244CC1934}"/>
+                <a16:creationId xmlns:a16="http://schemas.microsoft.com/office/drawing/2014/main" id="{1C314809-047B-4372-AAC1-935BB4273F83}"/>
               </a:ext>
             </a:extLst>
           </p:cNvPr>
@@ -4679,7 +4679,7 @@
           <p:cNvPr id="9" name="Text 7">
             <a:extLst xmlns:a="http://schemas.openxmlformats.org/drawingml/2006/main">
               <a:ext uri="{FF2B5EF4-FFF2-40B4-BE49-F238E27FC236}">
-                <a16:creationId xmlns:a16="http://schemas.microsoft.com/office/drawing/2014/main" id="{728EBEDD-6765-4D65-BF57-836AF2624688}"/>
+                <a16:creationId xmlns:a16="http://schemas.microsoft.com/office/drawing/2014/main" id="{9BF7E44F-31C3-4FCE-AFD0-EC4A95549B23}"/>
               </a:ext>
             </a:extLst>
           </p:cNvPr>
@@ -4727,7 +4727,7 @@
           <p:cNvPr id="10" name="Shape 8">
             <a:extLst xmlns:a="http://schemas.openxmlformats.org/drawingml/2006/main">
               <a:ext uri="{FF2B5EF4-FFF2-40B4-BE49-F238E27FC236}">
-                <a16:creationId xmlns:a16="http://schemas.microsoft.com/office/drawing/2014/main" id="{E5535894-D1B9-4B71-9C26-400B99D0FC51}"/>
+                <a16:creationId xmlns:a16="http://schemas.microsoft.com/office/drawing/2014/main" id="{854CEB4D-879A-4BEF-91E3-94F681820FFD}"/>
               </a:ext>
             </a:extLst>
           </p:cNvPr>
@@ -4774,7 +4774,7 @@
           <p:cNvPr id="11" name="Text 9">
             <a:extLst xmlns:a="http://schemas.openxmlformats.org/drawingml/2006/main">
               <a:ext uri="{FF2B5EF4-FFF2-40B4-BE49-F238E27FC236}">
-                <a16:creationId xmlns:a16="http://schemas.microsoft.com/office/drawing/2014/main" id="{5695D146-97C8-4426-B298-53CEAE3C1771}"/>
+                <a16:creationId xmlns:a16="http://schemas.microsoft.com/office/drawing/2014/main" id="{DB497C9B-4B5F-4EC3-99E4-84B3F6633BB5}"/>
               </a:ext>
             </a:extLst>
           </p:cNvPr>
@@ -4819,7 +4819,7 @@
           <p:cNvPr id="12" name="Text 10">
             <a:extLst xmlns:a="http://schemas.openxmlformats.org/drawingml/2006/main">
               <a:ext uri="{FF2B5EF4-FFF2-40B4-BE49-F238E27FC236}">
-                <a16:creationId xmlns:a16="http://schemas.microsoft.com/office/drawing/2014/main" id="{1CF64C9C-8847-441B-82FA-DE52B9650BD3}"/>
+                <a16:creationId xmlns:a16="http://schemas.microsoft.com/office/drawing/2014/main" id="{C7FBD978-567A-41B8-8202-363B6DE71E6C}"/>
               </a:ext>
             </a:extLst>
           </p:cNvPr>
@@ -4867,7 +4867,7 @@
           <p:cNvPr id="13" name="Shape 11">
             <a:extLst xmlns:a="http://schemas.openxmlformats.org/drawingml/2006/main">
               <a:ext uri="{FF2B5EF4-FFF2-40B4-BE49-F238E27FC236}">
-                <a16:creationId xmlns:a16="http://schemas.microsoft.com/office/drawing/2014/main" id="{A89C16A7-1A49-4898-BC94-2F9B643C8272}"/>
+                <a16:creationId xmlns:a16="http://schemas.microsoft.com/office/drawing/2014/main" id="{9E1B4DBF-1B01-4007-9254-6554A733530C}"/>
               </a:ext>
             </a:extLst>
           </p:cNvPr>
@@ -4914,7 +4914,7 @@
           <p:cNvPr id="14" name="Text 12">
             <a:extLst xmlns:a="http://schemas.openxmlformats.org/drawingml/2006/main">
               <a:ext uri="{FF2B5EF4-FFF2-40B4-BE49-F238E27FC236}">
-                <a16:creationId xmlns:a16="http://schemas.microsoft.com/office/drawing/2014/main" id="{FF52ABD6-3D49-4EFE-9837-56161EA4B9A6}"/>
+                <a16:creationId xmlns:a16="http://schemas.microsoft.com/office/drawing/2014/main" id="{82A87AB6-592F-4BF4-9218-5B5CF1DA5EED}"/>
               </a:ext>
             </a:extLst>
           </p:cNvPr>
@@ -4959,7 +4959,7 @@
           <p:cNvPr id="15" name="Text 13">
             <a:extLst xmlns:a="http://schemas.openxmlformats.org/drawingml/2006/main">
               <a:ext uri="{FF2B5EF4-FFF2-40B4-BE49-F238E27FC236}">
-                <a16:creationId xmlns:a16="http://schemas.microsoft.com/office/drawing/2014/main" id="{CDB165C5-E8F7-440A-A3DD-98C8D75341FE}"/>
+                <a16:creationId xmlns:a16="http://schemas.microsoft.com/office/drawing/2014/main" id="{2339E1C2-D714-472F-A89A-39275A8B8BDD}"/>
               </a:ext>
             </a:extLst>
           </p:cNvPr>
@@ -5007,7 +5007,7 @@
           <p:cNvPr id="16" name="Shape 14">
             <a:extLst xmlns:a="http://schemas.openxmlformats.org/drawingml/2006/main">
               <a:ext uri="{FF2B5EF4-FFF2-40B4-BE49-F238E27FC236}">
-                <a16:creationId xmlns:a16="http://schemas.microsoft.com/office/drawing/2014/main" id="{DCF4E060-8B5F-4D14-A338-CD881E7819D6}"/>
+                <a16:creationId xmlns:a16="http://schemas.microsoft.com/office/drawing/2014/main" id="{2352C736-7AFF-4C22-8900-6D5C6E03E822}"/>
               </a:ext>
             </a:extLst>
           </p:cNvPr>
@@ -5054,7 +5054,7 @@
           <p:cNvPr id="17" name="Text 15">
             <a:extLst xmlns:a="http://schemas.openxmlformats.org/drawingml/2006/main">
               <a:ext uri="{FF2B5EF4-FFF2-40B4-BE49-F238E27FC236}">
-                <a16:creationId xmlns:a16="http://schemas.microsoft.com/office/drawing/2014/main" id="{1A6963FC-304A-432D-AF9F-452AA7DE77F0}"/>
+                <a16:creationId xmlns:a16="http://schemas.microsoft.com/office/drawing/2014/main" id="{2F85E978-7E0E-4428-A8D1-D4111820017B}"/>
               </a:ext>
             </a:extLst>
           </p:cNvPr>
@@ -5099,7 +5099,7 @@
           <p:cNvPr id="18" name="Text 16">
             <a:extLst xmlns:a="http://schemas.openxmlformats.org/drawingml/2006/main">
               <a:ext uri="{FF2B5EF4-FFF2-40B4-BE49-F238E27FC236}">
-                <a16:creationId xmlns:a16="http://schemas.microsoft.com/office/drawing/2014/main" id="{4859788E-5F8C-46CA-8FB0-AE6050FF49E9}"/>
+                <a16:creationId xmlns:a16="http://schemas.microsoft.com/office/drawing/2014/main" id="{76C74BA5-DC5F-4199-B2E6-DE16F8649244}"/>
               </a:ext>
             </a:extLst>
           </p:cNvPr>
@@ -5147,7 +5147,7 @@
           <p:cNvPr id="19" name="Shape 17">
             <a:extLst xmlns:a="http://schemas.openxmlformats.org/drawingml/2006/main">
               <a:ext uri="{FF2B5EF4-FFF2-40B4-BE49-F238E27FC236}">
-                <a16:creationId xmlns:a16="http://schemas.microsoft.com/office/drawing/2014/main" id="{288A1A4D-8024-4D29-B48B-A5C306C5B503}"/>
+                <a16:creationId xmlns:a16="http://schemas.microsoft.com/office/drawing/2014/main" id="{FD9EDB59-E31D-4304-BC3F-41BFF9459124}"/>
               </a:ext>
             </a:extLst>
           </p:cNvPr>
@@ -5194,7 +5194,7 @@
           <p:cNvPr id="20" name="Text 18">
             <a:extLst xmlns:a="http://schemas.openxmlformats.org/drawingml/2006/main">
               <a:ext uri="{FF2B5EF4-FFF2-40B4-BE49-F238E27FC236}">
-                <a16:creationId xmlns:a16="http://schemas.microsoft.com/office/drawing/2014/main" id="{DAFA891F-13B5-42F7-B132-2471A72345EA}"/>
+                <a16:creationId xmlns:a16="http://schemas.microsoft.com/office/drawing/2014/main" id="{AE23F0FD-0E82-4739-B55D-335625E492A6}"/>
               </a:ext>
             </a:extLst>
           </p:cNvPr>
@@ -5239,7 +5239,7 @@
           <p:cNvPr id="21" name="Text 19">
             <a:extLst xmlns:a="http://schemas.openxmlformats.org/drawingml/2006/main">
               <a:ext uri="{FF2B5EF4-FFF2-40B4-BE49-F238E27FC236}">
-                <a16:creationId xmlns:a16="http://schemas.microsoft.com/office/drawing/2014/main" id="{A93948D4-54CA-47CC-8033-C350026BA6E3}"/>
+                <a16:creationId xmlns:a16="http://schemas.microsoft.com/office/drawing/2014/main" id="{9FE4EC21-B139-4DAA-88FE-01EA4388E4A9}"/>
               </a:ext>
             </a:extLst>
           </p:cNvPr>
@@ -5287,7 +5287,7 @@
           <p:cNvPr id="22" name="Shape 20">
             <a:extLst xmlns:a="http://schemas.openxmlformats.org/drawingml/2006/main">
               <a:ext uri="{FF2B5EF4-FFF2-40B4-BE49-F238E27FC236}">
-                <a16:creationId xmlns:a16="http://schemas.microsoft.com/office/drawing/2014/main" id="{E4F8FCD1-C8C8-4C4C-B69B-D6AD8D6B8EF0}"/>
+                <a16:creationId xmlns:a16="http://schemas.microsoft.com/office/drawing/2014/main" id="{109BCAA4-A339-478F-9D7D-4AA587BBE78B}"/>
               </a:ext>
             </a:extLst>
           </p:cNvPr>
@@ -5334,7 +5334,7 @@
           <p:cNvPr id="23" name="Text 21">
             <a:extLst xmlns:a="http://schemas.openxmlformats.org/drawingml/2006/main">
               <a:ext uri="{FF2B5EF4-FFF2-40B4-BE49-F238E27FC236}">
-                <a16:creationId xmlns:a16="http://schemas.microsoft.com/office/drawing/2014/main" id="{6AF27568-7206-4F44-8A36-AE007C057356}"/>
+                <a16:creationId xmlns:a16="http://schemas.microsoft.com/office/drawing/2014/main" id="{21059934-D422-4B46-BFF7-5FE07CAEA3CA}"/>
               </a:ext>
             </a:extLst>
           </p:cNvPr>
@@ -5379,7 +5379,7 @@
           <p:cNvPr id="24" name="Text 22">
             <a:extLst xmlns:a="http://schemas.openxmlformats.org/drawingml/2006/main">
               <a:ext uri="{FF2B5EF4-FFF2-40B4-BE49-F238E27FC236}">
-                <a16:creationId xmlns:a16="http://schemas.microsoft.com/office/drawing/2014/main" id="{72354991-4DEB-41F6-81C3-22D62924ABD8}"/>
+                <a16:creationId xmlns:a16="http://schemas.microsoft.com/office/drawing/2014/main" id="{72AB11F6-4B36-48E8-A7AE-826F67AF586E}"/>
               </a:ext>
             </a:extLst>
           </p:cNvPr>
@@ -5427,7 +5427,7 @@
           <p:cNvPr id="25" name="Text 23">
             <a:extLst xmlns:a="http://schemas.openxmlformats.org/drawingml/2006/main">
               <a:ext uri="{FF2B5EF4-FFF2-40B4-BE49-F238E27FC236}">
-                <a16:creationId xmlns:a16="http://schemas.microsoft.com/office/drawing/2014/main" id="{F3A62102-74ED-4529-8ECA-F17355B942DF}"/>
+                <a16:creationId xmlns:a16="http://schemas.microsoft.com/office/drawing/2014/main" id="{7AD8BBE9-EBAF-4283-8916-EF28313BEEB5}"/>
               </a:ext>
             </a:extLst>
           </p:cNvPr>
@@ -5472,7 +5472,7 @@
           <p:cNvPr id="26" name="Shape 24">
             <a:extLst xmlns:a="http://schemas.openxmlformats.org/drawingml/2006/main">
               <a:ext uri="{FF2B5EF4-FFF2-40B4-BE49-F238E27FC236}">
-                <a16:creationId xmlns:a16="http://schemas.microsoft.com/office/drawing/2014/main" id="{062E456B-96B2-4559-8C76-E3B55279F9F2}"/>
+                <a16:creationId xmlns:a16="http://schemas.microsoft.com/office/drawing/2014/main" id="{6069E951-8DCE-4493-B900-D31E4090240D}"/>
               </a:ext>
             </a:extLst>
           </p:cNvPr>
@@ -5512,7 +5512,7 @@
           <p:cNvPr id="27" name="Text 25">
             <a:extLst xmlns:a="http://schemas.openxmlformats.org/drawingml/2006/main">
               <a:ext uri="{FF2B5EF4-FFF2-40B4-BE49-F238E27FC236}">
-                <a16:creationId xmlns:a16="http://schemas.microsoft.com/office/drawing/2014/main" id="{721D0758-F702-4DFD-80AD-E15B74CC23E3}"/>
+                <a16:creationId xmlns:a16="http://schemas.microsoft.com/office/drawing/2014/main" id="{91213B52-1BAB-4853-9531-F3708AF8DD23}"/>
               </a:ext>
             </a:extLst>
           </p:cNvPr>
@@ -5557,7 +5557,7 @@
           <p:cNvPr id="28" name="Shape 26">
             <a:extLst xmlns:a="http://schemas.openxmlformats.org/drawingml/2006/main">
               <a:ext uri="{FF2B5EF4-FFF2-40B4-BE49-F238E27FC236}">
-                <a16:creationId xmlns:a16="http://schemas.microsoft.com/office/drawing/2014/main" id="{5EBD5787-921A-418C-9EC4-162C8EE9E434}"/>
+                <a16:creationId xmlns:a16="http://schemas.microsoft.com/office/drawing/2014/main" id="{3087BEA7-A4A7-4B1E-B053-060799D4B43C}"/>
               </a:ext>
             </a:extLst>
           </p:cNvPr>
@@ -5597,7 +5597,7 @@
           <p:cNvPr id="29" name="Text 27">
             <a:extLst xmlns:a="http://schemas.openxmlformats.org/drawingml/2006/main">
               <a:ext uri="{FF2B5EF4-FFF2-40B4-BE49-F238E27FC236}">
-                <a16:creationId xmlns:a16="http://schemas.microsoft.com/office/drawing/2014/main" id="{BFA939F7-10E4-417C-9E80-686C2FD8672C}"/>
+                <a16:creationId xmlns:a16="http://schemas.microsoft.com/office/drawing/2014/main" id="{DABEF2AC-D623-4957-BA66-95C9C94C593D}"/>
               </a:ext>
             </a:extLst>
           </p:cNvPr>
@@ -5642,7 +5642,7 @@
           <p:cNvPr id="30" name="Shape 28">
             <a:extLst xmlns:a="http://schemas.openxmlformats.org/drawingml/2006/main">
               <a:ext uri="{FF2B5EF4-FFF2-40B4-BE49-F238E27FC236}">
-                <a16:creationId xmlns:a16="http://schemas.microsoft.com/office/drawing/2014/main" id="{76F4891D-E6E0-4DE9-830C-BBEAC17D5247}"/>
+                <a16:creationId xmlns:a16="http://schemas.microsoft.com/office/drawing/2014/main" id="{AE946F25-650D-4B67-8787-40084F2EA7A8}"/>
               </a:ext>
             </a:extLst>
           </p:cNvPr>
@@ -5682,7 +5682,7 @@
           <p:cNvPr id="31" name="Text 29">
             <a:extLst xmlns:a="http://schemas.openxmlformats.org/drawingml/2006/main">
               <a:ext uri="{FF2B5EF4-FFF2-40B4-BE49-F238E27FC236}">
-                <a16:creationId xmlns:a16="http://schemas.microsoft.com/office/drawing/2014/main" id="{31FE2530-891E-4698-A64E-9109C7202FED}"/>
+                <a16:creationId xmlns:a16="http://schemas.microsoft.com/office/drawing/2014/main" id="{5BE80A4D-02B5-4ED7-8AF8-9F32B8675E9E}"/>
               </a:ext>
             </a:extLst>
           </p:cNvPr>
@@ -5727,7 +5727,7 @@
           <p:cNvPr id="32" name="Shape 30">
             <a:extLst xmlns:a="http://schemas.openxmlformats.org/drawingml/2006/main">
               <a:ext uri="{FF2B5EF4-FFF2-40B4-BE49-F238E27FC236}">
-                <a16:creationId xmlns:a16="http://schemas.microsoft.com/office/drawing/2014/main" id="{308F2CCC-BB12-4E7B-81D2-3E457439840F}"/>
+                <a16:creationId xmlns:a16="http://schemas.microsoft.com/office/drawing/2014/main" id="{AD4D67D0-E287-44D5-A095-EE29A1020A56}"/>
               </a:ext>
             </a:extLst>
           </p:cNvPr>
@@ -5767,7 +5767,7 @@
           <p:cNvPr id="33" name="Text 31">
             <a:extLst xmlns:a="http://schemas.openxmlformats.org/drawingml/2006/main">
               <a:ext uri="{FF2B5EF4-FFF2-40B4-BE49-F238E27FC236}">
-                <a16:creationId xmlns:a16="http://schemas.microsoft.com/office/drawing/2014/main" id="{88F702C6-9B68-4A24-9ECD-7451F29B38BB}"/>
+                <a16:creationId xmlns:a16="http://schemas.microsoft.com/office/drawing/2014/main" id="{5878663A-7B4E-44F5-B8D1-0F41FAFEE92F}"/>
               </a:ext>
             </a:extLst>
           </p:cNvPr>
@@ -5812,7 +5812,7 @@
           <p:cNvPr id="34" name="Shape 32">
             <a:extLst xmlns:a="http://schemas.openxmlformats.org/drawingml/2006/main">
               <a:ext uri="{FF2B5EF4-FFF2-40B4-BE49-F238E27FC236}">
-                <a16:creationId xmlns:a16="http://schemas.microsoft.com/office/drawing/2014/main" id="{3482E8B1-6680-49AC-9435-8BE384A1A147}"/>
+                <a16:creationId xmlns:a16="http://schemas.microsoft.com/office/drawing/2014/main" id="{2256A2C5-CE64-48C2-9871-E62F13F17808}"/>
               </a:ext>
             </a:extLst>
           </p:cNvPr>
@@ -5852,7 +5852,7 @@
           <p:cNvPr id="35" name="Text 33">
             <a:extLst xmlns:a="http://schemas.openxmlformats.org/drawingml/2006/main">
               <a:ext uri="{FF2B5EF4-FFF2-40B4-BE49-F238E27FC236}">
-                <a16:creationId xmlns:a16="http://schemas.microsoft.com/office/drawing/2014/main" id="{BF931AC8-C408-4FFD-9B64-C2B92EBCEC55}"/>
+                <a16:creationId xmlns:a16="http://schemas.microsoft.com/office/drawing/2014/main" id="{BCA77008-A005-4696-82B3-3D47704A8052}"/>
               </a:ext>
             </a:extLst>
           </p:cNvPr>
@@ -5897,7 +5897,7 @@
           <p:cNvPr id="36" name="Shape 34">
             <a:extLst xmlns:a="http://schemas.openxmlformats.org/drawingml/2006/main">
               <a:ext uri="{FF2B5EF4-FFF2-40B4-BE49-F238E27FC236}">
-                <a16:creationId xmlns:a16="http://schemas.microsoft.com/office/drawing/2014/main" id="{F0360A5C-B736-4AF8-A69B-43CBF8F72B62}"/>
+                <a16:creationId xmlns:a16="http://schemas.microsoft.com/office/drawing/2014/main" id="{FFE9084B-CD9F-44F8-89DC-9318553DDC17}"/>
               </a:ext>
             </a:extLst>
           </p:cNvPr>
@@ -5937,7 +5937,7 @@
           <p:cNvPr id="37" name="Text 35">
             <a:extLst xmlns:a="http://schemas.openxmlformats.org/drawingml/2006/main">
               <a:ext uri="{FF2B5EF4-FFF2-40B4-BE49-F238E27FC236}">
-                <a16:creationId xmlns:a16="http://schemas.microsoft.com/office/drawing/2014/main" id="{CDD7BC88-63BA-45A1-ACF3-C9B610003077}"/>
+                <a16:creationId xmlns:a16="http://schemas.microsoft.com/office/drawing/2014/main" id="{D2CF96D3-6DBB-4303-8FE4-A11E000A76F8}"/>
               </a:ext>
             </a:extLst>
           </p:cNvPr>
@@ -5982,7 +5982,7 @@
           <p:cNvPr id="38" name="Shape 36">
             <a:extLst xmlns:a="http://schemas.openxmlformats.org/drawingml/2006/main">
               <a:ext uri="{FF2B5EF4-FFF2-40B4-BE49-F238E27FC236}">
-                <a16:creationId xmlns:a16="http://schemas.microsoft.com/office/drawing/2014/main" id="{FD31E965-40F8-4EAB-BCD7-F3115635AFA0}"/>
+                <a16:creationId xmlns:a16="http://schemas.microsoft.com/office/drawing/2014/main" id="{55C62C77-9F7F-445F-9E04-4DC6ABDB2488}"/>
               </a:ext>
             </a:extLst>
           </p:cNvPr>
@@ -6029,7 +6029,7 @@
           <p:cNvPr id="39" name="Text 37">
             <a:extLst xmlns:a="http://schemas.openxmlformats.org/drawingml/2006/main">
               <a:ext uri="{FF2B5EF4-FFF2-40B4-BE49-F238E27FC236}">
-                <a16:creationId xmlns:a16="http://schemas.microsoft.com/office/drawing/2014/main" id="{24E57056-A0E6-416E-91E9-41F39FBA15BC}"/>
+                <a16:creationId xmlns:a16="http://schemas.microsoft.com/office/drawing/2014/main" id="{48CCE24F-9C3B-46B5-B93C-BC04A499B281}"/>
               </a:ext>
             </a:extLst>
           </p:cNvPr>
@@ -6074,7 +6074,7 @@
           <p:cNvPr id="40" name="Text 38">
             <a:extLst xmlns:a="http://schemas.openxmlformats.org/drawingml/2006/main">
               <a:ext uri="{FF2B5EF4-FFF2-40B4-BE49-F238E27FC236}">
-                <a16:creationId xmlns:a16="http://schemas.microsoft.com/office/drawing/2014/main" id="{64D6516D-F545-4442-B689-D851348770E4}"/>
+                <a16:creationId xmlns:a16="http://schemas.microsoft.com/office/drawing/2014/main" id="{BF72CBEB-D1CB-41ED-B057-8EFE7E309D09}"/>
               </a:ext>
             </a:extLst>
           </p:cNvPr>
@@ -6119,7 +6119,7 @@
           <p:cNvPr id="41" name="Text 39">
             <a:extLst xmlns:a="http://schemas.openxmlformats.org/drawingml/2006/main">
               <a:ext uri="{FF2B5EF4-FFF2-40B4-BE49-F238E27FC236}">
-                <a16:creationId xmlns:a16="http://schemas.microsoft.com/office/drawing/2014/main" id="{741AB64A-4F07-4943-8089-DCBF587DB77F}"/>
+                <a16:creationId xmlns:a16="http://schemas.microsoft.com/office/drawing/2014/main" id="{3AC213B7-8C59-49A7-BA32-83612397981F}"/>
               </a:ext>
             </a:extLst>
           </p:cNvPr>
@@ -6167,7 +6167,7 @@
           <p:cNvPr id="42" name="Shape 40">
             <a:extLst xmlns:a="http://schemas.openxmlformats.org/drawingml/2006/main">
               <a:ext uri="{FF2B5EF4-FFF2-40B4-BE49-F238E27FC236}">
-                <a16:creationId xmlns:a16="http://schemas.microsoft.com/office/drawing/2014/main" id="{C6138756-C457-4911-98BF-81F90F0F4F5F}"/>
+                <a16:creationId xmlns:a16="http://schemas.microsoft.com/office/drawing/2014/main" id="{04305CCB-F252-43C6-99FB-085B56BAF430}"/>
               </a:ext>
             </a:extLst>
           </p:cNvPr>
@@ -6214,7 +6214,7 @@
           <p:cNvPr id="43" name="Text 41">
             <a:extLst xmlns:a="http://schemas.openxmlformats.org/drawingml/2006/main">
               <a:ext uri="{FF2B5EF4-FFF2-40B4-BE49-F238E27FC236}">
-                <a16:creationId xmlns:a16="http://schemas.microsoft.com/office/drawing/2014/main" id="{6D098DFF-ED6E-4D45-BFB1-3C24F452603D}"/>
+                <a16:creationId xmlns:a16="http://schemas.microsoft.com/office/drawing/2014/main" id="{6CBB8149-63E7-4A64-A72B-0B1800CE6EB3}"/>
               </a:ext>
             </a:extLst>
           </p:cNvPr>
@@ -6259,7 +6259,7 @@
           <p:cNvPr id="44" name="Text 42">
             <a:extLst xmlns:a="http://schemas.openxmlformats.org/drawingml/2006/main">
               <a:ext uri="{FF2B5EF4-FFF2-40B4-BE49-F238E27FC236}">
-                <a16:creationId xmlns:a16="http://schemas.microsoft.com/office/drawing/2014/main" id="{71ACE5AF-9D79-4C38-A3B5-8F1CF6D43CC8}"/>
+                <a16:creationId xmlns:a16="http://schemas.microsoft.com/office/drawing/2014/main" id="{0B8DDFD0-4E78-44ED-B4CC-FA2287F601BF}"/>
               </a:ext>
             </a:extLst>
           </p:cNvPr>
@@ -6304,7 +6304,7 @@
           <p:cNvPr id="45" name="Text 43">
             <a:extLst xmlns:a="http://schemas.openxmlformats.org/drawingml/2006/main">
               <a:ext uri="{FF2B5EF4-FFF2-40B4-BE49-F238E27FC236}">
-                <a16:creationId xmlns:a16="http://schemas.microsoft.com/office/drawing/2014/main" id="{071986E3-3369-4155-9195-06EE5167C25D}"/>
+                <a16:creationId xmlns:a16="http://schemas.microsoft.com/office/drawing/2014/main" id="{E2E8A682-45D9-466B-9B44-D3EDAD0F259B}"/>
               </a:ext>
             </a:extLst>
           </p:cNvPr>
@@ -6352,7 +6352,7 @@
           <p:cNvPr id="46" name="Shape 44">
             <a:extLst xmlns:a="http://schemas.openxmlformats.org/drawingml/2006/main">
               <a:ext uri="{FF2B5EF4-FFF2-40B4-BE49-F238E27FC236}">
-                <a16:creationId xmlns:a16="http://schemas.microsoft.com/office/drawing/2014/main" id="{688F1056-C55A-477C-80BA-9BD3BD0B2320}"/>
+                <a16:creationId xmlns:a16="http://schemas.microsoft.com/office/drawing/2014/main" id="{7DB65A75-CFC1-4DF1-8DF9-FF25E28CEF3B}"/>
               </a:ext>
             </a:extLst>
           </p:cNvPr>
@@ -6399,7 +6399,7 @@
           <p:cNvPr id="47" name="Text 45">
             <a:extLst xmlns:a="http://schemas.openxmlformats.org/drawingml/2006/main">
               <a:ext uri="{FF2B5EF4-FFF2-40B4-BE49-F238E27FC236}">
-                <a16:creationId xmlns:a16="http://schemas.microsoft.com/office/drawing/2014/main" id="{D922A04B-25B6-461C-9AF7-2E27888037E1}"/>
+                <a16:creationId xmlns:a16="http://schemas.microsoft.com/office/drawing/2014/main" id="{5735086B-EBC0-4E03-A428-110AE136F914}"/>
               </a:ext>
             </a:extLst>
           </p:cNvPr>
@@ -6444,7 +6444,7 @@
           <p:cNvPr id="48" name="Text 46">
             <a:extLst xmlns:a="http://schemas.openxmlformats.org/drawingml/2006/main">
               <a:ext uri="{FF2B5EF4-FFF2-40B4-BE49-F238E27FC236}">
-                <a16:creationId xmlns:a16="http://schemas.microsoft.com/office/drawing/2014/main" id="{CCA41507-36DE-4C54-B460-E38EDA5656D9}"/>
+                <a16:creationId xmlns:a16="http://schemas.microsoft.com/office/drawing/2014/main" id="{BBFF69CD-FC2E-4884-BFED-E6D387C1B218}"/>
               </a:ext>
             </a:extLst>
           </p:cNvPr>
@@ -6489,7 +6489,7 @@
           <p:cNvPr id="49" name="Text 47">
             <a:extLst xmlns:a="http://schemas.openxmlformats.org/drawingml/2006/main">
               <a:ext uri="{FF2B5EF4-FFF2-40B4-BE49-F238E27FC236}">
-                <a16:creationId xmlns:a16="http://schemas.microsoft.com/office/drawing/2014/main" id="{298A972B-B3F3-4A3D-BDE1-91628229B3CA}"/>
+                <a16:creationId xmlns:a16="http://schemas.microsoft.com/office/drawing/2014/main" id="{4B33A21B-4658-4C13-B6C6-AFD517B44912}"/>
               </a:ext>
             </a:extLst>
           </p:cNvPr>
@@ -6537,7 +6537,7 @@
           <p:cNvPr id="50" name="Shape 48">
             <a:extLst xmlns:a="http://schemas.openxmlformats.org/drawingml/2006/main">
               <a:ext uri="{FF2B5EF4-FFF2-40B4-BE49-F238E27FC236}">
-                <a16:creationId xmlns:a16="http://schemas.microsoft.com/office/drawing/2014/main" id="{CC90A260-D8E0-4447-9051-43229CC7F1DC}"/>
+                <a16:creationId xmlns:a16="http://schemas.microsoft.com/office/drawing/2014/main" id="{75E896B5-C4F9-4DE4-9C8E-107CA7F2621B}"/>
               </a:ext>
             </a:extLst>
           </p:cNvPr>
@@ -6584,7 +6584,7 @@
           <p:cNvPr id="51" name="Text 49">
             <a:extLst xmlns:a="http://schemas.openxmlformats.org/drawingml/2006/main">
               <a:ext uri="{FF2B5EF4-FFF2-40B4-BE49-F238E27FC236}">
-                <a16:creationId xmlns:a16="http://schemas.microsoft.com/office/drawing/2014/main" id="{CF403D51-E42B-47EB-B4A3-DC446E6853BB}"/>
+                <a16:creationId xmlns:a16="http://schemas.microsoft.com/office/drawing/2014/main" id="{D2FE1A86-D2BF-41D6-90F0-7EEE3BF3022F}"/>
               </a:ext>
             </a:extLst>
           </p:cNvPr>
@@ -6630,7 +6630,7 @@
     </p:spTree>
     <p:extLst>
       <p:ext uri="{BB962C8B-B14F-4D97-AF65-F5344CB8AC3E}">
-        <p14:creationId xmlns:p14="http://schemas.microsoft.com/office/powerpoint/2010/main" val="16682408"/>
+        <p14:creationId xmlns:p14="http://schemas.microsoft.com/office/powerpoint/2010/main" val="818158987"/>
       </p:ext>
     </p:extLst>
   </p:cSld>
@@ -6661,7 +6661,7 @@
           <p:cNvPr id="2" name="Text 0">
             <a:extLst xmlns:a="http://schemas.openxmlformats.org/drawingml/2006/main">
               <a:ext uri="{FF2B5EF4-FFF2-40B4-BE49-F238E27FC236}">
-                <a16:creationId xmlns:a16="http://schemas.microsoft.com/office/drawing/2014/main" id="{C9FE3A47-37FF-454E-A4ED-EF2BDA76839F}"/>
+                <a16:creationId xmlns:a16="http://schemas.microsoft.com/office/drawing/2014/main" id="{9E8DA75E-6F49-4D2D-A221-C511A75011B3}"/>
               </a:ext>
             </a:extLst>
           </p:cNvPr>
@@ -6706,7 +6706,7 @@
           <p:cNvPr id="3" name="Text 1">
             <a:extLst xmlns:a="http://schemas.openxmlformats.org/drawingml/2006/main">
               <a:ext uri="{FF2B5EF4-FFF2-40B4-BE49-F238E27FC236}">
-                <a16:creationId xmlns:a16="http://schemas.microsoft.com/office/drawing/2014/main" id="{2F65C90F-4D82-442A-8492-27EEBCE4ADA7}"/>
+                <a16:creationId xmlns:a16="http://schemas.microsoft.com/office/drawing/2014/main" id="{FCE99979-E267-4D39-9253-7BC389EA4A86}"/>
               </a:ext>
             </a:extLst>
           </p:cNvPr>
@@ -6751,7 +6751,7 @@
           <p:cNvPr id="4" name="Text 2">
             <a:extLst xmlns:a="http://schemas.openxmlformats.org/drawingml/2006/main">
               <a:ext uri="{FF2B5EF4-FFF2-40B4-BE49-F238E27FC236}">
-                <a16:creationId xmlns:a16="http://schemas.microsoft.com/office/drawing/2014/main" id="{6E7C94BC-593C-4EC1-AFC3-54C86328126D}"/>
+                <a16:creationId xmlns:a16="http://schemas.microsoft.com/office/drawing/2014/main" id="{AB0C95FD-2058-4346-AA23-8A95C433DCEA}"/>
               </a:ext>
             </a:extLst>
           </p:cNvPr>
@@ -6796,7 +6796,7 @@
           <p:cNvPr id="5" name="Text 3">
             <a:extLst xmlns:a="http://schemas.openxmlformats.org/drawingml/2006/main">
               <a:ext uri="{FF2B5EF4-FFF2-40B4-BE49-F238E27FC236}">
-                <a16:creationId xmlns:a16="http://schemas.microsoft.com/office/drawing/2014/main" id="{BDCDD6DE-B663-4A2E-8C00-CF5449FC2FA4}"/>
+                <a16:creationId xmlns:a16="http://schemas.microsoft.com/office/drawing/2014/main" id="{4A3D8B0C-56F7-40E2-943D-358448B33C29}"/>
               </a:ext>
             </a:extLst>
           </p:cNvPr>
@@ -6841,7 +6841,7 @@
           <p:cNvPr id="6" name="Text 4">
             <a:extLst xmlns:a="http://schemas.openxmlformats.org/drawingml/2006/main">
               <a:ext uri="{FF2B5EF4-FFF2-40B4-BE49-F238E27FC236}">
-                <a16:creationId xmlns:a16="http://schemas.microsoft.com/office/drawing/2014/main" id="{86E66930-FE27-415C-8001-2678CD5579BF}"/>
+                <a16:creationId xmlns:a16="http://schemas.microsoft.com/office/drawing/2014/main" id="{E1093DB8-F1BF-492A-B0BC-B7AE7C7C17A0}"/>
               </a:ext>
             </a:extLst>
           </p:cNvPr>
@@ -6936,7 +6936,7 @@
           <p:cNvPr id="7" name="Shape 5">
             <a:extLst xmlns:a="http://schemas.openxmlformats.org/drawingml/2006/main">
               <a:ext uri="{FF2B5EF4-FFF2-40B4-BE49-F238E27FC236}">
-                <a16:creationId xmlns:a16="http://schemas.microsoft.com/office/drawing/2014/main" id="{DA490126-7228-4EFF-8850-F9137FEB3ACF}"/>
+                <a16:creationId xmlns:a16="http://schemas.microsoft.com/office/drawing/2014/main" id="{654EF96E-0CA4-497E-B708-ECE91B5A1F33}"/>
               </a:ext>
             </a:extLst>
           </p:cNvPr>
@@ -6983,7 +6983,7 @@
           <p:cNvPr id="8" name="Text 6">
             <a:extLst xmlns:a="http://schemas.openxmlformats.org/drawingml/2006/main">
               <a:ext uri="{FF2B5EF4-FFF2-40B4-BE49-F238E27FC236}">
-                <a16:creationId xmlns:a16="http://schemas.microsoft.com/office/drawing/2014/main" id="{D95DBC86-CBAF-49A0-997B-0B7AD0BF1637}"/>
+                <a16:creationId xmlns:a16="http://schemas.microsoft.com/office/drawing/2014/main" id="{36BEDA9A-EC64-4F3C-8C21-79A8E7942114}"/>
               </a:ext>
             </a:extLst>
           </p:cNvPr>
@@ -7028,7 +7028,7 @@
           <p:cNvPr id="9" name="Text 7">
             <a:extLst xmlns:a="http://schemas.openxmlformats.org/drawingml/2006/main">
               <a:ext uri="{FF2B5EF4-FFF2-40B4-BE49-F238E27FC236}">
-                <a16:creationId xmlns:a16="http://schemas.microsoft.com/office/drawing/2014/main" id="{6C88B10E-FDA2-45FF-93CF-93DA1FCA63DC}"/>
+                <a16:creationId xmlns:a16="http://schemas.microsoft.com/office/drawing/2014/main" id="{144C2540-40E1-4E94-BC8C-494F8C154813}"/>
               </a:ext>
             </a:extLst>
           </p:cNvPr>
@@ -7076,7 +7076,7 @@
           <p:cNvPr id="10" name="Shape 8">
             <a:extLst xmlns:a="http://schemas.openxmlformats.org/drawingml/2006/main">
               <a:ext uri="{FF2B5EF4-FFF2-40B4-BE49-F238E27FC236}">
-                <a16:creationId xmlns:a16="http://schemas.microsoft.com/office/drawing/2014/main" id="{7C58C2EA-8DDC-4A12-9BA2-C9EAFB2F4C0D}"/>
+                <a16:creationId xmlns:a16="http://schemas.microsoft.com/office/drawing/2014/main" id="{034376D7-C442-43EE-B8DF-589B6699E3E7}"/>
               </a:ext>
             </a:extLst>
           </p:cNvPr>
@@ -7123,7 +7123,7 @@
           <p:cNvPr id="11" name="Text 9">
             <a:extLst xmlns:a="http://schemas.openxmlformats.org/drawingml/2006/main">
               <a:ext uri="{FF2B5EF4-FFF2-40B4-BE49-F238E27FC236}">
-                <a16:creationId xmlns:a16="http://schemas.microsoft.com/office/drawing/2014/main" id="{EEC43439-8CFD-4374-AB8B-3F9891FB0CE7}"/>
+                <a16:creationId xmlns:a16="http://schemas.microsoft.com/office/drawing/2014/main" id="{7E000CB5-F6C7-46C1-BB8B-30189FE72492}"/>
               </a:ext>
             </a:extLst>
           </p:cNvPr>
@@ -7168,7 +7168,7 @@
           <p:cNvPr id="12" name="Text 10">
             <a:extLst xmlns:a="http://schemas.openxmlformats.org/drawingml/2006/main">
               <a:ext uri="{FF2B5EF4-FFF2-40B4-BE49-F238E27FC236}">
-                <a16:creationId xmlns:a16="http://schemas.microsoft.com/office/drawing/2014/main" id="{58C4652C-D11A-470A-83B1-4498F140CD01}"/>
+                <a16:creationId xmlns:a16="http://schemas.microsoft.com/office/drawing/2014/main" id="{1A10A0C2-1FF0-4CCD-B83A-C573662C7673}"/>
               </a:ext>
             </a:extLst>
           </p:cNvPr>
@@ -7213,7 +7213,7 @@
           <p:cNvPr id="13" name="Text 11">
             <a:extLst xmlns:a="http://schemas.openxmlformats.org/drawingml/2006/main">
               <a:ext uri="{FF2B5EF4-FFF2-40B4-BE49-F238E27FC236}">
-                <a16:creationId xmlns:a16="http://schemas.microsoft.com/office/drawing/2014/main" id="{169E969E-D533-4F01-BA07-6AE8D6C307AB}"/>
+                <a16:creationId xmlns:a16="http://schemas.microsoft.com/office/drawing/2014/main" id="{268708BD-0956-4AC7-9B6D-4BB1EBCFC6A1}"/>
               </a:ext>
             </a:extLst>
           </p:cNvPr>
@@ -7258,7 +7258,7 @@
           <p:cNvPr id="14" name="Text 12">
             <a:extLst xmlns:a="http://schemas.openxmlformats.org/drawingml/2006/main">
               <a:ext uri="{FF2B5EF4-FFF2-40B4-BE49-F238E27FC236}">
-                <a16:creationId xmlns:a16="http://schemas.microsoft.com/office/drawing/2014/main" id="{BE6EDCD4-84D7-4C98-98E5-79EAD712B856}"/>
+                <a16:creationId xmlns:a16="http://schemas.microsoft.com/office/drawing/2014/main" id="{905B5889-708E-4251-B068-F18575014DEA}"/>
               </a:ext>
             </a:extLst>
           </p:cNvPr>
@@ -7303,7 +7303,7 @@
           <p:cNvPr id="15" name="Text 13">
             <a:extLst xmlns:a="http://schemas.openxmlformats.org/drawingml/2006/main">
               <a:ext uri="{FF2B5EF4-FFF2-40B4-BE49-F238E27FC236}">
-                <a16:creationId xmlns:a16="http://schemas.microsoft.com/office/drawing/2014/main" id="{7AFC4A13-7E13-4AE4-B169-E8E05EA5CA72}"/>
+                <a16:creationId xmlns:a16="http://schemas.microsoft.com/office/drawing/2014/main" id="{DCFF0E06-FC0A-4619-9307-D818B05D2758}"/>
               </a:ext>
             </a:extLst>
           </p:cNvPr>
@@ -7348,7 +7348,7 @@
           <p:cNvPr id="16" name="Text 14">
             <a:extLst xmlns:a="http://schemas.openxmlformats.org/drawingml/2006/main">
               <a:ext uri="{FF2B5EF4-FFF2-40B4-BE49-F238E27FC236}">
-                <a16:creationId xmlns:a16="http://schemas.microsoft.com/office/drawing/2014/main" id="{656C3771-B781-4362-8C4C-1BABBFFA61DC}"/>
+                <a16:creationId xmlns:a16="http://schemas.microsoft.com/office/drawing/2014/main" id="{F7C73F8C-AE19-4EAF-B818-96685851794F}"/>
               </a:ext>
             </a:extLst>
           </p:cNvPr>
@@ -7393,7 +7393,7 @@
           <p:cNvPr id="17" name="Text 15">
             <a:extLst xmlns:a="http://schemas.openxmlformats.org/drawingml/2006/main">
               <a:ext uri="{FF2B5EF4-FFF2-40B4-BE49-F238E27FC236}">
-                <a16:creationId xmlns:a16="http://schemas.microsoft.com/office/drawing/2014/main" id="{F82AEF11-B2F0-4DBB-BDA9-B79D8A2180DA}"/>
+                <a16:creationId xmlns:a16="http://schemas.microsoft.com/office/drawing/2014/main" id="{2CFC8FE3-B1AB-4186-A8C5-FF0D077AA6C0}"/>
               </a:ext>
             </a:extLst>
           </p:cNvPr>
@@ -7438,7 +7438,7 @@
           <p:cNvPr id="18" name="Shape 16">
             <a:extLst xmlns:a="http://schemas.openxmlformats.org/drawingml/2006/main">
               <a:ext uri="{FF2B5EF4-FFF2-40B4-BE49-F238E27FC236}">
-                <a16:creationId xmlns:a16="http://schemas.microsoft.com/office/drawing/2014/main" id="{D0467D4C-E0FC-4A18-9F0F-ED79F2836730}"/>
+                <a16:creationId xmlns:a16="http://schemas.microsoft.com/office/drawing/2014/main" id="{6EAE12AE-7D64-4A5D-B094-C95D4C40A8B0}"/>
               </a:ext>
             </a:extLst>
           </p:cNvPr>
@@ -7474,7 +7474,7 @@
           <p:cNvPr id="19" name="Text 17">
             <a:extLst xmlns:a="http://schemas.openxmlformats.org/drawingml/2006/main">
               <a:ext uri="{FF2B5EF4-FFF2-40B4-BE49-F238E27FC236}">
-                <a16:creationId xmlns:a16="http://schemas.microsoft.com/office/drawing/2014/main" id="{BB5A93F1-E241-49D6-9BE9-5BE953FA7146}"/>
+                <a16:creationId xmlns:a16="http://schemas.microsoft.com/office/drawing/2014/main" id="{55EB7B9E-7678-4FA5-AC7B-8CA990B28CA1}"/>
               </a:ext>
             </a:extLst>
           </p:cNvPr>
@@ -7519,7 +7519,7 @@
           <p:cNvPr id="20" name="Text 18">
             <a:extLst xmlns:a="http://schemas.openxmlformats.org/drawingml/2006/main">
               <a:ext uri="{FF2B5EF4-FFF2-40B4-BE49-F238E27FC236}">
-                <a16:creationId xmlns:a16="http://schemas.microsoft.com/office/drawing/2014/main" id="{97256384-C8DC-4D8C-AD9B-51AC277829A7}"/>
+                <a16:creationId xmlns:a16="http://schemas.microsoft.com/office/drawing/2014/main" id="{CDBCEF4B-0F2F-4080-8D1A-C2BEC2DDCEBE}"/>
               </a:ext>
             </a:extLst>
           </p:cNvPr>
@@ -7567,7 +7567,7 @@
           <p:cNvPr id="21" name="Text 19">
             <a:extLst xmlns:a="http://schemas.openxmlformats.org/drawingml/2006/main">
               <a:ext uri="{FF2B5EF4-FFF2-40B4-BE49-F238E27FC236}">
-                <a16:creationId xmlns:a16="http://schemas.microsoft.com/office/drawing/2014/main" id="{9F7DFE80-8AD0-4C4C-94AE-2E8F41698733}"/>
+                <a16:creationId xmlns:a16="http://schemas.microsoft.com/office/drawing/2014/main" id="{3037723F-64C7-4DEF-9781-54AD75C73F30}"/>
               </a:ext>
             </a:extLst>
           </p:cNvPr>
@@ -7615,7 +7615,7 @@
           <p:cNvPr id="22" name="Shape 20">
             <a:extLst xmlns:a="http://schemas.openxmlformats.org/drawingml/2006/main">
               <a:ext uri="{FF2B5EF4-FFF2-40B4-BE49-F238E27FC236}">
-                <a16:creationId xmlns:a16="http://schemas.microsoft.com/office/drawing/2014/main" id="{CFF6CCF6-B090-4ECC-B767-A3C041F23AC0}"/>
+                <a16:creationId xmlns:a16="http://schemas.microsoft.com/office/drawing/2014/main" id="{B4E26691-8857-4ADB-A150-CE3F1A41AB8A}"/>
               </a:ext>
             </a:extLst>
           </p:cNvPr>
@@ -7662,7 +7662,7 @@
           <p:cNvPr id="23" name="Text 21">
             <a:extLst xmlns:a="http://schemas.openxmlformats.org/drawingml/2006/main">
               <a:ext uri="{FF2B5EF4-FFF2-40B4-BE49-F238E27FC236}">
-                <a16:creationId xmlns:a16="http://schemas.microsoft.com/office/drawing/2014/main" id="{0DD723B8-1A83-41D6-BACF-E5FFB2BAD0D2}"/>
+                <a16:creationId xmlns:a16="http://schemas.microsoft.com/office/drawing/2014/main" id="{94578AB1-9521-42B2-AC47-9E3368B73E9E}"/>
               </a:ext>
             </a:extLst>
           </p:cNvPr>
@@ -7719,7 +7719,7 @@
     </p:spTree>
     <p:extLst>
       <p:ext uri="{BB962C8B-B14F-4D97-AF65-F5344CB8AC3E}">
-        <p14:creationId xmlns:p14="http://schemas.microsoft.com/office/powerpoint/2010/main" val="1549054632"/>
+        <p14:creationId xmlns:p14="http://schemas.microsoft.com/office/powerpoint/2010/main" val="1877249930"/>
       </p:ext>
     </p:extLst>
   </p:cSld>
@@ -7750,7 +7750,7 @@
           <p:cNvPr id="2" name="Text 0">
             <a:extLst xmlns:a="http://schemas.openxmlformats.org/drawingml/2006/main">
               <a:ext uri="{FF2B5EF4-FFF2-40B4-BE49-F238E27FC236}">
-                <a16:creationId xmlns:a16="http://schemas.microsoft.com/office/drawing/2014/main" id="{4DA29BCC-3FC3-40B0-8A44-393BA99A0B62}"/>
+                <a16:creationId xmlns:a16="http://schemas.microsoft.com/office/drawing/2014/main" id="{69120F78-4269-4412-BDC9-0EB87DD12EDA}"/>
               </a:ext>
             </a:extLst>
           </p:cNvPr>
@@ -7795,7 +7795,7 @@
           <p:cNvPr id="3" name="Text 1">
             <a:extLst xmlns:a="http://schemas.openxmlformats.org/drawingml/2006/main">
               <a:ext uri="{FF2B5EF4-FFF2-40B4-BE49-F238E27FC236}">
-                <a16:creationId xmlns:a16="http://schemas.microsoft.com/office/drawing/2014/main" id="{E17F2F97-958A-4785-8CB9-47075F2E303A}"/>
+                <a16:creationId xmlns:a16="http://schemas.microsoft.com/office/drawing/2014/main" id="{A35AD63B-A434-4B30-80F5-17A9AFD71E29}"/>
               </a:ext>
             </a:extLst>
           </p:cNvPr>
@@ -7840,7 +7840,7 @@
           <p:cNvPr id="4" name="Text 2">
             <a:extLst xmlns:a="http://schemas.openxmlformats.org/drawingml/2006/main">
               <a:ext uri="{FF2B5EF4-FFF2-40B4-BE49-F238E27FC236}">
-                <a16:creationId xmlns:a16="http://schemas.microsoft.com/office/drawing/2014/main" id="{8E484AF0-7F1A-40B7-BC06-84C254C930C2}"/>
+                <a16:creationId xmlns:a16="http://schemas.microsoft.com/office/drawing/2014/main" id="{843257D8-EB9A-4338-9747-851E36D269AD}"/>
               </a:ext>
             </a:extLst>
           </p:cNvPr>
@@ -7885,7 +7885,7 @@
           <p:cNvPr id="5" name="Text 3">
             <a:extLst xmlns:a="http://schemas.openxmlformats.org/drawingml/2006/main">
               <a:ext uri="{FF2B5EF4-FFF2-40B4-BE49-F238E27FC236}">
-                <a16:creationId xmlns:a16="http://schemas.microsoft.com/office/drawing/2014/main" id="{80BFAFB3-DDA4-4CCC-85B3-3CDA8D3D05A7}"/>
+                <a16:creationId xmlns:a16="http://schemas.microsoft.com/office/drawing/2014/main" id="{B7D635AE-FE64-46DC-9528-92DBC9F26B2C}"/>
               </a:ext>
             </a:extLst>
           </p:cNvPr>
@@ -7930,7 +7930,7 @@
           <p:cNvPr id="6" name="Text 4">
             <a:extLst xmlns:a="http://schemas.openxmlformats.org/drawingml/2006/main">
               <a:ext uri="{FF2B5EF4-FFF2-40B4-BE49-F238E27FC236}">
-                <a16:creationId xmlns:a16="http://schemas.microsoft.com/office/drawing/2014/main" id="{484C000D-AB41-4E24-A3E2-8119CF5F6702}"/>
+                <a16:creationId xmlns:a16="http://schemas.microsoft.com/office/drawing/2014/main" id="{CF91DAB5-45B1-42E8-BC23-1688F29297E9}"/>
               </a:ext>
             </a:extLst>
           </p:cNvPr>
@@ -7978,7 +7978,7 @@
           <p:cNvPr id="7" name="Shape 5">
             <a:extLst xmlns:a="http://schemas.openxmlformats.org/drawingml/2006/main">
               <a:ext uri="{FF2B5EF4-FFF2-40B4-BE49-F238E27FC236}">
-                <a16:creationId xmlns:a16="http://schemas.microsoft.com/office/drawing/2014/main" id="{72C667E9-E68E-4146-B9AB-CDD7BC123A4B}"/>
+                <a16:creationId xmlns:a16="http://schemas.microsoft.com/office/drawing/2014/main" id="{64479950-7165-4AFB-8914-303D2EF0D019}"/>
               </a:ext>
             </a:extLst>
           </p:cNvPr>
@@ -8025,7 +8025,7 @@
           <p:cNvPr id="8" name="Text 6">
             <a:extLst xmlns:a="http://schemas.openxmlformats.org/drawingml/2006/main">
               <a:ext uri="{FF2B5EF4-FFF2-40B4-BE49-F238E27FC236}">
-                <a16:creationId xmlns:a16="http://schemas.microsoft.com/office/drawing/2014/main" id="{CC227831-6E31-47E9-8BC5-E86BD763B5B9}"/>
+                <a16:creationId xmlns:a16="http://schemas.microsoft.com/office/drawing/2014/main" id="{16146D52-ED36-4B02-8B76-BA29F6DAB6D5}"/>
               </a:ext>
             </a:extLst>
           </p:cNvPr>
@@ -8070,7 +8070,7 @@
           <p:cNvPr id="9" name="Text 7">
             <a:extLst xmlns:a="http://schemas.openxmlformats.org/drawingml/2006/main">
               <a:ext uri="{FF2B5EF4-FFF2-40B4-BE49-F238E27FC236}">
-                <a16:creationId xmlns:a16="http://schemas.microsoft.com/office/drawing/2014/main" id="{0CB36790-9DEC-4886-8814-91E6263E4D17}"/>
+                <a16:creationId xmlns:a16="http://schemas.microsoft.com/office/drawing/2014/main" id="{20457904-46E0-41F8-9F53-7AD2B865DC58}"/>
               </a:ext>
             </a:extLst>
           </p:cNvPr>
@@ -8118,7 +8118,7 @@
           <p:cNvPr id="10" name="Shape 8">
             <a:extLst xmlns:a="http://schemas.openxmlformats.org/drawingml/2006/main">
               <a:ext uri="{FF2B5EF4-FFF2-40B4-BE49-F238E27FC236}">
-                <a16:creationId xmlns:a16="http://schemas.microsoft.com/office/drawing/2014/main" id="{75702976-4271-4554-B064-5AD818FDE992}"/>
+                <a16:creationId xmlns:a16="http://schemas.microsoft.com/office/drawing/2014/main" id="{F8067CE0-010E-4461-80F9-CF471B0AE886}"/>
               </a:ext>
             </a:extLst>
           </p:cNvPr>
@@ -8165,7 +8165,7 @@
           <p:cNvPr id="11" name="Text 9">
             <a:extLst xmlns:a="http://schemas.openxmlformats.org/drawingml/2006/main">
               <a:ext uri="{FF2B5EF4-FFF2-40B4-BE49-F238E27FC236}">
-                <a16:creationId xmlns:a16="http://schemas.microsoft.com/office/drawing/2014/main" id="{5FABEEB3-D93A-49DD-8B4A-17629D98BEAC}"/>
+                <a16:creationId xmlns:a16="http://schemas.microsoft.com/office/drawing/2014/main" id="{2F95AC69-DCC1-4D20-A8CC-3F2AB8417719}"/>
               </a:ext>
             </a:extLst>
           </p:cNvPr>
@@ -8213,7 +8213,7 @@
           <p:cNvPr id="12" name="Shape 10">
             <a:extLst xmlns:a="http://schemas.openxmlformats.org/drawingml/2006/main">
               <a:ext uri="{FF2B5EF4-FFF2-40B4-BE49-F238E27FC236}">
-                <a16:creationId xmlns:a16="http://schemas.microsoft.com/office/drawing/2014/main" id="{3AFC5A08-21C9-4B9E-A46D-9F7D89FC2B72}"/>
+                <a16:creationId xmlns:a16="http://schemas.microsoft.com/office/drawing/2014/main" id="{57DF3CE3-257C-4F3B-AE4B-722D5E87F879}"/>
               </a:ext>
             </a:extLst>
           </p:cNvPr>
@@ -8260,7 +8260,7 @@
           <p:cNvPr id="13" name="Text 11">
             <a:extLst xmlns:a="http://schemas.openxmlformats.org/drawingml/2006/main">
               <a:ext uri="{FF2B5EF4-FFF2-40B4-BE49-F238E27FC236}">
-                <a16:creationId xmlns:a16="http://schemas.microsoft.com/office/drawing/2014/main" id="{7C1EE0E7-FB11-411A-99EA-043777542F05}"/>
+                <a16:creationId xmlns:a16="http://schemas.microsoft.com/office/drawing/2014/main" id="{01863342-29DE-46CD-9DDF-97C142AB10D0}"/>
               </a:ext>
             </a:extLst>
           </p:cNvPr>
@@ -8305,7 +8305,7 @@
           <p:cNvPr id="14" name="Text 12">
             <a:extLst xmlns:a="http://schemas.openxmlformats.org/drawingml/2006/main">
               <a:ext uri="{FF2B5EF4-FFF2-40B4-BE49-F238E27FC236}">
-                <a16:creationId xmlns:a16="http://schemas.microsoft.com/office/drawing/2014/main" id="{9C6CAB95-B252-4BB9-A49E-156C616FAF57}"/>
+                <a16:creationId xmlns:a16="http://schemas.microsoft.com/office/drawing/2014/main" id="{C3137D35-D186-4382-AB6D-CDFAE06BF90E}"/>
               </a:ext>
             </a:extLst>
           </p:cNvPr>
@@ -8350,7 +8350,7 @@
           <p:cNvPr id="15" name="Text 13">
             <a:extLst xmlns:a="http://schemas.openxmlformats.org/drawingml/2006/main">
               <a:ext uri="{FF2B5EF4-FFF2-40B4-BE49-F238E27FC236}">
-                <a16:creationId xmlns:a16="http://schemas.microsoft.com/office/drawing/2014/main" id="{F429579F-B3B8-4457-A284-445ED1529EF4}"/>
+                <a16:creationId xmlns:a16="http://schemas.microsoft.com/office/drawing/2014/main" id="{36105770-8589-4913-9375-5C6968A77A17}"/>
               </a:ext>
             </a:extLst>
           </p:cNvPr>
@@ -8395,7 +8395,7 @@
           <p:cNvPr id="16" name="Text 14">
             <a:extLst xmlns:a="http://schemas.openxmlformats.org/drawingml/2006/main">
               <a:ext uri="{FF2B5EF4-FFF2-40B4-BE49-F238E27FC236}">
-                <a16:creationId xmlns:a16="http://schemas.microsoft.com/office/drawing/2014/main" id="{536BA493-DD2F-49AB-9C93-DE8EBBF0E7AE}"/>
+                <a16:creationId xmlns:a16="http://schemas.microsoft.com/office/drawing/2014/main" id="{87AD7028-96B7-44EB-B59B-9BB386ED8928}"/>
               </a:ext>
             </a:extLst>
           </p:cNvPr>
@@ -8440,7 +8440,7 @@
           <p:cNvPr id="17" name="Text 15">
             <a:extLst xmlns:a="http://schemas.openxmlformats.org/drawingml/2006/main">
               <a:ext uri="{FF2B5EF4-FFF2-40B4-BE49-F238E27FC236}">
-                <a16:creationId xmlns:a16="http://schemas.microsoft.com/office/drawing/2014/main" id="{26EA600F-6E9E-4858-A74D-01052C2DEB23}"/>
+                <a16:creationId xmlns:a16="http://schemas.microsoft.com/office/drawing/2014/main" id="{38ECB354-D2D2-4FF2-9C9F-F30A99F32F6D}"/>
               </a:ext>
             </a:extLst>
           </p:cNvPr>
@@ -8485,7 +8485,7 @@
           <p:cNvPr id="18" name="Text 16">
             <a:extLst xmlns:a="http://schemas.openxmlformats.org/drawingml/2006/main">
               <a:ext uri="{FF2B5EF4-FFF2-40B4-BE49-F238E27FC236}">
-                <a16:creationId xmlns:a16="http://schemas.microsoft.com/office/drawing/2014/main" id="{6FF00005-6513-4F26-93C8-E2574EB86B0B}"/>
+                <a16:creationId xmlns:a16="http://schemas.microsoft.com/office/drawing/2014/main" id="{31C2ED5F-3EC1-4384-A070-0C270C4A7E1E}"/>
               </a:ext>
             </a:extLst>
           </p:cNvPr>
@@ -8530,7 +8530,7 @@
           <p:cNvPr id="19" name="Text 17">
             <a:extLst xmlns:a="http://schemas.openxmlformats.org/drawingml/2006/main">
               <a:ext uri="{FF2B5EF4-FFF2-40B4-BE49-F238E27FC236}">
-                <a16:creationId xmlns:a16="http://schemas.microsoft.com/office/drawing/2014/main" id="{FF126A45-CC77-4815-9EFF-261FD9386935}"/>
+                <a16:creationId xmlns:a16="http://schemas.microsoft.com/office/drawing/2014/main" id="{852744D2-B358-4A6F-9144-3AA0941A5305}"/>
               </a:ext>
             </a:extLst>
           </p:cNvPr>
@@ -8575,7 +8575,7 @@
           <p:cNvPr id="20" name="Shape 18">
             <a:extLst xmlns:a="http://schemas.openxmlformats.org/drawingml/2006/main">
               <a:ext uri="{FF2B5EF4-FFF2-40B4-BE49-F238E27FC236}">
-                <a16:creationId xmlns:a16="http://schemas.microsoft.com/office/drawing/2014/main" id="{B7916788-A386-411C-8A2B-7733DC86DE5A}"/>
+                <a16:creationId xmlns:a16="http://schemas.microsoft.com/office/drawing/2014/main" id="{A18F46A5-C4A7-473B-8FF6-326AEF327157}"/>
               </a:ext>
             </a:extLst>
           </p:cNvPr>
@@ -8611,7 +8611,7 @@
           <p:cNvPr id="21" name="Text 19">
             <a:extLst xmlns:a="http://schemas.openxmlformats.org/drawingml/2006/main">
               <a:ext uri="{FF2B5EF4-FFF2-40B4-BE49-F238E27FC236}">
-                <a16:creationId xmlns:a16="http://schemas.microsoft.com/office/drawing/2014/main" id="{83BCCB1E-7F34-48DA-91B8-6DD2AF3E0518}"/>
+                <a16:creationId xmlns:a16="http://schemas.microsoft.com/office/drawing/2014/main" id="{7A6B45F9-9005-474D-9BD5-4ED2F6585450}"/>
               </a:ext>
             </a:extLst>
           </p:cNvPr>
@@ -8656,7 +8656,7 @@
           <p:cNvPr id="22" name="Text 20">
             <a:extLst xmlns:a="http://schemas.openxmlformats.org/drawingml/2006/main">
               <a:ext uri="{FF2B5EF4-FFF2-40B4-BE49-F238E27FC236}">
-                <a16:creationId xmlns:a16="http://schemas.microsoft.com/office/drawing/2014/main" id="{3FBFD5C4-2870-4105-B417-F99D61302669}"/>
+                <a16:creationId xmlns:a16="http://schemas.microsoft.com/office/drawing/2014/main" id="{6F036B53-2507-4F07-A5C0-26A9E8901EBA}"/>
               </a:ext>
             </a:extLst>
           </p:cNvPr>
@@ -8701,7 +8701,7 @@
           <p:cNvPr id="23" name="Text 21">
             <a:extLst xmlns:a="http://schemas.openxmlformats.org/drawingml/2006/main">
               <a:ext uri="{FF2B5EF4-FFF2-40B4-BE49-F238E27FC236}">
-                <a16:creationId xmlns:a16="http://schemas.microsoft.com/office/drawing/2014/main" id="{EB353CB2-47BC-457A-B1AB-5FA6DD9A9B29}"/>
+                <a16:creationId xmlns:a16="http://schemas.microsoft.com/office/drawing/2014/main" id="{C5EDB61B-213C-44BC-92A4-86F90F4E55FF}"/>
               </a:ext>
             </a:extLst>
           </p:cNvPr>
@@ -8746,7 +8746,7 @@
           <p:cNvPr id="24" name="Text 22">
             <a:extLst xmlns:a="http://schemas.openxmlformats.org/drawingml/2006/main">
               <a:ext uri="{FF2B5EF4-FFF2-40B4-BE49-F238E27FC236}">
-                <a16:creationId xmlns:a16="http://schemas.microsoft.com/office/drawing/2014/main" id="{40B3B6C0-18FE-4947-A43D-DA5BBD6043C2}"/>
+                <a16:creationId xmlns:a16="http://schemas.microsoft.com/office/drawing/2014/main" id="{7B776363-DB2D-4495-839B-21621D597D37}"/>
               </a:ext>
             </a:extLst>
           </p:cNvPr>
@@ -8791,7 +8791,7 @@
           <p:cNvPr id="25" name="Text 23">
             <a:extLst xmlns:a="http://schemas.openxmlformats.org/drawingml/2006/main">
               <a:ext uri="{FF2B5EF4-FFF2-40B4-BE49-F238E27FC236}">
-                <a16:creationId xmlns:a16="http://schemas.microsoft.com/office/drawing/2014/main" id="{9455B13B-5604-4B8E-8855-77ACF8B8EF85}"/>
+                <a16:creationId xmlns:a16="http://schemas.microsoft.com/office/drawing/2014/main" id="{766C07EB-B63D-451C-8DCD-6005A60251A1}"/>
               </a:ext>
             </a:extLst>
           </p:cNvPr>
@@ -8837,7 +8837,7 @@
     </p:spTree>
     <p:extLst>
       <p:ext uri="{BB962C8B-B14F-4D97-AF65-F5344CB8AC3E}">
-        <p14:creationId xmlns:p14="http://schemas.microsoft.com/office/powerpoint/2010/main" val="844669405"/>
+        <p14:creationId xmlns:p14="http://schemas.microsoft.com/office/powerpoint/2010/main" val="332198809"/>
       </p:ext>
     </p:extLst>
   </p:cSld>
@@ -8868,7 +8868,7 @@
           <p:cNvPr id="2" name="Text 0">
             <a:extLst xmlns:a="http://schemas.openxmlformats.org/drawingml/2006/main">
               <a:ext uri="{FF2B5EF4-FFF2-40B4-BE49-F238E27FC236}">
-                <a16:creationId xmlns:a16="http://schemas.microsoft.com/office/drawing/2014/main" id="{FFA10BFD-7D7D-4EA8-91D4-C53262DEF8B0}"/>
+                <a16:creationId xmlns:a16="http://schemas.microsoft.com/office/drawing/2014/main" id="{2C151E1D-6EA2-4EDF-9AD2-E05293B925E0}"/>
               </a:ext>
             </a:extLst>
           </p:cNvPr>
@@ -8913,7 +8913,7 @@
           <p:cNvPr id="3" name="Text 1">
             <a:extLst xmlns:a="http://schemas.openxmlformats.org/drawingml/2006/main">
               <a:ext uri="{FF2B5EF4-FFF2-40B4-BE49-F238E27FC236}">
-                <a16:creationId xmlns:a16="http://schemas.microsoft.com/office/drawing/2014/main" id="{93F30592-C73A-4F79-AD1E-20C88F37BC14}"/>
+                <a16:creationId xmlns:a16="http://schemas.microsoft.com/office/drawing/2014/main" id="{2C780F97-1E7C-41F7-9090-EC32E1AACA8E}"/>
               </a:ext>
             </a:extLst>
           </p:cNvPr>
@@ -8958,7 +8958,7 @@
           <p:cNvPr id="4" name="Text 2">
             <a:extLst xmlns:a="http://schemas.openxmlformats.org/drawingml/2006/main">
               <a:ext uri="{FF2B5EF4-FFF2-40B4-BE49-F238E27FC236}">
-                <a16:creationId xmlns:a16="http://schemas.microsoft.com/office/drawing/2014/main" id="{C86246FE-8A96-4633-B6E2-C94EC5D3D496}"/>
+                <a16:creationId xmlns:a16="http://schemas.microsoft.com/office/drawing/2014/main" id="{9F5362ED-C83D-4CC3-807D-93E9B0705860}"/>
               </a:ext>
             </a:extLst>
           </p:cNvPr>
@@ -9003,7 +9003,7 @@
           <p:cNvPr id="5" name="Text 3">
             <a:extLst xmlns:a="http://schemas.openxmlformats.org/drawingml/2006/main">
               <a:ext uri="{FF2B5EF4-FFF2-40B4-BE49-F238E27FC236}">
-                <a16:creationId xmlns:a16="http://schemas.microsoft.com/office/drawing/2014/main" id="{1FA8FAE0-A2C1-4A94-B453-B7C5B32F9665}"/>
+                <a16:creationId xmlns:a16="http://schemas.microsoft.com/office/drawing/2014/main" id="{CC086FBB-E1F4-4E21-B240-1A19B6BE1B34}"/>
               </a:ext>
             </a:extLst>
           </p:cNvPr>
@@ -9048,7 +9048,7 @@
           <p:cNvPr id="6" name="Shape 4">
             <a:extLst xmlns:a="http://schemas.openxmlformats.org/drawingml/2006/main">
               <a:ext uri="{FF2B5EF4-FFF2-40B4-BE49-F238E27FC236}">
-                <a16:creationId xmlns:a16="http://schemas.microsoft.com/office/drawing/2014/main" id="{10E7A239-72CC-4683-80D0-C0FB1ABA9D52}"/>
+                <a16:creationId xmlns:a16="http://schemas.microsoft.com/office/drawing/2014/main" id="{D48DD201-4982-43E3-A0E6-504B50FE181B}"/>
               </a:ext>
             </a:extLst>
           </p:cNvPr>
@@ -9095,7 +9095,7 @@
           <p:cNvPr id="7" name="Shape 5">
             <a:extLst xmlns:a="http://schemas.openxmlformats.org/drawingml/2006/main">
               <a:ext uri="{FF2B5EF4-FFF2-40B4-BE49-F238E27FC236}">
-                <a16:creationId xmlns:a16="http://schemas.microsoft.com/office/drawing/2014/main" id="{68ACA069-50AA-41D9-BDA6-797B222F4E43}"/>
+                <a16:creationId xmlns:a16="http://schemas.microsoft.com/office/drawing/2014/main" id="{5FBA94E6-7AF2-4824-A62A-3D1E6BEF3FFD}"/>
               </a:ext>
             </a:extLst>
           </p:cNvPr>
@@ -9133,7 +9133,7 @@
           <p:cNvPr id="8" name="Text 6">
             <a:extLst xmlns:a="http://schemas.openxmlformats.org/drawingml/2006/main">
               <a:ext uri="{FF2B5EF4-FFF2-40B4-BE49-F238E27FC236}">
-                <a16:creationId xmlns:a16="http://schemas.microsoft.com/office/drawing/2014/main" id="{3D21AB53-1FAB-4085-A7F6-5C13B9C45860}"/>
+                <a16:creationId xmlns:a16="http://schemas.microsoft.com/office/drawing/2014/main" id="{5A0AF059-CAEF-4576-9928-342F7364E925}"/>
               </a:ext>
             </a:extLst>
           </p:cNvPr>
@@ -9178,7 +9178,7 @@
           <p:cNvPr id="9" name="Text 7">
             <a:extLst xmlns:a="http://schemas.openxmlformats.org/drawingml/2006/main">
               <a:ext uri="{FF2B5EF4-FFF2-40B4-BE49-F238E27FC236}">
-                <a16:creationId xmlns:a16="http://schemas.microsoft.com/office/drawing/2014/main" id="{7919B152-B53C-492A-9241-11FB0DFFC3F2}"/>
+                <a16:creationId xmlns:a16="http://schemas.microsoft.com/office/drawing/2014/main" id="{C1186A53-D808-4943-A911-928C05C986DC}"/>
               </a:ext>
             </a:extLst>
           </p:cNvPr>
@@ -9226,7 +9226,7 @@
           <p:cNvPr id="10" name="Text 8">
             <a:extLst xmlns:a="http://schemas.openxmlformats.org/drawingml/2006/main">
               <a:ext uri="{FF2B5EF4-FFF2-40B4-BE49-F238E27FC236}">
-                <a16:creationId xmlns:a16="http://schemas.microsoft.com/office/drawing/2014/main" id="{8E2FCAC2-C3F2-497E-B219-84281ABEFB8C}"/>
+                <a16:creationId xmlns:a16="http://schemas.microsoft.com/office/drawing/2014/main" id="{6559AAD1-8C0B-4022-B43C-E403F00BEA21}"/>
               </a:ext>
             </a:extLst>
           </p:cNvPr>
@@ -9274,7 +9274,7 @@
           <p:cNvPr id="11" name="Text 9">
             <a:extLst xmlns:a="http://schemas.openxmlformats.org/drawingml/2006/main">
               <a:ext uri="{FF2B5EF4-FFF2-40B4-BE49-F238E27FC236}">
-                <a16:creationId xmlns:a16="http://schemas.microsoft.com/office/drawing/2014/main" id="{18580A80-9403-4ABE-B9EC-E6B44E069BB7}"/>
+                <a16:creationId xmlns:a16="http://schemas.microsoft.com/office/drawing/2014/main" id="{AE206B25-9596-4216-9362-B65DA01A9434}"/>
               </a:ext>
             </a:extLst>
           </p:cNvPr>
@@ -9369,7 +9369,7 @@
           <p:cNvPr id="12" name="Shape 10">
             <a:extLst xmlns:a="http://schemas.openxmlformats.org/drawingml/2006/main">
               <a:ext uri="{FF2B5EF4-FFF2-40B4-BE49-F238E27FC236}">
-                <a16:creationId xmlns:a16="http://schemas.microsoft.com/office/drawing/2014/main" id="{B5AE4C16-64E0-4252-A3E9-C271F8A4728A}"/>
+                <a16:creationId xmlns:a16="http://schemas.microsoft.com/office/drawing/2014/main" id="{D72D27B0-DA6B-4797-BB6D-9470107FCEA5}"/>
               </a:ext>
             </a:extLst>
           </p:cNvPr>
@@ -9416,7 +9416,7 @@
           <p:cNvPr id="13" name="Shape 11">
             <a:extLst xmlns:a="http://schemas.openxmlformats.org/drawingml/2006/main">
               <a:ext uri="{FF2B5EF4-FFF2-40B4-BE49-F238E27FC236}">
-                <a16:creationId xmlns:a16="http://schemas.microsoft.com/office/drawing/2014/main" id="{387D8A9D-0A3E-42A3-9CED-1D040B73ED20}"/>
+                <a16:creationId xmlns:a16="http://schemas.microsoft.com/office/drawing/2014/main" id="{68640B0A-6636-4F4D-8622-C96F24ECD150}"/>
               </a:ext>
             </a:extLst>
           </p:cNvPr>
@@ -9454,7 +9454,7 @@
           <p:cNvPr id="14" name="Text 12">
             <a:extLst xmlns:a="http://schemas.openxmlformats.org/drawingml/2006/main">
               <a:ext uri="{FF2B5EF4-FFF2-40B4-BE49-F238E27FC236}">
-                <a16:creationId xmlns:a16="http://schemas.microsoft.com/office/drawing/2014/main" id="{0F91CDDF-341C-4AF1-BE56-824F36DCCE13}"/>
+                <a16:creationId xmlns:a16="http://schemas.microsoft.com/office/drawing/2014/main" id="{101DD1A2-D3AA-4FC4-B309-1022F7D0079F}"/>
               </a:ext>
             </a:extLst>
           </p:cNvPr>
@@ -9499,7 +9499,7 @@
           <p:cNvPr id="15" name="Text 13">
             <a:extLst xmlns:a="http://schemas.openxmlformats.org/drawingml/2006/main">
               <a:ext uri="{FF2B5EF4-FFF2-40B4-BE49-F238E27FC236}">
-                <a16:creationId xmlns:a16="http://schemas.microsoft.com/office/drawing/2014/main" id="{02446CE3-BABB-4798-985A-E21635BF54D2}"/>
+                <a16:creationId xmlns:a16="http://schemas.microsoft.com/office/drawing/2014/main" id="{E0A945E2-BCEB-4B51-9ABB-FC8EB1CA6D43}"/>
               </a:ext>
             </a:extLst>
           </p:cNvPr>
@@ -9547,7 +9547,7 @@
           <p:cNvPr id="16" name="Text 14">
             <a:extLst xmlns:a="http://schemas.openxmlformats.org/drawingml/2006/main">
               <a:ext uri="{FF2B5EF4-FFF2-40B4-BE49-F238E27FC236}">
-                <a16:creationId xmlns:a16="http://schemas.microsoft.com/office/drawing/2014/main" id="{A84EE151-DDE1-4257-A0A2-A8AD5371EBF8}"/>
+                <a16:creationId xmlns:a16="http://schemas.microsoft.com/office/drawing/2014/main" id="{101DBD44-E4F5-4C06-8C69-52728C6F7D08}"/>
               </a:ext>
             </a:extLst>
           </p:cNvPr>
@@ -9595,7 +9595,7 @@
           <p:cNvPr id="17" name="Text 15">
             <a:extLst xmlns:a="http://schemas.openxmlformats.org/drawingml/2006/main">
               <a:ext uri="{FF2B5EF4-FFF2-40B4-BE49-F238E27FC236}">
-                <a16:creationId xmlns:a16="http://schemas.microsoft.com/office/drawing/2014/main" id="{FF67A329-42A2-4C76-B92A-0C17D4F9369C}"/>
+                <a16:creationId xmlns:a16="http://schemas.microsoft.com/office/drawing/2014/main" id="{A5E5A5F4-D876-4E8F-86C6-7AD8272F562F}"/>
               </a:ext>
             </a:extLst>
           </p:cNvPr>
@@ -9690,7 +9690,7 @@
           <p:cNvPr id="18" name="Shape 16">
             <a:extLst xmlns:a="http://schemas.openxmlformats.org/drawingml/2006/main">
               <a:ext uri="{FF2B5EF4-FFF2-40B4-BE49-F238E27FC236}">
-                <a16:creationId xmlns:a16="http://schemas.microsoft.com/office/drawing/2014/main" id="{201216DF-4A86-40B6-9F73-6AA552B568EC}"/>
+                <a16:creationId xmlns:a16="http://schemas.microsoft.com/office/drawing/2014/main" id="{E649A01C-4253-400B-89F0-EC3D9FEB0E3F}"/>
               </a:ext>
             </a:extLst>
           </p:cNvPr>
@@ -9737,7 +9737,7 @@
           <p:cNvPr id="19" name="Shape 17">
             <a:extLst xmlns:a="http://schemas.openxmlformats.org/drawingml/2006/main">
               <a:ext uri="{FF2B5EF4-FFF2-40B4-BE49-F238E27FC236}">
-                <a16:creationId xmlns:a16="http://schemas.microsoft.com/office/drawing/2014/main" id="{6E4F01BA-E56F-444C-A694-E0173601A534}"/>
+                <a16:creationId xmlns:a16="http://schemas.microsoft.com/office/drawing/2014/main" id="{F716F0D7-D270-48D2-B2C3-8A52844E3C69}"/>
               </a:ext>
             </a:extLst>
           </p:cNvPr>
@@ -9775,7 +9775,7 @@
           <p:cNvPr id="20" name="Text 18">
             <a:extLst xmlns:a="http://schemas.openxmlformats.org/drawingml/2006/main">
               <a:ext uri="{FF2B5EF4-FFF2-40B4-BE49-F238E27FC236}">
-                <a16:creationId xmlns:a16="http://schemas.microsoft.com/office/drawing/2014/main" id="{55C86AC5-5F3B-4735-B71C-687D96B998B9}"/>
+                <a16:creationId xmlns:a16="http://schemas.microsoft.com/office/drawing/2014/main" id="{D04387B9-A092-42EF-ADEF-046ACE8E27A6}"/>
               </a:ext>
             </a:extLst>
           </p:cNvPr>
@@ -9820,7 +9820,7 @@
           <p:cNvPr id="21" name="Text 19">
             <a:extLst xmlns:a="http://schemas.openxmlformats.org/drawingml/2006/main">
               <a:ext uri="{FF2B5EF4-FFF2-40B4-BE49-F238E27FC236}">
-                <a16:creationId xmlns:a16="http://schemas.microsoft.com/office/drawing/2014/main" id="{DFEE6610-CEC3-4846-8EC3-3F41CFE9DE3D}"/>
+                <a16:creationId xmlns:a16="http://schemas.microsoft.com/office/drawing/2014/main" id="{64C060F6-ACFA-4DFE-AED2-6733B856AB2E}"/>
               </a:ext>
             </a:extLst>
           </p:cNvPr>
@@ -9868,7 +9868,7 @@
           <p:cNvPr id="22" name="Text 20">
             <a:extLst xmlns:a="http://schemas.openxmlformats.org/drawingml/2006/main">
               <a:ext uri="{FF2B5EF4-FFF2-40B4-BE49-F238E27FC236}">
-                <a16:creationId xmlns:a16="http://schemas.microsoft.com/office/drawing/2014/main" id="{B5D6BDB4-6E35-47F8-8E59-259B70473C44}"/>
+                <a16:creationId xmlns:a16="http://schemas.microsoft.com/office/drawing/2014/main" id="{7467E476-2527-44B2-9490-6805D9BD3E59}"/>
               </a:ext>
             </a:extLst>
           </p:cNvPr>
@@ -9916,7 +9916,7 @@
           <p:cNvPr id="23" name="Text 21">
             <a:extLst xmlns:a="http://schemas.openxmlformats.org/drawingml/2006/main">
               <a:ext uri="{FF2B5EF4-FFF2-40B4-BE49-F238E27FC236}">
-                <a16:creationId xmlns:a16="http://schemas.microsoft.com/office/drawing/2014/main" id="{2AFCD0F2-5595-477C-A842-40E72771813A}"/>
+                <a16:creationId xmlns:a16="http://schemas.microsoft.com/office/drawing/2014/main" id="{E2E3491B-9659-47EE-9046-4428F565E9A8}"/>
               </a:ext>
             </a:extLst>
           </p:cNvPr>
@@ -10011,7 +10011,7 @@
           <p:cNvPr id="24" name="Shape 22">
             <a:extLst xmlns:a="http://schemas.openxmlformats.org/drawingml/2006/main">
               <a:ext uri="{FF2B5EF4-FFF2-40B4-BE49-F238E27FC236}">
-                <a16:creationId xmlns:a16="http://schemas.microsoft.com/office/drawing/2014/main" id="{602C2F97-5C2A-4591-BA01-97D9404C1931}"/>
+                <a16:creationId xmlns:a16="http://schemas.microsoft.com/office/drawing/2014/main" id="{924F397C-F645-4F46-B810-786F8E42FF5A}"/>
               </a:ext>
             </a:extLst>
           </p:cNvPr>
@@ -10058,7 +10058,7 @@
           <p:cNvPr id="25" name="Text 23">
             <a:extLst xmlns:a="http://schemas.openxmlformats.org/drawingml/2006/main">
               <a:ext uri="{FF2B5EF4-FFF2-40B4-BE49-F238E27FC236}">
-                <a16:creationId xmlns:a16="http://schemas.microsoft.com/office/drawing/2014/main" id="{4284BB6C-C602-48C8-99ED-9EB36F07B990}"/>
+                <a16:creationId xmlns:a16="http://schemas.microsoft.com/office/drawing/2014/main" id="{4A6C8C80-C1FB-4DAC-9903-A251D1DF9BE8}"/>
               </a:ext>
             </a:extLst>
           </p:cNvPr>
@@ -10112,7 +10112,7 @@
     </p:spTree>
     <p:extLst>
       <p:ext uri="{BB962C8B-B14F-4D97-AF65-F5344CB8AC3E}">
-        <p14:creationId xmlns:p14="http://schemas.microsoft.com/office/powerpoint/2010/main" val="2097900581"/>
+        <p14:creationId xmlns:p14="http://schemas.microsoft.com/office/powerpoint/2010/main" val="122725366"/>
       </p:ext>
     </p:extLst>
   </p:cSld>
@@ -10143,7 +10143,7 @@
           <p:cNvPr id="2" name="Text 0">
             <a:extLst xmlns:a="http://schemas.openxmlformats.org/drawingml/2006/main">
               <a:ext uri="{FF2B5EF4-FFF2-40B4-BE49-F238E27FC236}">
-                <a16:creationId xmlns:a16="http://schemas.microsoft.com/office/drawing/2014/main" id="{00FBA99E-73BB-4004-9289-2B857D301612}"/>
+                <a16:creationId xmlns:a16="http://schemas.microsoft.com/office/drawing/2014/main" id="{2EC176BB-D43D-4D86-87BF-39D70CC3457A}"/>
               </a:ext>
             </a:extLst>
           </p:cNvPr>
@@ -10188,7 +10188,7 @@
           <p:cNvPr id="3" name="Text 1">
             <a:extLst xmlns:a="http://schemas.openxmlformats.org/drawingml/2006/main">
               <a:ext uri="{FF2B5EF4-FFF2-40B4-BE49-F238E27FC236}">
-                <a16:creationId xmlns:a16="http://schemas.microsoft.com/office/drawing/2014/main" id="{18651E73-BCEA-4881-B74B-6E57F46E5482}"/>
+                <a16:creationId xmlns:a16="http://schemas.microsoft.com/office/drawing/2014/main" id="{3629D14A-D30C-49DB-B1E9-C75324991239}"/>
               </a:ext>
             </a:extLst>
           </p:cNvPr>
@@ -10233,7 +10233,7 @@
           <p:cNvPr id="4" name="Text 2">
             <a:extLst xmlns:a="http://schemas.openxmlformats.org/drawingml/2006/main">
               <a:ext uri="{FF2B5EF4-FFF2-40B4-BE49-F238E27FC236}">
-                <a16:creationId xmlns:a16="http://schemas.microsoft.com/office/drawing/2014/main" id="{F1BDD051-7195-47FD-9E25-AE3C5DF4DC76}"/>
+                <a16:creationId xmlns:a16="http://schemas.microsoft.com/office/drawing/2014/main" id="{CDC2DAA7-97F7-4A87-8C89-3D61669188DF}"/>
               </a:ext>
             </a:extLst>
           </p:cNvPr>
@@ -10278,7 +10278,7 @@
           <p:cNvPr id="5" name="Text 3">
             <a:extLst xmlns:a="http://schemas.openxmlformats.org/drawingml/2006/main">
               <a:ext uri="{FF2B5EF4-FFF2-40B4-BE49-F238E27FC236}">
-                <a16:creationId xmlns:a16="http://schemas.microsoft.com/office/drawing/2014/main" id="{2371272B-0A7E-4C4B-957E-BB27D52DC85F}"/>
+                <a16:creationId xmlns:a16="http://schemas.microsoft.com/office/drawing/2014/main" id="{F88A72A1-894F-41CA-8D90-7AC3591A05D5}"/>
               </a:ext>
             </a:extLst>
           </p:cNvPr>
@@ -10323,7 +10323,7 @@
           <p:cNvPr id="6" name="Text 4">
             <a:extLst xmlns:a="http://schemas.openxmlformats.org/drawingml/2006/main">
               <a:ext uri="{FF2B5EF4-FFF2-40B4-BE49-F238E27FC236}">
-                <a16:creationId xmlns:a16="http://schemas.microsoft.com/office/drawing/2014/main" id="{F2428EE7-B852-4F10-BEC0-886E444157D7}"/>
+                <a16:creationId xmlns:a16="http://schemas.microsoft.com/office/drawing/2014/main" id="{72DFEF59-6A06-4BFB-83B1-508CC42159FE}"/>
               </a:ext>
             </a:extLst>
           </p:cNvPr>
@@ -10418,7 +10418,7 @@
           <p:cNvPr id="7" name="Shape 5">
             <a:extLst xmlns:a="http://schemas.openxmlformats.org/drawingml/2006/main">
               <a:ext uri="{FF2B5EF4-FFF2-40B4-BE49-F238E27FC236}">
-                <a16:creationId xmlns:a16="http://schemas.microsoft.com/office/drawing/2014/main" id="{1422955C-1E2C-4452-AAA3-58F800AF249B}"/>
+                <a16:creationId xmlns:a16="http://schemas.microsoft.com/office/drawing/2014/main" id="{642A6E85-6B7E-4C75-88AD-8AC6B1740353}"/>
               </a:ext>
             </a:extLst>
           </p:cNvPr>
@@ -10465,7 +10465,7 @@
           <p:cNvPr id="8" name="Text 6">
             <a:extLst xmlns:a="http://schemas.openxmlformats.org/drawingml/2006/main">
               <a:ext uri="{FF2B5EF4-FFF2-40B4-BE49-F238E27FC236}">
-                <a16:creationId xmlns:a16="http://schemas.microsoft.com/office/drawing/2014/main" id="{D4D00D00-FBFD-43F4-A80F-3B74A385EAA8}"/>
+                <a16:creationId xmlns:a16="http://schemas.microsoft.com/office/drawing/2014/main" id="{F4CA1AE2-22A3-40DB-8F43-53C7B1A28087}"/>
               </a:ext>
             </a:extLst>
           </p:cNvPr>
@@ -10531,7 +10531,7 @@
         </p:xfrm>
         <a:graphic xmlns:a="http://schemas.openxmlformats.org/drawingml/2006/main">
           <a:graphicData uri="http://schemas.openxmlformats.org/drawingml/2006/chart">
-            <c:chart xmlns:r="http://schemas.openxmlformats.org/officeDocument/2006/relationships" xmlns:c="http://schemas.openxmlformats.org/drawingml/2006/chart" r:id="R35776b59d4cc4db8"/>
+            <c:chart xmlns:r="http://schemas.openxmlformats.org/officeDocument/2006/relationships" xmlns:c="http://schemas.openxmlformats.org/drawingml/2006/chart" r:id="Ra5a344bc25c34004"/>
           </a:graphicData>
         </a:graphic>
       </p:graphicFrame>
@@ -10540,7 +10540,7 @@
           <p:cNvPr id="10" name="Shape 7">
             <a:extLst xmlns:a="http://schemas.openxmlformats.org/drawingml/2006/main">
               <a:ext uri="{FF2B5EF4-FFF2-40B4-BE49-F238E27FC236}">
-                <a16:creationId xmlns:a16="http://schemas.microsoft.com/office/drawing/2014/main" id="{33EB62EF-4209-4C11-8062-83175421182D}"/>
+                <a16:creationId xmlns:a16="http://schemas.microsoft.com/office/drawing/2014/main" id="{19173B99-1D1A-4A60-95CE-94325E68068B}"/>
               </a:ext>
             </a:extLst>
           </p:cNvPr>
@@ -10587,7 +10587,7 @@
           <p:cNvPr id="11" name="Text 8">
             <a:extLst xmlns:a="http://schemas.openxmlformats.org/drawingml/2006/main">
               <a:ext uri="{FF2B5EF4-FFF2-40B4-BE49-F238E27FC236}">
-                <a16:creationId xmlns:a16="http://schemas.microsoft.com/office/drawing/2014/main" id="{A56060D6-B9C9-4571-B9BC-AE286AFD4181}"/>
+                <a16:creationId xmlns:a16="http://schemas.microsoft.com/office/drawing/2014/main" id="{6429C54B-CA86-413D-87BF-188B1050ACFB}"/>
               </a:ext>
             </a:extLst>
           </p:cNvPr>
@@ -10632,7 +10632,7 @@
           <p:cNvPr id="12" name="Text 9">
             <a:extLst xmlns:a="http://schemas.openxmlformats.org/drawingml/2006/main">
               <a:ext uri="{FF2B5EF4-FFF2-40B4-BE49-F238E27FC236}">
-                <a16:creationId xmlns:a16="http://schemas.microsoft.com/office/drawing/2014/main" id="{63274AC7-0705-41CB-B75E-3B2F048C8A4C}"/>
+                <a16:creationId xmlns:a16="http://schemas.microsoft.com/office/drawing/2014/main" id="{A6F6B443-2C3E-462E-8EB5-640162A60113}"/>
               </a:ext>
             </a:extLst>
           </p:cNvPr>
@@ -10680,7 +10680,7 @@
           <p:cNvPr id="13" name="Shape 10">
             <a:extLst xmlns:a="http://schemas.openxmlformats.org/drawingml/2006/main">
               <a:ext uri="{FF2B5EF4-FFF2-40B4-BE49-F238E27FC236}">
-                <a16:creationId xmlns:a16="http://schemas.microsoft.com/office/drawing/2014/main" id="{B25CA90A-B144-4DB9-B114-355D901BD859}"/>
+                <a16:creationId xmlns:a16="http://schemas.microsoft.com/office/drawing/2014/main" id="{483F41A4-73BF-4FBB-9E4C-2A97A92980F2}"/>
               </a:ext>
             </a:extLst>
           </p:cNvPr>
@@ -10727,7 +10727,7 @@
           <p:cNvPr id="14" name="Text 11">
             <a:extLst xmlns:a="http://schemas.openxmlformats.org/drawingml/2006/main">
               <a:ext uri="{FF2B5EF4-FFF2-40B4-BE49-F238E27FC236}">
-                <a16:creationId xmlns:a16="http://schemas.microsoft.com/office/drawing/2014/main" id="{5238B9BA-4DD5-4EDA-94B5-C9699300FF10}"/>
+                <a16:creationId xmlns:a16="http://schemas.microsoft.com/office/drawing/2014/main" id="{945F33FD-50A4-4587-8165-0061146D758D}"/>
               </a:ext>
             </a:extLst>
           </p:cNvPr>
@@ -10772,7 +10772,7 @@
           <p:cNvPr id="15" name="Text 12">
             <a:extLst xmlns:a="http://schemas.openxmlformats.org/drawingml/2006/main">
               <a:ext uri="{FF2B5EF4-FFF2-40B4-BE49-F238E27FC236}">
-                <a16:creationId xmlns:a16="http://schemas.microsoft.com/office/drawing/2014/main" id="{5823BB7A-6AAA-4440-AB74-9A660E230C7C}"/>
+                <a16:creationId xmlns:a16="http://schemas.microsoft.com/office/drawing/2014/main" id="{C4F7D80A-7FB3-4CDF-992B-9372CE7EB3CE}"/>
               </a:ext>
             </a:extLst>
           </p:cNvPr>
@@ -10820,7 +10820,7 @@
           <p:cNvPr id="16" name="Shape 13">
             <a:extLst xmlns:a="http://schemas.openxmlformats.org/drawingml/2006/main">
               <a:ext uri="{FF2B5EF4-FFF2-40B4-BE49-F238E27FC236}">
-                <a16:creationId xmlns:a16="http://schemas.microsoft.com/office/drawing/2014/main" id="{0B9E6D30-BD7C-497B-B5A2-F2E0C12C138A}"/>
+                <a16:creationId xmlns:a16="http://schemas.microsoft.com/office/drawing/2014/main" id="{6C461023-FD8E-4BB2-97CE-48C0C2810D7F}"/>
               </a:ext>
             </a:extLst>
           </p:cNvPr>
@@ -10867,7 +10867,7 @@
           <p:cNvPr id="17" name="Text 14">
             <a:extLst xmlns:a="http://schemas.openxmlformats.org/drawingml/2006/main">
               <a:ext uri="{FF2B5EF4-FFF2-40B4-BE49-F238E27FC236}">
-                <a16:creationId xmlns:a16="http://schemas.microsoft.com/office/drawing/2014/main" id="{87C78687-4656-46F2-8D2B-6553A3318E84}"/>
+                <a16:creationId xmlns:a16="http://schemas.microsoft.com/office/drawing/2014/main" id="{7BE43BCA-A57F-4DCC-A5A7-10C2434D3A2C}"/>
               </a:ext>
             </a:extLst>
           </p:cNvPr>
@@ -10912,7 +10912,7 @@
           <p:cNvPr id="18" name="Text 15">
             <a:extLst xmlns:a="http://schemas.openxmlformats.org/drawingml/2006/main">
               <a:ext uri="{FF2B5EF4-FFF2-40B4-BE49-F238E27FC236}">
-                <a16:creationId xmlns:a16="http://schemas.microsoft.com/office/drawing/2014/main" id="{EAD32D67-4545-448F-BFB2-9988E3237018}"/>
+                <a16:creationId xmlns:a16="http://schemas.microsoft.com/office/drawing/2014/main" id="{350BA061-27F2-4BE7-ADEF-5436892E51E2}"/>
               </a:ext>
             </a:extLst>
           </p:cNvPr>
@@ -10960,7 +10960,7 @@
           <p:cNvPr id="19" name="Shape 16">
             <a:extLst xmlns:a="http://schemas.openxmlformats.org/drawingml/2006/main">
               <a:ext uri="{FF2B5EF4-FFF2-40B4-BE49-F238E27FC236}">
-                <a16:creationId xmlns:a16="http://schemas.microsoft.com/office/drawing/2014/main" id="{E3406447-0F40-4620-9CC4-74ECB617D99D}"/>
+                <a16:creationId xmlns:a16="http://schemas.microsoft.com/office/drawing/2014/main" id="{3F5F7FD0-AF8B-4C12-8595-485ADE3ABD57}"/>
               </a:ext>
             </a:extLst>
           </p:cNvPr>
@@ -11007,7 +11007,7 @@
           <p:cNvPr id="20" name="Text 17">
             <a:extLst xmlns:a="http://schemas.openxmlformats.org/drawingml/2006/main">
               <a:ext uri="{FF2B5EF4-FFF2-40B4-BE49-F238E27FC236}">
-                <a16:creationId xmlns:a16="http://schemas.microsoft.com/office/drawing/2014/main" id="{D98C6757-D8EA-43B5-BF2E-0BEFCBB93E62}"/>
+                <a16:creationId xmlns:a16="http://schemas.microsoft.com/office/drawing/2014/main" id="{438897B1-29D2-4E43-945E-B90D9FE46AF7}"/>
               </a:ext>
             </a:extLst>
           </p:cNvPr>
@@ -11052,7 +11052,7 @@
           <p:cNvPr id="21" name="Text 18">
             <a:extLst xmlns:a="http://schemas.openxmlformats.org/drawingml/2006/main">
               <a:ext uri="{FF2B5EF4-FFF2-40B4-BE49-F238E27FC236}">
-                <a16:creationId xmlns:a16="http://schemas.microsoft.com/office/drawing/2014/main" id="{A47F989C-281F-4ED7-B81D-B640FA868EC6}"/>
+                <a16:creationId xmlns:a16="http://schemas.microsoft.com/office/drawing/2014/main" id="{A954F22F-78DA-41C6-B9AF-F4952C3DDD9B}"/>
               </a:ext>
             </a:extLst>
           </p:cNvPr>
@@ -11098,7 +11098,7 @@
     </p:spTree>
     <p:extLst>
       <p:ext uri="{BB962C8B-B14F-4D97-AF65-F5344CB8AC3E}">
-        <p14:creationId xmlns:p14="http://schemas.microsoft.com/office/powerpoint/2010/main" val="1664519256"/>
+        <p14:creationId xmlns:p14="http://schemas.microsoft.com/office/powerpoint/2010/main" val="1385376139"/>
       </p:ext>
     </p:extLst>
   </p:cSld>
@@ -11129,7 +11129,7 @@
           <p:cNvPr id="2" name="Text 0">
             <a:extLst xmlns:a="http://schemas.openxmlformats.org/drawingml/2006/main">
               <a:ext uri="{FF2B5EF4-FFF2-40B4-BE49-F238E27FC236}">
-                <a16:creationId xmlns:a16="http://schemas.microsoft.com/office/drawing/2014/main" id="{00FBA99E-73BB-4004-9289-2B857D301612}"/>
+                <a16:creationId xmlns:a16="http://schemas.microsoft.com/office/drawing/2014/main" id="{2EC176BB-D43D-4D86-87BF-39D70CC3457A}"/>
               </a:ext>
             </a:extLst>
           </p:cNvPr>
@@ -11174,7 +11174,7 @@
           <p:cNvPr id="3" name="Text 1">
             <a:extLst xmlns:a="http://schemas.openxmlformats.org/drawingml/2006/main">
               <a:ext uri="{FF2B5EF4-FFF2-40B4-BE49-F238E27FC236}">
-                <a16:creationId xmlns:a16="http://schemas.microsoft.com/office/drawing/2014/main" id="{18651E73-BCEA-4881-B74B-6E57F46E5482}"/>
+                <a16:creationId xmlns:a16="http://schemas.microsoft.com/office/drawing/2014/main" id="{3629D14A-D30C-49DB-B1E9-C75324991239}"/>
               </a:ext>
             </a:extLst>
           </p:cNvPr>
@@ -11219,7 +11219,7 @@
           <p:cNvPr id="4" name="Text 2">
             <a:extLst xmlns:a="http://schemas.openxmlformats.org/drawingml/2006/main">
               <a:ext uri="{FF2B5EF4-FFF2-40B4-BE49-F238E27FC236}">
-                <a16:creationId xmlns:a16="http://schemas.microsoft.com/office/drawing/2014/main" id="{F1BDD051-7195-47FD-9E25-AE3C5DF4DC76}"/>
+                <a16:creationId xmlns:a16="http://schemas.microsoft.com/office/drawing/2014/main" id="{CDC2DAA7-97F7-4A87-8C89-3D61669188DF}"/>
               </a:ext>
             </a:extLst>
           </p:cNvPr>
@@ -11264,7 +11264,7 @@
           <p:cNvPr id="5" name="Text 3">
             <a:extLst xmlns:a="http://schemas.openxmlformats.org/drawingml/2006/main">
               <a:ext uri="{FF2B5EF4-FFF2-40B4-BE49-F238E27FC236}">
-                <a16:creationId xmlns:a16="http://schemas.microsoft.com/office/drawing/2014/main" id="{2371272B-0A7E-4C4B-957E-BB27D52DC85F}"/>
+                <a16:creationId xmlns:a16="http://schemas.microsoft.com/office/drawing/2014/main" id="{F88A72A1-894F-41CA-8D90-7AC3591A05D5}"/>
               </a:ext>
             </a:extLst>
           </p:cNvPr>
@@ -11309,7 +11309,7 @@
           <p:cNvPr id="6" name="Text 4">
             <a:extLst xmlns:a="http://schemas.openxmlformats.org/drawingml/2006/main">
               <a:ext uri="{FF2B5EF4-FFF2-40B4-BE49-F238E27FC236}">
-                <a16:creationId xmlns:a16="http://schemas.microsoft.com/office/drawing/2014/main" id="{F2428EE7-B852-4F10-BEC0-886E444157D7}"/>
+                <a16:creationId xmlns:a16="http://schemas.microsoft.com/office/drawing/2014/main" id="{72DFEF59-6A06-4BFB-83B1-508CC42159FE}"/>
               </a:ext>
             </a:extLst>
           </p:cNvPr>
@@ -11350,7 +11350,7 @@
                 <a:ea typeface="Calibri"/>
                 <a:cs typeface="Calibri"/>
               </a:rPr>
-              <a:t>Issue-type routing, PR-outcome audit, and backlog-attention routing use distinct tools and exact graders over one pinned public snapshot.</a:t>
+              <a:t>Issue-type routing, PR-outcome audit, and backlog-attention routing use distinct tools and exact graders over one pinned public snapshot, with all 90 held-out records pairwise disjoint.</a:t>
             </a:r>
           </a:p>
           <a:p xmlns:a="http://schemas.openxmlformats.org/drawingml/2006/main">
@@ -11372,7 +11372,7 @@
                 <a:ea typeface="Calibri"/>
                 <a:cs typeface="Calibri"/>
               </a:rPr>
-              <a:t>Compiled programs reach 90/90 exact outcomes versus 89/90 baseline. Weighted reductions: requests 66.6%, visible interfaces 44.2%, tokens 63.1%, observed latency 64.2%, and cost 58.7%.</a:t>
+              <a:t>Compiled programs reach 90/90 exact outcomes versus 89/90 baseline (exact McNemar p=1; pooled compiled-only discordance bound 3.3%). Weighted reductions: requests 66.6%, visible interfaces 44.2%, tokens 63.1%, observed latency 64.2%, and cost 58.7%.</a:t>
             </a:r>
           </a:p>
           <a:p xmlns:a="http://schemas.openxmlformats.org/drawingml/2006/main">
@@ -11394,6 +11394,28 @@
                 <a:ea typeface="Calibri"/>
                 <a:cs typeface="Calibri"/>
               </a:rPr>
+              <a:t>All three artifacts are calibrated at the registered α=.05 over 92 zero-violation groups.</a:t>
+            </a:r>
+          </a:p>
+          <a:p xmlns:a="http://schemas.openxmlformats.org/drawingml/2006/main">
+            <a:pPr marL="342900" indent="-342900">
+              <a:lnSpc>
+                <a:spcPct val="106000"/>
+              </a:lnSpc>
+              <a:spcAft>
+                <a:spcPts val="700"/>
+              </a:spcAft>
+              <a:buChar char="•"/>
+            </a:pPr>
+            <a:r>
+              <a:rPr sz="1250">
+                <a:solidFill>
+                  <a:srgbClr val="2A4247"/>
+                </a:solidFill>
+                <a:latin typeface="Calibri"/>
+                <a:ea typeface="Calibri"/>
+                <a:cs typeface="Calibri"/>
+              </a:rPr>
               <a:t>Manual programs also reach 90/90, so the learned result is transfer and automation—not runtime superiority.</a:t>
             </a:r>
           </a:p>
@@ -11404,7 +11426,7 @@
           <p:cNvPr id="7" name="Shape 5">
             <a:extLst xmlns:a="http://schemas.openxmlformats.org/drawingml/2006/main">
               <a:ext uri="{FF2B5EF4-FFF2-40B4-BE49-F238E27FC236}">
-                <a16:creationId xmlns:a16="http://schemas.microsoft.com/office/drawing/2014/main" id="{1422955C-1E2C-4452-AAA3-58F800AF249B}"/>
+                <a16:creationId xmlns:a16="http://schemas.microsoft.com/office/drawing/2014/main" id="{642A6E85-6B7E-4C75-88AD-8AC6B1740353}"/>
               </a:ext>
             </a:extLst>
           </p:cNvPr>
@@ -11451,7 +11473,7 @@
           <p:cNvPr id="8" name="Text 6">
             <a:extLst xmlns:a="http://schemas.openxmlformats.org/drawingml/2006/main">
               <a:ext uri="{FF2B5EF4-FFF2-40B4-BE49-F238E27FC236}">
-                <a16:creationId xmlns:a16="http://schemas.microsoft.com/office/drawing/2014/main" id="{D4D00D00-FBFD-43F4-A80F-3B74A385EAA8}"/>
+                <a16:creationId xmlns:a16="http://schemas.microsoft.com/office/drawing/2014/main" id="{F4CA1AE2-22A3-40DB-8F43-53C7B1A28087}"/>
               </a:ext>
             </a:extLst>
           </p:cNvPr>
@@ -11489,7 +11511,7 @@
                 <a:ea typeface="Calibri"/>
                 <a:cs typeface="Calibri"/>
               </a:rPr>
-              <a:t>The two new families compile verified three-read pre-model programs; the original issue family retains its conservative two-read prefix. The study changes decision and tools, but not repository or time: cross-repository and time-forward transfer remain open.</a:t>
+              <a:t>The two new families compile verified three-read pre-model programs; the original issue family retains its conservative two-read prefix. Both newer families are cache-cold in every arm, so part of the 32.0–75.3% cost range is prompt-cache warmth rather than compiled depth; provider-side break-even is 411, 182, and 181 episodes against 132 paid discovery episodes each. The study changes decision and tools, but not repository or time: cross-repository and time-forward transfer remain open.</a:t>
             </a:r>
           </a:p>
         </p:txBody>
@@ -11506,7 +11528,7 @@
         </p:xfrm>
         <a:graphic xmlns:a="http://schemas.openxmlformats.org/drawingml/2006/main">
           <a:graphicData uri="http://schemas.openxmlformats.org/drawingml/2006/chart">
-            <c:chart xmlns:r="http://schemas.openxmlformats.org/officeDocument/2006/relationships" xmlns:c="http://schemas.openxmlformats.org/drawingml/2006/chart" r:id="R584825a2fe5f4db2"/>
+            <c:chart xmlns:r="http://schemas.openxmlformats.org/officeDocument/2006/relationships" xmlns:c="http://schemas.openxmlformats.org/drawingml/2006/chart" r:id="R4da551d5950f48b5"/>
           </a:graphicData>
         </a:graphic>
       </p:graphicFrame>
@@ -11515,7 +11537,7 @@
           <p:cNvPr id="10" name="Shape 7">
             <a:extLst xmlns:a="http://schemas.openxmlformats.org/drawingml/2006/main">
               <a:ext uri="{FF2B5EF4-FFF2-40B4-BE49-F238E27FC236}">
-                <a16:creationId xmlns:a16="http://schemas.microsoft.com/office/drawing/2014/main" id="{33EB62EF-4209-4C11-8062-83175421182D}"/>
+                <a16:creationId xmlns:a16="http://schemas.microsoft.com/office/drawing/2014/main" id="{19173B99-1D1A-4A60-95CE-94325E68068B}"/>
               </a:ext>
             </a:extLst>
           </p:cNvPr>
@@ -11562,7 +11584,7 @@
           <p:cNvPr id="11" name="Text 8">
             <a:extLst xmlns:a="http://schemas.openxmlformats.org/drawingml/2006/main">
               <a:ext uri="{FF2B5EF4-FFF2-40B4-BE49-F238E27FC236}">
-                <a16:creationId xmlns:a16="http://schemas.microsoft.com/office/drawing/2014/main" id="{A56060D6-B9C9-4571-B9BC-AE286AFD4181}"/>
+                <a16:creationId xmlns:a16="http://schemas.microsoft.com/office/drawing/2014/main" id="{6429C54B-CA86-413D-87BF-188B1050ACFB}"/>
               </a:ext>
             </a:extLst>
           </p:cNvPr>
@@ -11607,7 +11629,7 @@
           <p:cNvPr id="12" name="Text 9">
             <a:extLst xmlns:a="http://schemas.openxmlformats.org/drawingml/2006/main">
               <a:ext uri="{FF2B5EF4-FFF2-40B4-BE49-F238E27FC236}">
-                <a16:creationId xmlns:a16="http://schemas.microsoft.com/office/drawing/2014/main" id="{63274AC7-0705-41CB-B75E-3B2F048C8A4C}"/>
+                <a16:creationId xmlns:a16="http://schemas.microsoft.com/office/drawing/2014/main" id="{A6F6B443-2C3E-462E-8EB5-640162A60113}"/>
               </a:ext>
             </a:extLst>
           </p:cNvPr>
@@ -11655,7 +11677,7 @@
           <p:cNvPr id="13" name="Shape 10">
             <a:extLst xmlns:a="http://schemas.openxmlformats.org/drawingml/2006/main">
               <a:ext uri="{FF2B5EF4-FFF2-40B4-BE49-F238E27FC236}">
-                <a16:creationId xmlns:a16="http://schemas.microsoft.com/office/drawing/2014/main" id="{B25CA90A-B144-4DB9-B114-355D901BD859}"/>
+                <a16:creationId xmlns:a16="http://schemas.microsoft.com/office/drawing/2014/main" id="{483F41A4-73BF-4FBB-9E4C-2A97A92980F2}"/>
               </a:ext>
             </a:extLst>
           </p:cNvPr>
@@ -11702,7 +11724,7 @@
           <p:cNvPr id="14" name="Text 11">
             <a:extLst xmlns:a="http://schemas.openxmlformats.org/drawingml/2006/main">
               <a:ext uri="{FF2B5EF4-FFF2-40B4-BE49-F238E27FC236}">
-                <a16:creationId xmlns:a16="http://schemas.microsoft.com/office/drawing/2014/main" id="{5238B9BA-4DD5-4EDA-94B5-C9699300FF10}"/>
+                <a16:creationId xmlns:a16="http://schemas.microsoft.com/office/drawing/2014/main" id="{945F33FD-50A4-4587-8165-0061146D758D}"/>
               </a:ext>
             </a:extLst>
           </p:cNvPr>
@@ -11747,7 +11769,7 @@
           <p:cNvPr id="15" name="Text 12">
             <a:extLst xmlns:a="http://schemas.openxmlformats.org/drawingml/2006/main">
               <a:ext uri="{FF2B5EF4-FFF2-40B4-BE49-F238E27FC236}">
-                <a16:creationId xmlns:a16="http://schemas.microsoft.com/office/drawing/2014/main" id="{5823BB7A-6AAA-4440-AB74-9A660E230C7C}"/>
+                <a16:creationId xmlns:a16="http://schemas.microsoft.com/office/drawing/2014/main" id="{C4F7D80A-7FB3-4CDF-992B-9372CE7EB3CE}"/>
               </a:ext>
             </a:extLst>
           </p:cNvPr>
@@ -11795,7 +11817,7 @@
           <p:cNvPr id="16" name="Shape 13">
             <a:extLst xmlns:a="http://schemas.openxmlformats.org/drawingml/2006/main">
               <a:ext uri="{FF2B5EF4-FFF2-40B4-BE49-F238E27FC236}">
-                <a16:creationId xmlns:a16="http://schemas.microsoft.com/office/drawing/2014/main" id="{0B9E6D30-BD7C-497B-B5A2-F2E0C12C138A}"/>
+                <a16:creationId xmlns:a16="http://schemas.microsoft.com/office/drawing/2014/main" id="{6C461023-FD8E-4BB2-97CE-48C0C2810D7F}"/>
               </a:ext>
             </a:extLst>
           </p:cNvPr>
@@ -11842,7 +11864,7 @@
           <p:cNvPr id="17" name="Text 14">
             <a:extLst xmlns:a="http://schemas.openxmlformats.org/drawingml/2006/main">
               <a:ext uri="{FF2B5EF4-FFF2-40B4-BE49-F238E27FC236}">
-                <a16:creationId xmlns:a16="http://schemas.microsoft.com/office/drawing/2014/main" id="{87C78687-4656-46F2-8D2B-6553A3318E84}"/>
+                <a16:creationId xmlns:a16="http://schemas.microsoft.com/office/drawing/2014/main" id="{7BE43BCA-A57F-4DCC-A5A7-10C2434D3A2C}"/>
               </a:ext>
             </a:extLst>
           </p:cNvPr>
@@ -11887,7 +11909,7 @@
           <p:cNvPr id="18" name="Text 15">
             <a:extLst xmlns:a="http://schemas.openxmlformats.org/drawingml/2006/main">
               <a:ext uri="{FF2B5EF4-FFF2-40B4-BE49-F238E27FC236}">
-                <a16:creationId xmlns:a16="http://schemas.microsoft.com/office/drawing/2014/main" id="{EAD32D67-4545-448F-BFB2-9988E3237018}"/>
+                <a16:creationId xmlns:a16="http://schemas.microsoft.com/office/drawing/2014/main" id="{350BA061-27F2-4BE7-ADEF-5436892E51E2}"/>
               </a:ext>
             </a:extLst>
           </p:cNvPr>
@@ -11935,7 +11957,7 @@
           <p:cNvPr id="19" name="Shape 16">
             <a:extLst xmlns:a="http://schemas.openxmlformats.org/drawingml/2006/main">
               <a:ext uri="{FF2B5EF4-FFF2-40B4-BE49-F238E27FC236}">
-                <a16:creationId xmlns:a16="http://schemas.microsoft.com/office/drawing/2014/main" id="{E3406447-0F40-4620-9CC4-74ECB617D99D}"/>
+                <a16:creationId xmlns:a16="http://schemas.microsoft.com/office/drawing/2014/main" id="{3F5F7FD0-AF8B-4C12-8595-485ADE3ABD57}"/>
               </a:ext>
             </a:extLst>
           </p:cNvPr>
@@ -11982,7 +12004,7 @@
           <p:cNvPr id="20" name="Text 17">
             <a:extLst xmlns:a="http://schemas.openxmlformats.org/drawingml/2006/main">
               <a:ext uri="{FF2B5EF4-FFF2-40B4-BE49-F238E27FC236}">
-                <a16:creationId xmlns:a16="http://schemas.microsoft.com/office/drawing/2014/main" id="{D98C6757-D8EA-43B5-BF2E-0BEFCBB93E62}"/>
+                <a16:creationId xmlns:a16="http://schemas.microsoft.com/office/drawing/2014/main" id="{438897B1-29D2-4E43-945E-B90D9FE46AF7}"/>
               </a:ext>
             </a:extLst>
           </p:cNvPr>
@@ -12027,7 +12049,7 @@
           <p:cNvPr id="21" name="Text 18">
             <a:extLst xmlns:a="http://schemas.openxmlformats.org/drawingml/2006/main">
               <a:ext uri="{FF2B5EF4-FFF2-40B4-BE49-F238E27FC236}">
-                <a16:creationId xmlns:a16="http://schemas.microsoft.com/office/drawing/2014/main" id="{A47F989C-281F-4ED7-B81D-B640FA868EC6}"/>
+                <a16:creationId xmlns:a16="http://schemas.microsoft.com/office/drawing/2014/main" id="{A954F22F-78DA-41C6-B9AF-F4952C3DDD9B}"/>
               </a:ext>
             </a:extLst>
           </p:cNvPr>
@@ -12073,7 +12095,7 @@
     </p:spTree>
     <p:extLst>
       <p:ext uri="{BB962C8B-B14F-4D97-AF65-F5344CB8AC3E}">
-        <p14:creationId xmlns:p14="http://schemas.microsoft.com/office/powerpoint/2010/main" val="1664519256"/>
+        <p14:creationId xmlns:p14="http://schemas.microsoft.com/office/powerpoint/2010/main" val="1385376139"/>
       </p:ext>
     </p:extLst>
   </p:cSld>
@@ -12104,7 +12126,7 @@
           <p:cNvPr id="2" name="Text 0">
             <a:extLst xmlns:a="http://schemas.openxmlformats.org/drawingml/2006/main">
               <a:ext uri="{FF2B5EF4-FFF2-40B4-BE49-F238E27FC236}">
-                <a16:creationId xmlns:a16="http://schemas.microsoft.com/office/drawing/2014/main" id="{DEEC307A-35F9-493F-8D7C-ECE3D3D361D3}"/>
+                <a16:creationId xmlns:a16="http://schemas.microsoft.com/office/drawing/2014/main" id="{52CF15DC-1301-4621-81E9-2DCAEE7AE5FC}"/>
               </a:ext>
             </a:extLst>
           </p:cNvPr>
@@ -12149,7 +12171,7 @@
           <p:cNvPr id="3" name="Text 1">
             <a:extLst xmlns:a="http://schemas.openxmlformats.org/drawingml/2006/main">
               <a:ext uri="{FF2B5EF4-FFF2-40B4-BE49-F238E27FC236}">
-                <a16:creationId xmlns:a16="http://schemas.microsoft.com/office/drawing/2014/main" id="{6A29E111-AD99-45A8-984D-83FFFC1B2ADE}"/>
+                <a16:creationId xmlns:a16="http://schemas.microsoft.com/office/drawing/2014/main" id="{F5A30271-264E-47D1-9785-F977FECEEDF2}"/>
               </a:ext>
             </a:extLst>
           </p:cNvPr>
@@ -12194,7 +12216,7 @@
           <p:cNvPr id="4" name="Text 2">
             <a:extLst xmlns:a="http://schemas.openxmlformats.org/drawingml/2006/main">
               <a:ext uri="{FF2B5EF4-FFF2-40B4-BE49-F238E27FC236}">
-                <a16:creationId xmlns:a16="http://schemas.microsoft.com/office/drawing/2014/main" id="{1660AE52-5064-486C-B4EA-AD6BAB70BC27}"/>
+                <a16:creationId xmlns:a16="http://schemas.microsoft.com/office/drawing/2014/main" id="{AE6CDDA3-6432-436D-A8CD-C01F91B4A10C}"/>
               </a:ext>
             </a:extLst>
           </p:cNvPr>
@@ -12239,7 +12261,7 @@
           <p:cNvPr id="5" name="Text 3">
             <a:extLst xmlns:a="http://schemas.openxmlformats.org/drawingml/2006/main">
               <a:ext uri="{FF2B5EF4-FFF2-40B4-BE49-F238E27FC236}">
-                <a16:creationId xmlns:a16="http://schemas.microsoft.com/office/drawing/2014/main" id="{9CF24DEC-7598-421F-9E43-B8527D4694C2}"/>
+                <a16:creationId xmlns:a16="http://schemas.microsoft.com/office/drawing/2014/main" id="{1A6B1FDE-60A5-4E6A-ADD8-1A4C23E97501}"/>
               </a:ext>
             </a:extLst>
           </p:cNvPr>
@@ -12291,7 +12313,7 @@
         </p:xfrm>
         <a:graphic xmlns:a="http://schemas.openxmlformats.org/drawingml/2006/main">
           <a:graphicData uri="http://schemas.openxmlformats.org/drawingml/2006/chart">
-            <c:chart xmlns:r="http://schemas.openxmlformats.org/officeDocument/2006/relationships" xmlns:c="http://schemas.openxmlformats.org/drawingml/2006/chart" r:id="R4930f45f382e4024"/>
+            <c:chart xmlns:r="http://schemas.openxmlformats.org/officeDocument/2006/relationships" xmlns:c="http://schemas.openxmlformats.org/drawingml/2006/chart" r:id="Rb85f43d5fcbc4331"/>
           </a:graphicData>
         </a:graphic>
       </p:graphicFrame>
@@ -12300,7 +12322,7 @@
           <p:cNvPr id="7" name="Shape 4">
             <a:extLst xmlns:a="http://schemas.openxmlformats.org/drawingml/2006/main">
               <a:ext uri="{FF2B5EF4-FFF2-40B4-BE49-F238E27FC236}">
-                <a16:creationId xmlns:a16="http://schemas.microsoft.com/office/drawing/2014/main" id="{B59B1FCF-70A2-478C-86D8-C35A3F5312D1}"/>
+                <a16:creationId xmlns:a16="http://schemas.microsoft.com/office/drawing/2014/main" id="{3C1760E1-20A0-445F-A11B-0E8EDB139EAE}"/>
               </a:ext>
             </a:extLst>
           </p:cNvPr>
@@ -12347,7 +12369,7 @@
           <p:cNvPr id="8" name="Text 5">
             <a:extLst xmlns:a="http://schemas.openxmlformats.org/drawingml/2006/main">
               <a:ext uri="{FF2B5EF4-FFF2-40B4-BE49-F238E27FC236}">
-                <a16:creationId xmlns:a16="http://schemas.microsoft.com/office/drawing/2014/main" id="{E16D2229-F357-405C-A6D2-FF8BC4099753}"/>
+                <a16:creationId xmlns:a16="http://schemas.microsoft.com/office/drawing/2014/main" id="{5B524CE7-F7B0-4AD3-9C5E-3718B7F80E65}"/>
               </a:ext>
             </a:extLst>
           </p:cNvPr>
@@ -12392,7 +12414,7 @@
           <p:cNvPr id="9" name="Text 6">
             <a:extLst xmlns:a="http://schemas.openxmlformats.org/drawingml/2006/main">
               <a:ext uri="{FF2B5EF4-FFF2-40B4-BE49-F238E27FC236}">
-                <a16:creationId xmlns:a16="http://schemas.microsoft.com/office/drawing/2014/main" id="{40837D03-C7D4-462F-837B-FD4B69462883}"/>
+                <a16:creationId xmlns:a16="http://schemas.microsoft.com/office/drawing/2014/main" id="{53DCA59F-7599-418A-8691-5B7A9529E74E}"/>
               </a:ext>
             </a:extLst>
           </p:cNvPr>
@@ -12509,7 +12531,7 @@
           <p:cNvPr id="10" name="Shape 7">
             <a:extLst xmlns:a="http://schemas.openxmlformats.org/drawingml/2006/main">
               <a:ext uri="{FF2B5EF4-FFF2-40B4-BE49-F238E27FC236}">
-                <a16:creationId xmlns:a16="http://schemas.microsoft.com/office/drawing/2014/main" id="{6B3875EE-1472-4C1B-B74F-CEE8ACBBCBC7}"/>
+                <a16:creationId xmlns:a16="http://schemas.microsoft.com/office/drawing/2014/main" id="{A310976C-1FCD-425E-BACF-61EF3671BD91}"/>
               </a:ext>
             </a:extLst>
           </p:cNvPr>
@@ -12556,7 +12578,7 @@
           <p:cNvPr id="11" name="Text 8">
             <a:extLst xmlns:a="http://schemas.openxmlformats.org/drawingml/2006/main">
               <a:ext uri="{FF2B5EF4-FFF2-40B4-BE49-F238E27FC236}">
-                <a16:creationId xmlns:a16="http://schemas.microsoft.com/office/drawing/2014/main" id="{590D27D8-08C1-40C2-BCF6-F2FF3BE482E3}"/>
+                <a16:creationId xmlns:a16="http://schemas.microsoft.com/office/drawing/2014/main" id="{84F8FB49-2683-441E-868D-CC974D7075AF}"/>
               </a:ext>
             </a:extLst>
           </p:cNvPr>
@@ -12601,7 +12623,7 @@
           <p:cNvPr id="12" name="Text 9">
             <a:extLst xmlns:a="http://schemas.openxmlformats.org/drawingml/2006/main">
               <a:ext uri="{FF2B5EF4-FFF2-40B4-BE49-F238E27FC236}">
-                <a16:creationId xmlns:a16="http://schemas.microsoft.com/office/drawing/2014/main" id="{DB2130BB-4995-46D8-99D7-BC95ABAD1367}"/>
+                <a16:creationId xmlns:a16="http://schemas.microsoft.com/office/drawing/2014/main" id="{14B24EDE-E6A2-4C00-B9EB-337D4178152D}"/>
               </a:ext>
             </a:extLst>
           </p:cNvPr>
@@ -12649,7 +12671,7 @@
           <p:cNvPr id="13" name="Shape 10">
             <a:extLst xmlns:a="http://schemas.openxmlformats.org/drawingml/2006/main">
               <a:ext uri="{FF2B5EF4-FFF2-40B4-BE49-F238E27FC236}">
-                <a16:creationId xmlns:a16="http://schemas.microsoft.com/office/drawing/2014/main" id="{C80CE827-9631-4E56-BE94-67626BAB0469}"/>
+                <a16:creationId xmlns:a16="http://schemas.microsoft.com/office/drawing/2014/main" id="{B2C5662A-EEE5-4A40-A0A2-412894DFBF62}"/>
               </a:ext>
             </a:extLst>
           </p:cNvPr>
@@ -12696,7 +12718,7 @@
           <p:cNvPr id="14" name="Text 11">
             <a:extLst xmlns:a="http://schemas.openxmlformats.org/drawingml/2006/main">
               <a:ext uri="{FF2B5EF4-FFF2-40B4-BE49-F238E27FC236}">
-                <a16:creationId xmlns:a16="http://schemas.microsoft.com/office/drawing/2014/main" id="{80FB1C2C-3415-44D3-91BC-04C5833D450F}"/>
+                <a16:creationId xmlns:a16="http://schemas.microsoft.com/office/drawing/2014/main" id="{426A1291-3D81-43AE-8C19-503F6AD58286}"/>
               </a:ext>
             </a:extLst>
           </p:cNvPr>
@@ -12741,7 +12763,7 @@
           <p:cNvPr id="15" name="Text 12">
             <a:extLst xmlns:a="http://schemas.openxmlformats.org/drawingml/2006/main">
               <a:ext uri="{FF2B5EF4-FFF2-40B4-BE49-F238E27FC236}">
-                <a16:creationId xmlns:a16="http://schemas.microsoft.com/office/drawing/2014/main" id="{39D71D2E-3058-43CE-98F9-DABCA06F4A97}"/>
+                <a16:creationId xmlns:a16="http://schemas.microsoft.com/office/drawing/2014/main" id="{B9708C38-4EBA-4DF0-897D-916FFF212A3B}"/>
               </a:ext>
             </a:extLst>
           </p:cNvPr>
@@ -12789,7 +12811,7 @@
           <p:cNvPr id="16" name="Shape 13">
             <a:extLst xmlns:a="http://schemas.openxmlformats.org/drawingml/2006/main">
               <a:ext uri="{FF2B5EF4-FFF2-40B4-BE49-F238E27FC236}">
-                <a16:creationId xmlns:a16="http://schemas.microsoft.com/office/drawing/2014/main" id="{B6610770-486B-407E-BDDF-70FCA26D37FD}"/>
+                <a16:creationId xmlns:a16="http://schemas.microsoft.com/office/drawing/2014/main" id="{09E1A7C9-F4DC-4759-9A1E-11C1CE81CD4D}"/>
               </a:ext>
             </a:extLst>
           </p:cNvPr>
@@ -12836,7 +12858,7 @@
           <p:cNvPr id="17" name="Text 14">
             <a:extLst xmlns:a="http://schemas.openxmlformats.org/drawingml/2006/main">
               <a:ext uri="{FF2B5EF4-FFF2-40B4-BE49-F238E27FC236}">
-                <a16:creationId xmlns:a16="http://schemas.microsoft.com/office/drawing/2014/main" id="{542FF701-B6D1-4538-89EA-10DED97B4EF9}"/>
+                <a16:creationId xmlns:a16="http://schemas.microsoft.com/office/drawing/2014/main" id="{59ADD08D-5F65-4789-85DD-6F7B89726500}"/>
               </a:ext>
             </a:extLst>
           </p:cNvPr>
@@ -12881,7 +12903,7 @@
           <p:cNvPr id="18" name="Text 15">
             <a:extLst xmlns:a="http://schemas.openxmlformats.org/drawingml/2006/main">
               <a:ext uri="{FF2B5EF4-FFF2-40B4-BE49-F238E27FC236}">
-                <a16:creationId xmlns:a16="http://schemas.microsoft.com/office/drawing/2014/main" id="{AC1C7239-6F8C-4ED6-8E4B-26E5435254F4}"/>
+                <a16:creationId xmlns:a16="http://schemas.microsoft.com/office/drawing/2014/main" id="{A57FD9B9-796C-4F22-8285-351D925BEEF6}"/>
               </a:ext>
             </a:extLst>
           </p:cNvPr>
@@ -12929,7 +12951,7 @@
           <p:cNvPr id="19" name="Shape 16">
             <a:extLst xmlns:a="http://schemas.openxmlformats.org/drawingml/2006/main">
               <a:ext uri="{FF2B5EF4-FFF2-40B4-BE49-F238E27FC236}">
-                <a16:creationId xmlns:a16="http://schemas.microsoft.com/office/drawing/2014/main" id="{D8336D4B-EAAD-43C6-82A4-BF0A1581AF57}"/>
+                <a16:creationId xmlns:a16="http://schemas.microsoft.com/office/drawing/2014/main" id="{1CB1C4A9-FEBE-4DF5-B21D-C50FFA328D45}"/>
               </a:ext>
             </a:extLst>
           </p:cNvPr>
@@ -12976,7 +12998,7 @@
           <p:cNvPr id="20" name="Text 17">
             <a:extLst xmlns:a="http://schemas.openxmlformats.org/drawingml/2006/main">
               <a:ext uri="{FF2B5EF4-FFF2-40B4-BE49-F238E27FC236}">
-                <a16:creationId xmlns:a16="http://schemas.microsoft.com/office/drawing/2014/main" id="{276D1E70-969C-40B3-BBE4-3B1BCBAA7C4F}"/>
+                <a16:creationId xmlns:a16="http://schemas.microsoft.com/office/drawing/2014/main" id="{D1B1EAEC-6FF9-4B96-964C-CD8193213CE8}"/>
               </a:ext>
             </a:extLst>
           </p:cNvPr>
@@ -13021,7 +13043,7 @@
           <p:cNvPr id="21" name="Text 18">
             <a:extLst xmlns:a="http://schemas.openxmlformats.org/drawingml/2006/main">
               <a:ext uri="{FF2B5EF4-FFF2-40B4-BE49-F238E27FC236}">
-                <a16:creationId xmlns:a16="http://schemas.microsoft.com/office/drawing/2014/main" id="{DE7DB35A-E3DA-4848-864D-B4EA364C095E}"/>
+                <a16:creationId xmlns:a16="http://schemas.microsoft.com/office/drawing/2014/main" id="{5165A77B-E0D8-419F-83D0-4D0162EBB382}"/>
               </a:ext>
             </a:extLst>
           </p:cNvPr>
@@ -13069,7 +13091,7 @@
           <p:cNvPr id="22" name="Shape 19">
             <a:extLst xmlns:a="http://schemas.openxmlformats.org/drawingml/2006/main">
               <a:ext uri="{FF2B5EF4-FFF2-40B4-BE49-F238E27FC236}">
-                <a16:creationId xmlns:a16="http://schemas.microsoft.com/office/drawing/2014/main" id="{B8ECB7C4-7743-4A88-AB85-45AC7145EA17}"/>
+                <a16:creationId xmlns:a16="http://schemas.microsoft.com/office/drawing/2014/main" id="{30EAF532-5324-4564-B163-BDD562FFBC08}"/>
               </a:ext>
             </a:extLst>
           </p:cNvPr>
@@ -13116,7 +13138,7 @@
           <p:cNvPr id="23" name="Text 20">
             <a:extLst xmlns:a="http://schemas.openxmlformats.org/drawingml/2006/main">
               <a:ext uri="{FF2B5EF4-FFF2-40B4-BE49-F238E27FC236}">
-                <a16:creationId xmlns:a16="http://schemas.microsoft.com/office/drawing/2014/main" id="{3CA33CF3-3176-458C-9B8C-A82BEB5B6B86}"/>
+                <a16:creationId xmlns:a16="http://schemas.microsoft.com/office/drawing/2014/main" id="{54AC4035-0DA8-4801-85D9-6E19723F3703}"/>
               </a:ext>
             </a:extLst>
           </p:cNvPr>
@@ -13161,7 +13183,7 @@
           <p:cNvPr id="24" name="Text 21">
             <a:extLst xmlns:a="http://schemas.openxmlformats.org/drawingml/2006/main">
               <a:ext uri="{FF2B5EF4-FFF2-40B4-BE49-F238E27FC236}">
-                <a16:creationId xmlns:a16="http://schemas.microsoft.com/office/drawing/2014/main" id="{8C3EA247-C3B9-4FEC-9E44-71F51443F3B6}"/>
+                <a16:creationId xmlns:a16="http://schemas.microsoft.com/office/drawing/2014/main" id="{3F0C3B58-819F-4796-A159-0201DDF15B53}"/>
               </a:ext>
             </a:extLst>
           </p:cNvPr>
@@ -13207,7 +13229,7 @@
     </p:spTree>
     <p:extLst>
       <p:ext uri="{BB962C8B-B14F-4D97-AF65-F5344CB8AC3E}">
-        <p14:creationId xmlns:p14="http://schemas.microsoft.com/office/powerpoint/2010/main" val="1578266239"/>
+        <p14:creationId xmlns:p14="http://schemas.microsoft.com/office/powerpoint/2010/main" val="1439339519"/>
       </p:ext>
     </p:extLst>
   </p:cSld>
@@ -13238,7 +13260,7 @@
           <p:cNvPr id="2" name="Text 0">
             <a:extLst xmlns:a="http://schemas.openxmlformats.org/drawingml/2006/main">
               <a:ext uri="{FF2B5EF4-FFF2-40B4-BE49-F238E27FC236}">
-                <a16:creationId xmlns:a16="http://schemas.microsoft.com/office/drawing/2014/main" id="{8BC303BD-98C4-4972-8E79-271C9F476F5D}"/>
+                <a16:creationId xmlns:a16="http://schemas.microsoft.com/office/drawing/2014/main" id="{AE47B6A8-C54A-48F2-AF52-BB28FB3E879F}"/>
               </a:ext>
             </a:extLst>
           </p:cNvPr>
@@ -13283,7 +13305,7 @@
           <p:cNvPr id="3" name="Text 1">
             <a:extLst xmlns:a="http://schemas.openxmlformats.org/drawingml/2006/main">
               <a:ext uri="{FF2B5EF4-FFF2-40B4-BE49-F238E27FC236}">
-                <a16:creationId xmlns:a16="http://schemas.microsoft.com/office/drawing/2014/main" id="{44B68D2E-09DC-4875-A9D4-9C889868613C}"/>
+                <a16:creationId xmlns:a16="http://schemas.microsoft.com/office/drawing/2014/main" id="{F33FCA74-061A-4D5D-AE36-35CFBE430BE6}"/>
               </a:ext>
             </a:extLst>
           </p:cNvPr>
@@ -13328,7 +13350,7 @@
           <p:cNvPr id="4" name="Text 2">
             <a:extLst xmlns:a="http://schemas.openxmlformats.org/drawingml/2006/main">
               <a:ext uri="{FF2B5EF4-FFF2-40B4-BE49-F238E27FC236}">
-                <a16:creationId xmlns:a16="http://schemas.microsoft.com/office/drawing/2014/main" id="{B31A51C1-4FCE-4169-B24C-9863E9A2C338}"/>
+                <a16:creationId xmlns:a16="http://schemas.microsoft.com/office/drawing/2014/main" id="{6AC227C5-2480-4274-800D-B03E803DBC12}"/>
               </a:ext>
             </a:extLst>
           </p:cNvPr>
@@ -13373,7 +13395,7 @@
           <p:cNvPr id="5" name="Text 3">
             <a:extLst xmlns:a="http://schemas.openxmlformats.org/drawingml/2006/main">
               <a:ext uri="{FF2B5EF4-FFF2-40B4-BE49-F238E27FC236}">
-                <a16:creationId xmlns:a16="http://schemas.microsoft.com/office/drawing/2014/main" id="{D59019E6-D8A9-4130-9E17-5E36F6A9202A}"/>
+                <a16:creationId xmlns:a16="http://schemas.microsoft.com/office/drawing/2014/main" id="{BFAD9DD3-AA36-4893-A274-2A83980B4360}"/>
               </a:ext>
             </a:extLst>
           </p:cNvPr>
@@ -13418,7 +13440,7 @@
           <p:cNvPr id="6" name="Shape 4">
             <a:extLst xmlns:a="http://schemas.openxmlformats.org/drawingml/2006/main">
               <a:ext uri="{FF2B5EF4-FFF2-40B4-BE49-F238E27FC236}">
-                <a16:creationId xmlns:a16="http://schemas.microsoft.com/office/drawing/2014/main" id="{D5BBAE56-6259-42C9-849B-F934E438F8D9}"/>
+                <a16:creationId xmlns:a16="http://schemas.microsoft.com/office/drawing/2014/main" id="{A7CCC68F-BA39-4940-B211-3362266BF39F}"/>
               </a:ext>
             </a:extLst>
           </p:cNvPr>
@@ -13465,7 +13487,7 @@
           <p:cNvPr id="7" name="Text 5">
             <a:extLst xmlns:a="http://schemas.openxmlformats.org/drawingml/2006/main">
               <a:ext uri="{FF2B5EF4-FFF2-40B4-BE49-F238E27FC236}">
-                <a16:creationId xmlns:a16="http://schemas.microsoft.com/office/drawing/2014/main" id="{F84C076D-65C2-49C7-9405-0A9115988BB3}"/>
+                <a16:creationId xmlns:a16="http://schemas.microsoft.com/office/drawing/2014/main" id="{2FE5721D-EB4D-4AB2-AA8C-0C3F4706131C}"/>
               </a:ext>
             </a:extLst>
           </p:cNvPr>
@@ -13510,7 +13532,7 @@
           <p:cNvPr id="8" name="Text 6">
             <a:extLst xmlns:a="http://schemas.openxmlformats.org/drawingml/2006/main">
               <a:ext uri="{FF2B5EF4-FFF2-40B4-BE49-F238E27FC236}">
-                <a16:creationId xmlns:a16="http://schemas.microsoft.com/office/drawing/2014/main" id="{D0441E00-886E-4698-B071-5AEE55178A21}"/>
+                <a16:creationId xmlns:a16="http://schemas.microsoft.com/office/drawing/2014/main" id="{5A1F2CE0-A89F-4754-B59D-A9B10798FDED}"/>
               </a:ext>
             </a:extLst>
           </p:cNvPr>
@@ -13555,7 +13577,7 @@
           <p:cNvPr id="9" name="Text 7">
             <a:extLst xmlns:a="http://schemas.openxmlformats.org/drawingml/2006/main">
               <a:ext uri="{FF2B5EF4-FFF2-40B4-BE49-F238E27FC236}">
-                <a16:creationId xmlns:a16="http://schemas.microsoft.com/office/drawing/2014/main" id="{89398951-A8B4-4511-8A9F-25169B33EE4F}"/>
+                <a16:creationId xmlns:a16="http://schemas.microsoft.com/office/drawing/2014/main" id="{AF2C8D84-5695-4D5C-AFFC-BD4171D5FEDD}"/>
               </a:ext>
             </a:extLst>
           </p:cNvPr>
@@ -13600,7 +13622,7 @@
           <p:cNvPr id="10" name="Text 8">
             <a:extLst xmlns:a="http://schemas.openxmlformats.org/drawingml/2006/main">
               <a:ext uri="{FF2B5EF4-FFF2-40B4-BE49-F238E27FC236}">
-                <a16:creationId xmlns:a16="http://schemas.microsoft.com/office/drawing/2014/main" id="{10103A56-BC52-4715-96BD-C9F34E30D562}"/>
+                <a16:creationId xmlns:a16="http://schemas.microsoft.com/office/drawing/2014/main" id="{B16CBFF6-53C2-4D61-ACF3-CCE7B768A217}"/>
               </a:ext>
             </a:extLst>
           </p:cNvPr>
@@ -13645,7 +13667,7 @@
           <p:cNvPr id="11" name="Text 9">
             <a:extLst xmlns:a="http://schemas.openxmlformats.org/drawingml/2006/main">
               <a:ext uri="{FF2B5EF4-FFF2-40B4-BE49-F238E27FC236}">
-                <a16:creationId xmlns:a16="http://schemas.microsoft.com/office/drawing/2014/main" id="{EA102B2E-77C1-4DCB-8CD9-3F290E43C7BC}"/>
+                <a16:creationId xmlns:a16="http://schemas.microsoft.com/office/drawing/2014/main" id="{AF2B94A8-A190-4DBE-89F0-EE106BFD200D}"/>
               </a:ext>
             </a:extLst>
           </p:cNvPr>
@@ -13690,7 +13712,7 @@
           <p:cNvPr id="12" name="Text 10">
             <a:extLst xmlns:a="http://schemas.openxmlformats.org/drawingml/2006/main">
               <a:ext uri="{FF2B5EF4-FFF2-40B4-BE49-F238E27FC236}">
-                <a16:creationId xmlns:a16="http://schemas.microsoft.com/office/drawing/2014/main" id="{C41AF44C-013D-4B75-BB1D-9E7E734FFCA6}"/>
+                <a16:creationId xmlns:a16="http://schemas.microsoft.com/office/drawing/2014/main" id="{0B82FCCC-13A3-4FE1-A986-C83EBE50D60D}"/>
               </a:ext>
             </a:extLst>
           </p:cNvPr>
@@ -13735,7 +13757,7 @@
           <p:cNvPr id="13" name="Text 11">
             <a:extLst xmlns:a="http://schemas.openxmlformats.org/drawingml/2006/main">
               <a:ext uri="{FF2B5EF4-FFF2-40B4-BE49-F238E27FC236}">
-                <a16:creationId xmlns:a16="http://schemas.microsoft.com/office/drawing/2014/main" id="{5105BDA2-B61E-4674-B31C-59D46A7A7BCF}"/>
+                <a16:creationId xmlns:a16="http://schemas.microsoft.com/office/drawing/2014/main" id="{3FD487E9-93C8-43BC-900B-736E2AF1224C}"/>
               </a:ext>
             </a:extLst>
           </p:cNvPr>
@@ -13780,7 +13802,7 @@
           <p:cNvPr id="14" name="Text 12">
             <a:extLst xmlns:a="http://schemas.openxmlformats.org/drawingml/2006/main">
               <a:ext uri="{FF2B5EF4-FFF2-40B4-BE49-F238E27FC236}">
-                <a16:creationId xmlns:a16="http://schemas.microsoft.com/office/drawing/2014/main" id="{06B07DBD-4B54-4B3B-8227-D74E37D8341B}"/>
+                <a16:creationId xmlns:a16="http://schemas.microsoft.com/office/drawing/2014/main" id="{61CF3254-1B82-4165-992F-6D3C01344989}"/>
               </a:ext>
             </a:extLst>
           </p:cNvPr>
@@ -13825,7 +13847,7 @@
           <p:cNvPr id="15" name="Text 13">
             <a:extLst xmlns:a="http://schemas.openxmlformats.org/drawingml/2006/main">
               <a:ext uri="{FF2B5EF4-FFF2-40B4-BE49-F238E27FC236}">
-                <a16:creationId xmlns:a16="http://schemas.microsoft.com/office/drawing/2014/main" id="{CF7DC685-9184-4BD2-BF85-4141486656F8}"/>
+                <a16:creationId xmlns:a16="http://schemas.microsoft.com/office/drawing/2014/main" id="{4872DBF4-F948-4D75-A7BD-280E63BF11CE}"/>
               </a:ext>
             </a:extLst>
           </p:cNvPr>
@@ -13873,7 +13895,7 @@
           <p:cNvPr id="16" name="Shape 14">
             <a:extLst xmlns:a="http://schemas.openxmlformats.org/drawingml/2006/main">
               <a:ext uri="{FF2B5EF4-FFF2-40B4-BE49-F238E27FC236}">
-                <a16:creationId xmlns:a16="http://schemas.microsoft.com/office/drawing/2014/main" id="{98409E27-3417-4DFD-A58A-9F21E99CEFED}"/>
+                <a16:creationId xmlns:a16="http://schemas.microsoft.com/office/drawing/2014/main" id="{7168808E-70C4-4CD6-B364-546247F83C60}"/>
               </a:ext>
             </a:extLst>
           </p:cNvPr>
@@ -13920,7 +13942,7 @@
           <p:cNvPr id="17" name="Text 15">
             <a:extLst xmlns:a="http://schemas.openxmlformats.org/drawingml/2006/main">
               <a:ext uri="{FF2B5EF4-FFF2-40B4-BE49-F238E27FC236}">
-                <a16:creationId xmlns:a16="http://schemas.microsoft.com/office/drawing/2014/main" id="{F8F82C89-E05F-4C44-9CE5-E8D6EC4924FD}"/>
+                <a16:creationId xmlns:a16="http://schemas.microsoft.com/office/drawing/2014/main" id="{1468FAB4-453B-4906-BF82-D9AEFC510B4C}"/>
               </a:ext>
             </a:extLst>
           </p:cNvPr>
@@ -13965,7 +13987,7 @@
           <p:cNvPr id="18" name="Text 16">
             <a:extLst xmlns:a="http://schemas.openxmlformats.org/drawingml/2006/main">
               <a:ext uri="{FF2B5EF4-FFF2-40B4-BE49-F238E27FC236}">
-                <a16:creationId xmlns:a16="http://schemas.microsoft.com/office/drawing/2014/main" id="{5A01506A-1C99-4089-886F-2EFC2971CB41}"/>
+                <a16:creationId xmlns:a16="http://schemas.microsoft.com/office/drawing/2014/main" id="{805376D7-EBA9-41BB-B773-6D923BE40D43}"/>
               </a:ext>
             </a:extLst>
           </p:cNvPr>
@@ -14010,7 +14032,7 @@
           <p:cNvPr id="19" name="Text 17">
             <a:extLst xmlns:a="http://schemas.openxmlformats.org/drawingml/2006/main">
               <a:ext uri="{FF2B5EF4-FFF2-40B4-BE49-F238E27FC236}">
-                <a16:creationId xmlns:a16="http://schemas.microsoft.com/office/drawing/2014/main" id="{7FF7E91A-6ECC-49C4-B373-F8D20B13A0EC}"/>
+                <a16:creationId xmlns:a16="http://schemas.microsoft.com/office/drawing/2014/main" id="{FC761766-6B8C-450E-B680-91CDFB31C9B5}"/>
               </a:ext>
             </a:extLst>
           </p:cNvPr>
@@ -14055,7 +14077,7 @@
           <p:cNvPr id="20" name="Text 18">
             <a:extLst xmlns:a="http://schemas.openxmlformats.org/drawingml/2006/main">
               <a:ext uri="{FF2B5EF4-FFF2-40B4-BE49-F238E27FC236}">
-                <a16:creationId xmlns:a16="http://schemas.microsoft.com/office/drawing/2014/main" id="{84D6A9DE-5941-4F97-A14B-21BBEB9B0482}"/>
+                <a16:creationId xmlns:a16="http://schemas.microsoft.com/office/drawing/2014/main" id="{EBE6FD2D-BEFD-4322-9823-9306EDFA3A16}"/>
               </a:ext>
             </a:extLst>
           </p:cNvPr>
@@ -14100,7 +14122,7 @@
           <p:cNvPr id="21" name="Text 19">
             <a:extLst xmlns:a="http://schemas.openxmlformats.org/drawingml/2006/main">
               <a:ext uri="{FF2B5EF4-FFF2-40B4-BE49-F238E27FC236}">
-                <a16:creationId xmlns:a16="http://schemas.microsoft.com/office/drawing/2014/main" id="{FC5A91A6-C09C-4194-8754-1385CEDCBDB0}"/>
+                <a16:creationId xmlns:a16="http://schemas.microsoft.com/office/drawing/2014/main" id="{B5780643-6688-49B6-8D80-A14D47E38BD3}"/>
               </a:ext>
             </a:extLst>
           </p:cNvPr>
@@ -14145,7 +14167,7 @@
           <p:cNvPr id="22" name="Text 20">
             <a:extLst xmlns:a="http://schemas.openxmlformats.org/drawingml/2006/main">
               <a:ext uri="{FF2B5EF4-FFF2-40B4-BE49-F238E27FC236}">
-                <a16:creationId xmlns:a16="http://schemas.microsoft.com/office/drawing/2014/main" id="{1842A373-FAB8-4012-85B5-5C43FC7A66EC}"/>
+                <a16:creationId xmlns:a16="http://schemas.microsoft.com/office/drawing/2014/main" id="{AE4E6F47-A5EE-4349-84FD-EC51EE22BCE4}"/>
               </a:ext>
             </a:extLst>
           </p:cNvPr>
@@ -14190,7 +14212,7 @@
           <p:cNvPr id="23" name="Text 21">
             <a:extLst xmlns:a="http://schemas.openxmlformats.org/drawingml/2006/main">
               <a:ext uri="{FF2B5EF4-FFF2-40B4-BE49-F238E27FC236}">
-                <a16:creationId xmlns:a16="http://schemas.microsoft.com/office/drawing/2014/main" id="{B293FB11-4823-4B32-8B1C-42C8BF3C1726}"/>
+                <a16:creationId xmlns:a16="http://schemas.microsoft.com/office/drawing/2014/main" id="{8F71F11B-4A5E-4195-8084-37F3020BA653}"/>
               </a:ext>
             </a:extLst>
           </p:cNvPr>
@@ -14235,7 +14257,7 @@
           <p:cNvPr id="24" name="Text 22">
             <a:extLst xmlns:a="http://schemas.openxmlformats.org/drawingml/2006/main">
               <a:ext uri="{FF2B5EF4-FFF2-40B4-BE49-F238E27FC236}">
-                <a16:creationId xmlns:a16="http://schemas.microsoft.com/office/drawing/2014/main" id="{C3F4BBF9-7E54-4F49-9CE2-2988CF0BE414}"/>
+                <a16:creationId xmlns:a16="http://schemas.microsoft.com/office/drawing/2014/main" id="{41487ECA-A561-4FFC-9B39-603EFDE0749D}"/>
               </a:ext>
             </a:extLst>
           </p:cNvPr>
@@ -14280,7 +14302,7 @@
           <p:cNvPr id="25" name="Text 23">
             <a:extLst xmlns:a="http://schemas.openxmlformats.org/drawingml/2006/main">
               <a:ext uri="{FF2B5EF4-FFF2-40B4-BE49-F238E27FC236}">
-                <a16:creationId xmlns:a16="http://schemas.microsoft.com/office/drawing/2014/main" id="{64E713F6-A0F9-4E09-B8CA-53BBB917B3F5}"/>
+                <a16:creationId xmlns:a16="http://schemas.microsoft.com/office/drawing/2014/main" id="{7E12A923-8838-46B6-BE65-498B863BD457}"/>
               </a:ext>
             </a:extLst>
           </p:cNvPr>
@@ -14328,7 +14350,7 @@
           <p:cNvPr id="26" name="Shape 24">
             <a:extLst xmlns:a="http://schemas.openxmlformats.org/drawingml/2006/main">
               <a:ext uri="{FF2B5EF4-FFF2-40B4-BE49-F238E27FC236}">
-                <a16:creationId xmlns:a16="http://schemas.microsoft.com/office/drawing/2014/main" id="{3DF207FA-ABD5-4768-9580-F5B0DE7D96D0}"/>
+                <a16:creationId xmlns:a16="http://schemas.microsoft.com/office/drawing/2014/main" id="{C0BF981A-9E8F-494A-9AD0-98168DAA843F}"/>
               </a:ext>
             </a:extLst>
           </p:cNvPr>
@@ -14375,7 +14397,7 @@
           <p:cNvPr id="27" name="Shape 25">
             <a:extLst xmlns:a="http://schemas.openxmlformats.org/drawingml/2006/main">
               <a:ext uri="{FF2B5EF4-FFF2-40B4-BE49-F238E27FC236}">
-                <a16:creationId xmlns:a16="http://schemas.microsoft.com/office/drawing/2014/main" id="{978E167D-8FFB-48C9-A9B0-AA167F9D9430}"/>
+                <a16:creationId xmlns:a16="http://schemas.microsoft.com/office/drawing/2014/main" id="{A8D5D3DB-7228-4C64-BB37-2C16FCEA1A88}"/>
               </a:ext>
             </a:extLst>
           </p:cNvPr>
@@ -14413,7 +14435,7 @@
           <p:cNvPr id="28" name="Text 26">
             <a:extLst xmlns:a="http://schemas.openxmlformats.org/drawingml/2006/main">
               <a:ext uri="{FF2B5EF4-FFF2-40B4-BE49-F238E27FC236}">
-                <a16:creationId xmlns:a16="http://schemas.microsoft.com/office/drawing/2014/main" id="{D6C67D28-31A7-4D27-9EA4-7C0B589559BA}"/>
+                <a16:creationId xmlns:a16="http://schemas.microsoft.com/office/drawing/2014/main" id="{8DBCF72E-4F10-4B08-8087-4D76EC613F69}"/>
               </a:ext>
             </a:extLst>
           </p:cNvPr>
@@ -14458,7 +14480,7 @@
           <p:cNvPr id="29" name="Text 27">
             <a:extLst xmlns:a="http://schemas.openxmlformats.org/drawingml/2006/main">
               <a:ext uri="{FF2B5EF4-FFF2-40B4-BE49-F238E27FC236}">
-                <a16:creationId xmlns:a16="http://schemas.microsoft.com/office/drawing/2014/main" id="{58884649-006F-4EB9-9905-6C459C8543FC}"/>
+                <a16:creationId xmlns:a16="http://schemas.microsoft.com/office/drawing/2014/main" id="{E55FC436-6B16-4308-9F0A-60AB237C51A1}"/>
               </a:ext>
             </a:extLst>
           </p:cNvPr>
@@ -14503,7 +14525,7 @@
           <p:cNvPr id="30" name="Text 28">
             <a:extLst xmlns:a="http://schemas.openxmlformats.org/drawingml/2006/main">
               <a:ext uri="{FF2B5EF4-FFF2-40B4-BE49-F238E27FC236}">
-                <a16:creationId xmlns:a16="http://schemas.microsoft.com/office/drawing/2014/main" id="{4ECF5234-C3BE-4836-B1AD-CF1B92AE18B2}"/>
+                <a16:creationId xmlns:a16="http://schemas.microsoft.com/office/drawing/2014/main" id="{C9547E57-0BC7-4666-B445-08D84357BB7A}"/>
               </a:ext>
             </a:extLst>
           </p:cNvPr>
@@ -14549,7 +14571,7 @@
     </p:spTree>
     <p:extLst>
       <p:ext uri="{BB962C8B-B14F-4D97-AF65-F5344CB8AC3E}">
-        <p14:creationId xmlns:p14="http://schemas.microsoft.com/office/powerpoint/2010/main" val="551690555"/>
+        <p14:creationId xmlns:p14="http://schemas.microsoft.com/office/powerpoint/2010/main" val="2014152445"/>
       </p:ext>
     </p:extLst>
   </p:cSld>
@@ -14580,7 +14602,7 @@
           <p:cNvPr id="2" name="Text 0">
             <a:extLst xmlns:a="http://schemas.openxmlformats.org/drawingml/2006/main">
               <a:ext uri="{FF2B5EF4-FFF2-40B4-BE49-F238E27FC236}">
-                <a16:creationId xmlns:a16="http://schemas.microsoft.com/office/drawing/2014/main" id="{4099D59D-2351-4B13-9B05-9896DB0AED1A}"/>
+                <a16:creationId xmlns:a16="http://schemas.microsoft.com/office/drawing/2014/main" id="{50E62FA1-9C7E-4242-89B0-4F3B5B51694A}"/>
               </a:ext>
             </a:extLst>
           </p:cNvPr>
@@ -14625,7 +14647,7 @@
           <p:cNvPr id="3" name="Text 1">
             <a:extLst xmlns:a="http://schemas.openxmlformats.org/drawingml/2006/main">
               <a:ext uri="{FF2B5EF4-FFF2-40B4-BE49-F238E27FC236}">
-                <a16:creationId xmlns:a16="http://schemas.microsoft.com/office/drawing/2014/main" id="{8BCFCC65-6BFA-4EF9-85BD-54521ABB2DA7}"/>
+                <a16:creationId xmlns:a16="http://schemas.microsoft.com/office/drawing/2014/main" id="{20B2760F-1F6E-4DBF-B79E-6FBBFAEFB8AF}"/>
               </a:ext>
             </a:extLst>
           </p:cNvPr>
@@ -14670,7 +14692,7 @@
           <p:cNvPr id="4" name="Text 2">
             <a:extLst xmlns:a="http://schemas.openxmlformats.org/drawingml/2006/main">
               <a:ext uri="{FF2B5EF4-FFF2-40B4-BE49-F238E27FC236}">
-                <a16:creationId xmlns:a16="http://schemas.microsoft.com/office/drawing/2014/main" id="{14D77603-58B9-42DD-955C-36CB3111F3F4}"/>
+                <a16:creationId xmlns:a16="http://schemas.microsoft.com/office/drawing/2014/main" id="{2C7FED2E-1F58-473D-87EB-3DE4EC0AB127}"/>
               </a:ext>
             </a:extLst>
           </p:cNvPr>
@@ -14715,7 +14737,7 @@
           <p:cNvPr id="5" name="Text 3">
             <a:extLst xmlns:a="http://schemas.openxmlformats.org/drawingml/2006/main">
               <a:ext uri="{FF2B5EF4-FFF2-40B4-BE49-F238E27FC236}">
-                <a16:creationId xmlns:a16="http://schemas.microsoft.com/office/drawing/2014/main" id="{6A4686B3-3E96-4645-9385-0D00DE862C40}"/>
+                <a16:creationId xmlns:a16="http://schemas.microsoft.com/office/drawing/2014/main" id="{76F0EF70-AC54-4FB5-8418-7333D6F9404A}"/>
               </a:ext>
             </a:extLst>
           </p:cNvPr>
@@ -14767,7 +14789,7 @@
         </p:xfrm>
         <a:graphic xmlns:a="http://schemas.openxmlformats.org/drawingml/2006/main">
           <a:graphicData uri="http://schemas.openxmlformats.org/drawingml/2006/chart">
-            <c:chart xmlns:r="http://schemas.openxmlformats.org/officeDocument/2006/relationships" xmlns:c="http://schemas.openxmlformats.org/drawingml/2006/chart" r:id="Ra1a7e79b88304c3a"/>
+            <c:chart xmlns:r="http://schemas.openxmlformats.org/officeDocument/2006/relationships" xmlns:c="http://schemas.openxmlformats.org/drawingml/2006/chart" r:id="R2d8e65cbda95494b"/>
           </a:graphicData>
         </a:graphic>
       </p:graphicFrame>
@@ -14776,7 +14798,7 @@
           <p:cNvPr id="7" name="Shape 4">
             <a:extLst xmlns:a="http://schemas.openxmlformats.org/drawingml/2006/main">
               <a:ext uri="{FF2B5EF4-FFF2-40B4-BE49-F238E27FC236}">
-                <a16:creationId xmlns:a16="http://schemas.microsoft.com/office/drawing/2014/main" id="{7E244193-3424-440C-BE42-C4FAAA460690}"/>
+                <a16:creationId xmlns:a16="http://schemas.microsoft.com/office/drawing/2014/main" id="{A25CA3EA-5BC0-43B6-91B9-C0D0C0B5BF99}"/>
               </a:ext>
             </a:extLst>
           </p:cNvPr>
@@ -14823,7 +14845,7 @@
           <p:cNvPr id="8" name="Text 5">
             <a:extLst xmlns:a="http://schemas.openxmlformats.org/drawingml/2006/main">
               <a:ext uri="{FF2B5EF4-FFF2-40B4-BE49-F238E27FC236}">
-                <a16:creationId xmlns:a16="http://schemas.microsoft.com/office/drawing/2014/main" id="{09E7C1C3-377A-4165-ADE9-11C2AFF5419E}"/>
+                <a16:creationId xmlns:a16="http://schemas.microsoft.com/office/drawing/2014/main" id="{D208D9B6-B2AA-4F88-9EF0-305DB4B0F4F1}"/>
               </a:ext>
             </a:extLst>
           </p:cNvPr>
@@ -14871,7 +14893,7 @@
           <p:cNvPr id="9" name="Text 6">
             <a:extLst xmlns:a="http://schemas.openxmlformats.org/drawingml/2006/main">
               <a:ext uri="{FF2B5EF4-FFF2-40B4-BE49-F238E27FC236}">
-                <a16:creationId xmlns:a16="http://schemas.microsoft.com/office/drawing/2014/main" id="{D88B8067-BB50-4130-B88D-F0809551C321}"/>
+                <a16:creationId xmlns:a16="http://schemas.microsoft.com/office/drawing/2014/main" id="{5118268C-D78D-4146-A8ED-A41CD5EECF74}"/>
               </a:ext>
             </a:extLst>
           </p:cNvPr>
@@ -14919,7 +14941,7 @@
           <p:cNvPr id="10" name="Shape 7">
             <a:extLst xmlns:a="http://schemas.openxmlformats.org/drawingml/2006/main">
               <a:ext uri="{FF2B5EF4-FFF2-40B4-BE49-F238E27FC236}">
-                <a16:creationId xmlns:a16="http://schemas.microsoft.com/office/drawing/2014/main" id="{FC70D6FC-1A40-4B8A-B4A3-D3BE616D4059}"/>
+                <a16:creationId xmlns:a16="http://schemas.microsoft.com/office/drawing/2014/main" id="{A18B45D6-22DB-4431-A239-B800415667ED}"/>
               </a:ext>
             </a:extLst>
           </p:cNvPr>
@@ -14966,7 +14988,7 @@
           <p:cNvPr id="11" name="Text 8">
             <a:extLst xmlns:a="http://schemas.openxmlformats.org/drawingml/2006/main">
               <a:ext uri="{FF2B5EF4-FFF2-40B4-BE49-F238E27FC236}">
-                <a16:creationId xmlns:a16="http://schemas.microsoft.com/office/drawing/2014/main" id="{2A7BF60C-37CB-4440-BEF6-9F8A646F477B}"/>
+                <a16:creationId xmlns:a16="http://schemas.microsoft.com/office/drawing/2014/main" id="{92A1F32D-5FD6-493D-AFEC-BD6F64F9224C}"/>
               </a:ext>
             </a:extLst>
           </p:cNvPr>
@@ -15014,7 +15036,7 @@
           <p:cNvPr id="12" name="Text 9">
             <a:extLst xmlns:a="http://schemas.openxmlformats.org/drawingml/2006/main">
               <a:ext uri="{FF2B5EF4-FFF2-40B4-BE49-F238E27FC236}">
-                <a16:creationId xmlns:a16="http://schemas.microsoft.com/office/drawing/2014/main" id="{656516CD-B8A2-4843-9BFF-9FDF985CEE1D}"/>
+                <a16:creationId xmlns:a16="http://schemas.microsoft.com/office/drawing/2014/main" id="{D10BA4EC-5970-4F9B-BA9B-347F7F8137CD}"/>
               </a:ext>
             </a:extLst>
           </p:cNvPr>
@@ -15062,7 +15084,7 @@
           <p:cNvPr id="13" name="Shape 10">
             <a:extLst xmlns:a="http://schemas.openxmlformats.org/drawingml/2006/main">
               <a:ext uri="{FF2B5EF4-FFF2-40B4-BE49-F238E27FC236}">
-                <a16:creationId xmlns:a16="http://schemas.microsoft.com/office/drawing/2014/main" id="{4D5667C3-87A9-4E71-A91A-155EACD63EC2}"/>
+                <a16:creationId xmlns:a16="http://schemas.microsoft.com/office/drawing/2014/main" id="{97EF3A1A-CD11-4258-93D5-A3113F1BBB4E}"/>
               </a:ext>
             </a:extLst>
           </p:cNvPr>
@@ -15109,7 +15131,7 @@
           <p:cNvPr id="14" name="Text 11">
             <a:extLst xmlns:a="http://schemas.openxmlformats.org/drawingml/2006/main">
               <a:ext uri="{FF2B5EF4-FFF2-40B4-BE49-F238E27FC236}">
-                <a16:creationId xmlns:a16="http://schemas.microsoft.com/office/drawing/2014/main" id="{176F46CB-0300-4EE0-9692-77E5FA7CE3D9}"/>
+                <a16:creationId xmlns:a16="http://schemas.microsoft.com/office/drawing/2014/main" id="{A0D61E25-733A-4AA4-AC69-D55EDFC620F4}"/>
               </a:ext>
             </a:extLst>
           </p:cNvPr>
@@ -15157,7 +15179,7 @@
           <p:cNvPr id="15" name="Text 12">
             <a:extLst xmlns:a="http://schemas.openxmlformats.org/drawingml/2006/main">
               <a:ext uri="{FF2B5EF4-FFF2-40B4-BE49-F238E27FC236}">
-                <a16:creationId xmlns:a16="http://schemas.microsoft.com/office/drawing/2014/main" id="{83F4CA3E-E46A-457F-A0B4-5CBBB72C5CA0}"/>
+                <a16:creationId xmlns:a16="http://schemas.microsoft.com/office/drawing/2014/main" id="{D9A40B7B-99E4-4AFC-9DEF-9D2D71070C60}"/>
               </a:ext>
             </a:extLst>
           </p:cNvPr>
@@ -15205,7 +15227,7 @@
           <p:cNvPr id="16" name="Text 13">
             <a:extLst xmlns:a="http://schemas.openxmlformats.org/drawingml/2006/main">
               <a:ext uri="{FF2B5EF4-FFF2-40B4-BE49-F238E27FC236}">
-                <a16:creationId xmlns:a16="http://schemas.microsoft.com/office/drawing/2014/main" id="{28631543-BADE-4DF4-AC96-00072B4F65F2}"/>
+                <a16:creationId xmlns:a16="http://schemas.microsoft.com/office/drawing/2014/main" id="{FC389CD1-071A-43F3-8B18-2F7C73B5B8EA}"/>
               </a:ext>
             </a:extLst>
           </p:cNvPr>
@@ -15251,7 +15273,7 @@
     </p:spTree>
     <p:extLst>
       <p:ext uri="{BB962C8B-B14F-4D97-AF65-F5344CB8AC3E}">
-        <p14:creationId xmlns:p14="http://schemas.microsoft.com/office/powerpoint/2010/main" val="1036704389"/>
+        <p14:creationId xmlns:p14="http://schemas.microsoft.com/office/powerpoint/2010/main" val="111114326"/>
       </p:ext>
     </p:extLst>
   </p:cSld>
@@ -15282,7 +15304,7 @@
           <p:cNvPr id="2" name="Text 0">
             <a:extLst xmlns:a="http://schemas.openxmlformats.org/drawingml/2006/main">
               <a:ext uri="{FF2B5EF4-FFF2-40B4-BE49-F238E27FC236}">
-                <a16:creationId xmlns:a16="http://schemas.microsoft.com/office/drawing/2014/main" id="{5FCAC2B3-FFCC-4FC5-B878-A34BE19A99FB}"/>
+                <a16:creationId xmlns:a16="http://schemas.microsoft.com/office/drawing/2014/main" id="{D7827B25-C294-4CB7-A0C4-1238EE35F33C}"/>
               </a:ext>
             </a:extLst>
           </p:cNvPr>
@@ -15327,7 +15349,7 @@
           <p:cNvPr id="3" name="Text 1">
             <a:extLst xmlns:a="http://schemas.openxmlformats.org/drawingml/2006/main">
               <a:ext uri="{FF2B5EF4-FFF2-40B4-BE49-F238E27FC236}">
-                <a16:creationId xmlns:a16="http://schemas.microsoft.com/office/drawing/2014/main" id="{BB91F973-A6E9-498F-A73E-A1401DB2979E}"/>
+                <a16:creationId xmlns:a16="http://schemas.microsoft.com/office/drawing/2014/main" id="{27662252-BCA4-4C10-992C-A318D7C7C588}"/>
               </a:ext>
             </a:extLst>
           </p:cNvPr>
@@ -15372,7 +15394,7 @@
           <p:cNvPr id="4" name="Text 2">
             <a:extLst xmlns:a="http://schemas.openxmlformats.org/drawingml/2006/main">
               <a:ext uri="{FF2B5EF4-FFF2-40B4-BE49-F238E27FC236}">
-                <a16:creationId xmlns:a16="http://schemas.microsoft.com/office/drawing/2014/main" id="{DF145F2A-F2C9-44B7-B4B5-FBF02FCAE369}"/>
+                <a16:creationId xmlns:a16="http://schemas.microsoft.com/office/drawing/2014/main" id="{2B628E2F-72ED-433F-A1CD-30C01ABC185D}"/>
               </a:ext>
             </a:extLst>
           </p:cNvPr>
@@ -15417,7 +15439,7 @@
           <p:cNvPr id="5" name="Text 3">
             <a:extLst xmlns:a="http://schemas.openxmlformats.org/drawingml/2006/main">
               <a:ext uri="{FF2B5EF4-FFF2-40B4-BE49-F238E27FC236}">
-                <a16:creationId xmlns:a16="http://schemas.microsoft.com/office/drawing/2014/main" id="{7C7186E8-925E-4434-A638-D6208139F182}"/>
+                <a16:creationId xmlns:a16="http://schemas.microsoft.com/office/drawing/2014/main" id="{1C3D3212-93BA-411F-BED9-76DBAB83824D}"/>
               </a:ext>
             </a:extLst>
           </p:cNvPr>
@@ -15462,7 +15484,7 @@
           <p:cNvPr id="6" name="Text 4">
             <a:extLst xmlns:a="http://schemas.openxmlformats.org/drawingml/2006/main">
               <a:ext uri="{FF2B5EF4-FFF2-40B4-BE49-F238E27FC236}">
-                <a16:creationId xmlns:a16="http://schemas.microsoft.com/office/drawing/2014/main" id="{CCF7C199-6E6D-44D6-B057-27580600F28C}"/>
+                <a16:creationId xmlns:a16="http://schemas.microsoft.com/office/drawing/2014/main" id="{73B8FF8B-BD7A-4110-A663-73B75B446C2E}"/>
               </a:ext>
             </a:extLst>
           </p:cNvPr>
@@ -15500,7 +15522,7 @@
                 <a:ea typeface="Calibri"/>
                 <a:cs typeface="Calibri"/>
               </a:rPr>
-              <a:t>Against partial GRC, the hand-written composite matches exact quality and request savings while using one interface and fewer tokens. This is the correct baseline for a stable read set.</a:t>
+              <a:t>Against partial GRC, the hand-written composite matches exact quality and request savings while using one interface and fewer tokens. Priced with prompt-cache reuse the gap narrows to 30.9% fewer tokens for 8.0% lower cost, because interface fusion destroys the repeated prefix. This is the correct baseline for a stable read set.</a:t>
             </a:r>
           </a:p>
         </p:txBody>
@@ -15510,7 +15532,7 @@
           <p:cNvPr id="7" name="Text 5">
             <a:extLst xmlns:a="http://schemas.openxmlformats.org/drawingml/2006/main">
               <a:ext uri="{FF2B5EF4-FFF2-40B4-BE49-F238E27FC236}">
-                <a16:creationId xmlns:a16="http://schemas.microsoft.com/office/drawing/2014/main" id="{2E971890-AFBB-4210-A5AE-8A87470E48BD}"/>
+                <a16:creationId xmlns:a16="http://schemas.microsoft.com/office/drawing/2014/main" id="{93CD70EB-14CF-4235-8C2B-0B3894C41ED8}"/>
               </a:ext>
             </a:extLst>
           </p:cNvPr>
@@ -16815,7 +16837,7 @@
           <p:cNvPr id="9" name="Text 6">
             <a:extLst xmlns:a="http://schemas.openxmlformats.org/drawingml/2006/main">
               <a:ext uri="{FF2B5EF4-FFF2-40B4-BE49-F238E27FC236}">
-                <a16:creationId xmlns:a16="http://schemas.microsoft.com/office/drawing/2014/main" id="{1262D91E-1819-402D-ABD1-D8BBBD1EFA9B}"/>
+                <a16:creationId xmlns:a16="http://schemas.microsoft.com/office/drawing/2014/main" id="{945F26DB-3EBC-41B8-90A5-77FBED973770}"/>
               </a:ext>
             </a:extLst>
           </p:cNvPr>
@@ -16874,7 +16896,7 @@
           <p:cNvPr id="10" name="Shape 7">
             <a:extLst xmlns:a="http://schemas.openxmlformats.org/drawingml/2006/main">
               <a:ext uri="{FF2B5EF4-FFF2-40B4-BE49-F238E27FC236}">
-                <a16:creationId xmlns:a16="http://schemas.microsoft.com/office/drawing/2014/main" id="{DE8FC14F-BC9A-48EA-BDAC-241AC44FEDF8}"/>
+                <a16:creationId xmlns:a16="http://schemas.microsoft.com/office/drawing/2014/main" id="{307E18C8-E2F4-47D5-8257-59D90A7ED9AB}"/>
               </a:ext>
             </a:extLst>
           </p:cNvPr>
@@ -16921,7 +16943,7 @@
           <p:cNvPr id="11" name="Shape 8">
             <a:extLst xmlns:a="http://schemas.openxmlformats.org/drawingml/2006/main">
               <a:ext uri="{FF2B5EF4-FFF2-40B4-BE49-F238E27FC236}">
-                <a16:creationId xmlns:a16="http://schemas.microsoft.com/office/drawing/2014/main" id="{C31C9154-0E42-48B1-AAFA-86383A60317C}"/>
+                <a16:creationId xmlns:a16="http://schemas.microsoft.com/office/drawing/2014/main" id="{FAF76AAB-83F4-497D-A21D-8C6A5568BE63}"/>
               </a:ext>
             </a:extLst>
           </p:cNvPr>
@@ -16959,7 +16981,7 @@
           <p:cNvPr id="12" name="Text 9">
             <a:extLst xmlns:a="http://schemas.openxmlformats.org/drawingml/2006/main">
               <a:ext uri="{FF2B5EF4-FFF2-40B4-BE49-F238E27FC236}">
-                <a16:creationId xmlns:a16="http://schemas.microsoft.com/office/drawing/2014/main" id="{33E4E41B-A593-48CD-9B10-5C3583E0286E}"/>
+                <a16:creationId xmlns:a16="http://schemas.microsoft.com/office/drawing/2014/main" id="{CBBF686D-0FB0-412F-9B36-5F61F0E16C92}"/>
               </a:ext>
             </a:extLst>
           </p:cNvPr>
@@ -17004,7 +17026,7 @@
           <p:cNvPr id="13" name="Text 10">
             <a:extLst xmlns:a="http://schemas.openxmlformats.org/drawingml/2006/main">
               <a:ext uri="{FF2B5EF4-FFF2-40B4-BE49-F238E27FC236}">
-                <a16:creationId xmlns:a16="http://schemas.microsoft.com/office/drawing/2014/main" id="{EF38C8CB-2848-401F-91BE-A2BB5774CA81}"/>
+                <a16:creationId xmlns:a16="http://schemas.microsoft.com/office/drawing/2014/main" id="{EC12681F-3FC3-4182-92D0-A4FAAF68E0AD}"/>
               </a:ext>
             </a:extLst>
           </p:cNvPr>
@@ -17049,7 +17071,7 @@
           <p:cNvPr id="14" name="Text 11">
             <a:extLst xmlns:a="http://schemas.openxmlformats.org/drawingml/2006/main">
               <a:ext uri="{FF2B5EF4-FFF2-40B4-BE49-F238E27FC236}">
-                <a16:creationId xmlns:a16="http://schemas.microsoft.com/office/drawing/2014/main" id="{8599F66A-2D71-4348-BDBF-C1147639AD74}"/>
+                <a16:creationId xmlns:a16="http://schemas.microsoft.com/office/drawing/2014/main" id="{054CCF10-6F05-4746-8AB4-64953E8271DC}"/>
               </a:ext>
             </a:extLst>
           </p:cNvPr>
@@ -17144,7 +17166,7 @@
           <p:cNvPr id="15" name="Shape 12">
             <a:extLst xmlns:a="http://schemas.openxmlformats.org/drawingml/2006/main">
               <a:ext uri="{FF2B5EF4-FFF2-40B4-BE49-F238E27FC236}">
-                <a16:creationId xmlns:a16="http://schemas.microsoft.com/office/drawing/2014/main" id="{468D5A6B-75E2-48F6-BE01-A150E6E4A54D}"/>
+                <a16:creationId xmlns:a16="http://schemas.microsoft.com/office/drawing/2014/main" id="{308FEC05-7C68-4E55-A008-2E98D1934753}"/>
               </a:ext>
             </a:extLst>
           </p:cNvPr>
@@ -17191,7 +17213,7 @@
           <p:cNvPr id="16" name="Shape 13">
             <a:extLst xmlns:a="http://schemas.openxmlformats.org/drawingml/2006/main">
               <a:ext uri="{FF2B5EF4-FFF2-40B4-BE49-F238E27FC236}">
-                <a16:creationId xmlns:a16="http://schemas.microsoft.com/office/drawing/2014/main" id="{D9527E66-9F7E-4BA3-A2FC-10E2C79434B5}"/>
+                <a16:creationId xmlns:a16="http://schemas.microsoft.com/office/drawing/2014/main" id="{0CA1B3AC-ACCE-459D-9047-27A866E751BE}"/>
               </a:ext>
             </a:extLst>
           </p:cNvPr>
@@ -17229,7 +17251,7 @@
           <p:cNvPr id="17" name="Text 14">
             <a:extLst xmlns:a="http://schemas.openxmlformats.org/drawingml/2006/main">
               <a:ext uri="{FF2B5EF4-FFF2-40B4-BE49-F238E27FC236}">
-                <a16:creationId xmlns:a16="http://schemas.microsoft.com/office/drawing/2014/main" id="{089D14B1-B833-4378-B490-9FB941AC0828}"/>
+                <a16:creationId xmlns:a16="http://schemas.microsoft.com/office/drawing/2014/main" id="{73085E83-A00B-4215-A708-E466D4ADDF41}"/>
               </a:ext>
             </a:extLst>
           </p:cNvPr>
@@ -17274,7 +17296,7 @@
           <p:cNvPr id="18" name="Text 15">
             <a:extLst xmlns:a="http://schemas.openxmlformats.org/drawingml/2006/main">
               <a:ext uri="{FF2B5EF4-FFF2-40B4-BE49-F238E27FC236}">
-                <a16:creationId xmlns:a16="http://schemas.microsoft.com/office/drawing/2014/main" id="{7C915287-0AA9-40D7-8A41-1AB1D4B7D31E}"/>
+                <a16:creationId xmlns:a16="http://schemas.microsoft.com/office/drawing/2014/main" id="{0D0565F1-78E9-46E7-8C3C-B93B93ED0462}"/>
               </a:ext>
             </a:extLst>
           </p:cNvPr>
@@ -17319,7 +17341,7 @@
           <p:cNvPr id="8" name="Text 16">
             <a:extLst xmlns:a="http://schemas.openxmlformats.org/drawingml/2006/main">
               <a:ext uri="{FF2B5EF4-FFF2-40B4-BE49-F238E27FC236}">
-                <a16:creationId xmlns:a16="http://schemas.microsoft.com/office/drawing/2014/main" id="{F85380C3-0B69-42D6-9E51-D8B93381A6E6}"/>
+                <a16:creationId xmlns:a16="http://schemas.microsoft.com/office/drawing/2014/main" id="{0B24D287-46C3-4B50-AF9D-466659C65DE4}"/>
               </a:ext>
             </a:extLst>
           </p:cNvPr>
@@ -17414,7 +17436,7 @@
           <p:cNvPr id="20" name="Shape 17">
             <a:extLst xmlns:a="http://schemas.openxmlformats.org/drawingml/2006/main">
               <a:ext uri="{FF2B5EF4-FFF2-40B4-BE49-F238E27FC236}">
-                <a16:creationId xmlns:a16="http://schemas.microsoft.com/office/drawing/2014/main" id="{E96EA5E8-2331-42AF-AF34-34A8BA238108}"/>
+                <a16:creationId xmlns:a16="http://schemas.microsoft.com/office/drawing/2014/main" id="{F475CD7A-771A-4FA0-8298-5A5649C88588}"/>
               </a:ext>
             </a:extLst>
           </p:cNvPr>
@@ -17461,7 +17483,7 @@
           <p:cNvPr id="21" name="Text 18">
             <a:extLst xmlns:a="http://schemas.openxmlformats.org/drawingml/2006/main">
               <a:ext uri="{FF2B5EF4-FFF2-40B4-BE49-F238E27FC236}">
-                <a16:creationId xmlns:a16="http://schemas.microsoft.com/office/drawing/2014/main" id="{6ADB69A1-63C1-4D69-A79A-6B6A7CF57C8B}"/>
+                <a16:creationId xmlns:a16="http://schemas.microsoft.com/office/drawing/2014/main" id="{512F0BD0-536E-4B33-9D2E-653BCA3DAC18}"/>
               </a:ext>
             </a:extLst>
           </p:cNvPr>
@@ -17518,7 +17540,7 @@
     </p:spTree>
     <p:extLst>
       <p:ext uri="{BB962C8B-B14F-4D97-AF65-F5344CB8AC3E}">
-        <p14:creationId xmlns:p14="http://schemas.microsoft.com/office/powerpoint/2010/main" val="1837912288"/>
+        <p14:creationId xmlns:p14="http://schemas.microsoft.com/office/powerpoint/2010/main" val="1596166722"/>
       </p:ext>
     </p:extLst>
   </p:cSld>
@@ -17549,7 +17571,7 @@
           <p:cNvPr id="2" name="Text 0">
             <a:extLst xmlns:a="http://schemas.openxmlformats.org/drawingml/2006/main">
               <a:ext uri="{FF2B5EF4-FFF2-40B4-BE49-F238E27FC236}">
-                <a16:creationId xmlns:a16="http://schemas.microsoft.com/office/drawing/2014/main" id="{58633C90-9649-40D3-A938-9BC14216815F}"/>
+                <a16:creationId xmlns:a16="http://schemas.microsoft.com/office/drawing/2014/main" id="{BD26FD71-BFC8-418B-8222-DF3E8474CB2C}"/>
               </a:ext>
             </a:extLst>
           </p:cNvPr>
@@ -17594,7 +17616,7 @@
           <p:cNvPr id="3" name="Text 1">
             <a:extLst xmlns:a="http://schemas.openxmlformats.org/drawingml/2006/main">
               <a:ext uri="{FF2B5EF4-FFF2-40B4-BE49-F238E27FC236}">
-                <a16:creationId xmlns:a16="http://schemas.microsoft.com/office/drawing/2014/main" id="{E86ECFE1-0E7E-4745-AFC8-9AF57CAC12F0}"/>
+                <a16:creationId xmlns:a16="http://schemas.microsoft.com/office/drawing/2014/main" id="{22047920-9B9B-4B47-B6A5-73329EF85FCE}"/>
               </a:ext>
             </a:extLst>
           </p:cNvPr>
@@ -17639,7 +17661,7 @@
           <p:cNvPr id="4" name="Text 2">
             <a:extLst xmlns:a="http://schemas.openxmlformats.org/drawingml/2006/main">
               <a:ext uri="{FF2B5EF4-FFF2-40B4-BE49-F238E27FC236}">
-                <a16:creationId xmlns:a16="http://schemas.microsoft.com/office/drawing/2014/main" id="{F1BC4AE8-507D-405F-855B-8C916FC87C6C}"/>
+                <a16:creationId xmlns:a16="http://schemas.microsoft.com/office/drawing/2014/main" id="{D02F57F9-D850-45B9-B512-D45AD192DD9A}"/>
               </a:ext>
             </a:extLst>
           </p:cNvPr>
@@ -17684,7 +17706,7 @@
           <p:cNvPr id="5" name="Text 3">
             <a:extLst xmlns:a="http://schemas.openxmlformats.org/drawingml/2006/main">
               <a:ext uri="{FF2B5EF4-FFF2-40B4-BE49-F238E27FC236}">
-                <a16:creationId xmlns:a16="http://schemas.microsoft.com/office/drawing/2014/main" id="{A06E0870-62E4-4461-B213-C79FEC0CA01C}"/>
+                <a16:creationId xmlns:a16="http://schemas.microsoft.com/office/drawing/2014/main" id="{10A06F07-F43A-495C-BC85-68040181E21A}"/>
               </a:ext>
             </a:extLst>
           </p:cNvPr>
@@ -17729,7 +17751,7 @@
           <p:cNvPr id="6" name="Shape 4">
             <a:extLst xmlns:a="http://schemas.openxmlformats.org/drawingml/2006/main">
               <a:ext uri="{FF2B5EF4-FFF2-40B4-BE49-F238E27FC236}">
-                <a16:creationId xmlns:a16="http://schemas.microsoft.com/office/drawing/2014/main" id="{06890709-D5C6-4563-B7CB-B75982AF18E7}"/>
+                <a16:creationId xmlns:a16="http://schemas.microsoft.com/office/drawing/2014/main" id="{B93749DC-61C9-4F64-BF2C-AA7F7313090D}"/>
               </a:ext>
             </a:extLst>
           </p:cNvPr>
@@ -17776,7 +17798,7 @@
           <p:cNvPr id="7" name="Text 5">
             <a:extLst xmlns:a="http://schemas.openxmlformats.org/drawingml/2006/main">
               <a:ext uri="{FF2B5EF4-FFF2-40B4-BE49-F238E27FC236}">
-                <a16:creationId xmlns:a16="http://schemas.microsoft.com/office/drawing/2014/main" id="{2F51AAFF-122C-41BB-93A4-3BE6B701737D}"/>
+                <a16:creationId xmlns:a16="http://schemas.microsoft.com/office/drawing/2014/main" id="{37EDE80C-A9C8-4486-9C92-703FF5997F64}"/>
               </a:ext>
             </a:extLst>
           </p:cNvPr>
@@ -17846,7 +17868,7 @@
           <p:cNvPr id="8" name="Shape 6">
             <a:extLst xmlns:a="http://schemas.openxmlformats.org/drawingml/2006/main">
               <a:ext uri="{FF2B5EF4-FFF2-40B4-BE49-F238E27FC236}">
-                <a16:creationId xmlns:a16="http://schemas.microsoft.com/office/drawing/2014/main" id="{DF3124C7-2BCE-4AF7-9ECD-19B1AA32DB49}"/>
+                <a16:creationId xmlns:a16="http://schemas.microsoft.com/office/drawing/2014/main" id="{ED869A4F-E7C6-47B8-96CE-BB33E5D1CA25}"/>
               </a:ext>
             </a:extLst>
           </p:cNvPr>
@@ -17893,7 +17915,7 @@
           <p:cNvPr id="9" name="Text 7">
             <a:extLst xmlns:a="http://schemas.openxmlformats.org/drawingml/2006/main">
               <a:ext uri="{FF2B5EF4-FFF2-40B4-BE49-F238E27FC236}">
-                <a16:creationId xmlns:a16="http://schemas.microsoft.com/office/drawing/2014/main" id="{080CDB36-8585-4989-8271-9C8310F0D05C}"/>
+                <a16:creationId xmlns:a16="http://schemas.microsoft.com/office/drawing/2014/main" id="{FF6BBA54-37EA-4542-A5A4-C1D359A37D46}"/>
               </a:ext>
             </a:extLst>
           </p:cNvPr>
@@ -17938,7 +17960,7 @@
           <p:cNvPr id="10" name="Text 8">
             <a:extLst xmlns:a="http://schemas.openxmlformats.org/drawingml/2006/main">
               <a:ext uri="{FF2B5EF4-FFF2-40B4-BE49-F238E27FC236}">
-                <a16:creationId xmlns:a16="http://schemas.microsoft.com/office/drawing/2014/main" id="{80ED6D64-C48A-462B-AAFD-73A56F106202}"/>
+                <a16:creationId xmlns:a16="http://schemas.microsoft.com/office/drawing/2014/main" id="{0A0E90CD-47AB-4827-ACD6-33F502F7D5B0}"/>
               </a:ext>
             </a:extLst>
           </p:cNvPr>
@@ -17986,7 +18008,7 @@
           <p:cNvPr id="11" name="Shape 9">
             <a:extLst xmlns:a="http://schemas.openxmlformats.org/drawingml/2006/main">
               <a:ext uri="{FF2B5EF4-FFF2-40B4-BE49-F238E27FC236}">
-                <a16:creationId xmlns:a16="http://schemas.microsoft.com/office/drawing/2014/main" id="{2A5BF72A-F199-47FC-A026-ACC0545B0706}"/>
+                <a16:creationId xmlns:a16="http://schemas.microsoft.com/office/drawing/2014/main" id="{400944EB-9C20-411E-BDE3-2E56E0D1E247}"/>
               </a:ext>
             </a:extLst>
           </p:cNvPr>
@@ -18033,7 +18055,7 @@
           <p:cNvPr id="12" name="Text 10">
             <a:extLst xmlns:a="http://schemas.openxmlformats.org/drawingml/2006/main">
               <a:ext uri="{FF2B5EF4-FFF2-40B4-BE49-F238E27FC236}">
-                <a16:creationId xmlns:a16="http://schemas.microsoft.com/office/drawing/2014/main" id="{E0014AA4-06B3-4FF8-9AF0-32749589E25D}"/>
+                <a16:creationId xmlns:a16="http://schemas.microsoft.com/office/drawing/2014/main" id="{EAF5CC96-E9CC-47B5-81F0-D8F6872EAA72}"/>
               </a:ext>
             </a:extLst>
           </p:cNvPr>
@@ -18078,7 +18100,7 @@
           <p:cNvPr id="13" name="Text 11">
             <a:extLst xmlns:a="http://schemas.openxmlformats.org/drawingml/2006/main">
               <a:ext uri="{FF2B5EF4-FFF2-40B4-BE49-F238E27FC236}">
-                <a16:creationId xmlns:a16="http://schemas.microsoft.com/office/drawing/2014/main" id="{A3E61A8C-706F-4C4E-A2A4-B36D7E3799E1}"/>
+                <a16:creationId xmlns:a16="http://schemas.microsoft.com/office/drawing/2014/main" id="{849AD39A-D9B9-4DCE-90D0-FCBBB6078CC2}"/>
               </a:ext>
             </a:extLst>
           </p:cNvPr>
@@ -18126,7 +18148,7 @@
           <p:cNvPr id="14" name="Shape 12">
             <a:extLst xmlns:a="http://schemas.openxmlformats.org/drawingml/2006/main">
               <a:ext uri="{FF2B5EF4-FFF2-40B4-BE49-F238E27FC236}">
-                <a16:creationId xmlns:a16="http://schemas.microsoft.com/office/drawing/2014/main" id="{D1031922-E69E-434C-BA6C-26B73334F240}"/>
+                <a16:creationId xmlns:a16="http://schemas.microsoft.com/office/drawing/2014/main" id="{237E7CAA-8895-4C46-BC46-63EFC6D47D66}"/>
               </a:ext>
             </a:extLst>
           </p:cNvPr>
@@ -18173,7 +18195,7 @@
           <p:cNvPr id="15" name="Text 13">
             <a:extLst xmlns:a="http://schemas.openxmlformats.org/drawingml/2006/main">
               <a:ext uri="{FF2B5EF4-FFF2-40B4-BE49-F238E27FC236}">
-                <a16:creationId xmlns:a16="http://schemas.microsoft.com/office/drawing/2014/main" id="{EE1D67BF-7E08-451E-B1E9-9F42254D01B4}"/>
+                <a16:creationId xmlns:a16="http://schemas.microsoft.com/office/drawing/2014/main" id="{99AD2204-D665-4926-B35F-629C34840457}"/>
               </a:ext>
             </a:extLst>
           </p:cNvPr>
@@ -18218,7 +18240,7 @@
           <p:cNvPr id="16" name="Text 14">
             <a:extLst xmlns:a="http://schemas.openxmlformats.org/drawingml/2006/main">
               <a:ext uri="{FF2B5EF4-FFF2-40B4-BE49-F238E27FC236}">
-                <a16:creationId xmlns:a16="http://schemas.microsoft.com/office/drawing/2014/main" id="{1DF9CDA5-E44E-4BF4-AD9E-26701432A955}"/>
+                <a16:creationId xmlns:a16="http://schemas.microsoft.com/office/drawing/2014/main" id="{0571923C-13B7-4A40-92DE-0A29A2A9BD85}"/>
               </a:ext>
             </a:extLst>
           </p:cNvPr>
@@ -18266,7 +18288,7 @@
           <p:cNvPr id="17" name="Shape 15">
             <a:extLst xmlns:a="http://schemas.openxmlformats.org/drawingml/2006/main">
               <a:ext uri="{FF2B5EF4-FFF2-40B4-BE49-F238E27FC236}">
-                <a16:creationId xmlns:a16="http://schemas.microsoft.com/office/drawing/2014/main" id="{BBFD53E5-F9A0-4457-87D4-FCE9E483B85B}"/>
+                <a16:creationId xmlns:a16="http://schemas.microsoft.com/office/drawing/2014/main" id="{FB7D2C0B-3562-42F2-A5BB-8130295D5265}"/>
               </a:ext>
             </a:extLst>
           </p:cNvPr>
@@ -18313,7 +18335,7 @@
           <p:cNvPr id="18" name="Text 16">
             <a:extLst xmlns:a="http://schemas.openxmlformats.org/drawingml/2006/main">
               <a:ext uri="{FF2B5EF4-FFF2-40B4-BE49-F238E27FC236}">
-                <a16:creationId xmlns:a16="http://schemas.microsoft.com/office/drawing/2014/main" id="{959E4332-E7AF-4978-A3F5-1DA93ECD3447}"/>
+                <a16:creationId xmlns:a16="http://schemas.microsoft.com/office/drawing/2014/main" id="{6779508A-CB52-47B7-8F26-E5C2CD4ED2D0}"/>
               </a:ext>
             </a:extLst>
           </p:cNvPr>
@@ -18358,7 +18380,7 @@
           <p:cNvPr id="19" name="Text 17">
             <a:extLst xmlns:a="http://schemas.openxmlformats.org/drawingml/2006/main">
               <a:ext uri="{FF2B5EF4-FFF2-40B4-BE49-F238E27FC236}">
-                <a16:creationId xmlns:a16="http://schemas.microsoft.com/office/drawing/2014/main" id="{CFFCF908-DA57-4941-9EEA-0916055A00E1}"/>
+                <a16:creationId xmlns:a16="http://schemas.microsoft.com/office/drawing/2014/main" id="{0DD61E05-2397-4C86-99D2-57E3B84403A3}"/>
               </a:ext>
             </a:extLst>
           </p:cNvPr>
@@ -18406,7 +18428,7 @@
           <p:cNvPr id="20" name="Text 18">
             <a:extLst xmlns:a="http://schemas.openxmlformats.org/drawingml/2006/main">
               <a:ext uri="{FF2B5EF4-FFF2-40B4-BE49-F238E27FC236}">
-                <a16:creationId xmlns:a16="http://schemas.microsoft.com/office/drawing/2014/main" id="{611F7CC4-71E0-4DC0-87D7-954C5248BE6D}"/>
+                <a16:creationId xmlns:a16="http://schemas.microsoft.com/office/drawing/2014/main" id="{9C0D797D-8533-4F55-8EAE-C6215E3CB104}"/>
               </a:ext>
             </a:extLst>
           </p:cNvPr>
@@ -18451,7 +18473,7 @@
           <p:cNvPr id="21" name="Text 19">
             <a:extLst xmlns:a="http://schemas.openxmlformats.org/drawingml/2006/main">
               <a:ext uri="{FF2B5EF4-FFF2-40B4-BE49-F238E27FC236}">
-                <a16:creationId xmlns:a16="http://schemas.microsoft.com/office/drawing/2014/main" id="{58DA4F38-7430-41B7-A00A-3F2A03BF4314}"/>
+                <a16:creationId xmlns:a16="http://schemas.microsoft.com/office/drawing/2014/main" id="{11BF4789-8E32-4C91-A126-7710FDC4C3A6}"/>
               </a:ext>
             </a:extLst>
           </p:cNvPr>
@@ -18544,7 +18566,7 @@
     </p:spTree>
     <p:extLst>
       <p:ext uri="{BB962C8B-B14F-4D97-AF65-F5344CB8AC3E}">
-        <p14:creationId xmlns:p14="http://schemas.microsoft.com/office/powerpoint/2010/main" val="324765129"/>
+        <p14:creationId xmlns:p14="http://schemas.microsoft.com/office/powerpoint/2010/main" val="1523212986"/>
       </p:ext>
     </p:extLst>
   </p:cSld>
@@ -18575,7 +18597,7 @@
           <p:cNvPr id="2" name="Text 0">
             <a:extLst xmlns:a="http://schemas.openxmlformats.org/drawingml/2006/main">
               <a:ext uri="{FF2B5EF4-FFF2-40B4-BE49-F238E27FC236}">
-                <a16:creationId xmlns:a16="http://schemas.microsoft.com/office/drawing/2014/main" id="{5FCAC2B3-FFCC-4FC5-B878-A34BE19A99FB}"/>
+                <a16:creationId xmlns:a16="http://schemas.microsoft.com/office/drawing/2014/main" id="{D7827B25-C294-4CB7-A0C4-1238EE35F33C}"/>
               </a:ext>
             </a:extLst>
           </p:cNvPr>
@@ -18620,7 +18642,7 @@
           <p:cNvPr id="3" name="Text 1">
             <a:extLst xmlns:a="http://schemas.openxmlformats.org/drawingml/2006/main">
               <a:ext uri="{FF2B5EF4-FFF2-40B4-BE49-F238E27FC236}">
-                <a16:creationId xmlns:a16="http://schemas.microsoft.com/office/drawing/2014/main" id="{BB91F973-A6E9-498F-A73E-A1401DB2979E}"/>
+                <a16:creationId xmlns:a16="http://schemas.microsoft.com/office/drawing/2014/main" id="{27662252-BCA4-4C10-992C-A318D7C7C588}"/>
               </a:ext>
             </a:extLst>
           </p:cNvPr>
@@ -18665,7 +18687,7 @@
           <p:cNvPr id="4" name="Text 2">
             <a:extLst xmlns:a="http://schemas.openxmlformats.org/drawingml/2006/main">
               <a:ext uri="{FF2B5EF4-FFF2-40B4-BE49-F238E27FC236}">
-                <a16:creationId xmlns:a16="http://schemas.microsoft.com/office/drawing/2014/main" id="{DF145F2A-F2C9-44B7-B4B5-FBF02FCAE369}"/>
+                <a16:creationId xmlns:a16="http://schemas.microsoft.com/office/drawing/2014/main" id="{2B628E2F-72ED-433F-A1CD-30C01ABC185D}"/>
               </a:ext>
             </a:extLst>
           </p:cNvPr>
@@ -18710,7 +18732,7 @@
           <p:cNvPr id="5" name="Text 3">
             <a:extLst xmlns:a="http://schemas.openxmlformats.org/drawingml/2006/main">
               <a:ext uri="{FF2B5EF4-FFF2-40B4-BE49-F238E27FC236}">
-                <a16:creationId xmlns:a16="http://schemas.microsoft.com/office/drawing/2014/main" id="{7C7186E8-925E-4434-A638-D6208139F182}"/>
+                <a16:creationId xmlns:a16="http://schemas.microsoft.com/office/drawing/2014/main" id="{1C3D3212-93BA-411F-BED9-76DBAB83824D}"/>
               </a:ext>
             </a:extLst>
           </p:cNvPr>
@@ -18755,7 +18777,7 @@
           <p:cNvPr id="6" name="Text 4">
             <a:extLst xmlns:a="http://schemas.openxmlformats.org/drawingml/2006/main">
               <a:ext uri="{FF2B5EF4-FFF2-40B4-BE49-F238E27FC236}">
-                <a16:creationId xmlns:a16="http://schemas.microsoft.com/office/drawing/2014/main" id="{CCF7C199-6E6D-44D6-B057-27580600F28C}"/>
+                <a16:creationId xmlns:a16="http://schemas.microsoft.com/office/drawing/2014/main" id="{73B8FF8B-BD7A-4110-A663-73B75B446C2E}"/>
               </a:ext>
             </a:extLst>
           </p:cNvPr>
@@ -18803,7 +18825,7 @@
           <p:cNvPr id="7" name="Text 5">
             <a:extLst xmlns:a="http://schemas.openxmlformats.org/drawingml/2006/main">
               <a:ext uri="{FF2B5EF4-FFF2-40B4-BE49-F238E27FC236}">
-                <a16:creationId xmlns:a16="http://schemas.microsoft.com/office/drawing/2014/main" id="{2E971890-AFBB-4210-A5AE-8A87470E48BD}"/>
+                <a16:creationId xmlns:a16="http://schemas.microsoft.com/office/drawing/2014/main" id="{93CD70EB-14CF-4235-8C2B-0B3894C41ED8}"/>
               </a:ext>
             </a:extLst>
           </p:cNvPr>
@@ -20108,7 +20130,7 @@
           <p:cNvPr id="9" name="Text 6">
             <a:extLst xmlns:a="http://schemas.openxmlformats.org/drawingml/2006/main">
               <a:ext uri="{FF2B5EF4-FFF2-40B4-BE49-F238E27FC236}">
-                <a16:creationId xmlns:a16="http://schemas.microsoft.com/office/drawing/2014/main" id="{1262D91E-1819-402D-ABD1-D8BBBD1EFA9B}"/>
+                <a16:creationId xmlns:a16="http://schemas.microsoft.com/office/drawing/2014/main" id="{945F26DB-3EBC-41B8-90A5-77FBED973770}"/>
               </a:ext>
             </a:extLst>
           </p:cNvPr>
@@ -20156,7 +20178,7 @@
           <p:cNvPr id="10" name="Shape 7">
             <a:extLst xmlns:a="http://schemas.openxmlformats.org/drawingml/2006/main">
               <a:ext uri="{FF2B5EF4-FFF2-40B4-BE49-F238E27FC236}">
-                <a16:creationId xmlns:a16="http://schemas.microsoft.com/office/drawing/2014/main" id="{DE8FC14F-BC9A-48EA-BDAC-241AC44FEDF8}"/>
+                <a16:creationId xmlns:a16="http://schemas.microsoft.com/office/drawing/2014/main" id="{307E18C8-E2F4-47D5-8257-59D90A7ED9AB}"/>
               </a:ext>
             </a:extLst>
           </p:cNvPr>
@@ -20203,7 +20225,7 @@
           <p:cNvPr id="11" name="Shape 8">
             <a:extLst xmlns:a="http://schemas.openxmlformats.org/drawingml/2006/main">
               <a:ext uri="{FF2B5EF4-FFF2-40B4-BE49-F238E27FC236}">
-                <a16:creationId xmlns:a16="http://schemas.microsoft.com/office/drawing/2014/main" id="{C31C9154-0E42-48B1-AAFA-86383A60317C}"/>
+                <a16:creationId xmlns:a16="http://schemas.microsoft.com/office/drawing/2014/main" id="{FAF76AAB-83F4-497D-A21D-8C6A5568BE63}"/>
               </a:ext>
             </a:extLst>
           </p:cNvPr>
@@ -20241,7 +20263,7 @@
           <p:cNvPr id="12" name="Text 9">
             <a:extLst xmlns:a="http://schemas.openxmlformats.org/drawingml/2006/main">
               <a:ext uri="{FF2B5EF4-FFF2-40B4-BE49-F238E27FC236}">
-                <a16:creationId xmlns:a16="http://schemas.microsoft.com/office/drawing/2014/main" id="{33E4E41B-A593-48CD-9B10-5C3583E0286E}"/>
+                <a16:creationId xmlns:a16="http://schemas.microsoft.com/office/drawing/2014/main" id="{CBBF686D-0FB0-412F-9B36-5F61F0E16C92}"/>
               </a:ext>
             </a:extLst>
           </p:cNvPr>
@@ -20286,7 +20308,7 @@
           <p:cNvPr id="13" name="Text 10">
             <a:extLst xmlns:a="http://schemas.openxmlformats.org/drawingml/2006/main">
               <a:ext uri="{FF2B5EF4-FFF2-40B4-BE49-F238E27FC236}">
-                <a16:creationId xmlns:a16="http://schemas.microsoft.com/office/drawing/2014/main" id="{EF38C8CB-2848-401F-91BE-A2BB5774CA81}"/>
+                <a16:creationId xmlns:a16="http://schemas.microsoft.com/office/drawing/2014/main" id="{EC12681F-3FC3-4182-92D0-A4FAAF68E0AD}"/>
               </a:ext>
             </a:extLst>
           </p:cNvPr>
@@ -20331,7 +20353,7 @@
           <p:cNvPr id="14" name="Text 11">
             <a:extLst xmlns:a="http://schemas.openxmlformats.org/drawingml/2006/main">
               <a:ext uri="{FF2B5EF4-FFF2-40B4-BE49-F238E27FC236}">
-                <a16:creationId xmlns:a16="http://schemas.microsoft.com/office/drawing/2014/main" id="{8599F66A-2D71-4348-BDBF-C1147639AD74}"/>
+                <a16:creationId xmlns:a16="http://schemas.microsoft.com/office/drawing/2014/main" id="{054CCF10-6F05-4746-8AB4-64953E8271DC}"/>
               </a:ext>
             </a:extLst>
           </p:cNvPr>
@@ -20426,7 +20448,7 @@
           <p:cNvPr id="15" name="Shape 12">
             <a:extLst xmlns:a="http://schemas.openxmlformats.org/drawingml/2006/main">
               <a:ext uri="{FF2B5EF4-FFF2-40B4-BE49-F238E27FC236}">
-                <a16:creationId xmlns:a16="http://schemas.microsoft.com/office/drawing/2014/main" id="{468D5A6B-75E2-48F6-BE01-A150E6E4A54D}"/>
+                <a16:creationId xmlns:a16="http://schemas.microsoft.com/office/drawing/2014/main" id="{308FEC05-7C68-4E55-A008-2E98D1934753}"/>
               </a:ext>
             </a:extLst>
           </p:cNvPr>
@@ -20473,7 +20495,7 @@
           <p:cNvPr id="16" name="Shape 13">
             <a:extLst xmlns:a="http://schemas.openxmlformats.org/drawingml/2006/main">
               <a:ext uri="{FF2B5EF4-FFF2-40B4-BE49-F238E27FC236}">
-                <a16:creationId xmlns:a16="http://schemas.microsoft.com/office/drawing/2014/main" id="{D9527E66-9F7E-4BA3-A2FC-10E2C79434B5}"/>
+                <a16:creationId xmlns:a16="http://schemas.microsoft.com/office/drawing/2014/main" id="{0CA1B3AC-ACCE-459D-9047-27A866E751BE}"/>
               </a:ext>
             </a:extLst>
           </p:cNvPr>
@@ -20511,7 +20533,7 @@
           <p:cNvPr id="17" name="Text 14">
             <a:extLst xmlns:a="http://schemas.openxmlformats.org/drawingml/2006/main">
               <a:ext uri="{FF2B5EF4-FFF2-40B4-BE49-F238E27FC236}">
-                <a16:creationId xmlns:a16="http://schemas.microsoft.com/office/drawing/2014/main" id="{089D14B1-B833-4378-B490-9FB941AC0828}"/>
+                <a16:creationId xmlns:a16="http://schemas.microsoft.com/office/drawing/2014/main" id="{73085E83-A00B-4215-A708-E466D4ADDF41}"/>
               </a:ext>
             </a:extLst>
           </p:cNvPr>
@@ -20556,7 +20578,7 @@
           <p:cNvPr id="18" name="Text 15">
             <a:extLst xmlns:a="http://schemas.openxmlformats.org/drawingml/2006/main">
               <a:ext uri="{FF2B5EF4-FFF2-40B4-BE49-F238E27FC236}">
-                <a16:creationId xmlns:a16="http://schemas.microsoft.com/office/drawing/2014/main" id="{7C915287-0AA9-40D7-8A41-1AB1D4B7D31E}"/>
+                <a16:creationId xmlns:a16="http://schemas.microsoft.com/office/drawing/2014/main" id="{0D0565F1-78E9-46E7-8C3C-B93B93ED0462}"/>
               </a:ext>
             </a:extLst>
           </p:cNvPr>
@@ -20601,7 +20623,7 @@
           <p:cNvPr id="8" name="Text 16">
             <a:extLst xmlns:a="http://schemas.openxmlformats.org/drawingml/2006/main">
               <a:ext uri="{FF2B5EF4-FFF2-40B4-BE49-F238E27FC236}">
-                <a16:creationId xmlns:a16="http://schemas.microsoft.com/office/drawing/2014/main" id="{F85380C3-0B69-42D6-9E51-D8B93381A6E6}"/>
+                <a16:creationId xmlns:a16="http://schemas.microsoft.com/office/drawing/2014/main" id="{0B24D287-46C3-4B50-AF9D-466659C65DE4}"/>
               </a:ext>
             </a:extLst>
           </p:cNvPr>
@@ -20696,7 +20718,7 @@
           <p:cNvPr id="20" name="Shape 17">
             <a:extLst xmlns:a="http://schemas.openxmlformats.org/drawingml/2006/main">
               <a:ext uri="{FF2B5EF4-FFF2-40B4-BE49-F238E27FC236}">
-                <a16:creationId xmlns:a16="http://schemas.microsoft.com/office/drawing/2014/main" id="{E96EA5E8-2331-42AF-AF34-34A8BA238108}"/>
+                <a16:creationId xmlns:a16="http://schemas.microsoft.com/office/drawing/2014/main" id="{F475CD7A-771A-4FA0-8298-5A5649C88588}"/>
               </a:ext>
             </a:extLst>
           </p:cNvPr>
@@ -20743,7 +20765,7 @@
           <p:cNvPr id="21" name="Text 18">
             <a:extLst xmlns:a="http://schemas.openxmlformats.org/drawingml/2006/main">
               <a:ext uri="{FF2B5EF4-FFF2-40B4-BE49-F238E27FC236}">
-                <a16:creationId xmlns:a16="http://schemas.microsoft.com/office/drawing/2014/main" id="{6ADB69A1-63C1-4D69-A79A-6B6A7CF57C8B}"/>
+                <a16:creationId xmlns:a16="http://schemas.microsoft.com/office/drawing/2014/main" id="{512F0BD0-536E-4B33-9D2E-653BCA3DAC18}"/>
               </a:ext>
             </a:extLst>
           </p:cNvPr>
@@ -20781,7 +20803,7 @@
                 <a:ea typeface="Calibri"/>
                 <a:cs typeface="Calibri"/>
               </a:rPr>
-              <a:t>Fair placement removes the confound: GCS and manual execution tie structurally at 6/6 exact quality. GEPA retains its seed after 14 task evaluations; 59 optimization requests are accounted separately. One family, six held-out cases.</a:t>
+              <a:t>Fair placement removes the confound: GCS and manual execution tie structurally at 6/6 exact quality. GEPA retains its seed after 14 task evaluations; 59 optimization requests are accounted separately. The GCS artifact is calibrated at α=.10 (88/92, bound 0.052) and would retire at the registered α=.05. One family, six held-out cases.</a:t>
             </a:r>
           </a:p>
         </p:txBody>
@@ -20789,7 +20811,7 @@
     </p:spTree>
     <p:extLst>
       <p:ext uri="{BB962C8B-B14F-4D97-AF65-F5344CB8AC3E}">
-        <p14:creationId xmlns:p14="http://schemas.microsoft.com/office/powerpoint/2010/main" val="1837912288"/>
+        <p14:creationId xmlns:p14="http://schemas.microsoft.com/office/powerpoint/2010/main" val="1596166722"/>
       </p:ext>
     </p:extLst>
   </p:cSld>
@@ -20820,7 +20842,7 @@
           <p:cNvPr id="2" name="Text 0">
             <a:extLst xmlns:a="http://schemas.openxmlformats.org/drawingml/2006/main">
               <a:ext uri="{FF2B5EF4-FFF2-40B4-BE49-F238E27FC236}">
-                <a16:creationId xmlns:a16="http://schemas.microsoft.com/office/drawing/2014/main" id="{A1F424D0-CEC8-4ECB-AA11-BB19B66D8559}"/>
+                <a16:creationId xmlns:a16="http://schemas.microsoft.com/office/drawing/2014/main" id="{58BB62D4-A055-431D-9A50-FC46F2DB89A5}"/>
               </a:ext>
             </a:extLst>
           </p:cNvPr>
@@ -20865,7 +20887,7 @@
           <p:cNvPr id="3" name="Text 1">
             <a:extLst xmlns:a="http://schemas.openxmlformats.org/drawingml/2006/main">
               <a:ext uri="{FF2B5EF4-FFF2-40B4-BE49-F238E27FC236}">
-                <a16:creationId xmlns:a16="http://schemas.microsoft.com/office/drawing/2014/main" id="{FC576A05-E2DB-4F2A-8CD3-AFE0859A396B}"/>
+                <a16:creationId xmlns:a16="http://schemas.microsoft.com/office/drawing/2014/main" id="{92E5A502-BD9B-4E91-9668-D81A17304D4F}"/>
               </a:ext>
             </a:extLst>
           </p:cNvPr>
@@ -20910,7 +20932,7 @@
           <p:cNvPr id="4" name="Text 2">
             <a:extLst xmlns:a="http://schemas.openxmlformats.org/drawingml/2006/main">
               <a:ext uri="{FF2B5EF4-FFF2-40B4-BE49-F238E27FC236}">
-                <a16:creationId xmlns:a16="http://schemas.microsoft.com/office/drawing/2014/main" id="{C22745E4-7594-4E90-B31D-76662F8EE38C}"/>
+                <a16:creationId xmlns:a16="http://schemas.microsoft.com/office/drawing/2014/main" id="{FB4E40D5-8E47-48CA-85EF-C4E6C1F391A7}"/>
               </a:ext>
             </a:extLst>
           </p:cNvPr>
@@ -20955,7 +20977,7 @@
           <p:cNvPr id="5" name="Text 3">
             <a:extLst xmlns:a="http://schemas.openxmlformats.org/drawingml/2006/main">
               <a:ext uri="{FF2B5EF4-FFF2-40B4-BE49-F238E27FC236}">
-                <a16:creationId xmlns:a16="http://schemas.microsoft.com/office/drawing/2014/main" id="{4D528470-0EDB-49DB-B354-5F27B581E778}"/>
+                <a16:creationId xmlns:a16="http://schemas.microsoft.com/office/drawing/2014/main" id="{F41C5DE9-65D9-44FB-8981-F21943BDD3EC}"/>
               </a:ext>
             </a:extLst>
           </p:cNvPr>
@@ -21000,7 +21022,7 @@
           <p:cNvPr id="6" name="Text 4">
             <a:extLst xmlns:a="http://schemas.openxmlformats.org/drawingml/2006/main">
               <a:ext uri="{FF2B5EF4-FFF2-40B4-BE49-F238E27FC236}">
-                <a16:creationId xmlns:a16="http://schemas.microsoft.com/office/drawing/2014/main" id="{33324CC1-BE30-49BB-B843-1E4D0B62CB6D}"/>
+                <a16:creationId xmlns:a16="http://schemas.microsoft.com/office/drawing/2014/main" id="{EE041533-057F-47B1-87D2-CE9A749349FF}"/>
               </a:ext>
             </a:extLst>
           </p:cNvPr>
@@ -21102,7 +21124,7 @@
         </p:xfrm>
         <a:graphic xmlns:a="http://schemas.openxmlformats.org/drawingml/2006/main">
           <a:graphicData uri="http://schemas.openxmlformats.org/drawingml/2006/chart">
-            <c:chart xmlns:r="http://schemas.openxmlformats.org/officeDocument/2006/relationships" xmlns:c="http://schemas.openxmlformats.org/drawingml/2006/chart" r:id="R3e7a999f88744db4"/>
+            <c:chart xmlns:r="http://schemas.openxmlformats.org/officeDocument/2006/relationships" xmlns:c="http://schemas.openxmlformats.org/drawingml/2006/chart" r:id="R51c0446875b84944"/>
           </a:graphicData>
         </a:graphic>
       </p:graphicFrame>
@@ -21111,7 +21133,7 @@
           <p:cNvPr id="8" name="Text 5">
             <a:extLst xmlns:a="http://schemas.openxmlformats.org/drawingml/2006/main">
               <a:ext uri="{FF2B5EF4-FFF2-40B4-BE49-F238E27FC236}">
-                <a16:creationId xmlns:a16="http://schemas.microsoft.com/office/drawing/2014/main" id="{1BD9B4C3-C0FC-493C-A2B8-2C9CC3BD8729}"/>
+                <a16:creationId xmlns:a16="http://schemas.microsoft.com/office/drawing/2014/main" id="{84B85584-8FB7-428B-ADCD-1333020A1F57}"/>
               </a:ext>
             </a:extLst>
           </p:cNvPr>
@@ -21159,7 +21181,7 @@
           <p:cNvPr id="9" name="Shape 6">
             <a:extLst xmlns:a="http://schemas.openxmlformats.org/drawingml/2006/main">
               <a:ext uri="{FF2B5EF4-FFF2-40B4-BE49-F238E27FC236}">
-                <a16:creationId xmlns:a16="http://schemas.microsoft.com/office/drawing/2014/main" id="{5EA1DCB4-A9D0-409A-A992-1662BC1B8C7D}"/>
+                <a16:creationId xmlns:a16="http://schemas.microsoft.com/office/drawing/2014/main" id="{CE4D95AB-3025-48B2-935D-1CE1B8EBE492}"/>
               </a:ext>
             </a:extLst>
           </p:cNvPr>
@@ -21206,7 +21228,7 @@
           <p:cNvPr id="10" name="Text 7">
             <a:extLst xmlns:a="http://schemas.openxmlformats.org/drawingml/2006/main">
               <a:ext uri="{FF2B5EF4-FFF2-40B4-BE49-F238E27FC236}">
-                <a16:creationId xmlns:a16="http://schemas.microsoft.com/office/drawing/2014/main" id="{747D6464-60A8-457E-A091-BD05930FDDFD}"/>
+                <a16:creationId xmlns:a16="http://schemas.microsoft.com/office/drawing/2014/main" id="{FA1A0E64-343F-42EE-9DAD-BFA7756EDA46}"/>
               </a:ext>
             </a:extLst>
           </p:cNvPr>
@@ -21251,7 +21273,7 @@
           <p:cNvPr id="11" name="Text 8">
             <a:extLst xmlns:a="http://schemas.openxmlformats.org/drawingml/2006/main">
               <a:ext uri="{FF2B5EF4-FFF2-40B4-BE49-F238E27FC236}">
-                <a16:creationId xmlns:a16="http://schemas.microsoft.com/office/drawing/2014/main" id="{4B368126-7F90-4ACB-B897-C8846D7BDB75}"/>
+                <a16:creationId xmlns:a16="http://schemas.microsoft.com/office/drawing/2014/main" id="{27A7C42E-850A-4031-99EF-930328C3A570}"/>
               </a:ext>
             </a:extLst>
           </p:cNvPr>
@@ -21296,7 +21318,7 @@
           <p:cNvPr id="12" name="Text 9">
             <a:extLst xmlns:a="http://schemas.openxmlformats.org/drawingml/2006/main">
               <a:ext uri="{FF2B5EF4-FFF2-40B4-BE49-F238E27FC236}">
-                <a16:creationId xmlns:a16="http://schemas.microsoft.com/office/drawing/2014/main" id="{E02F3B0B-37F5-45F9-892E-474251BD115D}"/>
+                <a16:creationId xmlns:a16="http://schemas.microsoft.com/office/drawing/2014/main" id="{D8EEE5FB-5D37-489B-BE90-55C87DDE1A70}"/>
               </a:ext>
             </a:extLst>
           </p:cNvPr>
@@ -21341,7 +21363,7 @@
           <p:cNvPr id="13" name="Text 10">
             <a:extLst xmlns:a="http://schemas.openxmlformats.org/drawingml/2006/main">
               <a:ext uri="{FF2B5EF4-FFF2-40B4-BE49-F238E27FC236}">
-                <a16:creationId xmlns:a16="http://schemas.microsoft.com/office/drawing/2014/main" id="{0BEEAB4C-1A92-4F98-90CE-976EFDF70C77}"/>
+                <a16:creationId xmlns:a16="http://schemas.microsoft.com/office/drawing/2014/main" id="{69913375-9FBC-429E-9EAD-B4AB4648ACF6}"/>
               </a:ext>
             </a:extLst>
           </p:cNvPr>
@@ -21386,7 +21408,7 @@
           <p:cNvPr id="14" name="Text 11">
             <a:extLst xmlns:a="http://schemas.openxmlformats.org/drawingml/2006/main">
               <a:ext uri="{FF2B5EF4-FFF2-40B4-BE49-F238E27FC236}">
-                <a16:creationId xmlns:a16="http://schemas.microsoft.com/office/drawing/2014/main" id="{D4AC70F0-6E48-46AF-83D6-296961AF2581}"/>
+                <a16:creationId xmlns:a16="http://schemas.microsoft.com/office/drawing/2014/main" id="{9AFCC980-7F4E-4936-98F3-E7727123BB28}"/>
               </a:ext>
             </a:extLst>
           </p:cNvPr>
@@ -21431,7 +21453,7 @@
           <p:cNvPr id="15" name="Text 12">
             <a:extLst xmlns:a="http://schemas.openxmlformats.org/drawingml/2006/main">
               <a:ext uri="{FF2B5EF4-FFF2-40B4-BE49-F238E27FC236}">
-                <a16:creationId xmlns:a16="http://schemas.microsoft.com/office/drawing/2014/main" id="{FF10F5F8-711C-4639-8924-CF32A14B652A}"/>
+                <a16:creationId xmlns:a16="http://schemas.microsoft.com/office/drawing/2014/main" id="{30E158D9-0C88-4CE8-9971-B37E42E1D0C5}"/>
               </a:ext>
             </a:extLst>
           </p:cNvPr>
@@ -21476,7 +21498,7 @@
           <p:cNvPr id="16" name="Text 13">
             <a:extLst xmlns:a="http://schemas.openxmlformats.org/drawingml/2006/main">
               <a:ext uri="{FF2B5EF4-FFF2-40B4-BE49-F238E27FC236}">
-                <a16:creationId xmlns:a16="http://schemas.microsoft.com/office/drawing/2014/main" id="{32BBBB49-689E-42BF-8D68-90646D1F209D}"/>
+                <a16:creationId xmlns:a16="http://schemas.microsoft.com/office/drawing/2014/main" id="{540848B0-6666-4F58-83F1-D593E878E905}"/>
               </a:ext>
             </a:extLst>
           </p:cNvPr>
@@ -21521,7 +21543,7 @@
           <p:cNvPr id="17" name="Text 14">
             <a:extLst xmlns:a="http://schemas.openxmlformats.org/drawingml/2006/main">
               <a:ext uri="{FF2B5EF4-FFF2-40B4-BE49-F238E27FC236}">
-                <a16:creationId xmlns:a16="http://schemas.microsoft.com/office/drawing/2014/main" id="{00D3680F-3DC7-47A4-ADF4-278E7A543F1F}"/>
+                <a16:creationId xmlns:a16="http://schemas.microsoft.com/office/drawing/2014/main" id="{B930B890-7507-495A-AF55-A71D06DB1D4A}"/>
               </a:ext>
             </a:extLst>
           </p:cNvPr>
@@ -21566,7 +21588,7 @@
           <p:cNvPr id="18" name="Text 15">
             <a:extLst xmlns:a="http://schemas.openxmlformats.org/drawingml/2006/main">
               <a:ext uri="{FF2B5EF4-FFF2-40B4-BE49-F238E27FC236}">
-                <a16:creationId xmlns:a16="http://schemas.microsoft.com/office/drawing/2014/main" id="{079FD012-3391-4031-B274-41D32C581BE3}"/>
+                <a16:creationId xmlns:a16="http://schemas.microsoft.com/office/drawing/2014/main" id="{FFF7BB22-CA3D-4A10-A3BF-18B2AB29F79C}"/>
               </a:ext>
             </a:extLst>
           </p:cNvPr>
@@ -21611,7 +21633,7 @@
           <p:cNvPr id="19" name="Text 16">
             <a:extLst xmlns:a="http://schemas.openxmlformats.org/drawingml/2006/main">
               <a:ext uri="{FF2B5EF4-FFF2-40B4-BE49-F238E27FC236}">
-                <a16:creationId xmlns:a16="http://schemas.microsoft.com/office/drawing/2014/main" id="{4538C00A-E4BD-42E9-A068-456962B859F1}"/>
+                <a16:creationId xmlns:a16="http://schemas.microsoft.com/office/drawing/2014/main" id="{5BE8E4F5-FD0E-456D-A5D2-20B9CD055EBC}"/>
               </a:ext>
             </a:extLst>
           </p:cNvPr>
@@ -21656,7 +21678,7 @@
           <p:cNvPr id="20" name="Text 17">
             <a:extLst xmlns:a="http://schemas.openxmlformats.org/drawingml/2006/main">
               <a:ext uri="{FF2B5EF4-FFF2-40B4-BE49-F238E27FC236}">
-                <a16:creationId xmlns:a16="http://schemas.microsoft.com/office/drawing/2014/main" id="{E4FDEDF0-9291-4947-BD76-5D2F505215AD}"/>
+                <a16:creationId xmlns:a16="http://schemas.microsoft.com/office/drawing/2014/main" id="{9E340F49-CEFC-495C-ADBE-C7727A680479}"/>
               </a:ext>
             </a:extLst>
           </p:cNvPr>
@@ -21701,7 +21723,7 @@
           <p:cNvPr id="21" name="Text 18">
             <a:extLst xmlns:a="http://schemas.openxmlformats.org/drawingml/2006/main">
               <a:ext uri="{FF2B5EF4-FFF2-40B4-BE49-F238E27FC236}">
-                <a16:creationId xmlns:a16="http://schemas.microsoft.com/office/drawing/2014/main" id="{11BFB884-42A0-4014-BCC8-1F358F1FEF54}"/>
+                <a16:creationId xmlns:a16="http://schemas.microsoft.com/office/drawing/2014/main" id="{A97EE732-5994-4804-8A6B-FAA56814EFBC}"/>
               </a:ext>
             </a:extLst>
           </p:cNvPr>
@@ -21746,7 +21768,7 @@
           <p:cNvPr id="22" name="Text 19">
             <a:extLst xmlns:a="http://schemas.openxmlformats.org/drawingml/2006/main">
               <a:ext uri="{FF2B5EF4-FFF2-40B4-BE49-F238E27FC236}">
-                <a16:creationId xmlns:a16="http://schemas.microsoft.com/office/drawing/2014/main" id="{6D08E918-ADE9-4B59-B447-6FBBC810C4D8}"/>
+                <a16:creationId xmlns:a16="http://schemas.microsoft.com/office/drawing/2014/main" id="{8122E63C-4286-4A13-8EC3-E5B8CD34E00F}"/>
               </a:ext>
             </a:extLst>
           </p:cNvPr>
@@ -21791,7 +21813,7 @@
           <p:cNvPr id="23" name="Text 20">
             <a:extLst xmlns:a="http://schemas.openxmlformats.org/drawingml/2006/main">
               <a:ext uri="{FF2B5EF4-FFF2-40B4-BE49-F238E27FC236}">
-                <a16:creationId xmlns:a16="http://schemas.microsoft.com/office/drawing/2014/main" id="{3371787C-072B-42F9-BF8A-857F56762B1E}"/>
+                <a16:creationId xmlns:a16="http://schemas.microsoft.com/office/drawing/2014/main" id="{F9FEE5A4-3C75-4890-A57C-7F380DBF6340}"/>
               </a:ext>
             </a:extLst>
           </p:cNvPr>
@@ -21839,7 +21861,7 @@
           <p:cNvPr id="24" name="Shape 21">
             <a:extLst xmlns:a="http://schemas.openxmlformats.org/drawingml/2006/main">
               <a:ext uri="{FF2B5EF4-FFF2-40B4-BE49-F238E27FC236}">
-                <a16:creationId xmlns:a16="http://schemas.microsoft.com/office/drawing/2014/main" id="{2CF01001-3385-4D3E-B164-CDF2E67B439F}"/>
+                <a16:creationId xmlns:a16="http://schemas.microsoft.com/office/drawing/2014/main" id="{3C18BD0D-2531-4AA4-BA35-7565A4014475}"/>
               </a:ext>
             </a:extLst>
           </p:cNvPr>
@@ -21879,7 +21901,7 @@
           <p:cNvPr id="25" name="Text 22">
             <a:extLst xmlns:a="http://schemas.openxmlformats.org/drawingml/2006/main">
               <a:ext uri="{FF2B5EF4-FFF2-40B4-BE49-F238E27FC236}">
-                <a16:creationId xmlns:a16="http://schemas.microsoft.com/office/drawing/2014/main" id="{3E8FFDAA-6308-4F4F-91AE-1215C0CB0590}"/>
+                <a16:creationId xmlns:a16="http://schemas.microsoft.com/office/drawing/2014/main" id="{0F42DCE0-32B3-4991-AE72-90AEF0F22F22}"/>
               </a:ext>
             </a:extLst>
           </p:cNvPr>
@@ -21925,7 +21947,7 @@
     </p:spTree>
     <p:extLst>
       <p:ext uri="{BB962C8B-B14F-4D97-AF65-F5344CB8AC3E}">
-        <p14:creationId xmlns:p14="http://schemas.microsoft.com/office/powerpoint/2010/main" val="1428090890"/>
+        <p14:creationId xmlns:p14="http://schemas.microsoft.com/office/powerpoint/2010/main" val="1738009723"/>
       </p:ext>
     </p:extLst>
   </p:cSld>
@@ -21956,7 +21978,7 @@
           <p:cNvPr id="2" name="Text 0">
             <a:extLst xmlns:a="http://schemas.openxmlformats.org/drawingml/2006/main">
               <a:ext uri="{FF2B5EF4-FFF2-40B4-BE49-F238E27FC236}">
-                <a16:creationId xmlns:a16="http://schemas.microsoft.com/office/drawing/2014/main" id="{D2D0203F-C441-4750-B35F-C5940EB9F0AE}"/>
+                <a16:creationId xmlns:a16="http://schemas.microsoft.com/office/drawing/2014/main" id="{A2265BE1-5C53-474F-BE6A-308930904023}"/>
               </a:ext>
             </a:extLst>
           </p:cNvPr>
@@ -22001,7 +22023,7 @@
           <p:cNvPr id="3" name="Text 1">
             <a:extLst xmlns:a="http://schemas.openxmlformats.org/drawingml/2006/main">
               <a:ext uri="{FF2B5EF4-FFF2-40B4-BE49-F238E27FC236}">
-                <a16:creationId xmlns:a16="http://schemas.microsoft.com/office/drawing/2014/main" id="{4734279E-414F-4B20-8160-F49B89815544}"/>
+                <a16:creationId xmlns:a16="http://schemas.microsoft.com/office/drawing/2014/main" id="{DB6F6C15-6955-4C05-8D57-E58839BF8CA7}"/>
               </a:ext>
             </a:extLst>
           </p:cNvPr>
@@ -22046,7 +22068,7 @@
           <p:cNvPr id="4" name="Text 2">
             <a:extLst xmlns:a="http://schemas.openxmlformats.org/drawingml/2006/main">
               <a:ext uri="{FF2B5EF4-FFF2-40B4-BE49-F238E27FC236}">
-                <a16:creationId xmlns:a16="http://schemas.microsoft.com/office/drawing/2014/main" id="{124B59A0-0620-4A62-A965-E9AA19BD8C62}"/>
+                <a16:creationId xmlns:a16="http://schemas.microsoft.com/office/drawing/2014/main" id="{10A134EC-D31D-458A-B907-3E86865D665F}"/>
               </a:ext>
             </a:extLst>
           </p:cNvPr>
@@ -22091,7 +22113,7 @@
           <p:cNvPr id="5" name="Text 3">
             <a:extLst xmlns:a="http://schemas.openxmlformats.org/drawingml/2006/main">
               <a:ext uri="{FF2B5EF4-FFF2-40B4-BE49-F238E27FC236}">
-                <a16:creationId xmlns:a16="http://schemas.microsoft.com/office/drawing/2014/main" id="{6A9CF75E-5A6D-4B57-91DC-F2233AC6DCA7}"/>
+                <a16:creationId xmlns:a16="http://schemas.microsoft.com/office/drawing/2014/main" id="{3E02682A-0E24-4A78-970A-81AC7E4667BE}"/>
               </a:ext>
             </a:extLst>
           </p:cNvPr>
@@ -22136,7 +22158,7 @@
           <p:cNvPr id="6" name="Shape 4">
             <a:extLst xmlns:a="http://schemas.openxmlformats.org/drawingml/2006/main">
               <a:ext uri="{FF2B5EF4-FFF2-40B4-BE49-F238E27FC236}">
-                <a16:creationId xmlns:a16="http://schemas.microsoft.com/office/drawing/2014/main" id="{04068910-ACEF-4785-880A-31F212D5FE5E}"/>
+                <a16:creationId xmlns:a16="http://schemas.microsoft.com/office/drawing/2014/main" id="{AE840CFF-CD8E-4440-967F-6E1CD7C06595}"/>
               </a:ext>
             </a:extLst>
           </p:cNvPr>
@@ -22183,7 +22205,7 @@
           <p:cNvPr id="7" name="Shape 5">
             <a:extLst xmlns:a="http://schemas.openxmlformats.org/drawingml/2006/main">
               <a:ext uri="{FF2B5EF4-FFF2-40B4-BE49-F238E27FC236}">
-                <a16:creationId xmlns:a16="http://schemas.microsoft.com/office/drawing/2014/main" id="{965E0F47-CADA-4177-98E2-443AE79FCD1E}"/>
+                <a16:creationId xmlns:a16="http://schemas.microsoft.com/office/drawing/2014/main" id="{58D1BFB8-D5B7-46E6-81B1-B40F8E659321}"/>
               </a:ext>
             </a:extLst>
           </p:cNvPr>
@@ -22221,7 +22243,7 @@
           <p:cNvPr id="8" name="Text 6">
             <a:extLst xmlns:a="http://schemas.openxmlformats.org/drawingml/2006/main">
               <a:ext uri="{FF2B5EF4-FFF2-40B4-BE49-F238E27FC236}">
-                <a16:creationId xmlns:a16="http://schemas.microsoft.com/office/drawing/2014/main" id="{8E7E49C9-C2E1-4E69-8915-1255EE7CB640}"/>
+                <a16:creationId xmlns:a16="http://schemas.microsoft.com/office/drawing/2014/main" id="{A2CD1E39-270F-48F4-9E23-A83D48F8BDA6}"/>
               </a:ext>
             </a:extLst>
           </p:cNvPr>
@@ -22266,7 +22288,7 @@
           <p:cNvPr id="9" name="Text 7">
             <a:extLst xmlns:a="http://schemas.openxmlformats.org/drawingml/2006/main">
               <a:ext uri="{FF2B5EF4-FFF2-40B4-BE49-F238E27FC236}">
-                <a16:creationId xmlns:a16="http://schemas.microsoft.com/office/drawing/2014/main" id="{158175AB-9C78-412C-8121-F2B162E35AC5}"/>
+                <a16:creationId xmlns:a16="http://schemas.microsoft.com/office/drawing/2014/main" id="{655360FF-7954-4905-B440-90218AB6AC22}"/>
               </a:ext>
             </a:extLst>
           </p:cNvPr>
@@ -22314,7 +22336,7 @@
           <p:cNvPr id="10" name="Text 8">
             <a:extLst xmlns:a="http://schemas.openxmlformats.org/drawingml/2006/main">
               <a:ext uri="{FF2B5EF4-FFF2-40B4-BE49-F238E27FC236}">
-                <a16:creationId xmlns:a16="http://schemas.microsoft.com/office/drawing/2014/main" id="{D8911589-4AD6-4D2E-BC1C-18B356042426}"/>
+                <a16:creationId xmlns:a16="http://schemas.microsoft.com/office/drawing/2014/main" id="{77EFA25F-B0A5-4BE3-9F89-EE33ED2EC48F}"/>
               </a:ext>
             </a:extLst>
           </p:cNvPr>
@@ -22362,7 +22384,7 @@
           <p:cNvPr id="11" name="Shape 9">
             <a:extLst xmlns:a="http://schemas.openxmlformats.org/drawingml/2006/main">
               <a:ext uri="{FF2B5EF4-FFF2-40B4-BE49-F238E27FC236}">
-                <a16:creationId xmlns:a16="http://schemas.microsoft.com/office/drawing/2014/main" id="{EA62080D-8DFA-4E46-BF17-299073F283B8}"/>
+                <a16:creationId xmlns:a16="http://schemas.microsoft.com/office/drawing/2014/main" id="{34CAC08B-7BDA-492D-A68C-11CFDCDD983A}"/>
               </a:ext>
             </a:extLst>
           </p:cNvPr>
@@ -22409,7 +22431,7 @@
           <p:cNvPr id="12" name="Shape 10">
             <a:extLst xmlns:a="http://schemas.openxmlformats.org/drawingml/2006/main">
               <a:ext uri="{FF2B5EF4-FFF2-40B4-BE49-F238E27FC236}">
-                <a16:creationId xmlns:a16="http://schemas.microsoft.com/office/drawing/2014/main" id="{6E6C63E8-3F1A-4F6B-84CF-FCF7E243DF25}"/>
+                <a16:creationId xmlns:a16="http://schemas.microsoft.com/office/drawing/2014/main" id="{EE7A285F-EF22-4F6C-A52F-620C4A9F6E5F}"/>
               </a:ext>
             </a:extLst>
           </p:cNvPr>
@@ -22447,7 +22469,7 @@
           <p:cNvPr id="13" name="Text 11">
             <a:extLst xmlns:a="http://schemas.openxmlformats.org/drawingml/2006/main">
               <a:ext uri="{FF2B5EF4-FFF2-40B4-BE49-F238E27FC236}">
-                <a16:creationId xmlns:a16="http://schemas.microsoft.com/office/drawing/2014/main" id="{9FE73C95-C9EF-4EBA-B93D-662239771851}"/>
+                <a16:creationId xmlns:a16="http://schemas.microsoft.com/office/drawing/2014/main" id="{E3110B5B-4B4D-44BF-9490-8E5AA3E191C6}"/>
               </a:ext>
             </a:extLst>
           </p:cNvPr>
@@ -22492,7 +22514,7 @@
           <p:cNvPr id="14" name="Text 12">
             <a:extLst xmlns:a="http://schemas.openxmlformats.org/drawingml/2006/main">
               <a:ext uri="{FF2B5EF4-FFF2-40B4-BE49-F238E27FC236}">
-                <a16:creationId xmlns:a16="http://schemas.microsoft.com/office/drawing/2014/main" id="{78206E7C-DC2D-4DE6-B9E7-8DD2BA23319A}"/>
+                <a16:creationId xmlns:a16="http://schemas.microsoft.com/office/drawing/2014/main" id="{B6529097-9775-4A1B-BCBB-0E03342FDFB8}"/>
               </a:ext>
             </a:extLst>
           </p:cNvPr>
@@ -22540,7 +22562,7 @@
           <p:cNvPr id="15" name="Text 13">
             <a:extLst xmlns:a="http://schemas.openxmlformats.org/drawingml/2006/main">
               <a:ext uri="{FF2B5EF4-FFF2-40B4-BE49-F238E27FC236}">
-                <a16:creationId xmlns:a16="http://schemas.microsoft.com/office/drawing/2014/main" id="{EEA97670-11A8-45EA-87C1-FE41F6152A78}"/>
+                <a16:creationId xmlns:a16="http://schemas.microsoft.com/office/drawing/2014/main" id="{E73C4AC8-E5C7-4281-AE9C-99DA57ED74BC}"/>
               </a:ext>
             </a:extLst>
           </p:cNvPr>
@@ -22588,7 +22610,7 @@
           <p:cNvPr id="16" name="Shape 14">
             <a:extLst xmlns:a="http://schemas.openxmlformats.org/drawingml/2006/main">
               <a:ext uri="{FF2B5EF4-FFF2-40B4-BE49-F238E27FC236}">
-                <a16:creationId xmlns:a16="http://schemas.microsoft.com/office/drawing/2014/main" id="{66EB99D7-D37A-4562-BBCA-2707BAD2C955}"/>
+                <a16:creationId xmlns:a16="http://schemas.microsoft.com/office/drawing/2014/main" id="{09B90D5F-33D9-49A9-86ED-058E609C9DD5}"/>
               </a:ext>
             </a:extLst>
           </p:cNvPr>
@@ -22635,7 +22657,7 @@
           <p:cNvPr id="17" name="Shape 15">
             <a:extLst xmlns:a="http://schemas.openxmlformats.org/drawingml/2006/main">
               <a:ext uri="{FF2B5EF4-FFF2-40B4-BE49-F238E27FC236}">
-                <a16:creationId xmlns:a16="http://schemas.microsoft.com/office/drawing/2014/main" id="{0981754E-A6CD-46D5-897B-3402C3293909}"/>
+                <a16:creationId xmlns:a16="http://schemas.microsoft.com/office/drawing/2014/main" id="{D8D3289F-95F4-4CF9-BE76-362BCE27C8CD}"/>
               </a:ext>
             </a:extLst>
           </p:cNvPr>
@@ -22673,7 +22695,7 @@
           <p:cNvPr id="18" name="Text 16">
             <a:extLst xmlns:a="http://schemas.openxmlformats.org/drawingml/2006/main">
               <a:ext uri="{FF2B5EF4-FFF2-40B4-BE49-F238E27FC236}">
-                <a16:creationId xmlns:a16="http://schemas.microsoft.com/office/drawing/2014/main" id="{8FB6F049-4DE6-44A0-9F13-7AAD3F181A98}"/>
+                <a16:creationId xmlns:a16="http://schemas.microsoft.com/office/drawing/2014/main" id="{AEBE4766-91F0-4505-868E-312D91E60C76}"/>
               </a:ext>
             </a:extLst>
           </p:cNvPr>
@@ -22718,7 +22740,7 @@
           <p:cNvPr id="19" name="Text 17">
             <a:extLst xmlns:a="http://schemas.openxmlformats.org/drawingml/2006/main">
               <a:ext uri="{FF2B5EF4-FFF2-40B4-BE49-F238E27FC236}">
-                <a16:creationId xmlns:a16="http://schemas.microsoft.com/office/drawing/2014/main" id="{2CC8A5DF-BC51-42D1-955D-79DF9EF652D9}"/>
+                <a16:creationId xmlns:a16="http://schemas.microsoft.com/office/drawing/2014/main" id="{79894871-6C08-449C-AA29-EAECB3772C7F}"/>
               </a:ext>
             </a:extLst>
           </p:cNvPr>
@@ -22766,7 +22788,7 @@
           <p:cNvPr id="20" name="Text 18">
             <a:extLst xmlns:a="http://schemas.openxmlformats.org/drawingml/2006/main">
               <a:ext uri="{FF2B5EF4-FFF2-40B4-BE49-F238E27FC236}">
-                <a16:creationId xmlns:a16="http://schemas.microsoft.com/office/drawing/2014/main" id="{3F5A85E6-3701-4313-B807-28AB00E24C55}"/>
+                <a16:creationId xmlns:a16="http://schemas.microsoft.com/office/drawing/2014/main" id="{1CEEF0F4-4C6C-461B-96DF-C0BBCB423622}"/>
               </a:ext>
             </a:extLst>
           </p:cNvPr>
@@ -22814,7 +22836,7 @@
           <p:cNvPr id="21" name="Shape 19">
             <a:extLst xmlns:a="http://schemas.openxmlformats.org/drawingml/2006/main">
               <a:ext uri="{FF2B5EF4-FFF2-40B4-BE49-F238E27FC236}">
-                <a16:creationId xmlns:a16="http://schemas.microsoft.com/office/drawing/2014/main" id="{8D62DA20-BD4B-4B8F-B68C-95B305DFC224}"/>
+                <a16:creationId xmlns:a16="http://schemas.microsoft.com/office/drawing/2014/main" id="{9A8F9EAD-9096-46D7-9754-6EED070B2278}"/>
               </a:ext>
             </a:extLst>
           </p:cNvPr>
@@ -22861,7 +22883,7 @@
           <p:cNvPr id="22" name="Shape 20">
             <a:extLst xmlns:a="http://schemas.openxmlformats.org/drawingml/2006/main">
               <a:ext uri="{FF2B5EF4-FFF2-40B4-BE49-F238E27FC236}">
-                <a16:creationId xmlns:a16="http://schemas.microsoft.com/office/drawing/2014/main" id="{25DBDB07-6B17-45A5-BE34-04D4995EB968}"/>
+                <a16:creationId xmlns:a16="http://schemas.microsoft.com/office/drawing/2014/main" id="{166DE5C2-0A00-4898-86DC-1A0EDF2448A3}"/>
               </a:ext>
             </a:extLst>
           </p:cNvPr>
@@ -22899,7 +22921,7 @@
           <p:cNvPr id="23" name="Text 21">
             <a:extLst xmlns:a="http://schemas.openxmlformats.org/drawingml/2006/main">
               <a:ext uri="{FF2B5EF4-FFF2-40B4-BE49-F238E27FC236}">
-                <a16:creationId xmlns:a16="http://schemas.microsoft.com/office/drawing/2014/main" id="{AA121019-AD2D-4513-8DB1-9F9983919F69}"/>
+                <a16:creationId xmlns:a16="http://schemas.microsoft.com/office/drawing/2014/main" id="{491CDB2B-266D-4FCC-9B85-31BF0212DB0F}"/>
               </a:ext>
             </a:extLst>
           </p:cNvPr>
@@ -22944,7 +22966,7 @@
           <p:cNvPr id="24" name="Text 22">
             <a:extLst xmlns:a="http://schemas.openxmlformats.org/drawingml/2006/main">
               <a:ext uri="{FF2B5EF4-FFF2-40B4-BE49-F238E27FC236}">
-                <a16:creationId xmlns:a16="http://schemas.microsoft.com/office/drawing/2014/main" id="{522B9EB1-E24E-46FD-B8B6-5566620FC39A}"/>
+                <a16:creationId xmlns:a16="http://schemas.microsoft.com/office/drawing/2014/main" id="{78C6D54D-8BD7-45B9-BA24-89B8543B8725}"/>
               </a:ext>
             </a:extLst>
           </p:cNvPr>
@@ -22992,7 +23014,7 @@
           <p:cNvPr id="25" name="Text 23">
             <a:extLst xmlns:a="http://schemas.openxmlformats.org/drawingml/2006/main">
               <a:ext uri="{FF2B5EF4-FFF2-40B4-BE49-F238E27FC236}">
-                <a16:creationId xmlns:a16="http://schemas.microsoft.com/office/drawing/2014/main" id="{9B5A1247-5766-4C22-9249-C99FB6FB9A28}"/>
+                <a16:creationId xmlns:a16="http://schemas.microsoft.com/office/drawing/2014/main" id="{BD8BBC92-79E2-4DCA-AF0B-0B833A91AA35}"/>
               </a:ext>
             </a:extLst>
           </p:cNvPr>
@@ -23040,7 +23062,7 @@
           <p:cNvPr id="26" name="Shape 24">
             <a:extLst xmlns:a="http://schemas.openxmlformats.org/drawingml/2006/main">
               <a:ext uri="{FF2B5EF4-FFF2-40B4-BE49-F238E27FC236}">
-                <a16:creationId xmlns:a16="http://schemas.microsoft.com/office/drawing/2014/main" id="{6318A738-D241-4DB5-B741-AD4870477268}"/>
+                <a16:creationId xmlns:a16="http://schemas.microsoft.com/office/drawing/2014/main" id="{64CAF294-4C9F-4875-9099-DCF55FB65DCD}"/>
               </a:ext>
             </a:extLst>
           </p:cNvPr>
@@ -23087,7 +23109,7 @@
           <p:cNvPr id="27" name="Shape 25">
             <a:extLst xmlns:a="http://schemas.openxmlformats.org/drawingml/2006/main">
               <a:ext uri="{FF2B5EF4-FFF2-40B4-BE49-F238E27FC236}">
-                <a16:creationId xmlns:a16="http://schemas.microsoft.com/office/drawing/2014/main" id="{F61AD632-16ED-46F4-9E3C-BE841F8EC03B}"/>
+                <a16:creationId xmlns:a16="http://schemas.microsoft.com/office/drawing/2014/main" id="{8A28BD87-56A2-436A-BA6F-8C7AFF1D8472}"/>
               </a:ext>
             </a:extLst>
           </p:cNvPr>
@@ -23125,7 +23147,7 @@
           <p:cNvPr id="28" name="Text 26">
             <a:extLst xmlns:a="http://schemas.openxmlformats.org/drawingml/2006/main">
               <a:ext uri="{FF2B5EF4-FFF2-40B4-BE49-F238E27FC236}">
-                <a16:creationId xmlns:a16="http://schemas.microsoft.com/office/drawing/2014/main" id="{A65B11D1-BFF8-4121-9C62-05EE4EC800A4}"/>
+                <a16:creationId xmlns:a16="http://schemas.microsoft.com/office/drawing/2014/main" id="{1D264393-1C5A-4EAD-91BE-F62F0FBE4117}"/>
               </a:ext>
             </a:extLst>
           </p:cNvPr>
@@ -23170,7 +23192,7 @@
           <p:cNvPr id="29" name="Text 27">
             <a:extLst xmlns:a="http://schemas.openxmlformats.org/drawingml/2006/main">
               <a:ext uri="{FF2B5EF4-FFF2-40B4-BE49-F238E27FC236}">
-                <a16:creationId xmlns:a16="http://schemas.microsoft.com/office/drawing/2014/main" id="{EA6B9AD1-CC92-4D39-ABE3-D6C423062123}"/>
+                <a16:creationId xmlns:a16="http://schemas.microsoft.com/office/drawing/2014/main" id="{A21A40CA-ACB9-4041-873E-0397D288CE52}"/>
               </a:ext>
             </a:extLst>
           </p:cNvPr>
@@ -23218,7 +23240,7 @@
           <p:cNvPr id="30" name="Text 28">
             <a:extLst xmlns:a="http://schemas.openxmlformats.org/drawingml/2006/main">
               <a:ext uri="{FF2B5EF4-FFF2-40B4-BE49-F238E27FC236}">
-                <a16:creationId xmlns:a16="http://schemas.microsoft.com/office/drawing/2014/main" id="{53DAB653-DBF3-42DD-B479-18F60E9B7185}"/>
+                <a16:creationId xmlns:a16="http://schemas.microsoft.com/office/drawing/2014/main" id="{3F888D91-2C9D-424D-A3FB-569C1FC3CA11}"/>
               </a:ext>
             </a:extLst>
           </p:cNvPr>
@@ -23266,7 +23288,7 @@
           <p:cNvPr id="31" name="Shape 29">
             <a:extLst xmlns:a="http://schemas.openxmlformats.org/drawingml/2006/main">
               <a:ext uri="{FF2B5EF4-FFF2-40B4-BE49-F238E27FC236}">
-                <a16:creationId xmlns:a16="http://schemas.microsoft.com/office/drawing/2014/main" id="{C202DE46-DB98-489B-AE63-0AAD432B59B1}"/>
+                <a16:creationId xmlns:a16="http://schemas.microsoft.com/office/drawing/2014/main" id="{843722B8-41BC-4D8E-8E4A-9B04F7EE91F0}"/>
               </a:ext>
             </a:extLst>
           </p:cNvPr>
@@ -23313,7 +23335,7 @@
           <p:cNvPr id="32" name="Text 30">
             <a:extLst xmlns:a="http://schemas.openxmlformats.org/drawingml/2006/main">
               <a:ext uri="{FF2B5EF4-FFF2-40B4-BE49-F238E27FC236}">
-                <a16:creationId xmlns:a16="http://schemas.microsoft.com/office/drawing/2014/main" id="{8257EDFC-2132-42D8-9E21-5C31C41A64A1}"/>
+                <a16:creationId xmlns:a16="http://schemas.microsoft.com/office/drawing/2014/main" id="{A3197AD0-AC77-4266-B1D4-5857C8F95943}"/>
               </a:ext>
             </a:extLst>
           </p:cNvPr>
@@ -23358,7 +23380,7 @@
           <p:cNvPr id="33" name="Text 31">
             <a:extLst xmlns:a="http://schemas.openxmlformats.org/drawingml/2006/main">
               <a:ext uri="{FF2B5EF4-FFF2-40B4-BE49-F238E27FC236}">
-                <a16:creationId xmlns:a16="http://schemas.microsoft.com/office/drawing/2014/main" id="{7D538046-5D02-4FC3-9D4C-3C05F52F993D}"/>
+                <a16:creationId xmlns:a16="http://schemas.microsoft.com/office/drawing/2014/main" id="{19B37DD1-8A12-49DE-A1A5-3B78B62D13BB}"/>
               </a:ext>
             </a:extLst>
           </p:cNvPr>
@@ -23421,7 +23443,7 @@
                 <a:ea typeface="Calibri"/>
                 <a:cs typeface="Calibri"/>
               </a:rPr>
-              <a:t>Fair placement / GEPA has only six held-out cases</a:t>
+              <a:t>GCS / GEPA results hold at α=.10, not the registered .05</a:t>
             </a:r>
           </a:p>
           <a:p xmlns:a="http://schemas.openxmlformats.org/drawingml/2006/main">
@@ -23443,7 +23465,7 @@
                 <a:ea typeface="Calibri"/>
                 <a:cs typeface="Calibri"/>
               </a:rPr>
-              <a:t>AWO · Agent JIT · EvoC2F remain unexecuted</a:t>
+              <a:t>Fair placement / GEPA has only six held-out cases</a:t>
             </a:r>
           </a:p>
           <a:p xmlns:a="http://schemas.openxmlformats.org/drawingml/2006/main">
@@ -23465,7 +23487,29 @@
                 <a:ea typeface="Calibri"/>
                 <a:cs typeface="Calibri"/>
               </a:rPr>
-              <a:t>Discovery is costly; risk is artifact-specific</a:t>
+              <a:t>AWO · Agent JIT · EvoC2F remain unexecuted</a:t>
+            </a:r>
+          </a:p>
+          <a:p xmlns:a="http://schemas.openxmlformats.org/drawingml/2006/main">
+            <a:pPr marL="342900" indent="-342900">
+              <a:lnSpc>
+                <a:spcPct val="106000"/>
+              </a:lnSpc>
+              <a:spcAft>
+                <a:spcPts val="300"/>
+              </a:spcAft>
+              <a:buChar char="•"/>
+            </a:pPr>
+            <a:r>
+              <a:rPr sz="950">
+                <a:solidFill>
+                  <a:srgbClr val="2A4247"/>
+                </a:solidFill>
+                <a:latin typeface="Calibri"/>
+                <a:ea typeface="Calibri"/>
+                <a:cs typeface="Calibri"/>
+              </a:rPr>
+              <a:t>Break-even 181–411 episodes; part of the cost range is cache warmth</a:t>
             </a:r>
           </a:p>
         </p:txBody>
@@ -23473,7 +23517,7 @@
     </p:spTree>
     <p:extLst>
       <p:ext uri="{BB962C8B-B14F-4D97-AF65-F5344CB8AC3E}">
-        <p14:creationId xmlns:p14="http://schemas.microsoft.com/office/powerpoint/2010/main" val="1456158940"/>
+        <p14:creationId xmlns:p14="http://schemas.microsoft.com/office/powerpoint/2010/main" val="1557051848"/>
       </p:ext>
     </p:extLst>
   </p:cSld>
@@ -23504,7 +23548,7 @@
           <p:cNvPr id="2" name="Text 0">
             <a:extLst xmlns:a="http://schemas.openxmlformats.org/drawingml/2006/main">
               <a:ext uri="{FF2B5EF4-FFF2-40B4-BE49-F238E27FC236}">
-                <a16:creationId xmlns:a16="http://schemas.microsoft.com/office/drawing/2014/main" id="{5FB4712F-5230-4656-A9E8-36B75FE4D6CD}"/>
+                <a16:creationId xmlns:a16="http://schemas.microsoft.com/office/drawing/2014/main" id="{826B370F-363E-47DF-8867-4D89469BA848}"/>
               </a:ext>
             </a:extLst>
           </p:cNvPr>
@@ -23549,7 +23593,7 @@
           <p:cNvPr id="3" name="Text 1">
             <a:extLst xmlns:a="http://schemas.openxmlformats.org/drawingml/2006/main">
               <a:ext uri="{FF2B5EF4-FFF2-40B4-BE49-F238E27FC236}">
-                <a16:creationId xmlns:a16="http://schemas.microsoft.com/office/drawing/2014/main" id="{C6886FEC-884C-4B40-B3E0-CB6210E74258}"/>
+                <a16:creationId xmlns:a16="http://schemas.microsoft.com/office/drawing/2014/main" id="{65CC9964-6348-4851-AA21-0D8353B17AE8}"/>
               </a:ext>
             </a:extLst>
           </p:cNvPr>
@@ -23594,7 +23638,7 @@
           <p:cNvPr id="4" name="Shape 2">
             <a:extLst xmlns:a="http://schemas.openxmlformats.org/drawingml/2006/main">
               <a:ext uri="{FF2B5EF4-FFF2-40B4-BE49-F238E27FC236}">
-                <a16:creationId xmlns:a16="http://schemas.microsoft.com/office/drawing/2014/main" id="{50A1D5EE-C090-4B8F-A3CC-5BC7EC1B4126}"/>
+                <a16:creationId xmlns:a16="http://schemas.microsoft.com/office/drawing/2014/main" id="{F836C73E-6C82-403A-9EB0-F3F8D2DAA808}"/>
               </a:ext>
             </a:extLst>
           </p:cNvPr>
@@ -23634,7 +23678,7 @@
           <p:cNvPr id="5" name="Shape 3">
             <a:extLst xmlns:a="http://schemas.openxmlformats.org/drawingml/2006/main">
               <a:ext uri="{FF2B5EF4-FFF2-40B4-BE49-F238E27FC236}">
-                <a16:creationId xmlns:a16="http://schemas.microsoft.com/office/drawing/2014/main" id="{E418D7B6-4E18-4B32-88A0-0DC945DEE022}"/>
+                <a16:creationId xmlns:a16="http://schemas.microsoft.com/office/drawing/2014/main" id="{C0D24668-6789-4CF7-8100-E69F70C15422}"/>
               </a:ext>
             </a:extLst>
           </p:cNvPr>
@@ -23674,7 +23718,7 @@
           <p:cNvPr id="6" name="Text 4">
             <a:extLst xmlns:a="http://schemas.openxmlformats.org/drawingml/2006/main">
               <a:ext uri="{FF2B5EF4-FFF2-40B4-BE49-F238E27FC236}">
-                <a16:creationId xmlns:a16="http://schemas.microsoft.com/office/drawing/2014/main" id="{221E3EFB-29A8-4F85-825F-DD1E449C6F1B}"/>
+                <a16:creationId xmlns:a16="http://schemas.microsoft.com/office/drawing/2014/main" id="{45E863D1-4299-46EE-8DE1-7E6285F856E5}"/>
               </a:ext>
             </a:extLst>
           </p:cNvPr>
@@ -23719,7 +23763,7 @@
           <p:cNvPr id="7" name="Text 5">
             <a:extLst xmlns:a="http://schemas.openxmlformats.org/drawingml/2006/main">
               <a:ext uri="{FF2B5EF4-FFF2-40B4-BE49-F238E27FC236}">
-                <a16:creationId xmlns:a16="http://schemas.microsoft.com/office/drawing/2014/main" id="{3DEF5C89-330C-4EEB-9F79-53148D00F85E}"/>
+                <a16:creationId xmlns:a16="http://schemas.microsoft.com/office/drawing/2014/main" id="{60D63703-DAA5-43B0-837F-BAD5531EDE31}"/>
               </a:ext>
             </a:extLst>
           </p:cNvPr>
@@ -23764,7 +23808,7 @@
           <p:cNvPr id="8" name="Shape 6">
             <a:extLst xmlns:a="http://schemas.openxmlformats.org/drawingml/2006/main">
               <a:ext uri="{FF2B5EF4-FFF2-40B4-BE49-F238E27FC236}">
-                <a16:creationId xmlns:a16="http://schemas.microsoft.com/office/drawing/2014/main" id="{A07DC257-081F-4A86-8594-E5438A5E2AAA}"/>
+                <a16:creationId xmlns:a16="http://schemas.microsoft.com/office/drawing/2014/main" id="{C8940D96-B8C5-476A-9AA1-67EE701E03FB}"/>
               </a:ext>
             </a:extLst>
           </p:cNvPr>
@@ -23802,7 +23846,7 @@
           <p:cNvPr id="9" name="Text 7">
             <a:extLst xmlns:a="http://schemas.openxmlformats.org/drawingml/2006/main">
               <a:ext uri="{FF2B5EF4-FFF2-40B4-BE49-F238E27FC236}">
-                <a16:creationId xmlns:a16="http://schemas.microsoft.com/office/drawing/2014/main" id="{F359064C-D56C-4676-BA12-5A756707C3BA}"/>
+                <a16:creationId xmlns:a16="http://schemas.microsoft.com/office/drawing/2014/main" id="{B708CE1A-5C76-447E-B8D1-A624A423EB66}"/>
               </a:ext>
             </a:extLst>
           </p:cNvPr>
@@ -23847,7 +23891,7 @@
           <p:cNvPr id="10" name="Text 8">
             <a:extLst xmlns:a="http://schemas.openxmlformats.org/drawingml/2006/main">
               <a:ext uri="{FF2B5EF4-FFF2-40B4-BE49-F238E27FC236}">
-                <a16:creationId xmlns:a16="http://schemas.microsoft.com/office/drawing/2014/main" id="{2E2E96E3-68A3-4DCB-B6F6-601E2BE97FA0}"/>
+                <a16:creationId xmlns:a16="http://schemas.microsoft.com/office/drawing/2014/main" id="{06AEDDBB-277A-4C83-93A0-F1438F65AB7D}"/>
               </a:ext>
             </a:extLst>
           </p:cNvPr>
@@ -23895,7 +23939,7 @@
           <p:cNvPr id="11" name="Text 9">
             <a:extLst xmlns:a="http://schemas.openxmlformats.org/drawingml/2006/main">
               <a:ext uri="{FF2B5EF4-FFF2-40B4-BE49-F238E27FC236}">
-                <a16:creationId xmlns:a16="http://schemas.microsoft.com/office/drawing/2014/main" id="{E6B5BCC4-423A-43BD-9221-87FB43A6C0A1}"/>
+                <a16:creationId xmlns:a16="http://schemas.microsoft.com/office/drawing/2014/main" id="{B32AA8A9-EBDC-45A7-AD9C-B8078B66B527}"/>
               </a:ext>
             </a:extLst>
           </p:cNvPr>
@@ -23943,7 +23987,7 @@
           <p:cNvPr id="12" name="Shape 10">
             <a:extLst xmlns:a="http://schemas.openxmlformats.org/drawingml/2006/main">
               <a:ext uri="{FF2B5EF4-FFF2-40B4-BE49-F238E27FC236}">
-                <a16:creationId xmlns:a16="http://schemas.microsoft.com/office/drawing/2014/main" id="{7A925616-EC9B-4A6C-86FB-A1FA20607155}"/>
+                <a16:creationId xmlns:a16="http://schemas.microsoft.com/office/drawing/2014/main" id="{03E76A61-8706-455E-BE38-0DBDC20F3030}"/>
               </a:ext>
             </a:extLst>
           </p:cNvPr>
@@ -23981,7 +24025,7 @@
           <p:cNvPr id="13" name="Text 11">
             <a:extLst xmlns:a="http://schemas.openxmlformats.org/drawingml/2006/main">
               <a:ext uri="{FF2B5EF4-FFF2-40B4-BE49-F238E27FC236}">
-                <a16:creationId xmlns:a16="http://schemas.microsoft.com/office/drawing/2014/main" id="{42CB2DCC-09D2-4E1A-9069-0E734AD34E60}"/>
+                <a16:creationId xmlns:a16="http://schemas.microsoft.com/office/drawing/2014/main" id="{A4A53C96-8C0E-4F10-9F91-43DE89A2D02F}"/>
               </a:ext>
             </a:extLst>
           </p:cNvPr>
@@ -24026,7 +24070,7 @@
           <p:cNvPr id="14" name="Text 12">
             <a:extLst xmlns:a="http://schemas.openxmlformats.org/drawingml/2006/main">
               <a:ext uri="{FF2B5EF4-FFF2-40B4-BE49-F238E27FC236}">
-                <a16:creationId xmlns:a16="http://schemas.microsoft.com/office/drawing/2014/main" id="{F93AD070-6D64-40B3-8008-A777D4F5B742}"/>
+                <a16:creationId xmlns:a16="http://schemas.microsoft.com/office/drawing/2014/main" id="{61A0776A-DA36-4730-8486-8B095A033000}"/>
               </a:ext>
             </a:extLst>
           </p:cNvPr>
@@ -24074,7 +24118,7 @@
           <p:cNvPr id="15" name="Text 13">
             <a:extLst xmlns:a="http://schemas.openxmlformats.org/drawingml/2006/main">
               <a:ext uri="{FF2B5EF4-FFF2-40B4-BE49-F238E27FC236}">
-                <a16:creationId xmlns:a16="http://schemas.microsoft.com/office/drawing/2014/main" id="{6B6DF907-881C-4972-9A7C-D279C3C4EF19}"/>
+                <a16:creationId xmlns:a16="http://schemas.microsoft.com/office/drawing/2014/main" id="{D7D79267-D55C-4C6D-B1C3-21FBC3691AF1}"/>
               </a:ext>
             </a:extLst>
           </p:cNvPr>
@@ -24122,7 +24166,7 @@
           <p:cNvPr id="16" name="Shape 14">
             <a:extLst xmlns:a="http://schemas.openxmlformats.org/drawingml/2006/main">
               <a:ext uri="{FF2B5EF4-FFF2-40B4-BE49-F238E27FC236}">
-                <a16:creationId xmlns:a16="http://schemas.microsoft.com/office/drawing/2014/main" id="{66B4504F-26F8-4D7D-B559-9CAE582975AE}"/>
+                <a16:creationId xmlns:a16="http://schemas.microsoft.com/office/drawing/2014/main" id="{126A3CE9-394B-4A50-8EF7-25B8A89B0090}"/>
               </a:ext>
             </a:extLst>
           </p:cNvPr>
@@ -24160,7 +24204,7 @@
           <p:cNvPr id="17" name="Text 15">
             <a:extLst xmlns:a="http://schemas.openxmlformats.org/drawingml/2006/main">
               <a:ext uri="{FF2B5EF4-FFF2-40B4-BE49-F238E27FC236}">
-                <a16:creationId xmlns:a16="http://schemas.microsoft.com/office/drawing/2014/main" id="{544FDEEC-6CCD-453E-AD35-2EEDB1945250}"/>
+                <a16:creationId xmlns:a16="http://schemas.microsoft.com/office/drawing/2014/main" id="{1961BEF0-24DE-4935-A926-0EE7E8A132D8}"/>
               </a:ext>
             </a:extLst>
           </p:cNvPr>
@@ -24205,7 +24249,7 @@
           <p:cNvPr id="18" name="Text 16">
             <a:extLst xmlns:a="http://schemas.openxmlformats.org/drawingml/2006/main">
               <a:ext uri="{FF2B5EF4-FFF2-40B4-BE49-F238E27FC236}">
-                <a16:creationId xmlns:a16="http://schemas.microsoft.com/office/drawing/2014/main" id="{1B568BBC-11C8-4851-B222-E8D33CBE577F}"/>
+                <a16:creationId xmlns:a16="http://schemas.microsoft.com/office/drawing/2014/main" id="{DFA4CE4C-26CA-4F4D-A39B-345C2D6FD1CD}"/>
               </a:ext>
             </a:extLst>
           </p:cNvPr>
@@ -24253,7 +24297,7 @@
           <p:cNvPr id="19" name="Text 17">
             <a:extLst xmlns:a="http://schemas.openxmlformats.org/drawingml/2006/main">
               <a:ext uri="{FF2B5EF4-FFF2-40B4-BE49-F238E27FC236}">
-                <a16:creationId xmlns:a16="http://schemas.microsoft.com/office/drawing/2014/main" id="{FCCD5285-65A3-44F5-AC45-A3A47A78177A}"/>
+                <a16:creationId xmlns:a16="http://schemas.microsoft.com/office/drawing/2014/main" id="{7077E7A0-51BB-41AF-A268-1468065F3CA0}"/>
               </a:ext>
             </a:extLst>
           </p:cNvPr>
@@ -24301,7 +24345,7 @@
           <p:cNvPr id="20" name="Shape 18">
             <a:extLst xmlns:a="http://schemas.openxmlformats.org/drawingml/2006/main">
               <a:ext uri="{FF2B5EF4-FFF2-40B4-BE49-F238E27FC236}">
-                <a16:creationId xmlns:a16="http://schemas.microsoft.com/office/drawing/2014/main" id="{2E05827A-D818-4FB6-8900-77BF892AEF19}"/>
+                <a16:creationId xmlns:a16="http://schemas.microsoft.com/office/drawing/2014/main" id="{319577E4-9A6A-403A-97FF-0182FB9260ED}"/>
               </a:ext>
             </a:extLst>
           </p:cNvPr>
@@ -24339,7 +24383,7 @@
           <p:cNvPr id="21" name="Text 19">
             <a:extLst xmlns:a="http://schemas.openxmlformats.org/drawingml/2006/main">
               <a:ext uri="{FF2B5EF4-FFF2-40B4-BE49-F238E27FC236}">
-                <a16:creationId xmlns:a16="http://schemas.microsoft.com/office/drawing/2014/main" id="{F87831E4-252B-4671-B9BF-CD126F66419A}"/>
+                <a16:creationId xmlns:a16="http://schemas.microsoft.com/office/drawing/2014/main" id="{EDBBEFC0-C6B5-4719-93C6-899C57FDDDC9}"/>
               </a:ext>
             </a:extLst>
           </p:cNvPr>
@@ -24384,7 +24428,7 @@
           <p:cNvPr id="22" name="Text 20">
             <a:extLst xmlns:a="http://schemas.openxmlformats.org/drawingml/2006/main">
               <a:ext uri="{FF2B5EF4-FFF2-40B4-BE49-F238E27FC236}">
-                <a16:creationId xmlns:a16="http://schemas.microsoft.com/office/drawing/2014/main" id="{F4BB75ED-B7DB-4576-86B8-2A35E4410B74}"/>
+                <a16:creationId xmlns:a16="http://schemas.microsoft.com/office/drawing/2014/main" id="{294A87B6-9AB9-498A-9E15-96CD619D584B}"/>
               </a:ext>
             </a:extLst>
           </p:cNvPr>
@@ -24432,7 +24476,7 @@
           <p:cNvPr id="23" name="Text 21">
             <a:extLst xmlns:a="http://schemas.openxmlformats.org/drawingml/2006/main">
               <a:ext uri="{FF2B5EF4-FFF2-40B4-BE49-F238E27FC236}">
-                <a16:creationId xmlns:a16="http://schemas.microsoft.com/office/drawing/2014/main" id="{D98F356F-16B8-40D3-A191-599FE6B94100}"/>
+                <a16:creationId xmlns:a16="http://schemas.microsoft.com/office/drawing/2014/main" id="{82CAC90F-D137-4C3F-996B-1682BD995ED2}"/>
               </a:ext>
             </a:extLst>
           </p:cNvPr>
@@ -24480,7 +24524,7 @@
           <p:cNvPr id="24" name="Text 22">
             <a:extLst xmlns:a="http://schemas.openxmlformats.org/drawingml/2006/main">
               <a:ext uri="{FF2B5EF4-FFF2-40B4-BE49-F238E27FC236}">
-                <a16:creationId xmlns:a16="http://schemas.microsoft.com/office/drawing/2014/main" id="{B5E7B106-3F7E-4422-86F2-8363113BB3DD}"/>
+                <a16:creationId xmlns:a16="http://schemas.microsoft.com/office/drawing/2014/main" id="{44C465B5-1DF8-4F77-B099-B017F50C7AE0}"/>
               </a:ext>
             </a:extLst>
           </p:cNvPr>
@@ -24523,7 +24567,7 @@
     </p:spTree>
     <p:extLst>
       <p:ext uri="{BB962C8B-B14F-4D97-AF65-F5344CB8AC3E}">
-        <p14:creationId xmlns:p14="http://schemas.microsoft.com/office/powerpoint/2010/main" val="796660312"/>
+        <p14:creationId xmlns:p14="http://schemas.microsoft.com/office/powerpoint/2010/main" val="1289244142"/>
       </p:ext>
     </p:extLst>
   </p:cSld>
@@ -24554,7 +24598,7 @@
           <p:cNvPr id="2" name="Text 0">
             <a:extLst xmlns:a="http://schemas.openxmlformats.org/drawingml/2006/main">
               <a:ext uri="{FF2B5EF4-FFF2-40B4-BE49-F238E27FC236}">
-                <a16:creationId xmlns:a16="http://schemas.microsoft.com/office/drawing/2014/main" id="{C9DA7E9A-53A6-468C-B889-09D72FC2B062}"/>
+                <a16:creationId xmlns:a16="http://schemas.microsoft.com/office/drawing/2014/main" id="{36AF3448-9D1C-4E9D-AB67-ADCBF5F402BE}"/>
               </a:ext>
             </a:extLst>
           </p:cNvPr>
@@ -24599,7 +24643,7 @@
           <p:cNvPr id="3" name="Text 1">
             <a:extLst xmlns:a="http://schemas.openxmlformats.org/drawingml/2006/main">
               <a:ext uri="{FF2B5EF4-FFF2-40B4-BE49-F238E27FC236}">
-                <a16:creationId xmlns:a16="http://schemas.microsoft.com/office/drawing/2014/main" id="{5BEEE096-DCE0-4F5B-A48E-74D4D42C61BE}"/>
+                <a16:creationId xmlns:a16="http://schemas.microsoft.com/office/drawing/2014/main" id="{AE20E276-3249-440B-BC74-15FC9878CF3D}"/>
               </a:ext>
             </a:extLst>
           </p:cNvPr>
@@ -24644,7 +24688,7 @@
           <p:cNvPr id="4" name="Text 2">
             <a:extLst xmlns:a="http://schemas.openxmlformats.org/drawingml/2006/main">
               <a:ext uri="{FF2B5EF4-FFF2-40B4-BE49-F238E27FC236}">
-                <a16:creationId xmlns:a16="http://schemas.microsoft.com/office/drawing/2014/main" id="{5919AF9A-6C92-4A00-90AA-8C0AA626B2D3}"/>
+                <a16:creationId xmlns:a16="http://schemas.microsoft.com/office/drawing/2014/main" id="{C1315068-D942-4884-9783-33F6965DFDFE}"/>
               </a:ext>
             </a:extLst>
           </p:cNvPr>
@@ -24689,7 +24733,7 @@
           <p:cNvPr id="5" name="Text 3">
             <a:extLst xmlns:a="http://schemas.openxmlformats.org/drawingml/2006/main">
               <a:ext uri="{FF2B5EF4-FFF2-40B4-BE49-F238E27FC236}">
-                <a16:creationId xmlns:a16="http://schemas.microsoft.com/office/drawing/2014/main" id="{6CC39F15-57DB-4A01-98ED-56966B64F87F}"/>
+                <a16:creationId xmlns:a16="http://schemas.microsoft.com/office/drawing/2014/main" id="{EF311AB1-99E3-4E2A-818B-577CB6CF188C}"/>
               </a:ext>
             </a:extLst>
           </p:cNvPr>
@@ -24734,7 +24778,7 @@
           <p:cNvPr id="6" name="Text 4">
             <a:extLst xmlns:a="http://schemas.openxmlformats.org/drawingml/2006/main">
               <a:ext uri="{FF2B5EF4-FFF2-40B4-BE49-F238E27FC236}">
-                <a16:creationId xmlns:a16="http://schemas.microsoft.com/office/drawing/2014/main" id="{B8B3C99E-E4EB-4491-A0F0-FC53027FCADC}"/>
+                <a16:creationId xmlns:a16="http://schemas.microsoft.com/office/drawing/2014/main" id="{8CAE1848-9CDE-47FB-A3D8-4388DE88A56F}"/>
               </a:ext>
             </a:extLst>
           </p:cNvPr>
@@ -24829,7 +24873,7 @@
           <p:cNvPr id="7" name="Shape 5">
             <a:extLst xmlns:a="http://schemas.openxmlformats.org/drawingml/2006/main">
               <a:ext uri="{FF2B5EF4-FFF2-40B4-BE49-F238E27FC236}">
-                <a16:creationId xmlns:a16="http://schemas.microsoft.com/office/drawing/2014/main" id="{1B02EAE7-BEB2-475E-B19E-97949AD81B08}"/>
+                <a16:creationId xmlns:a16="http://schemas.microsoft.com/office/drawing/2014/main" id="{41FC3521-B687-4388-B39D-A9AE554F9CF8}"/>
               </a:ext>
             </a:extLst>
           </p:cNvPr>
@@ -24876,7 +24920,7 @@
           <p:cNvPr id="8" name="Text 6">
             <a:extLst xmlns:a="http://schemas.openxmlformats.org/drawingml/2006/main">
               <a:ext uri="{FF2B5EF4-FFF2-40B4-BE49-F238E27FC236}">
-                <a16:creationId xmlns:a16="http://schemas.microsoft.com/office/drawing/2014/main" id="{D526267F-8876-49E0-8442-1B755ECE9DF9}"/>
+                <a16:creationId xmlns:a16="http://schemas.microsoft.com/office/drawing/2014/main" id="{FA2B8E3F-517F-4D38-8D15-F7A499C071DC}"/>
               </a:ext>
             </a:extLst>
           </p:cNvPr>
@@ -24921,7 +24965,7 @@
           <p:cNvPr id="9" name="Shape 7">
             <a:extLst xmlns:a="http://schemas.openxmlformats.org/drawingml/2006/main">
               <a:ext uri="{FF2B5EF4-FFF2-40B4-BE49-F238E27FC236}">
-                <a16:creationId xmlns:a16="http://schemas.microsoft.com/office/drawing/2014/main" id="{151D20E6-E78C-4DD3-980D-9BDC4C7E2FA1}"/>
+                <a16:creationId xmlns:a16="http://schemas.microsoft.com/office/drawing/2014/main" id="{466D98B1-6BD7-4BDE-8D61-205547E80D92}"/>
               </a:ext>
             </a:extLst>
           </p:cNvPr>
@@ -24968,7 +25012,7 @@
           <p:cNvPr id="10" name="Text 8">
             <a:extLst xmlns:a="http://schemas.openxmlformats.org/drawingml/2006/main">
               <a:ext uri="{FF2B5EF4-FFF2-40B4-BE49-F238E27FC236}">
-                <a16:creationId xmlns:a16="http://schemas.microsoft.com/office/drawing/2014/main" id="{AC1D6EE3-FE63-435B-9FA7-9688D258198E}"/>
+                <a16:creationId xmlns:a16="http://schemas.microsoft.com/office/drawing/2014/main" id="{123DF31E-2DE4-4069-A652-17A30589F237}"/>
               </a:ext>
             </a:extLst>
           </p:cNvPr>
@@ -25013,7 +25057,7 @@
           <p:cNvPr id="11" name="Shape 9">
             <a:extLst xmlns:a="http://schemas.openxmlformats.org/drawingml/2006/main">
               <a:ext uri="{FF2B5EF4-FFF2-40B4-BE49-F238E27FC236}">
-                <a16:creationId xmlns:a16="http://schemas.microsoft.com/office/drawing/2014/main" id="{0D6BE682-90AB-42A8-8E44-539B5703D805}"/>
+                <a16:creationId xmlns:a16="http://schemas.microsoft.com/office/drawing/2014/main" id="{0B55B38B-B243-4EF7-B48C-DF75833B190B}"/>
               </a:ext>
             </a:extLst>
           </p:cNvPr>
@@ -25051,7 +25095,7 @@
           <p:cNvPr id="12" name="Text 10">
             <a:extLst xmlns:a="http://schemas.openxmlformats.org/drawingml/2006/main">
               <a:ext uri="{FF2B5EF4-FFF2-40B4-BE49-F238E27FC236}">
-                <a16:creationId xmlns:a16="http://schemas.microsoft.com/office/drawing/2014/main" id="{AE3327A2-CED3-4A53-8FCF-31033F2A3B1A}"/>
+                <a16:creationId xmlns:a16="http://schemas.microsoft.com/office/drawing/2014/main" id="{89684D3D-44E2-4367-A330-465764D2AAA5}"/>
               </a:ext>
             </a:extLst>
           </p:cNvPr>
@@ -25096,7 +25140,7 @@
           <p:cNvPr id="13" name="Text 11">
             <a:extLst xmlns:a="http://schemas.openxmlformats.org/drawingml/2006/main">
               <a:ext uri="{FF2B5EF4-FFF2-40B4-BE49-F238E27FC236}">
-                <a16:creationId xmlns:a16="http://schemas.microsoft.com/office/drawing/2014/main" id="{7EA209C3-67D0-4699-B448-95FD87D5C04A}"/>
+                <a16:creationId xmlns:a16="http://schemas.microsoft.com/office/drawing/2014/main" id="{BFDBFE6E-5996-45D6-917D-CB4A01F022F9}"/>
               </a:ext>
             </a:extLst>
           </p:cNvPr>
@@ -25141,7 +25185,7 @@
           <p:cNvPr id="14" name="Text 12">
             <a:extLst xmlns:a="http://schemas.openxmlformats.org/drawingml/2006/main">
               <a:ext uri="{FF2B5EF4-FFF2-40B4-BE49-F238E27FC236}">
-                <a16:creationId xmlns:a16="http://schemas.microsoft.com/office/drawing/2014/main" id="{1A2A874B-9940-42ED-90B6-A7F47A88C881}"/>
+                <a16:creationId xmlns:a16="http://schemas.microsoft.com/office/drawing/2014/main" id="{36C8723D-995C-4D66-9C72-650D73C49A70}"/>
               </a:ext>
             </a:extLst>
           </p:cNvPr>
@@ -25186,7 +25230,7 @@
           <p:cNvPr id="15" name="Shape 13">
             <a:extLst xmlns:a="http://schemas.openxmlformats.org/drawingml/2006/main">
               <a:ext uri="{FF2B5EF4-FFF2-40B4-BE49-F238E27FC236}">
-                <a16:creationId xmlns:a16="http://schemas.microsoft.com/office/drawing/2014/main" id="{EC53D808-C4BA-40DB-8CEB-5C1EE29EE45B}"/>
+                <a16:creationId xmlns:a16="http://schemas.microsoft.com/office/drawing/2014/main" id="{1AF948D2-68EB-4969-B6AF-D08EBFC2DC2E}"/>
               </a:ext>
             </a:extLst>
           </p:cNvPr>
@@ -25224,7 +25268,7 @@
           <p:cNvPr id="16" name="Text 14">
             <a:extLst xmlns:a="http://schemas.openxmlformats.org/drawingml/2006/main">
               <a:ext uri="{FF2B5EF4-FFF2-40B4-BE49-F238E27FC236}">
-                <a16:creationId xmlns:a16="http://schemas.microsoft.com/office/drawing/2014/main" id="{A948D813-E22C-4919-9359-39E72C20D3AF}"/>
+                <a16:creationId xmlns:a16="http://schemas.microsoft.com/office/drawing/2014/main" id="{7E176299-BE96-4753-9138-FFA9AD82C3F4}"/>
               </a:ext>
             </a:extLst>
           </p:cNvPr>
@@ -25269,7 +25313,7 @@
           <p:cNvPr id="17" name="Text 15">
             <a:extLst xmlns:a="http://schemas.openxmlformats.org/drawingml/2006/main">
               <a:ext uri="{FF2B5EF4-FFF2-40B4-BE49-F238E27FC236}">
-                <a16:creationId xmlns:a16="http://schemas.microsoft.com/office/drawing/2014/main" id="{C9A65D0E-EA7B-4A66-B09A-B2AE250006C4}"/>
+                <a16:creationId xmlns:a16="http://schemas.microsoft.com/office/drawing/2014/main" id="{2D8C9BCF-5806-4F72-9CCA-4459CB1DE984}"/>
               </a:ext>
             </a:extLst>
           </p:cNvPr>
@@ -25314,7 +25358,7 @@
           <p:cNvPr id="18" name="Text 16">
             <a:extLst xmlns:a="http://schemas.openxmlformats.org/drawingml/2006/main">
               <a:ext uri="{FF2B5EF4-FFF2-40B4-BE49-F238E27FC236}">
-                <a16:creationId xmlns:a16="http://schemas.microsoft.com/office/drawing/2014/main" id="{7BBFD22F-7255-4C9B-B0B9-F3915B09949D}"/>
+                <a16:creationId xmlns:a16="http://schemas.microsoft.com/office/drawing/2014/main" id="{79879027-D642-490C-B273-171185A2958E}"/>
               </a:ext>
             </a:extLst>
           </p:cNvPr>
@@ -25359,7 +25403,7 @@
           <p:cNvPr id="19" name="Shape 17">
             <a:extLst xmlns:a="http://schemas.openxmlformats.org/drawingml/2006/main">
               <a:ext uri="{FF2B5EF4-FFF2-40B4-BE49-F238E27FC236}">
-                <a16:creationId xmlns:a16="http://schemas.microsoft.com/office/drawing/2014/main" id="{8DA79002-BA43-4466-BDCC-C5917C72E773}"/>
+                <a16:creationId xmlns:a16="http://schemas.microsoft.com/office/drawing/2014/main" id="{78AF11A8-0C22-49B2-BA17-A47A6A10F258}"/>
               </a:ext>
             </a:extLst>
           </p:cNvPr>
@@ -25397,7 +25441,7 @@
           <p:cNvPr id="20" name="Text 18">
             <a:extLst xmlns:a="http://schemas.openxmlformats.org/drawingml/2006/main">
               <a:ext uri="{FF2B5EF4-FFF2-40B4-BE49-F238E27FC236}">
-                <a16:creationId xmlns:a16="http://schemas.microsoft.com/office/drawing/2014/main" id="{FC629A5A-5587-4C2F-97E5-09CED538F17D}"/>
+                <a16:creationId xmlns:a16="http://schemas.microsoft.com/office/drawing/2014/main" id="{1973CCE7-EC98-46A2-88F4-53F425622079}"/>
               </a:ext>
             </a:extLst>
           </p:cNvPr>
@@ -25442,7 +25486,7 @@
           <p:cNvPr id="21" name="Text 19">
             <a:extLst xmlns:a="http://schemas.openxmlformats.org/drawingml/2006/main">
               <a:ext uri="{FF2B5EF4-FFF2-40B4-BE49-F238E27FC236}">
-                <a16:creationId xmlns:a16="http://schemas.microsoft.com/office/drawing/2014/main" id="{4E4D4049-A2BA-4138-B48E-7DA86E8FC02D}"/>
+                <a16:creationId xmlns:a16="http://schemas.microsoft.com/office/drawing/2014/main" id="{6EA6FC77-C48C-4ADF-AB30-1E781EA826BF}"/>
               </a:ext>
             </a:extLst>
           </p:cNvPr>
@@ -25487,7 +25531,7 @@
           <p:cNvPr id="22" name="Text 20">
             <a:extLst xmlns:a="http://schemas.openxmlformats.org/drawingml/2006/main">
               <a:ext uri="{FF2B5EF4-FFF2-40B4-BE49-F238E27FC236}">
-                <a16:creationId xmlns:a16="http://schemas.microsoft.com/office/drawing/2014/main" id="{61F39EB0-4394-43CE-B535-68DBCE4F21B1}"/>
+                <a16:creationId xmlns:a16="http://schemas.microsoft.com/office/drawing/2014/main" id="{3D475265-992B-4880-8851-52827B717AAF}"/>
               </a:ext>
             </a:extLst>
           </p:cNvPr>
@@ -25532,7 +25576,7 @@
           <p:cNvPr id="23" name="Shape 21">
             <a:extLst xmlns:a="http://schemas.openxmlformats.org/drawingml/2006/main">
               <a:ext uri="{FF2B5EF4-FFF2-40B4-BE49-F238E27FC236}">
-                <a16:creationId xmlns:a16="http://schemas.microsoft.com/office/drawing/2014/main" id="{BBAF5722-A608-40DA-B5C2-2F7B6391BFC0}"/>
+                <a16:creationId xmlns:a16="http://schemas.microsoft.com/office/drawing/2014/main" id="{344C64CC-3DF8-436E-BF45-DBC92051C5CC}"/>
               </a:ext>
             </a:extLst>
           </p:cNvPr>
@@ -25570,7 +25614,7 @@
           <p:cNvPr id="24" name="Text 22">
             <a:extLst xmlns:a="http://schemas.openxmlformats.org/drawingml/2006/main">
               <a:ext uri="{FF2B5EF4-FFF2-40B4-BE49-F238E27FC236}">
-                <a16:creationId xmlns:a16="http://schemas.microsoft.com/office/drawing/2014/main" id="{59F1FB07-71A4-4956-862E-3DF6FF1917A0}"/>
+                <a16:creationId xmlns:a16="http://schemas.microsoft.com/office/drawing/2014/main" id="{D9B9F2EE-22EE-45E6-AC65-80CA7B881717}"/>
               </a:ext>
             </a:extLst>
           </p:cNvPr>
@@ -25615,7 +25659,7 @@
           <p:cNvPr id="25" name="Text 23">
             <a:extLst xmlns:a="http://schemas.openxmlformats.org/drawingml/2006/main">
               <a:ext uri="{FF2B5EF4-FFF2-40B4-BE49-F238E27FC236}">
-                <a16:creationId xmlns:a16="http://schemas.microsoft.com/office/drawing/2014/main" id="{B00EEC28-E4A6-4DC7-9D73-7132F34FDD1F}"/>
+                <a16:creationId xmlns:a16="http://schemas.microsoft.com/office/drawing/2014/main" id="{7A38B241-F8CF-48F8-9F4F-5197CC2F40CC}"/>
               </a:ext>
             </a:extLst>
           </p:cNvPr>
@@ -25660,7 +25704,7 @@
           <p:cNvPr id="26" name="Text 24">
             <a:extLst xmlns:a="http://schemas.openxmlformats.org/drawingml/2006/main">
               <a:ext uri="{FF2B5EF4-FFF2-40B4-BE49-F238E27FC236}">
-                <a16:creationId xmlns:a16="http://schemas.microsoft.com/office/drawing/2014/main" id="{452077F4-E5BF-49E9-BC87-3C8F91A2EE4F}"/>
+                <a16:creationId xmlns:a16="http://schemas.microsoft.com/office/drawing/2014/main" id="{21A473E9-8676-439B-B601-54549B0BB78A}"/>
               </a:ext>
             </a:extLst>
           </p:cNvPr>
@@ -25705,7 +25749,7 @@
           <p:cNvPr id="27" name="Shape 25">
             <a:extLst xmlns:a="http://schemas.openxmlformats.org/drawingml/2006/main">
               <a:ext uri="{FF2B5EF4-FFF2-40B4-BE49-F238E27FC236}">
-                <a16:creationId xmlns:a16="http://schemas.microsoft.com/office/drawing/2014/main" id="{CC6ECE56-2B1B-434F-9EF5-478C6FF6ED6D}"/>
+                <a16:creationId xmlns:a16="http://schemas.microsoft.com/office/drawing/2014/main" id="{597953E1-77F2-4FF7-9B52-D4798CB75710}"/>
               </a:ext>
             </a:extLst>
           </p:cNvPr>
@@ -25743,7 +25787,7 @@
           <p:cNvPr id="28" name="Text 26">
             <a:extLst xmlns:a="http://schemas.openxmlformats.org/drawingml/2006/main">
               <a:ext uri="{FF2B5EF4-FFF2-40B4-BE49-F238E27FC236}">
-                <a16:creationId xmlns:a16="http://schemas.microsoft.com/office/drawing/2014/main" id="{61E6BED9-B786-433B-B6F7-B78D4F28EE38}"/>
+                <a16:creationId xmlns:a16="http://schemas.microsoft.com/office/drawing/2014/main" id="{809A1686-2727-4ECC-98EC-376816AF571B}"/>
               </a:ext>
             </a:extLst>
           </p:cNvPr>
@@ -25788,7 +25832,7 @@
           <p:cNvPr id="29" name="Text 27">
             <a:extLst xmlns:a="http://schemas.openxmlformats.org/drawingml/2006/main">
               <a:ext uri="{FF2B5EF4-FFF2-40B4-BE49-F238E27FC236}">
-                <a16:creationId xmlns:a16="http://schemas.microsoft.com/office/drawing/2014/main" id="{35A0FDA6-C883-46FC-8433-DB61BD001C57}"/>
+                <a16:creationId xmlns:a16="http://schemas.microsoft.com/office/drawing/2014/main" id="{1BE58250-F177-46D3-98F8-22983012C696}"/>
               </a:ext>
             </a:extLst>
           </p:cNvPr>
@@ -25833,7 +25877,7 @@
           <p:cNvPr id="30" name="Text 28">
             <a:extLst xmlns:a="http://schemas.openxmlformats.org/drawingml/2006/main">
               <a:ext uri="{FF2B5EF4-FFF2-40B4-BE49-F238E27FC236}">
-                <a16:creationId xmlns:a16="http://schemas.microsoft.com/office/drawing/2014/main" id="{0855A937-BE6D-4B9C-9305-3A9CB38CE347}"/>
+                <a16:creationId xmlns:a16="http://schemas.microsoft.com/office/drawing/2014/main" id="{8FF8428D-A347-4D23-8CEB-06755335AD9E}"/>
               </a:ext>
             </a:extLst>
           </p:cNvPr>
@@ -25878,7 +25922,7 @@
           <p:cNvPr id="31" name="Shape 29">
             <a:extLst xmlns:a="http://schemas.openxmlformats.org/drawingml/2006/main">
               <a:ext uri="{FF2B5EF4-FFF2-40B4-BE49-F238E27FC236}">
-                <a16:creationId xmlns:a16="http://schemas.microsoft.com/office/drawing/2014/main" id="{9D28739C-8C24-4DDC-AB47-F34789CD0730}"/>
+                <a16:creationId xmlns:a16="http://schemas.microsoft.com/office/drawing/2014/main" id="{8BB25EAB-6788-4EE6-B8F5-776F0B74EADB}"/>
               </a:ext>
             </a:extLst>
           </p:cNvPr>
@@ -25916,7 +25960,7 @@
           <p:cNvPr id="32" name="Text 30">
             <a:extLst xmlns:a="http://schemas.openxmlformats.org/drawingml/2006/main">
               <a:ext uri="{FF2B5EF4-FFF2-40B4-BE49-F238E27FC236}">
-                <a16:creationId xmlns:a16="http://schemas.microsoft.com/office/drawing/2014/main" id="{64423555-A2C1-4A09-B918-64A70F16F021}"/>
+                <a16:creationId xmlns:a16="http://schemas.microsoft.com/office/drawing/2014/main" id="{FA365978-7EA2-44FC-A698-9505D91539F0}"/>
               </a:ext>
             </a:extLst>
           </p:cNvPr>
@@ -25961,7 +26005,7 @@
           <p:cNvPr id="33" name="Text 31">
             <a:extLst xmlns:a="http://schemas.openxmlformats.org/drawingml/2006/main">
               <a:ext uri="{FF2B5EF4-FFF2-40B4-BE49-F238E27FC236}">
-                <a16:creationId xmlns:a16="http://schemas.microsoft.com/office/drawing/2014/main" id="{8B2BFF72-4195-4647-9BE7-1C1250DBB378}"/>
+                <a16:creationId xmlns:a16="http://schemas.microsoft.com/office/drawing/2014/main" id="{228698B0-8811-4894-84D8-6B0DEE949A9A}"/>
               </a:ext>
             </a:extLst>
           </p:cNvPr>
@@ -26006,7 +26050,7 @@
           <p:cNvPr id="34" name="Text 32">
             <a:extLst xmlns:a="http://schemas.openxmlformats.org/drawingml/2006/main">
               <a:ext uri="{FF2B5EF4-FFF2-40B4-BE49-F238E27FC236}">
-                <a16:creationId xmlns:a16="http://schemas.microsoft.com/office/drawing/2014/main" id="{EDCA3563-9B8D-4CA0-BC7B-1D5728AE1915}"/>
+                <a16:creationId xmlns:a16="http://schemas.microsoft.com/office/drawing/2014/main" id="{4CDE18E5-A478-4FF1-930F-EFB3F77FE72C}"/>
               </a:ext>
             </a:extLst>
           </p:cNvPr>
@@ -26051,7 +26095,7 @@
           <p:cNvPr id="35" name="Shape 33">
             <a:extLst xmlns:a="http://schemas.openxmlformats.org/drawingml/2006/main">
               <a:ext uri="{FF2B5EF4-FFF2-40B4-BE49-F238E27FC236}">
-                <a16:creationId xmlns:a16="http://schemas.microsoft.com/office/drawing/2014/main" id="{7A9CBC3D-3089-43F6-9608-A57B8C6D4B49}"/>
+                <a16:creationId xmlns:a16="http://schemas.microsoft.com/office/drawing/2014/main" id="{6C859DAD-36BC-4CB0-9294-74C887620015}"/>
               </a:ext>
             </a:extLst>
           </p:cNvPr>
@@ -26089,7 +26133,7 @@
           <p:cNvPr id="36" name="Text 34">
             <a:extLst xmlns:a="http://schemas.openxmlformats.org/drawingml/2006/main">
               <a:ext uri="{FF2B5EF4-FFF2-40B4-BE49-F238E27FC236}">
-                <a16:creationId xmlns:a16="http://schemas.microsoft.com/office/drawing/2014/main" id="{D60C6C5C-66EF-47F6-B021-BBF6AF681C4A}"/>
+                <a16:creationId xmlns:a16="http://schemas.microsoft.com/office/drawing/2014/main" id="{AE4AB8E7-3BBA-45FE-847C-BF9CD1CC26BF}"/>
               </a:ext>
             </a:extLst>
           </p:cNvPr>
@@ -26134,7 +26178,7 @@
           <p:cNvPr id="37" name="Text 35">
             <a:extLst xmlns:a="http://schemas.openxmlformats.org/drawingml/2006/main">
               <a:ext uri="{FF2B5EF4-FFF2-40B4-BE49-F238E27FC236}">
-                <a16:creationId xmlns:a16="http://schemas.microsoft.com/office/drawing/2014/main" id="{40A57AEF-088D-4ED2-825F-F80317EAA8EA}"/>
+                <a16:creationId xmlns:a16="http://schemas.microsoft.com/office/drawing/2014/main" id="{278C9B5C-AEFB-4BFA-B9F6-651FA37DE1ED}"/>
               </a:ext>
             </a:extLst>
           </p:cNvPr>
@@ -26179,7 +26223,7 @@
           <p:cNvPr id="38" name="Text 36">
             <a:extLst xmlns:a="http://schemas.openxmlformats.org/drawingml/2006/main">
               <a:ext uri="{FF2B5EF4-FFF2-40B4-BE49-F238E27FC236}">
-                <a16:creationId xmlns:a16="http://schemas.microsoft.com/office/drawing/2014/main" id="{BEBB9200-0B46-45DD-90D1-360A3251D029}"/>
+                <a16:creationId xmlns:a16="http://schemas.microsoft.com/office/drawing/2014/main" id="{DE92498A-A8B9-4854-8198-E8587FF1E4C0}"/>
               </a:ext>
             </a:extLst>
           </p:cNvPr>
@@ -26224,7 +26268,7 @@
           <p:cNvPr id="39" name="Shape 37">
             <a:extLst xmlns:a="http://schemas.openxmlformats.org/drawingml/2006/main">
               <a:ext uri="{FF2B5EF4-FFF2-40B4-BE49-F238E27FC236}">
-                <a16:creationId xmlns:a16="http://schemas.microsoft.com/office/drawing/2014/main" id="{736B0B2F-147F-4223-852A-EBE464D8AE24}"/>
+                <a16:creationId xmlns:a16="http://schemas.microsoft.com/office/drawing/2014/main" id="{871D6144-8062-4A85-975C-C49B50692102}"/>
               </a:ext>
             </a:extLst>
           </p:cNvPr>
@@ -26260,7 +26304,7 @@
           <p:cNvPr id="40" name="Text 38">
             <a:extLst xmlns:a="http://schemas.openxmlformats.org/drawingml/2006/main">
               <a:ext uri="{FF2B5EF4-FFF2-40B4-BE49-F238E27FC236}">
-                <a16:creationId xmlns:a16="http://schemas.microsoft.com/office/drawing/2014/main" id="{04A234AC-3C1A-406E-A3B8-10403DCE1CBF}"/>
+                <a16:creationId xmlns:a16="http://schemas.microsoft.com/office/drawing/2014/main" id="{F618B81E-175A-428D-906B-7122D30397D0}"/>
               </a:ext>
             </a:extLst>
           </p:cNvPr>
@@ -26305,7 +26349,7 @@
           <p:cNvPr id="41" name="Text 39">
             <a:extLst xmlns:a="http://schemas.openxmlformats.org/drawingml/2006/main">
               <a:ext uri="{FF2B5EF4-FFF2-40B4-BE49-F238E27FC236}">
-                <a16:creationId xmlns:a16="http://schemas.microsoft.com/office/drawing/2014/main" id="{32D0AD5A-F17D-40AC-825E-E8482B7ED4C4}"/>
+                <a16:creationId xmlns:a16="http://schemas.microsoft.com/office/drawing/2014/main" id="{8A2B2EA9-7DD3-4FCE-85DD-9D799A001BA1}"/>
               </a:ext>
             </a:extLst>
           </p:cNvPr>
@@ -26350,7 +26394,7 @@
           <p:cNvPr id="42" name="Text 40">
             <a:extLst xmlns:a="http://schemas.openxmlformats.org/drawingml/2006/main">
               <a:ext uri="{FF2B5EF4-FFF2-40B4-BE49-F238E27FC236}">
-                <a16:creationId xmlns:a16="http://schemas.microsoft.com/office/drawing/2014/main" id="{F160DFD5-0F9D-4BBC-91C1-2663078BDCAA}"/>
+                <a16:creationId xmlns:a16="http://schemas.microsoft.com/office/drawing/2014/main" id="{5ACDAC87-381E-4944-A4F2-E3F3A47D2F3D}"/>
               </a:ext>
             </a:extLst>
           </p:cNvPr>
@@ -26395,7 +26439,7 @@
           <p:cNvPr id="43" name="Text 41">
             <a:extLst xmlns:a="http://schemas.openxmlformats.org/drawingml/2006/main">
               <a:ext uri="{FF2B5EF4-FFF2-40B4-BE49-F238E27FC236}">
-                <a16:creationId xmlns:a16="http://schemas.microsoft.com/office/drawing/2014/main" id="{5A1C2AEF-2788-47CD-9172-F302BCC2F992}"/>
+                <a16:creationId xmlns:a16="http://schemas.microsoft.com/office/drawing/2014/main" id="{887BEE60-8E8E-4173-ABDE-3716655E5F50}"/>
               </a:ext>
             </a:extLst>
           </p:cNvPr>
@@ -26440,7 +26484,7 @@
           <p:cNvPr id="44" name="Text 42">
             <a:extLst xmlns:a="http://schemas.openxmlformats.org/drawingml/2006/main">
               <a:ext uri="{FF2B5EF4-FFF2-40B4-BE49-F238E27FC236}">
-                <a16:creationId xmlns:a16="http://schemas.microsoft.com/office/drawing/2014/main" id="{A25FDF68-7BBB-4082-BA86-D64E491528FA}"/>
+                <a16:creationId xmlns:a16="http://schemas.microsoft.com/office/drawing/2014/main" id="{3F95B0EB-4842-49D4-8145-B411AD98C6EB}"/>
               </a:ext>
             </a:extLst>
           </p:cNvPr>
@@ -26485,7 +26529,7 @@
           <p:cNvPr id="45" name="Text 43">
             <a:extLst xmlns:a="http://schemas.openxmlformats.org/drawingml/2006/main">
               <a:ext uri="{FF2B5EF4-FFF2-40B4-BE49-F238E27FC236}">
-                <a16:creationId xmlns:a16="http://schemas.microsoft.com/office/drawing/2014/main" id="{12BC8C8A-979B-4656-96C5-998A7CFDBF08}"/>
+                <a16:creationId xmlns:a16="http://schemas.microsoft.com/office/drawing/2014/main" id="{4B60C8F7-9933-4AF9-9959-8508C9E7832D}"/>
               </a:ext>
             </a:extLst>
           </p:cNvPr>
@@ -26530,7 +26574,7 @@
           <p:cNvPr id="46" name="Text 44">
             <a:extLst xmlns:a="http://schemas.openxmlformats.org/drawingml/2006/main">
               <a:ext uri="{FF2B5EF4-FFF2-40B4-BE49-F238E27FC236}">
-                <a16:creationId xmlns:a16="http://schemas.microsoft.com/office/drawing/2014/main" id="{F854D337-975D-4C47-B7D8-7C69CDE8B17D}"/>
+                <a16:creationId xmlns:a16="http://schemas.microsoft.com/office/drawing/2014/main" id="{62D39816-AAE7-4443-945D-68255C28C834}"/>
               </a:ext>
             </a:extLst>
           </p:cNvPr>
@@ -26575,7 +26619,7 @@
           <p:cNvPr id="47" name="Text 45">
             <a:extLst xmlns:a="http://schemas.openxmlformats.org/drawingml/2006/main">
               <a:ext uri="{FF2B5EF4-FFF2-40B4-BE49-F238E27FC236}">
-                <a16:creationId xmlns:a16="http://schemas.microsoft.com/office/drawing/2014/main" id="{8A3CD2FA-D638-4845-8F60-2C3A45223801}"/>
+                <a16:creationId xmlns:a16="http://schemas.microsoft.com/office/drawing/2014/main" id="{35D7E541-2EE7-4294-880A-7861216D8994}"/>
               </a:ext>
             </a:extLst>
           </p:cNvPr>
@@ -26620,7 +26664,7 @@
           <p:cNvPr id="48" name="Text 46">
             <a:extLst xmlns:a="http://schemas.openxmlformats.org/drawingml/2006/main">
               <a:ext uri="{FF2B5EF4-FFF2-40B4-BE49-F238E27FC236}">
-                <a16:creationId xmlns:a16="http://schemas.microsoft.com/office/drawing/2014/main" id="{B235AA2B-06F0-4A37-800F-399B1D039F97}"/>
+                <a16:creationId xmlns:a16="http://schemas.microsoft.com/office/drawing/2014/main" id="{8E308A33-451D-49C7-8769-1B1C8629F89D}"/>
               </a:ext>
             </a:extLst>
           </p:cNvPr>
@@ -26663,7 +26707,7 @@
     </p:spTree>
     <p:extLst>
       <p:ext uri="{BB962C8B-B14F-4D97-AF65-F5344CB8AC3E}">
-        <p14:creationId xmlns:p14="http://schemas.microsoft.com/office/powerpoint/2010/main" val="1285815076"/>
+        <p14:creationId xmlns:p14="http://schemas.microsoft.com/office/powerpoint/2010/main" val="182425806"/>
       </p:ext>
     </p:extLst>
   </p:cSld>
@@ -26694,7 +26738,7 @@
           <p:cNvPr id="2" name="Text 0">
             <a:extLst xmlns:a="http://schemas.openxmlformats.org/drawingml/2006/main">
               <a:ext uri="{FF2B5EF4-FFF2-40B4-BE49-F238E27FC236}">
-                <a16:creationId xmlns:a16="http://schemas.microsoft.com/office/drawing/2014/main" id="{EAD86BB8-A928-47E1-9FD8-F486DA841EE9}"/>
+                <a16:creationId xmlns:a16="http://schemas.microsoft.com/office/drawing/2014/main" id="{2E297D43-1CF0-44D0-889A-2DF13C2C6656}"/>
               </a:ext>
             </a:extLst>
           </p:cNvPr>
@@ -26739,7 +26783,7 @@
           <p:cNvPr id="3" name="Text 1">
             <a:extLst xmlns:a="http://schemas.openxmlformats.org/drawingml/2006/main">
               <a:ext uri="{FF2B5EF4-FFF2-40B4-BE49-F238E27FC236}">
-                <a16:creationId xmlns:a16="http://schemas.microsoft.com/office/drawing/2014/main" id="{ADB68237-8E1D-410B-A7A1-C06F639D9061}"/>
+                <a16:creationId xmlns:a16="http://schemas.microsoft.com/office/drawing/2014/main" id="{54B39850-040F-4598-8805-BAD39476F5CD}"/>
               </a:ext>
             </a:extLst>
           </p:cNvPr>
@@ -26784,7 +26828,7 @@
           <p:cNvPr id="4" name="Text 2">
             <a:extLst xmlns:a="http://schemas.openxmlformats.org/drawingml/2006/main">
               <a:ext uri="{FF2B5EF4-FFF2-40B4-BE49-F238E27FC236}">
-                <a16:creationId xmlns:a16="http://schemas.microsoft.com/office/drawing/2014/main" id="{3AC25D7A-453B-4D39-9142-078D0E376ADC}"/>
+                <a16:creationId xmlns:a16="http://schemas.microsoft.com/office/drawing/2014/main" id="{DDA50451-75D4-46FA-8217-6744CC2BF192}"/>
               </a:ext>
             </a:extLst>
           </p:cNvPr>
@@ -26829,7 +26873,7 @@
           <p:cNvPr id="5" name="Text 3">
             <a:extLst xmlns:a="http://schemas.openxmlformats.org/drawingml/2006/main">
               <a:ext uri="{FF2B5EF4-FFF2-40B4-BE49-F238E27FC236}">
-                <a16:creationId xmlns:a16="http://schemas.microsoft.com/office/drawing/2014/main" id="{4E3F348D-5160-43D4-96DF-06831B35290F}"/>
+                <a16:creationId xmlns:a16="http://schemas.microsoft.com/office/drawing/2014/main" id="{69F4269C-E352-46AC-ADB6-E4D83F090E8F}"/>
               </a:ext>
             </a:extLst>
           </p:cNvPr>
@@ -26874,7 +26918,7 @@
           <p:cNvPr id="6" name="Shape 4">
             <a:extLst xmlns:a="http://schemas.openxmlformats.org/drawingml/2006/main">
               <a:ext uri="{FF2B5EF4-FFF2-40B4-BE49-F238E27FC236}">
-                <a16:creationId xmlns:a16="http://schemas.microsoft.com/office/drawing/2014/main" id="{1087CF72-CADD-4FF5-AE96-3DD83B77EAF4}"/>
+                <a16:creationId xmlns:a16="http://schemas.microsoft.com/office/drawing/2014/main" id="{5DF89634-3920-424A-A5BE-2C234472F21A}"/>
               </a:ext>
             </a:extLst>
           </p:cNvPr>
@@ -26921,7 +26965,7 @@
           <p:cNvPr id="7" name="Shape 5">
             <a:extLst xmlns:a="http://schemas.openxmlformats.org/drawingml/2006/main">
               <a:ext uri="{FF2B5EF4-FFF2-40B4-BE49-F238E27FC236}">
-                <a16:creationId xmlns:a16="http://schemas.microsoft.com/office/drawing/2014/main" id="{CC38824C-D0CE-42C1-8ABC-E12260E5826C}"/>
+                <a16:creationId xmlns:a16="http://schemas.microsoft.com/office/drawing/2014/main" id="{DB9B9608-DCE4-4915-ABD0-608DFBD2CAC0}"/>
               </a:ext>
             </a:extLst>
           </p:cNvPr>
@@ -26959,7 +27003,7 @@
           <p:cNvPr id="8" name="Text 6">
             <a:extLst xmlns:a="http://schemas.openxmlformats.org/drawingml/2006/main">
               <a:ext uri="{FF2B5EF4-FFF2-40B4-BE49-F238E27FC236}">
-                <a16:creationId xmlns:a16="http://schemas.microsoft.com/office/drawing/2014/main" id="{78E5C98B-FFC8-4E06-A8E2-45297BA3DA31}"/>
+                <a16:creationId xmlns:a16="http://schemas.microsoft.com/office/drawing/2014/main" id="{BA627C36-E9E1-4324-9BE3-FF20C39C9DA2}"/>
               </a:ext>
             </a:extLst>
           </p:cNvPr>
@@ -27004,7 +27048,7 @@
           <p:cNvPr id="9" name="Text 7">
             <a:extLst xmlns:a="http://schemas.openxmlformats.org/drawingml/2006/main">
               <a:ext uri="{FF2B5EF4-FFF2-40B4-BE49-F238E27FC236}">
-                <a16:creationId xmlns:a16="http://schemas.microsoft.com/office/drawing/2014/main" id="{E39C5D58-B007-4ACA-A61A-7E0039900E9C}"/>
+                <a16:creationId xmlns:a16="http://schemas.microsoft.com/office/drawing/2014/main" id="{A446BA60-7D7A-4C32-A353-469F6A9BDCD4}"/>
               </a:ext>
             </a:extLst>
           </p:cNvPr>
@@ -27049,7 +27093,7 @@
           <p:cNvPr id="10" name="Text 8">
             <a:extLst xmlns:a="http://schemas.openxmlformats.org/drawingml/2006/main">
               <a:ext uri="{FF2B5EF4-FFF2-40B4-BE49-F238E27FC236}">
-                <a16:creationId xmlns:a16="http://schemas.microsoft.com/office/drawing/2014/main" id="{229074B2-9D66-46FF-AB05-462972B10B6A}"/>
+                <a16:creationId xmlns:a16="http://schemas.microsoft.com/office/drawing/2014/main" id="{8EBFD511-7BD9-42B5-AE5B-813EB4D06BA1}"/>
               </a:ext>
             </a:extLst>
           </p:cNvPr>
@@ -27097,7 +27141,7 @@
           <p:cNvPr id="11" name="Shape 9">
             <a:extLst xmlns:a="http://schemas.openxmlformats.org/drawingml/2006/main">
               <a:ext uri="{FF2B5EF4-FFF2-40B4-BE49-F238E27FC236}">
-                <a16:creationId xmlns:a16="http://schemas.microsoft.com/office/drawing/2014/main" id="{D48AFEF8-AF8C-4208-86F5-AD14188A8BB4}"/>
+                <a16:creationId xmlns:a16="http://schemas.microsoft.com/office/drawing/2014/main" id="{B47241FF-3680-4451-8167-2E6A46290738}"/>
               </a:ext>
             </a:extLst>
           </p:cNvPr>
@@ -27144,7 +27188,7 @@
           <p:cNvPr id="12" name="Shape 10">
             <a:extLst xmlns:a="http://schemas.openxmlformats.org/drawingml/2006/main">
               <a:ext uri="{FF2B5EF4-FFF2-40B4-BE49-F238E27FC236}">
-                <a16:creationId xmlns:a16="http://schemas.microsoft.com/office/drawing/2014/main" id="{748A67D1-F6FB-4089-98A2-4CBA7E1C6829}"/>
+                <a16:creationId xmlns:a16="http://schemas.microsoft.com/office/drawing/2014/main" id="{646552CB-9093-4FA1-9E91-B158B6511934}"/>
               </a:ext>
             </a:extLst>
           </p:cNvPr>
@@ -27182,7 +27226,7 @@
           <p:cNvPr id="13" name="Text 11">
             <a:extLst xmlns:a="http://schemas.openxmlformats.org/drawingml/2006/main">
               <a:ext uri="{FF2B5EF4-FFF2-40B4-BE49-F238E27FC236}">
-                <a16:creationId xmlns:a16="http://schemas.microsoft.com/office/drawing/2014/main" id="{1DE739D0-8D4F-4CA0-AAC1-0FDF3772FC90}"/>
+                <a16:creationId xmlns:a16="http://schemas.microsoft.com/office/drawing/2014/main" id="{FD858A4B-CBAB-4BD6-B0F2-74763C8DC9C4}"/>
               </a:ext>
             </a:extLst>
           </p:cNvPr>
@@ -27227,7 +27271,7 @@
           <p:cNvPr id="14" name="Text 12">
             <a:extLst xmlns:a="http://schemas.openxmlformats.org/drawingml/2006/main">
               <a:ext uri="{FF2B5EF4-FFF2-40B4-BE49-F238E27FC236}">
-                <a16:creationId xmlns:a16="http://schemas.microsoft.com/office/drawing/2014/main" id="{E6F52145-6301-4977-BB21-701E0D409893}"/>
+                <a16:creationId xmlns:a16="http://schemas.microsoft.com/office/drawing/2014/main" id="{5424F725-DE35-4747-B63D-F7A90A9E328F}"/>
               </a:ext>
             </a:extLst>
           </p:cNvPr>
@@ -27272,7 +27316,7 @@
           <p:cNvPr id="15" name="Text 13">
             <a:extLst xmlns:a="http://schemas.openxmlformats.org/drawingml/2006/main">
               <a:ext uri="{FF2B5EF4-FFF2-40B4-BE49-F238E27FC236}">
-                <a16:creationId xmlns:a16="http://schemas.microsoft.com/office/drawing/2014/main" id="{AC388DFA-B767-44C1-8B4A-B676146178D7}"/>
+                <a16:creationId xmlns:a16="http://schemas.microsoft.com/office/drawing/2014/main" id="{50A692D7-526F-46FF-9A36-772E5678DA24}"/>
               </a:ext>
             </a:extLst>
           </p:cNvPr>
@@ -27320,7 +27364,7 @@
           <p:cNvPr id="16" name="Shape 14">
             <a:extLst xmlns:a="http://schemas.openxmlformats.org/drawingml/2006/main">
               <a:ext uri="{FF2B5EF4-FFF2-40B4-BE49-F238E27FC236}">
-                <a16:creationId xmlns:a16="http://schemas.microsoft.com/office/drawing/2014/main" id="{65065943-5C19-410C-AE99-5545666295E5}"/>
+                <a16:creationId xmlns:a16="http://schemas.microsoft.com/office/drawing/2014/main" id="{027F0ECB-F669-4BBC-9500-B33534375091}"/>
               </a:ext>
             </a:extLst>
           </p:cNvPr>
@@ -27367,7 +27411,7 @@
           <p:cNvPr id="17" name="Shape 15">
             <a:extLst xmlns:a="http://schemas.openxmlformats.org/drawingml/2006/main">
               <a:ext uri="{FF2B5EF4-FFF2-40B4-BE49-F238E27FC236}">
-                <a16:creationId xmlns:a16="http://schemas.microsoft.com/office/drawing/2014/main" id="{23833885-043C-4410-809E-E884FDC24EB8}"/>
+                <a16:creationId xmlns:a16="http://schemas.microsoft.com/office/drawing/2014/main" id="{FA4C99EC-1669-4216-B128-7F10CCEC2768}"/>
               </a:ext>
             </a:extLst>
           </p:cNvPr>
@@ -27405,7 +27449,7 @@
           <p:cNvPr id="18" name="Text 16">
             <a:extLst xmlns:a="http://schemas.openxmlformats.org/drawingml/2006/main">
               <a:ext uri="{FF2B5EF4-FFF2-40B4-BE49-F238E27FC236}">
-                <a16:creationId xmlns:a16="http://schemas.microsoft.com/office/drawing/2014/main" id="{7F02D83E-76EC-4D8F-9C7D-27E125C03990}"/>
+                <a16:creationId xmlns:a16="http://schemas.microsoft.com/office/drawing/2014/main" id="{A350BBEF-6DB6-433A-9A25-547CA0A6E8D1}"/>
               </a:ext>
             </a:extLst>
           </p:cNvPr>
@@ -27450,7 +27494,7 @@
           <p:cNvPr id="19" name="Text 17">
             <a:extLst xmlns:a="http://schemas.openxmlformats.org/drawingml/2006/main">
               <a:ext uri="{FF2B5EF4-FFF2-40B4-BE49-F238E27FC236}">
-                <a16:creationId xmlns:a16="http://schemas.microsoft.com/office/drawing/2014/main" id="{5BC2B584-9EB1-46D0-B63A-6239D861E186}"/>
+                <a16:creationId xmlns:a16="http://schemas.microsoft.com/office/drawing/2014/main" id="{EAA5369F-873F-4E18-BDA6-FE15337B390D}"/>
               </a:ext>
             </a:extLst>
           </p:cNvPr>
@@ -27495,7 +27539,7 @@
           <p:cNvPr id="20" name="Text 18">
             <a:extLst xmlns:a="http://schemas.openxmlformats.org/drawingml/2006/main">
               <a:ext uri="{FF2B5EF4-FFF2-40B4-BE49-F238E27FC236}">
-                <a16:creationId xmlns:a16="http://schemas.microsoft.com/office/drawing/2014/main" id="{34ECC6B5-058F-4941-B844-FA82C997F002}"/>
+                <a16:creationId xmlns:a16="http://schemas.microsoft.com/office/drawing/2014/main" id="{A2621029-0697-4CF9-A653-9C7E21AF1690}"/>
               </a:ext>
             </a:extLst>
           </p:cNvPr>
@@ -27543,7 +27587,7 @@
           <p:cNvPr id="21" name="Shape 19">
             <a:extLst xmlns:a="http://schemas.openxmlformats.org/drawingml/2006/main">
               <a:ext uri="{FF2B5EF4-FFF2-40B4-BE49-F238E27FC236}">
-                <a16:creationId xmlns:a16="http://schemas.microsoft.com/office/drawing/2014/main" id="{BD2F8A71-C3B4-46DF-8FC8-4790FC3F5B4A}"/>
+                <a16:creationId xmlns:a16="http://schemas.microsoft.com/office/drawing/2014/main" id="{FC8C6891-88B7-44EE-A60B-C3E6645D2295}"/>
               </a:ext>
             </a:extLst>
           </p:cNvPr>
@@ -27590,7 +27634,7 @@
           <p:cNvPr id="22" name="Shape 20">
             <a:extLst xmlns:a="http://schemas.openxmlformats.org/drawingml/2006/main">
               <a:ext uri="{FF2B5EF4-FFF2-40B4-BE49-F238E27FC236}">
-                <a16:creationId xmlns:a16="http://schemas.microsoft.com/office/drawing/2014/main" id="{B87C6622-3F5A-403F-B191-52D9061D1452}"/>
+                <a16:creationId xmlns:a16="http://schemas.microsoft.com/office/drawing/2014/main" id="{3763AAAE-CDDF-45AC-AD11-EFEE8C59BA0E}"/>
               </a:ext>
             </a:extLst>
           </p:cNvPr>
@@ -27628,7 +27672,7 @@
           <p:cNvPr id="23" name="Text 21">
             <a:extLst xmlns:a="http://schemas.openxmlformats.org/drawingml/2006/main">
               <a:ext uri="{FF2B5EF4-FFF2-40B4-BE49-F238E27FC236}">
-                <a16:creationId xmlns:a16="http://schemas.microsoft.com/office/drawing/2014/main" id="{4F72AB5C-39C9-41A2-BE04-8C55F7D6C2A7}"/>
+                <a16:creationId xmlns:a16="http://schemas.microsoft.com/office/drawing/2014/main" id="{892C6B72-0DFF-4E08-BB29-EE5A229215E3}"/>
               </a:ext>
             </a:extLst>
           </p:cNvPr>
@@ -27673,7 +27717,7 @@
           <p:cNvPr id="24" name="Text 22">
             <a:extLst xmlns:a="http://schemas.openxmlformats.org/drawingml/2006/main">
               <a:ext uri="{FF2B5EF4-FFF2-40B4-BE49-F238E27FC236}">
-                <a16:creationId xmlns:a16="http://schemas.microsoft.com/office/drawing/2014/main" id="{EA422D2E-C140-4368-90A0-AC8B198CD889}"/>
+                <a16:creationId xmlns:a16="http://schemas.microsoft.com/office/drawing/2014/main" id="{D6850297-D567-4B0D-8C19-6417650545BF}"/>
               </a:ext>
             </a:extLst>
           </p:cNvPr>
@@ -27718,7 +27762,7 @@
           <p:cNvPr id="25" name="Text 23">
             <a:extLst xmlns:a="http://schemas.openxmlformats.org/drawingml/2006/main">
               <a:ext uri="{FF2B5EF4-FFF2-40B4-BE49-F238E27FC236}">
-                <a16:creationId xmlns:a16="http://schemas.microsoft.com/office/drawing/2014/main" id="{7B720A3B-9A61-4567-AC17-173AAB46A16A}"/>
+                <a16:creationId xmlns:a16="http://schemas.microsoft.com/office/drawing/2014/main" id="{FA5227F1-E23C-44C8-B574-42FFF55E9A1E}"/>
               </a:ext>
             </a:extLst>
           </p:cNvPr>
@@ -27766,7 +27810,7 @@
           <p:cNvPr id="26" name="Shape 24">
             <a:extLst xmlns:a="http://schemas.openxmlformats.org/drawingml/2006/main">
               <a:ext uri="{FF2B5EF4-FFF2-40B4-BE49-F238E27FC236}">
-                <a16:creationId xmlns:a16="http://schemas.microsoft.com/office/drawing/2014/main" id="{6266EE77-EA99-4114-987B-8DF145C77DC2}"/>
+                <a16:creationId xmlns:a16="http://schemas.microsoft.com/office/drawing/2014/main" id="{85DCB299-E345-435E-804C-2C959B613903}"/>
               </a:ext>
             </a:extLst>
           </p:cNvPr>
@@ -27813,7 +27857,7 @@
           <p:cNvPr id="27" name="Text 25">
             <a:extLst xmlns:a="http://schemas.openxmlformats.org/drawingml/2006/main">
               <a:ext uri="{FF2B5EF4-FFF2-40B4-BE49-F238E27FC236}">
-                <a16:creationId xmlns:a16="http://schemas.microsoft.com/office/drawing/2014/main" id="{8263CA02-728A-4F14-A647-044DD8FCA8BA}"/>
+                <a16:creationId xmlns:a16="http://schemas.microsoft.com/office/drawing/2014/main" id="{F469D7E6-BEDC-4363-887F-D85E921B1ADC}"/>
               </a:ext>
             </a:extLst>
           </p:cNvPr>
@@ -27870,7 +27914,7 @@
     </p:spTree>
     <p:extLst>
       <p:ext uri="{BB962C8B-B14F-4D97-AF65-F5344CB8AC3E}">
-        <p14:creationId xmlns:p14="http://schemas.microsoft.com/office/powerpoint/2010/main" val="683825646"/>
+        <p14:creationId xmlns:p14="http://schemas.microsoft.com/office/powerpoint/2010/main" val="1450926348"/>
       </p:ext>
     </p:extLst>
   </p:cSld>
@@ -27901,7 +27945,7 @@
           <p:cNvPr id="2" name="Text 0">
             <a:extLst xmlns:a="http://schemas.openxmlformats.org/drawingml/2006/main">
               <a:ext uri="{FF2B5EF4-FFF2-40B4-BE49-F238E27FC236}">
-                <a16:creationId xmlns:a16="http://schemas.microsoft.com/office/drawing/2014/main" id="{72D95AFB-8AE6-4466-8949-3615173B1118}"/>
+                <a16:creationId xmlns:a16="http://schemas.microsoft.com/office/drawing/2014/main" id="{FE09B0BD-1FE8-4BBB-8518-82E3F2C8A8D1}"/>
               </a:ext>
             </a:extLst>
           </p:cNvPr>
@@ -27946,7 +27990,7 @@
           <p:cNvPr id="3" name="Text 1">
             <a:extLst xmlns:a="http://schemas.openxmlformats.org/drawingml/2006/main">
               <a:ext uri="{FF2B5EF4-FFF2-40B4-BE49-F238E27FC236}">
-                <a16:creationId xmlns:a16="http://schemas.microsoft.com/office/drawing/2014/main" id="{1A06241F-0A2B-4115-B073-50D5A01420EF}"/>
+                <a16:creationId xmlns:a16="http://schemas.microsoft.com/office/drawing/2014/main" id="{5B15D4E6-C2CE-4E8D-9CCD-866B8245A9C2}"/>
               </a:ext>
             </a:extLst>
           </p:cNvPr>
@@ -27991,7 +28035,7 @@
           <p:cNvPr id="4" name="Text 2">
             <a:extLst xmlns:a="http://schemas.openxmlformats.org/drawingml/2006/main">
               <a:ext uri="{FF2B5EF4-FFF2-40B4-BE49-F238E27FC236}">
-                <a16:creationId xmlns:a16="http://schemas.microsoft.com/office/drawing/2014/main" id="{F223B578-1B13-42DA-B0BA-2D85DD7EA42A}"/>
+                <a16:creationId xmlns:a16="http://schemas.microsoft.com/office/drawing/2014/main" id="{C1A78A9A-62BF-4B3F-A489-FDB96120148B}"/>
               </a:ext>
             </a:extLst>
           </p:cNvPr>
@@ -28036,7 +28080,7 @@
           <p:cNvPr id="5" name="Text 3">
             <a:extLst xmlns:a="http://schemas.openxmlformats.org/drawingml/2006/main">
               <a:ext uri="{FF2B5EF4-FFF2-40B4-BE49-F238E27FC236}">
-                <a16:creationId xmlns:a16="http://schemas.microsoft.com/office/drawing/2014/main" id="{240BE1AE-7C2B-48BB-98C1-EFE3C5FB3035}"/>
+                <a16:creationId xmlns:a16="http://schemas.microsoft.com/office/drawing/2014/main" id="{2A3679D4-4079-4B0F-B1B3-DAD2DCD69464}"/>
               </a:ext>
             </a:extLst>
           </p:cNvPr>
@@ -28081,7 +28125,7 @@
           <p:cNvPr id="6" name="Shape 4">
             <a:extLst xmlns:a="http://schemas.openxmlformats.org/drawingml/2006/main">
               <a:ext uri="{FF2B5EF4-FFF2-40B4-BE49-F238E27FC236}">
-                <a16:creationId xmlns:a16="http://schemas.microsoft.com/office/drawing/2014/main" id="{28E55AB3-542A-466D-8EBA-1373118B9A04}"/>
+                <a16:creationId xmlns:a16="http://schemas.microsoft.com/office/drawing/2014/main" id="{7D11688D-2A61-45C9-B235-C3C98822DA99}"/>
               </a:ext>
             </a:extLst>
           </p:cNvPr>
@@ -28128,7 +28172,7 @@
           <p:cNvPr id="7" name="Text 5">
             <a:extLst xmlns:a="http://schemas.openxmlformats.org/drawingml/2006/main">
               <a:ext uri="{FF2B5EF4-FFF2-40B4-BE49-F238E27FC236}">
-                <a16:creationId xmlns:a16="http://schemas.microsoft.com/office/drawing/2014/main" id="{3AADC727-5119-44AF-B85D-4FD69F9AF8BF}"/>
+                <a16:creationId xmlns:a16="http://schemas.microsoft.com/office/drawing/2014/main" id="{FECA9F78-8787-40F2-985D-902C00912994}"/>
               </a:ext>
             </a:extLst>
           </p:cNvPr>
@@ -28176,7 +28220,7 @@
           <p:cNvPr id="8" name="Text 6">
             <a:extLst xmlns:a="http://schemas.openxmlformats.org/drawingml/2006/main">
               <a:ext uri="{FF2B5EF4-FFF2-40B4-BE49-F238E27FC236}">
-                <a16:creationId xmlns:a16="http://schemas.microsoft.com/office/drawing/2014/main" id="{ED3ACC16-F9D9-419B-95C6-380A13949066}"/>
+                <a16:creationId xmlns:a16="http://schemas.microsoft.com/office/drawing/2014/main" id="{0F17ABBA-6E79-4ADA-94FE-098EAD14D8FF}"/>
               </a:ext>
             </a:extLst>
           </p:cNvPr>
@@ -28221,7 +28265,7 @@
           <p:cNvPr id="9" name="Shape 7">
             <a:extLst xmlns:a="http://schemas.openxmlformats.org/drawingml/2006/main">
               <a:ext uri="{FF2B5EF4-FFF2-40B4-BE49-F238E27FC236}">
-                <a16:creationId xmlns:a16="http://schemas.microsoft.com/office/drawing/2014/main" id="{6379DD43-0A50-4B7F-BDB3-A8C686E7D4F1}"/>
+                <a16:creationId xmlns:a16="http://schemas.microsoft.com/office/drawing/2014/main" id="{C10D3983-FFE4-48F7-B2D8-C07D6092248A}"/>
               </a:ext>
             </a:extLst>
           </p:cNvPr>
@@ -28259,7 +28303,7 @@
           <p:cNvPr id="10" name="Text 8">
             <a:extLst xmlns:a="http://schemas.openxmlformats.org/drawingml/2006/main">
               <a:ext uri="{FF2B5EF4-FFF2-40B4-BE49-F238E27FC236}">
-                <a16:creationId xmlns:a16="http://schemas.microsoft.com/office/drawing/2014/main" id="{6EC6BB59-CF27-4030-A38A-9D4AC63DBAB9}"/>
+                <a16:creationId xmlns:a16="http://schemas.microsoft.com/office/drawing/2014/main" id="{453B2623-1325-4BE4-BA04-D0874F7FD68E}"/>
               </a:ext>
             </a:extLst>
           </p:cNvPr>
@@ -28293,7 +28337,7 @@
           <p:cNvPr id="11" name="Text 9">
             <a:extLst xmlns:a="http://schemas.openxmlformats.org/drawingml/2006/main">
               <a:ext uri="{FF2B5EF4-FFF2-40B4-BE49-F238E27FC236}">
-                <a16:creationId xmlns:a16="http://schemas.microsoft.com/office/drawing/2014/main" id="{8F0E9884-1F37-4A1C-866E-10F3BEE83D78}"/>
+                <a16:creationId xmlns:a16="http://schemas.microsoft.com/office/drawing/2014/main" id="{4B328642-EE35-4228-8329-0731C95FAA14}"/>
               </a:ext>
             </a:extLst>
           </p:cNvPr>
@@ -28338,7 +28382,7 @@
           <p:cNvPr id="12" name="Text 10">
             <a:extLst xmlns:a="http://schemas.openxmlformats.org/drawingml/2006/main">
               <a:ext uri="{FF2B5EF4-FFF2-40B4-BE49-F238E27FC236}">
-                <a16:creationId xmlns:a16="http://schemas.microsoft.com/office/drawing/2014/main" id="{31AB62BF-D857-461B-BB61-6104BA508159}"/>
+                <a16:creationId xmlns:a16="http://schemas.microsoft.com/office/drawing/2014/main" id="{09C9AC5D-E27C-40A0-B939-80A0D57033A4}"/>
               </a:ext>
             </a:extLst>
           </p:cNvPr>
@@ -28386,7 +28430,7 @@
           <p:cNvPr id="13" name="Shape 11">
             <a:extLst xmlns:a="http://schemas.openxmlformats.org/drawingml/2006/main">
               <a:ext uri="{FF2B5EF4-FFF2-40B4-BE49-F238E27FC236}">
-                <a16:creationId xmlns:a16="http://schemas.microsoft.com/office/drawing/2014/main" id="{69E43413-A9CA-4BCA-8882-75E94E197E62}"/>
+                <a16:creationId xmlns:a16="http://schemas.microsoft.com/office/drawing/2014/main" id="{BCBB2472-68BB-40B2-ACF2-23E07EFE1246}"/>
               </a:ext>
             </a:extLst>
           </p:cNvPr>
@@ -28422,7 +28466,7 @@
           <p:cNvPr id="14" name="Shape 12">
             <a:extLst xmlns:a="http://schemas.openxmlformats.org/drawingml/2006/main">
               <a:ext uri="{FF2B5EF4-FFF2-40B4-BE49-F238E27FC236}">
-                <a16:creationId xmlns:a16="http://schemas.microsoft.com/office/drawing/2014/main" id="{AB367824-5F3A-4635-A507-E5479E7DF0CB}"/>
+                <a16:creationId xmlns:a16="http://schemas.microsoft.com/office/drawing/2014/main" id="{239B3286-BE19-48BE-8B98-8359E73C135C}"/>
               </a:ext>
             </a:extLst>
           </p:cNvPr>
@@ -28460,7 +28504,7 @@
           <p:cNvPr id="15" name="Text 13">
             <a:extLst xmlns:a="http://schemas.openxmlformats.org/drawingml/2006/main">
               <a:ext uri="{FF2B5EF4-FFF2-40B4-BE49-F238E27FC236}">
-                <a16:creationId xmlns:a16="http://schemas.microsoft.com/office/drawing/2014/main" id="{8EDDA1AD-F287-4D32-9A6B-05D39B601415}"/>
+                <a16:creationId xmlns:a16="http://schemas.microsoft.com/office/drawing/2014/main" id="{8E7B6BBB-C002-4980-86DA-5A48B61C56E5}"/>
               </a:ext>
             </a:extLst>
           </p:cNvPr>
@@ -28494,7 +28538,7 @@
           <p:cNvPr id="16" name="Text 14">
             <a:extLst xmlns:a="http://schemas.openxmlformats.org/drawingml/2006/main">
               <a:ext uri="{FF2B5EF4-FFF2-40B4-BE49-F238E27FC236}">
-                <a16:creationId xmlns:a16="http://schemas.microsoft.com/office/drawing/2014/main" id="{1653138E-EA87-4761-9F9B-5B0CBC120FF1}"/>
+                <a16:creationId xmlns:a16="http://schemas.microsoft.com/office/drawing/2014/main" id="{03E9CE70-AB8E-45D7-A30B-838C8DB9BD64}"/>
               </a:ext>
             </a:extLst>
           </p:cNvPr>
@@ -28539,7 +28583,7 @@
           <p:cNvPr id="17" name="Text 15">
             <a:extLst xmlns:a="http://schemas.openxmlformats.org/drawingml/2006/main">
               <a:ext uri="{FF2B5EF4-FFF2-40B4-BE49-F238E27FC236}">
-                <a16:creationId xmlns:a16="http://schemas.microsoft.com/office/drawing/2014/main" id="{7EC061BD-BC76-45F1-9DF4-86CCB6111DBD}"/>
+                <a16:creationId xmlns:a16="http://schemas.microsoft.com/office/drawing/2014/main" id="{F3594B28-A8E5-4F0E-A3DE-2E9E92A278E3}"/>
               </a:ext>
             </a:extLst>
           </p:cNvPr>
@@ -28587,7 +28631,7 @@
           <p:cNvPr id="18" name="Shape 16">
             <a:extLst xmlns:a="http://schemas.openxmlformats.org/drawingml/2006/main">
               <a:ext uri="{FF2B5EF4-FFF2-40B4-BE49-F238E27FC236}">
-                <a16:creationId xmlns:a16="http://schemas.microsoft.com/office/drawing/2014/main" id="{0D150916-318C-4765-B63F-DA2D13C76377}"/>
+                <a16:creationId xmlns:a16="http://schemas.microsoft.com/office/drawing/2014/main" id="{E235BF1B-1BC4-4088-B0A8-FF8F59119738}"/>
               </a:ext>
             </a:extLst>
           </p:cNvPr>
@@ -28623,7 +28667,7 @@
           <p:cNvPr id="19" name="Shape 17">
             <a:extLst xmlns:a="http://schemas.openxmlformats.org/drawingml/2006/main">
               <a:ext uri="{FF2B5EF4-FFF2-40B4-BE49-F238E27FC236}">
-                <a16:creationId xmlns:a16="http://schemas.microsoft.com/office/drawing/2014/main" id="{D1F46BE7-5361-4270-AB46-ED9C747D5375}"/>
+                <a16:creationId xmlns:a16="http://schemas.microsoft.com/office/drawing/2014/main" id="{538DA5F5-8FDF-4E94-A5FE-E2CAD022272F}"/>
               </a:ext>
             </a:extLst>
           </p:cNvPr>
@@ -28661,7 +28705,7 @@
           <p:cNvPr id="20" name="Text 18">
             <a:extLst xmlns:a="http://schemas.openxmlformats.org/drawingml/2006/main">
               <a:ext uri="{FF2B5EF4-FFF2-40B4-BE49-F238E27FC236}">
-                <a16:creationId xmlns:a16="http://schemas.microsoft.com/office/drawing/2014/main" id="{958F6846-8928-45FC-8599-D36B024297D7}"/>
+                <a16:creationId xmlns:a16="http://schemas.microsoft.com/office/drawing/2014/main" id="{BA8D03DD-DF07-4C7B-A9BD-76DFFCAD956D}"/>
               </a:ext>
             </a:extLst>
           </p:cNvPr>
@@ -28695,7 +28739,7 @@
           <p:cNvPr id="21" name="Text 19">
             <a:extLst xmlns:a="http://schemas.openxmlformats.org/drawingml/2006/main">
               <a:ext uri="{FF2B5EF4-FFF2-40B4-BE49-F238E27FC236}">
-                <a16:creationId xmlns:a16="http://schemas.microsoft.com/office/drawing/2014/main" id="{42EFFED7-C650-4A96-93F3-95AFF1F221AF}"/>
+                <a16:creationId xmlns:a16="http://schemas.microsoft.com/office/drawing/2014/main" id="{BF30076E-6F6E-45DA-A88B-317B9046F5C5}"/>
               </a:ext>
             </a:extLst>
           </p:cNvPr>
@@ -28740,7 +28784,7 @@
           <p:cNvPr id="22" name="Text 20">
             <a:extLst xmlns:a="http://schemas.openxmlformats.org/drawingml/2006/main">
               <a:ext uri="{FF2B5EF4-FFF2-40B4-BE49-F238E27FC236}">
-                <a16:creationId xmlns:a16="http://schemas.microsoft.com/office/drawing/2014/main" id="{815134BB-5B22-4571-BDCA-DAB7A525F027}"/>
+                <a16:creationId xmlns:a16="http://schemas.microsoft.com/office/drawing/2014/main" id="{DAB9A639-E4DE-4E11-8386-CDA7AB948BB4}"/>
               </a:ext>
             </a:extLst>
           </p:cNvPr>
@@ -28788,7 +28832,7 @@
           <p:cNvPr id="23" name="Shape 21">
             <a:extLst xmlns:a="http://schemas.openxmlformats.org/drawingml/2006/main">
               <a:ext uri="{FF2B5EF4-FFF2-40B4-BE49-F238E27FC236}">
-                <a16:creationId xmlns:a16="http://schemas.microsoft.com/office/drawing/2014/main" id="{65BEED18-82F7-44DD-9166-FBE0D57D9A5C}"/>
+                <a16:creationId xmlns:a16="http://schemas.microsoft.com/office/drawing/2014/main" id="{E5F9C64E-F43F-4009-B479-6D5A787B7EE3}"/>
               </a:ext>
             </a:extLst>
           </p:cNvPr>
@@ -28824,7 +28868,7 @@
           <p:cNvPr id="24" name="Shape 22">
             <a:extLst xmlns:a="http://schemas.openxmlformats.org/drawingml/2006/main">
               <a:ext uri="{FF2B5EF4-FFF2-40B4-BE49-F238E27FC236}">
-                <a16:creationId xmlns:a16="http://schemas.microsoft.com/office/drawing/2014/main" id="{B8286263-6EE6-41E1-A568-2B907528B42E}"/>
+                <a16:creationId xmlns:a16="http://schemas.microsoft.com/office/drawing/2014/main" id="{C3E00CA9-A120-4A62-8C13-93A0BCC21F1B}"/>
               </a:ext>
             </a:extLst>
           </p:cNvPr>
@@ -28862,7 +28906,7 @@
           <p:cNvPr id="25" name="Text 23">
             <a:extLst xmlns:a="http://schemas.openxmlformats.org/drawingml/2006/main">
               <a:ext uri="{FF2B5EF4-FFF2-40B4-BE49-F238E27FC236}">
-                <a16:creationId xmlns:a16="http://schemas.microsoft.com/office/drawing/2014/main" id="{81A48F54-8F2E-41C7-A24B-81E15F09D425}"/>
+                <a16:creationId xmlns:a16="http://schemas.microsoft.com/office/drawing/2014/main" id="{0E821177-2C37-4788-B75E-112D648B76A6}"/>
               </a:ext>
             </a:extLst>
           </p:cNvPr>
@@ -28896,7 +28940,7 @@
           <p:cNvPr id="26" name="Text 24">
             <a:extLst xmlns:a="http://schemas.openxmlformats.org/drawingml/2006/main">
               <a:ext uri="{FF2B5EF4-FFF2-40B4-BE49-F238E27FC236}">
-                <a16:creationId xmlns:a16="http://schemas.microsoft.com/office/drawing/2014/main" id="{5BCCE6C3-D073-4984-9DB9-E6C7A6B69F81}"/>
+                <a16:creationId xmlns:a16="http://schemas.microsoft.com/office/drawing/2014/main" id="{ED6EB215-416B-46BC-91EE-22CC2E8A608F}"/>
               </a:ext>
             </a:extLst>
           </p:cNvPr>
@@ -28941,7 +28985,7 @@
           <p:cNvPr id="27" name="Text 25">
             <a:extLst xmlns:a="http://schemas.openxmlformats.org/drawingml/2006/main">
               <a:ext uri="{FF2B5EF4-FFF2-40B4-BE49-F238E27FC236}">
-                <a16:creationId xmlns:a16="http://schemas.microsoft.com/office/drawing/2014/main" id="{40F2FD10-0019-4C21-BFE9-70357821088D}"/>
+                <a16:creationId xmlns:a16="http://schemas.microsoft.com/office/drawing/2014/main" id="{E3C7C3D3-8D74-4E8A-870F-F6ECB2BA03B8}"/>
               </a:ext>
             </a:extLst>
           </p:cNvPr>
@@ -28989,7 +29033,7 @@
           <p:cNvPr id="28" name="Shape 26">
             <a:extLst xmlns:a="http://schemas.openxmlformats.org/drawingml/2006/main">
               <a:ext uri="{FF2B5EF4-FFF2-40B4-BE49-F238E27FC236}">
-                <a16:creationId xmlns:a16="http://schemas.microsoft.com/office/drawing/2014/main" id="{BD43A639-7BE4-4DAC-8868-54722CCABD73}"/>
+                <a16:creationId xmlns:a16="http://schemas.microsoft.com/office/drawing/2014/main" id="{878EB5B8-6CBD-4073-9EA5-F45047556AFB}"/>
               </a:ext>
             </a:extLst>
           </p:cNvPr>
@@ -29025,7 +29069,7 @@
           <p:cNvPr id="29" name="Shape 27">
             <a:extLst xmlns:a="http://schemas.openxmlformats.org/drawingml/2006/main">
               <a:ext uri="{FF2B5EF4-FFF2-40B4-BE49-F238E27FC236}">
-                <a16:creationId xmlns:a16="http://schemas.microsoft.com/office/drawing/2014/main" id="{BE3A4F21-0E7C-4ED0-BCC7-9A6FCB037E6E}"/>
+                <a16:creationId xmlns:a16="http://schemas.microsoft.com/office/drawing/2014/main" id="{D3EA1D38-D026-4F21-9D5C-21C3B7A14AC8}"/>
               </a:ext>
             </a:extLst>
           </p:cNvPr>
@@ -29063,7 +29107,7 @@
           <p:cNvPr id="30" name="Text 28">
             <a:extLst xmlns:a="http://schemas.openxmlformats.org/drawingml/2006/main">
               <a:ext uri="{FF2B5EF4-FFF2-40B4-BE49-F238E27FC236}">
-                <a16:creationId xmlns:a16="http://schemas.microsoft.com/office/drawing/2014/main" id="{870D68BB-BEF7-4C7C-8343-961152F4FFF0}"/>
+                <a16:creationId xmlns:a16="http://schemas.microsoft.com/office/drawing/2014/main" id="{718A49BE-00B7-49F1-BE05-D0ED068B9C62}"/>
               </a:ext>
             </a:extLst>
           </p:cNvPr>
@@ -29097,7 +29141,7 @@
           <p:cNvPr id="31" name="Text 29">
             <a:extLst xmlns:a="http://schemas.openxmlformats.org/drawingml/2006/main">
               <a:ext uri="{FF2B5EF4-FFF2-40B4-BE49-F238E27FC236}">
-                <a16:creationId xmlns:a16="http://schemas.microsoft.com/office/drawing/2014/main" id="{22D63AE2-0FA7-45DF-8CBA-7ECA7F9296D1}"/>
+                <a16:creationId xmlns:a16="http://schemas.microsoft.com/office/drawing/2014/main" id="{52CB9732-0964-49B6-92E6-0254F47D5391}"/>
               </a:ext>
             </a:extLst>
           </p:cNvPr>
@@ -29142,7 +29186,7 @@
           <p:cNvPr id="32" name="Text 30">
             <a:extLst xmlns:a="http://schemas.openxmlformats.org/drawingml/2006/main">
               <a:ext uri="{FF2B5EF4-FFF2-40B4-BE49-F238E27FC236}">
-                <a16:creationId xmlns:a16="http://schemas.microsoft.com/office/drawing/2014/main" id="{534722D8-1E3F-4FB0-8347-BACA267D1584}"/>
+                <a16:creationId xmlns:a16="http://schemas.microsoft.com/office/drawing/2014/main" id="{3A150DD1-1261-4132-8972-0C23CAB73482}"/>
               </a:ext>
             </a:extLst>
           </p:cNvPr>
@@ -29188,7 +29232,7 @@
     </p:spTree>
     <p:extLst>
       <p:ext uri="{BB962C8B-B14F-4D97-AF65-F5344CB8AC3E}">
-        <p14:creationId xmlns:p14="http://schemas.microsoft.com/office/powerpoint/2010/main" val="1158838338"/>
+        <p14:creationId xmlns:p14="http://schemas.microsoft.com/office/powerpoint/2010/main" val="15389112"/>
       </p:ext>
     </p:extLst>
   </p:cSld>
@@ -29219,7 +29263,7 @@
           <p:cNvPr id="2" name="Text 0">
             <a:extLst xmlns:a="http://schemas.openxmlformats.org/drawingml/2006/main">
               <a:ext uri="{FF2B5EF4-FFF2-40B4-BE49-F238E27FC236}">
-                <a16:creationId xmlns:a16="http://schemas.microsoft.com/office/drawing/2014/main" id="{4AB02627-CEC6-4EAF-A934-19E7DD880DF0}"/>
+                <a16:creationId xmlns:a16="http://schemas.microsoft.com/office/drawing/2014/main" id="{18C0FEF8-D1B8-4C42-939D-532B5B22B16B}"/>
               </a:ext>
             </a:extLst>
           </p:cNvPr>
@@ -29264,7 +29308,7 @@
           <p:cNvPr id="3" name="Text 1">
             <a:extLst xmlns:a="http://schemas.openxmlformats.org/drawingml/2006/main">
               <a:ext uri="{FF2B5EF4-FFF2-40B4-BE49-F238E27FC236}">
-                <a16:creationId xmlns:a16="http://schemas.microsoft.com/office/drawing/2014/main" id="{16626511-C84A-4E01-94BE-FF62E207F845}"/>
+                <a16:creationId xmlns:a16="http://schemas.microsoft.com/office/drawing/2014/main" id="{53EE5956-0FC3-4154-81DA-9FBD8CA576CD}"/>
               </a:ext>
             </a:extLst>
           </p:cNvPr>
@@ -29309,7 +29353,7 @@
           <p:cNvPr id="4" name="Text 2">
             <a:extLst xmlns:a="http://schemas.openxmlformats.org/drawingml/2006/main">
               <a:ext uri="{FF2B5EF4-FFF2-40B4-BE49-F238E27FC236}">
-                <a16:creationId xmlns:a16="http://schemas.microsoft.com/office/drawing/2014/main" id="{1AD680FF-1D1B-4A8C-BE29-A05432C91647}"/>
+                <a16:creationId xmlns:a16="http://schemas.microsoft.com/office/drawing/2014/main" id="{E087E221-6415-4253-A6E6-027820523C86}"/>
               </a:ext>
             </a:extLst>
           </p:cNvPr>
@@ -29354,7 +29398,7 @@
           <p:cNvPr id="5" name="Text 3">
             <a:extLst xmlns:a="http://schemas.openxmlformats.org/drawingml/2006/main">
               <a:ext uri="{FF2B5EF4-FFF2-40B4-BE49-F238E27FC236}">
-                <a16:creationId xmlns:a16="http://schemas.microsoft.com/office/drawing/2014/main" id="{511842C5-B1C9-459A-A377-ECE54C6EA63C}"/>
+                <a16:creationId xmlns:a16="http://schemas.microsoft.com/office/drawing/2014/main" id="{0464B6C0-799D-4E41-A9F5-8EAF26395996}"/>
               </a:ext>
             </a:extLst>
           </p:cNvPr>
@@ -29399,7 +29443,7 @@
           <p:cNvPr id="6" name="Shape 4">
             <a:extLst xmlns:a="http://schemas.openxmlformats.org/drawingml/2006/main">
               <a:ext uri="{FF2B5EF4-FFF2-40B4-BE49-F238E27FC236}">
-                <a16:creationId xmlns:a16="http://schemas.microsoft.com/office/drawing/2014/main" id="{E442969A-3F6D-456E-86D2-9CBAE806EEF3}"/>
+                <a16:creationId xmlns:a16="http://schemas.microsoft.com/office/drawing/2014/main" id="{A4C81A5C-EB14-4C59-BDFF-59A5BEB71BC3}"/>
               </a:ext>
             </a:extLst>
           </p:cNvPr>
@@ -29446,7 +29490,7 @@
           <p:cNvPr id="7" name="Text 5">
             <a:extLst xmlns:a="http://schemas.openxmlformats.org/drawingml/2006/main">
               <a:ext uri="{FF2B5EF4-FFF2-40B4-BE49-F238E27FC236}">
-                <a16:creationId xmlns:a16="http://schemas.microsoft.com/office/drawing/2014/main" id="{5F912458-A74C-4871-9644-F7FAE4263E50}"/>
+                <a16:creationId xmlns:a16="http://schemas.microsoft.com/office/drawing/2014/main" id="{8E064556-D108-478E-A988-B02B47CFDCA9}"/>
               </a:ext>
             </a:extLst>
           </p:cNvPr>
@@ -29524,7 +29568,7 @@
           <p:cNvPr id="8" name="Shape 6">
             <a:extLst xmlns:a="http://schemas.openxmlformats.org/drawingml/2006/main">
               <a:ext uri="{FF2B5EF4-FFF2-40B4-BE49-F238E27FC236}">
-                <a16:creationId xmlns:a16="http://schemas.microsoft.com/office/drawing/2014/main" id="{6612F49B-C3AB-4C95-8919-E67200A4A190}"/>
+                <a16:creationId xmlns:a16="http://schemas.microsoft.com/office/drawing/2014/main" id="{AF9CA97C-E51A-4CF8-8338-9C0D8BAA8F2F}"/>
               </a:ext>
             </a:extLst>
           </p:cNvPr>
@@ -29571,7 +29615,7 @@
           <p:cNvPr id="9" name="Shape 7">
             <a:extLst xmlns:a="http://schemas.openxmlformats.org/drawingml/2006/main">
               <a:ext uri="{FF2B5EF4-FFF2-40B4-BE49-F238E27FC236}">
-                <a16:creationId xmlns:a16="http://schemas.microsoft.com/office/drawing/2014/main" id="{1337E5B6-2C06-4538-9447-BFDF0B48BE2B}"/>
+                <a16:creationId xmlns:a16="http://schemas.microsoft.com/office/drawing/2014/main" id="{0AAE3BAF-9379-4D95-BF32-A76B961961F4}"/>
               </a:ext>
             </a:extLst>
           </p:cNvPr>
@@ -29609,7 +29653,7 @@
           <p:cNvPr id="10" name="Text 8">
             <a:extLst xmlns:a="http://schemas.openxmlformats.org/drawingml/2006/main">
               <a:ext uri="{FF2B5EF4-FFF2-40B4-BE49-F238E27FC236}">
-                <a16:creationId xmlns:a16="http://schemas.microsoft.com/office/drawing/2014/main" id="{C885CBCC-78B9-47C9-8483-CFE2927979A8}"/>
+                <a16:creationId xmlns:a16="http://schemas.microsoft.com/office/drawing/2014/main" id="{A22FDF28-5094-4679-907D-4C9BB953560E}"/>
               </a:ext>
             </a:extLst>
           </p:cNvPr>
@@ -29654,7 +29698,7 @@
           <p:cNvPr id="11" name="Text 9">
             <a:extLst xmlns:a="http://schemas.openxmlformats.org/drawingml/2006/main">
               <a:ext uri="{FF2B5EF4-FFF2-40B4-BE49-F238E27FC236}">
-                <a16:creationId xmlns:a16="http://schemas.microsoft.com/office/drawing/2014/main" id="{94031ACA-E724-4967-8E45-0A3F4A9C7D90}"/>
+                <a16:creationId xmlns:a16="http://schemas.microsoft.com/office/drawing/2014/main" id="{8AD9A2F4-B406-42A5-990A-40A119D4AB40}"/>
               </a:ext>
             </a:extLst>
           </p:cNvPr>
@@ -29699,7 +29743,7 @@
           <p:cNvPr id="12" name="Text 10">
             <a:extLst xmlns:a="http://schemas.openxmlformats.org/drawingml/2006/main">
               <a:ext uri="{FF2B5EF4-FFF2-40B4-BE49-F238E27FC236}">
-                <a16:creationId xmlns:a16="http://schemas.microsoft.com/office/drawing/2014/main" id="{6BB11200-5ADC-4F74-9703-F4E980A8B316}"/>
+                <a16:creationId xmlns:a16="http://schemas.microsoft.com/office/drawing/2014/main" id="{3E53EF85-1D50-465A-B568-051149872115}"/>
               </a:ext>
             </a:extLst>
           </p:cNvPr>
@@ -29838,7 +29882,7 @@
           <p:cNvPr id="13" name="Shape 11">
             <a:extLst xmlns:a="http://schemas.openxmlformats.org/drawingml/2006/main">
               <a:ext uri="{FF2B5EF4-FFF2-40B4-BE49-F238E27FC236}">
-                <a16:creationId xmlns:a16="http://schemas.microsoft.com/office/drawing/2014/main" id="{00FADDCA-D226-4D28-875D-A6C37054FD2D}"/>
+                <a16:creationId xmlns:a16="http://schemas.microsoft.com/office/drawing/2014/main" id="{4891C1C0-36C7-4EAE-904B-A99B613DF521}"/>
               </a:ext>
             </a:extLst>
           </p:cNvPr>
@@ -29885,7 +29929,7 @@
           <p:cNvPr id="14" name="Shape 12">
             <a:extLst xmlns:a="http://schemas.openxmlformats.org/drawingml/2006/main">
               <a:ext uri="{FF2B5EF4-FFF2-40B4-BE49-F238E27FC236}">
-                <a16:creationId xmlns:a16="http://schemas.microsoft.com/office/drawing/2014/main" id="{D8015DF9-94B9-4EA0-AB70-0BA2AC65A974}"/>
+                <a16:creationId xmlns:a16="http://schemas.microsoft.com/office/drawing/2014/main" id="{84621B2C-BCCF-4335-9539-A199C2EB99B9}"/>
               </a:ext>
             </a:extLst>
           </p:cNvPr>
@@ -29923,7 +29967,7 @@
           <p:cNvPr id="15" name="Text 13">
             <a:extLst xmlns:a="http://schemas.openxmlformats.org/drawingml/2006/main">
               <a:ext uri="{FF2B5EF4-FFF2-40B4-BE49-F238E27FC236}">
-                <a16:creationId xmlns:a16="http://schemas.microsoft.com/office/drawing/2014/main" id="{F0C8B681-4719-466F-B96A-863A241C8DD0}"/>
+                <a16:creationId xmlns:a16="http://schemas.microsoft.com/office/drawing/2014/main" id="{6ADE7319-9E41-4BC7-B88B-E69B45869110}"/>
               </a:ext>
             </a:extLst>
           </p:cNvPr>
@@ -29968,7 +30012,7 @@
           <p:cNvPr id="16" name="Text 14">
             <a:extLst xmlns:a="http://schemas.openxmlformats.org/drawingml/2006/main">
               <a:ext uri="{FF2B5EF4-FFF2-40B4-BE49-F238E27FC236}">
-                <a16:creationId xmlns:a16="http://schemas.microsoft.com/office/drawing/2014/main" id="{3D9118AF-744D-4FA0-9178-B1869B317EAC}"/>
+                <a16:creationId xmlns:a16="http://schemas.microsoft.com/office/drawing/2014/main" id="{478DF980-D53A-4BF5-A380-06B9AD223928}"/>
               </a:ext>
             </a:extLst>
           </p:cNvPr>
@@ -30013,7 +30057,7 @@
           <p:cNvPr id="17" name="Text 15">
             <a:extLst xmlns:a="http://schemas.openxmlformats.org/drawingml/2006/main">
               <a:ext uri="{FF2B5EF4-FFF2-40B4-BE49-F238E27FC236}">
-                <a16:creationId xmlns:a16="http://schemas.microsoft.com/office/drawing/2014/main" id="{2AE878F7-9927-4103-A575-403E26F82C92}"/>
+                <a16:creationId xmlns:a16="http://schemas.microsoft.com/office/drawing/2014/main" id="{71166619-5DAA-4E64-97B8-15A035D4E59B}"/>
               </a:ext>
             </a:extLst>
           </p:cNvPr>
@@ -30152,7 +30196,7 @@
           <p:cNvPr id="18" name="Text 16">
             <a:extLst xmlns:a="http://schemas.openxmlformats.org/drawingml/2006/main">
               <a:ext uri="{FF2B5EF4-FFF2-40B4-BE49-F238E27FC236}">
-                <a16:creationId xmlns:a16="http://schemas.microsoft.com/office/drawing/2014/main" id="{DD1DF2C8-F6CC-45AC-A125-0157B0439AFB}"/>
+                <a16:creationId xmlns:a16="http://schemas.microsoft.com/office/drawing/2014/main" id="{046C01BA-216D-49FA-877C-3804D4FDEA4F}"/>
               </a:ext>
             </a:extLst>
           </p:cNvPr>
@@ -30195,7 +30239,7 @@
     </p:spTree>
     <p:extLst>
       <p:ext uri="{BB962C8B-B14F-4D97-AF65-F5344CB8AC3E}">
-        <p14:creationId xmlns:p14="http://schemas.microsoft.com/office/powerpoint/2010/main" val="1443581303"/>
+        <p14:creationId xmlns:p14="http://schemas.microsoft.com/office/powerpoint/2010/main" val="63810474"/>
       </p:ext>
     </p:extLst>
   </p:cSld>
@@ -30226,7 +30270,7 @@
           <p:cNvPr id="2" name="Text 0">
             <a:extLst xmlns:a="http://schemas.openxmlformats.org/drawingml/2006/main">
               <a:ext uri="{FF2B5EF4-FFF2-40B4-BE49-F238E27FC236}">
-                <a16:creationId xmlns:a16="http://schemas.microsoft.com/office/drawing/2014/main" id="{478E495B-F735-4A03-8F2F-2B1D048A42FF}"/>
+                <a16:creationId xmlns:a16="http://schemas.microsoft.com/office/drawing/2014/main" id="{0D9560BA-A71B-485F-96AA-5595BB194F91}"/>
               </a:ext>
             </a:extLst>
           </p:cNvPr>
@@ -30271,7 +30315,7 @@
           <p:cNvPr id="3" name="Text 1">
             <a:extLst xmlns:a="http://schemas.openxmlformats.org/drawingml/2006/main">
               <a:ext uri="{FF2B5EF4-FFF2-40B4-BE49-F238E27FC236}">
-                <a16:creationId xmlns:a16="http://schemas.microsoft.com/office/drawing/2014/main" id="{8DB9DB8B-DF97-4B17-9115-A9188D33948B}"/>
+                <a16:creationId xmlns:a16="http://schemas.microsoft.com/office/drawing/2014/main" id="{B78D33C4-2CC4-4B1A-870E-4ECFAF66984F}"/>
               </a:ext>
             </a:extLst>
           </p:cNvPr>
@@ -30316,7 +30360,7 @@
           <p:cNvPr id="4" name="Text 2">
             <a:extLst xmlns:a="http://schemas.openxmlformats.org/drawingml/2006/main">
               <a:ext uri="{FF2B5EF4-FFF2-40B4-BE49-F238E27FC236}">
-                <a16:creationId xmlns:a16="http://schemas.microsoft.com/office/drawing/2014/main" id="{8BCAA5A0-6BC8-4FFD-BEC3-CE4ACDE8F2FE}"/>
+                <a16:creationId xmlns:a16="http://schemas.microsoft.com/office/drawing/2014/main" id="{50C50895-8D42-4AD5-B1C9-651AA1AB8C85}"/>
               </a:ext>
             </a:extLst>
           </p:cNvPr>
@@ -30361,7 +30405,7 @@
           <p:cNvPr id="5" name="Text 3">
             <a:extLst xmlns:a="http://schemas.openxmlformats.org/drawingml/2006/main">
               <a:ext uri="{FF2B5EF4-FFF2-40B4-BE49-F238E27FC236}">
-                <a16:creationId xmlns:a16="http://schemas.microsoft.com/office/drawing/2014/main" id="{C1921022-4434-4180-826A-A7FF11989520}"/>
+                <a16:creationId xmlns:a16="http://schemas.microsoft.com/office/drawing/2014/main" id="{3A75CA1B-7555-4D12-A5FB-1096566EE72C}"/>
               </a:ext>
             </a:extLst>
           </p:cNvPr>
@@ -30406,7 +30450,7 @@
           <p:cNvPr id="6" name="Shape 4">
             <a:extLst xmlns:a="http://schemas.openxmlformats.org/drawingml/2006/main">
               <a:ext uri="{FF2B5EF4-FFF2-40B4-BE49-F238E27FC236}">
-                <a16:creationId xmlns:a16="http://schemas.microsoft.com/office/drawing/2014/main" id="{4F655729-DE57-4BFE-9D2A-BE273AE03433}"/>
+                <a16:creationId xmlns:a16="http://schemas.microsoft.com/office/drawing/2014/main" id="{F9EDFA8E-3EF2-422D-A3CC-79F751589FCF}"/>
               </a:ext>
             </a:extLst>
           </p:cNvPr>
@@ -30453,7 +30497,7 @@
           <p:cNvPr id="7" name="Shape 5">
             <a:extLst xmlns:a="http://schemas.openxmlformats.org/drawingml/2006/main">
               <a:ext uri="{FF2B5EF4-FFF2-40B4-BE49-F238E27FC236}">
-                <a16:creationId xmlns:a16="http://schemas.microsoft.com/office/drawing/2014/main" id="{632BE3D7-B989-4135-B377-FD7CD7E82EC5}"/>
+                <a16:creationId xmlns:a16="http://schemas.microsoft.com/office/drawing/2014/main" id="{F185BE63-37BA-4457-A7FD-2E65E3B92F12}"/>
               </a:ext>
             </a:extLst>
           </p:cNvPr>
@@ -30491,7 +30535,7 @@
           <p:cNvPr id="8" name="Text 6">
             <a:extLst xmlns:a="http://schemas.openxmlformats.org/drawingml/2006/main">
               <a:ext uri="{FF2B5EF4-FFF2-40B4-BE49-F238E27FC236}">
-                <a16:creationId xmlns:a16="http://schemas.microsoft.com/office/drawing/2014/main" id="{947ABAD1-7DDB-4A88-A99F-5FF556BA7BEC}"/>
+                <a16:creationId xmlns:a16="http://schemas.microsoft.com/office/drawing/2014/main" id="{8BF2C7AE-B2EA-4C52-A5F6-0F5BFB3749EE}"/>
               </a:ext>
             </a:extLst>
           </p:cNvPr>
@@ -30536,7 +30580,7 @@
           <p:cNvPr id="9" name="Text 7">
             <a:extLst xmlns:a="http://schemas.openxmlformats.org/drawingml/2006/main">
               <a:ext uri="{FF2B5EF4-FFF2-40B4-BE49-F238E27FC236}">
-                <a16:creationId xmlns:a16="http://schemas.microsoft.com/office/drawing/2014/main" id="{61308413-5A60-408B-B000-3AFE7FA0323E}"/>
+                <a16:creationId xmlns:a16="http://schemas.microsoft.com/office/drawing/2014/main" id="{8863FA41-2228-49F2-82FA-6C432B00C67C}"/>
               </a:ext>
             </a:extLst>
           </p:cNvPr>
@@ -30581,7 +30625,7 @@
           <p:cNvPr id="10" name="Text 8">
             <a:extLst xmlns:a="http://schemas.openxmlformats.org/drawingml/2006/main">
               <a:ext uri="{FF2B5EF4-FFF2-40B4-BE49-F238E27FC236}">
-                <a16:creationId xmlns:a16="http://schemas.microsoft.com/office/drawing/2014/main" id="{D0046BE5-F14B-486D-9EBD-D72707475711}"/>
+                <a16:creationId xmlns:a16="http://schemas.microsoft.com/office/drawing/2014/main" id="{DCE1ECAF-B277-4B13-86A7-EC15D2CEB714}"/>
               </a:ext>
             </a:extLst>
           </p:cNvPr>
@@ -30676,7 +30720,7 @@
           <p:cNvPr id="11" name="Shape 9">
             <a:extLst xmlns:a="http://schemas.openxmlformats.org/drawingml/2006/main">
               <a:ext uri="{FF2B5EF4-FFF2-40B4-BE49-F238E27FC236}">
-                <a16:creationId xmlns:a16="http://schemas.microsoft.com/office/drawing/2014/main" id="{74945B47-6D79-4C26-B452-6D4B8C30D31F}"/>
+                <a16:creationId xmlns:a16="http://schemas.microsoft.com/office/drawing/2014/main" id="{24F45FCA-A67C-40C0-A49B-49F974DE4250}"/>
               </a:ext>
             </a:extLst>
           </p:cNvPr>
@@ -30714,7 +30758,7 @@
           <p:cNvPr id="12" name="Shape 10">
             <a:extLst xmlns:a="http://schemas.openxmlformats.org/drawingml/2006/main">
               <a:ext uri="{FF2B5EF4-FFF2-40B4-BE49-F238E27FC236}">
-                <a16:creationId xmlns:a16="http://schemas.microsoft.com/office/drawing/2014/main" id="{64C0A6C1-2275-4A85-BCCF-F9432BDF7257}"/>
+                <a16:creationId xmlns:a16="http://schemas.microsoft.com/office/drawing/2014/main" id="{11105A26-031A-4474-85FA-55D06B20A53D}"/>
               </a:ext>
             </a:extLst>
           </p:cNvPr>
@@ -30761,7 +30805,7 @@
           <p:cNvPr id="13" name="Shape 11">
             <a:extLst xmlns:a="http://schemas.openxmlformats.org/drawingml/2006/main">
               <a:ext uri="{FF2B5EF4-FFF2-40B4-BE49-F238E27FC236}">
-                <a16:creationId xmlns:a16="http://schemas.microsoft.com/office/drawing/2014/main" id="{221985DB-A2AA-4B86-9616-0C49861618C8}"/>
+                <a16:creationId xmlns:a16="http://schemas.microsoft.com/office/drawing/2014/main" id="{D824D06B-01AE-419C-88BD-193C825A39F3}"/>
               </a:ext>
             </a:extLst>
           </p:cNvPr>
@@ -30799,7 +30843,7 @@
           <p:cNvPr id="14" name="Text 12">
             <a:extLst xmlns:a="http://schemas.openxmlformats.org/drawingml/2006/main">
               <a:ext uri="{FF2B5EF4-FFF2-40B4-BE49-F238E27FC236}">
-                <a16:creationId xmlns:a16="http://schemas.microsoft.com/office/drawing/2014/main" id="{D85F3DE7-CDAC-4F99-96F3-890CDC142D24}"/>
+                <a16:creationId xmlns:a16="http://schemas.microsoft.com/office/drawing/2014/main" id="{41EDAD91-95E1-4340-9398-7FD64873D88A}"/>
               </a:ext>
             </a:extLst>
           </p:cNvPr>
@@ -30844,7 +30888,7 @@
           <p:cNvPr id="15" name="Text 13">
             <a:extLst xmlns:a="http://schemas.openxmlformats.org/drawingml/2006/main">
               <a:ext uri="{FF2B5EF4-FFF2-40B4-BE49-F238E27FC236}">
-                <a16:creationId xmlns:a16="http://schemas.microsoft.com/office/drawing/2014/main" id="{59CA2139-E506-45C9-947C-BED48BC220D0}"/>
+                <a16:creationId xmlns:a16="http://schemas.microsoft.com/office/drawing/2014/main" id="{54BBC272-8332-4EA8-848C-F9EEB2BAAC0B}"/>
               </a:ext>
             </a:extLst>
           </p:cNvPr>
@@ -30889,7 +30933,7 @@
           <p:cNvPr id="16" name="Text 14">
             <a:extLst xmlns:a="http://schemas.openxmlformats.org/drawingml/2006/main">
               <a:ext uri="{FF2B5EF4-FFF2-40B4-BE49-F238E27FC236}">
-                <a16:creationId xmlns:a16="http://schemas.microsoft.com/office/drawing/2014/main" id="{092BF8B3-3D53-4AD0-8B13-1535F3D68006}"/>
+                <a16:creationId xmlns:a16="http://schemas.microsoft.com/office/drawing/2014/main" id="{3B49FD57-76B8-40ED-9376-845B8B2861CD}"/>
               </a:ext>
             </a:extLst>
           </p:cNvPr>
@@ -30984,7 +31028,7 @@
           <p:cNvPr id="17" name="Shape 15">
             <a:extLst xmlns:a="http://schemas.openxmlformats.org/drawingml/2006/main">
               <a:ext uri="{FF2B5EF4-FFF2-40B4-BE49-F238E27FC236}">
-                <a16:creationId xmlns:a16="http://schemas.microsoft.com/office/drawing/2014/main" id="{B3D26381-003B-44B6-A673-D1C87BC0D025}"/>
+                <a16:creationId xmlns:a16="http://schemas.microsoft.com/office/drawing/2014/main" id="{F83AC3DC-AF6F-427A-9137-FAC69C3D1D5F}"/>
               </a:ext>
             </a:extLst>
           </p:cNvPr>
@@ -31022,7 +31066,7 @@
           <p:cNvPr id="18" name="Shape 16">
             <a:extLst xmlns:a="http://schemas.openxmlformats.org/drawingml/2006/main">
               <a:ext uri="{FF2B5EF4-FFF2-40B4-BE49-F238E27FC236}">
-                <a16:creationId xmlns:a16="http://schemas.microsoft.com/office/drawing/2014/main" id="{70766950-5D9A-4E13-AC8B-E52EA8C0CDE0}"/>
+                <a16:creationId xmlns:a16="http://schemas.microsoft.com/office/drawing/2014/main" id="{BA74D2B3-97C2-4F2B-88E3-063BF86E6064}"/>
               </a:ext>
             </a:extLst>
           </p:cNvPr>
@@ -31069,7 +31113,7 @@
           <p:cNvPr id="19" name="Shape 17">
             <a:extLst xmlns:a="http://schemas.openxmlformats.org/drawingml/2006/main">
               <a:ext uri="{FF2B5EF4-FFF2-40B4-BE49-F238E27FC236}">
-                <a16:creationId xmlns:a16="http://schemas.microsoft.com/office/drawing/2014/main" id="{C5BDBFFE-BBA1-448C-954D-CDF113EB8DFB}"/>
+                <a16:creationId xmlns:a16="http://schemas.microsoft.com/office/drawing/2014/main" id="{2EC30F02-BA5C-4D1C-8848-4FC595604E0B}"/>
               </a:ext>
             </a:extLst>
           </p:cNvPr>
@@ -31107,7 +31151,7 @@
           <p:cNvPr id="20" name="Text 18">
             <a:extLst xmlns:a="http://schemas.openxmlformats.org/drawingml/2006/main">
               <a:ext uri="{FF2B5EF4-FFF2-40B4-BE49-F238E27FC236}">
-                <a16:creationId xmlns:a16="http://schemas.microsoft.com/office/drawing/2014/main" id="{DE9BC910-2819-4B65-BED1-ECFF5C5E60E6}"/>
+                <a16:creationId xmlns:a16="http://schemas.microsoft.com/office/drawing/2014/main" id="{668AA64E-9D9B-4F18-88B6-7594A00BC8EF}"/>
               </a:ext>
             </a:extLst>
           </p:cNvPr>
@@ -31152,7 +31196,7 @@
           <p:cNvPr id="21" name="Text 19">
             <a:extLst xmlns:a="http://schemas.openxmlformats.org/drawingml/2006/main">
               <a:ext uri="{FF2B5EF4-FFF2-40B4-BE49-F238E27FC236}">
-                <a16:creationId xmlns:a16="http://schemas.microsoft.com/office/drawing/2014/main" id="{8441671F-4574-4298-AE43-DCACB0717312}"/>
+                <a16:creationId xmlns:a16="http://schemas.microsoft.com/office/drawing/2014/main" id="{B96E0FDD-555C-44CA-A5C4-DFD58BAF1565}"/>
               </a:ext>
             </a:extLst>
           </p:cNvPr>
@@ -31197,7 +31241,7 @@
           <p:cNvPr id="22" name="Text 20">
             <a:extLst xmlns:a="http://schemas.openxmlformats.org/drawingml/2006/main">
               <a:ext uri="{FF2B5EF4-FFF2-40B4-BE49-F238E27FC236}">
-                <a16:creationId xmlns:a16="http://schemas.microsoft.com/office/drawing/2014/main" id="{25125B4B-3D41-488F-86FA-FB5384700B28}"/>
+                <a16:creationId xmlns:a16="http://schemas.microsoft.com/office/drawing/2014/main" id="{E2E8EB78-7FA9-4D78-B29D-0DC9010CB7A7}"/>
               </a:ext>
             </a:extLst>
           </p:cNvPr>
@@ -31292,7 +31336,7 @@
           <p:cNvPr id="23" name="Shape 21">
             <a:extLst xmlns:a="http://schemas.openxmlformats.org/drawingml/2006/main">
               <a:ext uri="{FF2B5EF4-FFF2-40B4-BE49-F238E27FC236}">
-                <a16:creationId xmlns:a16="http://schemas.microsoft.com/office/drawing/2014/main" id="{D17A33AE-D9A1-404F-A97C-77B9C11B24C5}"/>
+                <a16:creationId xmlns:a16="http://schemas.microsoft.com/office/drawing/2014/main" id="{C534B174-3F71-47B0-B911-73ADD937E586}"/>
               </a:ext>
             </a:extLst>
           </p:cNvPr>
@@ -31339,7 +31383,7 @@
           <p:cNvPr id="24" name="Text 22">
             <a:extLst xmlns:a="http://schemas.openxmlformats.org/drawingml/2006/main">
               <a:ext uri="{FF2B5EF4-FFF2-40B4-BE49-F238E27FC236}">
-                <a16:creationId xmlns:a16="http://schemas.microsoft.com/office/drawing/2014/main" id="{F07A9268-4FAE-4413-97AC-424882674D62}"/>
+                <a16:creationId xmlns:a16="http://schemas.microsoft.com/office/drawing/2014/main" id="{02EBB907-A2AF-4E0D-8ECD-3185FA5489AE}"/>
               </a:ext>
             </a:extLst>
           </p:cNvPr>
@@ -31384,7 +31428,7 @@
           <p:cNvPr id="25" name="Text 23">
             <a:extLst xmlns:a="http://schemas.openxmlformats.org/drawingml/2006/main">
               <a:ext uri="{FF2B5EF4-FFF2-40B4-BE49-F238E27FC236}">
-                <a16:creationId xmlns:a16="http://schemas.microsoft.com/office/drawing/2014/main" id="{C5B3E9FC-C1FC-43A9-91CB-D5ED400E112B}"/>
+                <a16:creationId xmlns:a16="http://schemas.microsoft.com/office/drawing/2014/main" id="{C5A0E429-E3B8-40A1-B1D4-A1FA090F3099}"/>
               </a:ext>
             </a:extLst>
           </p:cNvPr>
@@ -31432,7 +31476,7 @@
           <p:cNvPr id="26" name="Text 24">
             <a:extLst xmlns:a="http://schemas.openxmlformats.org/drawingml/2006/main">
               <a:ext uri="{FF2B5EF4-FFF2-40B4-BE49-F238E27FC236}">
-                <a16:creationId xmlns:a16="http://schemas.microsoft.com/office/drawing/2014/main" id="{E088630C-D852-46D8-A6E4-19F5383E602D}"/>
+                <a16:creationId xmlns:a16="http://schemas.microsoft.com/office/drawing/2014/main" id="{27D17A88-538D-4396-9B4F-2FCC0219E2A1}"/>
               </a:ext>
             </a:extLst>
           </p:cNvPr>
@@ -31475,7 +31519,7 @@
     </p:spTree>
     <p:extLst>
       <p:ext uri="{BB962C8B-B14F-4D97-AF65-F5344CB8AC3E}">
-        <p14:creationId xmlns:p14="http://schemas.microsoft.com/office/powerpoint/2010/main" val="1400876160"/>
+        <p14:creationId xmlns:p14="http://schemas.microsoft.com/office/powerpoint/2010/main" val="1641584837"/>
       </p:ext>
     </p:extLst>
   </p:cSld>
@@ -31506,7 +31550,7 @@
           <p:cNvPr id="2" name="Text 0">
             <a:extLst xmlns:a="http://schemas.openxmlformats.org/drawingml/2006/main">
               <a:ext uri="{FF2B5EF4-FFF2-40B4-BE49-F238E27FC236}">
-                <a16:creationId xmlns:a16="http://schemas.microsoft.com/office/drawing/2014/main" id="{560F5FFE-8212-4BA7-AD39-0B21CC5D0644}"/>
+                <a16:creationId xmlns:a16="http://schemas.microsoft.com/office/drawing/2014/main" id="{0D463343-8411-454C-881F-37DBCF64BC35}"/>
               </a:ext>
             </a:extLst>
           </p:cNvPr>
@@ -31551,7 +31595,7 @@
           <p:cNvPr id="3" name="Text 1">
             <a:extLst xmlns:a="http://schemas.openxmlformats.org/drawingml/2006/main">
               <a:ext uri="{FF2B5EF4-FFF2-40B4-BE49-F238E27FC236}">
-                <a16:creationId xmlns:a16="http://schemas.microsoft.com/office/drawing/2014/main" id="{D12F0618-E40B-473C-A21B-D400BE1346D7}"/>
+                <a16:creationId xmlns:a16="http://schemas.microsoft.com/office/drawing/2014/main" id="{B65682CA-2F23-4FBB-A036-74127A7A92A6}"/>
               </a:ext>
             </a:extLst>
           </p:cNvPr>
@@ -31596,7 +31640,7 @@
           <p:cNvPr id="4" name="Text 2">
             <a:extLst xmlns:a="http://schemas.openxmlformats.org/drawingml/2006/main">
               <a:ext uri="{FF2B5EF4-FFF2-40B4-BE49-F238E27FC236}">
-                <a16:creationId xmlns:a16="http://schemas.microsoft.com/office/drawing/2014/main" id="{BCC5A7EB-B872-4FB5-B284-C41879C72969}"/>
+                <a16:creationId xmlns:a16="http://schemas.microsoft.com/office/drawing/2014/main" id="{74F57113-9DBC-4AB2-8DF0-3C4E1B43B28B}"/>
               </a:ext>
             </a:extLst>
           </p:cNvPr>
@@ -31641,7 +31685,7 @@
           <p:cNvPr id="5" name="Text 3">
             <a:extLst xmlns:a="http://schemas.openxmlformats.org/drawingml/2006/main">
               <a:ext uri="{FF2B5EF4-FFF2-40B4-BE49-F238E27FC236}">
-                <a16:creationId xmlns:a16="http://schemas.microsoft.com/office/drawing/2014/main" id="{69837D3F-D0AE-4DE0-AB8A-F6BB115CF2F3}"/>
+                <a16:creationId xmlns:a16="http://schemas.microsoft.com/office/drawing/2014/main" id="{690E60D8-38F7-4991-9F53-8C844F0602D1}"/>
               </a:ext>
             </a:extLst>
           </p:cNvPr>
@@ -31686,7 +31730,7 @@
           <p:cNvPr id="6" name="Shape 4">
             <a:extLst xmlns:a="http://schemas.openxmlformats.org/drawingml/2006/main">
               <a:ext uri="{FF2B5EF4-FFF2-40B4-BE49-F238E27FC236}">
-                <a16:creationId xmlns:a16="http://schemas.microsoft.com/office/drawing/2014/main" id="{22221813-4373-48E9-A57A-A8F41E74BF61}"/>
+                <a16:creationId xmlns:a16="http://schemas.microsoft.com/office/drawing/2014/main" id="{A284CB2C-E49F-43FD-A7BB-32CA0437183B}"/>
               </a:ext>
             </a:extLst>
           </p:cNvPr>
@@ -31724,7 +31768,7 @@
           <p:cNvPr id="7" name="Text 5">
             <a:extLst xmlns:a="http://schemas.openxmlformats.org/drawingml/2006/main">
               <a:ext uri="{FF2B5EF4-FFF2-40B4-BE49-F238E27FC236}">
-                <a16:creationId xmlns:a16="http://schemas.microsoft.com/office/drawing/2014/main" id="{5B5D8B9A-4212-43D7-975A-1D1E86205937}"/>
+                <a16:creationId xmlns:a16="http://schemas.microsoft.com/office/drawing/2014/main" id="{E1B63E11-FB0B-43EC-AD0D-C20FD7DFE7B0}"/>
               </a:ext>
             </a:extLst>
           </p:cNvPr>
@@ -31769,7 +31813,7 @@
           <p:cNvPr id="8" name="Text 6">
             <a:extLst xmlns:a="http://schemas.openxmlformats.org/drawingml/2006/main">
               <a:ext uri="{FF2B5EF4-FFF2-40B4-BE49-F238E27FC236}">
-                <a16:creationId xmlns:a16="http://schemas.microsoft.com/office/drawing/2014/main" id="{90891EEC-F832-4FD9-8F1C-99FEB69112BC}"/>
+                <a16:creationId xmlns:a16="http://schemas.microsoft.com/office/drawing/2014/main" id="{FB3DDE34-0025-42AF-B7E5-D27964B04360}"/>
               </a:ext>
             </a:extLst>
           </p:cNvPr>
@@ -31814,7 +31858,7 @@
           <p:cNvPr id="9" name="Text 7">
             <a:extLst xmlns:a="http://schemas.openxmlformats.org/drawingml/2006/main">
               <a:ext uri="{FF2B5EF4-FFF2-40B4-BE49-F238E27FC236}">
-                <a16:creationId xmlns:a16="http://schemas.microsoft.com/office/drawing/2014/main" id="{F6739318-5232-41B7-9752-F7C7FDE18504}"/>
+                <a16:creationId xmlns:a16="http://schemas.microsoft.com/office/drawing/2014/main" id="{61EC3B28-7F4E-4424-A04D-365CBA800AF1}"/>
               </a:ext>
             </a:extLst>
           </p:cNvPr>
@@ -31862,7 +31906,7 @@
           <p:cNvPr id="10" name="Shape 8">
             <a:extLst xmlns:a="http://schemas.openxmlformats.org/drawingml/2006/main">
               <a:ext uri="{FF2B5EF4-FFF2-40B4-BE49-F238E27FC236}">
-                <a16:creationId xmlns:a16="http://schemas.microsoft.com/office/drawing/2014/main" id="{02B16AE6-131F-4428-BE7C-A8FA166E805B}"/>
+                <a16:creationId xmlns:a16="http://schemas.microsoft.com/office/drawing/2014/main" id="{E65B62C0-31CA-470B-BA12-D0794BC5EC10}"/>
               </a:ext>
             </a:extLst>
           </p:cNvPr>
@@ -31900,7 +31944,7 @@
           <p:cNvPr id="11" name="Text 9">
             <a:extLst xmlns:a="http://schemas.openxmlformats.org/drawingml/2006/main">
               <a:ext uri="{FF2B5EF4-FFF2-40B4-BE49-F238E27FC236}">
-                <a16:creationId xmlns:a16="http://schemas.microsoft.com/office/drawing/2014/main" id="{EAC6E9EE-052F-4991-8FC4-B901C31AC2D2}"/>
+                <a16:creationId xmlns:a16="http://schemas.microsoft.com/office/drawing/2014/main" id="{03BC0861-BE17-4D1C-91D1-E2E6251A81A4}"/>
               </a:ext>
             </a:extLst>
           </p:cNvPr>
@@ -31945,7 +31989,7 @@
           <p:cNvPr id="12" name="Text 10">
             <a:extLst xmlns:a="http://schemas.openxmlformats.org/drawingml/2006/main">
               <a:ext uri="{FF2B5EF4-FFF2-40B4-BE49-F238E27FC236}">
-                <a16:creationId xmlns:a16="http://schemas.microsoft.com/office/drawing/2014/main" id="{8147CB89-9970-4C71-9006-EDBE7AC2C3B9}"/>
+                <a16:creationId xmlns:a16="http://schemas.microsoft.com/office/drawing/2014/main" id="{4BC03B7C-C34F-4402-9E2D-9FE7DE72269F}"/>
               </a:ext>
             </a:extLst>
           </p:cNvPr>
@@ -31990,7 +32034,7 @@
           <p:cNvPr id="13" name="Text 11">
             <a:extLst xmlns:a="http://schemas.openxmlformats.org/drawingml/2006/main">
               <a:ext uri="{FF2B5EF4-FFF2-40B4-BE49-F238E27FC236}">
-                <a16:creationId xmlns:a16="http://schemas.microsoft.com/office/drawing/2014/main" id="{E9CAD641-C873-4C45-A5D5-A6744A89EF3C}"/>
+                <a16:creationId xmlns:a16="http://schemas.microsoft.com/office/drawing/2014/main" id="{6D68B0C7-47D9-4D12-9F5B-32FB79657946}"/>
               </a:ext>
             </a:extLst>
           </p:cNvPr>
@@ -32038,7 +32082,7 @@
           <p:cNvPr id="14" name="Shape 12">
             <a:extLst xmlns:a="http://schemas.openxmlformats.org/drawingml/2006/main">
               <a:ext uri="{FF2B5EF4-FFF2-40B4-BE49-F238E27FC236}">
-                <a16:creationId xmlns:a16="http://schemas.microsoft.com/office/drawing/2014/main" id="{038409D9-19E9-4FAB-BB58-650D451AB533}"/>
+                <a16:creationId xmlns:a16="http://schemas.microsoft.com/office/drawing/2014/main" id="{91749DFB-5AFC-449C-BC8E-5E2DCECB7C77}"/>
               </a:ext>
             </a:extLst>
           </p:cNvPr>
@@ -32076,7 +32120,7 @@
           <p:cNvPr id="15" name="Text 13">
             <a:extLst xmlns:a="http://schemas.openxmlformats.org/drawingml/2006/main">
               <a:ext uri="{FF2B5EF4-FFF2-40B4-BE49-F238E27FC236}">
-                <a16:creationId xmlns:a16="http://schemas.microsoft.com/office/drawing/2014/main" id="{8A8ED110-7178-48F1-AD93-9343461F3023}"/>
+                <a16:creationId xmlns:a16="http://schemas.microsoft.com/office/drawing/2014/main" id="{9E9AA917-353D-4595-BC19-ABB5DCA99D01}"/>
               </a:ext>
             </a:extLst>
           </p:cNvPr>
@@ -32121,7 +32165,7 @@
           <p:cNvPr id="16" name="Text 14">
             <a:extLst xmlns:a="http://schemas.openxmlformats.org/drawingml/2006/main">
               <a:ext uri="{FF2B5EF4-FFF2-40B4-BE49-F238E27FC236}">
-                <a16:creationId xmlns:a16="http://schemas.microsoft.com/office/drawing/2014/main" id="{C1BBD694-3EC6-4A62-8692-A636D11EDB3F}"/>
+                <a16:creationId xmlns:a16="http://schemas.microsoft.com/office/drawing/2014/main" id="{1C22343C-D2D2-4BF5-A15F-7701FD7DA7C8}"/>
               </a:ext>
             </a:extLst>
           </p:cNvPr>
@@ -32166,7 +32210,7 @@
           <p:cNvPr id="17" name="Text 15">
             <a:extLst xmlns:a="http://schemas.openxmlformats.org/drawingml/2006/main">
               <a:ext uri="{FF2B5EF4-FFF2-40B4-BE49-F238E27FC236}">
-                <a16:creationId xmlns:a16="http://schemas.microsoft.com/office/drawing/2014/main" id="{313027BF-87E0-4935-B9A9-455188C2A56D}"/>
+                <a16:creationId xmlns:a16="http://schemas.microsoft.com/office/drawing/2014/main" id="{6B0B8D03-C1A4-4235-A884-68ADC9C1FA30}"/>
               </a:ext>
             </a:extLst>
           </p:cNvPr>
@@ -32214,7 +32258,7 @@
           <p:cNvPr id="18" name="Shape 16">
             <a:extLst xmlns:a="http://schemas.openxmlformats.org/drawingml/2006/main">
               <a:ext uri="{FF2B5EF4-FFF2-40B4-BE49-F238E27FC236}">
-                <a16:creationId xmlns:a16="http://schemas.microsoft.com/office/drawing/2014/main" id="{3E1E9C80-DDC2-45AD-B3CA-F0F2E41A9FEB}"/>
+                <a16:creationId xmlns:a16="http://schemas.microsoft.com/office/drawing/2014/main" id="{3A5C0387-8DA9-40BD-AB04-D7682AAEC534}"/>
               </a:ext>
             </a:extLst>
           </p:cNvPr>
@@ -32252,7 +32296,7 @@
           <p:cNvPr id="19" name="Text 17">
             <a:extLst xmlns:a="http://schemas.openxmlformats.org/drawingml/2006/main">
               <a:ext uri="{FF2B5EF4-FFF2-40B4-BE49-F238E27FC236}">
-                <a16:creationId xmlns:a16="http://schemas.microsoft.com/office/drawing/2014/main" id="{37BEC889-75B7-4E5E-AE80-60FF5D0F32E6}"/>
+                <a16:creationId xmlns:a16="http://schemas.microsoft.com/office/drawing/2014/main" id="{97BA02E3-3E29-470B-BB16-0A6B357818EA}"/>
               </a:ext>
             </a:extLst>
           </p:cNvPr>
@@ -32297,7 +32341,7 @@
           <p:cNvPr id="20" name="Text 18">
             <a:extLst xmlns:a="http://schemas.openxmlformats.org/drawingml/2006/main">
               <a:ext uri="{FF2B5EF4-FFF2-40B4-BE49-F238E27FC236}">
-                <a16:creationId xmlns:a16="http://schemas.microsoft.com/office/drawing/2014/main" id="{755AACE8-21FD-43F3-80CA-DB03CA227CC2}"/>
+                <a16:creationId xmlns:a16="http://schemas.microsoft.com/office/drawing/2014/main" id="{FAA24A45-D4F0-43BE-99A6-0DE4787CBEDC}"/>
               </a:ext>
             </a:extLst>
           </p:cNvPr>
@@ -32342,7 +32386,7 @@
           <p:cNvPr id="21" name="Text 19">
             <a:extLst xmlns:a="http://schemas.openxmlformats.org/drawingml/2006/main">
               <a:ext uri="{FF2B5EF4-FFF2-40B4-BE49-F238E27FC236}">
-                <a16:creationId xmlns:a16="http://schemas.microsoft.com/office/drawing/2014/main" id="{3363E19B-9F18-4CF6-B224-F90752B024DA}"/>
+                <a16:creationId xmlns:a16="http://schemas.microsoft.com/office/drawing/2014/main" id="{24DEE01D-5C74-46A4-BAA5-120A95F8F2E6}"/>
               </a:ext>
             </a:extLst>
           </p:cNvPr>
@@ -32390,7 +32434,7 @@
           <p:cNvPr id="22" name="Shape 20">
             <a:extLst xmlns:a="http://schemas.openxmlformats.org/drawingml/2006/main">
               <a:ext uri="{FF2B5EF4-FFF2-40B4-BE49-F238E27FC236}">
-                <a16:creationId xmlns:a16="http://schemas.microsoft.com/office/drawing/2014/main" id="{8D71ACC8-2E6F-41E6-9516-9D07218F9407}"/>
+                <a16:creationId xmlns:a16="http://schemas.microsoft.com/office/drawing/2014/main" id="{CE268CF3-F9CA-41A2-B249-47A228FEF71C}"/>
               </a:ext>
             </a:extLst>
           </p:cNvPr>
@@ -32428,7 +32472,7 @@
           <p:cNvPr id="23" name="Text 21">
             <a:extLst xmlns:a="http://schemas.openxmlformats.org/drawingml/2006/main">
               <a:ext uri="{FF2B5EF4-FFF2-40B4-BE49-F238E27FC236}">
-                <a16:creationId xmlns:a16="http://schemas.microsoft.com/office/drawing/2014/main" id="{27668345-6DFA-42A1-A706-65678DB9FC94}"/>
+                <a16:creationId xmlns:a16="http://schemas.microsoft.com/office/drawing/2014/main" id="{0508C35F-4E93-47AA-8594-309C856230A9}"/>
               </a:ext>
             </a:extLst>
           </p:cNvPr>
@@ -32473,7 +32517,7 @@
           <p:cNvPr id="24" name="Text 22">
             <a:extLst xmlns:a="http://schemas.openxmlformats.org/drawingml/2006/main">
               <a:ext uri="{FF2B5EF4-FFF2-40B4-BE49-F238E27FC236}">
-                <a16:creationId xmlns:a16="http://schemas.microsoft.com/office/drawing/2014/main" id="{4383E085-81F7-4C33-886F-A26F26DA2EBD}"/>
+                <a16:creationId xmlns:a16="http://schemas.microsoft.com/office/drawing/2014/main" id="{593B583A-1C0C-45AA-B782-EAEDE7FB8926}"/>
               </a:ext>
             </a:extLst>
           </p:cNvPr>
@@ -32518,7 +32562,7 @@
           <p:cNvPr id="25" name="Text 23">
             <a:extLst xmlns:a="http://schemas.openxmlformats.org/drawingml/2006/main">
               <a:ext uri="{FF2B5EF4-FFF2-40B4-BE49-F238E27FC236}">
-                <a16:creationId xmlns:a16="http://schemas.microsoft.com/office/drawing/2014/main" id="{32C3766C-7EE3-4BE8-8B9B-88CD72F91F32}"/>
+                <a16:creationId xmlns:a16="http://schemas.microsoft.com/office/drawing/2014/main" id="{7A81CA33-AA66-41F9-90A4-BE3F9E52DE34}"/>
               </a:ext>
             </a:extLst>
           </p:cNvPr>
@@ -32566,7 +32610,7 @@
           <p:cNvPr id="26" name="Shape 24">
             <a:extLst xmlns:a="http://schemas.openxmlformats.org/drawingml/2006/main">
               <a:ext uri="{FF2B5EF4-FFF2-40B4-BE49-F238E27FC236}">
-                <a16:creationId xmlns:a16="http://schemas.microsoft.com/office/drawing/2014/main" id="{D25D6F0F-E054-4764-A4E4-696A2C01868A}"/>
+                <a16:creationId xmlns:a16="http://schemas.microsoft.com/office/drawing/2014/main" id="{AF5BBFBA-14AC-44E6-AC88-93086E626617}"/>
               </a:ext>
             </a:extLst>
           </p:cNvPr>
@@ -32604,7 +32648,7 @@
           <p:cNvPr id="27" name="Text 25">
             <a:extLst xmlns:a="http://schemas.openxmlformats.org/drawingml/2006/main">
               <a:ext uri="{FF2B5EF4-FFF2-40B4-BE49-F238E27FC236}">
-                <a16:creationId xmlns:a16="http://schemas.microsoft.com/office/drawing/2014/main" id="{54EDA3C9-C829-4FBD-A705-10646FAB0B40}"/>
+                <a16:creationId xmlns:a16="http://schemas.microsoft.com/office/drawing/2014/main" id="{24AEFE36-090A-4D12-BD3A-1DF32BD6943E}"/>
               </a:ext>
             </a:extLst>
           </p:cNvPr>
@@ -32649,7 +32693,7 @@
           <p:cNvPr id="28" name="Text 26">
             <a:extLst xmlns:a="http://schemas.openxmlformats.org/drawingml/2006/main">
               <a:ext uri="{FF2B5EF4-FFF2-40B4-BE49-F238E27FC236}">
-                <a16:creationId xmlns:a16="http://schemas.microsoft.com/office/drawing/2014/main" id="{085C91ED-0C0D-4B04-81FD-3DCF5C5ABF52}"/>
+                <a16:creationId xmlns:a16="http://schemas.microsoft.com/office/drawing/2014/main" id="{251D1C10-5275-4ED7-B5FE-E666E2D7FD7C}"/>
               </a:ext>
             </a:extLst>
           </p:cNvPr>
@@ -32694,7 +32738,7 @@
           <p:cNvPr id="29" name="Text 27">
             <a:extLst xmlns:a="http://schemas.openxmlformats.org/drawingml/2006/main">
               <a:ext uri="{FF2B5EF4-FFF2-40B4-BE49-F238E27FC236}">
-                <a16:creationId xmlns:a16="http://schemas.microsoft.com/office/drawing/2014/main" id="{AD062A84-2796-4ACA-9B9F-942EBBF9F009}"/>
+                <a16:creationId xmlns:a16="http://schemas.microsoft.com/office/drawing/2014/main" id="{7DCD6411-970F-4F8F-941B-4807EC2962F6}"/>
               </a:ext>
             </a:extLst>
           </p:cNvPr>
@@ -32742,7 +32786,7 @@
           <p:cNvPr id="30" name="Shape 28">
             <a:extLst xmlns:a="http://schemas.openxmlformats.org/drawingml/2006/main">
               <a:ext uri="{FF2B5EF4-FFF2-40B4-BE49-F238E27FC236}">
-                <a16:creationId xmlns:a16="http://schemas.microsoft.com/office/drawing/2014/main" id="{813B55CF-B8CC-4F2B-B02D-ED2200340308}"/>
+                <a16:creationId xmlns:a16="http://schemas.microsoft.com/office/drawing/2014/main" id="{46B92ED8-94D9-440E-A770-1867C0C5347A}"/>
               </a:ext>
             </a:extLst>
           </p:cNvPr>
@@ -32789,7 +32833,7 @@
           <p:cNvPr id="31" name="Text 29">
             <a:extLst xmlns:a="http://schemas.openxmlformats.org/drawingml/2006/main">
               <a:ext uri="{FF2B5EF4-FFF2-40B4-BE49-F238E27FC236}">
-                <a16:creationId xmlns:a16="http://schemas.microsoft.com/office/drawing/2014/main" id="{F7470EAF-28B6-4972-A3CF-B67E2562C459}"/>
+                <a16:creationId xmlns:a16="http://schemas.microsoft.com/office/drawing/2014/main" id="{11B4BE62-E326-4F83-96E4-121788BD6FA1}"/>
               </a:ext>
             </a:extLst>
           </p:cNvPr>
@@ -32835,7 +32879,7 @@
     </p:spTree>
     <p:extLst>
       <p:ext uri="{BB962C8B-B14F-4D97-AF65-F5344CB8AC3E}">
-        <p14:creationId xmlns:p14="http://schemas.microsoft.com/office/powerpoint/2010/main" val="1549658801"/>
+        <p14:creationId xmlns:p14="http://schemas.microsoft.com/office/powerpoint/2010/main" val="1875434778"/>
       </p:ext>
     </p:extLst>
   </p:cSld>
@@ -32866,7 +32910,7 @@
           <p:cNvPr id="2" name="Text 0">
             <a:extLst xmlns:a="http://schemas.openxmlformats.org/drawingml/2006/main">
               <a:ext uri="{FF2B5EF4-FFF2-40B4-BE49-F238E27FC236}">
-                <a16:creationId xmlns:a16="http://schemas.microsoft.com/office/drawing/2014/main" id="{C3442F36-DA73-4382-BC71-1FBDBBC88878}"/>
+                <a16:creationId xmlns:a16="http://schemas.microsoft.com/office/drawing/2014/main" id="{942F69D1-D13E-4969-9D85-4CCACAA1B1A3}"/>
               </a:ext>
             </a:extLst>
           </p:cNvPr>
@@ -32911,7 +32955,7 @@
           <p:cNvPr id="3" name="Text 1">
             <a:extLst xmlns:a="http://schemas.openxmlformats.org/drawingml/2006/main">
               <a:ext uri="{FF2B5EF4-FFF2-40B4-BE49-F238E27FC236}">
-                <a16:creationId xmlns:a16="http://schemas.microsoft.com/office/drawing/2014/main" id="{9567E7E1-4539-46AB-9BB9-87A23BFDA6AB}"/>
+                <a16:creationId xmlns:a16="http://schemas.microsoft.com/office/drawing/2014/main" id="{57E3BECA-CECB-4386-895B-F625DAFE4894}"/>
               </a:ext>
             </a:extLst>
           </p:cNvPr>
@@ -32956,7 +33000,7 @@
           <p:cNvPr id="4" name="Text 2">
             <a:extLst xmlns:a="http://schemas.openxmlformats.org/drawingml/2006/main">
               <a:ext uri="{FF2B5EF4-FFF2-40B4-BE49-F238E27FC236}">
-                <a16:creationId xmlns:a16="http://schemas.microsoft.com/office/drawing/2014/main" id="{F21B5CA4-76C3-413A-A1A8-94F369E6F1DC}"/>
+                <a16:creationId xmlns:a16="http://schemas.microsoft.com/office/drawing/2014/main" id="{809693A6-0706-4A89-AF2A-F3D2751466F7}"/>
               </a:ext>
             </a:extLst>
           </p:cNvPr>
@@ -33001,7 +33045,7 @@
           <p:cNvPr id="5" name="Text 3">
             <a:extLst xmlns:a="http://schemas.openxmlformats.org/drawingml/2006/main">
               <a:ext uri="{FF2B5EF4-FFF2-40B4-BE49-F238E27FC236}">
-                <a16:creationId xmlns:a16="http://schemas.microsoft.com/office/drawing/2014/main" id="{5BDCB7F7-6496-4E20-9CDC-5DF1E43554E5}"/>
+                <a16:creationId xmlns:a16="http://schemas.microsoft.com/office/drawing/2014/main" id="{2B64F34A-B254-49BD-A4CD-A5D3E314330F}"/>
               </a:ext>
             </a:extLst>
           </p:cNvPr>
@@ -33046,7 +33090,7 @@
           <p:cNvPr id="6" name="Text 4">
             <a:extLst xmlns:a="http://schemas.openxmlformats.org/drawingml/2006/main">
               <a:ext uri="{FF2B5EF4-FFF2-40B4-BE49-F238E27FC236}">
-                <a16:creationId xmlns:a16="http://schemas.microsoft.com/office/drawing/2014/main" id="{9E4CCF7E-0CF1-4418-AE5C-8718F9BE822E}"/>
+                <a16:creationId xmlns:a16="http://schemas.microsoft.com/office/drawing/2014/main" id="{248173A6-B479-4FF4-8B29-C5C345A64A93}"/>
               </a:ext>
             </a:extLst>
           </p:cNvPr>
@@ -33094,7 +33138,7 @@
           <p:cNvPr id="7" name="Shape 5">
             <a:extLst xmlns:a="http://schemas.openxmlformats.org/drawingml/2006/main">
               <a:ext uri="{FF2B5EF4-FFF2-40B4-BE49-F238E27FC236}">
-                <a16:creationId xmlns:a16="http://schemas.microsoft.com/office/drawing/2014/main" id="{A6D57BF6-8F50-4AC9-8EAA-0FF60E6E5DAD}"/>
+                <a16:creationId xmlns:a16="http://schemas.microsoft.com/office/drawing/2014/main" id="{61140B0E-BB7D-474B-818A-0008F0AE3DB9}"/>
               </a:ext>
             </a:extLst>
           </p:cNvPr>
@@ -33141,7 +33185,7 @@
           <p:cNvPr id="8" name="Shape 6">
             <a:extLst xmlns:a="http://schemas.openxmlformats.org/drawingml/2006/main">
               <a:ext uri="{FF2B5EF4-FFF2-40B4-BE49-F238E27FC236}">
-                <a16:creationId xmlns:a16="http://schemas.microsoft.com/office/drawing/2014/main" id="{52EA80B2-1CD7-4A5D-A6BC-20090982C71E}"/>
+                <a16:creationId xmlns:a16="http://schemas.microsoft.com/office/drawing/2014/main" id="{2F027AD5-0F17-4D39-9D10-663F812D81C5}"/>
               </a:ext>
             </a:extLst>
           </p:cNvPr>
@@ -33179,7 +33223,7 @@
           <p:cNvPr id="9" name="Text 7">
             <a:extLst xmlns:a="http://schemas.openxmlformats.org/drawingml/2006/main">
               <a:ext uri="{FF2B5EF4-FFF2-40B4-BE49-F238E27FC236}">
-                <a16:creationId xmlns:a16="http://schemas.microsoft.com/office/drawing/2014/main" id="{444B385B-570C-4274-858E-9CBFAF7F8D92}"/>
+                <a16:creationId xmlns:a16="http://schemas.microsoft.com/office/drawing/2014/main" id="{664CFF7F-9A2F-4694-A6C0-1BBDB90C3BB8}"/>
               </a:ext>
             </a:extLst>
           </p:cNvPr>
@@ -33224,7 +33268,7 @@
           <p:cNvPr id="10" name="Text 8">
             <a:extLst xmlns:a="http://schemas.openxmlformats.org/drawingml/2006/main">
               <a:ext uri="{FF2B5EF4-FFF2-40B4-BE49-F238E27FC236}">
-                <a16:creationId xmlns:a16="http://schemas.microsoft.com/office/drawing/2014/main" id="{C3B88C4F-6752-4270-82D9-9ECB418C6469}"/>
+                <a16:creationId xmlns:a16="http://schemas.microsoft.com/office/drawing/2014/main" id="{7649C324-2353-49AC-BF8C-C6CF1C06B713}"/>
               </a:ext>
             </a:extLst>
           </p:cNvPr>
@@ -33269,7 +33313,7 @@
           <p:cNvPr id="11" name="Text 9">
             <a:extLst xmlns:a="http://schemas.openxmlformats.org/drawingml/2006/main">
               <a:ext uri="{FF2B5EF4-FFF2-40B4-BE49-F238E27FC236}">
-                <a16:creationId xmlns:a16="http://schemas.microsoft.com/office/drawing/2014/main" id="{43FFEA6D-D3B3-4A12-95CA-8E975D134DBF}"/>
+                <a16:creationId xmlns:a16="http://schemas.microsoft.com/office/drawing/2014/main" id="{75412321-77D5-4C4F-B563-63D22EB6CDF5}"/>
               </a:ext>
             </a:extLst>
           </p:cNvPr>
@@ -33317,7 +33361,7 @@
           <p:cNvPr id="12" name="Shape 10">
             <a:extLst xmlns:a="http://schemas.openxmlformats.org/drawingml/2006/main">
               <a:ext uri="{FF2B5EF4-FFF2-40B4-BE49-F238E27FC236}">
-                <a16:creationId xmlns:a16="http://schemas.microsoft.com/office/drawing/2014/main" id="{3BEADF67-1434-4F13-BFE0-3322EC7FA33E}"/>
+                <a16:creationId xmlns:a16="http://schemas.microsoft.com/office/drawing/2014/main" id="{A03BCE9A-E982-451B-BBE7-742BC4666A42}"/>
               </a:ext>
             </a:extLst>
           </p:cNvPr>
@@ -33364,7 +33408,7 @@
           <p:cNvPr id="13" name="Shape 11">
             <a:extLst xmlns:a="http://schemas.openxmlformats.org/drawingml/2006/main">
               <a:ext uri="{FF2B5EF4-FFF2-40B4-BE49-F238E27FC236}">
-                <a16:creationId xmlns:a16="http://schemas.microsoft.com/office/drawing/2014/main" id="{F5FFE8D8-42DB-435E-90BA-F0FC34066DCD}"/>
+                <a16:creationId xmlns:a16="http://schemas.microsoft.com/office/drawing/2014/main" id="{208CB3D3-581E-42D1-A8C4-16C07BC4DDEA}"/>
               </a:ext>
             </a:extLst>
           </p:cNvPr>
@@ -33402,7 +33446,7 @@
           <p:cNvPr id="14" name="Text 12">
             <a:extLst xmlns:a="http://schemas.openxmlformats.org/drawingml/2006/main">
               <a:ext uri="{FF2B5EF4-FFF2-40B4-BE49-F238E27FC236}">
-                <a16:creationId xmlns:a16="http://schemas.microsoft.com/office/drawing/2014/main" id="{708F6D3E-0799-40E6-9513-972760A4F4D2}"/>
+                <a16:creationId xmlns:a16="http://schemas.microsoft.com/office/drawing/2014/main" id="{53E9B184-6671-4727-B932-15A9445B4981}"/>
               </a:ext>
             </a:extLst>
           </p:cNvPr>
@@ -33447,7 +33491,7 @@
           <p:cNvPr id="15" name="Text 13">
             <a:extLst xmlns:a="http://schemas.openxmlformats.org/drawingml/2006/main">
               <a:ext uri="{FF2B5EF4-FFF2-40B4-BE49-F238E27FC236}">
-                <a16:creationId xmlns:a16="http://schemas.microsoft.com/office/drawing/2014/main" id="{6F34D38D-B1C9-43FE-AC04-7918935CFA3B}"/>
+                <a16:creationId xmlns:a16="http://schemas.microsoft.com/office/drawing/2014/main" id="{BD0F779B-BC49-4DAC-B1DB-A0FF955ACBB1}"/>
               </a:ext>
             </a:extLst>
           </p:cNvPr>
@@ -33492,7 +33536,7 @@
           <p:cNvPr id="16" name="Text 14">
             <a:extLst xmlns:a="http://schemas.openxmlformats.org/drawingml/2006/main">
               <a:ext uri="{FF2B5EF4-FFF2-40B4-BE49-F238E27FC236}">
-                <a16:creationId xmlns:a16="http://schemas.microsoft.com/office/drawing/2014/main" id="{40FADDFB-78E2-4788-9D10-B98D4F42B108}"/>
+                <a16:creationId xmlns:a16="http://schemas.microsoft.com/office/drawing/2014/main" id="{97A79260-6D75-4F41-BE1B-D3327C604F55}"/>
               </a:ext>
             </a:extLst>
           </p:cNvPr>
@@ -33540,7 +33584,7 @@
           <p:cNvPr id="17" name="Shape 15">
             <a:extLst xmlns:a="http://schemas.openxmlformats.org/drawingml/2006/main">
               <a:ext uri="{FF2B5EF4-FFF2-40B4-BE49-F238E27FC236}">
-                <a16:creationId xmlns:a16="http://schemas.microsoft.com/office/drawing/2014/main" id="{1B5B1FDD-4B48-4E38-8327-48A09E0EBD66}"/>
+                <a16:creationId xmlns:a16="http://schemas.microsoft.com/office/drawing/2014/main" id="{8F594075-9AD0-4248-AC1F-435DCDB89F03}"/>
               </a:ext>
             </a:extLst>
           </p:cNvPr>
@@ -33587,7 +33631,7 @@
           <p:cNvPr id="18" name="Shape 16">
             <a:extLst xmlns:a="http://schemas.openxmlformats.org/drawingml/2006/main">
               <a:ext uri="{FF2B5EF4-FFF2-40B4-BE49-F238E27FC236}">
-                <a16:creationId xmlns:a16="http://schemas.microsoft.com/office/drawing/2014/main" id="{D29D0BC3-FBAA-4064-B337-1D9BE54FCDD0}"/>
+                <a16:creationId xmlns:a16="http://schemas.microsoft.com/office/drawing/2014/main" id="{4A75E002-7DCB-4E25-B357-4084DE856003}"/>
               </a:ext>
             </a:extLst>
           </p:cNvPr>
@@ -33625,7 +33669,7 @@
           <p:cNvPr id="19" name="Text 17">
             <a:extLst xmlns:a="http://schemas.openxmlformats.org/drawingml/2006/main">
               <a:ext uri="{FF2B5EF4-FFF2-40B4-BE49-F238E27FC236}">
-                <a16:creationId xmlns:a16="http://schemas.microsoft.com/office/drawing/2014/main" id="{92E28994-D84F-476D-9831-E9E38EA236D8}"/>
+                <a16:creationId xmlns:a16="http://schemas.microsoft.com/office/drawing/2014/main" id="{9802F6FF-FEAB-4C01-BD0F-B6B615E970C0}"/>
               </a:ext>
             </a:extLst>
           </p:cNvPr>
@@ -33670,7 +33714,7 @@
           <p:cNvPr id="20" name="Text 18">
             <a:extLst xmlns:a="http://schemas.openxmlformats.org/drawingml/2006/main">
               <a:ext uri="{FF2B5EF4-FFF2-40B4-BE49-F238E27FC236}">
-                <a16:creationId xmlns:a16="http://schemas.microsoft.com/office/drawing/2014/main" id="{D5A8FFDD-3D77-4330-BB27-46C7CEFF4F86}"/>
+                <a16:creationId xmlns:a16="http://schemas.microsoft.com/office/drawing/2014/main" id="{A62FA1B8-3C9B-4688-8282-403A3F3D5E46}"/>
               </a:ext>
             </a:extLst>
           </p:cNvPr>
@@ -33715,7 +33759,7 @@
           <p:cNvPr id="21" name="Text 19">
             <a:extLst xmlns:a="http://schemas.openxmlformats.org/drawingml/2006/main">
               <a:ext uri="{FF2B5EF4-FFF2-40B4-BE49-F238E27FC236}">
-                <a16:creationId xmlns:a16="http://schemas.microsoft.com/office/drawing/2014/main" id="{99586589-4474-48E8-9A72-FD0284DF2845}"/>
+                <a16:creationId xmlns:a16="http://schemas.microsoft.com/office/drawing/2014/main" id="{44331F44-637D-453A-BD2E-D54E961E3506}"/>
               </a:ext>
             </a:extLst>
           </p:cNvPr>
@@ -33763,7 +33807,7 @@
           <p:cNvPr id="22" name="Text 20">
             <a:extLst xmlns:a="http://schemas.openxmlformats.org/drawingml/2006/main">
               <a:ext uri="{FF2B5EF4-FFF2-40B4-BE49-F238E27FC236}">
-                <a16:creationId xmlns:a16="http://schemas.microsoft.com/office/drawing/2014/main" id="{E195D87F-D0A8-42BA-A875-B2DF2EC62CD1}"/>
+                <a16:creationId xmlns:a16="http://schemas.microsoft.com/office/drawing/2014/main" id="{36F6A371-4DFA-499A-97D5-1272AF05145A}"/>
               </a:ext>
             </a:extLst>
           </p:cNvPr>
@@ -33808,7 +33852,7 @@
           <p:cNvPr id="23" name="Shape 21">
             <a:extLst xmlns:a="http://schemas.openxmlformats.org/drawingml/2006/main">
               <a:ext uri="{FF2B5EF4-FFF2-40B4-BE49-F238E27FC236}">
-                <a16:creationId xmlns:a16="http://schemas.microsoft.com/office/drawing/2014/main" id="{39CC4B74-D91D-483B-9330-C0276FC2D1F6}"/>
+                <a16:creationId xmlns:a16="http://schemas.microsoft.com/office/drawing/2014/main" id="{F32DE538-5691-46F8-8B2C-CB017EF00172}"/>
               </a:ext>
             </a:extLst>
           </p:cNvPr>
@@ -33855,7 +33899,7 @@
           <p:cNvPr id="24" name="Text 22">
             <a:extLst xmlns:a="http://schemas.openxmlformats.org/drawingml/2006/main">
               <a:ext uri="{FF2B5EF4-FFF2-40B4-BE49-F238E27FC236}">
-                <a16:creationId xmlns:a16="http://schemas.microsoft.com/office/drawing/2014/main" id="{6DCBBAAA-6F22-4969-8B5E-F2034482E271}"/>
+                <a16:creationId xmlns:a16="http://schemas.microsoft.com/office/drawing/2014/main" id="{18428371-CC92-4303-92E9-6792FC4F674B}"/>
               </a:ext>
             </a:extLst>
           </p:cNvPr>
@@ -33900,7 +33944,7 @@
           <p:cNvPr id="25" name="Text 23">
             <a:extLst xmlns:a="http://schemas.openxmlformats.org/drawingml/2006/main">
               <a:ext uri="{FF2B5EF4-FFF2-40B4-BE49-F238E27FC236}">
-                <a16:creationId xmlns:a16="http://schemas.microsoft.com/office/drawing/2014/main" id="{6B19254B-791C-4E70-AA15-555FD3FC200E}"/>
+                <a16:creationId xmlns:a16="http://schemas.microsoft.com/office/drawing/2014/main" id="{F440EF11-63C2-4579-9D70-6BB4CFCD1DDC}"/>
               </a:ext>
             </a:extLst>
           </p:cNvPr>
@@ -33967,7 +34011,7 @@
           <p:cNvPr id="26" name="Shape 24">
             <a:extLst xmlns:a="http://schemas.openxmlformats.org/drawingml/2006/main">
               <a:ext uri="{FF2B5EF4-FFF2-40B4-BE49-F238E27FC236}">
-                <a16:creationId xmlns:a16="http://schemas.microsoft.com/office/drawing/2014/main" id="{239D225B-62FF-4C5F-9873-C2A08F25BF12}"/>
+                <a16:creationId xmlns:a16="http://schemas.microsoft.com/office/drawing/2014/main" id="{F3B4142A-904F-476B-A883-DBBC7C51180A}"/>
               </a:ext>
             </a:extLst>
           </p:cNvPr>
@@ -34014,7 +34058,7 @@
           <p:cNvPr id="27" name="Text 25">
             <a:extLst xmlns:a="http://schemas.openxmlformats.org/drawingml/2006/main">
               <a:ext uri="{FF2B5EF4-FFF2-40B4-BE49-F238E27FC236}">
-                <a16:creationId xmlns:a16="http://schemas.microsoft.com/office/drawing/2014/main" id="{C9EA20D0-0F9E-4AFC-88C0-054380990BC8}"/>
+                <a16:creationId xmlns:a16="http://schemas.microsoft.com/office/drawing/2014/main" id="{B1DA1710-BE5A-44F8-A235-3D561FAF4642}"/>
               </a:ext>
             </a:extLst>
           </p:cNvPr>
@@ -34059,7 +34103,7 @@
           <p:cNvPr id="28" name="Text 26">
             <a:extLst xmlns:a="http://schemas.openxmlformats.org/drawingml/2006/main">
               <a:ext uri="{FF2B5EF4-FFF2-40B4-BE49-F238E27FC236}">
-                <a16:creationId xmlns:a16="http://schemas.microsoft.com/office/drawing/2014/main" id="{F76B8F14-F7D4-413F-90F8-5C73937622AF}"/>
+                <a16:creationId xmlns:a16="http://schemas.microsoft.com/office/drawing/2014/main" id="{57B7E323-6733-488D-8394-1724C1E2761A}"/>
               </a:ext>
             </a:extLst>
           </p:cNvPr>
@@ -34126,7 +34170,7 @@
           <p:cNvPr id="29" name="Shape 27">
             <a:extLst xmlns:a="http://schemas.openxmlformats.org/drawingml/2006/main">
               <a:ext uri="{FF2B5EF4-FFF2-40B4-BE49-F238E27FC236}">
-                <a16:creationId xmlns:a16="http://schemas.microsoft.com/office/drawing/2014/main" id="{3577478E-B166-42AA-97CF-50E38A95BED3}"/>
+                <a16:creationId xmlns:a16="http://schemas.microsoft.com/office/drawing/2014/main" id="{9143FEE1-ABC9-43F9-959F-4D5D83C6AADC}"/>
               </a:ext>
             </a:extLst>
           </p:cNvPr>
@@ -34173,7 +34217,7 @@
           <p:cNvPr id="30" name="Text 28">
             <a:extLst xmlns:a="http://schemas.openxmlformats.org/drawingml/2006/main">
               <a:ext uri="{FF2B5EF4-FFF2-40B4-BE49-F238E27FC236}">
-                <a16:creationId xmlns:a16="http://schemas.microsoft.com/office/drawing/2014/main" id="{3993FD70-F8AA-41AD-96A1-357AB7E18897}"/>
+                <a16:creationId xmlns:a16="http://schemas.microsoft.com/office/drawing/2014/main" id="{4EC6C7B2-F818-4FC2-92AF-13C93CD11460}"/>
               </a:ext>
             </a:extLst>
           </p:cNvPr>
@@ -34218,7 +34262,7 @@
           <p:cNvPr id="31" name="Text 29">
             <a:extLst xmlns:a="http://schemas.openxmlformats.org/drawingml/2006/main">
               <a:ext uri="{FF2B5EF4-FFF2-40B4-BE49-F238E27FC236}">
-                <a16:creationId xmlns:a16="http://schemas.microsoft.com/office/drawing/2014/main" id="{F5A484B2-9A1E-46F2-AD72-D59D181762DB}"/>
+                <a16:creationId xmlns:a16="http://schemas.microsoft.com/office/drawing/2014/main" id="{572A2EDE-6786-4553-8A54-A742E12DA182}"/>
               </a:ext>
             </a:extLst>
           </p:cNvPr>
@@ -34285,7 +34329,7 @@
           <p:cNvPr id="32" name="Shape 30">
             <a:extLst xmlns:a="http://schemas.openxmlformats.org/drawingml/2006/main">
               <a:ext uri="{FF2B5EF4-FFF2-40B4-BE49-F238E27FC236}">
-                <a16:creationId xmlns:a16="http://schemas.microsoft.com/office/drawing/2014/main" id="{C928D6C3-6AB2-4D25-A6D8-0E8FB58F86DA}"/>
+                <a16:creationId xmlns:a16="http://schemas.microsoft.com/office/drawing/2014/main" id="{D4E327FE-93BF-42BA-AD2E-8ABFC7DEEDE3}"/>
               </a:ext>
             </a:extLst>
           </p:cNvPr>
@@ -34332,7 +34376,7 @@
           <p:cNvPr id="33" name="Text 31">
             <a:extLst xmlns:a="http://schemas.openxmlformats.org/drawingml/2006/main">
               <a:ext uri="{FF2B5EF4-FFF2-40B4-BE49-F238E27FC236}">
-                <a16:creationId xmlns:a16="http://schemas.microsoft.com/office/drawing/2014/main" id="{0CF5A98E-0EF8-49D7-8599-AEB361648E2A}"/>
+                <a16:creationId xmlns:a16="http://schemas.microsoft.com/office/drawing/2014/main" id="{7875D040-091A-4128-8950-B66B2863EC6A}"/>
               </a:ext>
             </a:extLst>
           </p:cNvPr>
@@ -34377,7 +34421,7 @@
           <p:cNvPr id="34" name="Text 32">
             <a:extLst xmlns:a="http://schemas.openxmlformats.org/drawingml/2006/main">
               <a:ext uri="{FF2B5EF4-FFF2-40B4-BE49-F238E27FC236}">
-                <a16:creationId xmlns:a16="http://schemas.microsoft.com/office/drawing/2014/main" id="{F411439B-33E6-4F76-AF6B-063D2EA03E34}"/>
+                <a16:creationId xmlns:a16="http://schemas.microsoft.com/office/drawing/2014/main" id="{DB3B3BBD-112B-40F8-A3E8-7FE22EB813DD}"/>
               </a:ext>
             </a:extLst>
           </p:cNvPr>
@@ -34444,7 +34488,7 @@
           <p:cNvPr id="35" name="Shape 33">
             <a:extLst xmlns:a="http://schemas.openxmlformats.org/drawingml/2006/main">
               <a:ext uri="{FF2B5EF4-FFF2-40B4-BE49-F238E27FC236}">
-                <a16:creationId xmlns:a16="http://schemas.microsoft.com/office/drawing/2014/main" id="{32ADCB52-436C-4D8F-AC3D-4A939254E20E}"/>
+                <a16:creationId xmlns:a16="http://schemas.microsoft.com/office/drawing/2014/main" id="{6FBBC74B-E676-4138-BDDF-BEB9D6788753}"/>
               </a:ext>
             </a:extLst>
           </p:cNvPr>
@@ -34491,7 +34535,7 @@
           <p:cNvPr id="36" name="Text 34">
             <a:extLst xmlns:a="http://schemas.openxmlformats.org/drawingml/2006/main">
               <a:ext uri="{FF2B5EF4-FFF2-40B4-BE49-F238E27FC236}">
-                <a16:creationId xmlns:a16="http://schemas.microsoft.com/office/drawing/2014/main" id="{5274F13A-2544-48EA-AB47-BD4097B25C3C}"/>
+                <a16:creationId xmlns:a16="http://schemas.microsoft.com/office/drawing/2014/main" id="{0A08448E-5E40-4FB3-80B8-72A4EAAEFB14}"/>
               </a:ext>
             </a:extLst>
           </p:cNvPr>
@@ -34536,7 +34580,7 @@
           <p:cNvPr id="37" name="Text 35">
             <a:extLst xmlns:a="http://schemas.openxmlformats.org/drawingml/2006/main">
               <a:ext uri="{FF2B5EF4-FFF2-40B4-BE49-F238E27FC236}">
-                <a16:creationId xmlns:a16="http://schemas.microsoft.com/office/drawing/2014/main" id="{E86FFDD6-7FD4-4934-A26D-AFED3BDDFF67}"/>
+                <a16:creationId xmlns:a16="http://schemas.microsoft.com/office/drawing/2014/main" id="{C7114E29-8120-487B-AB25-F9213EEDD96E}"/>
               </a:ext>
             </a:extLst>
           </p:cNvPr>
@@ -34603,7 +34647,7 @@
           <p:cNvPr id="38" name="Text 36">
             <a:extLst xmlns:a="http://schemas.openxmlformats.org/drawingml/2006/main">
               <a:ext uri="{FF2B5EF4-FFF2-40B4-BE49-F238E27FC236}">
-                <a16:creationId xmlns:a16="http://schemas.microsoft.com/office/drawing/2014/main" id="{AB36953F-13D8-4CAC-8371-72B995F813D6}"/>
+                <a16:creationId xmlns:a16="http://schemas.microsoft.com/office/drawing/2014/main" id="{73EFA6ED-0EB3-4DE6-ADF2-4ACACD5FEF38}"/>
               </a:ext>
             </a:extLst>
           </p:cNvPr>
@@ -34649,7 +34693,7 @@
     </p:spTree>
     <p:extLst>
       <p:ext uri="{BB962C8B-B14F-4D97-AF65-F5344CB8AC3E}">
-        <p14:creationId xmlns:p14="http://schemas.microsoft.com/office/powerpoint/2010/main" val="146982927"/>
+        <p14:creationId xmlns:p14="http://schemas.microsoft.com/office/powerpoint/2010/main" val="449467945"/>
       </p:ext>
     </p:extLst>
   </p:cSld>

--- a/paper/slides/compiling-recurrent-agent-workflows-into-guarded-programs-detailed.pptx
+++ b/paper/slides/compiling-recurrent-agent-workflows-into-guarded-programs-detailed.pptx
@@ -3922,7 +3922,9 @@
           <a:noFill xmlns:a="http://schemas.openxmlformats.org/drawingml/2006/main"/>
         </p:spPr>
         <p:txBody>
-          <a:bodyPr xmlns:a="http://schemas.openxmlformats.org/drawingml/2006/main" wrap="square" lIns="0" tIns="0" rIns="0" bIns="0" anchor="ctr"/>
+          <a:bodyPr xmlns:a="http://schemas.openxmlformats.org/drawingml/2006/main" wrap="square" lIns="0" tIns="0" rIns="0" bIns="0" anchor="ctr">
+            <a:normAutofit/>
+          </a:bodyPr>
           <a:lstStyle xmlns:a="http://schemas.openxmlformats.org/drawingml/2006/main"/>
           <a:p xmlns:a="http://schemas.openxmlformats.org/drawingml/2006/main">
             <a:pPr marL="0" indent="0">
@@ -3932,7 +3934,7 @@
               <a:buNone/>
             </a:pPr>
             <a:r>
-              <a:rPr sz="3700" b="1">
+              <a:rPr sz="3300" b="1">
                 <a:solidFill>
                   <a:srgbClr val="FFFFFF"/>
                 </a:solidFill>
@@ -3940,7 +3942,7 @@
                 <a:ea typeface="Cambria"/>
                 <a:cs typeface="Cambria"/>
               </a:rPr>
-              <a:t>Compiling Recurrent Agent Workflows into Guarded Programs</a:t>
+              <a:t>From Traces to Guarded Programs: Evidence-Gated Compilation of Recurrent Agent Workflows</a:t>
             </a:r>
           </a:p>
         </p:txBody>
@@ -24559,7 +24561,7 @@
                 <a:ea typeface="Calibri"/>
                 <a:cs typeface="Calibri"/>
               </a:rPr>
-              <a:t>Compiling Recurrent Agent Workflows into Guarded Programs  ·  artifact includes pinned data snapshots, raw results, and an adversarial self-review</a:t>
+              <a:t>From Traces to Guarded Programs: Evidence-Gated Compilation of Recurrent Agent Workflows  ·  artifact includes pinned data snapshots, raw results, and an adversarial self-review</a:t>
             </a:r>
           </a:p>
         </p:txBody>

--- a/paper/slides/compiling-recurrent-agent-workflows-into-guarded-programs-detailed.pptx
+++ b/paper/slides/compiling-recurrent-agent-workflows-into-guarded-programs-detailed.pptx
@@ -14044,7 +14044,7 @@
                 <a:ea typeface="Cambria"/>
                 <a:cs typeface="Cambria"/>
               </a:rPr>
-              <a:t>Provenance succeeds; certification does not</a:t>
+              <a:t>Replay passes; the gate still refuses</a:t>
             </a:r>
           </a:p>
         </p:txBody>
@@ -14095,7 +14095,7 @@
                 <a:ea typeface="Calibri"/>
                 <a:cs typeface="Calibri"/>
               </a:rPr>
-              <a:t>Recurrence is fragmented: 714 candidate families exist, only 32 have support of at least five, and the best reaches 26 groups.</a:t>
+              <a:t>One NESTFUL trace looks like an obvious macro:</a:t>
             </a:r>
           </a:p>
           <a:p xmlns:a="http://schemas.openxmlformats.org/drawingml/2006/main">
@@ -14117,7 +14117,7 @@
                 <a:ea typeface="Calibri"/>
                 <a:cs typeface="Calibri"/>
               </a:rPr>
-              <a:t>Of 32 attempted families, 12 synthesize. Their 36 held-out windows give 24 passes, 12 abstentions and zero wrong executions.</a:t>
+              <a:t>subtract(60,50) → divide(result,50) → multiply(result,100)</a:t>
             </a:r>
           </a:p>
           <a:p xmlns:a="http://schemas.openxmlformats.org/drawingml/2006/main">
@@ -14139,7 +14139,7 @@
                 <a:ea typeface="Calibri"/>
                 <a:cs typeface="Calibri"/>
               </a:rPr>
-              <a:t>Zero wrong does not certify the programs. The gate needs 92 zero-violation groups, so every family retires.</a:t>
+              <a:t>Grounded, executable, and recurrent at the raw sequence level (33 records).</a:t>
             </a:r>
           </a:p>
         </p:txBody>
@@ -14234,7 +14234,7 @@
                 <a:ea typeface="Calibri"/>
                 <a:cs typeface="Calibri"/>
               </a:rPr>
-              <a:t>A scientifically useful negative result. </a:t>
+              <a:t>Naive rule: recurrence + replay → ship.</a:t>
             </a:r>
             <a:r>
               <a:rPr sz="1200">
@@ -14245,7 +14245,7 @@
                 <a:ea typeface="Calibri"/>
                 <a:cs typeface="Calibri"/>
               </a:rPr>
-              <a:t>It is what distinguishes a guarded compiler from a recurrence-only macro miner — and it exposes the data requirement instead of hiding it in a heuristic.</a:t>
+              <a:t>GAC: 26 groups &lt; 92 required → 0 certifiable families → RETIRE to baseline.</a:t>
             </a:r>
           </a:p>
         </p:txBody>
@@ -14353,7 +14353,7 @@
                 <a:ea typeface="Cambria"/>
                 <a:cs typeface="Cambria"/>
               </a:rPr>
-              <a:t>1,207 / 1,415</a:t>
+              <a:t>5,531 / 5,746</a:t>
             </a:r>
           </a:p>
         </p:txBody>
@@ -14401,7 +14401,7 @@
                 <a:ea typeface="Calibri"/>
                 <a:cs typeface="Calibri"/>
               </a:rPr>
-              <a:t>complete groundable windows (85.3%)</a:t>
+              <a:t>candidate producers (96.3%)</a:t>
             </a:r>
           </a:p>
         </p:txBody>
@@ -14493,7 +14493,7 @@
                 <a:ea typeface="Cambria"/>
                 <a:cs typeface="Cambria"/>
               </a:rPr>
-              <a:t>12 / 32</a:t>
+              <a:t>33</a:t>
             </a:r>
           </a:p>
         </p:txBody>
@@ -14541,7 +14541,7 @@
                 <a:ea typeface="Calibri"/>
                 <a:cs typeface="Calibri"/>
               </a:rPr>
-              <a:t>families synthesized</a:t>
+              <a:t>raw sequence support</a:t>
             </a:r>
           </a:p>
         </p:txBody>
@@ -14681,7 +14681,7 @@
                 <a:ea typeface="Calibri"/>
                 <a:cs typeface="Calibri"/>
               </a:rPr>
-              <a:t>held-out pass / abstain / wrong</a:t>
+              <a:t>replay pass / abstain / wrong</a:t>
             </a:r>
           </a:p>
         </p:txBody>
@@ -14773,7 +14773,7 @@
                 <a:ea typeface="Cambria"/>
                 <a:cs typeface="Cambria"/>
               </a:rPr>
-              <a:t>0</a:t>
+              <a:t>26 / 92</a:t>
             </a:r>
           </a:p>
         </p:txBody>
@@ -14821,7 +14821,7 @@
                 <a:ea typeface="Calibri"/>
                 <a:cs typeface="Calibri"/>
               </a:rPr>
-              <a:t>certifiable families</a:t>
+              <a:t>best family / gate minimum</a:t>
             </a:r>
           </a:p>
         </p:txBody>

--- a/paper/slides/compiling-recurrent-agent-workflows-into-guarded-programs-detailed.pptx
+++ b/paper/slides/compiling-recurrent-agent-workflows-into-guarded-programs-detailed.pptx
@@ -13999,7 +13999,7 @@
                 <a:ea typeface="Calibri"/>
                 <a:cs typeface="Calibri"/>
               </a:rPr>
-              <a:t>RESULTS  ·  RQ1 AND RQ3  ·  §5.1  ·  TABLE 4</a:t>
+              <a:t>RESULTS  ·  RQ2  ·  §5.3  ·  TABLE 6</a:t>
             </a:r>
           </a:p>
         </p:txBody>
@@ -14044,7 +14044,7 @@
                 <a:ea typeface="Cambria"/>
                 <a:cs typeface="Cambria"/>
               </a:rPr>
-              <a:t>Replay passes; the gate still refuses</a:t>
+              <a:t>The full trace repeats; the boundary does not</a:t>
             </a:r>
           </a:p>
         </p:txBody>
@@ -14095,7 +14095,7 @@
                 <a:ea typeface="Calibri"/>
                 <a:cs typeface="Calibri"/>
               </a:rPr>
-              <a:t>One NESTFUL trace looks like an obvious macro:</a:t>
+              <a:t>A real GitHub trace looks like an obvious macro:</a:t>
             </a:r>
           </a:p>
           <a:p xmlns:a="http://schemas.openxmlformats.org/drawingml/2006/main">
@@ -14117,7 +14117,7 @@
                 <a:ea typeface="Calibri"/>
                 <a:cs typeface="Calibri"/>
               </a:rPr>
-              <a:t>subtract(60,50) → divide(result,50) → multiply(result,100)</a:t>
+              <a:t>issue #6602: record → labels → comments(limit=3)</a:t>
             </a:r>
           </a:p>
           <a:p xmlns:a="http://schemas.openxmlformats.org/drawingml/2006/main">
@@ -14139,7 +14139,7 @@
                 <a:ea typeface="Calibri"/>
                 <a:cs typeface="Calibri"/>
               </a:rPr>
-              <a:t>Grounded, executable, and recurrent at the raw sequence level (33 records).</a:t>
+              <a:t>45/45 tool replays; issue #6602 loses its Markdown URL.</a:t>
             </a:r>
           </a:p>
         </p:txBody>
@@ -14234,7 +14234,7 @@
                 <a:ea typeface="Calibri"/>
                 <a:cs typeface="Calibri"/>
               </a:rPr>
-              <a:t>Naive rule: recurrence + replay → ship.</a:t>
+              <a:t>Naive rule: recurrence + replay + one request → ship.</a:t>
             </a:r>
             <a:r>
               <a:rPr sz="1200">
@@ -14245,7 +14245,7 @@
                 <a:ea typeface="Calibri"/>
                 <a:cs typeface="Calibri"/>
               </a:rPr>
-              <a:t>GAC: 26 groups &lt; 92 required → 0 certifiable families → RETIRE to baseline.</a:t>
+              <a:t>GAC: ungroundable comments limit → keep comments and rendering with the agent.</a:t>
             </a:r>
           </a:p>
         </p:txBody>
@@ -14353,7 +14353,7 @@
                 <a:ea typeface="Cambria"/>
                 <a:cs typeface="Cambria"/>
               </a:rPr>
-              <a:t>5,531 / 5,746</a:t>
+              <a:t>132</a:t>
             </a:r>
           </a:p>
         </p:txBody>
@@ -14401,7 +14401,7 @@
                 <a:ea typeface="Calibri"/>
                 <a:cs typeface="Calibri"/>
               </a:rPr>
-              <a:t>candidate producers (96.3%)</a:t>
+              <a:t>discovery traces</a:t>
             </a:r>
           </a:p>
         </p:txBody>
@@ -14493,7 +14493,7 @@
                 <a:ea typeface="Cambria"/>
                 <a:cs typeface="Cambria"/>
               </a:rPr>
-              <a:t>33</a:t>
+              <a:t>116</a:t>
             </a:r>
           </a:p>
         </p:txBody>
@@ -14541,7 +14541,7 @@
                 <a:ea typeface="Calibri"/>
                 <a:cs typeface="Calibri"/>
               </a:rPr>
-              <a:t>raw sequence support</a:t>
+              <a:t>full-candidate support windows</a:t>
             </a:r>
           </a:p>
         </p:txBody>
@@ -14633,7 +14633,7 @@
                 <a:ea typeface="Cambria"/>
                 <a:cs typeface="Cambria"/>
               </a:rPr>
-              <a:t>24 / 12 / 0</a:t>
+              <a:t>92 / 92</a:t>
             </a:r>
           </a:p>
         </p:txBody>
@@ -14681,7 +14681,7 @@
                 <a:ea typeface="Calibri"/>
                 <a:cs typeface="Calibri"/>
               </a:rPr>
-              <a:t>replay pass / abstain / wrong</a:t>
+              <a:t>GAC calibration groups</a:t>
             </a:r>
           </a:p>
         </p:txBody>
@@ -14773,7 +14773,7 @@
                 <a:ea typeface="Cambria"/>
                 <a:cs typeface="Cambria"/>
               </a:rPr>
-              <a:t>26 / 92</a:t>
+              <a:t>18 / 18</a:t>
             </a:r>
           </a:p>
         </p:txBody>
@@ -14821,7 +14821,7 @@
                 <a:ea typeface="Calibri"/>
                 <a:cs typeface="Calibri"/>
               </a:rPr>
-              <a:t>best family / gate minimum</a:t>
+              <a:t>checked-rendered answers</a:t>
             </a:r>
           </a:p>
         </p:txBody>

--- a/paper/slides/compiling-recurrent-agent-workflows-into-guarded-programs-detailed.pptx
+++ b/paper/slides/compiling-recurrent-agent-workflows-into-guarded-programs-detailed.pptx
@@ -7919,7 +7919,7 @@
                 <a:ea typeface="Calibri"/>
                 <a:cs typeface="Calibri"/>
               </a:rPr>
-              <a:t>METHOD  ·  RUNTIME  ·  §3.7 AND ALGORITHM 4</a:t>
+              <a:t>METHOD  ·  RUNTIME  ·  §3.8 AND ALGORITHM 4</a:t>
             </a:r>
           </a:p>
         </p:txBody>
@@ -8894,7 +8894,7 @@
                 <a:ea typeface="Calibri"/>
                 <a:cs typeface="Calibri"/>
               </a:rPr>
-              <a:t>DISPATCH IS SELECTIVE — SIX CHECKS, THEN ONE OF SEVEN TERMINAL EDGES</a:t>
+              <a:t>DISPATCH IS SELECTIVE — SIX CHECKS, THEN ONE OF THREE OUTCOMES</a:t>
             </a:r>
           </a:p>
         </p:txBody>
@@ -9681,7 +9681,7 @@
                 <a:ea typeface="Cambria"/>
                 <a:cs typeface="Cambria"/>
               </a:rPr>
-              <a:t>5</a:t>
+              <a:t>n</a:t>
             </a:r>
           </a:p>
         </p:txBody>
@@ -9866,7 +9866,7 @@
                 <a:ea typeface="Cambria"/>
                 <a:cs typeface="Cambria"/>
               </a:rPr>
-              <a:t>1</a:t>
+              <a:t>n</a:t>
             </a:r>
           </a:p>
         </p:txBody>
@@ -9959,7 +9959,7 @@
                 <a:ea typeface="Calibri"/>
                 <a:cs typeface="Calibri"/>
               </a:rPr>
-              <a:t>A post-commit failure. An external commitment happened — the runtime does not feign rollback.</a:t>
+              <a:t>A failed abort, failed commit, or post-commit failure — reversibility cannot be attested, so no rollback is feigned.</a:t>
             </a:r>
           </a:p>
         </p:txBody>
@@ -10218,7 +10218,7 @@
                 <a:ea typeface="Calibri"/>
                 <a:cs typeface="Calibri"/>
               </a:rPr>
-              <a:t>METHOD  ·  REJECTION POINT 6  ·  §3.5 AND ALGORITHM 3</a:t>
+              <a:t>METHOD  ·  REJECTION POINT 6  ·  §3.6 AND ALGORITHM 3</a:t>
             </a:r>
           </a:p>
         </p:txBody>
@@ -10314,7 +10314,7 @@
                 <a:ea typeface="Calibri"/>
                 <a:cs typeface="Calibri"/>
               </a:rPr>
-              <a:t>The score model and the eleven-threshold grid are frozen before any calibration group is seen. That is what makes a union bound legitimate.</a:t>
+              <a:t>The score model and the eleven-threshold grid are frozen before any calibration group is seen — the score fitted on development groups only. That is what makes a union bound legitimate.</a:t>
             </a:r>
           </a:p>
           <a:p xmlns:a="http://schemas.openxmlformats.org/drawingml/2006/main">
@@ -10336,7 +10336,7 @@
                 <a:ea typeface="Calibri"/>
                 <a:cs typeface="Calibri"/>
               </a:rPr>
-              <a:t>For each threshold the compiler computes a one-sided Clopper–Pearson upper bound and selects the largest-coverage admissible one.</a:t>
+              <a:t>For each threshold the compiler counts dispatched groups that were wrong, computes a one-sided Clopper–Pearson upper bound, and selects the largest-coverage admissible one.</a:t>
             </a:r>
           </a:p>
           <a:p xmlns:a="http://schemas.openxmlformats.org/drawingml/2006/main">
@@ -12724,7 +12724,7 @@
                 <a:ea typeface="Calibri"/>
                 <a:cs typeface="Calibri"/>
               </a:rPr>
-              <a:t>METHODOLOGY  ·  §4.1  ·  TABLE 3</a:t>
+              <a:t>METHODOLOGY  ·  §4.1  ·  TABLE 5</a:t>
             </a:r>
           </a:p>
         </p:txBody>
@@ -13999,7 +13999,7 @@
                 <a:ea typeface="Calibri"/>
                 <a:cs typeface="Calibri"/>
               </a:rPr>
-              <a:t>RESULTS  ·  RQ2  ·  §5.3  ·  TABLE 6</a:t>
+              <a:t>RESULTS  ·  RQ2  ·  §5.3  ·  TABLE 9</a:t>
             </a:r>
           </a:p>
         </p:txBody>
@@ -14985,7 +14985,7 @@
                 <a:ea typeface="Calibri"/>
                 <a:cs typeface="Calibri"/>
               </a:rPr>
-              <a:t>RESULTS  ·  RQ6  ·  §5.2  ·  TABLE 5</a:t>
+              <a:t>RESULTS  ·  RQ6  ·  §5.2  ·  TABLE 7</a:t>
             </a:r>
           </a:p>
         </p:txBody>
@@ -15982,7 +15982,7 @@
                 <a:ea typeface="Calibri"/>
                 <a:cs typeface="Calibri"/>
               </a:rPr>
-              <a:t>RESULTS  ·  RQ2  ·  §5.3  ·  TABLE 6</a:t>
+              <a:t>RESULTS  ·  RQ2  ·  §5.3  ·  TABLE 8</a:t>
             </a:r>
           </a:p>
         </p:txBody>
@@ -18142,7 +18142,7 @@
                 <a:ea typeface="Calibri"/>
                 <a:cs typeface="Calibri"/>
               </a:rPr>
-              <a:t>RESULTS  ·  THE DEPTH TRADE-OFF  ·  §5.3  ·  TABLES 6 AND 7</a:t>
+              <a:t>RESULTS  ·  THE DEPTH TRADE-OFF  ·  §5.3  ·  TABLES 8 AND 9</a:t>
             </a:r>
           </a:p>
         </p:txBody>
@@ -19484,7 +19484,7 @@
                 <a:ea typeface="Calibri"/>
                 <a:cs typeface="Calibri"/>
               </a:rPr>
-              <a:t>RESULTS  ·  RQ4  ·  §5.4  ·  FIGURE 6</a:t>
+              <a:t>RESULTS  ·  RQ4  ·  §5.4  ·  FIGURE 18</a:t>
             </a:r>
           </a:p>
         </p:txBody>
@@ -20186,7 +20186,7 @@
                 <a:ea typeface="Calibri"/>
                 <a:cs typeface="Calibri"/>
               </a:rPr>
-              <a:t>RESULTS  ·  THE COMPARATOR THAT MATTERS  ·  §5.6  ·  TABLE 8</a:t>
+              <a:t>RESULTS  ·  THE COMPARATOR THAT MATTERS  ·  §5.6  ·  TABLE 10</a:t>
             </a:r>
           </a:p>
         </p:txBody>
@@ -22453,7 +22453,7 @@
                 <a:ea typeface="Calibri"/>
                 <a:cs typeface="Calibri"/>
               </a:rPr>
-              <a:t>RESULTS  ·  FAIR PLACEMENT AND BOUNDED GEPA  ·  §5.7–5.8  ·  TABLES 10 AND 11</a:t>
+              <a:t>RESULTS  ·  FAIR PLACEMENT AND BOUNDED GEPA  ·  §5.7–5.8  ·  TABLES 12 AND 13</a:t>
             </a:r>
           </a:p>
         </p:txBody>
@@ -24698,7 +24698,7 @@
                 <a:ea typeface="Calibri"/>
                 <a:cs typeface="Calibri"/>
               </a:rPr>
-              <a:t>RESULTS  ·  RQ5  ·  §3.6 AND §5.9  ·  TABLE 15</a:t>
+              <a:t>RESULTS  ·  RQ5  ·  §3.7 AND §5.9  ·  TABLE 17</a:t>
             </a:r>
           </a:p>
         </p:txBody>
@@ -34724,7 +34724,7 @@
                 <a:ea typeface="Calibri"/>
                 <a:cs typeface="Calibri"/>
               </a:rPr>
-              <a:t>METHOD  ·  ARCHITECTURE  ·  FIGURE 1</a:t>
+              <a:t>METHOD  ·  ARCHITECTURE  ·  FIGURE 6</a:t>
             </a:r>
           </a:p>
         </p:txBody>

--- a/paper/slides/compiling-recurrent-agent-workflows-into-guarded-programs-detailed.pptx
+++ b/paper/slides/compiling-recurrent-agent-workflows-into-guarded-programs-detailed.pptx
@@ -15242,7 +15242,7 @@
                 <a:ea typeface="Calibri"/>
                 <a:cs typeface="Calibri"/>
               </a:rPr>
-              <a:t>The two new families compile verified three-read pre-model programs; the original issue family retains its conservative two-read prefix. Both newer families are cache-cold in every arm, so part of the 32.0–75.3% cost range is prompt-cache warmth rather than compiled depth; provider-side break-even is 411, 182, and 181 episodes against 132 paid discovery episodes each. The study changes decision and tools, but not repository or time: cross-repository and time-forward transfer remain open.</a:t>
+              <a:t>The two new families compile verified three-read pre-model programs; the original issue family retains its conservative two-read prefix. Headroom on the two fixed cohorts attempted 240 model-visible JSON payloads, transformed zero, and saved zero tokens: a boundary-specific negative result, not a rival mechanism for GAC's savings. The study changes decision and tools, not repository or time; cross-repository and time-forward transfer remain open.</a:t>
             </a:r>
           </a:p>
         </p:txBody>
